--- a/納品レポート/ホテル別レポート/hearton_口コミ分析レポート.pptx
+++ b/納品レポート/ホテル別レポート/hearton_口コミ分析レポート.pptx
@@ -186,10 +186,10 @@
                     <c:v>楽天トラベル</c:v>
                   </c:pt>
                   <c:pt idx="2">
-                    <c:v>じゃらん</c:v>
+                    <c:v>Booking.com</c:v>
                   </c:pt>
                   <c:pt idx="3">
-                    <c:v>Booking.com</c:v>
+                    <c:v>じゃらん</c:v>
                   </c:pt>
                   <c:pt idx="4">
                     <c:v>Agoda</c:v>
@@ -208,22 +208,22 @@
                 <c:formatCode>General</c:formatCode>
                 <c:ptCount val="6"/>
                 <c:pt idx="0">
-                  <c:v>9.39</c:v>
+                  <c:v>9.33</c:v>
                 </c:pt>
                 <c:pt idx="1">
-                  <c:v>8.71</c:v>
+                  <c:v>8.79</c:v>
                 </c:pt>
                 <c:pt idx="2">
-                  <c:v>8.53</c:v>
+                  <c:v>8.54</c:v>
                 </c:pt>
                 <c:pt idx="3">
-                  <c:v>8.48</c:v>
+                  <c:v>8.39</c:v>
                 </c:pt>
                 <c:pt idx="4">
-                  <c:v>8.13</c:v>
+                  <c:v>8.25</c:v>
                 </c:pt>
                 <c:pt idx="5">
-                  <c:v>8</c:v>
+                  <c:v>8.18</c:v>
                 </c:pt>
               </c:numCache>
             </c:numRef>
@@ -566,10 +566,10 @@
               <c:numCache>
                 <c:ptCount val="3"/>
                 <c:pt idx="0">
-                  <c:v>115</c:v>
+                  <c:v>116</c:v>
                 </c:pt>
                 <c:pt idx="1">
-                  <c:v>21</c:v>
+                  <c:v>22</c:v>
                 </c:pt>
                 <c:pt idx="2">
                   <c:v>1</c:v>
@@ -795,19 +795,19 @@
                 <c:formatCode>General</c:formatCode>
                 <c:ptCount val="7"/>
                 <c:pt idx="0">
-                  <c:v>57</c:v>
+                  <c:v>59</c:v>
                 </c:pt>
                 <c:pt idx="1">
                   <c:v>11</c:v>
                 </c:pt>
                 <c:pt idx="2">
-                  <c:v>47</c:v>
+                  <c:v>46</c:v>
                 </c:pt>
                 <c:pt idx="3">
                   <c:v>9</c:v>
                 </c:pt>
                 <c:pt idx="4">
-                  <c:v>11</c:v>
+                  <c:v>12</c:v>
                 </c:pt>
                 <c:pt idx="5">
                   <c:v>1</c:v>
@@ -2764,7 +2764,7 @@
                 <a:ea typeface="Arial" pitchFamily="34" charset="-122"/>
                 <a:cs typeface="Arial" pitchFamily="34" charset="-120"/>
               </a:rPr>
-              <a:t>レビュー総数：137件（6サイト）</a:t>
+              <a:t>レビュー総数：139件（6サイト）</a:t>
             </a:r>
             <a:endParaRPr lang="en-US" sz="1000" dirty="0"/>
           </a:p>
@@ -2784,7 +2784,7 @@
                 <a:ea typeface="Arial" pitchFamily="34" charset="-122"/>
                 <a:cs typeface="Arial" pitchFamily="34" charset="-120"/>
               </a:rPr>
-              <a:t>作成日：2026年3月17日</a:t>
+              <a:t>作成日：2026年3月18日</a:t>
             </a:r>
             <a:endParaRPr lang="en-US" sz="1000" dirty="0"/>
           </a:p>
@@ -3330,7 +3330,7 @@
                           <a:ea typeface="Arial" pitchFamily="34" charset="-122"/>
                           <a:cs typeface="Arial" pitchFamily="34" charset="-120"/>
                         </a:rPr>
-                        <a:t>8.62点</a:t>
+                        <a:t>8.63点</a:t>
                       </a:r>
                       <a:endParaRPr lang="en-US" sz="1000" dirty="0">
                         <a:latin typeface="Arial" charset="0"/>
@@ -3604,7 +3604,7 @@
                           <a:ea typeface="Arial" pitchFamily="34" charset="-122"/>
                           <a:cs typeface="Arial" pitchFamily="34" charset="-120"/>
                         </a:rPr>
-                        <a:t>83.9%</a:t>
+                        <a:t>83.5%</a:t>
                       </a:r>
                       <a:endParaRPr lang="en-US" sz="1000" dirty="0">
                         <a:latin typeface="Arial" charset="0"/>
@@ -4084,280 +4084,6 @@
                           <a:ea typeface="Arial" pitchFamily="34" charset="-122"/>
                           <a:cs typeface="Arial" pitchFamily="34" charset="-120"/>
                         </a:rPr>
-                        <a:t>Google平均評価</a:t>
-                      </a:r>
-                      <a:endParaRPr lang="en-US" sz="1000" dirty="0">
-                        <a:latin typeface="Arial" charset="0"/>
-                        <a:ea typeface="Arial" charset="0"/>
-                        <a:cs typeface="Arial" charset="0"/>
-                      </a:endParaRPr>
-                    </a:p>
-                  </a:txBody>
-                  <a:tcPr marL="91440" marR="91440" marT="45720" marB="45720">
-                    <a:lnL w="6350" cap="flat" cmpd="sng" algn="ctr">
-                      <a:solidFill>
-                        <a:srgbClr val="CBD5E1"/>
-                      </a:solidFill>
-                      <a:prstDash val="solid"/>
-                      <a:round/>
-                      <a:headEnd type="none" w="med" len="med"/>
-                      <a:tailEnd type="none" w="med" len="med"/>
-                    </a:lnL>
-                    <a:lnR w="6350" cap="flat" cmpd="sng" algn="ctr">
-                      <a:solidFill>
-                        <a:srgbClr val="CBD5E1"/>
-                      </a:solidFill>
-                      <a:prstDash val="solid"/>
-                      <a:round/>
-                      <a:headEnd type="none" w="med" len="med"/>
-                      <a:tailEnd type="none" w="med" len="med"/>
-                    </a:lnR>
-                    <a:lnT w="6350" cap="flat" cmpd="sng" algn="ctr">
-                      <a:solidFill>
-                        <a:srgbClr val="CBD5E1"/>
-                      </a:solidFill>
-                      <a:prstDash val="solid"/>
-                      <a:round/>
-                      <a:headEnd type="none" w="med" len="med"/>
-                      <a:tailEnd type="none" w="med" len="med"/>
-                    </a:lnT>
-                    <a:lnB w="6350" cap="flat" cmpd="sng" algn="ctr">
-                      <a:solidFill>
-                        <a:srgbClr val="CBD5E1"/>
-                      </a:solidFill>
-                      <a:prstDash val="solid"/>
-                      <a:round/>
-                      <a:headEnd type="none" w="med" len="med"/>
-                      <a:tailEnd type="none" w="med" len="med"/>
-                    </a:lnB>
-                    <a:solidFill>
-                      <a:srgbClr val="FFFFFF"/>
-                    </a:solidFill>
-                  </a:tcPr>
-                </a:tc>
-                <a:tc>
-                  <a:txBody>
-                    <a:bodyPr/>
-                    <a:lstStyle/>
-                    <a:p>
-                      <a:pPr algn="ctr" indent="0" marL="0">
-                        <a:buNone/>
-                      </a:pPr>
-                      <a:r>
-                        <a:rPr lang="en-US" sz="1000" dirty="0">
-                          <a:solidFill>
-                            <a:srgbClr val="64748B"/>
-                          </a:solidFill>
-                          <a:latin typeface="Arial" pitchFamily="34" charset="0"/>
-                          <a:ea typeface="Arial" pitchFamily="34" charset="-122"/>
-                          <a:cs typeface="Arial" pitchFamily="34" charset="-120"/>
-                        </a:rPr>
-                        <a:t>8.0点</a:t>
-                      </a:r>
-                      <a:endParaRPr lang="en-US" sz="1000" dirty="0">
-                        <a:latin typeface="Arial" charset="0"/>
-                        <a:ea typeface="Arial" charset="0"/>
-                        <a:cs typeface="Arial" charset="0"/>
-                      </a:endParaRPr>
-                    </a:p>
-                  </a:txBody>
-                  <a:tcPr marL="91440" marR="91440" marT="45720" marB="45720">
-                    <a:lnL w="6350" cap="flat" cmpd="sng" algn="ctr">
-                      <a:solidFill>
-                        <a:srgbClr val="CBD5E1"/>
-                      </a:solidFill>
-                      <a:prstDash val="solid"/>
-                      <a:round/>
-                      <a:headEnd type="none" w="med" len="med"/>
-                      <a:tailEnd type="none" w="med" len="med"/>
-                    </a:lnL>
-                    <a:lnR w="6350" cap="flat" cmpd="sng" algn="ctr">
-                      <a:solidFill>
-                        <a:srgbClr val="CBD5E1"/>
-                      </a:solidFill>
-                      <a:prstDash val="solid"/>
-                      <a:round/>
-                      <a:headEnd type="none" w="med" len="med"/>
-                      <a:tailEnd type="none" w="med" len="med"/>
-                    </a:lnR>
-                    <a:lnT w="6350" cap="flat" cmpd="sng" algn="ctr">
-                      <a:solidFill>
-                        <a:srgbClr val="CBD5E1"/>
-                      </a:solidFill>
-                      <a:prstDash val="solid"/>
-                      <a:round/>
-                      <a:headEnd type="none" w="med" len="med"/>
-                      <a:tailEnd type="none" w="med" len="med"/>
-                    </a:lnT>
-                    <a:lnB w="6350" cap="flat" cmpd="sng" algn="ctr">
-                      <a:solidFill>
-                        <a:srgbClr val="CBD5E1"/>
-                      </a:solidFill>
-                      <a:prstDash val="solid"/>
-                      <a:round/>
-                      <a:headEnd type="none" w="med" len="med"/>
-                      <a:tailEnd type="none" w="med" len="med"/>
-                    </a:lnB>
-                    <a:solidFill>
-                      <a:srgbClr val="FFFFFF"/>
-                    </a:solidFill>
-                  </a:tcPr>
-                </a:tc>
-                <a:tc>
-                  <a:txBody>
-                    <a:bodyPr/>
-                    <a:lstStyle/>
-                    <a:p>
-                      <a:pPr algn="ctr" indent="0" marL="0">
-                        <a:buNone/>
-                      </a:pPr>
-                      <a:r>
-                        <a:rPr lang="en-US" sz="1000" b="1" dirty="0">
-                          <a:solidFill>
-                            <a:srgbClr val="16A34A"/>
-                          </a:solidFill>
-                          <a:latin typeface="Arial" pitchFamily="34" charset="0"/>
-                          <a:ea typeface="Arial" pitchFamily="34" charset="-122"/>
-                          <a:cs typeface="Arial" pitchFamily="34" charset="-120"/>
-                        </a:rPr>
-                        <a:t>9.0点以上</a:t>
-                      </a:r>
-                      <a:endParaRPr lang="en-US" sz="1000" dirty="0">
-                        <a:latin typeface="Arial" charset="0"/>
-                        <a:ea typeface="Arial" charset="0"/>
-                        <a:cs typeface="Arial" charset="0"/>
-                      </a:endParaRPr>
-                    </a:p>
-                  </a:txBody>
-                  <a:tcPr marL="91440" marR="91440" marT="45720" marB="45720">
-                    <a:lnL w="6350" cap="flat" cmpd="sng" algn="ctr">
-                      <a:solidFill>
-                        <a:srgbClr val="CBD5E1"/>
-                      </a:solidFill>
-                      <a:prstDash val="solid"/>
-                      <a:round/>
-                      <a:headEnd type="none" w="med" len="med"/>
-                      <a:tailEnd type="none" w="med" len="med"/>
-                    </a:lnL>
-                    <a:lnR w="6350" cap="flat" cmpd="sng" algn="ctr">
-                      <a:solidFill>
-                        <a:srgbClr val="CBD5E1"/>
-                      </a:solidFill>
-                      <a:prstDash val="solid"/>
-                      <a:round/>
-                      <a:headEnd type="none" w="med" len="med"/>
-                      <a:tailEnd type="none" w="med" len="med"/>
-                    </a:lnR>
-                    <a:lnT w="6350" cap="flat" cmpd="sng" algn="ctr">
-                      <a:solidFill>
-                        <a:srgbClr val="CBD5E1"/>
-                      </a:solidFill>
-                      <a:prstDash val="solid"/>
-                      <a:round/>
-                      <a:headEnd type="none" w="med" len="med"/>
-                      <a:tailEnd type="none" w="med" len="med"/>
-                    </a:lnT>
-                    <a:lnB w="6350" cap="flat" cmpd="sng" algn="ctr">
-                      <a:solidFill>
-                        <a:srgbClr val="CBD5E1"/>
-                      </a:solidFill>
-                      <a:prstDash val="solid"/>
-                      <a:round/>
-                      <a:headEnd type="none" w="med" len="med"/>
-                      <a:tailEnd type="none" w="med" len="med"/>
-                    </a:lnB>
-                    <a:solidFill>
-                      <a:srgbClr val="FFFFFF"/>
-                    </a:solidFill>
-                  </a:tcPr>
-                </a:tc>
-                <a:tc>
-                  <a:txBody>
-                    <a:bodyPr/>
-                    <a:lstStyle/>
-                    <a:p>
-                      <a:pPr algn="ctr" indent="0" marL="0">
-                        <a:buNone/>
-                      </a:pPr>
-                      <a:r>
-                        <a:rPr lang="en-US" sz="1000" dirty="0">
-                          <a:solidFill>
-                            <a:srgbClr val="64748B"/>
-                          </a:solidFill>
-                          <a:latin typeface="Arial" pitchFamily="34" charset="0"/>
-                          <a:ea typeface="Arial" pitchFamily="34" charset="-122"/>
-                          <a:cs typeface="Arial" pitchFamily="34" charset="-120"/>
-                        </a:rPr>
-                        <a:t>2026年9月</a:t>
-                      </a:r>
-                      <a:endParaRPr lang="en-US" sz="1000" dirty="0">
-                        <a:latin typeface="Arial" charset="0"/>
-                        <a:ea typeface="Arial" charset="0"/>
-                        <a:cs typeface="Arial" charset="0"/>
-                      </a:endParaRPr>
-                    </a:p>
-                  </a:txBody>
-                  <a:tcPr marL="91440" marR="91440" marT="45720" marB="45720">
-                    <a:lnL w="6350" cap="flat" cmpd="sng" algn="ctr">
-                      <a:solidFill>
-                        <a:srgbClr val="CBD5E1"/>
-                      </a:solidFill>
-                      <a:prstDash val="solid"/>
-                      <a:round/>
-                      <a:headEnd type="none" w="med" len="med"/>
-                      <a:tailEnd type="none" w="med" len="med"/>
-                    </a:lnL>
-                    <a:lnR w="6350" cap="flat" cmpd="sng" algn="ctr">
-                      <a:solidFill>
-                        <a:srgbClr val="CBD5E1"/>
-                      </a:solidFill>
-                      <a:prstDash val="solid"/>
-                      <a:round/>
-                      <a:headEnd type="none" w="med" len="med"/>
-                      <a:tailEnd type="none" w="med" len="med"/>
-                    </a:lnR>
-                    <a:lnT w="6350" cap="flat" cmpd="sng" algn="ctr">
-                      <a:solidFill>
-                        <a:srgbClr val="CBD5E1"/>
-                      </a:solidFill>
-                      <a:prstDash val="solid"/>
-                      <a:round/>
-                      <a:headEnd type="none" w="med" len="med"/>
-                      <a:tailEnd type="none" w="med" len="med"/>
-                    </a:lnT>
-                    <a:lnB w="6350" cap="flat" cmpd="sng" algn="ctr">
-                      <a:solidFill>
-                        <a:srgbClr val="CBD5E1"/>
-                      </a:solidFill>
-                      <a:prstDash val="solid"/>
-                      <a:round/>
-                      <a:headEnd type="none" w="med" len="med"/>
-                      <a:tailEnd type="none" w="med" len="med"/>
-                    </a:lnB>
-                    <a:solidFill>
-                      <a:srgbClr val="FFFFFF"/>
-                    </a:solidFill>
-                  </a:tcPr>
-                </a:tc>
-              </a:tr>
-              <a:tr h="320040">
-                <a:tc>
-                  <a:txBody>
-                    <a:bodyPr/>
-                    <a:lstStyle/>
-                    <a:p>
-                      <a:pPr indent="0" marL="0">
-                        <a:buNone/>
-                      </a:pPr>
-                      <a:r>
-                        <a:rPr lang="en-US" sz="1000" b="1" dirty="0">
-                          <a:solidFill>
-                            <a:srgbClr val="334155"/>
-                          </a:solidFill>
-                          <a:latin typeface="Arial" pitchFamily="34" charset="0"/>
-                          <a:ea typeface="Arial" pitchFamily="34" charset="-122"/>
-                          <a:cs typeface="Arial" pitchFamily="34" charset="-120"/>
-                        </a:rPr>
                         <a:t>口コミ返信率</a:t>
                       </a:r>
                       <a:endParaRPr lang="en-US" sz="1000" dirty="0">
@@ -4405,7 +4131,7 @@
                       <a:tailEnd type="none" w="med" len="med"/>
                     </a:lnB>
                     <a:solidFill>
-                      <a:srgbClr val="E8EFF8"/>
+                      <a:srgbClr val="FFFFFF"/>
                     </a:solidFill>
                   </a:tcPr>
                 </a:tc>
@@ -4473,7 +4199,7 @@
                       <a:tailEnd type="none" w="med" len="med"/>
                     </a:lnB>
                     <a:solidFill>
-                      <a:srgbClr val="E8EFF8"/>
+                      <a:srgbClr val="FFFFFF"/>
                     </a:solidFill>
                   </a:tcPr>
                 </a:tc>
@@ -4541,7 +4267,7 @@
                       <a:tailEnd type="none" w="med" len="med"/>
                     </a:lnB>
                     <a:solidFill>
-                      <a:srgbClr val="E8EFF8"/>
+                      <a:srgbClr val="FFFFFF"/>
                     </a:solidFill>
                   </a:tcPr>
                 </a:tc>
@@ -4609,7 +4335,7 @@
                       <a:tailEnd type="none" w="med" len="med"/>
                     </a:lnB>
                     <a:solidFill>
-                      <a:srgbClr val="E8EFF8"/>
+                      <a:srgbClr val="FFFFFF"/>
                     </a:solidFill>
                   </a:tcPr>
                 </a:tc>
@@ -4679,7 +4405,7 @@
                       <a:tailEnd type="none" w="med" len="med"/>
                     </a:lnB>
                     <a:solidFill>
-                      <a:srgbClr val="FFFFFF"/>
+                      <a:srgbClr val="E8EFF8"/>
                     </a:solidFill>
                   </a:tcPr>
                 </a:tc>
@@ -4700,7 +4426,7 @@
                           <a:ea typeface="Arial" pitchFamily="34" charset="-122"/>
                           <a:cs typeface="Arial" pitchFamily="34" charset="-120"/>
                         </a:rPr>
-                        <a:t>約12件/期間</a:t>
+                        <a:t>約11件/期間</a:t>
                       </a:r>
                       <a:endParaRPr lang="en-US" sz="1000" dirty="0">
                         <a:latin typeface="Arial" charset="0"/>
@@ -4747,7 +4473,7 @@
                       <a:tailEnd type="none" w="med" len="med"/>
                     </a:lnB>
                     <a:solidFill>
-                      <a:srgbClr val="FFFFFF"/>
+                      <a:srgbClr val="E8EFF8"/>
                     </a:solidFill>
                   </a:tcPr>
                 </a:tc>
@@ -4768,7 +4494,7 @@
                           <a:ea typeface="Arial" pitchFamily="34" charset="-122"/>
                           <a:cs typeface="Arial" pitchFamily="34" charset="-120"/>
                         </a:rPr>
-                        <a:t>6件以下</a:t>
+                        <a:t>5件以下</a:t>
                       </a:r>
                       <a:endParaRPr lang="en-US" sz="1000" dirty="0">
                         <a:latin typeface="Arial" charset="0"/>
@@ -4815,7 +4541,7 @@
                       <a:tailEnd type="none" w="med" len="med"/>
                     </a:lnB>
                     <a:solidFill>
-                      <a:srgbClr val="FFFFFF"/>
+                      <a:srgbClr val="E8EFF8"/>
                     </a:solidFill>
                   </a:tcPr>
                 </a:tc>
@@ -4883,7 +4609,7 @@
                       <a:tailEnd type="none" w="med" len="med"/>
                     </a:lnB>
                     <a:solidFill>
-                      <a:srgbClr val="FFFFFF"/>
+                      <a:srgbClr val="E8EFF8"/>
                     </a:solidFill>
                   </a:tcPr>
                 </a:tc>
@@ -4900,7 +4626,7 @@
         </p:nvSpPr>
         <p:spPr>
           <a:xfrm>
-            <a:off x="457200" y="3429000"/>
+            <a:off x="457200" y="3108960"/>
             <a:ext cx="8229600" cy="640080"/>
           </a:xfrm>
           <a:prstGeom prst="rect">
@@ -4927,7 +4653,7 @@
         </p:nvSpPr>
         <p:spPr>
           <a:xfrm>
-            <a:off x="457200" y="3429000"/>
+            <a:off x="457200" y="3108960"/>
             <a:ext cx="54864" cy="640080"/>
           </a:xfrm>
           <a:prstGeom prst="rect">
@@ -4947,7 +4673,7 @@
         </p:nvSpPr>
         <p:spPr>
           <a:xfrm>
-            <a:off x="640080" y="3429000"/>
+            <a:off x="640080" y="3108960"/>
             <a:ext cx="7863840" cy="640080"/>
           </a:xfrm>
           <a:prstGeom prst="rect">
@@ -5339,7 +5065,7 @@
                 <a:ea typeface="Arial" pitchFamily="34" charset="-122"/>
                 <a:cs typeface="Arial" pitchFamily="34" charset="-120"/>
               </a:rPr>
-              <a:t>8.62</a:t>
+              <a:t>8.63</a:t>
             </a:r>
             <a:endParaRPr lang="en-US" sz="3200" dirty="0"/>
           </a:p>
@@ -5464,7 +5190,7 @@
                 <a:ea typeface="Arial" pitchFamily="34" charset="-122"/>
                 <a:cs typeface="Arial" pitchFamily="34" charset="-120"/>
               </a:rPr>
-              <a:t>83.9%</a:t>
+              <a:t>83.5%</a:t>
             </a:r>
             <a:endParaRPr lang="en-US" sz="3200" dirty="0"/>
           </a:p>
@@ -5714,7 +5440,7 @@
                 <a:ea typeface="Arial" pitchFamily="34" charset="-122"/>
                 <a:cs typeface="Arial" pitchFamily="34" charset="-120"/>
               </a:rPr>
-              <a:t>137件</a:t>
+              <a:t>139件</a:t>
             </a:r>
             <a:endParaRPr lang="en-US" sz="3200" dirty="0"/>
           </a:p>
@@ -5862,7 +5588,7 @@
                 <a:ea typeface="Arial" pitchFamily="34" charset="-122"/>
                 <a:cs typeface="Arial" pitchFamily="34" charset="-120"/>
               </a:rPr>
-              <a:t>  Good location, train station across the road and few shops</a:t>
+              <a:t>  りんかい線品川シーサイド駅から徒歩すぐ、イオンモールにも近い抜群の立地</a:t>
             </a:r>
             <a:endParaRPr lang="en-US" sz="1100" dirty="0"/>
           </a:p>
@@ -5902,7 +5628,7 @@
                 <a:ea typeface="Arial" pitchFamily="34" charset="-122"/>
                 <a:cs typeface="Arial" pitchFamily="34" charset="-120"/>
               </a:rPr>
-              <a:t>  部屋が4人部屋になってビックリしましたが、フロントからお部屋から全部綺麗で大満足です</a:t>
+              <a:t>  部屋もきれいで過ごしやすい</a:t>
             </a:r>
             <a:endParaRPr lang="en-US" sz="1100" dirty="0"/>
           </a:p>
@@ -6523,7 +6249,7 @@
                 <a:ea typeface="Arial" pitchFamily="34" charset="-122"/>
                 <a:cs typeface="Arial" pitchFamily="34" charset="-120"/>
               </a:rPr>
-              <a:t>8.62</a:t>
+              <a:t>8.63</a:t>
             </a:r>
             <a:endParaRPr lang="en-US" sz="3200" dirty="0"/>
           </a:p>
@@ -6648,7 +6374,7 @@
                 <a:ea typeface="Arial" pitchFamily="34" charset="-122"/>
                 <a:cs typeface="Arial" pitchFamily="34" charset="-120"/>
               </a:rPr>
-              <a:t>83.9%</a:t>
+              <a:t>83.5%</a:t>
             </a:r>
             <a:endParaRPr lang="en-US" sz="3200" dirty="0"/>
           </a:p>
@@ -6898,7 +6624,7 @@
                 <a:ea typeface="Arial" pitchFamily="34" charset="-122"/>
                 <a:cs typeface="Arial" pitchFamily="34" charset="-120"/>
               </a:rPr>
-              <a:t>137件</a:t>
+              <a:t>139件</a:t>
             </a:r>
             <a:endParaRPr lang="en-US" sz="3200" dirty="0"/>
           </a:p>
@@ -7319,56 +7045,7 @@
                 <a:ea typeface="Arial" pitchFamily="34" charset="-122"/>
                 <a:cs typeface="Arial" pitchFamily="34" charset="-120"/>
               </a:rPr>
-              <a:t>Trip.com(9.39)が最高スコア。</a:t>
-            </a:r>
-            <a:endParaRPr lang="en-US" sz="1100" dirty="0"/>
-          </a:p>
-          <a:p>
-            <a:pPr indent="0" marL="0">
-              <a:spcAft>
-                <a:spcPts val="200"/>
-              </a:spcAft>
-              <a:buNone/>
-            </a:pPr>
-            <a:endParaRPr lang="en-US" sz="1100" dirty="0"/>
-          </a:p>
-          <a:p>
-            <a:pPr indent="0" marL="0">
-              <a:spcAft>
-                <a:spcPts val="200"/>
-              </a:spcAft>
-              <a:buNone/>
-            </a:pPr>
-            <a:r>
-              <a:rPr lang="en-US" sz="1100" b="1" dirty="0">
-                <a:solidFill>
-                  <a:srgbClr val="DC2626"/>
-                </a:solidFill>
-                <a:latin typeface="Arial" pitchFamily="34" charset="0"/>
-                <a:ea typeface="Arial" pitchFamily="34" charset="-122"/>
-                <a:cs typeface="Arial" pitchFamily="34" charset="-120"/>
-              </a:rPr>
-              <a:t>改善対象サイト</a:t>
-            </a:r>
-            <a:endParaRPr lang="en-US" sz="1100" dirty="0"/>
-          </a:p>
-          <a:p>
-            <a:pPr indent="0" marL="0">
-              <a:spcAft>
-                <a:spcPts val="200"/>
-              </a:spcAft>
-              <a:buNone/>
-            </a:pPr>
-            <a:r>
-              <a:rPr lang="en-US" sz="900" dirty="0">
-                <a:solidFill>
-                  <a:srgbClr val="64748B"/>
-                </a:solidFill>
-                <a:latin typeface="Arial" pitchFamily="34" charset="0"/>
-                <a:ea typeface="Arial" pitchFamily="34" charset="-122"/>
-                <a:cs typeface="Arial" pitchFamily="34" charset="-120"/>
-              </a:rPr>
-              <a:t>Google(8.0)が相対的に低い。口コミ返信の強化が急務</a:t>
+              <a:t>Trip.com(9.33)が最高スコア。</a:t>
             </a:r>
             <a:endParaRPr lang="en-US" sz="1100" dirty="0"/>
           </a:p>
@@ -7877,7 +7554,7 @@
                           <a:ea typeface="Arial" pitchFamily="34" charset="-122"/>
                           <a:cs typeface="Arial" pitchFamily="34" charset="-120"/>
                         </a:rPr>
-                        <a:t>23</a:t>
+                        <a:t>24</a:t>
                       </a:r>
                       <a:endParaRPr lang="en-US" sz="900" dirty="0">
                         <a:latin typeface="Arial" charset="0"/>
@@ -7945,7 +7622,7 @@
                           <a:ea typeface="Arial" pitchFamily="34" charset="-122"/>
                           <a:cs typeface="Arial" pitchFamily="34" charset="-120"/>
                         </a:rPr>
-                        <a:t>9.39</a:t>
+                        <a:t>9.33</a:t>
                       </a:r>
                       <a:endParaRPr lang="en-US" sz="900" dirty="0">
                         <a:latin typeface="Arial" charset="0"/>
@@ -8081,7 +7758,7 @@
                           <a:ea typeface="Arial" pitchFamily="34" charset="-122"/>
                           <a:cs typeface="Arial" pitchFamily="34" charset="-120"/>
                         </a:rPr>
-                        <a:t>9.39</a:t>
+                        <a:t>9.33</a:t>
                       </a:r>
                       <a:endParaRPr lang="en-US" sz="900" dirty="0">
                         <a:latin typeface="Arial" charset="0"/>
@@ -8287,7 +7964,7 @@
                           <a:ea typeface="Arial" pitchFamily="34" charset="-122"/>
                           <a:cs typeface="Arial" pitchFamily="34" charset="-120"/>
                         </a:rPr>
-                        <a:t>4.36</a:t>
+                        <a:t>4.39</a:t>
                       </a:r>
                       <a:endParaRPr lang="en-US" sz="900" dirty="0">
                         <a:latin typeface="Arial" charset="0"/>
@@ -8423,7 +8100,7 @@
                           <a:ea typeface="Arial" pitchFamily="34" charset="-122"/>
                           <a:cs typeface="Arial" pitchFamily="34" charset="-120"/>
                         </a:rPr>
-                        <a:t>8.71</a:t>
+                        <a:t>8.79</a:t>
                       </a:r>
                       <a:endParaRPr lang="en-US" sz="900" dirty="0">
                         <a:latin typeface="Arial" charset="0"/>
@@ -8471,6 +8148,348 @@
                     </a:lnB>
                     <a:solidFill>
                       <a:srgbClr val="FFFFFF"/>
+                    </a:solidFill>
+                  </a:tcPr>
+                </a:tc>
+              </a:tr>
+              <a:tr h="201168">
+                <a:tc>
+                  <a:txBody>
+                    <a:bodyPr/>
+                    <a:lstStyle/>
+                    <a:p>
+                      <a:pPr algn="ctr" indent="0" marL="0">
+                        <a:buNone/>
+                      </a:pPr>
+                      <a:r>
+                        <a:rPr lang="en-US" sz="900" dirty="0">
+                          <a:solidFill>
+                            <a:srgbClr val="000000"/>
+                          </a:solidFill>
+                          <a:latin typeface="Arial" pitchFamily="34" charset="0"/>
+                          <a:ea typeface="Arial" pitchFamily="34" charset="-122"/>
+                          <a:cs typeface="Arial" pitchFamily="34" charset="-120"/>
+                        </a:rPr>
+                        <a:t>Booking.com</a:t>
+                      </a:r>
+                      <a:endParaRPr lang="en-US" sz="900" dirty="0">
+                        <a:latin typeface="Arial" charset="0"/>
+                        <a:ea typeface="Arial" charset="0"/>
+                        <a:cs typeface="Arial" charset="0"/>
+                      </a:endParaRPr>
+                    </a:p>
+                  </a:txBody>
+                  <a:tcPr marL="91440" marR="91440" marT="45720" marB="45720">
+                    <a:lnL w="6350" cap="flat" cmpd="sng" algn="ctr">
+                      <a:solidFill>
+                        <a:srgbClr val="CBD5E1"/>
+                      </a:solidFill>
+                      <a:prstDash val="solid"/>
+                      <a:round/>
+                      <a:headEnd type="none" w="med" len="med"/>
+                      <a:tailEnd type="none" w="med" len="med"/>
+                    </a:lnL>
+                    <a:lnR w="6350" cap="flat" cmpd="sng" algn="ctr">
+                      <a:solidFill>
+                        <a:srgbClr val="CBD5E1"/>
+                      </a:solidFill>
+                      <a:prstDash val="solid"/>
+                      <a:round/>
+                      <a:headEnd type="none" w="med" len="med"/>
+                      <a:tailEnd type="none" w="med" len="med"/>
+                    </a:lnR>
+                    <a:lnT w="6350" cap="flat" cmpd="sng" algn="ctr">
+                      <a:solidFill>
+                        <a:srgbClr val="CBD5E1"/>
+                      </a:solidFill>
+                      <a:prstDash val="solid"/>
+                      <a:round/>
+                      <a:headEnd type="none" w="med" len="med"/>
+                      <a:tailEnd type="none" w="med" len="med"/>
+                    </a:lnT>
+                    <a:lnB w="6350" cap="flat" cmpd="sng" algn="ctr">
+                      <a:solidFill>
+                        <a:srgbClr val="CBD5E1"/>
+                      </a:solidFill>
+                      <a:prstDash val="solid"/>
+                      <a:round/>
+                      <a:headEnd type="none" w="med" len="med"/>
+                      <a:tailEnd type="none" w="med" len="med"/>
+                    </a:lnB>
+                    <a:solidFill>
+                      <a:srgbClr val="E8EFF8"/>
+                    </a:solidFill>
+                  </a:tcPr>
+                </a:tc>
+                <a:tc>
+                  <a:txBody>
+                    <a:bodyPr/>
+                    <a:lstStyle/>
+                    <a:p>
+                      <a:pPr algn="ctr" indent="0" marL="0">
+                        <a:buNone/>
+                      </a:pPr>
+                      <a:r>
+                        <a:rPr lang="en-US" sz="900" dirty="0">
+                          <a:solidFill>
+                            <a:srgbClr val="000000"/>
+                          </a:solidFill>
+                          <a:latin typeface="Arial" pitchFamily="34" charset="0"/>
+                          <a:ea typeface="Arial" pitchFamily="34" charset="-122"/>
+                          <a:cs typeface="Arial" pitchFamily="34" charset="-120"/>
+                        </a:rPr>
+                        <a:t>24</a:t>
+                      </a:r>
+                      <a:endParaRPr lang="en-US" sz="900" dirty="0">
+                        <a:latin typeface="Arial" charset="0"/>
+                        <a:ea typeface="Arial" charset="0"/>
+                        <a:cs typeface="Arial" charset="0"/>
+                      </a:endParaRPr>
+                    </a:p>
+                  </a:txBody>
+                  <a:tcPr marL="91440" marR="91440" marT="45720" marB="45720">
+                    <a:lnL w="6350" cap="flat" cmpd="sng" algn="ctr">
+                      <a:solidFill>
+                        <a:srgbClr val="CBD5E1"/>
+                      </a:solidFill>
+                      <a:prstDash val="solid"/>
+                      <a:round/>
+                      <a:headEnd type="none" w="med" len="med"/>
+                      <a:tailEnd type="none" w="med" len="med"/>
+                    </a:lnL>
+                    <a:lnR w="6350" cap="flat" cmpd="sng" algn="ctr">
+                      <a:solidFill>
+                        <a:srgbClr val="CBD5E1"/>
+                      </a:solidFill>
+                      <a:prstDash val="solid"/>
+                      <a:round/>
+                      <a:headEnd type="none" w="med" len="med"/>
+                      <a:tailEnd type="none" w="med" len="med"/>
+                    </a:lnR>
+                    <a:lnT w="6350" cap="flat" cmpd="sng" algn="ctr">
+                      <a:solidFill>
+                        <a:srgbClr val="CBD5E1"/>
+                      </a:solidFill>
+                      <a:prstDash val="solid"/>
+                      <a:round/>
+                      <a:headEnd type="none" w="med" len="med"/>
+                      <a:tailEnd type="none" w="med" len="med"/>
+                    </a:lnT>
+                    <a:lnB w="6350" cap="flat" cmpd="sng" algn="ctr">
+                      <a:solidFill>
+                        <a:srgbClr val="CBD5E1"/>
+                      </a:solidFill>
+                      <a:prstDash val="solid"/>
+                      <a:round/>
+                      <a:headEnd type="none" w="med" len="med"/>
+                      <a:tailEnd type="none" w="med" len="med"/>
+                    </a:lnB>
+                    <a:solidFill>
+                      <a:srgbClr val="E8EFF8"/>
+                    </a:solidFill>
+                  </a:tcPr>
+                </a:tc>
+                <a:tc>
+                  <a:txBody>
+                    <a:bodyPr/>
+                    <a:lstStyle/>
+                    <a:p>
+                      <a:pPr algn="ctr" indent="0" marL="0">
+                        <a:buNone/>
+                      </a:pPr>
+                      <a:r>
+                        <a:rPr lang="en-US" sz="900" dirty="0">
+                          <a:solidFill>
+                            <a:srgbClr val="000000"/>
+                          </a:solidFill>
+                          <a:latin typeface="Arial" pitchFamily="34" charset="0"/>
+                          <a:ea typeface="Arial" pitchFamily="34" charset="-122"/>
+                          <a:cs typeface="Arial" pitchFamily="34" charset="-120"/>
+                        </a:rPr>
+                        <a:t>8.54</a:t>
+                      </a:r>
+                      <a:endParaRPr lang="en-US" sz="900" dirty="0">
+                        <a:latin typeface="Arial" charset="0"/>
+                        <a:ea typeface="Arial" charset="0"/>
+                        <a:cs typeface="Arial" charset="0"/>
+                      </a:endParaRPr>
+                    </a:p>
+                  </a:txBody>
+                  <a:tcPr marL="91440" marR="91440" marT="45720" marB="45720">
+                    <a:lnL w="6350" cap="flat" cmpd="sng" algn="ctr">
+                      <a:solidFill>
+                        <a:srgbClr val="CBD5E1"/>
+                      </a:solidFill>
+                      <a:prstDash val="solid"/>
+                      <a:round/>
+                      <a:headEnd type="none" w="med" len="med"/>
+                      <a:tailEnd type="none" w="med" len="med"/>
+                    </a:lnL>
+                    <a:lnR w="6350" cap="flat" cmpd="sng" algn="ctr">
+                      <a:solidFill>
+                        <a:srgbClr val="CBD5E1"/>
+                      </a:solidFill>
+                      <a:prstDash val="solid"/>
+                      <a:round/>
+                      <a:headEnd type="none" w="med" len="med"/>
+                      <a:tailEnd type="none" w="med" len="med"/>
+                    </a:lnR>
+                    <a:lnT w="6350" cap="flat" cmpd="sng" algn="ctr">
+                      <a:solidFill>
+                        <a:srgbClr val="CBD5E1"/>
+                      </a:solidFill>
+                      <a:prstDash val="solid"/>
+                      <a:round/>
+                      <a:headEnd type="none" w="med" len="med"/>
+                      <a:tailEnd type="none" w="med" len="med"/>
+                    </a:lnT>
+                    <a:lnB w="6350" cap="flat" cmpd="sng" algn="ctr">
+                      <a:solidFill>
+                        <a:srgbClr val="CBD5E1"/>
+                      </a:solidFill>
+                      <a:prstDash val="solid"/>
+                      <a:round/>
+                      <a:headEnd type="none" w="med" len="med"/>
+                      <a:tailEnd type="none" w="med" len="med"/>
+                    </a:lnB>
+                    <a:solidFill>
+                      <a:srgbClr val="E8EFF8"/>
+                    </a:solidFill>
+                  </a:tcPr>
+                </a:tc>
+                <a:tc>
+                  <a:txBody>
+                    <a:bodyPr/>
+                    <a:lstStyle/>
+                    <a:p>
+                      <a:pPr algn="ctr" indent="0" marL="0">
+                        <a:buNone/>
+                      </a:pPr>
+                      <a:r>
+                        <a:rPr lang="en-US" sz="900" dirty="0">
+                          <a:solidFill>
+                            <a:srgbClr val="000000"/>
+                          </a:solidFill>
+                          <a:latin typeface="Arial" pitchFamily="34" charset="0"/>
+                          <a:ea typeface="Arial" pitchFamily="34" charset="-122"/>
+                          <a:cs typeface="Arial" pitchFamily="34" charset="-120"/>
+                        </a:rPr>
+                        <a:t>/10</a:t>
+                      </a:r>
+                      <a:endParaRPr lang="en-US" sz="900" dirty="0">
+                        <a:latin typeface="Arial" charset="0"/>
+                        <a:ea typeface="Arial" charset="0"/>
+                        <a:cs typeface="Arial" charset="0"/>
+                      </a:endParaRPr>
+                    </a:p>
+                  </a:txBody>
+                  <a:tcPr marL="91440" marR="91440" marT="45720" marB="45720">
+                    <a:lnL w="6350" cap="flat" cmpd="sng" algn="ctr">
+                      <a:solidFill>
+                        <a:srgbClr val="CBD5E1"/>
+                      </a:solidFill>
+                      <a:prstDash val="solid"/>
+                      <a:round/>
+                      <a:headEnd type="none" w="med" len="med"/>
+                      <a:tailEnd type="none" w="med" len="med"/>
+                    </a:lnL>
+                    <a:lnR w="6350" cap="flat" cmpd="sng" algn="ctr">
+                      <a:solidFill>
+                        <a:srgbClr val="CBD5E1"/>
+                      </a:solidFill>
+                      <a:prstDash val="solid"/>
+                      <a:round/>
+                      <a:headEnd type="none" w="med" len="med"/>
+                      <a:tailEnd type="none" w="med" len="med"/>
+                    </a:lnR>
+                    <a:lnT w="6350" cap="flat" cmpd="sng" algn="ctr">
+                      <a:solidFill>
+                        <a:srgbClr val="CBD5E1"/>
+                      </a:solidFill>
+                      <a:prstDash val="solid"/>
+                      <a:round/>
+                      <a:headEnd type="none" w="med" len="med"/>
+                      <a:tailEnd type="none" w="med" len="med"/>
+                    </a:lnT>
+                    <a:lnB w="6350" cap="flat" cmpd="sng" algn="ctr">
+                      <a:solidFill>
+                        <a:srgbClr val="CBD5E1"/>
+                      </a:solidFill>
+                      <a:prstDash val="solid"/>
+                      <a:round/>
+                      <a:headEnd type="none" w="med" len="med"/>
+                      <a:tailEnd type="none" w="med" len="med"/>
+                    </a:lnB>
+                    <a:solidFill>
+                      <a:srgbClr val="E8EFF8"/>
+                    </a:solidFill>
+                  </a:tcPr>
+                </a:tc>
+                <a:tc>
+                  <a:txBody>
+                    <a:bodyPr/>
+                    <a:lstStyle/>
+                    <a:p>
+                      <a:pPr algn="ctr" indent="0" marL="0">
+                        <a:buNone/>
+                      </a:pPr>
+                      <a:r>
+                        <a:rPr lang="en-US" sz="900" dirty="0">
+                          <a:solidFill>
+                            <a:srgbClr val="000000"/>
+                          </a:solidFill>
+                          <a:latin typeface="Arial" pitchFamily="34" charset="0"/>
+                          <a:ea typeface="Arial" pitchFamily="34" charset="-122"/>
+                          <a:cs typeface="Arial" pitchFamily="34" charset="-120"/>
+                        </a:rPr>
+                        <a:t>8.54</a:t>
+                      </a:r>
+                      <a:endParaRPr lang="en-US" sz="900" dirty="0">
+                        <a:latin typeface="Arial" charset="0"/>
+                        <a:ea typeface="Arial" charset="0"/>
+                        <a:cs typeface="Arial" charset="0"/>
+                      </a:endParaRPr>
+                    </a:p>
+                  </a:txBody>
+                  <a:tcPr marL="91440" marR="91440" marT="45720" marB="45720">
+                    <a:lnL w="6350" cap="flat" cmpd="sng" algn="ctr">
+                      <a:solidFill>
+                        <a:srgbClr val="CBD5E1"/>
+                      </a:solidFill>
+                      <a:prstDash val="solid"/>
+                      <a:round/>
+                      <a:headEnd type="none" w="med" len="med"/>
+                      <a:tailEnd type="none" w="med" len="med"/>
+                    </a:lnL>
+                    <a:lnR w="6350" cap="flat" cmpd="sng" algn="ctr">
+                      <a:solidFill>
+                        <a:srgbClr val="CBD5E1"/>
+                      </a:solidFill>
+                      <a:prstDash val="solid"/>
+                      <a:round/>
+                      <a:headEnd type="none" w="med" len="med"/>
+                      <a:tailEnd type="none" w="med" len="med"/>
+                    </a:lnR>
+                    <a:lnT w="6350" cap="flat" cmpd="sng" algn="ctr">
+                      <a:solidFill>
+                        <a:srgbClr val="CBD5E1"/>
+                      </a:solidFill>
+                      <a:prstDash val="solid"/>
+                      <a:round/>
+                      <a:headEnd type="none" w="med" len="med"/>
+                      <a:tailEnd type="none" w="med" len="med"/>
+                    </a:lnT>
+                    <a:lnB w="6350" cap="flat" cmpd="sng" algn="ctr">
+                      <a:solidFill>
+                        <a:srgbClr val="CBD5E1"/>
+                      </a:solidFill>
+                      <a:prstDash val="solid"/>
+                      <a:round/>
+                      <a:headEnd type="none" w="med" len="med"/>
+                      <a:tailEnd type="none" w="med" len="med"/>
+                    </a:lnB>
+                    <a:solidFill>
+                      <a:srgbClr val="E8EFF8"/>
                     </a:solidFill>
                   </a:tcPr>
                 </a:tc>
@@ -8540,7 +8559,7 @@
                       <a:tailEnd type="none" w="med" len="med"/>
                     </a:lnB>
                     <a:solidFill>
-                      <a:srgbClr val="E8EFF8"/>
+                      <a:srgbClr val="FFFFFF"/>
                     </a:solidFill>
                   </a:tcPr>
                 </a:tc>
@@ -8561,7 +8580,7 @@
                           <a:ea typeface="Arial" pitchFamily="34" charset="-122"/>
                           <a:cs typeface="Arial" pitchFamily="34" charset="-120"/>
                         </a:rPr>
-                        <a:t>38</a:t>
+                        <a:t>36</a:t>
                       </a:r>
                       <a:endParaRPr lang="en-US" sz="900" dirty="0">
                         <a:latin typeface="Arial" charset="0"/>
@@ -8608,7 +8627,7 @@
                       <a:tailEnd type="none" w="med" len="med"/>
                     </a:lnB>
                     <a:solidFill>
-                      <a:srgbClr val="E8EFF8"/>
+                      <a:srgbClr val="FFFFFF"/>
                     </a:solidFill>
                   </a:tcPr>
                 </a:tc>
@@ -8629,7 +8648,7 @@
                           <a:ea typeface="Arial" pitchFamily="34" charset="-122"/>
                           <a:cs typeface="Arial" pitchFamily="34" charset="-120"/>
                         </a:rPr>
-                        <a:t>4.26</a:t>
+                        <a:t>4.19</a:t>
                       </a:r>
                       <a:endParaRPr lang="en-US" sz="900" dirty="0">
                         <a:latin typeface="Arial" charset="0"/>
@@ -8676,7 +8695,7 @@
                       <a:tailEnd type="none" w="med" len="med"/>
                     </a:lnB>
                     <a:solidFill>
-                      <a:srgbClr val="E8EFF8"/>
+                      <a:srgbClr val="FFFFFF"/>
                     </a:solidFill>
                   </a:tcPr>
                 </a:tc>
@@ -8744,144 +8763,6 @@
                       <a:tailEnd type="none" w="med" len="med"/>
                     </a:lnB>
                     <a:solidFill>
-                      <a:srgbClr val="E8EFF8"/>
-                    </a:solidFill>
-                  </a:tcPr>
-                </a:tc>
-                <a:tc>
-                  <a:txBody>
-                    <a:bodyPr/>
-                    <a:lstStyle/>
-                    <a:p>
-                      <a:pPr algn="ctr" indent="0" marL="0">
-                        <a:buNone/>
-                      </a:pPr>
-                      <a:r>
-                        <a:rPr lang="en-US" sz="900" dirty="0">
-                          <a:solidFill>
-                            <a:srgbClr val="000000"/>
-                          </a:solidFill>
-                          <a:latin typeface="Arial" pitchFamily="34" charset="0"/>
-                          <a:ea typeface="Arial" pitchFamily="34" charset="-122"/>
-                          <a:cs typeface="Arial" pitchFamily="34" charset="-120"/>
-                        </a:rPr>
-                        <a:t>8.53</a:t>
-                      </a:r>
-                      <a:endParaRPr lang="en-US" sz="900" dirty="0">
-                        <a:latin typeface="Arial" charset="0"/>
-                        <a:ea typeface="Arial" charset="0"/>
-                        <a:cs typeface="Arial" charset="0"/>
-                      </a:endParaRPr>
-                    </a:p>
-                  </a:txBody>
-                  <a:tcPr marL="91440" marR="91440" marT="45720" marB="45720">
-                    <a:lnL w="6350" cap="flat" cmpd="sng" algn="ctr">
-                      <a:solidFill>
-                        <a:srgbClr val="CBD5E1"/>
-                      </a:solidFill>
-                      <a:prstDash val="solid"/>
-                      <a:round/>
-                      <a:headEnd type="none" w="med" len="med"/>
-                      <a:tailEnd type="none" w="med" len="med"/>
-                    </a:lnL>
-                    <a:lnR w="6350" cap="flat" cmpd="sng" algn="ctr">
-                      <a:solidFill>
-                        <a:srgbClr val="CBD5E1"/>
-                      </a:solidFill>
-                      <a:prstDash val="solid"/>
-                      <a:round/>
-                      <a:headEnd type="none" w="med" len="med"/>
-                      <a:tailEnd type="none" w="med" len="med"/>
-                    </a:lnR>
-                    <a:lnT w="6350" cap="flat" cmpd="sng" algn="ctr">
-                      <a:solidFill>
-                        <a:srgbClr val="CBD5E1"/>
-                      </a:solidFill>
-                      <a:prstDash val="solid"/>
-                      <a:round/>
-                      <a:headEnd type="none" w="med" len="med"/>
-                      <a:tailEnd type="none" w="med" len="med"/>
-                    </a:lnT>
-                    <a:lnB w="6350" cap="flat" cmpd="sng" algn="ctr">
-                      <a:solidFill>
-                        <a:srgbClr val="CBD5E1"/>
-                      </a:solidFill>
-                      <a:prstDash val="solid"/>
-                      <a:round/>
-                      <a:headEnd type="none" w="med" len="med"/>
-                      <a:tailEnd type="none" w="med" len="med"/>
-                    </a:lnB>
-                    <a:solidFill>
-                      <a:srgbClr val="E8EFF8"/>
-                    </a:solidFill>
-                  </a:tcPr>
-                </a:tc>
-              </a:tr>
-              <a:tr h="201168">
-                <a:tc>
-                  <a:txBody>
-                    <a:bodyPr/>
-                    <a:lstStyle/>
-                    <a:p>
-                      <a:pPr algn="ctr" indent="0" marL="0">
-                        <a:buNone/>
-                      </a:pPr>
-                      <a:r>
-                        <a:rPr lang="en-US" sz="900" dirty="0">
-                          <a:solidFill>
-                            <a:srgbClr val="000000"/>
-                          </a:solidFill>
-                          <a:latin typeface="Arial" pitchFamily="34" charset="0"/>
-                          <a:ea typeface="Arial" pitchFamily="34" charset="-122"/>
-                          <a:cs typeface="Arial" pitchFamily="34" charset="-120"/>
-                        </a:rPr>
-                        <a:t>Booking.com</a:t>
-                      </a:r>
-                      <a:endParaRPr lang="en-US" sz="900" dirty="0">
-                        <a:latin typeface="Arial" charset="0"/>
-                        <a:ea typeface="Arial" charset="0"/>
-                        <a:cs typeface="Arial" charset="0"/>
-                      </a:endParaRPr>
-                    </a:p>
-                  </a:txBody>
-                  <a:tcPr marL="91440" marR="91440" marT="45720" marB="45720">
-                    <a:lnL w="6350" cap="flat" cmpd="sng" algn="ctr">
-                      <a:solidFill>
-                        <a:srgbClr val="CBD5E1"/>
-                      </a:solidFill>
-                      <a:prstDash val="solid"/>
-                      <a:round/>
-                      <a:headEnd type="none" w="med" len="med"/>
-                      <a:tailEnd type="none" w="med" len="med"/>
-                    </a:lnL>
-                    <a:lnR w="6350" cap="flat" cmpd="sng" algn="ctr">
-                      <a:solidFill>
-                        <a:srgbClr val="CBD5E1"/>
-                      </a:solidFill>
-                      <a:prstDash val="solid"/>
-                      <a:round/>
-                      <a:headEnd type="none" w="med" len="med"/>
-                      <a:tailEnd type="none" w="med" len="med"/>
-                    </a:lnR>
-                    <a:lnT w="6350" cap="flat" cmpd="sng" algn="ctr">
-                      <a:solidFill>
-                        <a:srgbClr val="CBD5E1"/>
-                      </a:solidFill>
-                      <a:prstDash val="solid"/>
-                      <a:round/>
-                      <a:headEnd type="none" w="med" len="med"/>
-                      <a:tailEnd type="none" w="med" len="med"/>
-                    </a:lnT>
-                    <a:lnB w="6350" cap="flat" cmpd="sng" algn="ctr">
-                      <a:solidFill>
-                        <a:srgbClr val="CBD5E1"/>
-                      </a:solidFill>
-                      <a:prstDash val="solid"/>
-                      <a:round/>
-                      <a:headEnd type="none" w="med" len="med"/>
-                      <a:tailEnd type="none" w="med" len="med"/>
-                    </a:lnB>
-                    <a:solidFill>
                       <a:srgbClr val="FFFFFF"/>
                     </a:solidFill>
                   </a:tcPr>
@@ -8903,211 +8784,7 @@
                           <a:ea typeface="Arial" pitchFamily="34" charset="-122"/>
                           <a:cs typeface="Arial" pitchFamily="34" charset="-120"/>
                         </a:rPr>
-                        <a:t>23</a:t>
-                      </a:r>
-                      <a:endParaRPr lang="en-US" sz="900" dirty="0">
-                        <a:latin typeface="Arial" charset="0"/>
-                        <a:ea typeface="Arial" charset="0"/>
-                        <a:cs typeface="Arial" charset="0"/>
-                      </a:endParaRPr>
-                    </a:p>
-                  </a:txBody>
-                  <a:tcPr marL="91440" marR="91440" marT="45720" marB="45720">
-                    <a:lnL w="6350" cap="flat" cmpd="sng" algn="ctr">
-                      <a:solidFill>
-                        <a:srgbClr val="CBD5E1"/>
-                      </a:solidFill>
-                      <a:prstDash val="solid"/>
-                      <a:round/>
-                      <a:headEnd type="none" w="med" len="med"/>
-                      <a:tailEnd type="none" w="med" len="med"/>
-                    </a:lnL>
-                    <a:lnR w="6350" cap="flat" cmpd="sng" algn="ctr">
-                      <a:solidFill>
-                        <a:srgbClr val="CBD5E1"/>
-                      </a:solidFill>
-                      <a:prstDash val="solid"/>
-                      <a:round/>
-                      <a:headEnd type="none" w="med" len="med"/>
-                      <a:tailEnd type="none" w="med" len="med"/>
-                    </a:lnR>
-                    <a:lnT w="6350" cap="flat" cmpd="sng" algn="ctr">
-                      <a:solidFill>
-                        <a:srgbClr val="CBD5E1"/>
-                      </a:solidFill>
-                      <a:prstDash val="solid"/>
-                      <a:round/>
-                      <a:headEnd type="none" w="med" len="med"/>
-                      <a:tailEnd type="none" w="med" len="med"/>
-                    </a:lnT>
-                    <a:lnB w="6350" cap="flat" cmpd="sng" algn="ctr">
-                      <a:solidFill>
-                        <a:srgbClr val="CBD5E1"/>
-                      </a:solidFill>
-                      <a:prstDash val="solid"/>
-                      <a:round/>
-                      <a:headEnd type="none" w="med" len="med"/>
-                      <a:tailEnd type="none" w="med" len="med"/>
-                    </a:lnB>
-                    <a:solidFill>
-                      <a:srgbClr val="FFFFFF"/>
-                    </a:solidFill>
-                  </a:tcPr>
-                </a:tc>
-                <a:tc>
-                  <a:txBody>
-                    <a:bodyPr/>
-                    <a:lstStyle/>
-                    <a:p>
-                      <a:pPr algn="ctr" indent="0" marL="0">
-                        <a:buNone/>
-                      </a:pPr>
-                      <a:r>
-                        <a:rPr lang="en-US" sz="900" dirty="0">
-                          <a:solidFill>
-                            <a:srgbClr val="000000"/>
-                          </a:solidFill>
-                          <a:latin typeface="Arial" pitchFamily="34" charset="0"/>
-                          <a:ea typeface="Arial" pitchFamily="34" charset="-122"/>
-                          <a:cs typeface="Arial" pitchFamily="34" charset="-120"/>
-                        </a:rPr>
-                        <a:t>8.48</a:t>
-                      </a:r>
-                      <a:endParaRPr lang="en-US" sz="900" dirty="0">
-                        <a:latin typeface="Arial" charset="0"/>
-                        <a:ea typeface="Arial" charset="0"/>
-                        <a:cs typeface="Arial" charset="0"/>
-                      </a:endParaRPr>
-                    </a:p>
-                  </a:txBody>
-                  <a:tcPr marL="91440" marR="91440" marT="45720" marB="45720">
-                    <a:lnL w="6350" cap="flat" cmpd="sng" algn="ctr">
-                      <a:solidFill>
-                        <a:srgbClr val="CBD5E1"/>
-                      </a:solidFill>
-                      <a:prstDash val="solid"/>
-                      <a:round/>
-                      <a:headEnd type="none" w="med" len="med"/>
-                      <a:tailEnd type="none" w="med" len="med"/>
-                    </a:lnL>
-                    <a:lnR w="6350" cap="flat" cmpd="sng" algn="ctr">
-                      <a:solidFill>
-                        <a:srgbClr val="CBD5E1"/>
-                      </a:solidFill>
-                      <a:prstDash val="solid"/>
-                      <a:round/>
-                      <a:headEnd type="none" w="med" len="med"/>
-                      <a:tailEnd type="none" w="med" len="med"/>
-                    </a:lnR>
-                    <a:lnT w="6350" cap="flat" cmpd="sng" algn="ctr">
-                      <a:solidFill>
-                        <a:srgbClr val="CBD5E1"/>
-                      </a:solidFill>
-                      <a:prstDash val="solid"/>
-                      <a:round/>
-                      <a:headEnd type="none" w="med" len="med"/>
-                      <a:tailEnd type="none" w="med" len="med"/>
-                    </a:lnT>
-                    <a:lnB w="6350" cap="flat" cmpd="sng" algn="ctr">
-                      <a:solidFill>
-                        <a:srgbClr val="CBD5E1"/>
-                      </a:solidFill>
-                      <a:prstDash val="solid"/>
-                      <a:round/>
-                      <a:headEnd type="none" w="med" len="med"/>
-                      <a:tailEnd type="none" w="med" len="med"/>
-                    </a:lnB>
-                    <a:solidFill>
-                      <a:srgbClr val="FFFFFF"/>
-                    </a:solidFill>
-                  </a:tcPr>
-                </a:tc>
-                <a:tc>
-                  <a:txBody>
-                    <a:bodyPr/>
-                    <a:lstStyle/>
-                    <a:p>
-                      <a:pPr algn="ctr" indent="0" marL="0">
-                        <a:buNone/>
-                      </a:pPr>
-                      <a:r>
-                        <a:rPr lang="en-US" sz="900" dirty="0">
-                          <a:solidFill>
-                            <a:srgbClr val="000000"/>
-                          </a:solidFill>
-                          <a:latin typeface="Arial" pitchFamily="34" charset="0"/>
-                          <a:ea typeface="Arial" pitchFamily="34" charset="-122"/>
-                          <a:cs typeface="Arial" pitchFamily="34" charset="-120"/>
-                        </a:rPr>
-                        <a:t>/10</a:t>
-                      </a:r>
-                      <a:endParaRPr lang="en-US" sz="900" dirty="0">
-                        <a:latin typeface="Arial" charset="0"/>
-                        <a:ea typeface="Arial" charset="0"/>
-                        <a:cs typeface="Arial" charset="0"/>
-                      </a:endParaRPr>
-                    </a:p>
-                  </a:txBody>
-                  <a:tcPr marL="91440" marR="91440" marT="45720" marB="45720">
-                    <a:lnL w="6350" cap="flat" cmpd="sng" algn="ctr">
-                      <a:solidFill>
-                        <a:srgbClr val="CBD5E1"/>
-                      </a:solidFill>
-                      <a:prstDash val="solid"/>
-                      <a:round/>
-                      <a:headEnd type="none" w="med" len="med"/>
-                      <a:tailEnd type="none" w="med" len="med"/>
-                    </a:lnL>
-                    <a:lnR w="6350" cap="flat" cmpd="sng" algn="ctr">
-                      <a:solidFill>
-                        <a:srgbClr val="CBD5E1"/>
-                      </a:solidFill>
-                      <a:prstDash val="solid"/>
-                      <a:round/>
-                      <a:headEnd type="none" w="med" len="med"/>
-                      <a:tailEnd type="none" w="med" len="med"/>
-                    </a:lnR>
-                    <a:lnT w="6350" cap="flat" cmpd="sng" algn="ctr">
-                      <a:solidFill>
-                        <a:srgbClr val="CBD5E1"/>
-                      </a:solidFill>
-                      <a:prstDash val="solid"/>
-                      <a:round/>
-                      <a:headEnd type="none" w="med" len="med"/>
-                      <a:tailEnd type="none" w="med" len="med"/>
-                    </a:lnT>
-                    <a:lnB w="6350" cap="flat" cmpd="sng" algn="ctr">
-                      <a:solidFill>
-                        <a:srgbClr val="CBD5E1"/>
-                      </a:solidFill>
-                      <a:prstDash val="solid"/>
-                      <a:round/>
-                      <a:headEnd type="none" w="med" len="med"/>
-                      <a:tailEnd type="none" w="med" len="med"/>
-                    </a:lnB>
-                    <a:solidFill>
-                      <a:srgbClr val="FFFFFF"/>
-                    </a:solidFill>
-                  </a:tcPr>
-                </a:tc>
-                <a:tc>
-                  <a:txBody>
-                    <a:bodyPr/>
-                    <a:lstStyle/>
-                    <a:p>
-                      <a:pPr algn="ctr" indent="0" marL="0">
-                        <a:buNone/>
-                      </a:pPr>
-                      <a:r>
-                        <a:rPr lang="en-US" sz="900" dirty="0">
-                          <a:solidFill>
-                            <a:srgbClr val="000000"/>
-                          </a:solidFill>
-                          <a:latin typeface="Arial" pitchFamily="34" charset="0"/>
-                          <a:ea typeface="Arial" pitchFamily="34" charset="-122"/>
-                          <a:cs typeface="Arial" pitchFamily="34" charset="-120"/>
-                        </a:rPr>
-                        <a:t>8.48</a:t>
+                        <a:t>8.39</a:t>
                       </a:r>
                       <a:endParaRPr lang="en-US" sz="900" dirty="0">
                         <a:latin typeface="Arial" charset="0"/>
@@ -9245,7 +8922,7 @@
                           <a:ea typeface="Arial" pitchFamily="34" charset="-122"/>
                           <a:cs typeface="Arial" pitchFamily="34" charset="-120"/>
                         </a:rPr>
-                        <a:t>15</a:t>
+                        <a:t>16</a:t>
                       </a:r>
                       <a:endParaRPr lang="en-US" sz="900" dirty="0">
                         <a:latin typeface="Arial" charset="0"/>
@@ -9313,7 +8990,7 @@
                           <a:ea typeface="Arial" pitchFamily="34" charset="-122"/>
                           <a:cs typeface="Arial" pitchFamily="34" charset="-120"/>
                         </a:rPr>
-                        <a:t>8.13</a:t>
+                        <a:t>8.25</a:t>
                       </a:r>
                       <a:endParaRPr lang="en-US" sz="900" dirty="0">
                         <a:latin typeface="Arial" charset="0"/>
@@ -9449,7 +9126,7 @@
                           <a:ea typeface="Arial" pitchFamily="34" charset="-122"/>
                           <a:cs typeface="Arial" pitchFamily="34" charset="-120"/>
                         </a:rPr>
-                        <a:t>8.13</a:t>
+                        <a:t>8.25</a:t>
                       </a:r>
                       <a:endParaRPr lang="en-US" sz="900" dirty="0">
                         <a:latin typeface="Arial" charset="0"/>
@@ -9587,7 +9264,7 @@
                           <a:ea typeface="Arial" pitchFamily="34" charset="-122"/>
                           <a:cs typeface="Arial" pitchFamily="34" charset="-120"/>
                         </a:rPr>
-                        <a:t>10</a:t>
+                        <a:t>11</a:t>
                       </a:r>
                       <a:endParaRPr lang="en-US" sz="900" dirty="0">
                         <a:latin typeface="Arial" charset="0"/>
@@ -9655,7 +9332,7 @@
                           <a:ea typeface="Arial" pitchFamily="34" charset="-122"/>
                           <a:cs typeface="Arial" pitchFamily="34" charset="-120"/>
                         </a:rPr>
-                        <a:t>4</a:t>
+                        <a:t>4.09</a:t>
                       </a:r>
                       <a:endParaRPr lang="en-US" sz="900" dirty="0">
                         <a:latin typeface="Arial" charset="0"/>
@@ -9791,7 +9468,7 @@
                           <a:ea typeface="Arial" pitchFamily="34" charset="-122"/>
                           <a:cs typeface="Arial" pitchFamily="34" charset="-120"/>
                         </a:rPr>
-                        <a:t>8</a:t>
+                        <a:t>8.18</a:t>
                       </a:r>
                       <a:endParaRPr lang="en-US" sz="900" dirty="0">
                         <a:latin typeface="Arial" charset="0"/>
@@ -10199,7 +9876,7 @@
                 <a:ea typeface="Arial" pitchFamily="34" charset="-122"/>
                 <a:cs typeface="Arial" pitchFamily="34" charset="-120"/>
               </a:rPr>
-              <a:t>115件（83.9%）</a:t>
+              <a:t>116件（83.5%）</a:t>
             </a:r>
             <a:endParaRPr lang="en-US" sz="1100" dirty="0"/>
           </a:p>
@@ -10297,7 +9974,7 @@
                 <a:ea typeface="Arial" pitchFamily="34" charset="-122"/>
                 <a:cs typeface="Arial" pitchFamily="34" charset="-120"/>
               </a:rPr>
-              <a:t>21件（15.3%）</a:t>
+              <a:t>22件（15.8%）</a:t>
             </a:r>
             <a:endParaRPr lang="en-US" sz="1100" dirty="0"/>
           </a:p>
@@ -10807,7 +10484,7 @@
                 <a:ea typeface="Arial" pitchFamily="34" charset="-122"/>
                 <a:cs typeface="Arial" pitchFamily="34" charset="-120"/>
               </a:rPr>
-              <a:t>Good location, train station across the road and few shops</a:t>
+              <a:t>りんかい線品川シーサイド駅から徒歩すぐ、イオンモールにも近い抜群の立地</a:t>
             </a:r>
             <a:endParaRPr lang="en-US" sz="900" dirty="0"/>
           </a:p>
@@ -10846,7 +10523,7 @@
                 <a:ea typeface="Arial" pitchFamily="34" charset="-122"/>
                 <a:cs typeface="Arial" pitchFamily="34" charset="-120"/>
               </a:rPr>
-              <a:t>「品川シーサイド駅から近くて驚きました」</a:t>
+              <a:t>「Good location, train station across the road and few shops」</a:t>
             </a:r>
             <a:endParaRPr lang="en-US" sz="900" dirty="0"/>
           </a:p>
@@ -11030,6 +10707,452 @@
                 <a:ea typeface="Arial" pitchFamily="34" charset="-122"/>
                 <a:cs typeface="Arial" pitchFamily="34" charset="-120"/>
               </a:rPr>
+              <a:t>部屋もきれいで過ごしやすい</a:t>
+            </a:r>
+            <a:endParaRPr lang="en-US" sz="900" dirty="0"/>
+          </a:p>
+        </p:txBody>
+      </p:sp>
+      <p:sp>
+        <p:nvSpPr>
+          <p:cNvPr id="18" name="Text 16"/>
+          <p:cNvSpPr/>
+          <p:nvPr/>
+        </p:nvSpPr>
+        <p:spPr>
+          <a:xfrm>
+            <a:off x="3429000" y="1828800"/>
+            <a:ext cx="2377440" cy="640080"/>
+          </a:xfrm>
+          <a:prstGeom prst="rect">
+            <a:avLst/>
+          </a:prstGeom>
+          <a:noFill/>
+          <a:ln/>
+        </p:spPr>
+        <p:txBody>
+          <a:bodyPr wrap="square" lIns="0" tIns="0" rIns="0" bIns="0" rtlCol="0" anchor="ctr"/>
+          <a:lstStyle/>
+          <a:p>
+            <a:pPr indent="0" marL="0">
+              <a:buNone/>
+            </a:pPr>
+            <a:r>
+              <a:rPr lang="en-US" sz="900" i="1" dirty="0">
+                <a:solidFill>
+                  <a:srgbClr val="3B7DD8"/>
+                </a:solidFill>
+                <a:latin typeface="Arial" pitchFamily="34" charset="0"/>
+                <a:ea typeface="Arial" pitchFamily="34" charset="-122"/>
+                <a:cs typeface="Arial" pitchFamily="34" charset="-120"/>
+              </a:rPr>
+              <a:t>「部屋は綺麗で朝ごはんも美味しかったです」</a:t>
+            </a:r>
+            <a:endParaRPr lang="en-US" sz="900" dirty="0"/>
+          </a:p>
+        </p:txBody>
+      </p:sp>
+      <p:sp>
+        <p:nvSpPr>
+          <p:cNvPr id="19" name="Shape 17"/>
+          <p:cNvSpPr/>
+          <p:nvPr/>
+        </p:nvSpPr>
+        <p:spPr>
+          <a:xfrm>
+            <a:off x="6126480" y="1051560"/>
+            <a:ext cx="2651760" cy="1600200"/>
+          </a:xfrm>
+          <a:prstGeom prst="rect">
+            <a:avLst/>
+          </a:prstGeom>
+          <a:solidFill>
+            <a:srgbClr val="FFFFFF"/>
+          </a:solidFill>
+          <a:ln/>
+          <a:effectLst>
+            <a:outerShdw sx="100000" sy="100000" kx="0" ky="0" algn="bl" rotWithShape="0" blurRad="50800" dist="25400" dir="8100000">
+              <a:srgbClr val="000000">
+                <a:alpha val="10000"/>
+              </a:srgbClr>
+            </a:outerShdw>
+          </a:effectLst>
+        </p:spPr>
+      </p:sp>
+      <p:sp>
+        <p:nvSpPr>
+          <p:cNvPr id="20" name="Shape 18"/>
+          <p:cNvSpPr/>
+          <p:nvPr/>
+        </p:nvSpPr>
+        <p:spPr>
+          <a:xfrm>
+            <a:off x="6126480" y="1051560"/>
+            <a:ext cx="54864" cy="1600200"/>
+          </a:xfrm>
+          <a:prstGeom prst="rect">
+            <a:avLst/>
+          </a:prstGeom>
+          <a:solidFill>
+            <a:srgbClr val="16A34A"/>
+          </a:solidFill>
+          <a:ln/>
+        </p:spPr>
+      </p:sp>
+      <p:sp>
+        <p:nvSpPr>
+          <p:cNvPr id="21" name="Shape 19"/>
+          <p:cNvSpPr/>
+          <p:nvPr/>
+        </p:nvSpPr>
+        <p:spPr>
+          <a:xfrm>
+            <a:off x="7955280" y="1124712"/>
+            <a:ext cx="658368" cy="228600"/>
+          </a:xfrm>
+          <a:prstGeom prst="rect">
+            <a:avLst/>
+          </a:prstGeom>
+          <a:solidFill>
+            <a:srgbClr val="DCFCE7"/>
+          </a:solidFill>
+          <a:ln/>
+        </p:spPr>
+      </p:sp>
+      <p:sp>
+        <p:nvSpPr>
+          <p:cNvPr id="22" name="Text 20"/>
+          <p:cNvSpPr/>
+          <p:nvPr/>
+        </p:nvSpPr>
+        <p:spPr>
+          <a:xfrm>
+            <a:off x="7955280" y="1124712"/>
+            <a:ext cx="658368" cy="228600"/>
+          </a:xfrm>
+          <a:prstGeom prst="rect">
+            <a:avLst/>
+          </a:prstGeom>
+          <a:noFill/>
+          <a:ln/>
+        </p:spPr>
+        <p:txBody>
+          <a:bodyPr wrap="square" lIns="0" tIns="0" rIns="0" bIns="0" rtlCol="0" anchor="ctr"/>
+          <a:lstStyle/>
+          <a:p>
+            <a:pPr algn="ctr" indent="0" marL="0">
+              <a:buNone/>
+            </a:pPr>
+            <a:r>
+              <a:rPr lang="en-US" sz="900" b="1" dirty="0">
+                <a:solidFill>
+                  <a:srgbClr val="16A34A"/>
+                </a:solidFill>
+                <a:latin typeface="Arial" pitchFamily="34" charset="0"/>
+                <a:ea typeface="Arial" pitchFamily="34" charset="-122"/>
+                <a:cs typeface="Arial" pitchFamily="34" charset="-120"/>
+              </a:rPr>
+              <a:t>20件+</a:t>
+            </a:r>
+            <a:endParaRPr lang="en-US" sz="900" dirty="0"/>
+          </a:p>
+        </p:txBody>
+      </p:sp>
+      <p:sp>
+        <p:nvSpPr>
+          <p:cNvPr id="23" name="Text 21"/>
+          <p:cNvSpPr/>
+          <p:nvPr/>
+        </p:nvSpPr>
+        <p:spPr>
+          <a:xfrm>
+            <a:off x="6263640" y="1124712"/>
+            <a:ext cx="1645920" cy="274320"/>
+          </a:xfrm>
+          <a:prstGeom prst="rect">
+            <a:avLst/>
+          </a:prstGeom>
+          <a:noFill/>
+          <a:ln/>
+        </p:spPr>
+        <p:txBody>
+          <a:bodyPr wrap="square" lIns="0" tIns="0" rIns="0" bIns="0" rtlCol="0" anchor="ctr"/>
+          <a:lstStyle/>
+          <a:p>
+            <a:pPr indent="0" marL="0">
+              <a:buNone/>
+            </a:pPr>
+            <a:r>
+              <a:rPr lang="en-US" sz="1300" b="1" dirty="0">
+                <a:solidFill>
+                  <a:srgbClr val="1A2744"/>
+                </a:solidFill>
+                <a:latin typeface="Arial" pitchFamily="34" charset="0"/>
+                <a:ea typeface="Arial" pitchFamily="34" charset="-122"/>
+                <a:cs typeface="Arial" pitchFamily="34" charset="-120"/>
+              </a:rPr>
+              <a:t>快適さ・設備</a:t>
+            </a:r>
+            <a:endParaRPr lang="en-US" sz="1300" dirty="0"/>
+          </a:p>
+        </p:txBody>
+      </p:sp>
+      <p:sp>
+        <p:nvSpPr>
+          <p:cNvPr id="24" name="Text 22"/>
+          <p:cNvSpPr/>
+          <p:nvPr/>
+        </p:nvSpPr>
+        <p:spPr>
+          <a:xfrm>
+            <a:off x="6263640" y="1417320"/>
+            <a:ext cx="2377440" cy="365760"/>
+          </a:xfrm>
+          <a:prstGeom prst="rect">
+            <a:avLst/>
+          </a:prstGeom>
+          <a:noFill/>
+          <a:ln/>
+        </p:spPr>
+        <p:txBody>
+          <a:bodyPr wrap="square" lIns="0" tIns="0" rIns="0" bIns="0" rtlCol="0" anchor="ctr"/>
+          <a:lstStyle/>
+          <a:p>
+            <a:pPr indent="0" marL="0">
+              <a:buNone/>
+            </a:pPr>
+            <a:r>
+              <a:rPr lang="en-US" sz="900" dirty="0">
+                <a:solidFill>
+                  <a:srgbClr val="64748B"/>
+                </a:solidFill>
+                <a:latin typeface="Arial" pitchFamily="34" charset="0"/>
+                <a:ea typeface="Arial" pitchFamily="34" charset="-122"/>
+                <a:cs typeface="Arial" pitchFamily="34" charset="-120"/>
+              </a:rPr>
+              <a:t>The room had a humidity smell and was pretty worn out アメニ...</a:t>
+            </a:r>
+            <a:endParaRPr lang="en-US" sz="900" dirty="0"/>
+          </a:p>
+        </p:txBody>
+      </p:sp>
+      <p:sp>
+        <p:nvSpPr>
+          <p:cNvPr id="25" name="Text 23"/>
+          <p:cNvSpPr/>
+          <p:nvPr/>
+        </p:nvSpPr>
+        <p:spPr>
+          <a:xfrm>
+            <a:off x="6263640" y="1828800"/>
+            <a:ext cx="2377440" cy="640080"/>
+          </a:xfrm>
+          <a:prstGeom prst="rect">
+            <a:avLst/>
+          </a:prstGeom>
+          <a:noFill/>
+          <a:ln/>
+        </p:spPr>
+        <p:txBody>
+          <a:bodyPr wrap="square" lIns="0" tIns="0" rIns="0" bIns="0" rtlCol="0" anchor="ctr"/>
+          <a:lstStyle/>
+          <a:p>
+            <a:pPr indent="0" marL="0">
+              <a:buNone/>
+            </a:pPr>
+            <a:r>
+              <a:rPr lang="en-US" sz="900" i="1" dirty="0">
+                <a:solidFill>
+                  <a:srgbClr val="3B7DD8"/>
+                </a:solidFill>
+                <a:latin typeface="Arial" pitchFamily="34" charset="0"/>
+                <a:ea typeface="Arial" pitchFamily="34" charset="-122"/>
+                <a:cs typeface="Arial" pitchFamily="34" charset="-120"/>
+              </a:rPr>
+              <a:t>「いつも利用させていただいてます  部屋も広く快適です  交通の便利がよく特にビッグサイトでの展示会などがある時は良...」</a:t>
+            </a:r>
+            <a:endParaRPr lang="en-US" sz="900" dirty="0"/>
+          </a:p>
+        </p:txBody>
+      </p:sp>
+      <p:sp>
+        <p:nvSpPr>
+          <p:cNvPr id="26" name="Shape 24"/>
+          <p:cNvSpPr/>
+          <p:nvPr/>
+        </p:nvSpPr>
+        <p:spPr>
+          <a:xfrm>
+            <a:off x="457200" y="2880360"/>
+            <a:ext cx="2651760" cy="1600200"/>
+          </a:xfrm>
+          <a:prstGeom prst="rect">
+            <a:avLst/>
+          </a:prstGeom>
+          <a:solidFill>
+            <a:srgbClr val="FFFFFF"/>
+          </a:solidFill>
+          <a:ln/>
+          <a:effectLst>
+            <a:outerShdw sx="100000" sy="100000" kx="0" ky="0" algn="bl" rotWithShape="0" blurRad="50800" dist="25400" dir="8100000">
+              <a:srgbClr val="000000">
+                <a:alpha val="10000"/>
+              </a:srgbClr>
+            </a:outerShdw>
+          </a:effectLst>
+        </p:spPr>
+      </p:sp>
+      <p:sp>
+        <p:nvSpPr>
+          <p:cNvPr id="27" name="Shape 25"/>
+          <p:cNvSpPr/>
+          <p:nvPr/>
+        </p:nvSpPr>
+        <p:spPr>
+          <a:xfrm>
+            <a:off x="457200" y="2880360"/>
+            <a:ext cx="54864" cy="1600200"/>
+          </a:xfrm>
+          <a:prstGeom prst="rect">
+            <a:avLst/>
+          </a:prstGeom>
+          <a:solidFill>
+            <a:srgbClr val="16A34A"/>
+          </a:solidFill>
+          <a:ln/>
+        </p:spPr>
+      </p:sp>
+      <p:sp>
+        <p:nvSpPr>
+          <p:cNvPr id="28" name="Shape 26"/>
+          <p:cNvSpPr/>
+          <p:nvPr/>
+        </p:nvSpPr>
+        <p:spPr>
+          <a:xfrm>
+            <a:off x="2286000" y="2953512"/>
+            <a:ext cx="658368" cy="228600"/>
+          </a:xfrm>
+          <a:prstGeom prst="rect">
+            <a:avLst/>
+          </a:prstGeom>
+          <a:solidFill>
+            <a:srgbClr val="DCFCE7"/>
+          </a:solidFill>
+          <a:ln/>
+        </p:spPr>
+      </p:sp>
+      <p:sp>
+        <p:nvSpPr>
+          <p:cNvPr id="29" name="Text 27"/>
+          <p:cNvSpPr/>
+          <p:nvPr/>
+        </p:nvSpPr>
+        <p:spPr>
+          <a:xfrm>
+            <a:off x="2286000" y="2953512"/>
+            <a:ext cx="658368" cy="228600"/>
+          </a:xfrm>
+          <a:prstGeom prst="rect">
+            <a:avLst/>
+          </a:prstGeom>
+          <a:noFill/>
+          <a:ln/>
+        </p:spPr>
+        <p:txBody>
+          <a:bodyPr wrap="square" lIns="0" tIns="0" rIns="0" bIns="0" rtlCol="0" anchor="ctr"/>
+          <a:lstStyle/>
+          <a:p>
+            <a:pPr algn="ctr" indent="0" marL="0">
+              <a:buNone/>
+            </a:pPr>
+            <a:r>
+              <a:rPr lang="en-US" sz="900" b="1" dirty="0">
+                <a:solidFill>
+                  <a:srgbClr val="16A34A"/>
+                </a:solidFill>
+                <a:latin typeface="Arial" pitchFamily="34" charset="0"/>
+                <a:ea typeface="Arial" pitchFamily="34" charset="-122"/>
+                <a:cs typeface="Arial" pitchFamily="34" charset="-120"/>
+              </a:rPr>
+              <a:t>20件+</a:t>
+            </a:r>
+            <a:endParaRPr lang="en-US" sz="900" dirty="0"/>
+          </a:p>
+        </p:txBody>
+      </p:sp>
+      <p:sp>
+        <p:nvSpPr>
+          <p:cNvPr id="30" name="Text 28"/>
+          <p:cNvSpPr/>
+          <p:nvPr/>
+        </p:nvSpPr>
+        <p:spPr>
+          <a:xfrm>
+            <a:off x="594360" y="2953512"/>
+            <a:ext cx="1645920" cy="274320"/>
+          </a:xfrm>
+          <a:prstGeom prst="rect">
+            <a:avLst/>
+          </a:prstGeom>
+          <a:noFill/>
+          <a:ln/>
+        </p:spPr>
+        <p:txBody>
+          <a:bodyPr wrap="square" lIns="0" tIns="0" rIns="0" bIns="0" rtlCol="0" anchor="ctr"/>
+          <a:lstStyle/>
+          <a:p>
+            <a:pPr indent="0" marL="0">
+              <a:buNone/>
+            </a:pPr>
+            <a:r>
+              <a:rPr lang="en-US" sz="1300" b="1" dirty="0">
+                <a:solidFill>
+                  <a:srgbClr val="1A2744"/>
+                </a:solidFill>
+                <a:latin typeface="Arial" pitchFamily="34" charset="0"/>
+                <a:ea typeface="Arial" pitchFamily="34" charset="-122"/>
+                <a:cs typeface="Arial" pitchFamily="34" charset="-120"/>
+              </a:rPr>
+              <a:t>スタッフの対応</a:t>
+            </a:r>
+            <a:endParaRPr lang="en-US" sz="1300" dirty="0"/>
+          </a:p>
+        </p:txBody>
+      </p:sp>
+      <p:sp>
+        <p:nvSpPr>
+          <p:cNvPr id="31" name="Text 29"/>
+          <p:cNvSpPr/>
+          <p:nvPr/>
+        </p:nvSpPr>
+        <p:spPr>
+          <a:xfrm>
+            <a:off x="594360" y="3246120"/>
+            <a:ext cx="2377440" cy="365760"/>
+          </a:xfrm>
+          <a:prstGeom prst="rect">
+            <a:avLst/>
+          </a:prstGeom>
+          <a:noFill/>
+          <a:ln/>
+        </p:spPr>
+        <p:txBody>
+          <a:bodyPr wrap="square" lIns="0" tIns="0" rIns="0" bIns="0" rtlCol="0" anchor="ctr"/>
+          <a:lstStyle/>
+          <a:p>
+            <a:pPr indent="0" marL="0">
+              <a:buNone/>
+            </a:pPr>
+            <a:r>
+              <a:rPr lang="en-US" sz="900" dirty="0">
+                <a:solidFill>
+                  <a:srgbClr val="64748B"/>
+                </a:solidFill>
+                <a:latin typeface="Arial" pitchFamily="34" charset="0"/>
+                <a:ea typeface="Arial" pitchFamily="34" charset="-122"/>
+                <a:cs typeface="Arial" pitchFamily="34" charset="-120"/>
+              </a:rPr>
               <a:t>部屋が4人部屋になってビックリしましたが、フロントからお部屋から全部綺麗で大満足です</a:t>
             </a:r>
             <a:endParaRPr lang="en-US" sz="900" dirty="0"/>
@@ -11038,13 +11161,13 @@
       </p:sp>
       <p:sp>
         <p:nvSpPr>
-          <p:cNvPr id="18" name="Text 16"/>
-          <p:cNvSpPr/>
-          <p:nvPr/>
-        </p:nvSpPr>
-        <p:spPr>
-          <a:xfrm>
-            <a:off x="3429000" y="1828800"/>
+          <p:cNvPr id="32" name="Text 30"/>
+          <p:cNvSpPr/>
+          <p:nvPr/>
+        </p:nvSpPr>
+        <p:spPr>
+          <a:xfrm>
+            <a:off x="594360" y="3657600"/>
             <a:ext cx="2377440" cy="640080"/>
           </a:xfrm>
           <a:prstGeom prst="rect">
@@ -11077,13 +11200,13 @@
       </p:sp>
       <p:sp>
         <p:nvSpPr>
-          <p:cNvPr id="19" name="Shape 17"/>
-          <p:cNvSpPr/>
-          <p:nvPr/>
-        </p:nvSpPr>
-        <p:spPr>
-          <a:xfrm>
-            <a:off x="6126480" y="1051560"/>
+          <p:cNvPr id="33" name="Shape 31"/>
+          <p:cNvSpPr/>
+          <p:nvPr/>
+        </p:nvSpPr>
+        <p:spPr>
+          <a:xfrm>
+            <a:off x="3291840" y="2880360"/>
             <a:ext cx="2651760" cy="1600200"/>
           </a:xfrm>
           <a:prstGeom prst="rect">
@@ -11104,13 +11227,13 @@
       </p:sp>
       <p:sp>
         <p:nvSpPr>
-          <p:cNvPr id="20" name="Shape 18"/>
-          <p:cNvSpPr/>
-          <p:nvPr/>
-        </p:nvSpPr>
-        <p:spPr>
-          <a:xfrm>
-            <a:off x="6126480" y="1051560"/>
+          <p:cNvPr id="34" name="Shape 32"/>
+          <p:cNvSpPr/>
+          <p:nvPr/>
+        </p:nvSpPr>
+        <p:spPr>
+          <a:xfrm>
+            <a:off x="3291840" y="2880360"/>
             <a:ext cx="54864" cy="1600200"/>
           </a:xfrm>
           <a:prstGeom prst="rect">
@@ -11124,13 +11247,13 @@
       </p:sp>
       <p:sp>
         <p:nvSpPr>
-          <p:cNvPr id="21" name="Shape 19"/>
-          <p:cNvSpPr/>
-          <p:nvPr/>
-        </p:nvSpPr>
-        <p:spPr>
-          <a:xfrm>
-            <a:off x="7955280" y="1124712"/>
+          <p:cNvPr id="35" name="Shape 33"/>
+          <p:cNvSpPr/>
+          <p:nvPr/>
+        </p:nvSpPr>
+        <p:spPr>
+          <a:xfrm>
+            <a:off x="5120640" y="2953512"/>
             <a:ext cx="658368" cy="228600"/>
           </a:xfrm>
           <a:prstGeom prst="rect">
@@ -11144,13 +11267,13 @@
       </p:sp>
       <p:sp>
         <p:nvSpPr>
-          <p:cNvPr id="22" name="Text 20"/>
-          <p:cNvSpPr/>
-          <p:nvPr/>
-        </p:nvSpPr>
-        <p:spPr>
-          <a:xfrm>
-            <a:off x="7955280" y="1124712"/>
+          <p:cNvPr id="36" name="Text 34"/>
+          <p:cNvSpPr/>
+          <p:nvPr/>
+        </p:nvSpPr>
+        <p:spPr>
+          <a:xfrm>
+            <a:off x="5120640" y="2953512"/>
             <a:ext cx="658368" cy="228600"/>
           </a:xfrm>
           <a:prstGeom prst="rect">
@@ -11183,13 +11306,13 @@
       </p:sp>
       <p:sp>
         <p:nvSpPr>
-          <p:cNvPr id="23" name="Text 21"/>
-          <p:cNvSpPr/>
-          <p:nvPr/>
-        </p:nvSpPr>
-        <p:spPr>
-          <a:xfrm>
-            <a:off x="6263640" y="1124712"/>
+          <p:cNvPr id="37" name="Text 35"/>
+          <p:cNvSpPr/>
+          <p:nvPr/>
+        </p:nvSpPr>
+        <p:spPr>
+          <a:xfrm>
+            <a:off x="3429000" y="2953512"/>
             <a:ext cx="1645920" cy="274320"/>
           </a:xfrm>
           <a:prstGeom prst="rect">
@@ -11214,7 +11337,7 @@
                 <a:ea typeface="Arial" pitchFamily="34" charset="-122"/>
                 <a:cs typeface="Arial" pitchFamily="34" charset="-120"/>
               </a:rPr>
-              <a:t>快適さ・設備</a:t>
+              <a:t>コンビニ・周辺施設</a:t>
             </a:r>
             <a:endParaRPr lang="en-US" sz="1300" dirty="0"/>
           </a:p>
@@ -11222,13 +11345,13 @@
       </p:sp>
       <p:sp>
         <p:nvSpPr>
-          <p:cNvPr id="24" name="Text 22"/>
-          <p:cNvSpPr/>
-          <p:nvPr/>
-        </p:nvSpPr>
-        <p:spPr>
-          <a:xfrm>
-            <a:off x="6263640" y="1417320"/>
+          <p:cNvPr id="38" name="Text 36"/>
+          <p:cNvSpPr/>
+          <p:nvPr/>
+        </p:nvSpPr>
+        <p:spPr>
+          <a:xfrm>
+            <a:off x="3429000" y="3246120"/>
             <a:ext cx="2377440" cy="365760"/>
           </a:xfrm>
           <a:prstGeom prst="rect">
@@ -11253,7 +11376,7 @@
                 <a:ea typeface="Arial" pitchFamily="34" charset="-122"/>
                 <a:cs typeface="Arial" pitchFamily="34" charset="-120"/>
               </a:rPr>
-              <a:t>The room had a humidity smell and was pretty worn out アメニ...</a:t>
+              <a:t>それ以外はとても便利で、近くにイオンのスーパーマーケットがあるので、買い物や交通の便も良かったです</a:t>
             </a:r>
             <a:endParaRPr lang="en-US" sz="900" dirty="0"/>
           </a:p>
@@ -11261,13 +11384,13 @@
       </p:sp>
       <p:sp>
         <p:nvSpPr>
-          <p:cNvPr id="25" name="Text 23"/>
-          <p:cNvSpPr/>
-          <p:nvPr/>
-        </p:nvSpPr>
-        <p:spPr>
-          <a:xfrm>
-            <a:off x="6263640" y="1828800"/>
+          <p:cNvPr id="39" name="Text 37"/>
+          <p:cNvSpPr/>
+          <p:nvPr/>
+        </p:nvSpPr>
+        <p:spPr>
+          <a:xfrm>
+            <a:off x="3429000" y="3657600"/>
             <a:ext cx="2377440" cy="640080"/>
           </a:xfrm>
           <a:prstGeom prst="rect">
@@ -11292,7 +11415,7 @@
                 <a:ea typeface="Arial" pitchFamily="34" charset="-122"/>
                 <a:cs typeface="Arial" pitchFamily="34" charset="-120"/>
               </a:rPr>
-              <a:t>「いつも利用させていただいてます  部屋も広く快適です  交通の便利がよく特にビッグサイトでの展示会などがある時は良...」</a:t>
+              <a:t>「近くにイオンモールやコンビニなどあり、とても便利でした」</a:t>
             </a:r>
             <a:endParaRPr lang="en-US" sz="900" dirty="0"/>
           </a:p>
@@ -11300,13 +11423,13 @@
       </p:sp>
       <p:sp>
         <p:nvSpPr>
-          <p:cNvPr id="26" name="Shape 24"/>
-          <p:cNvSpPr/>
-          <p:nvPr/>
-        </p:nvSpPr>
-        <p:spPr>
-          <a:xfrm>
-            <a:off x="457200" y="2880360"/>
+          <p:cNvPr id="40" name="Shape 38"/>
+          <p:cNvSpPr/>
+          <p:nvPr/>
+        </p:nvSpPr>
+        <p:spPr>
+          <a:xfrm>
+            <a:off x="6126480" y="2880360"/>
             <a:ext cx="2651760" cy="1600200"/>
           </a:xfrm>
           <a:prstGeom prst="rect">
@@ -11327,13 +11450,13 @@
       </p:sp>
       <p:sp>
         <p:nvSpPr>
-          <p:cNvPr id="27" name="Shape 25"/>
-          <p:cNvSpPr/>
-          <p:nvPr/>
-        </p:nvSpPr>
-        <p:spPr>
-          <a:xfrm>
-            <a:off x="457200" y="2880360"/>
+          <p:cNvPr id="41" name="Shape 39"/>
+          <p:cNvSpPr/>
+          <p:nvPr/>
+        </p:nvSpPr>
+        <p:spPr>
+          <a:xfrm>
+            <a:off x="6126480" y="2880360"/>
             <a:ext cx="54864" cy="1600200"/>
           </a:xfrm>
           <a:prstGeom prst="rect">
@@ -11347,13 +11470,13 @@
       </p:sp>
       <p:sp>
         <p:nvSpPr>
-          <p:cNvPr id="28" name="Shape 26"/>
-          <p:cNvSpPr/>
-          <p:nvPr/>
-        </p:nvSpPr>
-        <p:spPr>
-          <a:xfrm>
-            <a:off x="2286000" y="2953512"/>
+          <p:cNvPr id="42" name="Shape 40"/>
+          <p:cNvSpPr/>
+          <p:nvPr/>
+        </p:nvSpPr>
+        <p:spPr>
+          <a:xfrm>
+            <a:off x="7955280" y="2953512"/>
             <a:ext cx="658368" cy="228600"/>
           </a:xfrm>
           <a:prstGeom prst="rect">
@@ -11367,13 +11490,13 @@
       </p:sp>
       <p:sp>
         <p:nvSpPr>
-          <p:cNvPr id="29" name="Text 27"/>
-          <p:cNvSpPr/>
-          <p:nvPr/>
-        </p:nvSpPr>
-        <p:spPr>
-          <a:xfrm>
-            <a:off x="2286000" y="2953512"/>
+          <p:cNvPr id="43" name="Text 41"/>
+          <p:cNvSpPr/>
+          <p:nvPr/>
+        </p:nvSpPr>
+        <p:spPr>
+          <a:xfrm>
+            <a:off x="7955280" y="2953512"/>
             <a:ext cx="658368" cy="228600"/>
           </a:xfrm>
           <a:prstGeom prst="rect">
@@ -11406,452 +11529,6 @@
       </p:sp>
       <p:sp>
         <p:nvSpPr>
-          <p:cNvPr id="30" name="Text 28"/>
-          <p:cNvSpPr/>
-          <p:nvPr/>
-        </p:nvSpPr>
-        <p:spPr>
-          <a:xfrm>
-            <a:off x="594360" y="2953512"/>
-            <a:ext cx="1645920" cy="274320"/>
-          </a:xfrm>
-          <a:prstGeom prst="rect">
-            <a:avLst/>
-          </a:prstGeom>
-          <a:noFill/>
-          <a:ln/>
-        </p:spPr>
-        <p:txBody>
-          <a:bodyPr wrap="square" lIns="0" tIns="0" rIns="0" bIns="0" rtlCol="0" anchor="ctr"/>
-          <a:lstStyle/>
-          <a:p>
-            <a:pPr indent="0" marL="0">
-              <a:buNone/>
-            </a:pPr>
-            <a:r>
-              <a:rPr lang="en-US" sz="1300" b="1" dirty="0">
-                <a:solidFill>
-                  <a:srgbClr val="1A2744"/>
-                </a:solidFill>
-                <a:latin typeface="Arial" pitchFamily="34" charset="0"/>
-                <a:ea typeface="Arial" pitchFamily="34" charset="-122"/>
-                <a:cs typeface="Arial" pitchFamily="34" charset="-120"/>
-              </a:rPr>
-              <a:t>スタッフの対応</a:t>
-            </a:r>
-            <a:endParaRPr lang="en-US" sz="1300" dirty="0"/>
-          </a:p>
-        </p:txBody>
-      </p:sp>
-      <p:sp>
-        <p:nvSpPr>
-          <p:cNvPr id="31" name="Text 29"/>
-          <p:cNvSpPr/>
-          <p:nvPr/>
-        </p:nvSpPr>
-        <p:spPr>
-          <a:xfrm>
-            <a:off x="594360" y="3246120"/>
-            <a:ext cx="2377440" cy="365760"/>
-          </a:xfrm>
-          <a:prstGeom prst="rect">
-            <a:avLst/>
-          </a:prstGeom>
-          <a:noFill/>
-          <a:ln/>
-        </p:spPr>
-        <p:txBody>
-          <a:bodyPr wrap="square" lIns="0" tIns="0" rIns="0" bIns="0" rtlCol="0" anchor="ctr"/>
-          <a:lstStyle/>
-          <a:p>
-            <a:pPr indent="0" marL="0">
-              <a:buNone/>
-            </a:pPr>
-            <a:r>
-              <a:rPr lang="en-US" sz="900" dirty="0">
-                <a:solidFill>
-                  <a:srgbClr val="64748B"/>
-                </a:solidFill>
-                <a:latin typeface="Arial" pitchFamily="34" charset="0"/>
-                <a:ea typeface="Arial" pitchFamily="34" charset="-122"/>
-                <a:cs typeface="Arial" pitchFamily="34" charset="-120"/>
-              </a:rPr>
-              <a:t>部屋が4人部屋になってビックリしましたが、フロントからお部屋から全部綺麗で大満足です</a:t>
-            </a:r>
-            <a:endParaRPr lang="en-US" sz="900" dirty="0"/>
-          </a:p>
-        </p:txBody>
-      </p:sp>
-      <p:sp>
-        <p:nvSpPr>
-          <p:cNvPr id="32" name="Text 30"/>
-          <p:cNvSpPr/>
-          <p:nvPr/>
-        </p:nvSpPr>
-        <p:spPr>
-          <a:xfrm>
-            <a:off x="594360" y="3657600"/>
-            <a:ext cx="2377440" cy="640080"/>
-          </a:xfrm>
-          <a:prstGeom prst="rect">
-            <a:avLst/>
-          </a:prstGeom>
-          <a:noFill/>
-          <a:ln/>
-        </p:spPr>
-        <p:txBody>
-          <a:bodyPr wrap="square" lIns="0" tIns="0" rIns="0" bIns="0" rtlCol="0" anchor="ctr"/>
-          <a:lstStyle/>
-          <a:p>
-            <a:pPr indent="0" marL="0">
-              <a:buNone/>
-            </a:pPr>
-            <a:r>
-              <a:rPr lang="en-US" sz="900" i="1" dirty="0">
-                <a:solidFill>
-                  <a:srgbClr val="3B7DD8"/>
-                </a:solidFill>
-                <a:latin typeface="Arial" pitchFamily="34" charset="0"/>
-                <a:ea typeface="Arial" pitchFamily="34" charset="-122"/>
-                <a:cs typeface="Arial" pitchFamily="34" charset="-120"/>
-              </a:rPr>
-              <a:t>「結局ホテルのフロントさんが親切に料金まで教えてくれてコインパーキングに停めることがでいたので夜景もキレイで文句ない...」</a:t>
-            </a:r>
-            <a:endParaRPr lang="en-US" sz="900" dirty="0"/>
-          </a:p>
-        </p:txBody>
-      </p:sp>
-      <p:sp>
-        <p:nvSpPr>
-          <p:cNvPr id="33" name="Shape 31"/>
-          <p:cNvSpPr/>
-          <p:nvPr/>
-        </p:nvSpPr>
-        <p:spPr>
-          <a:xfrm>
-            <a:off x="3291840" y="2880360"/>
-            <a:ext cx="2651760" cy="1600200"/>
-          </a:xfrm>
-          <a:prstGeom prst="rect">
-            <a:avLst/>
-          </a:prstGeom>
-          <a:solidFill>
-            <a:srgbClr val="FFFFFF"/>
-          </a:solidFill>
-          <a:ln/>
-          <a:effectLst>
-            <a:outerShdw sx="100000" sy="100000" kx="0" ky="0" algn="bl" rotWithShape="0" blurRad="50800" dist="25400" dir="8100000">
-              <a:srgbClr val="000000">
-                <a:alpha val="10000"/>
-              </a:srgbClr>
-            </a:outerShdw>
-          </a:effectLst>
-        </p:spPr>
-      </p:sp>
-      <p:sp>
-        <p:nvSpPr>
-          <p:cNvPr id="34" name="Shape 32"/>
-          <p:cNvSpPr/>
-          <p:nvPr/>
-        </p:nvSpPr>
-        <p:spPr>
-          <a:xfrm>
-            <a:off x="3291840" y="2880360"/>
-            <a:ext cx="54864" cy="1600200"/>
-          </a:xfrm>
-          <a:prstGeom prst="rect">
-            <a:avLst/>
-          </a:prstGeom>
-          <a:solidFill>
-            <a:srgbClr val="16A34A"/>
-          </a:solidFill>
-          <a:ln/>
-        </p:spPr>
-      </p:sp>
-      <p:sp>
-        <p:nvSpPr>
-          <p:cNvPr id="35" name="Shape 33"/>
-          <p:cNvSpPr/>
-          <p:nvPr/>
-        </p:nvSpPr>
-        <p:spPr>
-          <a:xfrm>
-            <a:off x="5120640" y="2953512"/>
-            <a:ext cx="658368" cy="228600"/>
-          </a:xfrm>
-          <a:prstGeom prst="rect">
-            <a:avLst/>
-          </a:prstGeom>
-          <a:solidFill>
-            <a:srgbClr val="DCFCE7"/>
-          </a:solidFill>
-          <a:ln/>
-        </p:spPr>
-      </p:sp>
-      <p:sp>
-        <p:nvSpPr>
-          <p:cNvPr id="36" name="Text 34"/>
-          <p:cNvSpPr/>
-          <p:nvPr/>
-        </p:nvSpPr>
-        <p:spPr>
-          <a:xfrm>
-            <a:off x="5120640" y="2953512"/>
-            <a:ext cx="658368" cy="228600"/>
-          </a:xfrm>
-          <a:prstGeom prst="rect">
-            <a:avLst/>
-          </a:prstGeom>
-          <a:noFill/>
-          <a:ln/>
-        </p:spPr>
-        <p:txBody>
-          <a:bodyPr wrap="square" lIns="0" tIns="0" rIns="0" bIns="0" rtlCol="0" anchor="ctr"/>
-          <a:lstStyle/>
-          <a:p>
-            <a:pPr algn="ctr" indent="0" marL="0">
-              <a:buNone/>
-            </a:pPr>
-            <a:r>
-              <a:rPr lang="en-US" sz="900" b="1" dirty="0">
-                <a:solidFill>
-                  <a:srgbClr val="16A34A"/>
-                </a:solidFill>
-                <a:latin typeface="Arial" pitchFamily="34" charset="0"/>
-                <a:ea typeface="Arial" pitchFamily="34" charset="-122"/>
-                <a:cs typeface="Arial" pitchFamily="34" charset="-120"/>
-              </a:rPr>
-              <a:t>20件+</a:t>
-            </a:r>
-            <a:endParaRPr lang="en-US" sz="900" dirty="0"/>
-          </a:p>
-        </p:txBody>
-      </p:sp>
-      <p:sp>
-        <p:nvSpPr>
-          <p:cNvPr id="37" name="Text 35"/>
-          <p:cNvSpPr/>
-          <p:nvPr/>
-        </p:nvSpPr>
-        <p:spPr>
-          <a:xfrm>
-            <a:off x="3429000" y="2953512"/>
-            <a:ext cx="1645920" cy="274320"/>
-          </a:xfrm>
-          <a:prstGeom prst="rect">
-            <a:avLst/>
-          </a:prstGeom>
-          <a:noFill/>
-          <a:ln/>
-        </p:spPr>
-        <p:txBody>
-          <a:bodyPr wrap="square" lIns="0" tIns="0" rIns="0" bIns="0" rtlCol="0" anchor="ctr"/>
-          <a:lstStyle/>
-          <a:p>
-            <a:pPr indent="0" marL="0">
-              <a:buNone/>
-            </a:pPr>
-            <a:r>
-              <a:rPr lang="en-US" sz="1300" b="1" dirty="0">
-                <a:solidFill>
-                  <a:srgbClr val="1A2744"/>
-                </a:solidFill>
-                <a:latin typeface="Arial" pitchFamily="34" charset="0"/>
-                <a:ea typeface="Arial" pitchFamily="34" charset="-122"/>
-                <a:cs typeface="Arial" pitchFamily="34" charset="-120"/>
-              </a:rPr>
-              <a:t>コンビニ・周辺施設</a:t>
-            </a:r>
-            <a:endParaRPr lang="en-US" sz="1300" dirty="0"/>
-          </a:p>
-        </p:txBody>
-      </p:sp>
-      <p:sp>
-        <p:nvSpPr>
-          <p:cNvPr id="38" name="Text 36"/>
-          <p:cNvSpPr/>
-          <p:nvPr/>
-        </p:nvSpPr>
-        <p:spPr>
-          <a:xfrm>
-            <a:off x="3429000" y="3246120"/>
-            <a:ext cx="2377440" cy="365760"/>
-          </a:xfrm>
-          <a:prstGeom prst="rect">
-            <a:avLst/>
-          </a:prstGeom>
-          <a:noFill/>
-          <a:ln/>
-        </p:spPr>
-        <p:txBody>
-          <a:bodyPr wrap="square" lIns="0" tIns="0" rIns="0" bIns="0" rtlCol="0" anchor="ctr"/>
-          <a:lstStyle/>
-          <a:p>
-            <a:pPr indent="0" marL="0">
-              <a:buNone/>
-            </a:pPr>
-            <a:r>
-              <a:rPr lang="en-US" sz="900" dirty="0">
-                <a:solidFill>
-                  <a:srgbClr val="64748B"/>
-                </a:solidFill>
-                <a:latin typeface="Arial" pitchFamily="34" charset="0"/>
-                <a:ea typeface="Arial" pitchFamily="34" charset="-122"/>
-                <a:cs typeface="Arial" pitchFamily="34" charset="-120"/>
-              </a:rPr>
-              <a:t>それ以外はとても便利で、近くにイオンのスーパーマーケットがあるので、買い物や交通の便も良かったです</a:t>
-            </a:r>
-            <a:endParaRPr lang="en-US" sz="900" dirty="0"/>
-          </a:p>
-        </p:txBody>
-      </p:sp>
-      <p:sp>
-        <p:nvSpPr>
-          <p:cNvPr id="39" name="Text 37"/>
-          <p:cNvSpPr/>
-          <p:nvPr/>
-        </p:nvSpPr>
-        <p:spPr>
-          <a:xfrm>
-            <a:off x="3429000" y="3657600"/>
-            <a:ext cx="2377440" cy="640080"/>
-          </a:xfrm>
-          <a:prstGeom prst="rect">
-            <a:avLst/>
-          </a:prstGeom>
-          <a:noFill/>
-          <a:ln/>
-        </p:spPr>
-        <p:txBody>
-          <a:bodyPr wrap="square" lIns="0" tIns="0" rIns="0" bIns="0" rtlCol="0" anchor="ctr"/>
-          <a:lstStyle/>
-          <a:p>
-            <a:pPr indent="0" marL="0">
-              <a:buNone/>
-            </a:pPr>
-            <a:r>
-              <a:rPr lang="en-US" sz="900" i="1" dirty="0">
-                <a:solidFill>
-                  <a:srgbClr val="3B7DD8"/>
-                </a:solidFill>
-                <a:latin typeface="Arial" pitchFamily="34" charset="0"/>
-                <a:ea typeface="Arial" pitchFamily="34" charset="-122"/>
-                <a:cs typeface="Arial" pitchFamily="34" charset="-120"/>
-              </a:rPr>
-              <a:t>「近くにイオンモールやコンビニなどあり、とても便利でした」</a:t>
-            </a:r>
-            <a:endParaRPr lang="en-US" sz="900" dirty="0"/>
-          </a:p>
-        </p:txBody>
-      </p:sp>
-      <p:sp>
-        <p:nvSpPr>
-          <p:cNvPr id="40" name="Shape 38"/>
-          <p:cNvSpPr/>
-          <p:nvPr/>
-        </p:nvSpPr>
-        <p:spPr>
-          <a:xfrm>
-            <a:off x="6126480" y="2880360"/>
-            <a:ext cx="2651760" cy="1600200"/>
-          </a:xfrm>
-          <a:prstGeom prst="rect">
-            <a:avLst/>
-          </a:prstGeom>
-          <a:solidFill>
-            <a:srgbClr val="FFFFFF"/>
-          </a:solidFill>
-          <a:ln/>
-          <a:effectLst>
-            <a:outerShdw sx="100000" sy="100000" kx="0" ky="0" algn="bl" rotWithShape="0" blurRad="50800" dist="25400" dir="8100000">
-              <a:srgbClr val="000000">
-                <a:alpha val="10000"/>
-              </a:srgbClr>
-            </a:outerShdw>
-          </a:effectLst>
-        </p:spPr>
-      </p:sp>
-      <p:sp>
-        <p:nvSpPr>
-          <p:cNvPr id="41" name="Shape 39"/>
-          <p:cNvSpPr/>
-          <p:nvPr/>
-        </p:nvSpPr>
-        <p:spPr>
-          <a:xfrm>
-            <a:off x="6126480" y="2880360"/>
-            <a:ext cx="54864" cy="1600200"/>
-          </a:xfrm>
-          <a:prstGeom prst="rect">
-            <a:avLst/>
-          </a:prstGeom>
-          <a:solidFill>
-            <a:srgbClr val="16A34A"/>
-          </a:solidFill>
-          <a:ln/>
-        </p:spPr>
-      </p:sp>
-      <p:sp>
-        <p:nvSpPr>
-          <p:cNvPr id="42" name="Shape 40"/>
-          <p:cNvSpPr/>
-          <p:nvPr/>
-        </p:nvSpPr>
-        <p:spPr>
-          <a:xfrm>
-            <a:off x="7955280" y="2953512"/>
-            <a:ext cx="658368" cy="228600"/>
-          </a:xfrm>
-          <a:prstGeom prst="rect">
-            <a:avLst/>
-          </a:prstGeom>
-          <a:solidFill>
-            <a:srgbClr val="DCFCE7"/>
-          </a:solidFill>
-          <a:ln/>
-        </p:spPr>
-      </p:sp>
-      <p:sp>
-        <p:nvSpPr>
-          <p:cNvPr id="43" name="Text 41"/>
-          <p:cNvSpPr/>
-          <p:nvPr/>
-        </p:nvSpPr>
-        <p:spPr>
-          <a:xfrm>
-            <a:off x="7955280" y="2953512"/>
-            <a:ext cx="658368" cy="228600"/>
-          </a:xfrm>
-          <a:prstGeom prst="rect">
-            <a:avLst/>
-          </a:prstGeom>
-          <a:noFill/>
-          <a:ln/>
-        </p:spPr>
-        <p:txBody>
-          <a:bodyPr wrap="square" lIns="0" tIns="0" rIns="0" bIns="0" rtlCol="0" anchor="ctr"/>
-          <a:lstStyle/>
-          <a:p>
-            <a:pPr algn="ctr" indent="0" marL="0">
-              <a:buNone/>
-            </a:pPr>
-            <a:r>
-              <a:rPr lang="en-US" sz="900" b="1" dirty="0">
-                <a:solidFill>
-                  <a:srgbClr val="16A34A"/>
-                </a:solidFill>
-                <a:latin typeface="Arial" pitchFamily="34" charset="0"/>
-                <a:ea typeface="Arial" pitchFamily="34" charset="-122"/>
-                <a:cs typeface="Arial" pitchFamily="34" charset="-120"/>
-              </a:rPr>
-              <a:t>20件+</a:t>
-            </a:r>
-            <a:endParaRPr lang="en-US" sz="900" dirty="0"/>
-          </a:p>
-        </p:txBody>
-      </p:sp>
-      <p:sp>
-        <p:nvSpPr>
           <p:cNvPr id="44" name="Text 42"/>
           <p:cNvSpPr/>
           <p:nvPr/>
@@ -11922,7 +11599,7 @@
                 <a:ea typeface="Arial" pitchFamily="34" charset="-122"/>
                 <a:cs typeface="Arial" pitchFamily="34" charset="-120"/>
               </a:rPr>
-              <a:t>朝食はもう少し品数が欲しい 朝食はもう少し品数が欲しい</a:t>
+              <a:t>部屋は綺麗で朝ごはんも美味しかったです</a:t>
             </a:r>
             <a:endParaRPr lang="en-US" sz="900" dirty="0"/>
           </a:p>
@@ -11961,7 +11638,7 @@
                 <a:ea typeface="Arial" pitchFamily="34" charset="-122"/>
                 <a:cs typeface="Arial" pitchFamily="34" charset="-120"/>
               </a:rPr>
-              <a:t>「朝食後にコーヒーを飲むと美味しいです」</a:t>
+              <a:t>「ただ、朝食バイキングについては、品数がそれほど多くないうえ、パン用のオープントースターがないなど、物足りなく感じました」</a:t>
             </a:r>
             <a:endParaRPr lang="en-US" sz="900" dirty="0"/>
           </a:p>
@@ -12719,7 +12396,7 @@
                           <a:ea typeface="Arial" pitchFamily="34" charset="-122"/>
                           <a:cs typeface="Arial" pitchFamily="34" charset="-120"/>
                         </a:rPr>
-                        <a:t>12件</a:t>
+                        <a:t>11件</a:t>
                       </a:r>
                       <a:endParaRPr lang="en-US" sz="900" dirty="0">
                         <a:latin typeface="Arial" charset="0"/>
@@ -14843,7 +14520,7 @@
                           <a:ea typeface="Arial" pitchFamily="34" charset="-122"/>
                           <a:cs typeface="Arial" pitchFamily="34" charset="-120"/>
                         </a:rPr>
-                        <a:t>朝食はもう少し品数が欲しい 朝食はもう少し品数が欲しい</a:t>
+                        <a:t>ただ、朝食バイキングについては、品数がそれほど多くないうえ、パン用のオープントースターがないなど、物足りなく感じました</a:t>
                       </a:r>
                       <a:endParaRPr lang="en-US" sz="900" dirty="0">
                         <a:latin typeface="Arial" charset="0"/>
@@ -14911,7 +14588,7 @@
                           <a:ea typeface="Arial" pitchFamily="34" charset="-122"/>
                           <a:cs typeface="Arial" pitchFamily="34" charset="-120"/>
                         </a:rPr>
-                        <a:t>1件</a:t>
+                        <a:t>2件</a:t>
                       </a:r>
                       <a:endParaRPr lang="en-US" sz="900" dirty="0">
                         <a:latin typeface="Arial" charset="0"/>

--- a/納品レポート/ホテル別レポート/hearton_口コミ分析レポート.pptx
+++ b/納品レポート/ホテル別レポート/hearton_口コミ分析レポート.pptx
@@ -208,19 +208,19 @@
                 <c:formatCode>General</c:formatCode>
                 <c:ptCount val="6"/>
                 <c:pt idx="0">
-                  <c:v>9.33</c:v>
+                  <c:v>9.32</c:v>
                 </c:pt>
                 <c:pt idx="1">
-                  <c:v>8.79</c:v>
+                  <c:v>8.93</c:v>
                 </c:pt>
                 <c:pt idx="2">
-                  <c:v>8.54</c:v>
+                  <c:v>8.5</c:v>
                 </c:pt>
                 <c:pt idx="3">
-                  <c:v>8.39</c:v>
+                  <c:v>8.38</c:v>
                 </c:pt>
                 <c:pt idx="4">
-                  <c:v>8.25</c:v>
+                  <c:v>8.36</c:v>
                 </c:pt>
                 <c:pt idx="5">
                   <c:v>8.18</c:v>
@@ -566,10 +566,10 @@
               <c:numCache>
                 <c:ptCount val="3"/>
                 <c:pt idx="0">
-                  <c:v>116</c:v>
+                  <c:v>118</c:v>
                 </c:pt>
                 <c:pt idx="1">
-                  <c:v>22</c:v>
+                  <c:v>20</c:v>
                 </c:pt>
                 <c:pt idx="2">
                   <c:v>1</c:v>
@@ -795,19 +795,19 @@
                 <c:formatCode>General</c:formatCode>
                 <c:ptCount val="7"/>
                 <c:pt idx="0">
-                  <c:v>59</c:v>
+                  <c:v>60</c:v>
                 </c:pt>
                 <c:pt idx="1">
                   <c:v>11</c:v>
                 </c:pt>
                 <c:pt idx="2">
-                  <c:v>46</c:v>
+                  <c:v>47</c:v>
                 </c:pt>
                 <c:pt idx="3">
-                  <c:v>9</c:v>
+                  <c:v>8</c:v>
                 </c:pt>
                 <c:pt idx="4">
-                  <c:v>12</c:v>
+                  <c:v>11</c:v>
                 </c:pt>
                 <c:pt idx="5">
                   <c:v>1</c:v>
@@ -2784,7 +2784,7 @@
                 <a:ea typeface="Arial" pitchFamily="34" charset="-122"/>
                 <a:cs typeface="Arial" pitchFamily="34" charset="-120"/>
               </a:rPr>
-              <a:t>作成日：2026年3月18日</a:t>
+              <a:t>作成日：2026年3月19日</a:t>
             </a:r>
             <a:endParaRPr lang="en-US" sz="1000" dirty="0"/>
           </a:p>
@@ -3330,7 +3330,7 @@
                           <a:ea typeface="Arial" pitchFamily="34" charset="-122"/>
                           <a:cs typeface="Arial" pitchFamily="34" charset="-120"/>
                         </a:rPr>
-                        <a:t>8.63点</a:t>
+                        <a:t>8.66点</a:t>
                       </a:r>
                       <a:endParaRPr lang="en-US" sz="1000" dirty="0">
                         <a:latin typeface="Arial" charset="0"/>
@@ -3398,7 +3398,7 @@
                           <a:ea typeface="Arial" pitchFamily="34" charset="-122"/>
                           <a:cs typeface="Arial" pitchFamily="34" charset="-120"/>
                         </a:rPr>
-                        <a:t>8.9点以上</a:t>
+                        <a:t>9.0点以上</a:t>
                       </a:r>
                       <a:endParaRPr lang="en-US" sz="1000" dirty="0">
                         <a:latin typeface="Arial" charset="0"/>
@@ -3604,7 +3604,7 @@
                           <a:ea typeface="Arial" pitchFamily="34" charset="-122"/>
                           <a:cs typeface="Arial" pitchFamily="34" charset="-120"/>
                         </a:rPr>
-                        <a:t>83.5%</a:t>
+                        <a:t>84.9%</a:t>
                       </a:r>
                       <a:endParaRPr lang="en-US" sz="1000" dirty="0">
                         <a:latin typeface="Arial" charset="0"/>
@@ -3672,7 +3672,7 @@
                           <a:ea typeface="Arial" pitchFamily="34" charset="-122"/>
                           <a:cs typeface="Arial" pitchFamily="34" charset="-120"/>
                         </a:rPr>
-                        <a:t>89%以上</a:t>
+                        <a:t>90%以上</a:t>
                       </a:r>
                       <a:endParaRPr lang="en-US" sz="1000" dirty="0">
                         <a:latin typeface="Arial" charset="0"/>
@@ -4426,7 +4426,7 @@
                           <a:ea typeface="Arial" pitchFamily="34" charset="-122"/>
                           <a:cs typeface="Arial" pitchFamily="34" charset="-120"/>
                         </a:rPr>
-                        <a:t>約11件/期間</a:t>
+                        <a:t>約12件/期間</a:t>
                       </a:r>
                       <a:endParaRPr lang="en-US" sz="1000" dirty="0">
                         <a:latin typeface="Arial" charset="0"/>
@@ -4494,7 +4494,7 @@
                           <a:ea typeface="Arial" pitchFamily="34" charset="-122"/>
                           <a:cs typeface="Arial" pitchFamily="34" charset="-120"/>
                         </a:rPr>
-                        <a:t>5件以下</a:t>
+                        <a:t>6件以下</a:t>
                       </a:r>
                       <a:endParaRPr lang="en-US" sz="1000" dirty="0">
                         <a:latin typeface="Arial" charset="0"/>
@@ -5065,7 +5065,7 @@
                 <a:ea typeface="Arial" pitchFamily="34" charset="-122"/>
                 <a:cs typeface="Arial" pitchFamily="34" charset="-120"/>
               </a:rPr>
-              <a:t>8.63</a:t>
+              <a:t>8.66</a:t>
             </a:r>
             <a:endParaRPr lang="en-US" sz="3200" dirty="0"/>
           </a:p>
@@ -5190,7 +5190,7 @@
                 <a:ea typeface="Arial" pitchFamily="34" charset="-122"/>
                 <a:cs typeface="Arial" pitchFamily="34" charset="-120"/>
               </a:rPr>
-              <a:t>83.5%</a:t>
+              <a:t>84.9%</a:t>
             </a:r>
             <a:endParaRPr lang="en-US" sz="3200" dirty="0"/>
           </a:p>
@@ -5588,7 +5588,7 @@
                 <a:ea typeface="Arial" pitchFamily="34" charset="-122"/>
                 <a:cs typeface="Arial" pitchFamily="34" charset="-120"/>
               </a:rPr>
-              <a:t>  りんかい線品川シーサイド駅から徒歩すぐ、イオンモールにも近い抜群の立地</a:t>
+              <a:t>  駅にはイオンがあり困ることはありません</a:t>
             </a:r>
             <a:endParaRPr lang="en-US" sz="1100" dirty="0"/>
           </a:p>
@@ -5668,7 +5668,7 @@
                 <a:ea typeface="Arial" pitchFamily="34" charset="-122"/>
                 <a:cs typeface="Arial" pitchFamily="34" charset="-120"/>
               </a:rPr>
-              <a:t>  The room had a humidity smell and was pretty worn out アメニ...</a:t>
+              <a:t>  アメニティも豊富でロビーから選んで持っていくタイプ、部屋も綺麗で品川に行くときはまた利用したいです</a:t>
             </a:r>
             <a:endParaRPr lang="en-US" sz="1100" dirty="0"/>
           </a:p>
@@ -5816,7 +5816,7 @@
                 <a:ea typeface="Arial" pitchFamily="34" charset="-122"/>
                 <a:cs typeface="Arial" pitchFamily="34" charset="-120"/>
               </a:rPr>
-              <a:t>  羽田空港からリムジンバスでホテルまで行けるし、駅にも近いのでとても便利です</a:t>
+              <a:t>  1番良かったのは浴槽の排水が早いことです</a:t>
             </a:r>
             <a:endParaRPr lang="en-US" sz="1100" dirty="0"/>
           </a:p>
@@ -5856,7 +5856,7 @@
                 <a:ea typeface="Arial" pitchFamily="34" charset="-122"/>
                 <a:cs typeface="Arial" pitchFamily="34" charset="-120"/>
               </a:rPr>
-              <a:t>  Good location, train station across the road and few shops</a:t>
+              <a:t>  エアコンの調整が難しい</a:t>
             </a:r>
             <a:endParaRPr lang="en-US" sz="1100" dirty="0"/>
           </a:p>
@@ -6249,7 +6249,7 @@
                 <a:ea typeface="Arial" pitchFamily="34" charset="-122"/>
                 <a:cs typeface="Arial" pitchFamily="34" charset="-120"/>
               </a:rPr>
-              <a:t>8.63</a:t>
+              <a:t>8.66</a:t>
             </a:r>
             <a:endParaRPr lang="en-US" sz="3200" dirty="0"/>
           </a:p>
@@ -6374,7 +6374,7 @@
                 <a:ea typeface="Arial" pitchFamily="34" charset="-122"/>
                 <a:cs typeface="Arial" pitchFamily="34" charset="-120"/>
               </a:rPr>
-              <a:t>83.5%</a:t>
+              <a:t>84.9%</a:t>
             </a:r>
             <a:endParaRPr lang="en-US" sz="3200" dirty="0"/>
           </a:p>
@@ -7045,7 +7045,7 @@
                 <a:ea typeface="Arial" pitchFamily="34" charset="-122"/>
                 <a:cs typeface="Arial" pitchFamily="34" charset="-120"/>
               </a:rPr>
-              <a:t>Trip.com(9.33)が最高スコア。</a:t>
+              <a:t>Trip.com(9.32)が最高スコア。</a:t>
             </a:r>
             <a:endParaRPr lang="en-US" sz="1100" dirty="0"/>
           </a:p>
@@ -7554,7 +7554,7 @@
                           <a:ea typeface="Arial" pitchFamily="34" charset="-122"/>
                           <a:cs typeface="Arial" pitchFamily="34" charset="-120"/>
                         </a:rPr>
-                        <a:t>24</a:t>
+                        <a:t>25</a:t>
                       </a:r>
                       <a:endParaRPr lang="en-US" sz="900" dirty="0">
                         <a:latin typeface="Arial" charset="0"/>
@@ -7622,7 +7622,7 @@
                           <a:ea typeface="Arial" pitchFamily="34" charset="-122"/>
                           <a:cs typeface="Arial" pitchFamily="34" charset="-120"/>
                         </a:rPr>
-                        <a:t>9.33</a:t>
+                        <a:t>9.32</a:t>
                       </a:r>
                       <a:endParaRPr lang="en-US" sz="900" dirty="0">
                         <a:latin typeface="Arial" charset="0"/>
@@ -7758,7 +7758,7 @@
                           <a:ea typeface="Arial" pitchFamily="34" charset="-122"/>
                           <a:cs typeface="Arial" pitchFamily="34" charset="-120"/>
                         </a:rPr>
-                        <a:t>9.33</a:t>
+                        <a:t>9.32</a:t>
                       </a:r>
                       <a:endParaRPr lang="en-US" sz="900" dirty="0">
                         <a:latin typeface="Arial" charset="0"/>
@@ -7964,7 +7964,7 @@
                           <a:ea typeface="Arial" pitchFamily="34" charset="-122"/>
                           <a:cs typeface="Arial" pitchFamily="34" charset="-120"/>
                         </a:rPr>
-                        <a:t>4.39</a:t>
+                        <a:t>4.46</a:t>
                       </a:r>
                       <a:endParaRPr lang="en-US" sz="900" dirty="0">
                         <a:latin typeface="Arial" charset="0"/>
@@ -8100,7 +8100,7 @@
                           <a:ea typeface="Arial" pitchFamily="34" charset="-122"/>
                           <a:cs typeface="Arial" pitchFamily="34" charset="-120"/>
                         </a:rPr>
-                        <a:t>8.79</a:t>
+                        <a:t>8.93</a:t>
                       </a:r>
                       <a:endParaRPr lang="en-US" sz="900" dirty="0">
                         <a:latin typeface="Arial" charset="0"/>
@@ -8306,7 +8306,7 @@
                           <a:ea typeface="Arial" pitchFamily="34" charset="-122"/>
                           <a:cs typeface="Arial" pitchFamily="34" charset="-120"/>
                         </a:rPr>
-                        <a:t>8.54</a:t>
+                        <a:t>8.5</a:t>
                       </a:r>
                       <a:endParaRPr lang="en-US" sz="900" dirty="0">
                         <a:latin typeface="Arial" charset="0"/>
@@ -8442,7 +8442,7 @@
                           <a:ea typeface="Arial" pitchFamily="34" charset="-122"/>
                           <a:cs typeface="Arial" pitchFamily="34" charset="-120"/>
                         </a:rPr>
-                        <a:t>8.54</a:t>
+                        <a:t>8.5</a:t>
                       </a:r>
                       <a:endParaRPr lang="en-US" sz="900" dirty="0">
                         <a:latin typeface="Arial" charset="0"/>
@@ -8580,7 +8580,7 @@
                           <a:ea typeface="Arial" pitchFamily="34" charset="-122"/>
                           <a:cs typeface="Arial" pitchFamily="34" charset="-120"/>
                         </a:rPr>
-                        <a:t>36</a:t>
+                        <a:t>37</a:t>
                       </a:r>
                       <a:endParaRPr lang="en-US" sz="900" dirty="0">
                         <a:latin typeface="Arial" charset="0"/>
@@ -8784,7 +8784,7 @@
                           <a:ea typeface="Arial" pitchFamily="34" charset="-122"/>
                           <a:cs typeface="Arial" pitchFamily="34" charset="-120"/>
                         </a:rPr>
-                        <a:t>8.39</a:t>
+                        <a:t>8.38</a:t>
                       </a:r>
                       <a:endParaRPr lang="en-US" sz="900" dirty="0">
                         <a:latin typeface="Arial" charset="0"/>
@@ -8922,7 +8922,7 @@
                           <a:ea typeface="Arial" pitchFamily="34" charset="-122"/>
                           <a:cs typeface="Arial" pitchFamily="34" charset="-120"/>
                         </a:rPr>
-                        <a:t>16</a:t>
+                        <a:t>14</a:t>
                       </a:r>
                       <a:endParaRPr lang="en-US" sz="900" dirty="0">
                         <a:latin typeface="Arial" charset="0"/>
@@ -8990,7 +8990,7 @@
                           <a:ea typeface="Arial" pitchFamily="34" charset="-122"/>
                           <a:cs typeface="Arial" pitchFamily="34" charset="-120"/>
                         </a:rPr>
-                        <a:t>8.25</a:t>
+                        <a:t>8.36</a:t>
                       </a:r>
                       <a:endParaRPr lang="en-US" sz="900" dirty="0">
                         <a:latin typeface="Arial" charset="0"/>
@@ -9126,7 +9126,7 @@
                           <a:ea typeface="Arial" pitchFamily="34" charset="-122"/>
                           <a:cs typeface="Arial" pitchFamily="34" charset="-120"/>
                         </a:rPr>
-                        <a:t>8.25</a:t>
+                        <a:t>8.36</a:t>
                       </a:r>
                       <a:endParaRPr lang="en-US" sz="900" dirty="0">
                         <a:latin typeface="Arial" charset="0"/>
@@ -9876,7 +9876,7 @@
                 <a:ea typeface="Arial" pitchFamily="34" charset="-122"/>
                 <a:cs typeface="Arial" pitchFamily="34" charset="-120"/>
               </a:rPr>
-              <a:t>116件（83.5%）</a:t>
+              <a:t>118件（84.9%）</a:t>
             </a:r>
             <a:endParaRPr lang="en-US" sz="1100" dirty="0"/>
           </a:p>
@@ -9974,7 +9974,7 @@
                 <a:ea typeface="Arial" pitchFamily="34" charset="-122"/>
                 <a:cs typeface="Arial" pitchFamily="34" charset="-120"/>
               </a:rPr>
-              <a:t>22件（15.8%）</a:t>
+              <a:t>20件（14.4%）</a:t>
             </a:r>
             <a:endParaRPr lang="en-US" sz="1100" dirty="0"/>
           </a:p>
@@ -10484,7 +10484,7 @@
                 <a:ea typeface="Arial" pitchFamily="34" charset="-122"/>
                 <a:cs typeface="Arial" pitchFamily="34" charset="-120"/>
               </a:rPr>
-              <a:t>りんかい線品川シーサイド駅から徒歩すぐ、イオンモールにも近い抜群の立地</a:t>
+              <a:t>駅にはイオンがあり困ることはありません</a:t>
             </a:r>
             <a:endParaRPr lang="en-US" sz="900" dirty="0"/>
           </a:p>
@@ -10523,7 +10523,7 @@
                 <a:ea typeface="Arial" pitchFamily="34" charset="-122"/>
                 <a:cs typeface="Arial" pitchFamily="34" charset="-120"/>
               </a:rPr>
-              <a:t>「Good location, train station across the road and few shops」</a:t>
+              <a:t>「りんかい線品川シーサイド駅から徒歩すぐ、イオンモールにも近い抜群の立地」</a:t>
             </a:r>
             <a:endParaRPr lang="en-US" sz="900" dirty="0"/>
           </a:p>
@@ -10930,7 +10930,7 @@
                 <a:ea typeface="Arial" pitchFamily="34" charset="-122"/>
                 <a:cs typeface="Arial" pitchFamily="34" charset="-120"/>
               </a:rPr>
-              <a:t>The room had a humidity smell and was pretty worn out アメニ...</a:t>
+              <a:t>アメニティも豊富でロビーから選んで持っていくタイプ、部屋も綺麗で品川に行くときはまた利用したいです</a:t>
             </a:r>
             <a:endParaRPr lang="en-US" sz="900" dirty="0"/>
           </a:p>
@@ -10969,7 +10969,7 @@
                 <a:ea typeface="Arial" pitchFamily="34" charset="-122"/>
                 <a:cs typeface="Arial" pitchFamily="34" charset="-120"/>
               </a:rPr>
-              <a:t>「いつも利用させていただいてます  部屋も広く快適です  交通の便利がよく特にビッグサイトでの展示会などがある時は良...」</a:t>
+              <a:t>「The room had a humidity smell and was pretty worn out アメニ...」</a:t>
             </a:r>
             <a:endParaRPr lang="en-US" sz="900" dirty="0"/>
           </a:p>
@@ -11114,6 +11114,452 @@
                 <a:ea typeface="Arial" pitchFamily="34" charset="-122"/>
                 <a:cs typeface="Arial" pitchFamily="34" charset="-120"/>
               </a:rPr>
+              <a:t>朝食</a:t>
+            </a:r>
+            <a:endParaRPr lang="en-US" sz="1300" dirty="0"/>
+          </a:p>
+        </p:txBody>
+      </p:sp>
+      <p:sp>
+        <p:nvSpPr>
+          <p:cNvPr id="31" name="Text 29"/>
+          <p:cNvSpPr/>
+          <p:nvPr/>
+        </p:nvSpPr>
+        <p:spPr>
+          <a:xfrm>
+            <a:off x="594360" y="3246120"/>
+            <a:ext cx="2377440" cy="365760"/>
+          </a:xfrm>
+          <a:prstGeom prst="rect">
+            <a:avLst/>
+          </a:prstGeom>
+          <a:noFill/>
+          <a:ln/>
+        </p:spPr>
+        <p:txBody>
+          <a:bodyPr wrap="square" lIns="0" tIns="0" rIns="0" bIns="0" rtlCol="0" anchor="ctr"/>
+          <a:lstStyle/>
+          <a:p>
+            <a:pPr indent="0" marL="0">
+              <a:buNone/>
+            </a:pPr>
+            <a:r>
+              <a:rPr lang="en-US" sz="900" dirty="0">
+                <a:solidFill>
+                  <a:srgbClr val="64748B"/>
+                </a:solidFill>
+                <a:latin typeface="Arial" pitchFamily="34" charset="0"/>
+                <a:ea typeface="Arial" pitchFamily="34" charset="-122"/>
+                <a:cs typeface="Arial" pitchFamily="34" charset="-120"/>
+              </a:rPr>
+              <a:t>部屋は綺麗で朝ごはんも美味しかったです</a:t>
+            </a:r>
+            <a:endParaRPr lang="en-US" sz="900" dirty="0"/>
+          </a:p>
+        </p:txBody>
+      </p:sp>
+      <p:sp>
+        <p:nvSpPr>
+          <p:cNvPr id="32" name="Text 30"/>
+          <p:cNvSpPr/>
+          <p:nvPr/>
+        </p:nvSpPr>
+        <p:spPr>
+          <a:xfrm>
+            <a:off x="594360" y="3657600"/>
+            <a:ext cx="2377440" cy="640080"/>
+          </a:xfrm>
+          <a:prstGeom prst="rect">
+            <a:avLst/>
+          </a:prstGeom>
+          <a:noFill/>
+          <a:ln/>
+        </p:spPr>
+        <p:txBody>
+          <a:bodyPr wrap="square" lIns="0" tIns="0" rIns="0" bIns="0" rtlCol="0" anchor="ctr"/>
+          <a:lstStyle/>
+          <a:p>
+            <a:pPr indent="0" marL="0">
+              <a:buNone/>
+            </a:pPr>
+            <a:r>
+              <a:rPr lang="en-US" sz="900" i="1" dirty="0">
+                <a:solidFill>
+                  <a:srgbClr val="3B7DD8"/>
+                </a:solidFill>
+                <a:latin typeface="Arial" pitchFamily="34" charset="0"/>
+                <a:ea typeface="Arial" pitchFamily="34" charset="-122"/>
+                <a:cs typeface="Arial" pitchFamily="34" charset="-120"/>
+              </a:rPr>
+              <a:t>「今回は素泊まりでしたが、次回は朝食もたべてみたいです」</a:t>
+            </a:r>
+            <a:endParaRPr lang="en-US" sz="900" dirty="0"/>
+          </a:p>
+        </p:txBody>
+      </p:sp>
+      <p:sp>
+        <p:nvSpPr>
+          <p:cNvPr id="33" name="Shape 31"/>
+          <p:cNvSpPr/>
+          <p:nvPr/>
+        </p:nvSpPr>
+        <p:spPr>
+          <a:xfrm>
+            <a:off x="3291840" y="2880360"/>
+            <a:ext cx="2651760" cy="1600200"/>
+          </a:xfrm>
+          <a:prstGeom prst="rect">
+            <a:avLst/>
+          </a:prstGeom>
+          <a:solidFill>
+            <a:srgbClr val="FFFFFF"/>
+          </a:solidFill>
+          <a:ln/>
+          <a:effectLst>
+            <a:outerShdw sx="100000" sy="100000" kx="0" ky="0" algn="bl" rotWithShape="0" blurRad="50800" dist="25400" dir="8100000">
+              <a:srgbClr val="000000">
+                <a:alpha val="10000"/>
+              </a:srgbClr>
+            </a:outerShdw>
+          </a:effectLst>
+        </p:spPr>
+      </p:sp>
+      <p:sp>
+        <p:nvSpPr>
+          <p:cNvPr id="34" name="Shape 32"/>
+          <p:cNvSpPr/>
+          <p:nvPr/>
+        </p:nvSpPr>
+        <p:spPr>
+          <a:xfrm>
+            <a:off x="3291840" y="2880360"/>
+            <a:ext cx="54864" cy="1600200"/>
+          </a:xfrm>
+          <a:prstGeom prst="rect">
+            <a:avLst/>
+          </a:prstGeom>
+          <a:solidFill>
+            <a:srgbClr val="16A34A"/>
+          </a:solidFill>
+          <a:ln/>
+        </p:spPr>
+      </p:sp>
+      <p:sp>
+        <p:nvSpPr>
+          <p:cNvPr id="35" name="Shape 33"/>
+          <p:cNvSpPr/>
+          <p:nvPr/>
+        </p:nvSpPr>
+        <p:spPr>
+          <a:xfrm>
+            <a:off x="5120640" y="2953512"/>
+            <a:ext cx="658368" cy="228600"/>
+          </a:xfrm>
+          <a:prstGeom prst="rect">
+            <a:avLst/>
+          </a:prstGeom>
+          <a:solidFill>
+            <a:srgbClr val="DCFCE7"/>
+          </a:solidFill>
+          <a:ln/>
+        </p:spPr>
+      </p:sp>
+      <p:sp>
+        <p:nvSpPr>
+          <p:cNvPr id="36" name="Text 34"/>
+          <p:cNvSpPr/>
+          <p:nvPr/>
+        </p:nvSpPr>
+        <p:spPr>
+          <a:xfrm>
+            <a:off x="5120640" y="2953512"/>
+            <a:ext cx="658368" cy="228600"/>
+          </a:xfrm>
+          <a:prstGeom prst="rect">
+            <a:avLst/>
+          </a:prstGeom>
+          <a:noFill/>
+          <a:ln/>
+        </p:spPr>
+        <p:txBody>
+          <a:bodyPr wrap="square" lIns="0" tIns="0" rIns="0" bIns="0" rtlCol="0" anchor="ctr"/>
+          <a:lstStyle/>
+          <a:p>
+            <a:pPr algn="ctr" indent="0" marL="0">
+              <a:buNone/>
+            </a:pPr>
+            <a:r>
+              <a:rPr lang="en-US" sz="900" b="1" dirty="0">
+                <a:solidFill>
+                  <a:srgbClr val="16A34A"/>
+                </a:solidFill>
+                <a:latin typeface="Arial" pitchFamily="34" charset="0"/>
+                <a:ea typeface="Arial" pitchFamily="34" charset="-122"/>
+                <a:cs typeface="Arial" pitchFamily="34" charset="-120"/>
+              </a:rPr>
+              <a:t>20件+</a:t>
+            </a:r>
+            <a:endParaRPr lang="en-US" sz="900" dirty="0"/>
+          </a:p>
+        </p:txBody>
+      </p:sp>
+      <p:sp>
+        <p:nvSpPr>
+          <p:cNvPr id="37" name="Text 35"/>
+          <p:cNvSpPr/>
+          <p:nvPr/>
+        </p:nvSpPr>
+        <p:spPr>
+          <a:xfrm>
+            <a:off x="3429000" y="2953512"/>
+            <a:ext cx="1645920" cy="274320"/>
+          </a:xfrm>
+          <a:prstGeom prst="rect">
+            <a:avLst/>
+          </a:prstGeom>
+          <a:noFill/>
+          <a:ln/>
+        </p:spPr>
+        <p:txBody>
+          <a:bodyPr wrap="square" lIns="0" tIns="0" rIns="0" bIns="0" rtlCol="0" anchor="ctr"/>
+          <a:lstStyle/>
+          <a:p>
+            <a:pPr indent="0" marL="0">
+              <a:buNone/>
+            </a:pPr>
+            <a:r>
+              <a:rPr lang="en-US" sz="1300" b="1" dirty="0">
+                <a:solidFill>
+                  <a:srgbClr val="1A2744"/>
+                </a:solidFill>
+                <a:latin typeface="Arial" pitchFamily="34" charset="0"/>
+                <a:ea typeface="Arial" pitchFamily="34" charset="-122"/>
+                <a:cs typeface="Arial" pitchFamily="34" charset="-120"/>
+              </a:rPr>
+              <a:t>コンビニ・周辺施設</a:t>
+            </a:r>
+            <a:endParaRPr lang="en-US" sz="1300" dirty="0"/>
+          </a:p>
+        </p:txBody>
+      </p:sp>
+      <p:sp>
+        <p:nvSpPr>
+          <p:cNvPr id="38" name="Text 36"/>
+          <p:cNvSpPr/>
+          <p:nvPr/>
+        </p:nvSpPr>
+        <p:spPr>
+          <a:xfrm>
+            <a:off x="3429000" y="3246120"/>
+            <a:ext cx="2377440" cy="365760"/>
+          </a:xfrm>
+          <a:prstGeom prst="rect">
+            <a:avLst/>
+          </a:prstGeom>
+          <a:noFill/>
+          <a:ln/>
+        </p:spPr>
+        <p:txBody>
+          <a:bodyPr wrap="square" lIns="0" tIns="0" rIns="0" bIns="0" rtlCol="0" anchor="ctr"/>
+          <a:lstStyle/>
+          <a:p>
+            <a:pPr indent="0" marL="0">
+              <a:buNone/>
+            </a:pPr>
+            <a:r>
+              <a:rPr lang="en-US" sz="900" dirty="0">
+                <a:solidFill>
+                  <a:srgbClr val="64748B"/>
+                </a:solidFill>
+                <a:latin typeface="Arial" pitchFamily="34" charset="0"/>
+                <a:ea typeface="Arial" pitchFamily="34" charset="-122"/>
+                <a:cs typeface="Arial" pitchFamily="34" charset="-120"/>
+              </a:rPr>
+              <a:t>品川シーサイド駅目の前で、スーパー・レストランも近くとても便利です♪ 有明に用があり、数回利用しています</a:t>
+            </a:r>
+            <a:endParaRPr lang="en-US" sz="900" dirty="0"/>
+          </a:p>
+        </p:txBody>
+      </p:sp>
+      <p:sp>
+        <p:nvSpPr>
+          <p:cNvPr id="39" name="Text 37"/>
+          <p:cNvSpPr/>
+          <p:nvPr/>
+        </p:nvSpPr>
+        <p:spPr>
+          <a:xfrm>
+            <a:off x="3429000" y="3657600"/>
+            <a:ext cx="2377440" cy="640080"/>
+          </a:xfrm>
+          <a:prstGeom prst="rect">
+            <a:avLst/>
+          </a:prstGeom>
+          <a:noFill/>
+          <a:ln/>
+        </p:spPr>
+        <p:txBody>
+          <a:bodyPr wrap="square" lIns="0" tIns="0" rIns="0" bIns="0" rtlCol="0" anchor="ctr"/>
+          <a:lstStyle/>
+          <a:p>
+            <a:pPr indent="0" marL="0">
+              <a:buNone/>
+            </a:pPr>
+            <a:r>
+              <a:rPr lang="en-US" sz="900" i="1" dirty="0">
+                <a:solidFill>
+                  <a:srgbClr val="3B7DD8"/>
+                </a:solidFill>
+                <a:latin typeface="Arial" pitchFamily="34" charset="0"/>
+                <a:ea typeface="Arial" pitchFamily="34" charset="-122"/>
+                <a:cs typeface="Arial" pitchFamily="34" charset="-120"/>
+              </a:rPr>
+              <a:t>「それ以外はとても便利で、近くにイオンのスーパーマーケットがあるので、買い物にも交通の便も良かったです」</a:t>
+            </a:r>
+            <a:endParaRPr lang="en-US" sz="900" dirty="0"/>
+          </a:p>
+        </p:txBody>
+      </p:sp>
+      <p:sp>
+        <p:nvSpPr>
+          <p:cNvPr id="40" name="Shape 38"/>
+          <p:cNvSpPr/>
+          <p:nvPr/>
+        </p:nvSpPr>
+        <p:spPr>
+          <a:xfrm>
+            <a:off x="6126480" y="2880360"/>
+            <a:ext cx="2651760" cy="1600200"/>
+          </a:xfrm>
+          <a:prstGeom prst="rect">
+            <a:avLst/>
+          </a:prstGeom>
+          <a:solidFill>
+            <a:srgbClr val="FFFFFF"/>
+          </a:solidFill>
+          <a:ln/>
+          <a:effectLst>
+            <a:outerShdw sx="100000" sy="100000" kx="0" ky="0" algn="bl" rotWithShape="0" blurRad="50800" dist="25400" dir="8100000">
+              <a:srgbClr val="000000">
+                <a:alpha val="10000"/>
+              </a:srgbClr>
+            </a:outerShdw>
+          </a:effectLst>
+        </p:spPr>
+      </p:sp>
+      <p:sp>
+        <p:nvSpPr>
+          <p:cNvPr id="41" name="Shape 39"/>
+          <p:cNvSpPr/>
+          <p:nvPr/>
+        </p:nvSpPr>
+        <p:spPr>
+          <a:xfrm>
+            <a:off x="6126480" y="2880360"/>
+            <a:ext cx="54864" cy="1600200"/>
+          </a:xfrm>
+          <a:prstGeom prst="rect">
+            <a:avLst/>
+          </a:prstGeom>
+          <a:solidFill>
+            <a:srgbClr val="16A34A"/>
+          </a:solidFill>
+          <a:ln/>
+        </p:spPr>
+      </p:sp>
+      <p:sp>
+        <p:nvSpPr>
+          <p:cNvPr id="42" name="Shape 40"/>
+          <p:cNvSpPr/>
+          <p:nvPr/>
+        </p:nvSpPr>
+        <p:spPr>
+          <a:xfrm>
+            <a:off x="7955280" y="2953512"/>
+            <a:ext cx="658368" cy="228600"/>
+          </a:xfrm>
+          <a:prstGeom prst="rect">
+            <a:avLst/>
+          </a:prstGeom>
+          <a:solidFill>
+            <a:srgbClr val="DCFCE7"/>
+          </a:solidFill>
+          <a:ln/>
+        </p:spPr>
+      </p:sp>
+      <p:sp>
+        <p:nvSpPr>
+          <p:cNvPr id="43" name="Text 41"/>
+          <p:cNvSpPr/>
+          <p:nvPr/>
+        </p:nvSpPr>
+        <p:spPr>
+          <a:xfrm>
+            <a:off x="7955280" y="2953512"/>
+            <a:ext cx="658368" cy="228600"/>
+          </a:xfrm>
+          <a:prstGeom prst="rect">
+            <a:avLst/>
+          </a:prstGeom>
+          <a:noFill/>
+          <a:ln/>
+        </p:spPr>
+        <p:txBody>
+          <a:bodyPr wrap="square" lIns="0" tIns="0" rIns="0" bIns="0" rtlCol="0" anchor="ctr"/>
+          <a:lstStyle/>
+          <a:p>
+            <a:pPr algn="ctr" indent="0" marL="0">
+              <a:buNone/>
+            </a:pPr>
+            <a:r>
+              <a:rPr lang="en-US" sz="900" b="1" dirty="0">
+                <a:solidFill>
+                  <a:srgbClr val="16A34A"/>
+                </a:solidFill>
+                <a:latin typeface="Arial" pitchFamily="34" charset="0"/>
+                <a:ea typeface="Arial" pitchFamily="34" charset="-122"/>
+                <a:cs typeface="Arial" pitchFamily="34" charset="-120"/>
+              </a:rPr>
+              <a:t>20件+</a:t>
+            </a:r>
+            <a:endParaRPr lang="en-US" sz="900" dirty="0"/>
+          </a:p>
+        </p:txBody>
+      </p:sp>
+      <p:sp>
+        <p:nvSpPr>
+          <p:cNvPr id="44" name="Text 42"/>
+          <p:cNvSpPr/>
+          <p:nvPr/>
+        </p:nvSpPr>
+        <p:spPr>
+          <a:xfrm>
+            <a:off x="6263640" y="2953512"/>
+            <a:ext cx="1645920" cy="274320"/>
+          </a:xfrm>
+          <a:prstGeom prst="rect">
+            <a:avLst/>
+          </a:prstGeom>
+          <a:noFill/>
+          <a:ln/>
+        </p:spPr>
+        <p:txBody>
+          <a:bodyPr wrap="square" lIns="0" tIns="0" rIns="0" bIns="0" rtlCol="0" anchor="ctr"/>
+          <a:lstStyle/>
+          <a:p>
+            <a:pPr indent="0" marL="0">
+              <a:buNone/>
+            </a:pPr>
+            <a:r>
+              <a:rPr lang="en-US" sz="1300" b="1" dirty="0">
+                <a:solidFill>
+                  <a:srgbClr val="1A2744"/>
+                </a:solidFill>
+                <a:latin typeface="Arial" pitchFamily="34" charset="0"/>
+                <a:ea typeface="Arial" pitchFamily="34" charset="-122"/>
+                <a:cs typeface="Arial" pitchFamily="34" charset="-120"/>
+              </a:rPr>
               <a:t>スタッフの対応</a:t>
             </a:r>
             <a:endParaRPr lang="en-US" sz="1300" dirty="0"/>
@@ -11122,13 +11568,13 @@
       </p:sp>
       <p:sp>
         <p:nvSpPr>
-          <p:cNvPr id="31" name="Text 29"/>
-          <p:cNvSpPr/>
-          <p:nvPr/>
-        </p:nvSpPr>
-        <p:spPr>
-          <a:xfrm>
-            <a:off x="594360" y="3246120"/>
+          <p:cNvPr id="45" name="Text 43"/>
+          <p:cNvSpPr/>
+          <p:nvPr/>
+        </p:nvSpPr>
+        <p:spPr>
+          <a:xfrm>
+            <a:off x="6263640" y="3246120"/>
             <a:ext cx="2377440" cy="365760"/>
           </a:xfrm>
           <a:prstGeom prst="rect">
@@ -11161,13 +11607,13 @@
       </p:sp>
       <p:sp>
         <p:nvSpPr>
-          <p:cNvPr id="32" name="Text 30"/>
-          <p:cNvSpPr/>
-          <p:nvPr/>
-        </p:nvSpPr>
-        <p:spPr>
-          <a:xfrm>
-            <a:off x="594360" y="3657600"/>
+          <p:cNvPr id="46" name="Text 44"/>
+          <p:cNvSpPr/>
+          <p:nvPr/>
+        </p:nvSpPr>
+        <p:spPr>
+          <a:xfrm>
+            <a:off x="6263640" y="3657600"/>
             <a:ext cx="2377440" cy="640080"/>
           </a:xfrm>
           <a:prstGeom prst="rect">
@@ -11193,452 +11639,6 @@
                 <a:cs typeface="Arial" pitchFamily="34" charset="-120"/>
               </a:rPr>
               <a:t>「結局ホテルのフロントさんが親切に料金まで教えてくれてコインパーキングに停めることがでいたので夜景もキレイで文句ない...」</a:t>
-            </a:r>
-            <a:endParaRPr lang="en-US" sz="900" dirty="0"/>
-          </a:p>
-        </p:txBody>
-      </p:sp>
-      <p:sp>
-        <p:nvSpPr>
-          <p:cNvPr id="33" name="Shape 31"/>
-          <p:cNvSpPr/>
-          <p:nvPr/>
-        </p:nvSpPr>
-        <p:spPr>
-          <a:xfrm>
-            <a:off x="3291840" y="2880360"/>
-            <a:ext cx="2651760" cy="1600200"/>
-          </a:xfrm>
-          <a:prstGeom prst="rect">
-            <a:avLst/>
-          </a:prstGeom>
-          <a:solidFill>
-            <a:srgbClr val="FFFFFF"/>
-          </a:solidFill>
-          <a:ln/>
-          <a:effectLst>
-            <a:outerShdw sx="100000" sy="100000" kx="0" ky="0" algn="bl" rotWithShape="0" blurRad="50800" dist="25400" dir="8100000">
-              <a:srgbClr val="000000">
-                <a:alpha val="10000"/>
-              </a:srgbClr>
-            </a:outerShdw>
-          </a:effectLst>
-        </p:spPr>
-      </p:sp>
-      <p:sp>
-        <p:nvSpPr>
-          <p:cNvPr id="34" name="Shape 32"/>
-          <p:cNvSpPr/>
-          <p:nvPr/>
-        </p:nvSpPr>
-        <p:spPr>
-          <a:xfrm>
-            <a:off x="3291840" y="2880360"/>
-            <a:ext cx="54864" cy="1600200"/>
-          </a:xfrm>
-          <a:prstGeom prst="rect">
-            <a:avLst/>
-          </a:prstGeom>
-          <a:solidFill>
-            <a:srgbClr val="16A34A"/>
-          </a:solidFill>
-          <a:ln/>
-        </p:spPr>
-      </p:sp>
-      <p:sp>
-        <p:nvSpPr>
-          <p:cNvPr id="35" name="Shape 33"/>
-          <p:cNvSpPr/>
-          <p:nvPr/>
-        </p:nvSpPr>
-        <p:spPr>
-          <a:xfrm>
-            <a:off x="5120640" y="2953512"/>
-            <a:ext cx="658368" cy="228600"/>
-          </a:xfrm>
-          <a:prstGeom prst="rect">
-            <a:avLst/>
-          </a:prstGeom>
-          <a:solidFill>
-            <a:srgbClr val="DCFCE7"/>
-          </a:solidFill>
-          <a:ln/>
-        </p:spPr>
-      </p:sp>
-      <p:sp>
-        <p:nvSpPr>
-          <p:cNvPr id="36" name="Text 34"/>
-          <p:cNvSpPr/>
-          <p:nvPr/>
-        </p:nvSpPr>
-        <p:spPr>
-          <a:xfrm>
-            <a:off x="5120640" y="2953512"/>
-            <a:ext cx="658368" cy="228600"/>
-          </a:xfrm>
-          <a:prstGeom prst="rect">
-            <a:avLst/>
-          </a:prstGeom>
-          <a:noFill/>
-          <a:ln/>
-        </p:spPr>
-        <p:txBody>
-          <a:bodyPr wrap="square" lIns="0" tIns="0" rIns="0" bIns="0" rtlCol="0" anchor="ctr"/>
-          <a:lstStyle/>
-          <a:p>
-            <a:pPr algn="ctr" indent="0" marL="0">
-              <a:buNone/>
-            </a:pPr>
-            <a:r>
-              <a:rPr lang="en-US" sz="900" b="1" dirty="0">
-                <a:solidFill>
-                  <a:srgbClr val="16A34A"/>
-                </a:solidFill>
-                <a:latin typeface="Arial" pitchFamily="34" charset="0"/>
-                <a:ea typeface="Arial" pitchFamily="34" charset="-122"/>
-                <a:cs typeface="Arial" pitchFamily="34" charset="-120"/>
-              </a:rPr>
-              <a:t>20件+</a:t>
-            </a:r>
-            <a:endParaRPr lang="en-US" sz="900" dirty="0"/>
-          </a:p>
-        </p:txBody>
-      </p:sp>
-      <p:sp>
-        <p:nvSpPr>
-          <p:cNvPr id="37" name="Text 35"/>
-          <p:cNvSpPr/>
-          <p:nvPr/>
-        </p:nvSpPr>
-        <p:spPr>
-          <a:xfrm>
-            <a:off x="3429000" y="2953512"/>
-            <a:ext cx="1645920" cy="274320"/>
-          </a:xfrm>
-          <a:prstGeom prst="rect">
-            <a:avLst/>
-          </a:prstGeom>
-          <a:noFill/>
-          <a:ln/>
-        </p:spPr>
-        <p:txBody>
-          <a:bodyPr wrap="square" lIns="0" tIns="0" rIns="0" bIns="0" rtlCol="0" anchor="ctr"/>
-          <a:lstStyle/>
-          <a:p>
-            <a:pPr indent="0" marL="0">
-              <a:buNone/>
-            </a:pPr>
-            <a:r>
-              <a:rPr lang="en-US" sz="1300" b="1" dirty="0">
-                <a:solidFill>
-                  <a:srgbClr val="1A2744"/>
-                </a:solidFill>
-                <a:latin typeface="Arial" pitchFamily="34" charset="0"/>
-                <a:ea typeface="Arial" pitchFamily="34" charset="-122"/>
-                <a:cs typeface="Arial" pitchFamily="34" charset="-120"/>
-              </a:rPr>
-              <a:t>コンビニ・周辺施設</a:t>
-            </a:r>
-            <a:endParaRPr lang="en-US" sz="1300" dirty="0"/>
-          </a:p>
-        </p:txBody>
-      </p:sp>
-      <p:sp>
-        <p:nvSpPr>
-          <p:cNvPr id="38" name="Text 36"/>
-          <p:cNvSpPr/>
-          <p:nvPr/>
-        </p:nvSpPr>
-        <p:spPr>
-          <a:xfrm>
-            <a:off x="3429000" y="3246120"/>
-            <a:ext cx="2377440" cy="365760"/>
-          </a:xfrm>
-          <a:prstGeom prst="rect">
-            <a:avLst/>
-          </a:prstGeom>
-          <a:noFill/>
-          <a:ln/>
-        </p:spPr>
-        <p:txBody>
-          <a:bodyPr wrap="square" lIns="0" tIns="0" rIns="0" bIns="0" rtlCol="0" anchor="ctr"/>
-          <a:lstStyle/>
-          <a:p>
-            <a:pPr indent="0" marL="0">
-              <a:buNone/>
-            </a:pPr>
-            <a:r>
-              <a:rPr lang="en-US" sz="900" dirty="0">
-                <a:solidFill>
-                  <a:srgbClr val="64748B"/>
-                </a:solidFill>
-                <a:latin typeface="Arial" pitchFamily="34" charset="0"/>
-                <a:ea typeface="Arial" pitchFamily="34" charset="-122"/>
-                <a:cs typeface="Arial" pitchFamily="34" charset="-120"/>
-              </a:rPr>
-              <a:t>それ以外はとても便利で、近くにイオンのスーパーマーケットがあるので、買い物や交通の便も良かったです</a:t>
-            </a:r>
-            <a:endParaRPr lang="en-US" sz="900" dirty="0"/>
-          </a:p>
-        </p:txBody>
-      </p:sp>
-      <p:sp>
-        <p:nvSpPr>
-          <p:cNvPr id="39" name="Text 37"/>
-          <p:cNvSpPr/>
-          <p:nvPr/>
-        </p:nvSpPr>
-        <p:spPr>
-          <a:xfrm>
-            <a:off x="3429000" y="3657600"/>
-            <a:ext cx="2377440" cy="640080"/>
-          </a:xfrm>
-          <a:prstGeom prst="rect">
-            <a:avLst/>
-          </a:prstGeom>
-          <a:noFill/>
-          <a:ln/>
-        </p:spPr>
-        <p:txBody>
-          <a:bodyPr wrap="square" lIns="0" tIns="0" rIns="0" bIns="0" rtlCol="0" anchor="ctr"/>
-          <a:lstStyle/>
-          <a:p>
-            <a:pPr indent="0" marL="0">
-              <a:buNone/>
-            </a:pPr>
-            <a:r>
-              <a:rPr lang="en-US" sz="900" i="1" dirty="0">
-                <a:solidFill>
-                  <a:srgbClr val="3B7DD8"/>
-                </a:solidFill>
-                <a:latin typeface="Arial" pitchFamily="34" charset="0"/>
-                <a:ea typeface="Arial" pitchFamily="34" charset="-122"/>
-                <a:cs typeface="Arial" pitchFamily="34" charset="-120"/>
-              </a:rPr>
-              <a:t>「近くにイオンモールやコンビニなどあり、とても便利でした」</a:t>
-            </a:r>
-            <a:endParaRPr lang="en-US" sz="900" dirty="0"/>
-          </a:p>
-        </p:txBody>
-      </p:sp>
-      <p:sp>
-        <p:nvSpPr>
-          <p:cNvPr id="40" name="Shape 38"/>
-          <p:cNvSpPr/>
-          <p:nvPr/>
-        </p:nvSpPr>
-        <p:spPr>
-          <a:xfrm>
-            <a:off x="6126480" y="2880360"/>
-            <a:ext cx="2651760" cy="1600200"/>
-          </a:xfrm>
-          <a:prstGeom prst="rect">
-            <a:avLst/>
-          </a:prstGeom>
-          <a:solidFill>
-            <a:srgbClr val="FFFFFF"/>
-          </a:solidFill>
-          <a:ln/>
-          <a:effectLst>
-            <a:outerShdw sx="100000" sy="100000" kx="0" ky="0" algn="bl" rotWithShape="0" blurRad="50800" dist="25400" dir="8100000">
-              <a:srgbClr val="000000">
-                <a:alpha val="10000"/>
-              </a:srgbClr>
-            </a:outerShdw>
-          </a:effectLst>
-        </p:spPr>
-      </p:sp>
-      <p:sp>
-        <p:nvSpPr>
-          <p:cNvPr id="41" name="Shape 39"/>
-          <p:cNvSpPr/>
-          <p:nvPr/>
-        </p:nvSpPr>
-        <p:spPr>
-          <a:xfrm>
-            <a:off x="6126480" y="2880360"/>
-            <a:ext cx="54864" cy="1600200"/>
-          </a:xfrm>
-          <a:prstGeom prst="rect">
-            <a:avLst/>
-          </a:prstGeom>
-          <a:solidFill>
-            <a:srgbClr val="16A34A"/>
-          </a:solidFill>
-          <a:ln/>
-        </p:spPr>
-      </p:sp>
-      <p:sp>
-        <p:nvSpPr>
-          <p:cNvPr id="42" name="Shape 40"/>
-          <p:cNvSpPr/>
-          <p:nvPr/>
-        </p:nvSpPr>
-        <p:spPr>
-          <a:xfrm>
-            <a:off x="7955280" y="2953512"/>
-            <a:ext cx="658368" cy="228600"/>
-          </a:xfrm>
-          <a:prstGeom prst="rect">
-            <a:avLst/>
-          </a:prstGeom>
-          <a:solidFill>
-            <a:srgbClr val="DCFCE7"/>
-          </a:solidFill>
-          <a:ln/>
-        </p:spPr>
-      </p:sp>
-      <p:sp>
-        <p:nvSpPr>
-          <p:cNvPr id="43" name="Text 41"/>
-          <p:cNvSpPr/>
-          <p:nvPr/>
-        </p:nvSpPr>
-        <p:spPr>
-          <a:xfrm>
-            <a:off x="7955280" y="2953512"/>
-            <a:ext cx="658368" cy="228600"/>
-          </a:xfrm>
-          <a:prstGeom prst="rect">
-            <a:avLst/>
-          </a:prstGeom>
-          <a:noFill/>
-          <a:ln/>
-        </p:spPr>
-        <p:txBody>
-          <a:bodyPr wrap="square" lIns="0" tIns="0" rIns="0" bIns="0" rtlCol="0" anchor="ctr"/>
-          <a:lstStyle/>
-          <a:p>
-            <a:pPr algn="ctr" indent="0" marL="0">
-              <a:buNone/>
-            </a:pPr>
-            <a:r>
-              <a:rPr lang="en-US" sz="900" b="1" dirty="0">
-                <a:solidFill>
-                  <a:srgbClr val="16A34A"/>
-                </a:solidFill>
-                <a:latin typeface="Arial" pitchFamily="34" charset="0"/>
-                <a:ea typeface="Arial" pitchFamily="34" charset="-122"/>
-                <a:cs typeface="Arial" pitchFamily="34" charset="-120"/>
-              </a:rPr>
-              <a:t>20件+</a:t>
-            </a:r>
-            <a:endParaRPr lang="en-US" sz="900" dirty="0"/>
-          </a:p>
-        </p:txBody>
-      </p:sp>
-      <p:sp>
-        <p:nvSpPr>
-          <p:cNvPr id="44" name="Text 42"/>
-          <p:cNvSpPr/>
-          <p:nvPr/>
-        </p:nvSpPr>
-        <p:spPr>
-          <a:xfrm>
-            <a:off x="6263640" y="2953512"/>
-            <a:ext cx="1645920" cy="274320"/>
-          </a:xfrm>
-          <a:prstGeom prst="rect">
-            <a:avLst/>
-          </a:prstGeom>
-          <a:noFill/>
-          <a:ln/>
-        </p:spPr>
-        <p:txBody>
-          <a:bodyPr wrap="square" lIns="0" tIns="0" rIns="0" bIns="0" rtlCol="0" anchor="ctr"/>
-          <a:lstStyle/>
-          <a:p>
-            <a:pPr indent="0" marL="0">
-              <a:buNone/>
-            </a:pPr>
-            <a:r>
-              <a:rPr lang="en-US" sz="1300" b="1" dirty="0">
-                <a:solidFill>
-                  <a:srgbClr val="1A2744"/>
-                </a:solidFill>
-                <a:latin typeface="Arial" pitchFamily="34" charset="0"/>
-                <a:ea typeface="Arial" pitchFamily="34" charset="-122"/>
-                <a:cs typeface="Arial" pitchFamily="34" charset="-120"/>
-              </a:rPr>
-              <a:t>朝食</a:t>
-            </a:r>
-            <a:endParaRPr lang="en-US" sz="1300" dirty="0"/>
-          </a:p>
-        </p:txBody>
-      </p:sp>
-      <p:sp>
-        <p:nvSpPr>
-          <p:cNvPr id="45" name="Text 43"/>
-          <p:cNvSpPr/>
-          <p:nvPr/>
-        </p:nvSpPr>
-        <p:spPr>
-          <a:xfrm>
-            <a:off x="6263640" y="3246120"/>
-            <a:ext cx="2377440" cy="365760"/>
-          </a:xfrm>
-          <a:prstGeom prst="rect">
-            <a:avLst/>
-          </a:prstGeom>
-          <a:noFill/>
-          <a:ln/>
-        </p:spPr>
-        <p:txBody>
-          <a:bodyPr wrap="square" lIns="0" tIns="0" rIns="0" bIns="0" rtlCol="0" anchor="ctr"/>
-          <a:lstStyle/>
-          <a:p>
-            <a:pPr indent="0" marL="0">
-              <a:buNone/>
-            </a:pPr>
-            <a:r>
-              <a:rPr lang="en-US" sz="900" dirty="0">
-                <a:solidFill>
-                  <a:srgbClr val="64748B"/>
-                </a:solidFill>
-                <a:latin typeface="Arial" pitchFamily="34" charset="0"/>
-                <a:ea typeface="Arial" pitchFamily="34" charset="-122"/>
-                <a:cs typeface="Arial" pitchFamily="34" charset="-120"/>
-              </a:rPr>
-              <a:t>部屋は綺麗で朝ごはんも美味しかったです</a:t>
-            </a:r>
-            <a:endParaRPr lang="en-US" sz="900" dirty="0"/>
-          </a:p>
-        </p:txBody>
-      </p:sp>
-      <p:sp>
-        <p:nvSpPr>
-          <p:cNvPr id="46" name="Text 44"/>
-          <p:cNvSpPr/>
-          <p:nvPr/>
-        </p:nvSpPr>
-        <p:spPr>
-          <a:xfrm>
-            <a:off x="6263640" y="3657600"/>
-            <a:ext cx="2377440" cy="640080"/>
-          </a:xfrm>
-          <a:prstGeom prst="rect">
-            <a:avLst/>
-          </a:prstGeom>
-          <a:noFill/>
-          <a:ln/>
-        </p:spPr>
-        <p:txBody>
-          <a:bodyPr wrap="square" lIns="0" tIns="0" rIns="0" bIns="0" rtlCol="0" anchor="ctr"/>
-          <a:lstStyle/>
-          <a:p>
-            <a:pPr indent="0" marL="0">
-              <a:buNone/>
-            </a:pPr>
-            <a:r>
-              <a:rPr lang="en-US" sz="900" i="1" dirty="0">
-                <a:solidFill>
-                  <a:srgbClr val="3B7DD8"/>
-                </a:solidFill>
-                <a:latin typeface="Arial" pitchFamily="34" charset="0"/>
-                <a:ea typeface="Arial" pitchFamily="34" charset="-122"/>
-                <a:cs typeface="Arial" pitchFamily="34" charset="-120"/>
-              </a:rPr>
-              <a:t>「ただ、朝食バイキングについては、品数がそれほど多くないうえ、パン用のオープントースターがないなど、物足りなく感じました」</a:t>
             </a:r>
             <a:endParaRPr lang="en-US" sz="900" dirty="0"/>
           </a:p>
@@ -12328,7 +12328,7 @@
                           <a:ea typeface="Arial" pitchFamily="34" charset="-122"/>
                           <a:cs typeface="Arial" pitchFamily="34" charset="-120"/>
                         </a:rPr>
-                        <a:t>羽田空港からリムジンバスでホテルまで行けるし、駅にも近いのでとても便利です</a:t>
+                        <a:t>1番良かったのは浴槽の排水が早いことです</a:t>
                       </a:r>
                       <a:endParaRPr lang="en-US" sz="900" dirty="0">
                         <a:latin typeface="Arial" charset="0"/>
@@ -12396,7 +12396,7 @@
                           <a:ea typeface="Arial" pitchFamily="34" charset="-122"/>
                           <a:cs typeface="Arial" pitchFamily="34" charset="-120"/>
                         </a:rPr>
-                        <a:t>11件</a:t>
+                        <a:t>12件</a:t>
                       </a:r>
                       <a:endParaRPr lang="en-US" sz="900" dirty="0">
                         <a:latin typeface="Arial" charset="0"/>
@@ -12602,7 +12602,7 @@
                           <a:ea typeface="Arial" pitchFamily="34" charset="-122"/>
                           <a:cs typeface="Arial" pitchFamily="34" charset="-120"/>
                         </a:rPr>
-                        <a:t>Good location, train station across the road and few shops</a:t>
+                        <a:t>エアコンの調整が難しい</a:t>
                       </a:r>
                       <a:endParaRPr lang="en-US" sz="900" dirty="0">
                         <a:latin typeface="Arial" charset="0"/>

--- a/納品レポート/ホテル別レポート/hearton_口コミ分析レポート.pptx
+++ b/納品レポート/ホテル別レポート/hearton_口コミ分析レポート.pptx
@@ -208,22 +208,22 @@
                 <c:formatCode>General</c:formatCode>
                 <c:ptCount val="6"/>
                 <c:pt idx="0">
-                  <c:v>9.32</c:v>
+                  <c:v>9.33</c:v>
                 </c:pt>
                 <c:pt idx="1">
-                  <c:v>8.93</c:v>
+                  <c:v>8.97</c:v>
                 </c:pt>
                 <c:pt idx="2">
-                  <c:v>8.5</c:v>
+                  <c:v>8.54</c:v>
                 </c:pt>
                 <c:pt idx="3">
-                  <c:v>8.38</c:v>
+                  <c:v>8.37</c:v>
                 </c:pt>
                 <c:pt idx="4">
                   <c:v>8.36</c:v>
                 </c:pt>
                 <c:pt idx="5">
-                  <c:v>8.18</c:v>
+                  <c:v>8.2</c:v>
                 </c:pt>
               </c:numCache>
             </c:numRef>
@@ -566,10 +566,10 @@
               <c:numCache>
                 <c:ptCount val="3"/>
                 <c:pt idx="0">
-                  <c:v>118</c:v>
+                  <c:v>119</c:v>
                 </c:pt>
                 <c:pt idx="1">
-                  <c:v>20</c:v>
+                  <c:v>19</c:v>
                 </c:pt>
                 <c:pt idx="2">
                   <c:v>1</c:v>
@@ -795,16 +795,16 @@
                 <c:formatCode>General</c:formatCode>
                 <c:ptCount val="7"/>
                 <c:pt idx="0">
-                  <c:v>60</c:v>
+                  <c:v>61</c:v>
                 </c:pt>
                 <c:pt idx="1">
-                  <c:v>11</c:v>
+                  <c:v>10</c:v>
                 </c:pt>
                 <c:pt idx="2">
-                  <c:v>47</c:v>
+                  <c:v>48</c:v>
                 </c:pt>
                 <c:pt idx="3">
-                  <c:v>8</c:v>
+                  <c:v>7</c:v>
                 </c:pt>
                 <c:pt idx="4">
                   <c:v>11</c:v>
@@ -2784,7 +2784,7 @@
                 <a:ea typeface="Arial" pitchFamily="34" charset="-122"/>
                 <a:cs typeface="Arial" pitchFamily="34" charset="-120"/>
               </a:rPr>
-              <a:t>作成日：2026年3月19日</a:t>
+              <a:t>作成日：2026年3月20日</a:t>
             </a:r>
             <a:endParaRPr lang="en-US" sz="1000" dirty="0"/>
           </a:p>
@@ -3330,7 +3330,7 @@
                           <a:ea typeface="Arial" pitchFamily="34" charset="-122"/>
                           <a:cs typeface="Arial" pitchFamily="34" charset="-120"/>
                         </a:rPr>
-                        <a:t>8.66点</a:t>
+                        <a:t>8.68点</a:t>
                       </a:r>
                       <a:endParaRPr lang="en-US" sz="1000" dirty="0">
                         <a:latin typeface="Arial" charset="0"/>
@@ -3604,7 +3604,7 @@
                           <a:ea typeface="Arial" pitchFamily="34" charset="-122"/>
                           <a:cs typeface="Arial" pitchFamily="34" charset="-120"/>
                         </a:rPr>
-                        <a:t>84.9%</a:t>
+                        <a:t>85.6%</a:t>
                       </a:r>
                       <a:endParaRPr lang="en-US" sz="1000" dirty="0">
                         <a:latin typeface="Arial" charset="0"/>
@@ -3672,7 +3672,7 @@
                           <a:ea typeface="Arial" pitchFamily="34" charset="-122"/>
                           <a:cs typeface="Arial" pitchFamily="34" charset="-120"/>
                         </a:rPr>
-                        <a:t>90%以上</a:t>
+                        <a:t>91%以上</a:t>
                       </a:r>
                       <a:endParaRPr lang="en-US" sz="1000" dirty="0">
                         <a:latin typeface="Arial" charset="0"/>
@@ -4426,7 +4426,7 @@
                           <a:ea typeface="Arial" pitchFamily="34" charset="-122"/>
                           <a:cs typeface="Arial" pitchFamily="34" charset="-120"/>
                         </a:rPr>
-                        <a:t>約12件/期間</a:t>
+                        <a:t>約13件/期間</a:t>
                       </a:r>
                       <a:endParaRPr lang="en-US" sz="1000" dirty="0">
                         <a:latin typeface="Arial" charset="0"/>
@@ -5065,7 +5065,7 @@
                 <a:ea typeface="Arial" pitchFamily="34" charset="-122"/>
                 <a:cs typeface="Arial" pitchFamily="34" charset="-120"/>
               </a:rPr>
-              <a:t>8.66</a:t>
+              <a:t>8.68</a:t>
             </a:r>
             <a:endParaRPr lang="en-US" sz="3200" dirty="0"/>
           </a:p>
@@ -5190,7 +5190,7 @@
                 <a:ea typeface="Arial" pitchFamily="34" charset="-122"/>
                 <a:cs typeface="Arial" pitchFamily="34" charset="-120"/>
               </a:rPr>
-              <a:t>84.9%</a:t>
+              <a:t>85.6%</a:t>
             </a:r>
             <a:endParaRPr lang="en-US" sz="3200" dirty="0"/>
           </a:p>
@@ -5588,7 +5588,7 @@
                 <a:ea typeface="Arial" pitchFamily="34" charset="-122"/>
                 <a:cs typeface="Arial" pitchFamily="34" charset="-120"/>
               </a:rPr>
-              <a:t>  駅にはイオンがあり困ることはありません</a:t>
+              <a:t>  また、近くにイオン、コンビニ、飲食店もあるのでとても便利な立地です</a:t>
             </a:r>
             <a:endParaRPr lang="en-US" sz="1100" dirty="0"/>
           </a:p>
@@ -5628,7 +5628,7 @@
                 <a:ea typeface="Arial" pitchFamily="34" charset="-122"/>
                 <a:cs typeface="Arial" pitchFamily="34" charset="-120"/>
               </a:rPr>
-              <a:t>  部屋もきれいで過ごしやすい</a:t>
+              <a:t>  ・部屋の清掃は行き届いており、ベッド、バスタブも広めでゆったり出来て良かったです</a:t>
             </a:r>
             <a:endParaRPr lang="en-US" sz="1100" dirty="0"/>
           </a:p>
@@ -5668,7 +5668,7 @@
                 <a:ea typeface="Arial" pitchFamily="34" charset="-122"/>
                 <a:cs typeface="Arial" pitchFamily="34" charset="-120"/>
               </a:rPr>
-              <a:t>  アメニティも豊富でロビーから選んで持っていくタイプ、部屋も綺麗で品川に行くときはまた利用したいです</a:t>
+              <a:t>  ・部屋の清掃は行き届いており、ベッド、バスタブも広めでゆったり出来て良かったです</a:t>
             </a:r>
             <a:endParaRPr lang="en-US" sz="1100" dirty="0"/>
           </a:p>
@@ -5816,7 +5816,7 @@
                 <a:ea typeface="Arial" pitchFamily="34" charset="-122"/>
                 <a:cs typeface="Arial" pitchFamily="34" charset="-120"/>
               </a:rPr>
-              <a:t>  1番良かったのは浴槽の排水が早いことです</a:t>
+              <a:t>  ・部屋の清掃は行き届いており、ベッド、バスタブも広めでゆったり出来て良かったです</a:t>
             </a:r>
             <a:endParaRPr lang="en-US" sz="1100" dirty="0"/>
           </a:p>
@@ -5856,7 +5856,7 @@
                 <a:ea typeface="Arial" pitchFamily="34" charset="-122"/>
                 <a:cs typeface="Arial" pitchFamily="34" charset="-120"/>
               </a:rPr>
-              <a:t>  エアコンの調整が難しい</a:t>
+              <a:t>  ただ、バスタブは、水とお湯のハンドルが別々なので温度調整が難しいです</a:t>
             </a:r>
             <a:endParaRPr lang="en-US" sz="1100" dirty="0"/>
           </a:p>
@@ -6249,7 +6249,7 @@
                 <a:ea typeface="Arial" pitchFamily="34" charset="-122"/>
                 <a:cs typeface="Arial" pitchFamily="34" charset="-120"/>
               </a:rPr>
-              <a:t>8.66</a:t>
+              <a:t>8.68</a:t>
             </a:r>
             <a:endParaRPr lang="en-US" sz="3200" dirty="0"/>
           </a:p>
@@ -6374,7 +6374,7 @@
                 <a:ea typeface="Arial" pitchFamily="34" charset="-122"/>
                 <a:cs typeface="Arial" pitchFamily="34" charset="-120"/>
               </a:rPr>
-              <a:t>84.9%</a:t>
+              <a:t>85.6%</a:t>
             </a:r>
             <a:endParaRPr lang="en-US" sz="3200" dirty="0"/>
           </a:p>
@@ -7045,7 +7045,7 @@
                 <a:ea typeface="Arial" pitchFamily="34" charset="-122"/>
                 <a:cs typeface="Arial" pitchFamily="34" charset="-120"/>
               </a:rPr>
-              <a:t>Trip.com(9.32)が最高スコア。</a:t>
+              <a:t>Trip.com(9.33)が最高スコア。</a:t>
             </a:r>
             <a:endParaRPr lang="en-US" sz="1100" dirty="0"/>
           </a:p>
@@ -7554,7 +7554,7 @@
                           <a:ea typeface="Arial" pitchFamily="34" charset="-122"/>
                           <a:cs typeface="Arial" pitchFamily="34" charset="-120"/>
                         </a:rPr>
-                        <a:t>25</a:t>
+                        <a:t>24</a:t>
                       </a:r>
                       <a:endParaRPr lang="en-US" sz="900" dirty="0">
                         <a:latin typeface="Arial" charset="0"/>
@@ -7622,7 +7622,7 @@
                           <a:ea typeface="Arial" pitchFamily="34" charset="-122"/>
                           <a:cs typeface="Arial" pitchFamily="34" charset="-120"/>
                         </a:rPr>
-                        <a:t>9.32</a:t>
+                        <a:t>9.33</a:t>
                       </a:r>
                       <a:endParaRPr lang="en-US" sz="900" dirty="0">
                         <a:latin typeface="Arial" charset="0"/>
@@ -7758,7 +7758,7 @@
                           <a:ea typeface="Arial" pitchFamily="34" charset="-122"/>
                           <a:cs typeface="Arial" pitchFamily="34" charset="-120"/>
                         </a:rPr>
-                        <a:t>9.32</a:t>
+                        <a:t>9.33</a:t>
                       </a:r>
                       <a:endParaRPr lang="en-US" sz="900" dirty="0">
                         <a:latin typeface="Arial" charset="0"/>
@@ -7896,7 +7896,7 @@
                           <a:ea typeface="Arial" pitchFamily="34" charset="-122"/>
                           <a:cs typeface="Arial" pitchFamily="34" charset="-120"/>
                         </a:rPr>
-                        <a:t>28</a:t>
+                        <a:t>29</a:t>
                       </a:r>
                       <a:endParaRPr lang="en-US" sz="900" dirty="0">
                         <a:latin typeface="Arial" charset="0"/>
@@ -7964,7 +7964,7 @@
                           <a:ea typeface="Arial" pitchFamily="34" charset="-122"/>
                           <a:cs typeface="Arial" pitchFamily="34" charset="-120"/>
                         </a:rPr>
-                        <a:t>4.46</a:t>
+                        <a:t>4.48</a:t>
                       </a:r>
                       <a:endParaRPr lang="en-US" sz="900" dirty="0">
                         <a:latin typeface="Arial" charset="0"/>
@@ -8100,7 +8100,7 @@
                           <a:ea typeface="Arial" pitchFamily="34" charset="-122"/>
                           <a:cs typeface="Arial" pitchFamily="34" charset="-120"/>
                         </a:rPr>
-                        <a:t>8.93</a:t>
+                        <a:t>8.97</a:t>
                       </a:r>
                       <a:endParaRPr lang="en-US" sz="900" dirty="0">
                         <a:latin typeface="Arial" charset="0"/>
@@ -8306,7 +8306,7 @@
                           <a:ea typeface="Arial" pitchFamily="34" charset="-122"/>
                           <a:cs typeface="Arial" pitchFamily="34" charset="-120"/>
                         </a:rPr>
-                        <a:t>8.5</a:t>
+                        <a:t>8.54</a:t>
                       </a:r>
                       <a:endParaRPr lang="en-US" sz="900" dirty="0">
                         <a:latin typeface="Arial" charset="0"/>
@@ -8442,7 +8442,7 @@
                           <a:ea typeface="Arial" pitchFamily="34" charset="-122"/>
                           <a:cs typeface="Arial" pitchFamily="34" charset="-120"/>
                         </a:rPr>
-                        <a:t>8.5</a:t>
+                        <a:t>8.54</a:t>
                       </a:r>
                       <a:endParaRPr lang="en-US" sz="900" dirty="0">
                         <a:latin typeface="Arial" charset="0"/>
@@ -8580,7 +8580,7 @@
                           <a:ea typeface="Arial" pitchFamily="34" charset="-122"/>
                           <a:cs typeface="Arial" pitchFamily="34" charset="-120"/>
                         </a:rPr>
-                        <a:t>37</a:t>
+                        <a:t>38</a:t>
                       </a:r>
                       <a:endParaRPr lang="en-US" sz="900" dirty="0">
                         <a:latin typeface="Arial" charset="0"/>
@@ -8648,7 +8648,7 @@
                           <a:ea typeface="Arial" pitchFamily="34" charset="-122"/>
                           <a:cs typeface="Arial" pitchFamily="34" charset="-120"/>
                         </a:rPr>
-                        <a:t>4.19</a:t>
+                        <a:t>4.18</a:t>
                       </a:r>
                       <a:endParaRPr lang="en-US" sz="900" dirty="0">
                         <a:latin typeface="Arial" charset="0"/>
@@ -8784,7 +8784,7 @@
                           <a:ea typeface="Arial" pitchFamily="34" charset="-122"/>
                           <a:cs typeface="Arial" pitchFamily="34" charset="-120"/>
                         </a:rPr>
-                        <a:t>8.38</a:t>
+                        <a:t>8.37</a:t>
                       </a:r>
                       <a:endParaRPr lang="en-US" sz="900" dirty="0">
                         <a:latin typeface="Arial" charset="0"/>
@@ -9264,7 +9264,7 @@
                           <a:ea typeface="Arial" pitchFamily="34" charset="-122"/>
                           <a:cs typeface="Arial" pitchFamily="34" charset="-120"/>
                         </a:rPr>
-                        <a:t>11</a:t>
+                        <a:t>10</a:t>
                       </a:r>
                       <a:endParaRPr lang="en-US" sz="900" dirty="0">
                         <a:latin typeface="Arial" charset="0"/>
@@ -9332,7 +9332,7 @@
                           <a:ea typeface="Arial" pitchFamily="34" charset="-122"/>
                           <a:cs typeface="Arial" pitchFamily="34" charset="-120"/>
                         </a:rPr>
-                        <a:t>4.09</a:t>
+                        <a:t>4.1</a:t>
                       </a:r>
                       <a:endParaRPr lang="en-US" sz="900" dirty="0">
                         <a:latin typeface="Arial" charset="0"/>
@@ -9468,7 +9468,7 @@
                           <a:ea typeface="Arial" pitchFamily="34" charset="-122"/>
                           <a:cs typeface="Arial" pitchFamily="34" charset="-120"/>
                         </a:rPr>
-                        <a:t>8.18</a:t>
+                        <a:t>8.2</a:t>
                       </a:r>
                       <a:endParaRPr lang="en-US" sz="900" dirty="0">
                         <a:latin typeface="Arial" charset="0"/>
@@ -9876,7 +9876,7 @@
                 <a:ea typeface="Arial" pitchFamily="34" charset="-122"/>
                 <a:cs typeface="Arial" pitchFamily="34" charset="-120"/>
               </a:rPr>
-              <a:t>118件（84.9%）</a:t>
+              <a:t>119件（85.6%）</a:t>
             </a:r>
             <a:endParaRPr lang="en-US" sz="1100" dirty="0"/>
           </a:p>
@@ -9974,7 +9974,7 @@
                 <a:ea typeface="Arial" pitchFamily="34" charset="-122"/>
                 <a:cs typeface="Arial" pitchFamily="34" charset="-120"/>
               </a:rPr>
-              <a:t>20件（14.4%）</a:t>
+              <a:t>19件（13.7%）</a:t>
             </a:r>
             <a:endParaRPr lang="en-US" sz="1100" dirty="0"/>
           </a:p>
@@ -10484,7 +10484,7 @@
                 <a:ea typeface="Arial" pitchFamily="34" charset="-122"/>
                 <a:cs typeface="Arial" pitchFamily="34" charset="-120"/>
               </a:rPr>
-              <a:t>駅にはイオンがあり困ることはありません</a:t>
+              <a:t>また、近くにイオン、コンビニ、飲食店もあるのでとても便利な立地です</a:t>
             </a:r>
             <a:endParaRPr lang="en-US" sz="900" dirty="0"/>
           </a:p>
@@ -10523,7 +10523,7 @@
                 <a:ea typeface="Arial" pitchFamily="34" charset="-122"/>
                 <a:cs typeface="Arial" pitchFamily="34" charset="-120"/>
               </a:rPr>
-              <a:t>「りんかい線品川シーサイド駅から徒歩すぐ、イオンモールにも近い抜群の立地」</a:t>
+              <a:t>「そのほかは、立地も、環境も、食事も申し分なしです」</a:t>
             </a:r>
             <a:endParaRPr lang="en-US" sz="900" dirty="0"/>
           </a:p>
@@ -10707,7 +10707,7 @@
                 <a:ea typeface="Arial" pitchFamily="34" charset="-122"/>
                 <a:cs typeface="Arial" pitchFamily="34" charset="-120"/>
               </a:rPr>
-              <a:t>部屋もきれいで過ごしやすい</a:t>
+              <a:t>・部屋の清掃は行き届いており、ベッド、バスタブも広めでゆったり出来て良かったです</a:t>
             </a:r>
             <a:endParaRPr lang="en-US" sz="900" dirty="0"/>
           </a:p>
@@ -10722,6 +10722,452 @@
         <p:spPr>
           <a:xfrm>
             <a:off x="3429000" y="1828800"/>
+            <a:ext cx="2377440" cy="640080"/>
+          </a:xfrm>
+          <a:prstGeom prst="rect">
+            <a:avLst/>
+          </a:prstGeom>
+          <a:noFill/>
+          <a:ln/>
+        </p:spPr>
+        <p:txBody>
+          <a:bodyPr wrap="square" lIns="0" tIns="0" rIns="0" bIns="0" rtlCol="0" anchor="ctr"/>
+          <a:lstStyle/>
+          <a:p>
+            <a:pPr indent="0" marL="0">
+              <a:buNone/>
+            </a:pPr>
+            <a:r>
+              <a:rPr lang="en-US" sz="900" i="1" dirty="0">
+                <a:solidFill>
+                  <a:srgbClr val="3B7DD8"/>
+                </a:solidFill>
+                <a:latin typeface="Arial" pitchFamily="34" charset="0"/>
+                <a:ea typeface="Arial" pitchFamily="34" charset="-122"/>
+                <a:cs typeface="Arial" pitchFamily="34" charset="-120"/>
+              </a:rPr>
+              <a:t>「広くて清潔です」</a:t>
+            </a:r>
+            <a:endParaRPr lang="en-US" sz="900" dirty="0"/>
+          </a:p>
+        </p:txBody>
+      </p:sp>
+      <p:sp>
+        <p:nvSpPr>
+          <p:cNvPr id="19" name="Shape 17"/>
+          <p:cNvSpPr/>
+          <p:nvPr/>
+        </p:nvSpPr>
+        <p:spPr>
+          <a:xfrm>
+            <a:off x="6126480" y="1051560"/>
+            <a:ext cx="2651760" cy="1600200"/>
+          </a:xfrm>
+          <a:prstGeom prst="rect">
+            <a:avLst/>
+          </a:prstGeom>
+          <a:solidFill>
+            <a:srgbClr val="FFFFFF"/>
+          </a:solidFill>
+          <a:ln/>
+          <a:effectLst>
+            <a:outerShdw sx="100000" sy="100000" kx="0" ky="0" algn="bl" rotWithShape="0" blurRad="50800" dist="25400" dir="8100000">
+              <a:srgbClr val="000000">
+                <a:alpha val="10000"/>
+              </a:srgbClr>
+            </a:outerShdw>
+          </a:effectLst>
+        </p:spPr>
+      </p:sp>
+      <p:sp>
+        <p:nvSpPr>
+          <p:cNvPr id="20" name="Shape 18"/>
+          <p:cNvSpPr/>
+          <p:nvPr/>
+        </p:nvSpPr>
+        <p:spPr>
+          <a:xfrm>
+            <a:off x="6126480" y="1051560"/>
+            <a:ext cx="54864" cy="1600200"/>
+          </a:xfrm>
+          <a:prstGeom prst="rect">
+            <a:avLst/>
+          </a:prstGeom>
+          <a:solidFill>
+            <a:srgbClr val="16A34A"/>
+          </a:solidFill>
+          <a:ln/>
+        </p:spPr>
+      </p:sp>
+      <p:sp>
+        <p:nvSpPr>
+          <p:cNvPr id="21" name="Shape 19"/>
+          <p:cNvSpPr/>
+          <p:nvPr/>
+        </p:nvSpPr>
+        <p:spPr>
+          <a:xfrm>
+            <a:off x="7955280" y="1124712"/>
+            <a:ext cx="658368" cy="228600"/>
+          </a:xfrm>
+          <a:prstGeom prst="rect">
+            <a:avLst/>
+          </a:prstGeom>
+          <a:solidFill>
+            <a:srgbClr val="DCFCE7"/>
+          </a:solidFill>
+          <a:ln/>
+        </p:spPr>
+      </p:sp>
+      <p:sp>
+        <p:nvSpPr>
+          <p:cNvPr id="22" name="Text 20"/>
+          <p:cNvSpPr/>
+          <p:nvPr/>
+        </p:nvSpPr>
+        <p:spPr>
+          <a:xfrm>
+            <a:off x="7955280" y="1124712"/>
+            <a:ext cx="658368" cy="228600"/>
+          </a:xfrm>
+          <a:prstGeom prst="rect">
+            <a:avLst/>
+          </a:prstGeom>
+          <a:noFill/>
+          <a:ln/>
+        </p:spPr>
+        <p:txBody>
+          <a:bodyPr wrap="square" lIns="0" tIns="0" rIns="0" bIns="0" rtlCol="0" anchor="ctr"/>
+          <a:lstStyle/>
+          <a:p>
+            <a:pPr algn="ctr" indent="0" marL="0">
+              <a:buNone/>
+            </a:pPr>
+            <a:r>
+              <a:rPr lang="en-US" sz="900" b="1" dirty="0">
+                <a:solidFill>
+                  <a:srgbClr val="16A34A"/>
+                </a:solidFill>
+                <a:latin typeface="Arial" pitchFamily="34" charset="0"/>
+                <a:ea typeface="Arial" pitchFamily="34" charset="-122"/>
+                <a:cs typeface="Arial" pitchFamily="34" charset="-120"/>
+              </a:rPr>
+              <a:t>20件+</a:t>
+            </a:r>
+            <a:endParaRPr lang="en-US" sz="900" dirty="0"/>
+          </a:p>
+        </p:txBody>
+      </p:sp>
+      <p:sp>
+        <p:nvSpPr>
+          <p:cNvPr id="23" name="Text 21"/>
+          <p:cNvSpPr/>
+          <p:nvPr/>
+        </p:nvSpPr>
+        <p:spPr>
+          <a:xfrm>
+            <a:off x="6263640" y="1124712"/>
+            <a:ext cx="1645920" cy="274320"/>
+          </a:xfrm>
+          <a:prstGeom prst="rect">
+            <a:avLst/>
+          </a:prstGeom>
+          <a:noFill/>
+          <a:ln/>
+        </p:spPr>
+        <p:txBody>
+          <a:bodyPr wrap="square" lIns="0" tIns="0" rIns="0" bIns="0" rtlCol="0" anchor="ctr"/>
+          <a:lstStyle/>
+          <a:p>
+            <a:pPr indent="0" marL="0">
+              <a:buNone/>
+            </a:pPr>
+            <a:r>
+              <a:rPr lang="en-US" sz="1300" b="1" dirty="0">
+                <a:solidFill>
+                  <a:srgbClr val="1A2744"/>
+                </a:solidFill>
+                <a:latin typeface="Arial" pitchFamily="34" charset="0"/>
+                <a:ea typeface="Arial" pitchFamily="34" charset="-122"/>
+                <a:cs typeface="Arial" pitchFamily="34" charset="-120"/>
+              </a:rPr>
+              <a:t>快適さ・設備</a:t>
+            </a:r>
+            <a:endParaRPr lang="en-US" sz="1300" dirty="0"/>
+          </a:p>
+        </p:txBody>
+      </p:sp>
+      <p:sp>
+        <p:nvSpPr>
+          <p:cNvPr id="24" name="Text 22"/>
+          <p:cNvSpPr/>
+          <p:nvPr/>
+        </p:nvSpPr>
+        <p:spPr>
+          <a:xfrm>
+            <a:off x="6263640" y="1417320"/>
+            <a:ext cx="2377440" cy="365760"/>
+          </a:xfrm>
+          <a:prstGeom prst="rect">
+            <a:avLst/>
+          </a:prstGeom>
+          <a:noFill/>
+          <a:ln/>
+        </p:spPr>
+        <p:txBody>
+          <a:bodyPr wrap="square" lIns="0" tIns="0" rIns="0" bIns="0" rtlCol="0" anchor="ctr"/>
+          <a:lstStyle/>
+          <a:p>
+            <a:pPr indent="0" marL="0">
+              <a:buNone/>
+            </a:pPr>
+            <a:r>
+              <a:rPr lang="en-US" sz="900" dirty="0">
+                <a:solidFill>
+                  <a:srgbClr val="64748B"/>
+                </a:solidFill>
+                <a:latin typeface="Arial" pitchFamily="34" charset="0"/>
+                <a:ea typeface="Arial" pitchFamily="34" charset="-122"/>
+                <a:cs typeface="Arial" pitchFamily="34" charset="-120"/>
+              </a:rPr>
+              <a:t>・部屋の清掃は行き届いており、ベッド、バスタブも広めでゆったり出来て良かったです</a:t>
+            </a:r>
+            <a:endParaRPr lang="en-US" sz="900" dirty="0"/>
+          </a:p>
+        </p:txBody>
+      </p:sp>
+      <p:sp>
+        <p:nvSpPr>
+          <p:cNvPr id="25" name="Text 23"/>
+          <p:cNvSpPr/>
+          <p:nvPr/>
+        </p:nvSpPr>
+        <p:spPr>
+          <a:xfrm>
+            <a:off x="6263640" y="1828800"/>
+            <a:ext cx="2377440" cy="640080"/>
+          </a:xfrm>
+          <a:prstGeom prst="rect">
+            <a:avLst/>
+          </a:prstGeom>
+          <a:noFill/>
+          <a:ln/>
+        </p:spPr>
+        <p:txBody>
+          <a:bodyPr wrap="square" lIns="0" tIns="0" rIns="0" bIns="0" rtlCol="0" anchor="ctr"/>
+          <a:lstStyle/>
+          <a:p>
+            <a:pPr indent="0" marL="0">
+              <a:buNone/>
+            </a:pPr>
+            <a:r>
+              <a:rPr lang="en-US" sz="900" i="1" dirty="0">
+                <a:solidFill>
+                  <a:srgbClr val="3B7DD8"/>
+                </a:solidFill>
+                <a:latin typeface="Arial" pitchFamily="34" charset="0"/>
+                <a:ea typeface="Arial" pitchFamily="34" charset="-122"/>
+                <a:cs typeface="Arial" pitchFamily="34" charset="-120"/>
+              </a:rPr>
+              <a:t>「正直、安さでこのホテルを選んだので少し不安でしたが、部屋の清潔感やアメニティの充実などが良く、とても快適に過ごせました」</a:t>
+            </a:r>
+            <a:endParaRPr lang="en-US" sz="900" dirty="0"/>
+          </a:p>
+        </p:txBody>
+      </p:sp>
+      <p:sp>
+        <p:nvSpPr>
+          <p:cNvPr id="26" name="Shape 24"/>
+          <p:cNvSpPr/>
+          <p:nvPr/>
+        </p:nvSpPr>
+        <p:spPr>
+          <a:xfrm>
+            <a:off x="457200" y="2880360"/>
+            <a:ext cx="2651760" cy="1600200"/>
+          </a:xfrm>
+          <a:prstGeom prst="rect">
+            <a:avLst/>
+          </a:prstGeom>
+          <a:solidFill>
+            <a:srgbClr val="FFFFFF"/>
+          </a:solidFill>
+          <a:ln/>
+          <a:effectLst>
+            <a:outerShdw sx="100000" sy="100000" kx="0" ky="0" algn="bl" rotWithShape="0" blurRad="50800" dist="25400" dir="8100000">
+              <a:srgbClr val="000000">
+                <a:alpha val="10000"/>
+              </a:srgbClr>
+            </a:outerShdw>
+          </a:effectLst>
+        </p:spPr>
+      </p:sp>
+      <p:sp>
+        <p:nvSpPr>
+          <p:cNvPr id="27" name="Shape 25"/>
+          <p:cNvSpPr/>
+          <p:nvPr/>
+        </p:nvSpPr>
+        <p:spPr>
+          <a:xfrm>
+            <a:off x="457200" y="2880360"/>
+            <a:ext cx="54864" cy="1600200"/>
+          </a:xfrm>
+          <a:prstGeom prst="rect">
+            <a:avLst/>
+          </a:prstGeom>
+          <a:solidFill>
+            <a:srgbClr val="16A34A"/>
+          </a:solidFill>
+          <a:ln/>
+        </p:spPr>
+      </p:sp>
+      <p:sp>
+        <p:nvSpPr>
+          <p:cNvPr id="28" name="Shape 26"/>
+          <p:cNvSpPr/>
+          <p:nvPr/>
+        </p:nvSpPr>
+        <p:spPr>
+          <a:xfrm>
+            <a:off x="2286000" y="2953512"/>
+            <a:ext cx="658368" cy="228600"/>
+          </a:xfrm>
+          <a:prstGeom prst="rect">
+            <a:avLst/>
+          </a:prstGeom>
+          <a:solidFill>
+            <a:srgbClr val="DCFCE7"/>
+          </a:solidFill>
+          <a:ln/>
+        </p:spPr>
+      </p:sp>
+      <p:sp>
+        <p:nvSpPr>
+          <p:cNvPr id="29" name="Text 27"/>
+          <p:cNvSpPr/>
+          <p:nvPr/>
+        </p:nvSpPr>
+        <p:spPr>
+          <a:xfrm>
+            <a:off x="2286000" y="2953512"/>
+            <a:ext cx="658368" cy="228600"/>
+          </a:xfrm>
+          <a:prstGeom prst="rect">
+            <a:avLst/>
+          </a:prstGeom>
+          <a:noFill/>
+          <a:ln/>
+        </p:spPr>
+        <p:txBody>
+          <a:bodyPr wrap="square" lIns="0" tIns="0" rIns="0" bIns="0" rtlCol="0" anchor="ctr"/>
+          <a:lstStyle/>
+          <a:p>
+            <a:pPr algn="ctr" indent="0" marL="0">
+              <a:buNone/>
+            </a:pPr>
+            <a:r>
+              <a:rPr lang="en-US" sz="900" b="1" dirty="0">
+                <a:solidFill>
+                  <a:srgbClr val="16A34A"/>
+                </a:solidFill>
+                <a:latin typeface="Arial" pitchFamily="34" charset="0"/>
+                <a:ea typeface="Arial" pitchFamily="34" charset="-122"/>
+                <a:cs typeface="Arial" pitchFamily="34" charset="-120"/>
+              </a:rPr>
+              <a:t>20件+</a:t>
+            </a:r>
+            <a:endParaRPr lang="en-US" sz="900" dirty="0"/>
+          </a:p>
+        </p:txBody>
+      </p:sp>
+      <p:sp>
+        <p:nvSpPr>
+          <p:cNvPr id="30" name="Text 28"/>
+          <p:cNvSpPr/>
+          <p:nvPr/>
+        </p:nvSpPr>
+        <p:spPr>
+          <a:xfrm>
+            <a:off x="594360" y="2953512"/>
+            <a:ext cx="1645920" cy="274320"/>
+          </a:xfrm>
+          <a:prstGeom prst="rect">
+            <a:avLst/>
+          </a:prstGeom>
+          <a:noFill/>
+          <a:ln/>
+        </p:spPr>
+        <p:txBody>
+          <a:bodyPr wrap="square" lIns="0" tIns="0" rIns="0" bIns="0" rtlCol="0" anchor="ctr"/>
+          <a:lstStyle/>
+          <a:p>
+            <a:pPr indent="0" marL="0">
+              <a:buNone/>
+            </a:pPr>
+            <a:r>
+              <a:rPr lang="en-US" sz="1300" b="1" dirty="0">
+                <a:solidFill>
+                  <a:srgbClr val="1A2744"/>
+                </a:solidFill>
+                <a:latin typeface="Arial" pitchFamily="34" charset="0"/>
+                <a:ea typeface="Arial" pitchFamily="34" charset="-122"/>
+                <a:cs typeface="Arial" pitchFamily="34" charset="-120"/>
+              </a:rPr>
+              <a:t>朝食</a:t>
+            </a:r>
+            <a:endParaRPr lang="en-US" sz="1300" dirty="0"/>
+          </a:p>
+        </p:txBody>
+      </p:sp>
+      <p:sp>
+        <p:nvSpPr>
+          <p:cNvPr id="31" name="Text 29"/>
+          <p:cNvSpPr/>
+          <p:nvPr/>
+        </p:nvSpPr>
+        <p:spPr>
+          <a:xfrm>
+            <a:off x="594360" y="3246120"/>
+            <a:ext cx="2377440" cy="365760"/>
+          </a:xfrm>
+          <a:prstGeom prst="rect">
+            <a:avLst/>
+          </a:prstGeom>
+          <a:noFill/>
+          <a:ln/>
+        </p:spPr>
+        <p:txBody>
+          <a:bodyPr wrap="square" lIns="0" tIns="0" rIns="0" bIns="0" rtlCol="0" anchor="ctr"/>
+          <a:lstStyle/>
+          <a:p>
+            <a:pPr indent="0" marL="0">
+              <a:buNone/>
+            </a:pPr>
+            <a:r>
+              <a:rPr lang="en-US" sz="900" dirty="0">
+                <a:solidFill>
+                  <a:srgbClr val="64748B"/>
+                </a:solidFill>
+                <a:latin typeface="Arial" pitchFamily="34" charset="0"/>
+                <a:ea typeface="Arial" pitchFamily="34" charset="-122"/>
+                <a:cs typeface="Arial" pitchFamily="34" charset="-120"/>
+              </a:rPr>
+              <a:t>・朝食は種類が多く内容は良いのですが、7時オープン前から行列になり大変混雑するので、近隣のホテル同様に6時30分オ...</a:t>
+            </a:r>
+            <a:endParaRPr lang="en-US" sz="900" dirty="0"/>
+          </a:p>
+        </p:txBody>
+      </p:sp>
+      <p:sp>
+        <p:nvSpPr>
+          <p:cNvPr id="32" name="Text 30"/>
+          <p:cNvSpPr/>
+          <p:nvPr/>
+        </p:nvSpPr>
+        <p:spPr>
+          <a:xfrm>
+            <a:off x="594360" y="3657600"/>
             <a:ext cx="2377440" cy="640080"/>
           </a:xfrm>
           <a:prstGeom prst="rect">
@@ -10754,13 +11200,13 @@
       </p:sp>
       <p:sp>
         <p:nvSpPr>
-          <p:cNvPr id="19" name="Shape 17"/>
-          <p:cNvSpPr/>
-          <p:nvPr/>
-        </p:nvSpPr>
-        <p:spPr>
-          <a:xfrm>
-            <a:off x="6126480" y="1051560"/>
+          <p:cNvPr id="33" name="Shape 31"/>
+          <p:cNvSpPr/>
+          <p:nvPr/>
+        </p:nvSpPr>
+        <p:spPr>
+          <a:xfrm>
+            <a:off x="3291840" y="2880360"/>
             <a:ext cx="2651760" cy="1600200"/>
           </a:xfrm>
           <a:prstGeom prst="rect">
@@ -10781,13 +11227,13 @@
       </p:sp>
       <p:sp>
         <p:nvSpPr>
-          <p:cNvPr id="20" name="Shape 18"/>
-          <p:cNvSpPr/>
-          <p:nvPr/>
-        </p:nvSpPr>
-        <p:spPr>
-          <a:xfrm>
-            <a:off x="6126480" y="1051560"/>
+          <p:cNvPr id="34" name="Shape 32"/>
+          <p:cNvSpPr/>
+          <p:nvPr/>
+        </p:nvSpPr>
+        <p:spPr>
+          <a:xfrm>
+            <a:off x="3291840" y="2880360"/>
             <a:ext cx="54864" cy="1600200"/>
           </a:xfrm>
           <a:prstGeom prst="rect">
@@ -10801,13 +11247,13 @@
       </p:sp>
       <p:sp>
         <p:nvSpPr>
-          <p:cNvPr id="21" name="Shape 19"/>
-          <p:cNvSpPr/>
-          <p:nvPr/>
-        </p:nvSpPr>
-        <p:spPr>
-          <a:xfrm>
-            <a:off x="7955280" y="1124712"/>
+          <p:cNvPr id="35" name="Shape 33"/>
+          <p:cNvSpPr/>
+          <p:nvPr/>
+        </p:nvSpPr>
+        <p:spPr>
+          <a:xfrm>
+            <a:off x="5120640" y="2953512"/>
             <a:ext cx="658368" cy="228600"/>
           </a:xfrm>
           <a:prstGeom prst="rect">
@@ -10821,13 +11267,13 @@
       </p:sp>
       <p:sp>
         <p:nvSpPr>
-          <p:cNvPr id="22" name="Text 20"/>
-          <p:cNvSpPr/>
-          <p:nvPr/>
-        </p:nvSpPr>
-        <p:spPr>
-          <a:xfrm>
-            <a:off x="7955280" y="1124712"/>
+          <p:cNvPr id="36" name="Text 34"/>
+          <p:cNvSpPr/>
+          <p:nvPr/>
+        </p:nvSpPr>
+        <p:spPr>
+          <a:xfrm>
+            <a:off x="5120640" y="2953512"/>
             <a:ext cx="658368" cy="228600"/>
           </a:xfrm>
           <a:prstGeom prst="rect">
@@ -10860,13 +11306,13 @@
       </p:sp>
       <p:sp>
         <p:nvSpPr>
-          <p:cNvPr id="23" name="Text 21"/>
-          <p:cNvSpPr/>
-          <p:nvPr/>
-        </p:nvSpPr>
-        <p:spPr>
-          <a:xfrm>
-            <a:off x="6263640" y="1124712"/>
+          <p:cNvPr id="37" name="Text 35"/>
+          <p:cNvSpPr/>
+          <p:nvPr/>
+        </p:nvSpPr>
+        <p:spPr>
+          <a:xfrm>
+            <a:off x="3429000" y="2953512"/>
             <a:ext cx="1645920" cy="274320"/>
           </a:xfrm>
           <a:prstGeom prst="rect">
@@ -10891,7 +11337,7 @@
                 <a:ea typeface="Arial" pitchFamily="34" charset="-122"/>
                 <a:cs typeface="Arial" pitchFamily="34" charset="-120"/>
               </a:rPr>
-              <a:t>快適さ・設備</a:t>
+              <a:t>コンビニ・周辺施設</a:t>
             </a:r>
             <a:endParaRPr lang="en-US" sz="1300" dirty="0"/>
           </a:p>
@@ -10899,13 +11345,13 @@
       </p:sp>
       <p:sp>
         <p:nvSpPr>
-          <p:cNvPr id="24" name="Text 22"/>
-          <p:cNvSpPr/>
-          <p:nvPr/>
-        </p:nvSpPr>
-        <p:spPr>
-          <a:xfrm>
-            <a:off x="6263640" y="1417320"/>
+          <p:cNvPr id="38" name="Text 36"/>
+          <p:cNvSpPr/>
+          <p:nvPr/>
+        </p:nvSpPr>
+        <p:spPr>
+          <a:xfrm>
+            <a:off x="3429000" y="3246120"/>
             <a:ext cx="2377440" cy="365760"/>
           </a:xfrm>
           <a:prstGeom prst="rect">
@@ -10930,7 +11376,7 @@
                 <a:ea typeface="Arial" pitchFamily="34" charset="-122"/>
                 <a:cs typeface="Arial" pitchFamily="34" charset="-120"/>
               </a:rPr>
-              <a:t>アメニティも豊富でロビーから選んで持っていくタイプ、部屋も綺麗で品川に行くときはまた利用したいです</a:t>
+              <a:t>また、近くにイオン、コンビニ、飲食店もあるのでとても便利な立地です</a:t>
             </a:r>
             <a:endParaRPr lang="en-US" sz="900" dirty="0"/>
           </a:p>
@@ -10938,13 +11384,13 @@
       </p:sp>
       <p:sp>
         <p:nvSpPr>
-          <p:cNvPr id="25" name="Text 23"/>
-          <p:cNvSpPr/>
-          <p:nvPr/>
-        </p:nvSpPr>
-        <p:spPr>
-          <a:xfrm>
-            <a:off x="6263640" y="1828800"/>
+          <p:cNvPr id="39" name="Text 37"/>
+          <p:cNvSpPr/>
+          <p:nvPr/>
+        </p:nvSpPr>
+        <p:spPr>
+          <a:xfrm>
+            <a:off x="3429000" y="3657600"/>
             <a:ext cx="2377440" cy="640080"/>
           </a:xfrm>
           <a:prstGeom prst="rect">
@@ -10969,7 +11415,7 @@
                 <a:ea typeface="Arial" pitchFamily="34" charset="-122"/>
                 <a:cs typeface="Arial" pitchFamily="34" charset="-120"/>
               </a:rPr>
-              <a:t>「The room had a humidity smell and was pretty worn out アメニ...」</a:t>
+              <a:t>「品川シーサイド駅目の前で、スーパー・レストランも近くとても便利です♪ 有明に用があり、数回利用しています」</a:t>
             </a:r>
             <a:endParaRPr lang="en-US" sz="900" dirty="0"/>
           </a:p>
@@ -10977,13 +11423,13 @@
       </p:sp>
       <p:sp>
         <p:nvSpPr>
-          <p:cNvPr id="26" name="Shape 24"/>
-          <p:cNvSpPr/>
-          <p:nvPr/>
-        </p:nvSpPr>
-        <p:spPr>
-          <a:xfrm>
-            <a:off x="457200" y="2880360"/>
+          <p:cNvPr id="40" name="Shape 38"/>
+          <p:cNvSpPr/>
+          <p:nvPr/>
+        </p:nvSpPr>
+        <p:spPr>
+          <a:xfrm>
+            <a:off x="6126480" y="2880360"/>
             <a:ext cx="2651760" cy="1600200"/>
           </a:xfrm>
           <a:prstGeom prst="rect">
@@ -11004,13 +11450,13 @@
       </p:sp>
       <p:sp>
         <p:nvSpPr>
-          <p:cNvPr id="27" name="Shape 25"/>
-          <p:cNvSpPr/>
-          <p:nvPr/>
-        </p:nvSpPr>
-        <p:spPr>
-          <a:xfrm>
-            <a:off x="457200" y="2880360"/>
+          <p:cNvPr id="41" name="Shape 39"/>
+          <p:cNvSpPr/>
+          <p:nvPr/>
+        </p:nvSpPr>
+        <p:spPr>
+          <a:xfrm>
+            <a:off x="6126480" y="2880360"/>
             <a:ext cx="54864" cy="1600200"/>
           </a:xfrm>
           <a:prstGeom prst="rect">
@@ -11024,13 +11470,13 @@
       </p:sp>
       <p:sp>
         <p:nvSpPr>
-          <p:cNvPr id="28" name="Shape 26"/>
-          <p:cNvSpPr/>
-          <p:nvPr/>
-        </p:nvSpPr>
-        <p:spPr>
-          <a:xfrm>
-            <a:off x="2286000" y="2953512"/>
+          <p:cNvPr id="42" name="Shape 40"/>
+          <p:cNvSpPr/>
+          <p:nvPr/>
+        </p:nvSpPr>
+        <p:spPr>
+          <a:xfrm>
+            <a:off x="7955280" y="2953512"/>
             <a:ext cx="658368" cy="228600"/>
           </a:xfrm>
           <a:prstGeom prst="rect">
@@ -11044,13 +11490,13 @@
       </p:sp>
       <p:sp>
         <p:nvSpPr>
-          <p:cNvPr id="29" name="Text 27"/>
-          <p:cNvSpPr/>
-          <p:nvPr/>
-        </p:nvSpPr>
-        <p:spPr>
-          <a:xfrm>
-            <a:off x="2286000" y="2953512"/>
+          <p:cNvPr id="43" name="Text 41"/>
+          <p:cNvSpPr/>
+          <p:nvPr/>
+        </p:nvSpPr>
+        <p:spPr>
+          <a:xfrm>
+            <a:off x="7955280" y="2953512"/>
             <a:ext cx="658368" cy="228600"/>
           </a:xfrm>
           <a:prstGeom prst="rect">
@@ -11083,452 +11529,6 @@
       </p:sp>
       <p:sp>
         <p:nvSpPr>
-          <p:cNvPr id="30" name="Text 28"/>
-          <p:cNvSpPr/>
-          <p:nvPr/>
-        </p:nvSpPr>
-        <p:spPr>
-          <a:xfrm>
-            <a:off x="594360" y="2953512"/>
-            <a:ext cx="1645920" cy="274320"/>
-          </a:xfrm>
-          <a:prstGeom prst="rect">
-            <a:avLst/>
-          </a:prstGeom>
-          <a:noFill/>
-          <a:ln/>
-        </p:spPr>
-        <p:txBody>
-          <a:bodyPr wrap="square" lIns="0" tIns="0" rIns="0" bIns="0" rtlCol="0" anchor="ctr"/>
-          <a:lstStyle/>
-          <a:p>
-            <a:pPr indent="0" marL="0">
-              <a:buNone/>
-            </a:pPr>
-            <a:r>
-              <a:rPr lang="en-US" sz="1300" b="1" dirty="0">
-                <a:solidFill>
-                  <a:srgbClr val="1A2744"/>
-                </a:solidFill>
-                <a:latin typeface="Arial" pitchFamily="34" charset="0"/>
-                <a:ea typeface="Arial" pitchFamily="34" charset="-122"/>
-                <a:cs typeface="Arial" pitchFamily="34" charset="-120"/>
-              </a:rPr>
-              <a:t>朝食</a:t>
-            </a:r>
-            <a:endParaRPr lang="en-US" sz="1300" dirty="0"/>
-          </a:p>
-        </p:txBody>
-      </p:sp>
-      <p:sp>
-        <p:nvSpPr>
-          <p:cNvPr id="31" name="Text 29"/>
-          <p:cNvSpPr/>
-          <p:nvPr/>
-        </p:nvSpPr>
-        <p:spPr>
-          <a:xfrm>
-            <a:off x="594360" y="3246120"/>
-            <a:ext cx="2377440" cy="365760"/>
-          </a:xfrm>
-          <a:prstGeom prst="rect">
-            <a:avLst/>
-          </a:prstGeom>
-          <a:noFill/>
-          <a:ln/>
-        </p:spPr>
-        <p:txBody>
-          <a:bodyPr wrap="square" lIns="0" tIns="0" rIns="0" bIns="0" rtlCol="0" anchor="ctr"/>
-          <a:lstStyle/>
-          <a:p>
-            <a:pPr indent="0" marL="0">
-              <a:buNone/>
-            </a:pPr>
-            <a:r>
-              <a:rPr lang="en-US" sz="900" dirty="0">
-                <a:solidFill>
-                  <a:srgbClr val="64748B"/>
-                </a:solidFill>
-                <a:latin typeface="Arial" pitchFamily="34" charset="0"/>
-                <a:ea typeface="Arial" pitchFamily="34" charset="-122"/>
-                <a:cs typeface="Arial" pitchFamily="34" charset="-120"/>
-              </a:rPr>
-              <a:t>部屋は綺麗で朝ごはんも美味しかったです</a:t>
-            </a:r>
-            <a:endParaRPr lang="en-US" sz="900" dirty="0"/>
-          </a:p>
-        </p:txBody>
-      </p:sp>
-      <p:sp>
-        <p:nvSpPr>
-          <p:cNvPr id="32" name="Text 30"/>
-          <p:cNvSpPr/>
-          <p:nvPr/>
-        </p:nvSpPr>
-        <p:spPr>
-          <a:xfrm>
-            <a:off x="594360" y="3657600"/>
-            <a:ext cx="2377440" cy="640080"/>
-          </a:xfrm>
-          <a:prstGeom prst="rect">
-            <a:avLst/>
-          </a:prstGeom>
-          <a:noFill/>
-          <a:ln/>
-        </p:spPr>
-        <p:txBody>
-          <a:bodyPr wrap="square" lIns="0" tIns="0" rIns="0" bIns="0" rtlCol="0" anchor="ctr"/>
-          <a:lstStyle/>
-          <a:p>
-            <a:pPr indent="0" marL="0">
-              <a:buNone/>
-            </a:pPr>
-            <a:r>
-              <a:rPr lang="en-US" sz="900" i="1" dirty="0">
-                <a:solidFill>
-                  <a:srgbClr val="3B7DD8"/>
-                </a:solidFill>
-                <a:latin typeface="Arial" pitchFamily="34" charset="0"/>
-                <a:ea typeface="Arial" pitchFamily="34" charset="-122"/>
-                <a:cs typeface="Arial" pitchFamily="34" charset="-120"/>
-              </a:rPr>
-              <a:t>「今回は素泊まりでしたが、次回は朝食もたべてみたいです」</a:t>
-            </a:r>
-            <a:endParaRPr lang="en-US" sz="900" dirty="0"/>
-          </a:p>
-        </p:txBody>
-      </p:sp>
-      <p:sp>
-        <p:nvSpPr>
-          <p:cNvPr id="33" name="Shape 31"/>
-          <p:cNvSpPr/>
-          <p:nvPr/>
-        </p:nvSpPr>
-        <p:spPr>
-          <a:xfrm>
-            <a:off x="3291840" y="2880360"/>
-            <a:ext cx="2651760" cy="1600200"/>
-          </a:xfrm>
-          <a:prstGeom prst="rect">
-            <a:avLst/>
-          </a:prstGeom>
-          <a:solidFill>
-            <a:srgbClr val="FFFFFF"/>
-          </a:solidFill>
-          <a:ln/>
-          <a:effectLst>
-            <a:outerShdw sx="100000" sy="100000" kx="0" ky="0" algn="bl" rotWithShape="0" blurRad="50800" dist="25400" dir="8100000">
-              <a:srgbClr val="000000">
-                <a:alpha val="10000"/>
-              </a:srgbClr>
-            </a:outerShdw>
-          </a:effectLst>
-        </p:spPr>
-      </p:sp>
-      <p:sp>
-        <p:nvSpPr>
-          <p:cNvPr id="34" name="Shape 32"/>
-          <p:cNvSpPr/>
-          <p:nvPr/>
-        </p:nvSpPr>
-        <p:spPr>
-          <a:xfrm>
-            <a:off x="3291840" y="2880360"/>
-            <a:ext cx="54864" cy="1600200"/>
-          </a:xfrm>
-          <a:prstGeom prst="rect">
-            <a:avLst/>
-          </a:prstGeom>
-          <a:solidFill>
-            <a:srgbClr val="16A34A"/>
-          </a:solidFill>
-          <a:ln/>
-        </p:spPr>
-      </p:sp>
-      <p:sp>
-        <p:nvSpPr>
-          <p:cNvPr id="35" name="Shape 33"/>
-          <p:cNvSpPr/>
-          <p:nvPr/>
-        </p:nvSpPr>
-        <p:spPr>
-          <a:xfrm>
-            <a:off x="5120640" y="2953512"/>
-            <a:ext cx="658368" cy="228600"/>
-          </a:xfrm>
-          <a:prstGeom prst="rect">
-            <a:avLst/>
-          </a:prstGeom>
-          <a:solidFill>
-            <a:srgbClr val="DCFCE7"/>
-          </a:solidFill>
-          <a:ln/>
-        </p:spPr>
-      </p:sp>
-      <p:sp>
-        <p:nvSpPr>
-          <p:cNvPr id="36" name="Text 34"/>
-          <p:cNvSpPr/>
-          <p:nvPr/>
-        </p:nvSpPr>
-        <p:spPr>
-          <a:xfrm>
-            <a:off x="5120640" y="2953512"/>
-            <a:ext cx="658368" cy="228600"/>
-          </a:xfrm>
-          <a:prstGeom prst="rect">
-            <a:avLst/>
-          </a:prstGeom>
-          <a:noFill/>
-          <a:ln/>
-        </p:spPr>
-        <p:txBody>
-          <a:bodyPr wrap="square" lIns="0" tIns="0" rIns="0" bIns="0" rtlCol="0" anchor="ctr"/>
-          <a:lstStyle/>
-          <a:p>
-            <a:pPr algn="ctr" indent="0" marL="0">
-              <a:buNone/>
-            </a:pPr>
-            <a:r>
-              <a:rPr lang="en-US" sz="900" b="1" dirty="0">
-                <a:solidFill>
-                  <a:srgbClr val="16A34A"/>
-                </a:solidFill>
-                <a:latin typeface="Arial" pitchFamily="34" charset="0"/>
-                <a:ea typeface="Arial" pitchFamily="34" charset="-122"/>
-                <a:cs typeface="Arial" pitchFamily="34" charset="-120"/>
-              </a:rPr>
-              <a:t>20件+</a:t>
-            </a:r>
-            <a:endParaRPr lang="en-US" sz="900" dirty="0"/>
-          </a:p>
-        </p:txBody>
-      </p:sp>
-      <p:sp>
-        <p:nvSpPr>
-          <p:cNvPr id="37" name="Text 35"/>
-          <p:cNvSpPr/>
-          <p:nvPr/>
-        </p:nvSpPr>
-        <p:spPr>
-          <a:xfrm>
-            <a:off x="3429000" y="2953512"/>
-            <a:ext cx="1645920" cy="274320"/>
-          </a:xfrm>
-          <a:prstGeom prst="rect">
-            <a:avLst/>
-          </a:prstGeom>
-          <a:noFill/>
-          <a:ln/>
-        </p:spPr>
-        <p:txBody>
-          <a:bodyPr wrap="square" lIns="0" tIns="0" rIns="0" bIns="0" rtlCol="0" anchor="ctr"/>
-          <a:lstStyle/>
-          <a:p>
-            <a:pPr indent="0" marL="0">
-              <a:buNone/>
-            </a:pPr>
-            <a:r>
-              <a:rPr lang="en-US" sz="1300" b="1" dirty="0">
-                <a:solidFill>
-                  <a:srgbClr val="1A2744"/>
-                </a:solidFill>
-                <a:latin typeface="Arial" pitchFamily="34" charset="0"/>
-                <a:ea typeface="Arial" pitchFamily="34" charset="-122"/>
-                <a:cs typeface="Arial" pitchFamily="34" charset="-120"/>
-              </a:rPr>
-              <a:t>コンビニ・周辺施設</a:t>
-            </a:r>
-            <a:endParaRPr lang="en-US" sz="1300" dirty="0"/>
-          </a:p>
-        </p:txBody>
-      </p:sp>
-      <p:sp>
-        <p:nvSpPr>
-          <p:cNvPr id="38" name="Text 36"/>
-          <p:cNvSpPr/>
-          <p:nvPr/>
-        </p:nvSpPr>
-        <p:spPr>
-          <a:xfrm>
-            <a:off x="3429000" y="3246120"/>
-            <a:ext cx="2377440" cy="365760"/>
-          </a:xfrm>
-          <a:prstGeom prst="rect">
-            <a:avLst/>
-          </a:prstGeom>
-          <a:noFill/>
-          <a:ln/>
-        </p:spPr>
-        <p:txBody>
-          <a:bodyPr wrap="square" lIns="0" tIns="0" rIns="0" bIns="0" rtlCol="0" anchor="ctr"/>
-          <a:lstStyle/>
-          <a:p>
-            <a:pPr indent="0" marL="0">
-              <a:buNone/>
-            </a:pPr>
-            <a:r>
-              <a:rPr lang="en-US" sz="900" dirty="0">
-                <a:solidFill>
-                  <a:srgbClr val="64748B"/>
-                </a:solidFill>
-                <a:latin typeface="Arial" pitchFamily="34" charset="0"/>
-                <a:ea typeface="Arial" pitchFamily="34" charset="-122"/>
-                <a:cs typeface="Arial" pitchFamily="34" charset="-120"/>
-              </a:rPr>
-              <a:t>品川シーサイド駅目の前で、スーパー・レストランも近くとても便利です♪ 有明に用があり、数回利用しています</a:t>
-            </a:r>
-            <a:endParaRPr lang="en-US" sz="900" dirty="0"/>
-          </a:p>
-        </p:txBody>
-      </p:sp>
-      <p:sp>
-        <p:nvSpPr>
-          <p:cNvPr id="39" name="Text 37"/>
-          <p:cNvSpPr/>
-          <p:nvPr/>
-        </p:nvSpPr>
-        <p:spPr>
-          <a:xfrm>
-            <a:off x="3429000" y="3657600"/>
-            <a:ext cx="2377440" cy="640080"/>
-          </a:xfrm>
-          <a:prstGeom prst="rect">
-            <a:avLst/>
-          </a:prstGeom>
-          <a:noFill/>
-          <a:ln/>
-        </p:spPr>
-        <p:txBody>
-          <a:bodyPr wrap="square" lIns="0" tIns="0" rIns="0" bIns="0" rtlCol="0" anchor="ctr"/>
-          <a:lstStyle/>
-          <a:p>
-            <a:pPr indent="0" marL="0">
-              <a:buNone/>
-            </a:pPr>
-            <a:r>
-              <a:rPr lang="en-US" sz="900" i="1" dirty="0">
-                <a:solidFill>
-                  <a:srgbClr val="3B7DD8"/>
-                </a:solidFill>
-                <a:latin typeface="Arial" pitchFamily="34" charset="0"/>
-                <a:ea typeface="Arial" pitchFamily="34" charset="-122"/>
-                <a:cs typeface="Arial" pitchFamily="34" charset="-120"/>
-              </a:rPr>
-              <a:t>「それ以外はとても便利で、近くにイオンのスーパーマーケットがあるので、買い物にも交通の便も良かったです」</a:t>
-            </a:r>
-            <a:endParaRPr lang="en-US" sz="900" dirty="0"/>
-          </a:p>
-        </p:txBody>
-      </p:sp>
-      <p:sp>
-        <p:nvSpPr>
-          <p:cNvPr id="40" name="Shape 38"/>
-          <p:cNvSpPr/>
-          <p:nvPr/>
-        </p:nvSpPr>
-        <p:spPr>
-          <a:xfrm>
-            <a:off x="6126480" y="2880360"/>
-            <a:ext cx="2651760" cy="1600200"/>
-          </a:xfrm>
-          <a:prstGeom prst="rect">
-            <a:avLst/>
-          </a:prstGeom>
-          <a:solidFill>
-            <a:srgbClr val="FFFFFF"/>
-          </a:solidFill>
-          <a:ln/>
-          <a:effectLst>
-            <a:outerShdw sx="100000" sy="100000" kx="0" ky="0" algn="bl" rotWithShape="0" blurRad="50800" dist="25400" dir="8100000">
-              <a:srgbClr val="000000">
-                <a:alpha val="10000"/>
-              </a:srgbClr>
-            </a:outerShdw>
-          </a:effectLst>
-        </p:spPr>
-      </p:sp>
-      <p:sp>
-        <p:nvSpPr>
-          <p:cNvPr id="41" name="Shape 39"/>
-          <p:cNvSpPr/>
-          <p:nvPr/>
-        </p:nvSpPr>
-        <p:spPr>
-          <a:xfrm>
-            <a:off x="6126480" y="2880360"/>
-            <a:ext cx="54864" cy="1600200"/>
-          </a:xfrm>
-          <a:prstGeom prst="rect">
-            <a:avLst/>
-          </a:prstGeom>
-          <a:solidFill>
-            <a:srgbClr val="16A34A"/>
-          </a:solidFill>
-          <a:ln/>
-        </p:spPr>
-      </p:sp>
-      <p:sp>
-        <p:nvSpPr>
-          <p:cNvPr id="42" name="Shape 40"/>
-          <p:cNvSpPr/>
-          <p:nvPr/>
-        </p:nvSpPr>
-        <p:spPr>
-          <a:xfrm>
-            <a:off x="7955280" y="2953512"/>
-            <a:ext cx="658368" cy="228600"/>
-          </a:xfrm>
-          <a:prstGeom prst="rect">
-            <a:avLst/>
-          </a:prstGeom>
-          <a:solidFill>
-            <a:srgbClr val="DCFCE7"/>
-          </a:solidFill>
-          <a:ln/>
-        </p:spPr>
-      </p:sp>
-      <p:sp>
-        <p:nvSpPr>
-          <p:cNvPr id="43" name="Text 41"/>
-          <p:cNvSpPr/>
-          <p:nvPr/>
-        </p:nvSpPr>
-        <p:spPr>
-          <a:xfrm>
-            <a:off x="7955280" y="2953512"/>
-            <a:ext cx="658368" cy="228600"/>
-          </a:xfrm>
-          <a:prstGeom prst="rect">
-            <a:avLst/>
-          </a:prstGeom>
-          <a:noFill/>
-          <a:ln/>
-        </p:spPr>
-        <p:txBody>
-          <a:bodyPr wrap="square" lIns="0" tIns="0" rIns="0" bIns="0" rtlCol="0" anchor="ctr"/>
-          <a:lstStyle/>
-          <a:p>
-            <a:pPr algn="ctr" indent="0" marL="0">
-              <a:buNone/>
-            </a:pPr>
-            <a:r>
-              <a:rPr lang="en-US" sz="900" b="1" dirty="0">
-                <a:solidFill>
-                  <a:srgbClr val="16A34A"/>
-                </a:solidFill>
-                <a:latin typeface="Arial" pitchFamily="34" charset="0"/>
-                <a:ea typeface="Arial" pitchFamily="34" charset="-122"/>
-                <a:cs typeface="Arial" pitchFamily="34" charset="-120"/>
-              </a:rPr>
-              <a:t>20件+</a:t>
-            </a:r>
-            <a:endParaRPr lang="en-US" sz="900" dirty="0"/>
-          </a:p>
-        </p:txBody>
-      </p:sp>
-      <p:sp>
-        <p:nvSpPr>
           <p:cNvPr id="44" name="Text 42"/>
           <p:cNvSpPr/>
           <p:nvPr/>
@@ -11599,7 +11599,7 @@
                 <a:ea typeface="Arial" pitchFamily="34" charset="-122"/>
                 <a:cs typeface="Arial" pitchFamily="34" charset="-120"/>
               </a:rPr>
-              <a:t>部屋が4人部屋になってビックリしましたが、フロントからお部屋から全部綺麗で大満足です</a:t>
+              <a:t>・3月は花粉がひどく、部屋は乾燥していたので、フロントで空気清浄機と加湿器を借りました</a:t>
             </a:r>
             <a:endParaRPr lang="en-US" sz="900" dirty="0"/>
           </a:p>
@@ -11638,7 +11638,7 @@
                 <a:ea typeface="Arial" pitchFamily="34" charset="-122"/>
                 <a:cs typeface="Arial" pitchFamily="34" charset="-120"/>
               </a:rPr>
-              <a:t>「結局ホテルのフロントさんが親切に料金まで教えてくれてコインパーキングに停めることがでいたので夜景もキレイで文句ない...」</a:t>
+              <a:t>「また、受付は大学生のアルバイトと思われる方でしたが、とても丁寧に対応していただきました」</a:t>
             </a:r>
             <a:endParaRPr lang="en-US" sz="900" dirty="0"/>
           </a:p>
@@ -12328,7 +12328,7 @@
                           <a:ea typeface="Arial" pitchFamily="34" charset="-122"/>
                           <a:cs typeface="Arial" pitchFamily="34" charset="-120"/>
                         </a:rPr>
-                        <a:t>1番良かったのは浴槽の排水が早いことです</a:t>
+                        <a:t>・部屋の清掃は行き届いており、ベッド、バスタブも広めでゆったり出来て良かったです</a:t>
                       </a:r>
                       <a:endParaRPr lang="en-US" sz="900" dirty="0">
                         <a:latin typeface="Arial" charset="0"/>
@@ -12396,7 +12396,7 @@
                           <a:ea typeface="Arial" pitchFamily="34" charset="-122"/>
                           <a:cs typeface="Arial" pitchFamily="34" charset="-120"/>
                         </a:rPr>
-                        <a:t>12件</a:t>
+                        <a:t>13件</a:t>
                       </a:r>
                       <a:endParaRPr lang="en-US" sz="900" dirty="0">
                         <a:latin typeface="Arial" charset="0"/>
@@ -12602,7 +12602,7 @@
                           <a:ea typeface="Arial" pitchFamily="34" charset="-122"/>
                           <a:cs typeface="Arial" pitchFamily="34" charset="-120"/>
                         </a:rPr>
-                        <a:t>エアコンの調整が難しい</a:t>
+                        <a:t>ただ、バスタブは、水とお湯のハンドルが別々なので温度調整が難しいです</a:t>
                       </a:r>
                       <a:endParaRPr lang="en-US" sz="900" dirty="0">
                         <a:latin typeface="Arial" charset="0"/>
@@ -12670,7 +12670,7 @@
                           <a:ea typeface="Arial" pitchFamily="34" charset="-122"/>
                           <a:cs typeface="Arial" pitchFamily="34" charset="-120"/>
                         </a:rPr>
-                        <a:t>9件</a:t>
+                        <a:t>10件</a:t>
                       </a:r>
                       <a:endParaRPr lang="en-US" sz="900" dirty="0">
                         <a:latin typeface="Arial" charset="0"/>
@@ -13150,7 +13150,7 @@
                           <a:ea typeface="Arial" pitchFamily="34" charset="-122"/>
                           <a:cs typeface="Arial" pitchFamily="34" charset="-120"/>
                         </a:rPr>
-                        <a:t>部屋は湿気臭く、かなり老朽化していました</a:t>
+                        <a:t>部屋は湿気臭がして、かなり老朽化していました</a:t>
                       </a:r>
                       <a:endParaRPr lang="en-US" sz="900" dirty="0">
                         <a:latin typeface="Arial" charset="0"/>
@@ -13630,7 +13630,7 @@
                           <a:ea typeface="Arial" pitchFamily="34" charset="-122"/>
                           <a:cs typeface="Arial" pitchFamily="34" charset="-120"/>
                         </a:rPr>
-                        <a:t>臭い・匂い</a:t>
+                        <a:t>防音性能</a:t>
                       </a:r>
                       <a:endParaRPr lang="en-US" sz="900" dirty="0">
                         <a:latin typeface="Arial" charset="0"/>
@@ -13698,7 +13698,7 @@
                           <a:ea typeface="Arial" pitchFamily="34" charset="-122"/>
                           <a:cs typeface="Arial" pitchFamily="34" charset="-120"/>
                         </a:rPr>
-                        <a:t>部屋は湿気臭く、かなり老朽化していました</a:t>
+                        <a:t>・以前、高速道路側の部屋に泊まった時は、自動車の騒音がうるさく感じましたが、今回は高速道路と反対側の部屋でしたので...</a:t>
                       </a:r>
                       <a:endParaRPr lang="en-US" sz="900" dirty="0">
                         <a:latin typeface="Arial" charset="0"/>
@@ -13904,7 +13904,7 @@
                           <a:ea typeface="Arial" pitchFamily="34" charset="-122"/>
                           <a:cs typeface="Arial" pitchFamily="34" charset="-120"/>
                         </a:rPr>
-                        <a:t>窓・採光</a:t>
+                        <a:t>臭い・匂い</a:t>
                       </a:r>
                       <a:endParaRPr lang="en-US" sz="900" dirty="0">
                         <a:latin typeface="Arial" charset="0"/>
@@ -13972,7 +13972,7 @@
                           <a:ea typeface="Arial" pitchFamily="34" charset="-122"/>
                           <a:cs typeface="Arial" pitchFamily="34" charset="-120"/>
                         </a:rPr>
-                        <a:t>ただ、滞在中の天気はあまり良くなく、風がとても強く、窓を閉めていても風の音が聞こえました</a:t>
+                        <a:t>部屋は湿気臭がして、かなり老朽化していました</a:t>
                       </a:r>
                       <a:endParaRPr lang="en-US" sz="900" dirty="0">
                         <a:latin typeface="Arial" charset="0"/>
@@ -14178,7 +14178,7 @@
                           <a:ea typeface="Arial" pitchFamily="34" charset="-122"/>
                           <a:cs typeface="Arial" pitchFamily="34" charset="-120"/>
                         </a:rPr>
-                        <a:t>防音性能</a:t>
+                        <a:t>窓・採光</a:t>
                       </a:r>
                       <a:endParaRPr lang="en-US" sz="900" dirty="0">
                         <a:latin typeface="Arial" charset="0"/>
@@ -14314,7 +14314,7 @@
                           <a:ea typeface="Arial" pitchFamily="34" charset="-122"/>
                           <a:cs typeface="Arial" pitchFamily="34" charset="-120"/>
                         </a:rPr>
-                        <a:t>2件</a:t>
+                        <a:t>3件</a:t>
                       </a:r>
                       <a:endParaRPr lang="en-US" sz="900" dirty="0">
                         <a:latin typeface="Arial" charset="0"/>

--- a/納品レポート/ホテル別レポート/hearton_口コミ分析レポート.pptx
+++ b/納品レポート/ホテル別レポート/hearton_口コミ分析レポート.pptx
@@ -211,19 +211,19 @@
                   <c:v>9.33</c:v>
                 </c:pt>
                 <c:pt idx="1">
-                  <c:v>8.97</c:v>
+                  <c:v>8.8</c:v>
                 </c:pt>
                 <c:pt idx="2">
-                  <c:v>8.54</c:v>
+                  <c:v>8.61</c:v>
                 </c:pt>
                 <c:pt idx="3">
-                  <c:v>8.37</c:v>
+                  <c:v>8.41</c:v>
                 </c:pt>
                 <c:pt idx="4">
                   <c:v>8.36</c:v>
                 </c:pt>
                 <c:pt idx="5">
-                  <c:v>8.2</c:v>
+                  <c:v>8</c:v>
                 </c:pt>
               </c:numCache>
             </c:numRef>
@@ -795,19 +795,19 @@
                 <c:formatCode>General</c:formatCode>
                 <c:ptCount val="7"/>
                 <c:pt idx="0">
-                  <c:v>61</c:v>
+                  <c:v>60</c:v>
                 </c:pt>
                 <c:pt idx="1">
                   <c:v>10</c:v>
                 </c:pt>
                 <c:pt idx="2">
-                  <c:v>48</c:v>
+                  <c:v>49</c:v>
                 </c:pt>
                 <c:pt idx="3">
-                  <c:v>7</c:v>
+                  <c:v>6</c:v>
                 </c:pt>
                 <c:pt idx="4">
-                  <c:v>11</c:v>
+                  <c:v>12</c:v>
                 </c:pt>
                 <c:pt idx="5">
                   <c:v>1</c:v>
@@ -2784,7 +2784,7 @@
                 <a:ea typeface="Arial" pitchFamily="34" charset="-122"/>
                 <a:cs typeface="Arial" pitchFamily="34" charset="-120"/>
               </a:rPr>
-              <a:t>作成日：2026年3月20日</a:t>
+              <a:t>作成日：2026年3月21日</a:t>
             </a:r>
             <a:endParaRPr lang="en-US" sz="1000" dirty="0"/>
           </a:p>
@@ -3330,7 +3330,7 @@
                           <a:ea typeface="Arial" pitchFamily="34" charset="-122"/>
                           <a:cs typeface="Arial" pitchFamily="34" charset="-120"/>
                         </a:rPr>
-                        <a:t>8.68点</a:t>
+                        <a:t>8.65点</a:t>
                       </a:r>
                       <a:endParaRPr lang="en-US" sz="1000" dirty="0">
                         <a:latin typeface="Arial" charset="0"/>
@@ -4084,6 +4084,280 @@
                           <a:ea typeface="Arial" pitchFamily="34" charset="-122"/>
                           <a:cs typeface="Arial" pitchFamily="34" charset="-120"/>
                         </a:rPr>
+                        <a:t>Google平均評価</a:t>
+                      </a:r>
+                      <a:endParaRPr lang="en-US" sz="1000" dirty="0">
+                        <a:latin typeface="Arial" charset="0"/>
+                        <a:ea typeface="Arial" charset="0"/>
+                        <a:cs typeface="Arial" charset="0"/>
+                      </a:endParaRPr>
+                    </a:p>
+                  </a:txBody>
+                  <a:tcPr marL="91440" marR="91440" marT="45720" marB="45720">
+                    <a:lnL w="6350" cap="flat" cmpd="sng" algn="ctr">
+                      <a:solidFill>
+                        <a:srgbClr val="CBD5E1"/>
+                      </a:solidFill>
+                      <a:prstDash val="solid"/>
+                      <a:round/>
+                      <a:headEnd type="none" w="med" len="med"/>
+                      <a:tailEnd type="none" w="med" len="med"/>
+                    </a:lnL>
+                    <a:lnR w="6350" cap="flat" cmpd="sng" algn="ctr">
+                      <a:solidFill>
+                        <a:srgbClr val="CBD5E1"/>
+                      </a:solidFill>
+                      <a:prstDash val="solid"/>
+                      <a:round/>
+                      <a:headEnd type="none" w="med" len="med"/>
+                      <a:tailEnd type="none" w="med" len="med"/>
+                    </a:lnR>
+                    <a:lnT w="6350" cap="flat" cmpd="sng" algn="ctr">
+                      <a:solidFill>
+                        <a:srgbClr val="CBD5E1"/>
+                      </a:solidFill>
+                      <a:prstDash val="solid"/>
+                      <a:round/>
+                      <a:headEnd type="none" w="med" len="med"/>
+                      <a:tailEnd type="none" w="med" len="med"/>
+                    </a:lnT>
+                    <a:lnB w="6350" cap="flat" cmpd="sng" algn="ctr">
+                      <a:solidFill>
+                        <a:srgbClr val="CBD5E1"/>
+                      </a:solidFill>
+                      <a:prstDash val="solid"/>
+                      <a:round/>
+                      <a:headEnd type="none" w="med" len="med"/>
+                      <a:tailEnd type="none" w="med" len="med"/>
+                    </a:lnB>
+                    <a:solidFill>
+                      <a:srgbClr val="FFFFFF"/>
+                    </a:solidFill>
+                  </a:tcPr>
+                </a:tc>
+                <a:tc>
+                  <a:txBody>
+                    <a:bodyPr/>
+                    <a:lstStyle/>
+                    <a:p>
+                      <a:pPr algn="ctr" indent="0" marL="0">
+                        <a:buNone/>
+                      </a:pPr>
+                      <a:r>
+                        <a:rPr lang="en-US" sz="1000" dirty="0">
+                          <a:solidFill>
+                            <a:srgbClr val="64748B"/>
+                          </a:solidFill>
+                          <a:latin typeface="Arial" pitchFamily="34" charset="0"/>
+                          <a:ea typeface="Arial" pitchFamily="34" charset="-122"/>
+                          <a:cs typeface="Arial" pitchFamily="34" charset="-120"/>
+                        </a:rPr>
+                        <a:t>8.0点</a:t>
+                      </a:r>
+                      <a:endParaRPr lang="en-US" sz="1000" dirty="0">
+                        <a:latin typeface="Arial" charset="0"/>
+                        <a:ea typeface="Arial" charset="0"/>
+                        <a:cs typeface="Arial" charset="0"/>
+                      </a:endParaRPr>
+                    </a:p>
+                  </a:txBody>
+                  <a:tcPr marL="91440" marR="91440" marT="45720" marB="45720">
+                    <a:lnL w="6350" cap="flat" cmpd="sng" algn="ctr">
+                      <a:solidFill>
+                        <a:srgbClr val="CBD5E1"/>
+                      </a:solidFill>
+                      <a:prstDash val="solid"/>
+                      <a:round/>
+                      <a:headEnd type="none" w="med" len="med"/>
+                      <a:tailEnd type="none" w="med" len="med"/>
+                    </a:lnL>
+                    <a:lnR w="6350" cap="flat" cmpd="sng" algn="ctr">
+                      <a:solidFill>
+                        <a:srgbClr val="CBD5E1"/>
+                      </a:solidFill>
+                      <a:prstDash val="solid"/>
+                      <a:round/>
+                      <a:headEnd type="none" w="med" len="med"/>
+                      <a:tailEnd type="none" w="med" len="med"/>
+                    </a:lnR>
+                    <a:lnT w="6350" cap="flat" cmpd="sng" algn="ctr">
+                      <a:solidFill>
+                        <a:srgbClr val="CBD5E1"/>
+                      </a:solidFill>
+                      <a:prstDash val="solid"/>
+                      <a:round/>
+                      <a:headEnd type="none" w="med" len="med"/>
+                      <a:tailEnd type="none" w="med" len="med"/>
+                    </a:lnT>
+                    <a:lnB w="6350" cap="flat" cmpd="sng" algn="ctr">
+                      <a:solidFill>
+                        <a:srgbClr val="CBD5E1"/>
+                      </a:solidFill>
+                      <a:prstDash val="solid"/>
+                      <a:round/>
+                      <a:headEnd type="none" w="med" len="med"/>
+                      <a:tailEnd type="none" w="med" len="med"/>
+                    </a:lnB>
+                    <a:solidFill>
+                      <a:srgbClr val="FFFFFF"/>
+                    </a:solidFill>
+                  </a:tcPr>
+                </a:tc>
+                <a:tc>
+                  <a:txBody>
+                    <a:bodyPr/>
+                    <a:lstStyle/>
+                    <a:p>
+                      <a:pPr algn="ctr" indent="0" marL="0">
+                        <a:buNone/>
+                      </a:pPr>
+                      <a:r>
+                        <a:rPr lang="en-US" sz="1000" b="1" dirty="0">
+                          <a:solidFill>
+                            <a:srgbClr val="16A34A"/>
+                          </a:solidFill>
+                          <a:latin typeface="Arial" pitchFamily="34" charset="0"/>
+                          <a:ea typeface="Arial" pitchFamily="34" charset="-122"/>
+                          <a:cs typeface="Arial" pitchFamily="34" charset="-120"/>
+                        </a:rPr>
+                        <a:t>9.0点以上</a:t>
+                      </a:r>
+                      <a:endParaRPr lang="en-US" sz="1000" dirty="0">
+                        <a:latin typeface="Arial" charset="0"/>
+                        <a:ea typeface="Arial" charset="0"/>
+                        <a:cs typeface="Arial" charset="0"/>
+                      </a:endParaRPr>
+                    </a:p>
+                  </a:txBody>
+                  <a:tcPr marL="91440" marR="91440" marT="45720" marB="45720">
+                    <a:lnL w="6350" cap="flat" cmpd="sng" algn="ctr">
+                      <a:solidFill>
+                        <a:srgbClr val="CBD5E1"/>
+                      </a:solidFill>
+                      <a:prstDash val="solid"/>
+                      <a:round/>
+                      <a:headEnd type="none" w="med" len="med"/>
+                      <a:tailEnd type="none" w="med" len="med"/>
+                    </a:lnL>
+                    <a:lnR w="6350" cap="flat" cmpd="sng" algn="ctr">
+                      <a:solidFill>
+                        <a:srgbClr val="CBD5E1"/>
+                      </a:solidFill>
+                      <a:prstDash val="solid"/>
+                      <a:round/>
+                      <a:headEnd type="none" w="med" len="med"/>
+                      <a:tailEnd type="none" w="med" len="med"/>
+                    </a:lnR>
+                    <a:lnT w="6350" cap="flat" cmpd="sng" algn="ctr">
+                      <a:solidFill>
+                        <a:srgbClr val="CBD5E1"/>
+                      </a:solidFill>
+                      <a:prstDash val="solid"/>
+                      <a:round/>
+                      <a:headEnd type="none" w="med" len="med"/>
+                      <a:tailEnd type="none" w="med" len="med"/>
+                    </a:lnT>
+                    <a:lnB w="6350" cap="flat" cmpd="sng" algn="ctr">
+                      <a:solidFill>
+                        <a:srgbClr val="CBD5E1"/>
+                      </a:solidFill>
+                      <a:prstDash val="solid"/>
+                      <a:round/>
+                      <a:headEnd type="none" w="med" len="med"/>
+                      <a:tailEnd type="none" w="med" len="med"/>
+                    </a:lnB>
+                    <a:solidFill>
+                      <a:srgbClr val="FFFFFF"/>
+                    </a:solidFill>
+                  </a:tcPr>
+                </a:tc>
+                <a:tc>
+                  <a:txBody>
+                    <a:bodyPr/>
+                    <a:lstStyle/>
+                    <a:p>
+                      <a:pPr algn="ctr" indent="0" marL="0">
+                        <a:buNone/>
+                      </a:pPr>
+                      <a:r>
+                        <a:rPr lang="en-US" sz="1000" dirty="0">
+                          <a:solidFill>
+                            <a:srgbClr val="64748B"/>
+                          </a:solidFill>
+                          <a:latin typeface="Arial" pitchFamily="34" charset="0"/>
+                          <a:ea typeface="Arial" pitchFamily="34" charset="-122"/>
+                          <a:cs typeface="Arial" pitchFamily="34" charset="-120"/>
+                        </a:rPr>
+                        <a:t>2026年9月</a:t>
+                      </a:r>
+                      <a:endParaRPr lang="en-US" sz="1000" dirty="0">
+                        <a:latin typeface="Arial" charset="0"/>
+                        <a:ea typeface="Arial" charset="0"/>
+                        <a:cs typeface="Arial" charset="0"/>
+                      </a:endParaRPr>
+                    </a:p>
+                  </a:txBody>
+                  <a:tcPr marL="91440" marR="91440" marT="45720" marB="45720">
+                    <a:lnL w="6350" cap="flat" cmpd="sng" algn="ctr">
+                      <a:solidFill>
+                        <a:srgbClr val="CBD5E1"/>
+                      </a:solidFill>
+                      <a:prstDash val="solid"/>
+                      <a:round/>
+                      <a:headEnd type="none" w="med" len="med"/>
+                      <a:tailEnd type="none" w="med" len="med"/>
+                    </a:lnL>
+                    <a:lnR w="6350" cap="flat" cmpd="sng" algn="ctr">
+                      <a:solidFill>
+                        <a:srgbClr val="CBD5E1"/>
+                      </a:solidFill>
+                      <a:prstDash val="solid"/>
+                      <a:round/>
+                      <a:headEnd type="none" w="med" len="med"/>
+                      <a:tailEnd type="none" w="med" len="med"/>
+                    </a:lnR>
+                    <a:lnT w="6350" cap="flat" cmpd="sng" algn="ctr">
+                      <a:solidFill>
+                        <a:srgbClr val="CBD5E1"/>
+                      </a:solidFill>
+                      <a:prstDash val="solid"/>
+                      <a:round/>
+                      <a:headEnd type="none" w="med" len="med"/>
+                      <a:tailEnd type="none" w="med" len="med"/>
+                    </a:lnT>
+                    <a:lnB w="6350" cap="flat" cmpd="sng" algn="ctr">
+                      <a:solidFill>
+                        <a:srgbClr val="CBD5E1"/>
+                      </a:solidFill>
+                      <a:prstDash val="solid"/>
+                      <a:round/>
+                      <a:headEnd type="none" w="med" len="med"/>
+                      <a:tailEnd type="none" w="med" len="med"/>
+                    </a:lnB>
+                    <a:solidFill>
+                      <a:srgbClr val="FFFFFF"/>
+                    </a:solidFill>
+                  </a:tcPr>
+                </a:tc>
+              </a:tr>
+              <a:tr h="320040">
+                <a:tc>
+                  <a:txBody>
+                    <a:bodyPr/>
+                    <a:lstStyle/>
+                    <a:p>
+                      <a:pPr indent="0" marL="0">
+                        <a:buNone/>
+                      </a:pPr>
+                      <a:r>
+                        <a:rPr lang="en-US" sz="1000" b="1" dirty="0">
+                          <a:solidFill>
+                            <a:srgbClr val="334155"/>
+                          </a:solidFill>
+                          <a:latin typeface="Arial" pitchFamily="34" charset="0"/>
+                          <a:ea typeface="Arial" pitchFamily="34" charset="-122"/>
+                          <a:cs typeface="Arial" pitchFamily="34" charset="-120"/>
+                        </a:rPr>
                         <a:t>口コミ返信率</a:t>
                       </a:r>
                       <a:endParaRPr lang="en-US" sz="1000" dirty="0">
@@ -4131,7 +4405,7 @@
                       <a:tailEnd type="none" w="med" len="med"/>
                     </a:lnB>
                     <a:solidFill>
-                      <a:srgbClr val="FFFFFF"/>
+                      <a:srgbClr val="E8EFF8"/>
                     </a:solidFill>
                   </a:tcPr>
                 </a:tc>
@@ -4199,7 +4473,7 @@
                       <a:tailEnd type="none" w="med" len="med"/>
                     </a:lnB>
                     <a:solidFill>
-                      <a:srgbClr val="FFFFFF"/>
+                      <a:srgbClr val="E8EFF8"/>
                     </a:solidFill>
                   </a:tcPr>
                 </a:tc>
@@ -4267,7 +4541,7 @@
                       <a:tailEnd type="none" w="med" len="med"/>
                     </a:lnB>
                     <a:solidFill>
-                      <a:srgbClr val="FFFFFF"/>
+                      <a:srgbClr val="E8EFF8"/>
                     </a:solidFill>
                   </a:tcPr>
                 </a:tc>
@@ -4335,7 +4609,7 @@
                       <a:tailEnd type="none" w="med" len="med"/>
                     </a:lnB>
                     <a:solidFill>
-                      <a:srgbClr val="FFFFFF"/>
+                      <a:srgbClr val="E8EFF8"/>
                     </a:solidFill>
                   </a:tcPr>
                 </a:tc>
@@ -4405,7 +4679,7 @@
                       <a:tailEnd type="none" w="med" len="med"/>
                     </a:lnB>
                     <a:solidFill>
-                      <a:srgbClr val="E8EFF8"/>
+                      <a:srgbClr val="FFFFFF"/>
                     </a:solidFill>
                   </a:tcPr>
                 </a:tc>
@@ -4426,7 +4700,7 @@
                           <a:ea typeface="Arial" pitchFamily="34" charset="-122"/>
                           <a:cs typeface="Arial" pitchFamily="34" charset="-120"/>
                         </a:rPr>
-                        <a:t>約13件/期間</a:t>
+                        <a:t>約15件/期間</a:t>
                       </a:r>
                       <a:endParaRPr lang="en-US" sz="1000" dirty="0">
                         <a:latin typeface="Arial" charset="0"/>
@@ -4473,7 +4747,7 @@
                       <a:tailEnd type="none" w="med" len="med"/>
                     </a:lnB>
                     <a:solidFill>
-                      <a:srgbClr val="E8EFF8"/>
+                      <a:srgbClr val="FFFFFF"/>
                     </a:solidFill>
                   </a:tcPr>
                 </a:tc>
@@ -4494,7 +4768,7 @@
                           <a:ea typeface="Arial" pitchFamily="34" charset="-122"/>
                           <a:cs typeface="Arial" pitchFamily="34" charset="-120"/>
                         </a:rPr>
-                        <a:t>6件以下</a:t>
+                        <a:t>7件以下</a:t>
                       </a:r>
                       <a:endParaRPr lang="en-US" sz="1000" dirty="0">
                         <a:latin typeface="Arial" charset="0"/>
@@ -4541,7 +4815,7 @@
                       <a:tailEnd type="none" w="med" len="med"/>
                     </a:lnB>
                     <a:solidFill>
-                      <a:srgbClr val="E8EFF8"/>
+                      <a:srgbClr val="FFFFFF"/>
                     </a:solidFill>
                   </a:tcPr>
                 </a:tc>
@@ -4609,7 +4883,7 @@
                       <a:tailEnd type="none" w="med" len="med"/>
                     </a:lnB>
                     <a:solidFill>
-                      <a:srgbClr val="E8EFF8"/>
+                      <a:srgbClr val="FFFFFF"/>
                     </a:solidFill>
                   </a:tcPr>
                 </a:tc>
@@ -4626,7 +4900,7 @@
         </p:nvSpPr>
         <p:spPr>
           <a:xfrm>
-            <a:off x="457200" y="3108960"/>
+            <a:off x="457200" y="3429000"/>
             <a:ext cx="8229600" cy="640080"/>
           </a:xfrm>
           <a:prstGeom prst="rect">
@@ -4653,7 +4927,7 @@
         </p:nvSpPr>
         <p:spPr>
           <a:xfrm>
-            <a:off x="457200" y="3108960"/>
+            <a:off x="457200" y="3429000"/>
             <a:ext cx="54864" cy="640080"/>
           </a:xfrm>
           <a:prstGeom prst="rect">
@@ -4673,7 +4947,7 @@
         </p:nvSpPr>
         <p:spPr>
           <a:xfrm>
-            <a:off x="640080" y="3108960"/>
+            <a:off x="640080" y="3429000"/>
             <a:ext cx="7863840" cy="640080"/>
           </a:xfrm>
           <a:prstGeom prst="rect">
@@ -5065,7 +5339,7 @@
                 <a:ea typeface="Arial" pitchFamily="34" charset="-122"/>
                 <a:cs typeface="Arial" pitchFamily="34" charset="-120"/>
               </a:rPr>
-              <a:t>8.68</a:t>
+              <a:t>8.65</a:t>
             </a:r>
             <a:endParaRPr lang="en-US" sz="3200" dirty="0"/>
           </a:p>
@@ -5588,7 +5862,7 @@
                 <a:ea typeface="Arial" pitchFamily="34" charset="-122"/>
                 <a:cs typeface="Arial" pitchFamily="34" charset="-120"/>
               </a:rPr>
-              <a:t>  また、近くにイオン、コンビニ、飲食店もあるのでとても便利な立地です</a:t>
+              <a:t>  都内からのチェックインのため青物横丁駅から伺いました</a:t>
             </a:r>
             <a:endParaRPr lang="en-US" sz="1100" dirty="0"/>
           </a:p>
@@ -5628,7 +5902,7 @@
                 <a:ea typeface="Arial" pitchFamily="34" charset="-122"/>
                 <a:cs typeface="Arial" pitchFamily="34" charset="-120"/>
               </a:rPr>
-              <a:t>  ・部屋の清掃は行き届いており、ベッド、バスタブも広めでゆったり出来て良かったです</a:t>
+              <a:t>  ほぼ寝るためだけにこちらのホテル泊まりましたので  綺麗でした</a:t>
             </a:r>
             <a:endParaRPr lang="en-US" sz="1100" dirty="0"/>
           </a:p>
@@ -6249,7 +6523,7 @@
                 <a:ea typeface="Arial" pitchFamily="34" charset="-122"/>
                 <a:cs typeface="Arial" pitchFamily="34" charset="-120"/>
               </a:rPr>
-              <a:t>8.68</a:t>
+              <a:t>8.65</a:t>
             </a:r>
             <a:endParaRPr lang="en-US" sz="3200" dirty="0"/>
           </a:p>
@@ -7046,6 +7320,55 @@
                 <a:cs typeface="Arial" pitchFamily="34" charset="-120"/>
               </a:rPr>
               <a:t>Trip.com(9.33)が最高スコア。</a:t>
+            </a:r>
+            <a:endParaRPr lang="en-US" sz="1100" dirty="0"/>
+          </a:p>
+          <a:p>
+            <a:pPr indent="0" marL="0">
+              <a:spcAft>
+                <a:spcPts val="200"/>
+              </a:spcAft>
+              <a:buNone/>
+            </a:pPr>
+            <a:endParaRPr lang="en-US" sz="1100" dirty="0"/>
+          </a:p>
+          <a:p>
+            <a:pPr indent="0" marL="0">
+              <a:spcAft>
+                <a:spcPts val="200"/>
+              </a:spcAft>
+              <a:buNone/>
+            </a:pPr>
+            <a:r>
+              <a:rPr lang="en-US" sz="1100" b="1" dirty="0">
+                <a:solidFill>
+                  <a:srgbClr val="DC2626"/>
+                </a:solidFill>
+                <a:latin typeface="Arial" pitchFamily="34" charset="0"/>
+                <a:ea typeface="Arial" pitchFamily="34" charset="-122"/>
+                <a:cs typeface="Arial" pitchFamily="34" charset="-120"/>
+              </a:rPr>
+              <a:t>改善対象サイト</a:t>
+            </a:r>
+            <a:endParaRPr lang="en-US" sz="1100" dirty="0"/>
+          </a:p>
+          <a:p>
+            <a:pPr indent="0" marL="0">
+              <a:spcAft>
+                <a:spcPts val="200"/>
+              </a:spcAft>
+              <a:buNone/>
+            </a:pPr>
+            <a:r>
+              <a:rPr lang="en-US" sz="900" dirty="0">
+                <a:solidFill>
+                  <a:srgbClr val="64748B"/>
+                </a:solidFill>
+                <a:latin typeface="Arial" pitchFamily="34" charset="0"/>
+                <a:ea typeface="Arial" pitchFamily="34" charset="-122"/>
+                <a:cs typeface="Arial" pitchFamily="34" charset="-120"/>
+              </a:rPr>
+              <a:t>Google(8.0)が相対的に低い。口コミ返信の強化が急務</a:t>
             </a:r>
             <a:endParaRPr lang="en-US" sz="1100" dirty="0"/>
           </a:p>
@@ -7896,7 +8219,7 @@
                           <a:ea typeface="Arial" pitchFamily="34" charset="-122"/>
                           <a:cs typeface="Arial" pitchFamily="34" charset="-120"/>
                         </a:rPr>
-                        <a:t>29</a:t>
+                        <a:t>30</a:t>
                       </a:r>
                       <a:endParaRPr lang="en-US" sz="900" dirty="0">
                         <a:latin typeface="Arial" charset="0"/>
@@ -7964,7 +8287,7 @@
                           <a:ea typeface="Arial" pitchFamily="34" charset="-122"/>
                           <a:cs typeface="Arial" pitchFamily="34" charset="-120"/>
                         </a:rPr>
-                        <a:t>4.48</a:t>
+                        <a:t>4.4</a:t>
                       </a:r>
                       <a:endParaRPr lang="en-US" sz="900" dirty="0">
                         <a:latin typeface="Arial" charset="0"/>
@@ -8100,7 +8423,7 @@
                           <a:ea typeface="Arial" pitchFamily="34" charset="-122"/>
                           <a:cs typeface="Arial" pitchFamily="34" charset="-120"/>
                         </a:rPr>
-                        <a:t>8.97</a:t>
+                        <a:t>8.8</a:t>
                       </a:r>
                       <a:endParaRPr lang="en-US" sz="900" dirty="0">
                         <a:latin typeface="Arial" charset="0"/>
@@ -8238,7 +8561,7 @@
                           <a:ea typeface="Arial" pitchFamily="34" charset="-122"/>
                           <a:cs typeface="Arial" pitchFamily="34" charset="-120"/>
                         </a:rPr>
-                        <a:t>24</a:t>
+                        <a:t>23</a:t>
                       </a:r>
                       <a:endParaRPr lang="en-US" sz="900" dirty="0">
                         <a:latin typeface="Arial" charset="0"/>
@@ -8306,7 +8629,7 @@
                           <a:ea typeface="Arial" pitchFamily="34" charset="-122"/>
                           <a:cs typeface="Arial" pitchFamily="34" charset="-120"/>
                         </a:rPr>
-                        <a:t>8.54</a:t>
+                        <a:t>8.61</a:t>
                       </a:r>
                       <a:endParaRPr lang="en-US" sz="900" dirty="0">
                         <a:latin typeface="Arial" charset="0"/>
@@ -8442,7 +8765,7 @@
                           <a:ea typeface="Arial" pitchFamily="34" charset="-122"/>
                           <a:cs typeface="Arial" pitchFamily="34" charset="-120"/>
                         </a:rPr>
-                        <a:t>8.54</a:t>
+                        <a:t>8.61</a:t>
                       </a:r>
                       <a:endParaRPr lang="en-US" sz="900" dirty="0">
                         <a:latin typeface="Arial" charset="0"/>
@@ -8580,7 +8903,7 @@
                           <a:ea typeface="Arial" pitchFamily="34" charset="-122"/>
                           <a:cs typeface="Arial" pitchFamily="34" charset="-120"/>
                         </a:rPr>
-                        <a:t>38</a:t>
+                        <a:t>39</a:t>
                       </a:r>
                       <a:endParaRPr lang="en-US" sz="900" dirty="0">
                         <a:latin typeface="Arial" charset="0"/>
@@ -8648,7 +8971,7 @@
                           <a:ea typeface="Arial" pitchFamily="34" charset="-122"/>
                           <a:cs typeface="Arial" pitchFamily="34" charset="-120"/>
                         </a:rPr>
-                        <a:t>4.18</a:t>
+                        <a:t>4.21</a:t>
                       </a:r>
                       <a:endParaRPr lang="en-US" sz="900" dirty="0">
                         <a:latin typeface="Arial" charset="0"/>
@@ -8784,7 +9107,7 @@
                           <a:ea typeface="Arial" pitchFamily="34" charset="-122"/>
                           <a:cs typeface="Arial" pitchFamily="34" charset="-120"/>
                         </a:rPr>
-                        <a:t>8.37</a:t>
+                        <a:t>8.41</a:t>
                       </a:r>
                       <a:endParaRPr lang="en-US" sz="900" dirty="0">
                         <a:latin typeface="Arial" charset="0"/>
@@ -9264,7 +9587,7 @@
                           <a:ea typeface="Arial" pitchFamily="34" charset="-122"/>
                           <a:cs typeface="Arial" pitchFamily="34" charset="-120"/>
                         </a:rPr>
-                        <a:t>10</a:t>
+                        <a:t>9</a:t>
                       </a:r>
                       <a:endParaRPr lang="en-US" sz="900" dirty="0">
                         <a:latin typeface="Arial" charset="0"/>
@@ -9332,7 +9655,7 @@
                           <a:ea typeface="Arial" pitchFamily="34" charset="-122"/>
                           <a:cs typeface="Arial" pitchFamily="34" charset="-120"/>
                         </a:rPr>
-                        <a:t>4.1</a:t>
+                        <a:t>4</a:t>
                       </a:r>
                       <a:endParaRPr lang="en-US" sz="900" dirty="0">
                         <a:latin typeface="Arial" charset="0"/>
@@ -9468,7 +9791,7 @@
                           <a:ea typeface="Arial" pitchFamily="34" charset="-122"/>
                           <a:cs typeface="Arial" pitchFamily="34" charset="-120"/>
                         </a:rPr>
-                        <a:t>8.2</a:t>
+                        <a:t>8</a:t>
                       </a:r>
                       <a:endParaRPr lang="en-US" sz="900" dirty="0">
                         <a:latin typeface="Arial" charset="0"/>
@@ -10484,7 +10807,7 @@
                 <a:ea typeface="Arial" pitchFamily="34" charset="-122"/>
                 <a:cs typeface="Arial" pitchFamily="34" charset="-120"/>
               </a:rPr>
-              <a:t>また、近くにイオン、コンビニ、飲食店もあるのでとても便利な立地です</a:t>
+              <a:t>都内からのチェックインのため青物横丁駅から伺いました</a:t>
             </a:r>
             <a:endParaRPr lang="en-US" sz="900" dirty="0"/>
           </a:p>
@@ -10523,7 +10846,7 @@
                 <a:ea typeface="Arial" pitchFamily="34" charset="-122"/>
                 <a:cs typeface="Arial" pitchFamily="34" charset="-120"/>
               </a:rPr>
-              <a:t>「そのほかは、立地も、環境も、食事も申し分なしです」</a:t>
+              <a:t>「また、近くにイオン、コンビニ、飲食店もあるのでとても便利な立地です」</a:t>
             </a:r>
             <a:endParaRPr lang="en-US" sz="900" dirty="0"/>
           </a:p>
@@ -10707,7 +11030,7 @@
                 <a:ea typeface="Arial" pitchFamily="34" charset="-122"/>
                 <a:cs typeface="Arial" pitchFamily="34" charset="-120"/>
               </a:rPr>
-              <a:t>・部屋の清掃は行き届いており、ベッド、バスタブも広めでゆったり出来て良かったです</a:t>
+              <a:t>ほぼ寝るためだけにこちらのホテル泊まりましたので  綺麗でした</a:t>
             </a:r>
             <a:endParaRPr lang="en-US" sz="900" dirty="0"/>
           </a:p>
@@ -10746,7 +11069,7 @@
                 <a:ea typeface="Arial" pitchFamily="34" charset="-122"/>
                 <a:cs typeface="Arial" pitchFamily="34" charset="-120"/>
               </a:rPr>
-              <a:t>「広くて清潔です」</a:t>
+              <a:t>「・部屋の清掃は行き届いており、ベッド、バスタブも広めでゆったり出来て良かったです」</a:t>
             </a:r>
             <a:endParaRPr lang="en-US" sz="900" dirty="0"/>
           </a:p>
@@ -10969,7 +11292,7 @@
                 <a:ea typeface="Arial" pitchFamily="34" charset="-122"/>
                 <a:cs typeface="Arial" pitchFamily="34" charset="-120"/>
               </a:rPr>
-              <a:t>「正直、安さでこのホテルを選んだので少し不安でしたが、部屋の清潔感やアメニティの充実などが良く、とても快適に過ごせました」</a:t>
+              <a:t>「駅からは多少離れていますが、室内はとても清潔感があり快適に過ごさせていただきました」</a:t>
             </a:r>
             <a:endParaRPr lang="en-US" sz="900" dirty="0"/>
           </a:p>
@@ -11114,7 +11437,7 @@
                 <a:ea typeface="Arial" pitchFamily="34" charset="-122"/>
                 <a:cs typeface="Arial" pitchFamily="34" charset="-120"/>
               </a:rPr>
-              <a:t>朝食</a:t>
+              <a:t>コンビニ・周辺施設</a:t>
             </a:r>
             <a:endParaRPr lang="en-US" sz="1300" dirty="0"/>
           </a:p>
@@ -11153,7 +11476,7 @@
                 <a:ea typeface="Arial" pitchFamily="34" charset="-122"/>
                 <a:cs typeface="Arial" pitchFamily="34" charset="-120"/>
               </a:rPr>
-              <a:t>・朝食は種類が多く内容は良いのですが、7時オープン前から行列になり大変混雑するので、近隣のホテル同様に6時30分オ...</a:t>
+              <a:t>近くにはイオンもあり、ちょっとしたお買い物は便利でした</a:t>
             </a:r>
             <a:endParaRPr lang="en-US" sz="900" dirty="0"/>
           </a:p>
@@ -11192,7 +11515,7 @@
                 <a:ea typeface="Arial" pitchFamily="34" charset="-122"/>
                 <a:cs typeface="Arial" pitchFamily="34" charset="-120"/>
               </a:rPr>
-              <a:t>「部屋は綺麗で朝ごはんも美味しかったです」</a:t>
+              <a:t>「また、近くにイオン、コンビニ、飲食店もあるのでとても便利な立地です」</a:t>
             </a:r>
             <a:endParaRPr lang="en-US" sz="900" dirty="0"/>
           </a:p>
@@ -11337,7 +11660,7 @@
                 <a:ea typeface="Arial" pitchFamily="34" charset="-122"/>
                 <a:cs typeface="Arial" pitchFamily="34" charset="-120"/>
               </a:rPr>
-              <a:t>コンビニ・周辺施設</a:t>
+              <a:t>朝食</a:t>
             </a:r>
             <a:endParaRPr lang="en-US" sz="1300" dirty="0"/>
           </a:p>
@@ -11376,7 +11699,7 @@
                 <a:ea typeface="Arial" pitchFamily="34" charset="-122"/>
                 <a:cs typeface="Arial" pitchFamily="34" charset="-120"/>
               </a:rPr>
-              <a:t>また、近くにイオン、コンビニ、飲食店もあるのでとても便利な立地です</a:t>
+              <a:t>朝ごはんが美味しかった</a:t>
             </a:r>
             <a:endParaRPr lang="en-US" sz="900" dirty="0"/>
           </a:p>
@@ -11415,7 +11738,7 @@
                 <a:ea typeface="Arial" pitchFamily="34" charset="-122"/>
                 <a:cs typeface="Arial" pitchFamily="34" charset="-120"/>
               </a:rPr>
-              <a:t>「品川シーサイド駅目の前で、スーパー・レストランも近くとても便利です♪ 有明に用があり、数回利用しています」</a:t>
+              <a:t>「・朝食は種類が多く内容は良いのですが、7時オープン前から行列になり大変混雑するので、近隣のホテル同様に6時30分オ...」</a:t>
             </a:r>
             <a:endParaRPr lang="en-US" sz="900" dirty="0"/>
           </a:p>
@@ -11638,7 +11961,7 @@
                 <a:ea typeface="Arial" pitchFamily="34" charset="-122"/>
                 <a:cs typeface="Arial" pitchFamily="34" charset="-120"/>
               </a:rPr>
-              <a:t>「また、受付は大学生のアルバイトと思われる方でしたが、とても丁寧に対応していただきました」</a:t>
+              <a:t>「チェックインが遅れる連絡を電話で伝えた際もとても感じ良く対応いただきました」</a:t>
             </a:r>
             <a:endParaRPr lang="en-US" sz="900" dirty="0"/>
           </a:p>
@@ -12396,7 +12719,7 @@
                           <a:ea typeface="Arial" pitchFamily="34" charset="-122"/>
                           <a:cs typeface="Arial" pitchFamily="34" charset="-120"/>
                         </a:rPr>
-                        <a:t>13件</a:t>
+                        <a:t>15件</a:t>
                       </a:r>
                       <a:endParaRPr lang="en-US" sz="900" dirty="0">
                         <a:latin typeface="Arial" charset="0"/>
@@ -13150,7 +13473,7 @@
                           <a:ea typeface="Arial" pitchFamily="34" charset="-122"/>
                           <a:cs typeface="Arial" pitchFamily="34" charset="-120"/>
                         </a:rPr>
-                        <a:t>部屋は湿気臭がして、かなり老朽化していました</a:t>
+                        <a:t>部屋は湿気臭く、かなり老朽化していました</a:t>
                       </a:r>
                       <a:endParaRPr lang="en-US" sz="900" dirty="0">
                         <a:latin typeface="Arial" charset="0"/>
@@ -13356,7 +13679,7 @@
                           <a:ea typeface="Arial" pitchFamily="34" charset="-122"/>
                           <a:cs typeface="Arial" pitchFamily="34" charset="-120"/>
                         </a:rPr>
-                        <a:t>部屋の狭さ</a:t>
+                        <a:t>防音性能</a:t>
                       </a:r>
                       <a:endParaRPr lang="en-US" sz="900" dirty="0">
                         <a:latin typeface="Arial" charset="0"/>
@@ -13424,7 +13747,7 @@
                           <a:ea typeface="Arial" pitchFamily="34" charset="-122"/>
                           <a:cs typeface="Arial" pitchFamily="34" charset="-120"/>
                         </a:rPr>
-                        <a:t>安いプランで泊まったので、部屋は狭いですが寝るだけなので気になりませんでした</a:t>
+                        <a:t>・以前、高速道路側の部屋に泊まった時は、自動車の騒音がうるさく感じましたが、今回は高速道路と反対側の部屋でしたので...</a:t>
                       </a:r>
                       <a:endParaRPr lang="en-US" sz="900" dirty="0">
                         <a:latin typeface="Arial" charset="0"/>
@@ -13492,7 +13815,7 @@
                           <a:ea typeface="Arial" pitchFamily="34" charset="-122"/>
                           <a:cs typeface="Arial" pitchFamily="34" charset="-120"/>
                         </a:rPr>
-                        <a:t>4件</a:t>
+                        <a:t>3件</a:t>
                       </a:r>
                       <a:endParaRPr lang="en-US" sz="900" dirty="0">
                         <a:latin typeface="Arial" charset="0"/>
@@ -13630,7 +13953,7 @@
                           <a:ea typeface="Arial" pitchFamily="34" charset="-122"/>
                           <a:cs typeface="Arial" pitchFamily="34" charset="-120"/>
                         </a:rPr>
-                        <a:t>防音性能</a:t>
+                        <a:t>部屋の狭さ</a:t>
                       </a:r>
                       <a:endParaRPr lang="en-US" sz="900" dirty="0">
                         <a:latin typeface="Arial" charset="0"/>
@@ -13698,7 +14021,7 @@
                           <a:ea typeface="Arial" pitchFamily="34" charset="-122"/>
                           <a:cs typeface="Arial" pitchFamily="34" charset="-120"/>
                         </a:rPr>
-                        <a:t>・以前、高速道路側の部屋に泊まった時は、自動車の騒音がうるさく感じましたが、今回は高速道路と反対側の部屋でしたので...</a:t>
+                        <a:t>安いプランで泊まったので、部屋は狭いですが寝るだけなので気になりませんでした</a:t>
                       </a:r>
                       <a:endParaRPr lang="en-US" sz="900" dirty="0">
                         <a:latin typeface="Arial" charset="0"/>
@@ -13972,7 +14295,7 @@
                           <a:ea typeface="Arial" pitchFamily="34" charset="-122"/>
                           <a:cs typeface="Arial" pitchFamily="34" charset="-120"/>
                         </a:rPr>
-                        <a:t>部屋は湿気臭がして、かなり老朽化していました</a:t>
+                        <a:t>部屋は湿気臭く、かなり老朽化していました</a:t>
                       </a:r>
                       <a:endParaRPr lang="en-US" sz="900" dirty="0">
                         <a:latin typeface="Arial" charset="0"/>
@@ -14178,7 +14501,7 @@
                           <a:ea typeface="Arial" pitchFamily="34" charset="-122"/>
                           <a:cs typeface="Arial" pitchFamily="34" charset="-120"/>
                         </a:rPr>
-                        <a:t>窓・採光</a:t>
+                        <a:t>朝食の改善要望</a:t>
                       </a:r>
                       <a:endParaRPr lang="en-US" sz="900" dirty="0">
                         <a:latin typeface="Arial" charset="0"/>
@@ -14246,7 +14569,7 @@
                           <a:ea typeface="Arial" pitchFamily="34" charset="-122"/>
                           <a:cs typeface="Arial" pitchFamily="34" charset="-120"/>
                         </a:rPr>
-                        <a:t>ただ、滞在中の天気はあまり良くなく、風がとても強く、窓を閉めていても風の音が聞こえました</a:t>
+                        <a:t>ただ、朝食バイキングについては、品数がそれほど多くないうえ、パン用のオープントースターがないなど、物足りなく感じました</a:t>
                       </a:r>
                       <a:endParaRPr lang="en-US" sz="900" dirty="0">
                         <a:latin typeface="Arial" charset="0"/>
@@ -14314,7 +14637,7 @@
                           <a:ea typeface="Arial" pitchFamily="34" charset="-122"/>
                           <a:cs typeface="Arial" pitchFamily="34" charset="-120"/>
                         </a:rPr>
-                        <a:t>3件</a:t>
+                        <a:t>2件</a:t>
                       </a:r>
                       <a:endParaRPr lang="en-US" sz="900" dirty="0">
                         <a:latin typeface="Arial" charset="0"/>
@@ -14452,7 +14775,7 @@
                           <a:ea typeface="Arial" pitchFamily="34" charset="-122"/>
                           <a:cs typeface="Arial" pitchFamily="34" charset="-120"/>
                         </a:rPr>
-                        <a:t>朝食の改善要望</a:t>
+                        <a:t>窓・採光</a:t>
                       </a:r>
                       <a:endParaRPr lang="en-US" sz="900" dirty="0">
                         <a:latin typeface="Arial" charset="0"/>
@@ -14520,7 +14843,7 @@
                           <a:ea typeface="Arial" pitchFamily="34" charset="-122"/>
                           <a:cs typeface="Arial" pitchFamily="34" charset="-120"/>
                         </a:rPr>
-                        <a:t>ただ、朝食バイキングについては、品数がそれほど多くないうえ、パン用のオープントースターがないなど、物足りなく感じました</a:t>
+                        <a:t>ただ、滞在中の天気はあまり良くなく、風がとても強く、窓を閉めていても風の音が聞こえました</a:t>
                       </a:r>
                       <a:endParaRPr lang="en-US" sz="900" dirty="0">
                         <a:latin typeface="Arial" charset="0"/>

--- a/納品レポート/ホテル別レポート/hearton_口コミ分析レポート.pptx
+++ b/納品レポート/ホテル別レポート/hearton_口コミ分析レポート.pptx
@@ -208,16 +208,16 @@
                 <c:formatCode>General</c:formatCode>
                 <c:ptCount val="6"/>
                 <c:pt idx="0">
-                  <c:v>9.33</c:v>
+                  <c:v>9.38</c:v>
                 </c:pt>
                 <c:pt idx="1">
-                  <c:v>8.8</c:v>
+                  <c:v>8.79</c:v>
                 </c:pt>
                 <c:pt idx="2">
-                  <c:v>8.61</c:v>
+                  <c:v>8.67</c:v>
                 </c:pt>
                 <c:pt idx="3">
-                  <c:v>8.41</c:v>
+                  <c:v>8.47</c:v>
                 </c:pt>
                 <c:pt idx="4">
                   <c:v>8.36</c:v>
@@ -566,10 +566,10 @@
               <c:numCache>
                 <c:ptCount val="3"/>
                 <c:pt idx="0">
-                  <c:v>119</c:v>
+                  <c:v>118</c:v>
                 </c:pt>
                 <c:pt idx="1">
-                  <c:v>19</c:v>
+                  <c:v>20</c:v>
                 </c:pt>
                 <c:pt idx="2">
                   <c:v>1</c:v>
@@ -795,19 +795,19 @@
                 <c:formatCode>General</c:formatCode>
                 <c:ptCount val="7"/>
                 <c:pt idx="0">
-                  <c:v>60</c:v>
+                  <c:v>65</c:v>
                 </c:pt>
                 <c:pt idx="1">
-                  <c:v>10</c:v>
+                  <c:v>7</c:v>
                 </c:pt>
                 <c:pt idx="2">
-                  <c:v>49</c:v>
+                  <c:v>46</c:v>
                 </c:pt>
                 <c:pt idx="3">
                   <c:v>6</c:v>
                 </c:pt>
                 <c:pt idx="4">
-                  <c:v>12</c:v>
+                  <c:v>13</c:v>
                 </c:pt>
                 <c:pt idx="5">
                   <c:v>1</c:v>
@@ -2784,7 +2784,7 @@
                 <a:ea typeface="Arial" pitchFamily="34" charset="-122"/>
                 <a:cs typeface="Arial" pitchFamily="34" charset="-120"/>
               </a:rPr>
-              <a:t>作成日：2026年3月21日</a:t>
+              <a:t>作成日：2026年3月23日</a:t>
             </a:r>
             <a:endParaRPr lang="en-US" sz="1000" dirty="0"/>
           </a:p>
@@ -3330,7 +3330,7 @@
                           <a:ea typeface="Arial" pitchFamily="34" charset="-122"/>
                           <a:cs typeface="Arial" pitchFamily="34" charset="-120"/>
                         </a:rPr>
-                        <a:t>8.65点</a:t>
+                        <a:t>8.69点</a:t>
                       </a:r>
                       <a:endParaRPr lang="en-US" sz="1000" dirty="0">
                         <a:latin typeface="Arial" charset="0"/>
@@ -3604,7 +3604,7 @@
                           <a:ea typeface="Arial" pitchFamily="34" charset="-122"/>
                           <a:cs typeface="Arial" pitchFamily="34" charset="-120"/>
                         </a:rPr>
-                        <a:t>85.6%</a:t>
+                        <a:t>84.9%</a:t>
                       </a:r>
                       <a:endParaRPr lang="en-US" sz="1000" dirty="0">
                         <a:latin typeface="Arial" charset="0"/>
@@ -3672,7 +3672,7 @@
                           <a:ea typeface="Arial" pitchFamily="34" charset="-122"/>
                           <a:cs typeface="Arial" pitchFamily="34" charset="-120"/>
                         </a:rPr>
-                        <a:t>91%以上</a:t>
+                        <a:t>90%以上</a:t>
                       </a:r>
                       <a:endParaRPr lang="en-US" sz="1000" dirty="0">
                         <a:latin typeface="Arial" charset="0"/>
@@ -4700,7 +4700,7 @@
                           <a:ea typeface="Arial" pitchFamily="34" charset="-122"/>
                           <a:cs typeface="Arial" pitchFamily="34" charset="-120"/>
                         </a:rPr>
-                        <a:t>約15件/期間</a:t>
+                        <a:t>約17件/期間</a:t>
                       </a:r>
                       <a:endParaRPr lang="en-US" sz="1000" dirty="0">
                         <a:latin typeface="Arial" charset="0"/>
@@ -4768,7 +4768,7 @@
                           <a:ea typeface="Arial" pitchFamily="34" charset="-122"/>
                           <a:cs typeface="Arial" pitchFamily="34" charset="-120"/>
                         </a:rPr>
-                        <a:t>7件以下</a:t>
+                        <a:t>8件以下</a:t>
                       </a:r>
                       <a:endParaRPr lang="en-US" sz="1000" dirty="0">
                         <a:latin typeface="Arial" charset="0"/>
@@ -5339,7 +5339,7 @@
                 <a:ea typeface="Arial" pitchFamily="34" charset="-122"/>
                 <a:cs typeface="Arial" pitchFamily="34" charset="-120"/>
               </a:rPr>
-              <a:t>8.65</a:t>
+              <a:t>8.69</a:t>
             </a:r>
             <a:endParaRPr lang="en-US" sz="3200" dirty="0"/>
           </a:p>
@@ -5464,7 +5464,7 @@
                 <a:ea typeface="Arial" pitchFamily="34" charset="-122"/>
                 <a:cs typeface="Arial" pitchFamily="34" charset="-120"/>
               </a:rPr>
-              <a:t>85.6%</a:t>
+              <a:t>84.9%</a:t>
             </a:r>
             <a:endParaRPr lang="en-US" sz="3200" dirty="0"/>
           </a:p>
@@ -5862,7 +5862,7 @@
                 <a:ea typeface="Arial" pitchFamily="34" charset="-122"/>
                 <a:cs typeface="Arial" pitchFamily="34" charset="-120"/>
               </a:rPr>
-              <a:t>  都内からのチェックインのため青物横丁駅から伺いました</a:t>
+              <a:t>  乗り換えは面倒なのでりんかい線最寄駅の東雲駅まで徒歩（２０分位</a:t>
             </a:r>
             <a:endParaRPr lang="en-US" sz="1100" dirty="0"/>
           </a:p>
@@ -5902,7 +5902,7 @@
                 <a:ea typeface="Arial" pitchFamily="34" charset="-122"/>
                 <a:cs typeface="Arial" pitchFamily="34" charset="-120"/>
               </a:rPr>
-              <a:t>  ほぼ寝るためだけにこちらのホテル泊まりましたので  綺麗でした</a:t>
+              <a:t>  そして部屋は１７階で窓からは綺麗な景色が堪能出来ました</a:t>
             </a:r>
             <a:endParaRPr lang="en-US" sz="1100" dirty="0"/>
           </a:p>
@@ -5942,7 +5942,7 @@
                 <a:ea typeface="Arial" pitchFamily="34" charset="-122"/>
                 <a:cs typeface="Arial" pitchFamily="34" charset="-120"/>
               </a:rPr>
-              <a:t>  ・部屋の清掃は行き届いており、ベッド、バスタブも広めでゆったり出来て良かったです</a:t>
+              <a:t>  部屋も快適でした</a:t>
             </a:r>
             <a:endParaRPr lang="en-US" sz="1100" dirty="0"/>
           </a:p>
@@ -6090,7 +6090,7 @@
                 <a:ea typeface="Arial" pitchFamily="34" charset="-122"/>
                 <a:cs typeface="Arial" pitchFamily="34" charset="-120"/>
               </a:rPr>
-              <a:t>  ・部屋の清掃は行き届いており、ベッド、バスタブも広めでゆったり出来て良かったです</a:t>
+              <a:t>  駅近で、翌日羽田空港まで電車で行こうと思っていましたが、ダイヤが乱れていて、急遽シャトルバスに変更しました</a:t>
             </a:r>
             <a:endParaRPr lang="en-US" sz="1100" dirty="0"/>
           </a:p>
@@ -6130,7 +6130,7 @@
                 <a:ea typeface="Arial" pitchFamily="34" charset="-122"/>
                 <a:cs typeface="Arial" pitchFamily="34" charset="-120"/>
               </a:rPr>
-              <a:t>  ただ、バスタブは、水とお湯のハンドルが別々なので温度調整が難しいです</a:t>
+              <a:t>  Drink vending machine , ice cream vending machine , curre...</a:t>
             </a:r>
             <a:endParaRPr lang="en-US" sz="1100" dirty="0"/>
           </a:p>
@@ -6170,7 +6170,7 @@
                 <a:ea typeface="Arial" pitchFamily="34" charset="-122"/>
                 <a:cs typeface="Arial" pitchFamily="34" charset="-120"/>
               </a:rPr>
-              <a:t>  ただホテル関係ないけど、目の前のイオンの入り口がわからなくて寒い中ぐるっと回ったのが残念</a:t>
+              <a:t>  ただ、バスルームの臭いが生乾きのような臭い（たぶんシャワーカーテンからです）がしたのと、お湯の調整が難しかったのが...</a:t>
             </a:r>
             <a:endParaRPr lang="en-US" sz="1100" dirty="0"/>
           </a:p>
@@ -6523,7 +6523,7 @@
                 <a:ea typeface="Arial" pitchFamily="34" charset="-122"/>
                 <a:cs typeface="Arial" pitchFamily="34" charset="-120"/>
               </a:rPr>
-              <a:t>8.65</a:t>
+              <a:t>8.69</a:t>
             </a:r>
             <a:endParaRPr lang="en-US" sz="3200" dirty="0"/>
           </a:p>
@@ -6648,7 +6648,7 @@
                 <a:ea typeface="Arial" pitchFamily="34" charset="-122"/>
                 <a:cs typeface="Arial" pitchFamily="34" charset="-120"/>
               </a:rPr>
-              <a:t>85.6%</a:t>
+              <a:t>84.9%</a:t>
             </a:r>
             <a:endParaRPr lang="en-US" sz="3200" dirty="0"/>
           </a:p>
@@ -7319,7 +7319,7 @@
                 <a:ea typeface="Arial" pitchFamily="34" charset="-122"/>
                 <a:cs typeface="Arial" pitchFamily="34" charset="-120"/>
               </a:rPr>
-              <a:t>Trip.com(9.33)が最高スコア。</a:t>
+              <a:t>Trip.com(9.38)が最高スコア。</a:t>
             </a:r>
             <a:endParaRPr lang="en-US" sz="1100" dirty="0"/>
           </a:p>
@@ -7945,7 +7945,7 @@
                           <a:ea typeface="Arial" pitchFamily="34" charset="-122"/>
                           <a:cs typeface="Arial" pitchFamily="34" charset="-120"/>
                         </a:rPr>
-                        <a:t>9.33</a:t>
+                        <a:t>9.38</a:t>
                       </a:r>
                       <a:endParaRPr lang="en-US" sz="900" dirty="0">
                         <a:latin typeface="Arial" charset="0"/>
@@ -8081,7 +8081,7 @@
                           <a:ea typeface="Arial" pitchFamily="34" charset="-122"/>
                           <a:cs typeface="Arial" pitchFamily="34" charset="-120"/>
                         </a:rPr>
-                        <a:t>9.33</a:t>
+                        <a:t>9.38</a:t>
                       </a:r>
                       <a:endParaRPr lang="en-US" sz="900" dirty="0">
                         <a:latin typeface="Arial" charset="0"/>
@@ -8219,7 +8219,7 @@
                           <a:ea typeface="Arial" pitchFamily="34" charset="-122"/>
                           <a:cs typeface="Arial" pitchFamily="34" charset="-120"/>
                         </a:rPr>
-                        <a:t>30</a:t>
+                        <a:t>33</a:t>
                       </a:r>
                       <a:endParaRPr lang="en-US" sz="900" dirty="0">
                         <a:latin typeface="Arial" charset="0"/>
@@ -8287,7 +8287,7 @@
                           <a:ea typeface="Arial" pitchFamily="34" charset="-122"/>
                           <a:cs typeface="Arial" pitchFamily="34" charset="-120"/>
                         </a:rPr>
-                        <a:t>4.4</a:t>
+                        <a:t>4.39</a:t>
                       </a:r>
                       <a:endParaRPr lang="en-US" sz="900" dirty="0">
                         <a:latin typeface="Arial" charset="0"/>
@@ -8423,7 +8423,7 @@
                           <a:ea typeface="Arial" pitchFamily="34" charset="-122"/>
                           <a:cs typeface="Arial" pitchFamily="34" charset="-120"/>
                         </a:rPr>
-                        <a:t>8.8</a:t>
+                        <a:t>8.79</a:t>
                       </a:r>
                       <a:endParaRPr lang="en-US" sz="900" dirty="0">
                         <a:latin typeface="Arial" charset="0"/>
@@ -8561,7 +8561,7 @@
                           <a:ea typeface="Arial" pitchFamily="34" charset="-122"/>
                           <a:cs typeface="Arial" pitchFamily="34" charset="-120"/>
                         </a:rPr>
-                        <a:t>23</a:t>
+                        <a:t>21</a:t>
                       </a:r>
                       <a:endParaRPr lang="en-US" sz="900" dirty="0">
                         <a:latin typeface="Arial" charset="0"/>
@@ -8629,7 +8629,7 @@
                           <a:ea typeface="Arial" pitchFamily="34" charset="-122"/>
                           <a:cs typeface="Arial" pitchFamily="34" charset="-120"/>
                         </a:rPr>
-                        <a:t>8.61</a:t>
+                        <a:t>8.67</a:t>
                       </a:r>
                       <a:endParaRPr lang="en-US" sz="900" dirty="0">
                         <a:latin typeface="Arial" charset="0"/>
@@ -8765,7 +8765,7 @@
                           <a:ea typeface="Arial" pitchFamily="34" charset="-122"/>
                           <a:cs typeface="Arial" pitchFamily="34" charset="-120"/>
                         </a:rPr>
-                        <a:t>8.61</a:t>
+                        <a:t>8.67</a:t>
                       </a:r>
                       <a:endParaRPr lang="en-US" sz="900" dirty="0">
                         <a:latin typeface="Arial" charset="0"/>
@@ -8903,7 +8903,7 @@
                           <a:ea typeface="Arial" pitchFamily="34" charset="-122"/>
                           <a:cs typeface="Arial" pitchFamily="34" charset="-120"/>
                         </a:rPr>
-                        <a:t>39</a:t>
+                        <a:t>38</a:t>
                       </a:r>
                       <a:endParaRPr lang="en-US" sz="900" dirty="0">
                         <a:latin typeface="Arial" charset="0"/>
@@ -8971,7 +8971,7 @@
                           <a:ea typeface="Arial" pitchFamily="34" charset="-122"/>
                           <a:cs typeface="Arial" pitchFamily="34" charset="-120"/>
                         </a:rPr>
-                        <a:t>4.21</a:t>
+                        <a:t>4.24</a:t>
                       </a:r>
                       <a:endParaRPr lang="en-US" sz="900" dirty="0">
                         <a:latin typeface="Arial" charset="0"/>
@@ -9107,7 +9107,7 @@
                           <a:ea typeface="Arial" pitchFamily="34" charset="-122"/>
                           <a:cs typeface="Arial" pitchFamily="34" charset="-120"/>
                         </a:rPr>
-                        <a:t>8.41</a:t>
+                        <a:t>8.47</a:t>
                       </a:r>
                       <a:endParaRPr lang="en-US" sz="900" dirty="0">
                         <a:latin typeface="Arial" charset="0"/>
@@ -10199,7 +10199,7 @@
                 <a:ea typeface="Arial" pitchFamily="34" charset="-122"/>
                 <a:cs typeface="Arial" pitchFamily="34" charset="-120"/>
               </a:rPr>
-              <a:t>119件（85.6%）</a:t>
+              <a:t>118件（84.9%）</a:t>
             </a:r>
             <a:endParaRPr lang="en-US" sz="1100" dirty="0"/>
           </a:p>
@@ -10297,7 +10297,7 @@
                 <a:ea typeface="Arial" pitchFamily="34" charset="-122"/>
                 <a:cs typeface="Arial" pitchFamily="34" charset="-120"/>
               </a:rPr>
-              <a:t>19件（13.7%）</a:t>
+              <a:t>20件（14.4%）</a:t>
             </a:r>
             <a:endParaRPr lang="en-US" sz="1100" dirty="0"/>
           </a:p>
@@ -10807,7 +10807,7 @@
                 <a:ea typeface="Arial" pitchFamily="34" charset="-122"/>
                 <a:cs typeface="Arial" pitchFamily="34" charset="-120"/>
               </a:rPr>
-              <a:t>都内からのチェックインのため青物横丁駅から伺いました</a:t>
+              <a:t>乗り換えは面倒なのでりんかい線最寄駅の東雲駅まで徒歩（２０分位</a:t>
             </a:r>
             <a:endParaRPr lang="en-US" sz="900" dirty="0"/>
           </a:p>
@@ -10846,7 +10846,7 @@
                 <a:ea typeface="Arial" pitchFamily="34" charset="-122"/>
                 <a:cs typeface="Arial" pitchFamily="34" charset="-120"/>
               </a:rPr>
-              <a:t>「また、近くにイオン、コンビニ、飲食店もあるのでとても便利な立地です」</a:t>
+              <a:t>「駅近で、翌日羽田空港まで電車で行こうと思っていましたが、ダイヤが乱れていて、急遽シャトルバスに変更しました」</a:t>
             </a:r>
             <a:endParaRPr lang="en-US" sz="900" dirty="0"/>
           </a:p>
@@ -11030,7 +11030,7 @@
                 <a:ea typeface="Arial" pitchFamily="34" charset="-122"/>
                 <a:cs typeface="Arial" pitchFamily="34" charset="-120"/>
               </a:rPr>
-              <a:t>ほぼ寝るためだけにこちらのホテル泊まりましたので  綺麗でした</a:t>
+              <a:t>そして部屋は１７階で窓からは綺麗な景色が堪能出来ました</a:t>
             </a:r>
             <a:endParaRPr lang="en-US" sz="900" dirty="0"/>
           </a:p>
@@ -11069,7 +11069,7 @@
                 <a:ea typeface="Arial" pitchFamily="34" charset="-122"/>
                 <a:cs typeface="Arial" pitchFamily="34" charset="-120"/>
               </a:rPr>
-              <a:t>「・部屋の清掃は行き届いており、ベッド、バスタブも広めでゆったり出来て良かったです」</a:t>
+              <a:t>「お部屋はきれいで、ベッドの寝心地が最高でした」</a:t>
             </a:r>
             <a:endParaRPr lang="en-US" sz="900" dirty="0"/>
           </a:p>
@@ -11253,7 +11253,7 @@
                 <a:ea typeface="Arial" pitchFamily="34" charset="-122"/>
                 <a:cs typeface="Arial" pitchFamily="34" charset="-120"/>
               </a:rPr>
-              <a:t>・部屋の清掃は行き届いており、ベッド、バスタブも広めでゆったり出来て良かったです</a:t>
+              <a:t>部屋も快適でした</a:t>
             </a:r>
             <a:endParaRPr lang="en-US" sz="900" dirty="0"/>
           </a:p>
@@ -11292,7 +11292,7 @@
                 <a:ea typeface="Arial" pitchFamily="34" charset="-122"/>
                 <a:cs typeface="Arial" pitchFamily="34" charset="-120"/>
               </a:rPr>
-              <a:t>「駅からは多少離れていますが、室内はとても清潔感があり快適に過ごさせていただきました」</a:t>
+              <a:t>「入国時や出国時の休憩には最適ですが、一泊以上は快適に過ごせないと思います」</a:t>
             </a:r>
             <a:endParaRPr lang="en-US" sz="900" dirty="0"/>
           </a:p>
@@ -11437,7 +11437,7 @@
                 <a:ea typeface="Arial" pitchFamily="34" charset="-122"/>
                 <a:cs typeface="Arial" pitchFamily="34" charset="-120"/>
               </a:rPr>
-              <a:t>コンビニ・周辺施設</a:t>
+              <a:t>スタッフの対応</a:t>
             </a:r>
             <a:endParaRPr lang="en-US" sz="1300" dirty="0"/>
           </a:p>
@@ -11476,7 +11476,7 @@
                 <a:ea typeface="Arial" pitchFamily="34" charset="-122"/>
                 <a:cs typeface="Arial" pitchFamily="34" charset="-120"/>
               </a:rPr>
-              <a:t>近くにはイオンもあり、ちょっとしたお買い物は便利でした</a:t>
+              <a:t>割り箸をフロントでいただいて大変助かりました 割り箸をフロントでいただいて大変助かりました</a:t>
             </a:r>
             <a:endParaRPr lang="en-US" sz="900" dirty="0"/>
           </a:p>
@@ -11515,7 +11515,7 @@
                 <a:ea typeface="Arial" pitchFamily="34" charset="-122"/>
                 <a:cs typeface="Arial" pitchFamily="34" charset="-120"/>
               </a:rPr>
-              <a:t>「また、近くにイオン、コンビニ、飲食店もあるのでとても便利な立地です」</a:t>
+              <a:t>「ライブ前に荷物を預けに行くと感じの良いスタッフさんが対応してくれて、ついでにチェックインも済ませることが出来て全て...」</a:t>
             </a:r>
             <a:endParaRPr lang="en-US" sz="900" dirty="0"/>
           </a:p>
@@ -11660,7 +11660,7 @@
                 <a:ea typeface="Arial" pitchFamily="34" charset="-122"/>
                 <a:cs typeface="Arial" pitchFamily="34" charset="-120"/>
               </a:rPr>
-              <a:t>朝食</a:t>
+              <a:t>コンビニ・周辺施設</a:t>
             </a:r>
             <a:endParaRPr lang="en-US" sz="1300" dirty="0"/>
           </a:p>
@@ -11699,7 +11699,7 @@
                 <a:ea typeface="Arial" pitchFamily="34" charset="-122"/>
                 <a:cs typeface="Arial" pitchFamily="34" charset="-120"/>
               </a:rPr>
-              <a:t>朝ごはんが美味しかった</a:t>
+              <a:t>目の前にはイオンがあるので買い物も出来て、そのすぐ隣にあるオーバルガーデンにはコンビニが集結しているので夜遅くなっ...</a:t>
             </a:r>
             <a:endParaRPr lang="en-US" sz="900" dirty="0"/>
           </a:p>
@@ -11738,7 +11738,7 @@
                 <a:ea typeface="Arial" pitchFamily="34" charset="-122"/>
                 <a:cs typeface="Arial" pitchFamily="34" charset="-120"/>
               </a:rPr>
-              <a:t>「・朝食は種類が多く内容は良いのですが、7時オープン前から行列になり大変混雑するので、近隣のホテル同様に6時30分オ...」</a:t>
+              <a:t>「イオンモールも通りの向かいにあり、レストラン、ファミリーマート、セブンイレブン、釣り具店などがたくさんあります」</a:t>
             </a:r>
             <a:endParaRPr lang="en-US" sz="900" dirty="0"/>
           </a:p>
@@ -11883,7 +11883,7 @@
                 <a:ea typeface="Arial" pitchFamily="34" charset="-122"/>
                 <a:cs typeface="Arial" pitchFamily="34" charset="-120"/>
               </a:rPr>
-              <a:t>スタッフの対応</a:t>
+              <a:t>朝食</a:t>
             </a:r>
             <a:endParaRPr lang="en-US" sz="1300" dirty="0"/>
           </a:p>
@@ -11922,7 +11922,7 @@
                 <a:ea typeface="Arial" pitchFamily="34" charset="-122"/>
                 <a:cs typeface="Arial" pitchFamily="34" charset="-120"/>
               </a:rPr>
-              <a:t>・3月は花粉がひどく、部屋は乾燥していたので、フロントで空気清浄機と加湿器を借りました</a:t>
+              <a:t>直食がとても美味しかったです</a:t>
             </a:r>
             <a:endParaRPr lang="en-US" sz="900" dirty="0"/>
           </a:p>
@@ -11961,7 +11961,7 @@
                 <a:ea typeface="Arial" pitchFamily="34" charset="-122"/>
                 <a:cs typeface="Arial" pitchFamily="34" charset="-120"/>
               </a:rPr>
-              <a:t>「チェックインが遅れる連絡を電話で伝えた際もとても感じ良く対応いただきました」</a:t>
+              <a:t>「朝食もビュッフェ式で和洋楽しめました」</a:t>
             </a:r>
             <a:endParaRPr lang="en-US" sz="900" dirty="0"/>
           </a:p>
@@ -12651,7 +12651,7 @@
                           <a:ea typeface="Arial" pitchFamily="34" charset="-122"/>
                           <a:cs typeface="Arial" pitchFamily="34" charset="-120"/>
                         </a:rPr>
-                        <a:t>・部屋の清掃は行き届いており、ベッド、バスタブも広めでゆったり出来て良かったです</a:t>
+                        <a:t>駅近で、翌日羽田空港まで電車で行こうと思っていましたが、ダイヤが乱れていて、急遽シャトルバスに変更しました</a:t>
                       </a:r>
                       <a:endParaRPr lang="en-US" sz="900" dirty="0">
                         <a:latin typeface="Arial" charset="0"/>
@@ -12719,7 +12719,7 @@
                           <a:ea typeface="Arial" pitchFamily="34" charset="-122"/>
                           <a:cs typeface="Arial" pitchFamily="34" charset="-120"/>
                         </a:rPr>
-                        <a:t>15件</a:t>
+                        <a:t>17件</a:t>
                       </a:r>
                       <a:endParaRPr lang="en-US" sz="900" dirty="0">
                         <a:latin typeface="Arial" charset="0"/>
@@ -12925,7 +12925,7 @@
                           <a:ea typeface="Arial" pitchFamily="34" charset="-122"/>
                           <a:cs typeface="Arial" pitchFamily="34" charset="-120"/>
                         </a:rPr>
-                        <a:t>ただ、バスタブは、水とお湯のハンドルが別々なので温度調整が難しいです</a:t>
+                        <a:t>Drink vending machine , ice cream vending machine , curre...</a:t>
                       </a:r>
                       <a:endParaRPr lang="en-US" sz="900" dirty="0">
                         <a:latin typeface="Arial" charset="0"/>
@@ -12993,7 +12993,7 @@
                           <a:ea typeface="Arial" pitchFamily="34" charset="-122"/>
                           <a:cs typeface="Arial" pitchFamily="34" charset="-120"/>
                         </a:rPr>
-                        <a:t>10件</a:t>
+                        <a:t>12件</a:t>
                       </a:r>
                       <a:endParaRPr lang="en-US" sz="900" dirty="0">
                         <a:latin typeface="Arial" charset="0"/>
@@ -13199,7 +13199,7 @@
                           <a:ea typeface="Arial" pitchFamily="34" charset="-122"/>
                           <a:cs typeface="Arial" pitchFamily="34" charset="-120"/>
                         </a:rPr>
-                        <a:t>ただホテル関係ないけど、目の前のイオンの入り口がわからなくて寒い中ぐるっと回ったのが残念</a:t>
+                        <a:t>ただ、バスルームの臭いが生乾きのような臭い（たぶんシャワーカーテンからです）がしたのと、お湯の調整が難しかったのが...</a:t>
                       </a:r>
                       <a:endParaRPr lang="en-US" sz="900" dirty="0">
                         <a:latin typeface="Arial" charset="0"/>
@@ -13405,7 +13405,7 @@
                           <a:ea typeface="Arial" pitchFamily="34" charset="-122"/>
                           <a:cs typeface="Arial" pitchFamily="34" charset="-120"/>
                         </a:rPr>
-                        <a:t>設備の老朽化</a:t>
+                        <a:t>部屋の狭さ</a:t>
                       </a:r>
                       <a:endParaRPr lang="en-US" sz="900" dirty="0">
                         <a:latin typeface="Arial" charset="0"/>
@@ -13473,7 +13473,7 @@
                           <a:ea typeface="Arial" pitchFamily="34" charset="-122"/>
                           <a:cs typeface="Arial" pitchFamily="34" charset="-120"/>
                         </a:rPr>
-                        <a:t>部屋は湿気臭く、かなり老朽化していました</a:t>
+                        <a:t>Affordable hotel stayed 6 nights room was small but worke...</a:t>
                       </a:r>
                       <a:endParaRPr lang="en-US" sz="900" dirty="0">
                         <a:latin typeface="Arial" charset="0"/>
@@ -13541,7 +13541,7 @@
                           <a:ea typeface="Arial" pitchFamily="34" charset="-122"/>
                           <a:cs typeface="Arial" pitchFamily="34" charset="-120"/>
                         </a:rPr>
-                        <a:t>4件</a:t>
+                        <a:t>5件</a:t>
                       </a:r>
                       <a:endParaRPr lang="en-US" sz="900" dirty="0">
                         <a:latin typeface="Arial" charset="0"/>
@@ -13679,7 +13679,7 @@
                           <a:ea typeface="Arial" pitchFamily="34" charset="-122"/>
                           <a:cs typeface="Arial" pitchFamily="34" charset="-120"/>
                         </a:rPr>
-                        <a:t>防音性能</a:t>
+                        <a:t>臭い・匂い</a:t>
                       </a:r>
                       <a:endParaRPr lang="en-US" sz="900" dirty="0">
                         <a:latin typeface="Arial" charset="0"/>
@@ -13747,7 +13747,7 @@
                           <a:ea typeface="Arial" pitchFamily="34" charset="-122"/>
                           <a:cs typeface="Arial" pitchFamily="34" charset="-120"/>
                         </a:rPr>
-                        <a:t>・以前、高速道路側の部屋に泊まった時は、自動車の騒音がうるさく感じましたが、今回は高速道路と反対側の部屋でしたので...</a:t>
+                        <a:t>Drink vending machine , ice cream vending machine , curre...</a:t>
                       </a:r>
                       <a:endParaRPr lang="en-US" sz="900" dirty="0">
                         <a:latin typeface="Arial" charset="0"/>
@@ -13815,7 +13815,7 @@
                           <a:ea typeface="Arial" pitchFamily="34" charset="-122"/>
                           <a:cs typeface="Arial" pitchFamily="34" charset="-120"/>
                         </a:rPr>
-                        <a:t>3件</a:t>
+                        <a:t>5件</a:t>
                       </a:r>
                       <a:endParaRPr lang="en-US" sz="900" dirty="0">
                         <a:latin typeface="Arial" charset="0"/>
@@ -13953,7 +13953,7 @@
                           <a:ea typeface="Arial" pitchFamily="34" charset="-122"/>
                           <a:cs typeface="Arial" pitchFamily="34" charset="-120"/>
                         </a:rPr>
-                        <a:t>部屋の狭さ</a:t>
+                        <a:t>設備の老朽化</a:t>
                       </a:r>
                       <a:endParaRPr lang="en-US" sz="900" dirty="0">
                         <a:latin typeface="Arial" charset="0"/>
@@ -14021,7 +14021,7 @@
                           <a:ea typeface="Arial" pitchFamily="34" charset="-122"/>
                           <a:cs typeface="Arial" pitchFamily="34" charset="-120"/>
                         </a:rPr>
-                        <a:t>安いプランで泊まったので、部屋は狭いですが寝るだけなので気になりませんでした</a:t>
+                        <a:t>部屋は湿気臭がして、かなり老朽化していました</a:t>
                       </a:r>
                       <a:endParaRPr lang="en-US" sz="900" dirty="0">
                         <a:latin typeface="Arial" charset="0"/>
@@ -14089,7 +14089,7 @@
                           <a:ea typeface="Arial" pitchFamily="34" charset="-122"/>
                           <a:cs typeface="Arial" pitchFamily="34" charset="-120"/>
                         </a:rPr>
-                        <a:t>3件</a:t>
+                        <a:t>4件</a:t>
                       </a:r>
                       <a:endParaRPr lang="en-US" sz="900" dirty="0">
                         <a:latin typeface="Arial" charset="0"/>
@@ -14227,7 +14227,7 @@
                           <a:ea typeface="Arial" pitchFamily="34" charset="-122"/>
                           <a:cs typeface="Arial" pitchFamily="34" charset="-120"/>
                         </a:rPr>
-                        <a:t>臭い・匂い</a:t>
+                        <a:t>防音性能</a:t>
                       </a:r>
                       <a:endParaRPr lang="en-US" sz="900" dirty="0">
                         <a:latin typeface="Arial" charset="0"/>
@@ -14295,7 +14295,7 @@
                           <a:ea typeface="Arial" pitchFamily="34" charset="-122"/>
                           <a:cs typeface="Arial" pitchFamily="34" charset="-120"/>
                         </a:rPr>
-                        <a:t>部屋は湿気臭く、かなり老朽化していました</a:t>
+                        <a:t>・以前、高速道路側の部屋に泊まった時は、自動車の騒音がうるさく感じましたが、今回は高速道路と反対側の部屋でしたので...</a:t>
                       </a:r>
                       <a:endParaRPr lang="en-US" sz="900" dirty="0">
                         <a:latin typeface="Arial" charset="0"/>
@@ -14363,7 +14363,7 @@
                           <a:ea typeface="Arial" pitchFamily="34" charset="-122"/>
                           <a:cs typeface="Arial" pitchFamily="34" charset="-120"/>
                         </a:rPr>
-                        <a:t>3件</a:t>
+                        <a:t>2件</a:t>
                       </a:r>
                       <a:endParaRPr lang="en-US" sz="900" dirty="0">
                         <a:latin typeface="Arial" charset="0"/>
@@ -14843,7 +14843,7 @@
                           <a:ea typeface="Arial" pitchFamily="34" charset="-122"/>
                           <a:cs typeface="Arial" pitchFamily="34" charset="-120"/>
                         </a:rPr>
-                        <a:t>ただ、滞在中の天気はあまり良くなく、風がとても強く、窓を閉めていても風の音が聞こえました</a:t>
+                        <a:t>そして部屋は１７階で窓からは綺麗な景色が堪能出来ました</a:t>
                       </a:r>
                       <a:endParaRPr lang="en-US" sz="900" dirty="0">
                         <a:latin typeface="Arial" charset="0"/>

--- a/納品レポート/ホテル別レポート/hearton_口コミ分析レポート.pptx
+++ b/納品レポート/ホテル別レポート/hearton_口コミ分析レポート.pptx
@@ -186,13 +186,13 @@
                     <c:v>楽天トラベル</c:v>
                   </c:pt>
                   <c:pt idx="2">
+                    <c:v>Agoda</c:v>
+                  </c:pt>
+                  <c:pt idx="3">
                     <c:v>Booking.com</c:v>
                   </c:pt>
-                  <c:pt idx="3">
+                  <c:pt idx="4">
                     <c:v>じゃらん</c:v>
-                  </c:pt>
-                  <c:pt idx="4">
-                    <c:v>Agoda</c:v>
                   </c:pt>
                   <c:pt idx="5">
                     <c:v>Google</c:v>
@@ -208,22 +208,22 @@
                 <c:formatCode>General</c:formatCode>
                 <c:ptCount val="6"/>
                 <c:pt idx="0">
-                  <c:v>9.38</c:v>
+                  <c:v>9.42</c:v>
                 </c:pt>
                 <c:pt idx="1">
-                  <c:v>8.79</c:v>
+                  <c:v>8.76</c:v>
                 </c:pt>
                 <c:pt idx="2">
-                  <c:v>8.67</c:v>
+                  <c:v>8.73</c:v>
                 </c:pt>
                 <c:pt idx="3">
-                  <c:v>8.47</c:v>
+                  <c:v>8.55</c:v>
                 </c:pt>
                 <c:pt idx="4">
-                  <c:v>8.36</c:v>
+                  <c:v>8.54</c:v>
                 </c:pt>
                 <c:pt idx="5">
-                  <c:v>8</c:v>
+                  <c:v>7.75</c:v>
                 </c:pt>
               </c:numCache>
             </c:numRef>
@@ -566,7 +566,7 @@
               <c:numCache>
                 <c:ptCount val="3"/>
                 <c:pt idx="0">
-                  <c:v>118</c:v>
+                  <c:v>117</c:v>
                 </c:pt>
                 <c:pt idx="1">
                   <c:v>20</c:v>
@@ -741,17 +741,6 @@
             <c:bubble3D val="0"/>
             <c:spPr>
               <a:solidFill>
-                <a:srgbClr val="D4A843"/>
-              </a:solidFill>
-              <a:effectLst/>
-            </c:spPr>
-          </c:dPt>
-          <c:dPt>
-            <c:idx val="6"/>
-            <c:invertIfNegative val="0"/>
-            <c:bubble3D val="0"/>
-            <c:spPr>
-              <a:solidFill>
                 <a:srgbClr val="DC2626"/>
               </a:solidFill>
               <a:effectLst/>
@@ -759,9 +748,9 @@
           </c:dPt>
           <c:cat>
             <c:multiLvlStrRef>
-              <c:f>Sheet1!$A$2:$A$8</c:f>
+              <c:f>Sheet1!$A$2:$A$7</c:f>
               <c:multiLvlStrCache>
-                <c:ptCount val="7"/>
+                <c:ptCount val="6"/>
                 <c:lvl>
                   <c:pt idx="0">
                     <c:v>10点</c:v>
@@ -779,9 +768,6 @@
                     <c:v>6点</c:v>
                   </c:pt>
                   <c:pt idx="5">
-                    <c:v>5点</c:v>
-                  </c:pt>
-                  <c:pt idx="6">
                     <c:v>2点</c:v>
                   </c:pt>
                 </c:lvl>
@@ -790,29 +776,26 @@
           </c:cat>
           <c:val>
             <c:numRef>
-              <c:f>Sheet1!$B$2:$B$8</c:f>
+              <c:f>Sheet1!$B$2:$B$7</c:f>
               <c:numCache>
                 <c:formatCode>General</c:formatCode>
-                <c:ptCount val="7"/>
+                <c:ptCount val="6"/>
                 <c:pt idx="0">
-                  <c:v>65</c:v>
+                  <c:v>67</c:v>
                 </c:pt>
                 <c:pt idx="1">
-                  <c:v>7</c:v>
+                  <c:v>5</c:v>
                 </c:pt>
                 <c:pt idx="2">
-                  <c:v>46</c:v>
+                  <c:v>45</c:v>
                 </c:pt>
                 <c:pt idx="3">
                   <c:v>6</c:v>
                 </c:pt>
                 <c:pt idx="4">
-                  <c:v>13</c:v>
+                  <c:v>14</c:v>
                 </c:pt>
                 <c:pt idx="5">
-                  <c:v>1</c:v>
-                </c:pt>
-                <c:pt idx="6">
                   <c:v>1</c:v>
                 </c:pt>
               </c:numCache>
@@ -2764,7 +2747,7 @@
                 <a:ea typeface="Arial" pitchFamily="34" charset="-122"/>
                 <a:cs typeface="Arial" pitchFamily="34" charset="-120"/>
               </a:rPr>
-              <a:t>レビュー総数：139件（6サイト）</a:t>
+              <a:t>レビュー総数：138件（6サイト）</a:t>
             </a:r>
             <a:endParaRPr lang="en-US" sz="1000" dirty="0"/>
           </a:p>
@@ -2784,7 +2767,7 @@
                 <a:ea typeface="Arial" pitchFamily="34" charset="-122"/>
                 <a:cs typeface="Arial" pitchFamily="34" charset="-120"/>
               </a:rPr>
-              <a:t>作成日：2026年3月23日</a:t>
+              <a:t>作成日：2026年3月24日</a:t>
             </a:r>
             <a:endParaRPr lang="en-US" sz="1000" dirty="0"/>
           </a:p>
@@ -3330,7 +3313,7 @@
                           <a:ea typeface="Arial" pitchFamily="34" charset="-122"/>
                           <a:cs typeface="Arial" pitchFamily="34" charset="-120"/>
                         </a:rPr>
-                        <a:t>8.69点</a:t>
+                        <a:t>8.72点</a:t>
                       </a:r>
                       <a:endParaRPr lang="en-US" sz="1000" dirty="0">
                         <a:latin typeface="Arial" charset="0"/>
@@ -3604,7 +3587,7 @@
                           <a:ea typeface="Arial" pitchFamily="34" charset="-122"/>
                           <a:cs typeface="Arial" pitchFamily="34" charset="-120"/>
                         </a:rPr>
-                        <a:t>84.9%</a:t>
+                        <a:t>84.8%</a:t>
                       </a:r>
                       <a:endParaRPr lang="en-US" sz="1000" dirty="0">
                         <a:latin typeface="Arial" charset="0"/>
@@ -4152,7 +4135,7 @@
                           <a:ea typeface="Arial" pitchFamily="34" charset="-122"/>
                           <a:cs typeface="Arial" pitchFamily="34" charset="-120"/>
                         </a:rPr>
-                        <a:t>8.0点</a:t>
+                        <a:t>7.8点</a:t>
                       </a:r>
                       <a:endParaRPr lang="en-US" sz="1000" dirty="0">
                         <a:latin typeface="Arial" charset="0"/>
@@ -4220,7 +4203,7 @@
                           <a:ea typeface="Arial" pitchFamily="34" charset="-122"/>
                           <a:cs typeface="Arial" pitchFamily="34" charset="-120"/>
                         </a:rPr>
-                        <a:t>9.0点以上</a:t>
+                        <a:t>8.8点以上</a:t>
                       </a:r>
                       <a:endParaRPr lang="en-US" sz="1000" dirty="0">
                         <a:latin typeface="Arial" charset="0"/>
@@ -4700,7 +4683,7 @@
                           <a:ea typeface="Arial" pitchFamily="34" charset="-122"/>
                           <a:cs typeface="Arial" pitchFamily="34" charset="-120"/>
                         </a:rPr>
-                        <a:t>約17件/期間</a:t>
+                        <a:t>約18件/期間</a:t>
                       </a:r>
                       <a:endParaRPr lang="en-US" sz="1000" dirty="0">
                         <a:latin typeface="Arial" charset="0"/>
@@ -4768,7 +4751,7 @@
                           <a:ea typeface="Arial" pitchFamily="34" charset="-122"/>
                           <a:cs typeface="Arial" pitchFamily="34" charset="-120"/>
                         </a:rPr>
-                        <a:t>8件以下</a:t>
+                        <a:t>9件以下</a:t>
                       </a:r>
                       <a:endParaRPr lang="en-US" sz="1000" dirty="0">
                         <a:latin typeface="Arial" charset="0"/>
@@ -5339,7 +5322,7 @@
                 <a:ea typeface="Arial" pitchFamily="34" charset="-122"/>
                 <a:cs typeface="Arial" pitchFamily="34" charset="-120"/>
               </a:rPr>
-              <a:t>8.69</a:t>
+              <a:t>8.72</a:t>
             </a:r>
             <a:endParaRPr lang="en-US" sz="3200" dirty="0"/>
           </a:p>
@@ -5464,7 +5447,7 @@
                 <a:ea typeface="Arial" pitchFamily="34" charset="-122"/>
                 <a:cs typeface="Arial" pitchFamily="34" charset="-120"/>
               </a:rPr>
-              <a:t>84.9%</a:t>
+              <a:t>84.8%</a:t>
             </a:r>
             <a:endParaRPr lang="en-US" sz="3200" dirty="0"/>
           </a:p>
@@ -5714,7 +5697,7 @@
                 <a:ea typeface="Arial" pitchFamily="34" charset="-122"/>
                 <a:cs typeface="Arial" pitchFamily="34" charset="-120"/>
               </a:rPr>
-              <a:t>139件</a:t>
+              <a:t>138件</a:t>
             </a:r>
             <a:endParaRPr lang="en-US" sz="3200" dirty="0"/>
           </a:p>
@@ -5862,7 +5845,7 @@
                 <a:ea typeface="Arial" pitchFamily="34" charset="-122"/>
                 <a:cs typeface="Arial" pitchFamily="34" charset="-120"/>
               </a:rPr>
-              <a:t>  乗り換えは面倒なのでりんかい線最寄駅の東雲駅まで徒歩（２０分位</a:t>
+              <a:t>  駅からも近くて良かったです</a:t>
             </a:r>
             <a:endParaRPr lang="en-US" sz="1100" dirty="0"/>
           </a:p>
@@ -5902,7 +5885,7 @@
                 <a:ea typeface="Arial" pitchFamily="34" charset="-122"/>
                 <a:cs typeface="Arial" pitchFamily="34" charset="-120"/>
               </a:rPr>
-              <a:t>  そして部屋は１７階で窓からは綺麗な景色が堪能出来ました</a:t>
+              <a:t>  清潔で良かった 高さ制限のある車は、別の駐車場に停めるようになりますが、不便でした 高さ制限のある車は、別の駐車場...</a:t>
             </a:r>
             <a:endParaRPr lang="en-US" sz="1100" dirty="0"/>
           </a:p>
@@ -5922,7 +5905,7 @@
                 <a:ea typeface="Arial" pitchFamily="34" charset="-122"/>
                 <a:cs typeface="Arial" pitchFamily="34" charset="-120"/>
               </a:rPr>
-              <a:t>快適さ・設備 </a:t>
+              <a:t>スタッフの対応 </a:t>
             </a:r>
             <a:endParaRPr lang="en-US" sz="1100" dirty="0"/>
           </a:p>
@@ -5942,7 +5925,7 @@
                 <a:ea typeface="Arial" pitchFamily="34" charset="-122"/>
                 <a:cs typeface="Arial" pitchFamily="34" charset="-120"/>
               </a:rPr>
-              <a:t>  部屋も快適でした</a:t>
+              <a:t>  深夜のチェックインになってしまったにもかかわらず親切に対応していただきました</a:t>
             </a:r>
             <a:endParaRPr lang="en-US" sz="1100" dirty="0"/>
           </a:p>
@@ -6090,7 +6073,7 @@
                 <a:ea typeface="Arial" pitchFamily="34" charset="-122"/>
                 <a:cs typeface="Arial" pitchFamily="34" charset="-120"/>
               </a:rPr>
-              <a:t>  駅近で、翌日羽田空港まで電車で行こうと思っていましたが、ダイヤが乱れていて、急遽シャトルバスに変更しました</a:t>
+              <a:t>  羽田空港まで近くのバス停からリムジンバスも出ています</a:t>
             </a:r>
             <a:endParaRPr lang="en-US" sz="1100" dirty="0"/>
           </a:p>
@@ -6150,7 +6133,7 @@
                 <a:ea typeface="Arial" pitchFamily="34" charset="-122"/>
                 <a:cs typeface="Arial" pitchFamily="34" charset="-120"/>
               </a:rPr>
-              <a:t>対応・サービスの不満 </a:t>
+              <a:t>部屋の狭さ </a:t>
             </a:r>
             <a:endParaRPr lang="en-US" sz="1100" dirty="0"/>
           </a:p>
@@ -6170,7 +6153,7 @@
                 <a:ea typeface="Arial" pitchFamily="34" charset="-122"/>
                 <a:cs typeface="Arial" pitchFamily="34" charset="-120"/>
               </a:rPr>
-              <a:t>  ただ、バスルームの臭いが生乾きのような臭い（たぶんシャワーカーテンからです）がしたのと、お湯の調整が難しかったのが...</a:t>
+              <a:t>  Affordable hotel stayed 6 nights room was small but worke...</a:t>
             </a:r>
             <a:endParaRPr lang="en-US" sz="1100" dirty="0"/>
           </a:p>
@@ -6523,7 +6506,7 @@
                 <a:ea typeface="Arial" pitchFamily="34" charset="-122"/>
                 <a:cs typeface="Arial" pitchFamily="34" charset="-120"/>
               </a:rPr>
-              <a:t>8.69</a:t>
+              <a:t>8.72</a:t>
             </a:r>
             <a:endParaRPr lang="en-US" sz="3200" dirty="0"/>
           </a:p>
@@ -6648,7 +6631,7 @@
                 <a:ea typeface="Arial" pitchFamily="34" charset="-122"/>
                 <a:cs typeface="Arial" pitchFamily="34" charset="-120"/>
               </a:rPr>
-              <a:t>84.9%</a:t>
+              <a:t>84.8%</a:t>
             </a:r>
             <a:endParaRPr lang="en-US" sz="3200" dirty="0"/>
           </a:p>
@@ -6898,7 +6881,7 @@
                 <a:ea typeface="Arial" pitchFamily="34" charset="-122"/>
                 <a:cs typeface="Arial" pitchFamily="34" charset="-120"/>
               </a:rPr>
-              <a:t>139件</a:t>
+              <a:t>138件</a:t>
             </a:r>
             <a:endParaRPr lang="en-US" sz="3200" dirty="0"/>
           </a:p>
@@ -7319,7 +7302,7 @@
                 <a:ea typeface="Arial" pitchFamily="34" charset="-122"/>
                 <a:cs typeface="Arial" pitchFamily="34" charset="-120"/>
               </a:rPr>
-              <a:t>Trip.com(9.38)が最高スコア。</a:t>
+              <a:t>Trip.com(9.42)が最高スコア。</a:t>
             </a:r>
             <a:endParaRPr lang="en-US" sz="1100" dirty="0"/>
           </a:p>
@@ -7368,7 +7351,7 @@
                 <a:ea typeface="Arial" pitchFamily="34" charset="-122"/>
                 <a:cs typeface="Arial" pitchFamily="34" charset="-120"/>
               </a:rPr>
-              <a:t>Google(8.0)が相対的に低い。口コミ返信の強化が急務</a:t>
+              <a:t>Google(7.8)が相対的に低い。口コミ返信の強化が急務</a:t>
             </a:r>
             <a:endParaRPr lang="en-US" sz="1100" dirty="0"/>
           </a:p>
@@ -7945,7 +7928,7 @@
                           <a:ea typeface="Arial" pitchFamily="34" charset="-122"/>
                           <a:cs typeface="Arial" pitchFamily="34" charset="-120"/>
                         </a:rPr>
-                        <a:t>9.38</a:t>
+                        <a:t>9.42</a:t>
                       </a:r>
                       <a:endParaRPr lang="en-US" sz="900" dirty="0">
                         <a:latin typeface="Arial" charset="0"/>
@@ -8081,7 +8064,7 @@
                           <a:ea typeface="Arial" pitchFamily="34" charset="-122"/>
                           <a:cs typeface="Arial" pitchFamily="34" charset="-120"/>
                         </a:rPr>
-                        <a:t>9.38</a:t>
+                        <a:t>9.42</a:t>
                       </a:r>
                       <a:endParaRPr lang="en-US" sz="900" dirty="0">
                         <a:latin typeface="Arial" charset="0"/>
@@ -8219,7 +8202,7 @@
                           <a:ea typeface="Arial" pitchFamily="34" charset="-122"/>
                           <a:cs typeface="Arial" pitchFamily="34" charset="-120"/>
                         </a:rPr>
-                        <a:t>33</a:t>
+                        <a:t>34</a:t>
                       </a:r>
                       <a:endParaRPr lang="en-US" sz="900" dirty="0">
                         <a:latin typeface="Arial" charset="0"/>
@@ -8287,7 +8270,7 @@
                           <a:ea typeface="Arial" pitchFamily="34" charset="-122"/>
                           <a:cs typeface="Arial" pitchFamily="34" charset="-120"/>
                         </a:rPr>
-                        <a:t>4.39</a:t>
+                        <a:t>4.38</a:t>
                       </a:r>
                       <a:endParaRPr lang="en-US" sz="900" dirty="0">
                         <a:latin typeface="Arial" charset="0"/>
@@ -8423,691 +8406,7 @@
                           <a:ea typeface="Arial" pitchFamily="34" charset="-122"/>
                           <a:cs typeface="Arial" pitchFamily="34" charset="-120"/>
                         </a:rPr>
-                        <a:t>8.79</a:t>
-                      </a:r>
-                      <a:endParaRPr lang="en-US" sz="900" dirty="0">
-                        <a:latin typeface="Arial" charset="0"/>
-                        <a:ea typeface="Arial" charset="0"/>
-                        <a:cs typeface="Arial" charset="0"/>
-                      </a:endParaRPr>
-                    </a:p>
-                  </a:txBody>
-                  <a:tcPr marL="91440" marR="91440" marT="45720" marB="45720">
-                    <a:lnL w="6350" cap="flat" cmpd="sng" algn="ctr">
-                      <a:solidFill>
-                        <a:srgbClr val="CBD5E1"/>
-                      </a:solidFill>
-                      <a:prstDash val="solid"/>
-                      <a:round/>
-                      <a:headEnd type="none" w="med" len="med"/>
-                      <a:tailEnd type="none" w="med" len="med"/>
-                    </a:lnL>
-                    <a:lnR w="6350" cap="flat" cmpd="sng" algn="ctr">
-                      <a:solidFill>
-                        <a:srgbClr val="CBD5E1"/>
-                      </a:solidFill>
-                      <a:prstDash val="solid"/>
-                      <a:round/>
-                      <a:headEnd type="none" w="med" len="med"/>
-                      <a:tailEnd type="none" w="med" len="med"/>
-                    </a:lnR>
-                    <a:lnT w="6350" cap="flat" cmpd="sng" algn="ctr">
-                      <a:solidFill>
-                        <a:srgbClr val="CBD5E1"/>
-                      </a:solidFill>
-                      <a:prstDash val="solid"/>
-                      <a:round/>
-                      <a:headEnd type="none" w="med" len="med"/>
-                      <a:tailEnd type="none" w="med" len="med"/>
-                    </a:lnT>
-                    <a:lnB w="6350" cap="flat" cmpd="sng" algn="ctr">
-                      <a:solidFill>
-                        <a:srgbClr val="CBD5E1"/>
-                      </a:solidFill>
-                      <a:prstDash val="solid"/>
-                      <a:round/>
-                      <a:headEnd type="none" w="med" len="med"/>
-                      <a:tailEnd type="none" w="med" len="med"/>
-                    </a:lnB>
-                    <a:solidFill>
-                      <a:srgbClr val="FFFFFF"/>
-                    </a:solidFill>
-                  </a:tcPr>
-                </a:tc>
-              </a:tr>
-              <a:tr h="201168">
-                <a:tc>
-                  <a:txBody>
-                    <a:bodyPr/>
-                    <a:lstStyle/>
-                    <a:p>
-                      <a:pPr algn="ctr" indent="0" marL="0">
-                        <a:buNone/>
-                      </a:pPr>
-                      <a:r>
-                        <a:rPr lang="en-US" sz="900" dirty="0">
-                          <a:solidFill>
-                            <a:srgbClr val="000000"/>
-                          </a:solidFill>
-                          <a:latin typeface="Arial" pitchFamily="34" charset="0"/>
-                          <a:ea typeface="Arial" pitchFamily="34" charset="-122"/>
-                          <a:cs typeface="Arial" pitchFamily="34" charset="-120"/>
-                        </a:rPr>
-                        <a:t>Booking.com</a:t>
-                      </a:r>
-                      <a:endParaRPr lang="en-US" sz="900" dirty="0">
-                        <a:latin typeface="Arial" charset="0"/>
-                        <a:ea typeface="Arial" charset="0"/>
-                        <a:cs typeface="Arial" charset="0"/>
-                      </a:endParaRPr>
-                    </a:p>
-                  </a:txBody>
-                  <a:tcPr marL="91440" marR="91440" marT="45720" marB="45720">
-                    <a:lnL w="6350" cap="flat" cmpd="sng" algn="ctr">
-                      <a:solidFill>
-                        <a:srgbClr val="CBD5E1"/>
-                      </a:solidFill>
-                      <a:prstDash val="solid"/>
-                      <a:round/>
-                      <a:headEnd type="none" w="med" len="med"/>
-                      <a:tailEnd type="none" w="med" len="med"/>
-                    </a:lnL>
-                    <a:lnR w="6350" cap="flat" cmpd="sng" algn="ctr">
-                      <a:solidFill>
-                        <a:srgbClr val="CBD5E1"/>
-                      </a:solidFill>
-                      <a:prstDash val="solid"/>
-                      <a:round/>
-                      <a:headEnd type="none" w="med" len="med"/>
-                      <a:tailEnd type="none" w="med" len="med"/>
-                    </a:lnR>
-                    <a:lnT w="6350" cap="flat" cmpd="sng" algn="ctr">
-                      <a:solidFill>
-                        <a:srgbClr val="CBD5E1"/>
-                      </a:solidFill>
-                      <a:prstDash val="solid"/>
-                      <a:round/>
-                      <a:headEnd type="none" w="med" len="med"/>
-                      <a:tailEnd type="none" w="med" len="med"/>
-                    </a:lnT>
-                    <a:lnB w="6350" cap="flat" cmpd="sng" algn="ctr">
-                      <a:solidFill>
-                        <a:srgbClr val="CBD5E1"/>
-                      </a:solidFill>
-                      <a:prstDash val="solid"/>
-                      <a:round/>
-                      <a:headEnd type="none" w="med" len="med"/>
-                      <a:tailEnd type="none" w="med" len="med"/>
-                    </a:lnB>
-                    <a:solidFill>
-                      <a:srgbClr val="E8EFF8"/>
-                    </a:solidFill>
-                  </a:tcPr>
-                </a:tc>
-                <a:tc>
-                  <a:txBody>
-                    <a:bodyPr/>
-                    <a:lstStyle/>
-                    <a:p>
-                      <a:pPr algn="ctr" indent="0" marL="0">
-                        <a:buNone/>
-                      </a:pPr>
-                      <a:r>
-                        <a:rPr lang="en-US" sz="900" dirty="0">
-                          <a:solidFill>
-                            <a:srgbClr val="000000"/>
-                          </a:solidFill>
-                          <a:latin typeface="Arial" pitchFamily="34" charset="0"/>
-                          <a:ea typeface="Arial" pitchFamily="34" charset="-122"/>
-                          <a:cs typeface="Arial" pitchFamily="34" charset="-120"/>
-                        </a:rPr>
-                        <a:t>21</a:t>
-                      </a:r>
-                      <a:endParaRPr lang="en-US" sz="900" dirty="0">
-                        <a:latin typeface="Arial" charset="0"/>
-                        <a:ea typeface="Arial" charset="0"/>
-                        <a:cs typeface="Arial" charset="0"/>
-                      </a:endParaRPr>
-                    </a:p>
-                  </a:txBody>
-                  <a:tcPr marL="91440" marR="91440" marT="45720" marB="45720">
-                    <a:lnL w="6350" cap="flat" cmpd="sng" algn="ctr">
-                      <a:solidFill>
-                        <a:srgbClr val="CBD5E1"/>
-                      </a:solidFill>
-                      <a:prstDash val="solid"/>
-                      <a:round/>
-                      <a:headEnd type="none" w="med" len="med"/>
-                      <a:tailEnd type="none" w="med" len="med"/>
-                    </a:lnL>
-                    <a:lnR w="6350" cap="flat" cmpd="sng" algn="ctr">
-                      <a:solidFill>
-                        <a:srgbClr val="CBD5E1"/>
-                      </a:solidFill>
-                      <a:prstDash val="solid"/>
-                      <a:round/>
-                      <a:headEnd type="none" w="med" len="med"/>
-                      <a:tailEnd type="none" w="med" len="med"/>
-                    </a:lnR>
-                    <a:lnT w="6350" cap="flat" cmpd="sng" algn="ctr">
-                      <a:solidFill>
-                        <a:srgbClr val="CBD5E1"/>
-                      </a:solidFill>
-                      <a:prstDash val="solid"/>
-                      <a:round/>
-                      <a:headEnd type="none" w="med" len="med"/>
-                      <a:tailEnd type="none" w="med" len="med"/>
-                    </a:lnT>
-                    <a:lnB w="6350" cap="flat" cmpd="sng" algn="ctr">
-                      <a:solidFill>
-                        <a:srgbClr val="CBD5E1"/>
-                      </a:solidFill>
-                      <a:prstDash val="solid"/>
-                      <a:round/>
-                      <a:headEnd type="none" w="med" len="med"/>
-                      <a:tailEnd type="none" w="med" len="med"/>
-                    </a:lnB>
-                    <a:solidFill>
-                      <a:srgbClr val="E8EFF8"/>
-                    </a:solidFill>
-                  </a:tcPr>
-                </a:tc>
-                <a:tc>
-                  <a:txBody>
-                    <a:bodyPr/>
-                    <a:lstStyle/>
-                    <a:p>
-                      <a:pPr algn="ctr" indent="0" marL="0">
-                        <a:buNone/>
-                      </a:pPr>
-                      <a:r>
-                        <a:rPr lang="en-US" sz="900" dirty="0">
-                          <a:solidFill>
-                            <a:srgbClr val="000000"/>
-                          </a:solidFill>
-                          <a:latin typeface="Arial" pitchFamily="34" charset="0"/>
-                          <a:ea typeface="Arial" pitchFamily="34" charset="-122"/>
-                          <a:cs typeface="Arial" pitchFamily="34" charset="-120"/>
-                        </a:rPr>
-                        <a:t>8.67</a:t>
-                      </a:r>
-                      <a:endParaRPr lang="en-US" sz="900" dirty="0">
-                        <a:latin typeface="Arial" charset="0"/>
-                        <a:ea typeface="Arial" charset="0"/>
-                        <a:cs typeface="Arial" charset="0"/>
-                      </a:endParaRPr>
-                    </a:p>
-                  </a:txBody>
-                  <a:tcPr marL="91440" marR="91440" marT="45720" marB="45720">
-                    <a:lnL w="6350" cap="flat" cmpd="sng" algn="ctr">
-                      <a:solidFill>
-                        <a:srgbClr val="CBD5E1"/>
-                      </a:solidFill>
-                      <a:prstDash val="solid"/>
-                      <a:round/>
-                      <a:headEnd type="none" w="med" len="med"/>
-                      <a:tailEnd type="none" w="med" len="med"/>
-                    </a:lnL>
-                    <a:lnR w="6350" cap="flat" cmpd="sng" algn="ctr">
-                      <a:solidFill>
-                        <a:srgbClr val="CBD5E1"/>
-                      </a:solidFill>
-                      <a:prstDash val="solid"/>
-                      <a:round/>
-                      <a:headEnd type="none" w="med" len="med"/>
-                      <a:tailEnd type="none" w="med" len="med"/>
-                    </a:lnR>
-                    <a:lnT w="6350" cap="flat" cmpd="sng" algn="ctr">
-                      <a:solidFill>
-                        <a:srgbClr val="CBD5E1"/>
-                      </a:solidFill>
-                      <a:prstDash val="solid"/>
-                      <a:round/>
-                      <a:headEnd type="none" w="med" len="med"/>
-                      <a:tailEnd type="none" w="med" len="med"/>
-                    </a:lnT>
-                    <a:lnB w="6350" cap="flat" cmpd="sng" algn="ctr">
-                      <a:solidFill>
-                        <a:srgbClr val="CBD5E1"/>
-                      </a:solidFill>
-                      <a:prstDash val="solid"/>
-                      <a:round/>
-                      <a:headEnd type="none" w="med" len="med"/>
-                      <a:tailEnd type="none" w="med" len="med"/>
-                    </a:lnB>
-                    <a:solidFill>
-                      <a:srgbClr val="E8EFF8"/>
-                    </a:solidFill>
-                  </a:tcPr>
-                </a:tc>
-                <a:tc>
-                  <a:txBody>
-                    <a:bodyPr/>
-                    <a:lstStyle/>
-                    <a:p>
-                      <a:pPr algn="ctr" indent="0" marL="0">
-                        <a:buNone/>
-                      </a:pPr>
-                      <a:r>
-                        <a:rPr lang="en-US" sz="900" dirty="0">
-                          <a:solidFill>
-                            <a:srgbClr val="000000"/>
-                          </a:solidFill>
-                          <a:latin typeface="Arial" pitchFamily="34" charset="0"/>
-                          <a:ea typeface="Arial" pitchFamily="34" charset="-122"/>
-                          <a:cs typeface="Arial" pitchFamily="34" charset="-120"/>
-                        </a:rPr>
-                        <a:t>/10</a:t>
-                      </a:r>
-                      <a:endParaRPr lang="en-US" sz="900" dirty="0">
-                        <a:latin typeface="Arial" charset="0"/>
-                        <a:ea typeface="Arial" charset="0"/>
-                        <a:cs typeface="Arial" charset="0"/>
-                      </a:endParaRPr>
-                    </a:p>
-                  </a:txBody>
-                  <a:tcPr marL="91440" marR="91440" marT="45720" marB="45720">
-                    <a:lnL w="6350" cap="flat" cmpd="sng" algn="ctr">
-                      <a:solidFill>
-                        <a:srgbClr val="CBD5E1"/>
-                      </a:solidFill>
-                      <a:prstDash val="solid"/>
-                      <a:round/>
-                      <a:headEnd type="none" w="med" len="med"/>
-                      <a:tailEnd type="none" w="med" len="med"/>
-                    </a:lnL>
-                    <a:lnR w="6350" cap="flat" cmpd="sng" algn="ctr">
-                      <a:solidFill>
-                        <a:srgbClr val="CBD5E1"/>
-                      </a:solidFill>
-                      <a:prstDash val="solid"/>
-                      <a:round/>
-                      <a:headEnd type="none" w="med" len="med"/>
-                      <a:tailEnd type="none" w="med" len="med"/>
-                    </a:lnR>
-                    <a:lnT w="6350" cap="flat" cmpd="sng" algn="ctr">
-                      <a:solidFill>
-                        <a:srgbClr val="CBD5E1"/>
-                      </a:solidFill>
-                      <a:prstDash val="solid"/>
-                      <a:round/>
-                      <a:headEnd type="none" w="med" len="med"/>
-                      <a:tailEnd type="none" w="med" len="med"/>
-                    </a:lnT>
-                    <a:lnB w="6350" cap="flat" cmpd="sng" algn="ctr">
-                      <a:solidFill>
-                        <a:srgbClr val="CBD5E1"/>
-                      </a:solidFill>
-                      <a:prstDash val="solid"/>
-                      <a:round/>
-                      <a:headEnd type="none" w="med" len="med"/>
-                      <a:tailEnd type="none" w="med" len="med"/>
-                    </a:lnB>
-                    <a:solidFill>
-                      <a:srgbClr val="E8EFF8"/>
-                    </a:solidFill>
-                  </a:tcPr>
-                </a:tc>
-                <a:tc>
-                  <a:txBody>
-                    <a:bodyPr/>
-                    <a:lstStyle/>
-                    <a:p>
-                      <a:pPr algn="ctr" indent="0" marL="0">
-                        <a:buNone/>
-                      </a:pPr>
-                      <a:r>
-                        <a:rPr lang="en-US" sz="900" dirty="0">
-                          <a:solidFill>
-                            <a:srgbClr val="000000"/>
-                          </a:solidFill>
-                          <a:latin typeface="Arial" pitchFamily="34" charset="0"/>
-                          <a:ea typeface="Arial" pitchFamily="34" charset="-122"/>
-                          <a:cs typeface="Arial" pitchFamily="34" charset="-120"/>
-                        </a:rPr>
-                        <a:t>8.67</a:t>
-                      </a:r>
-                      <a:endParaRPr lang="en-US" sz="900" dirty="0">
-                        <a:latin typeface="Arial" charset="0"/>
-                        <a:ea typeface="Arial" charset="0"/>
-                        <a:cs typeface="Arial" charset="0"/>
-                      </a:endParaRPr>
-                    </a:p>
-                  </a:txBody>
-                  <a:tcPr marL="91440" marR="91440" marT="45720" marB="45720">
-                    <a:lnL w="6350" cap="flat" cmpd="sng" algn="ctr">
-                      <a:solidFill>
-                        <a:srgbClr val="CBD5E1"/>
-                      </a:solidFill>
-                      <a:prstDash val="solid"/>
-                      <a:round/>
-                      <a:headEnd type="none" w="med" len="med"/>
-                      <a:tailEnd type="none" w="med" len="med"/>
-                    </a:lnL>
-                    <a:lnR w="6350" cap="flat" cmpd="sng" algn="ctr">
-                      <a:solidFill>
-                        <a:srgbClr val="CBD5E1"/>
-                      </a:solidFill>
-                      <a:prstDash val="solid"/>
-                      <a:round/>
-                      <a:headEnd type="none" w="med" len="med"/>
-                      <a:tailEnd type="none" w="med" len="med"/>
-                    </a:lnR>
-                    <a:lnT w="6350" cap="flat" cmpd="sng" algn="ctr">
-                      <a:solidFill>
-                        <a:srgbClr val="CBD5E1"/>
-                      </a:solidFill>
-                      <a:prstDash val="solid"/>
-                      <a:round/>
-                      <a:headEnd type="none" w="med" len="med"/>
-                      <a:tailEnd type="none" w="med" len="med"/>
-                    </a:lnT>
-                    <a:lnB w="6350" cap="flat" cmpd="sng" algn="ctr">
-                      <a:solidFill>
-                        <a:srgbClr val="CBD5E1"/>
-                      </a:solidFill>
-                      <a:prstDash val="solid"/>
-                      <a:round/>
-                      <a:headEnd type="none" w="med" len="med"/>
-                      <a:tailEnd type="none" w="med" len="med"/>
-                    </a:lnB>
-                    <a:solidFill>
-                      <a:srgbClr val="E8EFF8"/>
-                    </a:solidFill>
-                  </a:tcPr>
-                </a:tc>
-              </a:tr>
-              <a:tr h="201168">
-                <a:tc>
-                  <a:txBody>
-                    <a:bodyPr/>
-                    <a:lstStyle/>
-                    <a:p>
-                      <a:pPr algn="ctr" indent="0" marL="0">
-                        <a:buNone/>
-                      </a:pPr>
-                      <a:r>
-                        <a:rPr lang="en-US" sz="900" dirty="0">
-                          <a:solidFill>
-                            <a:srgbClr val="000000"/>
-                          </a:solidFill>
-                          <a:latin typeface="Arial" pitchFamily="34" charset="0"/>
-                          <a:ea typeface="Arial" pitchFamily="34" charset="-122"/>
-                          <a:cs typeface="Arial" pitchFamily="34" charset="-120"/>
-                        </a:rPr>
-                        <a:t>じゃらん</a:t>
-                      </a:r>
-                      <a:endParaRPr lang="en-US" sz="900" dirty="0">
-                        <a:latin typeface="Arial" charset="0"/>
-                        <a:ea typeface="Arial" charset="0"/>
-                        <a:cs typeface="Arial" charset="0"/>
-                      </a:endParaRPr>
-                    </a:p>
-                  </a:txBody>
-                  <a:tcPr marL="91440" marR="91440" marT="45720" marB="45720">
-                    <a:lnL w="6350" cap="flat" cmpd="sng" algn="ctr">
-                      <a:solidFill>
-                        <a:srgbClr val="CBD5E1"/>
-                      </a:solidFill>
-                      <a:prstDash val="solid"/>
-                      <a:round/>
-                      <a:headEnd type="none" w="med" len="med"/>
-                      <a:tailEnd type="none" w="med" len="med"/>
-                    </a:lnL>
-                    <a:lnR w="6350" cap="flat" cmpd="sng" algn="ctr">
-                      <a:solidFill>
-                        <a:srgbClr val="CBD5E1"/>
-                      </a:solidFill>
-                      <a:prstDash val="solid"/>
-                      <a:round/>
-                      <a:headEnd type="none" w="med" len="med"/>
-                      <a:tailEnd type="none" w="med" len="med"/>
-                    </a:lnR>
-                    <a:lnT w="6350" cap="flat" cmpd="sng" algn="ctr">
-                      <a:solidFill>
-                        <a:srgbClr val="CBD5E1"/>
-                      </a:solidFill>
-                      <a:prstDash val="solid"/>
-                      <a:round/>
-                      <a:headEnd type="none" w="med" len="med"/>
-                      <a:tailEnd type="none" w="med" len="med"/>
-                    </a:lnT>
-                    <a:lnB w="6350" cap="flat" cmpd="sng" algn="ctr">
-                      <a:solidFill>
-                        <a:srgbClr val="CBD5E1"/>
-                      </a:solidFill>
-                      <a:prstDash val="solid"/>
-                      <a:round/>
-                      <a:headEnd type="none" w="med" len="med"/>
-                      <a:tailEnd type="none" w="med" len="med"/>
-                    </a:lnB>
-                    <a:solidFill>
-                      <a:srgbClr val="FFFFFF"/>
-                    </a:solidFill>
-                  </a:tcPr>
-                </a:tc>
-                <a:tc>
-                  <a:txBody>
-                    <a:bodyPr/>
-                    <a:lstStyle/>
-                    <a:p>
-                      <a:pPr algn="ctr" indent="0" marL="0">
-                        <a:buNone/>
-                      </a:pPr>
-                      <a:r>
-                        <a:rPr lang="en-US" sz="900" dirty="0">
-                          <a:solidFill>
-                            <a:srgbClr val="000000"/>
-                          </a:solidFill>
-                          <a:latin typeface="Arial" pitchFamily="34" charset="0"/>
-                          <a:ea typeface="Arial" pitchFamily="34" charset="-122"/>
-                          <a:cs typeface="Arial" pitchFamily="34" charset="-120"/>
-                        </a:rPr>
-                        <a:t>38</a:t>
-                      </a:r>
-                      <a:endParaRPr lang="en-US" sz="900" dirty="0">
-                        <a:latin typeface="Arial" charset="0"/>
-                        <a:ea typeface="Arial" charset="0"/>
-                        <a:cs typeface="Arial" charset="0"/>
-                      </a:endParaRPr>
-                    </a:p>
-                  </a:txBody>
-                  <a:tcPr marL="91440" marR="91440" marT="45720" marB="45720">
-                    <a:lnL w="6350" cap="flat" cmpd="sng" algn="ctr">
-                      <a:solidFill>
-                        <a:srgbClr val="CBD5E1"/>
-                      </a:solidFill>
-                      <a:prstDash val="solid"/>
-                      <a:round/>
-                      <a:headEnd type="none" w="med" len="med"/>
-                      <a:tailEnd type="none" w="med" len="med"/>
-                    </a:lnL>
-                    <a:lnR w="6350" cap="flat" cmpd="sng" algn="ctr">
-                      <a:solidFill>
-                        <a:srgbClr val="CBD5E1"/>
-                      </a:solidFill>
-                      <a:prstDash val="solid"/>
-                      <a:round/>
-                      <a:headEnd type="none" w="med" len="med"/>
-                      <a:tailEnd type="none" w="med" len="med"/>
-                    </a:lnR>
-                    <a:lnT w="6350" cap="flat" cmpd="sng" algn="ctr">
-                      <a:solidFill>
-                        <a:srgbClr val="CBD5E1"/>
-                      </a:solidFill>
-                      <a:prstDash val="solid"/>
-                      <a:round/>
-                      <a:headEnd type="none" w="med" len="med"/>
-                      <a:tailEnd type="none" w="med" len="med"/>
-                    </a:lnT>
-                    <a:lnB w="6350" cap="flat" cmpd="sng" algn="ctr">
-                      <a:solidFill>
-                        <a:srgbClr val="CBD5E1"/>
-                      </a:solidFill>
-                      <a:prstDash val="solid"/>
-                      <a:round/>
-                      <a:headEnd type="none" w="med" len="med"/>
-                      <a:tailEnd type="none" w="med" len="med"/>
-                    </a:lnB>
-                    <a:solidFill>
-                      <a:srgbClr val="FFFFFF"/>
-                    </a:solidFill>
-                  </a:tcPr>
-                </a:tc>
-                <a:tc>
-                  <a:txBody>
-                    <a:bodyPr/>
-                    <a:lstStyle/>
-                    <a:p>
-                      <a:pPr algn="ctr" indent="0" marL="0">
-                        <a:buNone/>
-                      </a:pPr>
-                      <a:r>
-                        <a:rPr lang="en-US" sz="900" dirty="0">
-                          <a:solidFill>
-                            <a:srgbClr val="000000"/>
-                          </a:solidFill>
-                          <a:latin typeface="Arial" pitchFamily="34" charset="0"/>
-                          <a:ea typeface="Arial" pitchFamily="34" charset="-122"/>
-                          <a:cs typeface="Arial" pitchFamily="34" charset="-120"/>
-                        </a:rPr>
-                        <a:t>4.24</a:t>
-                      </a:r>
-                      <a:endParaRPr lang="en-US" sz="900" dirty="0">
-                        <a:latin typeface="Arial" charset="0"/>
-                        <a:ea typeface="Arial" charset="0"/>
-                        <a:cs typeface="Arial" charset="0"/>
-                      </a:endParaRPr>
-                    </a:p>
-                  </a:txBody>
-                  <a:tcPr marL="91440" marR="91440" marT="45720" marB="45720">
-                    <a:lnL w="6350" cap="flat" cmpd="sng" algn="ctr">
-                      <a:solidFill>
-                        <a:srgbClr val="CBD5E1"/>
-                      </a:solidFill>
-                      <a:prstDash val="solid"/>
-                      <a:round/>
-                      <a:headEnd type="none" w="med" len="med"/>
-                      <a:tailEnd type="none" w="med" len="med"/>
-                    </a:lnL>
-                    <a:lnR w="6350" cap="flat" cmpd="sng" algn="ctr">
-                      <a:solidFill>
-                        <a:srgbClr val="CBD5E1"/>
-                      </a:solidFill>
-                      <a:prstDash val="solid"/>
-                      <a:round/>
-                      <a:headEnd type="none" w="med" len="med"/>
-                      <a:tailEnd type="none" w="med" len="med"/>
-                    </a:lnR>
-                    <a:lnT w="6350" cap="flat" cmpd="sng" algn="ctr">
-                      <a:solidFill>
-                        <a:srgbClr val="CBD5E1"/>
-                      </a:solidFill>
-                      <a:prstDash val="solid"/>
-                      <a:round/>
-                      <a:headEnd type="none" w="med" len="med"/>
-                      <a:tailEnd type="none" w="med" len="med"/>
-                    </a:lnT>
-                    <a:lnB w="6350" cap="flat" cmpd="sng" algn="ctr">
-                      <a:solidFill>
-                        <a:srgbClr val="CBD5E1"/>
-                      </a:solidFill>
-                      <a:prstDash val="solid"/>
-                      <a:round/>
-                      <a:headEnd type="none" w="med" len="med"/>
-                      <a:tailEnd type="none" w="med" len="med"/>
-                    </a:lnB>
-                    <a:solidFill>
-                      <a:srgbClr val="FFFFFF"/>
-                    </a:solidFill>
-                  </a:tcPr>
-                </a:tc>
-                <a:tc>
-                  <a:txBody>
-                    <a:bodyPr/>
-                    <a:lstStyle/>
-                    <a:p>
-                      <a:pPr algn="ctr" indent="0" marL="0">
-                        <a:buNone/>
-                      </a:pPr>
-                      <a:r>
-                        <a:rPr lang="en-US" sz="900" dirty="0">
-                          <a:solidFill>
-                            <a:srgbClr val="000000"/>
-                          </a:solidFill>
-                          <a:latin typeface="Arial" pitchFamily="34" charset="0"/>
-                          <a:ea typeface="Arial" pitchFamily="34" charset="-122"/>
-                          <a:cs typeface="Arial" pitchFamily="34" charset="-120"/>
-                        </a:rPr>
-                        <a:t>/5 (×2)</a:t>
-                      </a:r>
-                      <a:endParaRPr lang="en-US" sz="900" dirty="0">
-                        <a:latin typeface="Arial" charset="0"/>
-                        <a:ea typeface="Arial" charset="0"/>
-                        <a:cs typeface="Arial" charset="0"/>
-                      </a:endParaRPr>
-                    </a:p>
-                  </a:txBody>
-                  <a:tcPr marL="91440" marR="91440" marT="45720" marB="45720">
-                    <a:lnL w="6350" cap="flat" cmpd="sng" algn="ctr">
-                      <a:solidFill>
-                        <a:srgbClr val="CBD5E1"/>
-                      </a:solidFill>
-                      <a:prstDash val="solid"/>
-                      <a:round/>
-                      <a:headEnd type="none" w="med" len="med"/>
-                      <a:tailEnd type="none" w="med" len="med"/>
-                    </a:lnL>
-                    <a:lnR w="6350" cap="flat" cmpd="sng" algn="ctr">
-                      <a:solidFill>
-                        <a:srgbClr val="CBD5E1"/>
-                      </a:solidFill>
-                      <a:prstDash val="solid"/>
-                      <a:round/>
-                      <a:headEnd type="none" w="med" len="med"/>
-                      <a:tailEnd type="none" w="med" len="med"/>
-                    </a:lnR>
-                    <a:lnT w="6350" cap="flat" cmpd="sng" algn="ctr">
-                      <a:solidFill>
-                        <a:srgbClr val="CBD5E1"/>
-                      </a:solidFill>
-                      <a:prstDash val="solid"/>
-                      <a:round/>
-                      <a:headEnd type="none" w="med" len="med"/>
-                      <a:tailEnd type="none" w="med" len="med"/>
-                    </a:lnT>
-                    <a:lnB w="6350" cap="flat" cmpd="sng" algn="ctr">
-                      <a:solidFill>
-                        <a:srgbClr val="CBD5E1"/>
-                      </a:solidFill>
-                      <a:prstDash val="solid"/>
-                      <a:round/>
-                      <a:headEnd type="none" w="med" len="med"/>
-                      <a:tailEnd type="none" w="med" len="med"/>
-                    </a:lnB>
-                    <a:solidFill>
-                      <a:srgbClr val="FFFFFF"/>
-                    </a:solidFill>
-                  </a:tcPr>
-                </a:tc>
-                <a:tc>
-                  <a:txBody>
-                    <a:bodyPr/>
-                    <a:lstStyle/>
-                    <a:p>
-                      <a:pPr algn="ctr" indent="0" marL="0">
-                        <a:buNone/>
-                      </a:pPr>
-                      <a:r>
-                        <a:rPr lang="en-US" sz="900" dirty="0">
-                          <a:solidFill>
-                            <a:srgbClr val="000000"/>
-                          </a:solidFill>
-                          <a:latin typeface="Arial" pitchFamily="34" charset="0"/>
-                          <a:ea typeface="Arial" pitchFamily="34" charset="-122"/>
-                          <a:cs typeface="Arial" pitchFamily="34" charset="-120"/>
-                        </a:rPr>
-                        <a:t>8.47</a:t>
+                        <a:t>8.76</a:t>
                       </a:r>
                       <a:endParaRPr lang="en-US" sz="900" dirty="0">
                         <a:latin typeface="Arial" charset="0"/>
@@ -9245,7 +8544,7 @@
                           <a:ea typeface="Arial" pitchFamily="34" charset="-122"/>
                           <a:cs typeface="Arial" pitchFamily="34" charset="-120"/>
                         </a:rPr>
-                        <a:t>14</a:t>
+                        <a:t>11</a:t>
                       </a:r>
                       <a:endParaRPr lang="en-US" sz="900" dirty="0">
                         <a:latin typeface="Arial" charset="0"/>
@@ -9313,7 +8612,7 @@
                           <a:ea typeface="Arial" pitchFamily="34" charset="-122"/>
                           <a:cs typeface="Arial" pitchFamily="34" charset="-120"/>
                         </a:rPr>
-                        <a:t>8.36</a:t>
+                        <a:t>8.73</a:t>
                       </a:r>
                       <a:endParaRPr lang="en-US" sz="900" dirty="0">
                         <a:latin typeface="Arial" charset="0"/>
@@ -9449,7 +8748,691 @@
                           <a:ea typeface="Arial" pitchFamily="34" charset="-122"/>
                           <a:cs typeface="Arial" pitchFamily="34" charset="-120"/>
                         </a:rPr>
-                        <a:t>8.36</a:t>
+                        <a:t>8.73</a:t>
+                      </a:r>
+                      <a:endParaRPr lang="en-US" sz="900" dirty="0">
+                        <a:latin typeface="Arial" charset="0"/>
+                        <a:ea typeface="Arial" charset="0"/>
+                        <a:cs typeface="Arial" charset="0"/>
+                      </a:endParaRPr>
+                    </a:p>
+                  </a:txBody>
+                  <a:tcPr marL="91440" marR="91440" marT="45720" marB="45720">
+                    <a:lnL w="6350" cap="flat" cmpd="sng" algn="ctr">
+                      <a:solidFill>
+                        <a:srgbClr val="CBD5E1"/>
+                      </a:solidFill>
+                      <a:prstDash val="solid"/>
+                      <a:round/>
+                      <a:headEnd type="none" w="med" len="med"/>
+                      <a:tailEnd type="none" w="med" len="med"/>
+                    </a:lnL>
+                    <a:lnR w="6350" cap="flat" cmpd="sng" algn="ctr">
+                      <a:solidFill>
+                        <a:srgbClr val="CBD5E1"/>
+                      </a:solidFill>
+                      <a:prstDash val="solid"/>
+                      <a:round/>
+                      <a:headEnd type="none" w="med" len="med"/>
+                      <a:tailEnd type="none" w="med" len="med"/>
+                    </a:lnR>
+                    <a:lnT w="6350" cap="flat" cmpd="sng" algn="ctr">
+                      <a:solidFill>
+                        <a:srgbClr val="CBD5E1"/>
+                      </a:solidFill>
+                      <a:prstDash val="solid"/>
+                      <a:round/>
+                      <a:headEnd type="none" w="med" len="med"/>
+                      <a:tailEnd type="none" w="med" len="med"/>
+                    </a:lnT>
+                    <a:lnB w="6350" cap="flat" cmpd="sng" algn="ctr">
+                      <a:solidFill>
+                        <a:srgbClr val="CBD5E1"/>
+                      </a:solidFill>
+                      <a:prstDash val="solid"/>
+                      <a:round/>
+                      <a:headEnd type="none" w="med" len="med"/>
+                      <a:tailEnd type="none" w="med" len="med"/>
+                    </a:lnB>
+                    <a:solidFill>
+                      <a:srgbClr val="E8EFF8"/>
+                    </a:solidFill>
+                  </a:tcPr>
+                </a:tc>
+              </a:tr>
+              <a:tr h="201168">
+                <a:tc>
+                  <a:txBody>
+                    <a:bodyPr/>
+                    <a:lstStyle/>
+                    <a:p>
+                      <a:pPr algn="ctr" indent="0" marL="0">
+                        <a:buNone/>
+                      </a:pPr>
+                      <a:r>
+                        <a:rPr lang="en-US" sz="900" dirty="0">
+                          <a:solidFill>
+                            <a:srgbClr val="000000"/>
+                          </a:solidFill>
+                          <a:latin typeface="Arial" pitchFamily="34" charset="0"/>
+                          <a:ea typeface="Arial" pitchFamily="34" charset="-122"/>
+                          <a:cs typeface="Arial" pitchFamily="34" charset="-120"/>
+                        </a:rPr>
+                        <a:t>Booking.com</a:t>
+                      </a:r>
+                      <a:endParaRPr lang="en-US" sz="900" dirty="0">
+                        <a:latin typeface="Arial" charset="0"/>
+                        <a:ea typeface="Arial" charset="0"/>
+                        <a:cs typeface="Arial" charset="0"/>
+                      </a:endParaRPr>
+                    </a:p>
+                  </a:txBody>
+                  <a:tcPr marL="91440" marR="91440" marT="45720" marB="45720">
+                    <a:lnL w="6350" cap="flat" cmpd="sng" algn="ctr">
+                      <a:solidFill>
+                        <a:srgbClr val="CBD5E1"/>
+                      </a:solidFill>
+                      <a:prstDash val="solid"/>
+                      <a:round/>
+                      <a:headEnd type="none" w="med" len="med"/>
+                      <a:tailEnd type="none" w="med" len="med"/>
+                    </a:lnL>
+                    <a:lnR w="6350" cap="flat" cmpd="sng" algn="ctr">
+                      <a:solidFill>
+                        <a:srgbClr val="CBD5E1"/>
+                      </a:solidFill>
+                      <a:prstDash val="solid"/>
+                      <a:round/>
+                      <a:headEnd type="none" w="med" len="med"/>
+                      <a:tailEnd type="none" w="med" len="med"/>
+                    </a:lnR>
+                    <a:lnT w="6350" cap="flat" cmpd="sng" algn="ctr">
+                      <a:solidFill>
+                        <a:srgbClr val="CBD5E1"/>
+                      </a:solidFill>
+                      <a:prstDash val="solid"/>
+                      <a:round/>
+                      <a:headEnd type="none" w="med" len="med"/>
+                      <a:tailEnd type="none" w="med" len="med"/>
+                    </a:lnT>
+                    <a:lnB w="6350" cap="flat" cmpd="sng" algn="ctr">
+                      <a:solidFill>
+                        <a:srgbClr val="CBD5E1"/>
+                      </a:solidFill>
+                      <a:prstDash val="solid"/>
+                      <a:round/>
+                      <a:headEnd type="none" w="med" len="med"/>
+                      <a:tailEnd type="none" w="med" len="med"/>
+                    </a:lnB>
+                    <a:solidFill>
+                      <a:srgbClr val="FFFFFF"/>
+                    </a:solidFill>
+                  </a:tcPr>
+                </a:tc>
+                <a:tc>
+                  <a:txBody>
+                    <a:bodyPr/>
+                    <a:lstStyle/>
+                    <a:p>
+                      <a:pPr algn="ctr" indent="0" marL="0">
+                        <a:buNone/>
+                      </a:pPr>
+                      <a:r>
+                        <a:rPr lang="en-US" sz="900" dirty="0">
+                          <a:solidFill>
+                            <a:srgbClr val="000000"/>
+                          </a:solidFill>
+                          <a:latin typeface="Arial" pitchFamily="34" charset="0"/>
+                          <a:ea typeface="Arial" pitchFamily="34" charset="-122"/>
+                          <a:cs typeface="Arial" pitchFamily="34" charset="-120"/>
+                        </a:rPr>
+                        <a:t>20</a:t>
+                      </a:r>
+                      <a:endParaRPr lang="en-US" sz="900" dirty="0">
+                        <a:latin typeface="Arial" charset="0"/>
+                        <a:ea typeface="Arial" charset="0"/>
+                        <a:cs typeface="Arial" charset="0"/>
+                      </a:endParaRPr>
+                    </a:p>
+                  </a:txBody>
+                  <a:tcPr marL="91440" marR="91440" marT="45720" marB="45720">
+                    <a:lnL w="6350" cap="flat" cmpd="sng" algn="ctr">
+                      <a:solidFill>
+                        <a:srgbClr val="CBD5E1"/>
+                      </a:solidFill>
+                      <a:prstDash val="solid"/>
+                      <a:round/>
+                      <a:headEnd type="none" w="med" len="med"/>
+                      <a:tailEnd type="none" w="med" len="med"/>
+                    </a:lnL>
+                    <a:lnR w="6350" cap="flat" cmpd="sng" algn="ctr">
+                      <a:solidFill>
+                        <a:srgbClr val="CBD5E1"/>
+                      </a:solidFill>
+                      <a:prstDash val="solid"/>
+                      <a:round/>
+                      <a:headEnd type="none" w="med" len="med"/>
+                      <a:tailEnd type="none" w="med" len="med"/>
+                    </a:lnR>
+                    <a:lnT w="6350" cap="flat" cmpd="sng" algn="ctr">
+                      <a:solidFill>
+                        <a:srgbClr val="CBD5E1"/>
+                      </a:solidFill>
+                      <a:prstDash val="solid"/>
+                      <a:round/>
+                      <a:headEnd type="none" w="med" len="med"/>
+                      <a:tailEnd type="none" w="med" len="med"/>
+                    </a:lnT>
+                    <a:lnB w="6350" cap="flat" cmpd="sng" algn="ctr">
+                      <a:solidFill>
+                        <a:srgbClr val="CBD5E1"/>
+                      </a:solidFill>
+                      <a:prstDash val="solid"/>
+                      <a:round/>
+                      <a:headEnd type="none" w="med" len="med"/>
+                      <a:tailEnd type="none" w="med" len="med"/>
+                    </a:lnB>
+                    <a:solidFill>
+                      <a:srgbClr val="FFFFFF"/>
+                    </a:solidFill>
+                  </a:tcPr>
+                </a:tc>
+                <a:tc>
+                  <a:txBody>
+                    <a:bodyPr/>
+                    <a:lstStyle/>
+                    <a:p>
+                      <a:pPr algn="ctr" indent="0" marL="0">
+                        <a:buNone/>
+                      </a:pPr>
+                      <a:r>
+                        <a:rPr lang="en-US" sz="900" dirty="0">
+                          <a:solidFill>
+                            <a:srgbClr val="000000"/>
+                          </a:solidFill>
+                          <a:latin typeface="Arial" pitchFamily="34" charset="0"/>
+                          <a:ea typeface="Arial" pitchFamily="34" charset="-122"/>
+                          <a:cs typeface="Arial" pitchFamily="34" charset="-120"/>
+                        </a:rPr>
+                        <a:t>8.55</a:t>
+                      </a:r>
+                      <a:endParaRPr lang="en-US" sz="900" dirty="0">
+                        <a:latin typeface="Arial" charset="0"/>
+                        <a:ea typeface="Arial" charset="0"/>
+                        <a:cs typeface="Arial" charset="0"/>
+                      </a:endParaRPr>
+                    </a:p>
+                  </a:txBody>
+                  <a:tcPr marL="91440" marR="91440" marT="45720" marB="45720">
+                    <a:lnL w="6350" cap="flat" cmpd="sng" algn="ctr">
+                      <a:solidFill>
+                        <a:srgbClr val="CBD5E1"/>
+                      </a:solidFill>
+                      <a:prstDash val="solid"/>
+                      <a:round/>
+                      <a:headEnd type="none" w="med" len="med"/>
+                      <a:tailEnd type="none" w="med" len="med"/>
+                    </a:lnL>
+                    <a:lnR w="6350" cap="flat" cmpd="sng" algn="ctr">
+                      <a:solidFill>
+                        <a:srgbClr val="CBD5E1"/>
+                      </a:solidFill>
+                      <a:prstDash val="solid"/>
+                      <a:round/>
+                      <a:headEnd type="none" w="med" len="med"/>
+                      <a:tailEnd type="none" w="med" len="med"/>
+                    </a:lnR>
+                    <a:lnT w="6350" cap="flat" cmpd="sng" algn="ctr">
+                      <a:solidFill>
+                        <a:srgbClr val="CBD5E1"/>
+                      </a:solidFill>
+                      <a:prstDash val="solid"/>
+                      <a:round/>
+                      <a:headEnd type="none" w="med" len="med"/>
+                      <a:tailEnd type="none" w="med" len="med"/>
+                    </a:lnT>
+                    <a:lnB w="6350" cap="flat" cmpd="sng" algn="ctr">
+                      <a:solidFill>
+                        <a:srgbClr val="CBD5E1"/>
+                      </a:solidFill>
+                      <a:prstDash val="solid"/>
+                      <a:round/>
+                      <a:headEnd type="none" w="med" len="med"/>
+                      <a:tailEnd type="none" w="med" len="med"/>
+                    </a:lnB>
+                    <a:solidFill>
+                      <a:srgbClr val="FFFFFF"/>
+                    </a:solidFill>
+                  </a:tcPr>
+                </a:tc>
+                <a:tc>
+                  <a:txBody>
+                    <a:bodyPr/>
+                    <a:lstStyle/>
+                    <a:p>
+                      <a:pPr algn="ctr" indent="0" marL="0">
+                        <a:buNone/>
+                      </a:pPr>
+                      <a:r>
+                        <a:rPr lang="en-US" sz="900" dirty="0">
+                          <a:solidFill>
+                            <a:srgbClr val="000000"/>
+                          </a:solidFill>
+                          <a:latin typeface="Arial" pitchFamily="34" charset="0"/>
+                          <a:ea typeface="Arial" pitchFamily="34" charset="-122"/>
+                          <a:cs typeface="Arial" pitchFamily="34" charset="-120"/>
+                        </a:rPr>
+                        <a:t>/10</a:t>
+                      </a:r>
+                      <a:endParaRPr lang="en-US" sz="900" dirty="0">
+                        <a:latin typeface="Arial" charset="0"/>
+                        <a:ea typeface="Arial" charset="0"/>
+                        <a:cs typeface="Arial" charset="0"/>
+                      </a:endParaRPr>
+                    </a:p>
+                  </a:txBody>
+                  <a:tcPr marL="91440" marR="91440" marT="45720" marB="45720">
+                    <a:lnL w="6350" cap="flat" cmpd="sng" algn="ctr">
+                      <a:solidFill>
+                        <a:srgbClr val="CBD5E1"/>
+                      </a:solidFill>
+                      <a:prstDash val="solid"/>
+                      <a:round/>
+                      <a:headEnd type="none" w="med" len="med"/>
+                      <a:tailEnd type="none" w="med" len="med"/>
+                    </a:lnL>
+                    <a:lnR w="6350" cap="flat" cmpd="sng" algn="ctr">
+                      <a:solidFill>
+                        <a:srgbClr val="CBD5E1"/>
+                      </a:solidFill>
+                      <a:prstDash val="solid"/>
+                      <a:round/>
+                      <a:headEnd type="none" w="med" len="med"/>
+                      <a:tailEnd type="none" w="med" len="med"/>
+                    </a:lnR>
+                    <a:lnT w="6350" cap="flat" cmpd="sng" algn="ctr">
+                      <a:solidFill>
+                        <a:srgbClr val="CBD5E1"/>
+                      </a:solidFill>
+                      <a:prstDash val="solid"/>
+                      <a:round/>
+                      <a:headEnd type="none" w="med" len="med"/>
+                      <a:tailEnd type="none" w="med" len="med"/>
+                    </a:lnT>
+                    <a:lnB w="6350" cap="flat" cmpd="sng" algn="ctr">
+                      <a:solidFill>
+                        <a:srgbClr val="CBD5E1"/>
+                      </a:solidFill>
+                      <a:prstDash val="solid"/>
+                      <a:round/>
+                      <a:headEnd type="none" w="med" len="med"/>
+                      <a:tailEnd type="none" w="med" len="med"/>
+                    </a:lnB>
+                    <a:solidFill>
+                      <a:srgbClr val="FFFFFF"/>
+                    </a:solidFill>
+                  </a:tcPr>
+                </a:tc>
+                <a:tc>
+                  <a:txBody>
+                    <a:bodyPr/>
+                    <a:lstStyle/>
+                    <a:p>
+                      <a:pPr algn="ctr" indent="0" marL="0">
+                        <a:buNone/>
+                      </a:pPr>
+                      <a:r>
+                        <a:rPr lang="en-US" sz="900" dirty="0">
+                          <a:solidFill>
+                            <a:srgbClr val="000000"/>
+                          </a:solidFill>
+                          <a:latin typeface="Arial" pitchFamily="34" charset="0"/>
+                          <a:ea typeface="Arial" pitchFamily="34" charset="-122"/>
+                          <a:cs typeface="Arial" pitchFamily="34" charset="-120"/>
+                        </a:rPr>
+                        <a:t>8.55</a:t>
+                      </a:r>
+                      <a:endParaRPr lang="en-US" sz="900" dirty="0">
+                        <a:latin typeface="Arial" charset="0"/>
+                        <a:ea typeface="Arial" charset="0"/>
+                        <a:cs typeface="Arial" charset="0"/>
+                      </a:endParaRPr>
+                    </a:p>
+                  </a:txBody>
+                  <a:tcPr marL="91440" marR="91440" marT="45720" marB="45720">
+                    <a:lnL w="6350" cap="flat" cmpd="sng" algn="ctr">
+                      <a:solidFill>
+                        <a:srgbClr val="CBD5E1"/>
+                      </a:solidFill>
+                      <a:prstDash val="solid"/>
+                      <a:round/>
+                      <a:headEnd type="none" w="med" len="med"/>
+                      <a:tailEnd type="none" w="med" len="med"/>
+                    </a:lnL>
+                    <a:lnR w="6350" cap="flat" cmpd="sng" algn="ctr">
+                      <a:solidFill>
+                        <a:srgbClr val="CBD5E1"/>
+                      </a:solidFill>
+                      <a:prstDash val="solid"/>
+                      <a:round/>
+                      <a:headEnd type="none" w="med" len="med"/>
+                      <a:tailEnd type="none" w="med" len="med"/>
+                    </a:lnR>
+                    <a:lnT w="6350" cap="flat" cmpd="sng" algn="ctr">
+                      <a:solidFill>
+                        <a:srgbClr val="CBD5E1"/>
+                      </a:solidFill>
+                      <a:prstDash val="solid"/>
+                      <a:round/>
+                      <a:headEnd type="none" w="med" len="med"/>
+                      <a:tailEnd type="none" w="med" len="med"/>
+                    </a:lnT>
+                    <a:lnB w="6350" cap="flat" cmpd="sng" algn="ctr">
+                      <a:solidFill>
+                        <a:srgbClr val="CBD5E1"/>
+                      </a:solidFill>
+                      <a:prstDash val="solid"/>
+                      <a:round/>
+                      <a:headEnd type="none" w="med" len="med"/>
+                      <a:tailEnd type="none" w="med" len="med"/>
+                    </a:lnB>
+                    <a:solidFill>
+                      <a:srgbClr val="FFFFFF"/>
+                    </a:solidFill>
+                  </a:tcPr>
+                </a:tc>
+              </a:tr>
+              <a:tr h="201168">
+                <a:tc>
+                  <a:txBody>
+                    <a:bodyPr/>
+                    <a:lstStyle/>
+                    <a:p>
+                      <a:pPr algn="ctr" indent="0" marL="0">
+                        <a:buNone/>
+                      </a:pPr>
+                      <a:r>
+                        <a:rPr lang="en-US" sz="900" dirty="0">
+                          <a:solidFill>
+                            <a:srgbClr val="000000"/>
+                          </a:solidFill>
+                          <a:latin typeface="Arial" pitchFamily="34" charset="0"/>
+                          <a:ea typeface="Arial" pitchFamily="34" charset="-122"/>
+                          <a:cs typeface="Arial" pitchFamily="34" charset="-120"/>
+                        </a:rPr>
+                        <a:t>じゃらん</a:t>
+                      </a:r>
+                      <a:endParaRPr lang="en-US" sz="900" dirty="0">
+                        <a:latin typeface="Arial" charset="0"/>
+                        <a:ea typeface="Arial" charset="0"/>
+                        <a:cs typeface="Arial" charset="0"/>
+                      </a:endParaRPr>
+                    </a:p>
+                  </a:txBody>
+                  <a:tcPr marL="91440" marR="91440" marT="45720" marB="45720">
+                    <a:lnL w="6350" cap="flat" cmpd="sng" algn="ctr">
+                      <a:solidFill>
+                        <a:srgbClr val="CBD5E1"/>
+                      </a:solidFill>
+                      <a:prstDash val="solid"/>
+                      <a:round/>
+                      <a:headEnd type="none" w="med" len="med"/>
+                      <a:tailEnd type="none" w="med" len="med"/>
+                    </a:lnL>
+                    <a:lnR w="6350" cap="flat" cmpd="sng" algn="ctr">
+                      <a:solidFill>
+                        <a:srgbClr val="CBD5E1"/>
+                      </a:solidFill>
+                      <a:prstDash val="solid"/>
+                      <a:round/>
+                      <a:headEnd type="none" w="med" len="med"/>
+                      <a:tailEnd type="none" w="med" len="med"/>
+                    </a:lnR>
+                    <a:lnT w="6350" cap="flat" cmpd="sng" algn="ctr">
+                      <a:solidFill>
+                        <a:srgbClr val="CBD5E1"/>
+                      </a:solidFill>
+                      <a:prstDash val="solid"/>
+                      <a:round/>
+                      <a:headEnd type="none" w="med" len="med"/>
+                      <a:tailEnd type="none" w="med" len="med"/>
+                    </a:lnT>
+                    <a:lnB w="6350" cap="flat" cmpd="sng" algn="ctr">
+                      <a:solidFill>
+                        <a:srgbClr val="CBD5E1"/>
+                      </a:solidFill>
+                      <a:prstDash val="solid"/>
+                      <a:round/>
+                      <a:headEnd type="none" w="med" len="med"/>
+                      <a:tailEnd type="none" w="med" len="med"/>
+                    </a:lnB>
+                    <a:solidFill>
+                      <a:srgbClr val="E8EFF8"/>
+                    </a:solidFill>
+                  </a:tcPr>
+                </a:tc>
+                <a:tc>
+                  <a:txBody>
+                    <a:bodyPr/>
+                    <a:lstStyle/>
+                    <a:p>
+                      <a:pPr algn="ctr" indent="0" marL="0">
+                        <a:buNone/>
+                      </a:pPr>
+                      <a:r>
+                        <a:rPr lang="en-US" sz="900" dirty="0">
+                          <a:solidFill>
+                            <a:srgbClr val="000000"/>
+                          </a:solidFill>
+                          <a:latin typeface="Arial" pitchFamily="34" charset="0"/>
+                          <a:ea typeface="Arial" pitchFamily="34" charset="-122"/>
+                          <a:cs typeface="Arial" pitchFamily="34" charset="-120"/>
+                        </a:rPr>
+                        <a:t>41</a:t>
+                      </a:r>
+                      <a:endParaRPr lang="en-US" sz="900" dirty="0">
+                        <a:latin typeface="Arial" charset="0"/>
+                        <a:ea typeface="Arial" charset="0"/>
+                        <a:cs typeface="Arial" charset="0"/>
+                      </a:endParaRPr>
+                    </a:p>
+                  </a:txBody>
+                  <a:tcPr marL="91440" marR="91440" marT="45720" marB="45720">
+                    <a:lnL w="6350" cap="flat" cmpd="sng" algn="ctr">
+                      <a:solidFill>
+                        <a:srgbClr val="CBD5E1"/>
+                      </a:solidFill>
+                      <a:prstDash val="solid"/>
+                      <a:round/>
+                      <a:headEnd type="none" w="med" len="med"/>
+                      <a:tailEnd type="none" w="med" len="med"/>
+                    </a:lnL>
+                    <a:lnR w="6350" cap="flat" cmpd="sng" algn="ctr">
+                      <a:solidFill>
+                        <a:srgbClr val="CBD5E1"/>
+                      </a:solidFill>
+                      <a:prstDash val="solid"/>
+                      <a:round/>
+                      <a:headEnd type="none" w="med" len="med"/>
+                      <a:tailEnd type="none" w="med" len="med"/>
+                    </a:lnR>
+                    <a:lnT w="6350" cap="flat" cmpd="sng" algn="ctr">
+                      <a:solidFill>
+                        <a:srgbClr val="CBD5E1"/>
+                      </a:solidFill>
+                      <a:prstDash val="solid"/>
+                      <a:round/>
+                      <a:headEnd type="none" w="med" len="med"/>
+                      <a:tailEnd type="none" w="med" len="med"/>
+                    </a:lnT>
+                    <a:lnB w="6350" cap="flat" cmpd="sng" algn="ctr">
+                      <a:solidFill>
+                        <a:srgbClr val="CBD5E1"/>
+                      </a:solidFill>
+                      <a:prstDash val="solid"/>
+                      <a:round/>
+                      <a:headEnd type="none" w="med" len="med"/>
+                      <a:tailEnd type="none" w="med" len="med"/>
+                    </a:lnB>
+                    <a:solidFill>
+                      <a:srgbClr val="E8EFF8"/>
+                    </a:solidFill>
+                  </a:tcPr>
+                </a:tc>
+                <a:tc>
+                  <a:txBody>
+                    <a:bodyPr/>
+                    <a:lstStyle/>
+                    <a:p>
+                      <a:pPr algn="ctr" indent="0" marL="0">
+                        <a:buNone/>
+                      </a:pPr>
+                      <a:r>
+                        <a:rPr lang="en-US" sz="900" dirty="0">
+                          <a:solidFill>
+                            <a:srgbClr val="000000"/>
+                          </a:solidFill>
+                          <a:latin typeface="Arial" pitchFamily="34" charset="0"/>
+                          <a:ea typeface="Arial" pitchFamily="34" charset="-122"/>
+                          <a:cs typeface="Arial" pitchFamily="34" charset="-120"/>
+                        </a:rPr>
+                        <a:t>4.27</a:t>
+                      </a:r>
+                      <a:endParaRPr lang="en-US" sz="900" dirty="0">
+                        <a:latin typeface="Arial" charset="0"/>
+                        <a:ea typeface="Arial" charset="0"/>
+                        <a:cs typeface="Arial" charset="0"/>
+                      </a:endParaRPr>
+                    </a:p>
+                  </a:txBody>
+                  <a:tcPr marL="91440" marR="91440" marT="45720" marB="45720">
+                    <a:lnL w="6350" cap="flat" cmpd="sng" algn="ctr">
+                      <a:solidFill>
+                        <a:srgbClr val="CBD5E1"/>
+                      </a:solidFill>
+                      <a:prstDash val="solid"/>
+                      <a:round/>
+                      <a:headEnd type="none" w="med" len="med"/>
+                      <a:tailEnd type="none" w="med" len="med"/>
+                    </a:lnL>
+                    <a:lnR w="6350" cap="flat" cmpd="sng" algn="ctr">
+                      <a:solidFill>
+                        <a:srgbClr val="CBD5E1"/>
+                      </a:solidFill>
+                      <a:prstDash val="solid"/>
+                      <a:round/>
+                      <a:headEnd type="none" w="med" len="med"/>
+                      <a:tailEnd type="none" w="med" len="med"/>
+                    </a:lnR>
+                    <a:lnT w="6350" cap="flat" cmpd="sng" algn="ctr">
+                      <a:solidFill>
+                        <a:srgbClr val="CBD5E1"/>
+                      </a:solidFill>
+                      <a:prstDash val="solid"/>
+                      <a:round/>
+                      <a:headEnd type="none" w="med" len="med"/>
+                      <a:tailEnd type="none" w="med" len="med"/>
+                    </a:lnT>
+                    <a:lnB w="6350" cap="flat" cmpd="sng" algn="ctr">
+                      <a:solidFill>
+                        <a:srgbClr val="CBD5E1"/>
+                      </a:solidFill>
+                      <a:prstDash val="solid"/>
+                      <a:round/>
+                      <a:headEnd type="none" w="med" len="med"/>
+                      <a:tailEnd type="none" w="med" len="med"/>
+                    </a:lnB>
+                    <a:solidFill>
+                      <a:srgbClr val="E8EFF8"/>
+                    </a:solidFill>
+                  </a:tcPr>
+                </a:tc>
+                <a:tc>
+                  <a:txBody>
+                    <a:bodyPr/>
+                    <a:lstStyle/>
+                    <a:p>
+                      <a:pPr algn="ctr" indent="0" marL="0">
+                        <a:buNone/>
+                      </a:pPr>
+                      <a:r>
+                        <a:rPr lang="en-US" sz="900" dirty="0">
+                          <a:solidFill>
+                            <a:srgbClr val="000000"/>
+                          </a:solidFill>
+                          <a:latin typeface="Arial" pitchFamily="34" charset="0"/>
+                          <a:ea typeface="Arial" pitchFamily="34" charset="-122"/>
+                          <a:cs typeface="Arial" pitchFamily="34" charset="-120"/>
+                        </a:rPr>
+                        <a:t>/5 (×2)</a:t>
+                      </a:r>
+                      <a:endParaRPr lang="en-US" sz="900" dirty="0">
+                        <a:latin typeface="Arial" charset="0"/>
+                        <a:ea typeface="Arial" charset="0"/>
+                        <a:cs typeface="Arial" charset="0"/>
+                      </a:endParaRPr>
+                    </a:p>
+                  </a:txBody>
+                  <a:tcPr marL="91440" marR="91440" marT="45720" marB="45720">
+                    <a:lnL w="6350" cap="flat" cmpd="sng" algn="ctr">
+                      <a:solidFill>
+                        <a:srgbClr val="CBD5E1"/>
+                      </a:solidFill>
+                      <a:prstDash val="solid"/>
+                      <a:round/>
+                      <a:headEnd type="none" w="med" len="med"/>
+                      <a:tailEnd type="none" w="med" len="med"/>
+                    </a:lnL>
+                    <a:lnR w="6350" cap="flat" cmpd="sng" algn="ctr">
+                      <a:solidFill>
+                        <a:srgbClr val="CBD5E1"/>
+                      </a:solidFill>
+                      <a:prstDash val="solid"/>
+                      <a:round/>
+                      <a:headEnd type="none" w="med" len="med"/>
+                      <a:tailEnd type="none" w="med" len="med"/>
+                    </a:lnR>
+                    <a:lnT w="6350" cap="flat" cmpd="sng" algn="ctr">
+                      <a:solidFill>
+                        <a:srgbClr val="CBD5E1"/>
+                      </a:solidFill>
+                      <a:prstDash val="solid"/>
+                      <a:round/>
+                      <a:headEnd type="none" w="med" len="med"/>
+                      <a:tailEnd type="none" w="med" len="med"/>
+                    </a:lnT>
+                    <a:lnB w="6350" cap="flat" cmpd="sng" algn="ctr">
+                      <a:solidFill>
+                        <a:srgbClr val="CBD5E1"/>
+                      </a:solidFill>
+                      <a:prstDash val="solid"/>
+                      <a:round/>
+                      <a:headEnd type="none" w="med" len="med"/>
+                      <a:tailEnd type="none" w="med" len="med"/>
+                    </a:lnB>
+                    <a:solidFill>
+                      <a:srgbClr val="E8EFF8"/>
+                    </a:solidFill>
+                  </a:tcPr>
+                </a:tc>
+                <a:tc>
+                  <a:txBody>
+                    <a:bodyPr/>
+                    <a:lstStyle/>
+                    <a:p>
+                      <a:pPr algn="ctr" indent="0" marL="0">
+                        <a:buNone/>
+                      </a:pPr>
+                      <a:r>
+                        <a:rPr lang="en-US" sz="900" dirty="0">
+                          <a:solidFill>
+                            <a:srgbClr val="000000"/>
+                          </a:solidFill>
+                          <a:latin typeface="Arial" pitchFamily="34" charset="0"/>
+                          <a:ea typeface="Arial" pitchFamily="34" charset="-122"/>
+                          <a:cs typeface="Arial" pitchFamily="34" charset="-120"/>
+                        </a:rPr>
+                        <a:t>8.54</a:t>
                       </a:r>
                       <a:endParaRPr lang="en-US" sz="900" dirty="0">
                         <a:latin typeface="Arial" charset="0"/>
@@ -9587,7 +9570,7 @@
                           <a:ea typeface="Arial" pitchFamily="34" charset="-122"/>
                           <a:cs typeface="Arial" pitchFamily="34" charset="-120"/>
                         </a:rPr>
-                        <a:t>9</a:t>
+                        <a:t>8</a:t>
                       </a:r>
                       <a:endParaRPr lang="en-US" sz="900" dirty="0">
                         <a:latin typeface="Arial" charset="0"/>
@@ -9655,7 +9638,7 @@
                           <a:ea typeface="Arial" pitchFamily="34" charset="-122"/>
                           <a:cs typeface="Arial" pitchFamily="34" charset="-120"/>
                         </a:rPr>
-                        <a:t>4</a:t>
+                        <a:t>3.88</a:t>
                       </a:r>
                       <a:endParaRPr lang="en-US" sz="900" dirty="0">
                         <a:latin typeface="Arial" charset="0"/>
@@ -9791,7 +9774,7 @@
                           <a:ea typeface="Arial" pitchFamily="34" charset="-122"/>
                           <a:cs typeface="Arial" pitchFamily="34" charset="-120"/>
                         </a:rPr>
-                        <a:t>8</a:t>
+                        <a:t>7.75</a:t>
                       </a:r>
                       <a:endParaRPr lang="en-US" sz="900" dirty="0">
                         <a:latin typeface="Arial" charset="0"/>
@@ -10199,7 +10182,7 @@
                 <a:ea typeface="Arial" pitchFamily="34" charset="-122"/>
                 <a:cs typeface="Arial" pitchFamily="34" charset="-120"/>
               </a:rPr>
-              <a:t>118件（84.9%）</a:t>
+              <a:t>117件（84.8%）</a:t>
             </a:r>
             <a:endParaRPr lang="en-US" sz="1100" dirty="0"/>
           </a:p>
@@ -10297,7 +10280,7 @@
                 <a:ea typeface="Arial" pitchFamily="34" charset="-122"/>
                 <a:cs typeface="Arial" pitchFamily="34" charset="-120"/>
               </a:rPr>
-              <a:t>20件（14.4%）</a:t>
+              <a:t>20件（14.5%）</a:t>
             </a:r>
             <a:endParaRPr lang="en-US" sz="1100" dirty="0"/>
           </a:p>
@@ -10807,7 +10790,7 @@
                 <a:ea typeface="Arial" pitchFamily="34" charset="-122"/>
                 <a:cs typeface="Arial" pitchFamily="34" charset="-120"/>
               </a:rPr>
-              <a:t>乗り換えは面倒なのでりんかい線最寄駅の東雲駅まで徒歩（２０分位</a:t>
+              <a:t>駅からも近くて良かったです</a:t>
             </a:r>
             <a:endParaRPr lang="en-US" sz="900" dirty="0"/>
           </a:p>
@@ -10846,7 +10829,7 @@
                 <a:ea typeface="Arial" pitchFamily="34" charset="-122"/>
                 <a:cs typeface="Arial" pitchFamily="34" charset="-120"/>
               </a:rPr>
-              <a:t>「駅近で、翌日羽田空港まで電車で行こうと思っていましたが、ダイヤが乱れていて、急遽シャトルバスに変更しました」</a:t>
+              <a:t>「最寄り駅から近く、荷物が多かったので移動が楽で良かったです」</a:t>
             </a:r>
             <a:endParaRPr lang="en-US" sz="900" dirty="0"/>
           </a:p>
@@ -11030,7 +11013,7 @@
                 <a:ea typeface="Arial" pitchFamily="34" charset="-122"/>
                 <a:cs typeface="Arial" pitchFamily="34" charset="-120"/>
               </a:rPr>
-              <a:t>そして部屋は１７階で窓からは綺麗な景色が堪能出来ました</a:t>
+              <a:t>清潔で良かった 高さ制限のある車は、別の駐車場に停めるようになりますが、不便でした 高さ制限のある車は、別の駐車場...</a:t>
             </a:r>
             <a:endParaRPr lang="en-US" sz="900" dirty="0"/>
           </a:p>
@@ -11069,7 +11052,7 @@
                 <a:ea typeface="Arial" pitchFamily="34" charset="-122"/>
                 <a:cs typeface="Arial" pitchFamily="34" charset="-120"/>
               </a:rPr>
-              <a:t>「お部屋はきれいで、ベッドの寝心地が最高でした」</a:t>
+              <a:t>「お部屋も運良く海側だったので夜景も朝日もキレイでした」</a:t>
             </a:r>
             <a:endParaRPr lang="en-US" sz="900" dirty="0"/>
           </a:p>
@@ -11214,7 +11197,7 @@
                 <a:ea typeface="Arial" pitchFamily="34" charset="-122"/>
                 <a:cs typeface="Arial" pitchFamily="34" charset="-120"/>
               </a:rPr>
-              <a:t>快適さ・設備</a:t>
+              <a:t>スタッフの対応</a:t>
             </a:r>
             <a:endParaRPr lang="en-US" sz="1300" dirty="0"/>
           </a:p>
@@ -11253,7 +11236,7 @@
                 <a:ea typeface="Arial" pitchFamily="34" charset="-122"/>
                 <a:cs typeface="Arial" pitchFamily="34" charset="-120"/>
               </a:rPr>
-              <a:t>部屋も快適でした</a:t>
+              <a:t>深夜のチェックインになってしまったにもかかわらず親切に対応していただきました</a:t>
             </a:r>
             <a:endParaRPr lang="en-US" sz="900" dirty="0"/>
           </a:p>
@@ -11292,7 +11275,7 @@
                 <a:ea typeface="Arial" pitchFamily="34" charset="-122"/>
                 <a:cs typeface="Arial" pitchFamily="34" charset="-120"/>
               </a:rPr>
-              <a:t>「入国時や出国時の休憩には最適ですが、一泊以上は快適に過ごせないと思います」</a:t>
+              <a:t>「15時からチェックインなので14時前くらいからロビーで待っていたら(フロントからは離れていてスタッフには話しかけて...」</a:t>
             </a:r>
             <a:endParaRPr lang="en-US" sz="900" dirty="0"/>
           </a:p>
@@ -11437,7 +11420,7 @@
                 <a:ea typeface="Arial" pitchFamily="34" charset="-122"/>
                 <a:cs typeface="Arial" pitchFamily="34" charset="-120"/>
               </a:rPr>
-              <a:t>スタッフの対応</a:t>
+              <a:t>コンビニ・周辺施設</a:t>
             </a:r>
             <a:endParaRPr lang="en-US" sz="1300" dirty="0"/>
           </a:p>
@@ -11476,7 +11459,7 @@
                 <a:ea typeface="Arial" pitchFamily="34" charset="-122"/>
                 <a:cs typeface="Arial" pitchFamily="34" charset="-120"/>
               </a:rPr>
-              <a:t>割り箸をフロントでいただいて大変助かりました 割り箸をフロントでいただいて大変助かりました</a:t>
+              <a:t>コンビニが近くにあれば最高なのですが</a:t>
             </a:r>
             <a:endParaRPr lang="en-US" sz="900" dirty="0"/>
           </a:p>
@@ -11515,7 +11498,7 @@
                 <a:ea typeface="Arial" pitchFamily="34" charset="-122"/>
                 <a:cs typeface="Arial" pitchFamily="34" charset="-120"/>
               </a:rPr>
-              <a:t>「ライブ前に荷物を預けに行くと感じの良いスタッフさんが対応してくれて、ついでにチェックインも済ませることが出来て全て...」</a:t>
+              <a:t>「イオンが目の前なので時間潰しや買い物には困りません」</a:t>
             </a:r>
             <a:endParaRPr lang="en-US" sz="900" dirty="0"/>
           </a:p>
@@ -11660,7 +11643,7 @@
                 <a:ea typeface="Arial" pitchFamily="34" charset="-122"/>
                 <a:cs typeface="Arial" pitchFamily="34" charset="-120"/>
               </a:rPr>
-              <a:t>コンビニ・周辺施設</a:t>
+              <a:t>快適さ・設備</a:t>
             </a:r>
             <a:endParaRPr lang="en-US" sz="1300" dirty="0"/>
           </a:p>
@@ -11699,7 +11682,7 @@
                 <a:ea typeface="Arial" pitchFamily="34" charset="-122"/>
                 <a:cs typeface="Arial" pitchFamily="34" charset="-120"/>
               </a:rPr>
-              <a:t>目の前にはイオンがあるので買い物も出来て、そのすぐ隣にあるオーバルガーデンにはコンビニが集結しているので夜遅くなっ...</a:t>
+              <a:t>ベッドは寝心地がよくってぐっすりでした</a:t>
             </a:r>
             <a:endParaRPr lang="en-US" sz="900" dirty="0"/>
           </a:p>
@@ -11738,7 +11721,7 @@
                 <a:ea typeface="Arial" pitchFamily="34" charset="-122"/>
                 <a:cs typeface="Arial" pitchFamily="34" charset="-120"/>
               </a:rPr>
-              <a:t>「イオンモールも通りの向かいにあり、レストラン、ファミリーマート、セブンイレブン、釣り具店などがたくさんあります」</a:t>
+              <a:t>「部屋も快適でした」</a:t>
             </a:r>
             <a:endParaRPr lang="en-US" sz="900" dirty="0"/>
           </a:p>
@@ -11922,7 +11905,7 @@
                 <a:ea typeface="Arial" pitchFamily="34" charset="-122"/>
                 <a:cs typeface="Arial" pitchFamily="34" charset="-120"/>
               </a:rPr>
-              <a:t>直食がとても美味しかったです</a:t>
+              <a:t>朝ごはんのパンが温められず冷たいままだったのが残念でしたが、全体的に価格に対して満足度が高かったです</a:t>
             </a:r>
             <a:endParaRPr lang="en-US" sz="900" dirty="0"/>
           </a:p>
@@ -11961,7 +11944,7 @@
                 <a:ea typeface="Arial" pitchFamily="34" charset="-122"/>
                 <a:cs typeface="Arial" pitchFamily="34" charset="-120"/>
               </a:rPr>
-              <a:t>「朝食もビュッフェ式で和洋楽しめました」</a:t>
+              <a:t>「朝食は7時に行って正解、ひっきりなしに人が来ていました」</a:t>
             </a:r>
             <a:endParaRPr lang="en-US" sz="900" dirty="0"/>
           </a:p>
@@ -12651,7 +12634,7 @@
                           <a:ea typeface="Arial" pitchFamily="34" charset="-122"/>
                           <a:cs typeface="Arial" pitchFamily="34" charset="-120"/>
                         </a:rPr>
-                        <a:t>駅近で、翌日羽田空港まで電車で行こうと思っていましたが、ダイヤが乱れていて、急遽シャトルバスに変更しました</a:t>
+                        <a:t>羽田空港まで近くのバス停からリムジンバスも出ています</a:t>
                       </a:r>
                       <a:endParaRPr lang="en-US" sz="900" dirty="0">
                         <a:latin typeface="Arial" charset="0"/>
@@ -12719,7 +12702,7 @@
                           <a:ea typeface="Arial" pitchFamily="34" charset="-122"/>
                           <a:cs typeface="Arial" pitchFamily="34" charset="-120"/>
                         </a:rPr>
-                        <a:t>17件</a:t>
+                        <a:t>18件</a:t>
                       </a:r>
                       <a:endParaRPr lang="en-US" sz="900" dirty="0">
                         <a:latin typeface="Arial" charset="0"/>
@@ -12993,7 +12976,7 @@
                           <a:ea typeface="Arial" pitchFamily="34" charset="-122"/>
                           <a:cs typeface="Arial" pitchFamily="34" charset="-120"/>
                         </a:rPr>
-                        <a:t>12件</a:t>
+                        <a:t>9件</a:t>
                       </a:r>
                       <a:endParaRPr lang="en-US" sz="900" dirty="0">
                         <a:latin typeface="Arial" charset="0"/>
@@ -13131,7 +13114,7 @@
                           <a:ea typeface="Arial" pitchFamily="34" charset="-122"/>
                           <a:cs typeface="Arial" pitchFamily="34" charset="-120"/>
                         </a:rPr>
-                        <a:t>対応・サービスの不満</a:t>
+                        <a:t>部屋の狭さ</a:t>
                       </a:r>
                       <a:endParaRPr lang="en-US" sz="900" dirty="0">
                         <a:latin typeface="Arial" charset="0"/>
@@ -13199,7 +13182,7 @@
                           <a:ea typeface="Arial" pitchFamily="34" charset="-122"/>
                           <a:cs typeface="Arial" pitchFamily="34" charset="-120"/>
                         </a:rPr>
-                        <a:t>ただ、バスルームの臭いが生乾きのような臭い（たぶんシャワーカーテンからです）がしたのと、お湯の調整が難しかったのが...</a:t>
+                        <a:t>Affordable hotel stayed 6 nights room was small but worke...</a:t>
                       </a:r>
                       <a:endParaRPr lang="en-US" sz="900" dirty="0">
                         <a:latin typeface="Arial" charset="0"/>
@@ -13267,7 +13250,7 @@
                           <a:ea typeface="Arial" pitchFamily="34" charset="-122"/>
                           <a:cs typeface="Arial" pitchFamily="34" charset="-120"/>
                         </a:rPr>
-                        <a:t>7件</a:t>
+                        <a:t>5件</a:t>
                       </a:r>
                       <a:endParaRPr lang="en-US" sz="900" dirty="0">
                         <a:latin typeface="Arial" charset="0"/>
@@ -13405,7 +13388,7 @@
                           <a:ea typeface="Arial" pitchFamily="34" charset="-122"/>
                           <a:cs typeface="Arial" pitchFamily="34" charset="-120"/>
                         </a:rPr>
-                        <a:t>部屋の狭さ</a:t>
+                        <a:t>臭い・匂い</a:t>
                       </a:r>
                       <a:endParaRPr lang="en-US" sz="900" dirty="0">
                         <a:latin typeface="Arial" charset="0"/>
@@ -13473,7 +13456,7 @@
                           <a:ea typeface="Arial" pitchFamily="34" charset="-122"/>
                           <a:cs typeface="Arial" pitchFamily="34" charset="-120"/>
                         </a:rPr>
-                        <a:t>Affordable hotel stayed 6 nights room was small but worke...</a:t>
+                        <a:t>Drink vending machine , ice cream vending machine , curre...</a:t>
                       </a:r>
                       <a:endParaRPr lang="en-US" sz="900" dirty="0">
                         <a:latin typeface="Arial" charset="0"/>
@@ -13679,7 +13662,7 @@
                           <a:ea typeface="Arial" pitchFamily="34" charset="-122"/>
                           <a:cs typeface="Arial" pitchFamily="34" charset="-120"/>
                         </a:rPr>
-                        <a:t>臭い・匂い</a:t>
+                        <a:t>対応・サービスの不満</a:t>
                       </a:r>
                       <a:endParaRPr lang="en-US" sz="900" dirty="0">
                         <a:latin typeface="Arial" charset="0"/>
@@ -13747,7 +13730,7 @@
                           <a:ea typeface="Arial" pitchFamily="34" charset="-122"/>
                           <a:cs typeface="Arial" pitchFamily="34" charset="-120"/>
                         </a:rPr>
-                        <a:t>Drink vending machine , ice cream vending machine , curre...</a:t>
+                        <a:t>朝ごはんのパンが温められず冷たいままだったのが残念でしたが、全体的に価格に対して満足度が高かったです</a:t>
                       </a:r>
                       <a:endParaRPr lang="en-US" sz="900" dirty="0">
                         <a:latin typeface="Arial" charset="0"/>

--- a/納品レポート/ホテル別レポート/hearton_口コミ分析レポート.pptx
+++ b/納品レポート/ホテル別レポート/hearton_口コミ分析レポート.pptx
@@ -208,19 +208,19 @@
                 <c:formatCode>General</c:formatCode>
                 <c:ptCount val="6"/>
                 <c:pt idx="0">
-                  <c:v>9.42</c:v>
+                  <c:v>9.38</c:v>
                 </c:pt>
                 <c:pt idx="1">
-                  <c:v>8.76</c:v>
+                  <c:v>8.75</c:v>
                 </c:pt>
                 <c:pt idx="2">
-                  <c:v>8.73</c:v>
+                  <c:v>8.58</c:v>
                 </c:pt>
                 <c:pt idx="3">
-                  <c:v>8.55</c:v>
+                  <c:v>8.52</c:v>
                 </c:pt>
                 <c:pt idx="4">
-                  <c:v>8.54</c:v>
+                  <c:v>8.46</c:v>
                 </c:pt>
                 <c:pt idx="5">
                   <c:v>7.75</c:v>
@@ -566,10 +566,10 @@
               <c:numCache>
                 <c:ptCount val="3"/>
                 <c:pt idx="0">
-                  <c:v>117</c:v>
+                  <c:v>115</c:v>
                 </c:pt>
                 <c:pt idx="1">
-                  <c:v>20</c:v>
+                  <c:v>22</c:v>
                 </c:pt>
                 <c:pt idx="2">
                   <c:v>1</c:v>
@@ -781,19 +781,19 @@
                 <c:formatCode>General</c:formatCode>
                 <c:ptCount val="6"/>
                 <c:pt idx="0">
-                  <c:v>67</c:v>
+                  <c:v>64</c:v>
                 </c:pt>
                 <c:pt idx="1">
-                  <c:v>5</c:v>
+                  <c:v>7</c:v>
                 </c:pt>
                 <c:pt idx="2">
-                  <c:v>45</c:v>
+                  <c:v>44</c:v>
                 </c:pt>
                 <c:pt idx="3">
-                  <c:v>6</c:v>
+                  <c:v>7</c:v>
                 </c:pt>
                 <c:pt idx="4">
-                  <c:v>14</c:v>
+                  <c:v>15</c:v>
                 </c:pt>
                 <c:pt idx="5">
                   <c:v>1</c:v>
@@ -2767,7 +2767,7 @@
                 <a:ea typeface="Arial" pitchFamily="34" charset="-122"/>
                 <a:cs typeface="Arial" pitchFamily="34" charset="-120"/>
               </a:rPr>
-              <a:t>作成日：2026年3月24日</a:t>
+              <a:t>作成日：2026年3月25日</a:t>
             </a:r>
             <a:endParaRPr lang="en-US" sz="1000" dirty="0"/>
           </a:p>
@@ -3313,7 +3313,7 @@
                           <a:ea typeface="Arial" pitchFamily="34" charset="-122"/>
                           <a:cs typeface="Arial" pitchFamily="34" charset="-120"/>
                         </a:rPr>
-                        <a:t>8.72点</a:t>
+                        <a:t>8.67点</a:t>
                       </a:r>
                       <a:endParaRPr lang="en-US" sz="1000" dirty="0">
                         <a:latin typeface="Arial" charset="0"/>
@@ -3587,7 +3587,7 @@
                           <a:ea typeface="Arial" pitchFamily="34" charset="-122"/>
                           <a:cs typeface="Arial" pitchFamily="34" charset="-120"/>
                         </a:rPr>
-                        <a:t>84.8%</a:t>
+                        <a:t>83.3%</a:t>
                       </a:r>
                       <a:endParaRPr lang="en-US" sz="1000" dirty="0">
                         <a:latin typeface="Arial" charset="0"/>
@@ -3655,7 +3655,7 @@
                           <a:ea typeface="Arial" pitchFamily="34" charset="-122"/>
                           <a:cs typeface="Arial" pitchFamily="34" charset="-120"/>
                         </a:rPr>
-                        <a:t>90%以上</a:t>
+                        <a:t>88%以上</a:t>
                       </a:r>
                       <a:endParaRPr lang="en-US" sz="1000" dirty="0">
                         <a:latin typeface="Arial" charset="0"/>
@@ -4683,7 +4683,7 @@
                           <a:ea typeface="Arial" pitchFamily="34" charset="-122"/>
                           <a:cs typeface="Arial" pitchFamily="34" charset="-120"/>
                         </a:rPr>
-                        <a:t>約18件/期間</a:t>
+                        <a:t>約16件/期間</a:t>
                       </a:r>
                       <a:endParaRPr lang="en-US" sz="1000" dirty="0">
                         <a:latin typeface="Arial" charset="0"/>
@@ -4751,7 +4751,7 @@
                           <a:ea typeface="Arial" pitchFamily="34" charset="-122"/>
                           <a:cs typeface="Arial" pitchFamily="34" charset="-120"/>
                         </a:rPr>
-                        <a:t>9件以下</a:t>
+                        <a:t>8件以下</a:t>
                       </a:r>
                       <a:endParaRPr lang="en-US" sz="1000" dirty="0">
                         <a:latin typeface="Arial" charset="0"/>
@@ -5322,7 +5322,7 @@
                 <a:ea typeface="Arial" pitchFamily="34" charset="-122"/>
                 <a:cs typeface="Arial" pitchFamily="34" charset="-120"/>
               </a:rPr>
-              <a:t>8.72</a:t>
+              <a:t>8.67</a:t>
             </a:r>
             <a:endParaRPr lang="en-US" sz="3200" dirty="0"/>
           </a:p>
@@ -5447,7 +5447,7 @@
                 <a:ea typeface="Arial" pitchFamily="34" charset="-122"/>
                 <a:cs typeface="Arial" pitchFamily="34" charset="-120"/>
               </a:rPr>
-              <a:t>84.8%</a:t>
+              <a:t>83.3%</a:t>
             </a:r>
             <a:endParaRPr lang="en-US" sz="3200" dirty="0"/>
           </a:p>
@@ -5885,7 +5885,7 @@
                 <a:ea typeface="Arial" pitchFamily="34" charset="-122"/>
                 <a:cs typeface="Arial" pitchFamily="34" charset="-120"/>
               </a:rPr>
-              <a:t>  清潔で良かった 高さ制限のある車は、別の駐車場に停めるようになりますが、不便でした 高さ制限のある車は、別の駐車場...</a:t>
+              <a:t>  「ホテルの建物内は清潔で、朝食付きで料金も非常にリーズナブルだったと思います</a:t>
             </a:r>
             <a:endParaRPr lang="en-US" sz="1100" dirty="0"/>
           </a:p>
@@ -5925,7 +5925,7 @@
                 <a:ea typeface="Arial" pitchFamily="34" charset="-122"/>
                 <a:cs typeface="Arial" pitchFamily="34" charset="-120"/>
               </a:rPr>
-              <a:t>  深夜のチェックインになってしまったにもかかわらず親切に対応していただきました</a:t>
+              <a:t>  The front desk staff were really nice and helpful and eve...</a:t>
             </a:r>
             <a:endParaRPr lang="en-US" sz="1100" dirty="0"/>
           </a:p>
@@ -6113,7 +6113,7 @@
                 <a:ea typeface="Arial" pitchFamily="34" charset="-122"/>
                 <a:cs typeface="Arial" pitchFamily="34" charset="-120"/>
               </a:rPr>
-              <a:t>  Drink vending machine , ice cream vending machine , curre...</a:t>
+              <a:t>  " It's very close to the station and accessible</a:t>
             </a:r>
             <a:endParaRPr lang="en-US" sz="1100" dirty="0"/>
           </a:p>
@@ -6133,7 +6133,7 @@
                 <a:ea typeface="Arial" pitchFamily="34" charset="-122"/>
                 <a:cs typeface="Arial" pitchFamily="34" charset="-120"/>
               </a:rPr>
-              <a:t>部屋の狭さ </a:t>
+              <a:t>臭い・匂い </a:t>
             </a:r>
             <a:endParaRPr lang="en-US" sz="1100" dirty="0"/>
           </a:p>
@@ -6153,7 +6153,7 @@
                 <a:ea typeface="Arial" pitchFamily="34" charset="-122"/>
                 <a:cs typeface="Arial" pitchFamily="34" charset="-120"/>
               </a:rPr>
-              <a:t>  Affordable hotel stayed 6 nights room was small but worke...</a:t>
+              <a:t>  Drink vending machine , ice cream vending machine , curre...</a:t>
             </a:r>
             <a:endParaRPr lang="en-US" sz="1100" dirty="0"/>
           </a:p>
@@ -6506,7 +6506,7 @@
                 <a:ea typeface="Arial" pitchFamily="34" charset="-122"/>
                 <a:cs typeface="Arial" pitchFamily="34" charset="-120"/>
               </a:rPr>
-              <a:t>8.72</a:t>
+              <a:t>8.67</a:t>
             </a:r>
             <a:endParaRPr lang="en-US" sz="3200" dirty="0"/>
           </a:p>
@@ -6631,7 +6631,7 @@
                 <a:ea typeface="Arial" pitchFamily="34" charset="-122"/>
                 <a:cs typeface="Arial" pitchFamily="34" charset="-120"/>
               </a:rPr>
-              <a:t>84.8%</a:t>
+              <a:t>83.3%</a:t>
             </a:r>
             <a:endParaRPr lang="en-US" sz="3200" dirty="0"/>
           </a:p>
@@ -7302,7 +7302,7 @@
                 <a:ea typeface="Arial" pitchFamily="34" charset="-122"/>
                 <a:cs typeface="Arial" pitchFamily="34" charset="-120"/>
               </a:rPr>
-              <a:t>Trip.com(9.42)が最高スコア。</a:t>
+              <a:t>Trip.com(9.38)が最高スコア。</a:t>
             </a:r>
             <a:endParaRPr lang="en-US" sz="1100" dirty="0"/>
           </a:p>
@@ -7928,7 +7928,7 @@
                           <a:ea typeface="Arial" pitchFamily="34" charset="-122"/>
                           <a:cs typeface="Arial" pitchFamily="34" charset="-120"/>
                         </a:rPr>
-                        <a:t>9.42</a:t>
+                        <a:t>9.38</a:t>
                       </a:r>
                       <a:endParaRPr lang="en-US" sz="900" dirty="0">
                         <a:latin typeface="Arial" charset="0"/>
@@ -8064,7 +8064,7 @@
                           <a:ea typeface="Arial" pitchFamily="34" charset="-122"/>
                           <a:cs typeface="Arial" pitchFamily="34" charset="-120"/>
                         </a:rPr>
-                        <a:t>9.42</a:t>
+                        <a:t>9.38</a:t>
                       </a:r>
                       <a:endParaRPr lang="en-US" sz="900" dirty="0">
                         <a:latin typeface="Arial" charset="0"/>
@@ -8202,7 +8202,7 @@
                           <a:ea typeface="Arial" pitchFamily="34" charset="-122"/>
                           <a:cs typeface="Arial" pitchFamily="34" charset="-120"/>
                         </a:rPr>
-                        <a:t>34</a:t>
+                        <a:t>32</a:t>
                       </a:r>
                       <a:endParaRPr lang="en-US" sz="900" dirty="0">
                         <a:latin typeface="Arial" charset="0"/>
@@ -8406,7 +8406,7 @@
                           <a:ea typeface="Arial" pitchFamily="34" charset="-122"/>
                           <a:cs typeface="Arial" pitchFamily="34" charset="-120"/>
                         </a:rPr>
-                        <a:t>8.76</a:t>
+                        <a:t>8.75</a:t>
                       </a:r>
                       <a:endParaRPr lang="en-US" sz="900" dirty="0">
                         <a:latin typeface="Arial" charset="0"/>
@@ -8544,7 +8544,7 @@
                           <a:ea typeface="Arial" pitchFamily="34" charset="-122"/>
                           <a:cs typeface="Arial" pitchFamily="34" charset="-120"/>
                         </a:rPr>
-                        <a:t>11</a:t>
+                        <a:t>12</a:t>
                       </a:r>
                       <a:endParaRPr lang="en-US" sz="900" dirty="0">
                         <a:latin typeface="Arial" charset="0"/>
@@ -8612,7 +8612,7 @@
                           <a:ea typeface="Arial" pitchFamily="34" charset="-122"/>
                           <a:cs typeface="Arial" pitchFamily="34" charset="-120"/>
                         </a:rPr>
-                        <a:t>8.73</a:t>
+                        <a:t>8.58</a:t>
                       </a:r>
                       <a:endParaRPr lang="en-US" sz="900" dirty="0">
                         <a:latin typeface="Arial" charset="0"/>
@@ -8748,7 +8748,7 @@
                           <a:ea typeface="Arial" pitchFamily="34" charset="-122"/>
                           <a:cs typeface="Arial" pitchFamily="34" charset="-120"/>
                         </a:rPr>
-                        <a:t>8.73</a:t>
+                        <a:t>8.58</a:t>
                       </a:r>
                       <a:endParaRPr lang="en-US" sz="900" dirty="0">
                         <a:latin typeface="Arial" charset="0"/>
@@ -8886,7 +8886,7 @@
                           <a:ea typeface="Arial" pitchFamily="34" charset="-122"/>
                           <a:cs typeface="Arial" pitchFamily="34" charset="-120"/>
                         </a:rPr>
-                        <a:t>20</a:t>
+                        <a:t>23</a:t>
                       </a:r>
                       <a:endParaRPr lang="en-US" sz="900" dirty="0">
                         <a:latin typeface="Arial" charset="0"/>
@@ -8954,7 +8954,7 @@
                           <a:ea typeface="Arial" pitchFamily="34" charset="-122"/>
                           <a:cs typeface="Arial" pitchFamily="34" charset="-120"/>
                         </a:rPr>
-                        <a:t>8.55</a:t>
+                        <a:t>8.52</a:t>
                       </a:r>
                       <a:endParaRPr lang="en-US" sz="900" dirty="0">
                         <a:latin typeface="Arial" charset="0"/>
@@ -9090,7 +9090,7 @@
                           <a:ea typeface="Arial" pitchFamily="34" charset="-122"/>
                           <a:cs typeface="Arial" pitchFamily="34" charset="-120"/>
                         </a:rPr>
-                        <a:t>8.55</a:t>
+                        <a:t>8.52</a:t>
                       </a:r>
                       <a:endParaRPr lang="en-US" sz="900" dirty="0">
                         <a:latin typeface="Arial" charset="0"/>
@@ -9228,7 +9228,7 @@
                           <a:ea typeface="Arial" pitchFamily="34" charset="-122"/>
                           <a:cs typeface="Arial" pitchFamily="34" charset="-120"/>
                         </a:rPr>
-                        <a:t>41</a:t>
+                        <a:t>39</a:t>
                       </a:r>
                       <a:endParaRPr lang="en-US" sz="900" dirty="0">
                         <a:latin typeface="Arial" charset="0"/>
@@ -9296,7 +9296,7 @@
                           <a:ea typeface="Arial" pitchFamily="34" charset="-122"/>
                           <a:cs typeface="Arial" pitchFamily="34" charset="-120"/>
                         </a:rPr>
-                        <a:t>4.27</a:t>
+                        <a:t>4.23</a:t>
                       </a:r>
                       <a:endParaRPr lang="en-US" sz="900" dirty="0">
                         <a:latin typeface="Arial" charset="0"/>
@@ -9432,7 +9432,7 @@
                           <a:ea typeface="Arial" pitchFamily="34" charset="-122"/>
                           <a:cs typeface="Arial" pitchFamily="34" charset="-120"/>
                         </a:rPr>
-                        <a:t>8.54</a:t>
+                        <a:t>8.46</a:t>
                       </a:r>
                       <a:endParaRPr lang="en-US" sz="900" dirty="0">
                         <a:latin typeface="Arial" charset="0"/>
@@ -10182,7 +10182,7 @@
                 <a:ea typeface="Arial" pitchFamily="34" charset="-122"/>
                 <a:cs typeface="Arial" pitchFamily="34" charset="-120"/>
               </a:rPr>
-              <a:t>117件（84.8%）</a:t>
+              <a:t>115件（83.3%）</a:t>
             </a:r>
             <a:endParaRPr lang="en-US" sz="1100" dirty="0"/>
           </a:p>
@@ -10280,7 +10280,7 @@
                 <a:ea typeface="Arial" pitchFamily="34" charset="-122"/>
                 <a:cs typeface="Arial" pitchFamily="34" charset="-120"/>
               </a:rPr>
-              <a:t>20件（14.5%）</a:t>
+              <a:t>22件（15.9%）</a:t>
             </a:r>
             <a:endParaRPr lang="en-US" sz="1100" dirty="0"/>
           </a:p>
@@ -10829,7 +10829,7 @@
                 <a:ea typeface="Arial" pitchFamily="34" charset="-122"/>
                 <a:cs typeface="Arial" pitchFamily="34" charset="-120"/>
               </a:rPr>
-              <a:t>「最寄り駅から近く、荷物が多かったので移動が楽で良かったです」</a:t>
+              <a:t>「駅が近い  商業施設が近い 駐車場有だったが、大きく高さの有る車は入らない  朝ごはん、トースターが付いてたらあの...」</a:t>
             </a:r>
             <a:endParaRPr lang="en-US" sz="900" dirty="0"/>
           </a:p>
@@ -11013,7 +11013,7 @@
                 <a:ea typeface="Arial" pitchFamily="34" charset="-122"/>
                 <a:cs typeface="Arial" pitchFamily="34" charset="-120"/>
               </a:rPr>
-              <a:t>清潔で良かった 高さ制限のある車は、別の駐車場に停めるようになりますが、不便でした 高さ制限のある車は、別の駐車場...</a:t>
+              <a:t>「ホテルの建物内は清潔で、朝食付きで料金も非常にリーズナブルだったと思います</a:t>
             </a:r>
             <a:endParaRPr lang="en-US" sz="900" dirty="0"/>
           </a:p>
@@ -11052,7 +11052,7 @@
                 <a:ea typeface="Arial" pitchFamily="34" charset="-122"/>
                 <a:cs typeface="Arial" pitchFamily="34" charset="-120"/>
               </a:rPr>
-              <a:t>「お部屋も運良く海側だったので夜景も朝日もキレイでした」</a:t>
+              <a:t>「洗面所周りが広く全体的に綺麗でお安くお得感があった」</a:t>
             </a:r>
             <a:endParaRPr lang="en-US" sz="900" dirty="0"/>
           </a:p>
@@ -11236,7 +11236,7 @@
                 <a:ea typeface="Arial" pitchFamily="34" charset="-122"/>
                 <a:cs typeface="Arial" pitchFamily="34" charset="-120"/>
               </a:rPr>
-              <a:t>深夜のチェックインになってしまったにもかかわらず親切に対応していただきました</a:t>
+              <a:t>The front desk staff were really nice and helpful and eve...</a:t>
             </a:r>
             <a:endParaRPr lang="en-US" sz="900" dirty="0"/>
           </a:p>
@@ -11275,7 +11275,7 @@
                 <a:ea typeface="Arial" pitchFamily="34" charset="-122"/>
                 <a:cs typeface="Arial" pitchFamily="34" charset="-120"/>
               </a:rPr>
-              <a:t>「15時からチェックインなので14時前くらいからロビーで待っていたら(フロントからは離れていてスタッフには話しかけて...」</a:t>
+              <a:t>「深夜のチェックインになってしまったにもかかわらず親切に対応していただきました」</a:t>
             </a:r>
             <a:endParaRPr lang="en-US" sz="900" dirty="0"/>
           </a:p>
@@ -11420,6 +11420,229 @@
                 <a:ea typeface="Arial" pitchFamily="34" charset="-122"/>
                 <a:cs typeface="Arial" pitchFamily="34" charset="-120"/>
               </a:rPr>
+              <a:t>快適さ・設備</a:t>
+            </a:r>
+            <a:endParaRPr lang="en-US" sz="1300" dirty="0"/>
+          </a:p>
+        </p:txBody>
+      </p:sp>
+      <p:sp>
+        <p:nvSpPr>
+          <p:cNvPr id="31" name="Text 29"/>
+          <p:cNvSpPr/>
+          <p:nvPr/>
+        </p:nvSpPr>
+        <p:spPr>
+          <a:xfrm>
+            <a:off x="594360" y="3246120"/>
+            <a:ext cx="2377440" cy="365760"/>
+          </a:xfrm>
+          <a:prstGeom prst="rect">
+            <a:avLst/>
+          </a:prstGeom>
+          <a:noFill/>
+          <a:ln/>
+        </p:spPr>
+        <p:txBody>
+          <a:bodyPr wrap="square" lIns="0" tIns="0" rIns="0" bIns="0" rtlCol="0" anchor="ctr"/>
+          <a:lstStyle/>
+          <a:p>
+            <a:pPr indent="0" marL="0">
+              <a:buNone/>
+            </a:pPr>
+            <a:r>
+              <a:rPr lang="en-US" sz="900" dirty="0">
+                <a:solidFill>
+                  <a:srgbClr val="64748B"/>
+                </a:solidFill>
+                <a:latin typeface="Arial" pitchFamily="34" charset="0"/>
+                <a:ea typeface="Arial" pitchFamily="34" charset="-122"/>
+                <a:cs typeface="Arial" pitchFamily="34" charset="-120"/>
+              </a:rPr>
+              <a:t>広いベッド 便利なロケーション</a:t>
+            </a:r>
+            <a:endParaRPr lang="en-US" sz="900" dirty="0"/>
+          </a:p>
+        </p:txBody>
+      </p:sp>
+      <p:sp>
+        <p:nvSpPr>
+          <p:cNvPr id="32" name="Text 30"/>
+          <p:cNvSpPr/>
+          <p:nvPr/>
+        </p:nvSpPr>
+        <p:spPr>
+          <a:xfrm>
+            <a:off x="594360" y="3657600"/>
+            <a:ext cx="2377440" cy="640080"/>
+          </a:xfrm>
+          <a:prstGeom prst="rect">
+            <a:avLst/>
+          </a:prstGeom>
+          <a:noFill/>
+          <a:ln/>
+        </p:spPr>
+        <p:txBody>
+          <a:bodyPr wrap="square" lIns="0" tIns="0" rIns="0" bIns="0" rtlCol="0" anchor="ctr"/>
+          <a:lstStyle/>
+          <a:p>
+            <a:pPr indent="0" marL="0">
+              <a:buNone/>
+            </a:pPr>
+            <a:r>
+              <a:rPr lang="en-US" sz="900" i="1" dirty="0">
+                <a:solidFill>
+                  <a:srgbClr val="3B7DD8"/>
+                </a:solidFill>
+                <a:latin typeface="Arial" pitchFamily="34" charset="0"/>
+                <a:ea typeface="Arial" pitchFamily="34" charset="-122"/>
+                <a:cs typeface="Arial" pitchFamily="34" charset="-120"/>
+              </a:rPr>
+              <a:t>「The bed was really comfortable」</a:t>
+            </a:r>
+            <a:endParaRPr lang="en-US" sz="900" dirty="0"/>
+          </a:p>
+        </p:txBody>
+      </p:sp>
+      <p:sp>
+        <p:nvSpPr>
+          <p:cNvPr id="33" name="Shape 31"/>
+          <p:cNvSpPr/>
+          <p:nvPr/>
+        </p:nvSpPr>
+        <p:spPr>
+          <a:xfrm>
+            <a:off x="3291840" y="2880360"/>
+            <a:ext cx="2651760" cy="1600200"/>
+          </a:xfrm>
+          <a:prstGeom prst="rect">
+            <a:avLst/>
+          </a:prstGeom>
+          <a:solidFill>
+            <a:srgbClr val="FFFFFF"/>
+          </a:solidFill>
+          <a:ln/>
+          <a:effectLst>
+            <a:outerShdw sx="100000" sy="100000" kx="0" ky="0" algn="bl" rotWithShape="0" blurRad="50800" dist="25400" dir="8100000">
+              <a:srgbClr val="000000">
+                <a:alpha val="10000"/>
+              </a:srgbClr>
+            </a:outerShdw>
+          </a:effectLst>
+        </p:spPr>
+      </p:sp>
+      <p:sp>
+        <p:nvSpPr>
+          <p:cNvPr id="34" name="Shape 32"/>
+          <p:cNvSpPr/>
+          <p:nvPr/>
+        </p:nvSpPr>
+        <p:spPr>
+          <a:xfrm>
+            <a:off x="3291840" y="2880360"/>
+            <a:ext cx="54864" cy="1600200"/>
+          </a:xfrm>
+          <a:prstGeom prst="rect">
+            <a:avLst/>
+          </a:prstGeom>
+          <a:solidFill>
+            <a:srgbClr val="16A34A"/>
+          </a:solidFill>
+          <a:ln/>
+        </p:spPr>
+      </p:sp>
+      <p:sp>
+        <p:nvSpPr>
+          <p:cNvPr id="35" name="Shape 33"/>
+          <p:cNvSpPr/>
+          <p:nvPr/>
+        </p:nvSpPr>
+        <p:spPr>
+          <a:xfrm>
+            <a:off x="5120640" y="2953512"/>
+            <a:ext cx="658368" cy="228600"/>
+          </a:xfrm>
+          <a:prstGeom prst="rect">
+            <a:avLst/>
+          </a:prstGeom>
+          <a:solidFill>
+            <a:srgbClr val="DCFCE7"/>
+          </a:solidFill>
+          <a:ln/>
+        </p:spPr>
+      </p:sp>
+      <p:sp>
+        <p:nvSpPr>
+          <p:cNvPr id="36" name="Text 34"/>
+          <p:cNvSpPr/>
+          <p:nvPr/>
+        </p:nvSpPr>
+        <p:spPr>
+          <a:xfrm>
+            <a:off x="5120640" y="2953512"/>
+            <a:ext cx="658368" cy="228600"/>
+          </a:xfrm>
+          <a:prstGeom prst="rect">
+            <a:avLst/>
+          </a:prstGeom>
+          <a:noFill/>
+          <a:ln/>
+        </p:spPr>
+        <p:txBody>
+          <a:bodyPr wrap="square" lIns="0" tIns="0" rIns="0" bIns="0" rtlCol="0" anchor="ctr"/>
+          <a:lstStyle/>
+          <a:p>
+            <a:pPr algn="ctr" indent="0" marL="0">
+              <a:buNone/>
+            </a:pPr>
+            <a:r>
+              <a:rPr lang="en-US" sz="900" b="1" dirty="0">
+                <a:solidFill>
+                  <a:srgbClr val="16A34A"/>
+                </a:solidFill>
+                <a:latin typeface="Arial" pitchFamily="34" charset="0"/>
+                <a:ea typeface="Arial" pitchFamily="34" charset="-122"/>
+                <a:cs typeface="Arial" pitchFamily="34" charset="-120"/>
+              </a:rPr>
+              <a:t>20件+</a:t>
+            </a:r>
+            <a:endParaRPr lang="en-US" sz="900" dirty="0"/>
+          </a:p>
+        </p:txBody>
+      </p:sp>
+      <p:sp>
+        <p:nvSpPr>
+          <p:cNvPr id="37" name="Text 35"/>
+          <p:cNvSpPr/>
+          <p:nvPr/>
+        </p:nvSpPr>
+        <p:spPr>
+          <a:xfrm>
+            <a:off x="3429000" y="2953512"/>
+            <a:ext cx="1645920" cy="274320"/>
+          </a:xfrm>
+          <a:prstGeom prst="rect">
+            <a:avLst/>
+          </a:prstGeom>
+          <a:noFill/>
+          <a:ln/>
+        </p:spPr>
+        <p:txBody>
+          <a:bodyPr wrap="square" lIns="0" tIns="0" rIns="0" bIns="0" rtlCol="0" anchor="ctr"/>
+          <a:lstStyle/>
+          <a:p>
+            <a:pPr indent="0" marL="0">
+              <a:buNone/>
+            </a:pPr>
+            <a:r>
+              <a:rPr lang="en-US" sz="1300" b="1" dirty="0">
+                <a:solidFill>
+                  <a:srgbClr val="1A2744"/>
+                </a:solidFill>
+                <a:latin typeface="Arial" pitchFamily="34" charset="0"/>
+                <a:ea typeface="Arial" pitchFamily="34" charset="-122"/>
+                <a:cs typeface="Arial" pitchFamily="34" charset="-120"/>
+              </a:rPr>
               <a:t>コンビニ・周辺施設</a:t>
             </a:r>
             <a:endParaRPr lang="en-US" sz="1300" dirty="0"/>
@@ -11428,13 +11651,13 @@
       </p:sp>
       <p:sp>
         <p:nvSpPr>
-          <p:cNvPr id="31" name="Text 29"/>
-          <p:cNvSpPr/>
-          <p:nvPr/>
-        </p:nvSpPr>
-        <p:spPr>
-          <a:xfrm>
-            <a:off x="594360" y="3246120"/>
+          <p:cNvPr id="38" name="Text 36"/>
+          <p:cNvSpPr/>
+          <p:nvPr/>
+        </p:nvSpPr>
+        <p:spPr>
+          <a:xfrm>
+            <a:off x="3429000" y="3246120"/>
             <a:ext cx="2377440" cy="365760"/>
           </a:xfrm>
           <a:prstGeom prst="rect">
@@ -11467,13 +11690,13 @@
       </p:sp>
       <p:sp>
         <p:nvSpPr>
-          <p:cNvPr id="32" name="Text 30"/>
-          <p:cNvSpPr/>
-          <p:nvPr/>
-        </p:nvSpPr>
-        <p:spPr>
-          <a:xfrm>
-            <a:off x="594360" y="3657600"/>
+          <p:cNvPr id="39" name="Text 37"/>
+          <p:cNvSpPr/>
+          <p:nvPr/>
+        </p:nvSpPr>
+        <p:spPr>
+          <a:xfrm>
+            <a:off x="3429000" y="3657600"/>
             <a:ext cx="2377440" cy="640080"/>
           </a:xfrm>
           <a:prstGeom prst="rect">
@@ -11506,13 +11729,13 @@
       </p:sp>
       <p:sp>
         <p:nvSpPr>
-          <p:cNvPr id="33" name="Shape 31"/>
-          <p:cNvSpPr/>
-          <p:nvPr/>
-        </p:nvSpPr>
-        <p:spPr>
-          <a:xfrm>
-            <a:off x="3291840" y="2880360"/>
+          <p:cNvPr id="40" name="Shape 38"/>
+          <p:cNvSpPr/>
+          <p:nvPr/>
+        </p:nvSpPr>
+        <p:spPr>
+          <a:xfrm>
+            <a:off x="6126480" y="2880360"/>
             <a:ext cx="2651760" cy="1600200"/>
           </a:xfrm>
           <a:prstGeom prst="rect">
@@ -11533,13 +11756,13 @@
       </p:sp>
       <p:sp>
         <p:nvSpPr>
-          <p:cNvPr id="34" name="Shape 32"/>
-          <p:cNvSpPr/>
-          <p:nvPr/>
-        </p:nvSpPr>
-        <p:spPr>
-          <a:xfrm>
-            <a:off x="3291840" y="2880360"/>
+          <p:cNvPr id="41" name="Shape 39"/>
+          <p:cNvSpPr/>
+          <p:nvPr/>
+        </p:nvSpPr>
+        <p:spPr>
+          <a:xfrm>
+            <a:off x="6126480" y="2880360"/>
             <a:ext cx="54864" cy="1600200"/>
           </a:xfrm>
           <a:prstGeom prst="rect">
@@ -11553,13 +11776,13 @@
       </p:sp>
       <p:sp>
         <p:nvSpPr>
-          <p:cNvPr id="35" name="Shape 33"/>
-          <p:cNvSpPr/>
-          <p:nvPr/>
-        </p:nvSpPr>
-        <p:spPr>
-          <a:xfrm>
-            <a:off x="5120640" y="2953512"/>
+          <p:cNvPr id="42" name="Shape 40"/>
+          <p:cNvSpPr/>
+          <p:nvPr/>
+        </p:nvSpPr>
+        <p:spPr>
+          <a:xfrm>
+            <a:off x="7955280" y="2953512"/>
             <a:ext cx="658368" cy="228600"/>
           </a:xfrm>
           <a:prstGeom prst="rect">
@@ -11573,13 +11796,13 @@
       </p:sp>
       <p:sp>
         <p:nvSpPr>
-          <p:cNvPr id="36" name="Text 34"/>
-          <p:cNvSpPr/>
-          <p:nvPr/>
-        </p:nvSpPr>
-        <p:spPr>
-          <a:xfrm>
-            <a:off x="5120640" y="2953512"/>
+          <p:cNvPr id="43" name="Text 41"/>
+          <p:cNvSpPr/>
+          <p:nvPr/>
+        </p:nvSpPr>
+        <p:spPr>
+          <a:xfrm>
+            <a:off x="7955280" y="2953512"/>
             <a:ext cx="658368" cy="228600"/>
           </a:xfrm>
           <a:prstGeom prst="rect">
@@ -11612,229 +11835,6 @@
       </p:sp>
       <p:sp>
         <p:nvSpPr>
-          <p:cNvPr id="37" name="Text 35"/>
-          <p:cNvSpPr/>
-          <p:nvPr/>
-        </p:nvSpPr>
-        <p:spPr>
-          <a:xfrm>
-            <a:off x="3429000" y="2953512"/>
-            <a:ext cx="1645920" cy="274320"/>
-          </a:xfrm>
-          <a:prstGeom prst="rect">
-            <a:avLst/>
-          </a:prstGeom>
-          <a:noFill/>
-          <a:ln/>
-        </p:spPr>
-        <p:txBody>
-          <a:bodyPr wrap="square" lIns="0" tIns="0" rIns="0" bIns="0" rtlCol="0" anchor="ctr"/>
-          <a:lstStyle/>
-          <a:p>
-            <a:pPr indent="0" marL="0">
-              <a:buNone/>
-            </a:pPr>
-            <a:r>
-              <a:rPr lang="en-US" sz="1300" b="1" dirty="0">
-                <a:solidFill>
-                  <a:srgbClr val="1A2744"/>
-                </a:solidFill>
-                <a:latin typeface="Arial" pitchFamily="34" charset="0"/>
-                <a:ea typeface="Arial" pitchFamily="34" charset="-122"/>
-                <a:cs typeface="Arial" pitchFamily="34" charset="-120"/>
-              </a:rPr>
-              <a:t>快適さ・設備</a:t>
-            </a:r>
-            <a:endParaRPr lang="en-US" sz="1300" dirty="0"/>
-          </a:p>
-        </p:txBody>
-      </p:sp>
-      <p:sp>
-        <p:nvSpPr>
-          <p:cNvPr id="38" name="Text 36"/>
-          <p:cNvSpPr/>
-          <p:nvPr/>
-        </p:nvSpPr>
-        <p:spPr>
-          <a:xfrm>
-            <a:off x="3429000" y="3246120"/>
-            <a:ext cx="2377440" cy="365760"/>
-          </a:xfrm>
-          <a:prstGeom prst="rect">
-            <a:avLst/>
-          </a:prstGeom>
-          <a:noFill/>
-          <a:ln/>
-        </p:spPr>
-        <p:txBody>
-          <a:bodyPr wrap="square" lIns="0" tIns="0" rIns="0" bIns="0" rtlCol="0" anchor="ctr"/>
-          <a:lstStyle/>
-          <a:p>
-            <a:pPr indent="0" marL="0">
-              <a:buNone/>
-            </a:pPr>
-            <a:r>
-              <a:rPr lang="en-US" sz="900" dirty="0">
-                <a:solidFill>
-                  <a:srgbClr val="64748B"/>
-                </a:solidFill>
-                <a:latin typeface="Arial" pitchFamily="34" charset="0"/>
-                <a:ea typeface="Arial" pitchFamily="34" charset="-122"/>
-                <a:cs typeface="Arial" pitchFamily="34" charset="-120"/>
-              </a:rPr>
-              <a:t>ベッドは寝心地がよくってぐっすりでした</a:t>
-            </a:r>
-            <a:endParaRPr lang="en-US" sz="900" dirty="0"/>
-          </a:p>
-        </p:txBody>
-      </p:sp>
-      <p:sp>
-        <p:nvSpPr>
-          <p:cNvPr id="39" name="Text 37"/>
-          <p:cNvSpPr/>
-          <p:nvPr/>
-        </p:nvSpPr>
-        <p:spPr>
-          <a:xfrm>
-            <a:off x="3429000" y="3657600"/>
-            <a:ext cx="2377440" cy="640080"/>
-          </a:xfrm>
-          <a:prstGeom prst="rect">
-            <a:avLst/>
-          </a:prstGeom>
-          <a:noFill/>
-          <a:ln/>
-        </p:spPr>
-        <p:txBody>
-          <a:bodyPr wrap="square" lIns="0" tIns="0" rIns="0" bIns="0" rtlCol="0" anchor="ctr"/>
-          <a:lstStyle/>
-          <a:p>
-            <a:pPr indent="0" marL="0">
-              <a:buNone/>
-            </a:pPr>
-            <a:r>
-              <a:rPr lang="en-US" sz="900" i="1" dirty="0">
-                <a:solidFill>
-                  <a:srgbClr val="3B7DD8"/>
-                </a:solidFill>
-                <a:latin typeface="Arial" pitchFamily="34" charset="0"/>
-                <a:ea typeface="Arial" pitchFamily="34" charset="-122"/>
-                <a:cs typeface="Arial" pitchFamily="34" charset="-120"/>
-              </a:rPr>
-              <a:t>「部屋も快適でした」</a:t>
-            </a:r>
-            <a:endParaRPr lang="en-US" sz="900" dirty="0"/>
-          </a:p>
-        </p:txBody>
-      </p:sp>
-      <p:sp>
-        <p:nvSpPr>
-          <p:cNvPr id="40" name="Shape 38"/>
-          <p:cNvSpPr/>
-          <p:nvPr/>
-        </p:nvSpPr>
-        <p:spPr>
-          <a:xfrm>
-            <a:off x="6126480" y="2880360"/>
-            <a:ext cx="2651760" cy="1600200"/>
-          </a:xfrm>
-          <a:prstGeom prst="rect">
-            <a:avLst/>
-          </a:prstGeom>
-          <a:solidFill>
-            <a:srgbClr val="FFFFFF"/>
-          </a:solidFill>
-          <a:ln/>
-          <a:effectLst>
-            <a:outerShdw sx="100000" sy="100000" kx="0" ky="0" algn="bl" rotWithShape="0" blurRad="50800" dist="25400" dir="8100000">
-              <a:srgbClr val="000000">
-                <a:alpha val="10000"/>
-              </a:srgbClr>
-            </a:outerShdw>
-          </a:effectLst>
-        </p:spPr>
-      </p:sp>
-      <p:sp>
-        <p:nvSpPr>
-          <p:cNvPr id="41" name="Shape 39"/>
-          <p:cNvSpPr/>
-          <p:nvPr/>
-        </p:nvSpPr>
-        <p:spPr>
-          <a:xfrm>
-            <a:off x="6126480" y="2880360"/>
-            <a:ext cx="54864" cy="1600200"/>
-          </a:xfrm>
-          <a:prstGeom prst="rect">
-            <a:avLst/>
-          </a:prstGeom>
-          <a:solidFill>
-            <a:srgbClr val="16A34A"/>
-          </a:solidFill>
-          <a:ln/>
-        </p:spPr>
-      </p:sp>
-      <p:sp>
-        <p:nvSpPr>
-          <p:cNvPr id="42" name="Shape 40"/>
-          <p:cNvSpPr/>
-          <p:nvPr/>
-        </p:nvSpPr>
-        <p:spPr>
-          <a:xfrm>
-            <a:off x="7955280" y="2953512"/>
-            <a:ext cx="658368" cy="228600"/>
-          </a:xfrm>
-          <a:prstGeom prst="rect">
-            <a:avLst/>
-          </a:prstGeom>
-          <a:solidFill>
-            <a:srgbClr val="DCFCE7"/>
-          </a:solidFill>
-          <a:ln/>
-        </p:spPr>
-      </p:sp>
-      <p:sp>
-        <p:nvSpPr>
-          <p:cNvPr id="43" name="Text 41"/>
-          <p:cNvSpPr/>
-          <p:nvPr/>
-        </p:nvSpPr>
-        <p:spPr>
-          <a:xfrm>
-            <a:off x="7955280" y="2953512"/>
-            <a:ext cx="658368" cy="228600"/>
-          </a:xfrm>
-          <a:prstGeom prst="rect">
-            <a:avLst/>
-          </a:prstGeom>
-          <a:noFill/>
-          <a:ln/>
-        </p:spPr>
-        <p:txBody>
-          <a:bodyPr wrap="square" lIns="0" tIns="0" rIns="0" bIns="0" rtlCol="0" anchor="ctr"/>
-          <a:lstStyle/>
-          <a:p>
-            <a:pPr algn="ctr" indent="0" marL="0">
-              <a:buNone/>
-            </a:pPr>
-            <a:r>
-              <a:rPr lang="en-US" sz="900" b="1" dirty="0">
-                <a:solidFill>
-                  <a:srgbClr val="16A34A"/>
-                </a:solidFill>
-                <a:latin typeface="Arial" pitchFamily="34" charset="0"/>
-                <a:ea typeface="Arial" pitchFamily="34" charset="-122"/>
-                <a:cs typeface="Arial" pitchFamily="34" charset="-120"/>
-              </a:rPr>
-              <a:t>20件+</a:t>
-            </a:r>
-            <a:endParaRPr lang="en-US" sz="900" dirty="0"/>
-          </a:p>
-        </p:txBody>
-      </p:sp>
-      <p:sp>
-        <p:nvSpPr>
           <p:cNvPr id="44" name="Text 42"/>
           <p:cNvSpPr/>
           <p:nvPr/>
@@ -11905,7 +11905,7 @@
                 <a:ea typeface="Arial" pitchFamily="34" charset="-122"/>
                 <a:cs typeface="Arial" pitchFamily="34" charset="-120"/>
               </a:rPr>
-              <a:t>朝ごはんのパンが温められず冷たいままだったのが残念でしたが、全体的に価格に対して満足度が高かったです</a:t>
+              <a:t>駅が近い  商業施設が近い 駐車場有だったが、大きく高さの有る車は入らない  朝ごはん、トースターが付いてたらあの...</a:t>
             </a:r>
             <a:endParaRPr lang="en-US" sz="900" dirty="0"/>
           </a:p>
@@ -11944,7 +11944,7 @@
                 <a:ea typeface="Arial" pitchFamily="34" charset="-122"/>
                 <a:cs typeface="Arial" pitchFamily="34" charset="-120"/>
               </a:rPr>
-              <a:t>「朝食は7時に行って正解、ひっきりなしに人が来ていました」</a:t>
+              <a:t>「「ホテルの建物内は清潔で、朝食付きで料金も非常にリーズナブルだったと思います」</a:t>
             </a:r>
             <a:endParaRPr lang="en-US" sz="900" dirty="0"/>
           </a:p>
@@ -12702,7 +12702,7 @@
                           <a:ea typeface="Arial" pitchFamily="34" charset="-122"/>
                           <a:cs typeface="Arial" pitchFamily="34" charset="-120"/>
                         </a:rPr>
-                        <a:t>18件</a:t>
+                        <a:t>16件</a:t>
                       </a:r>
                       <a:endParaRPr lang="en-US" sz="900" dirty="0">
                         <a:latin typeface="Arial" charset="0"/>
@@ -12908,7 +12908,7 @@
                           <a:ea typeface="Arial" pitchFamily="34" charset="-122"/>
                           <a:cs typeface="Arial" pitchFamily="34" charset="-120"/>
                         </a:rPr>
-                        <a:t>Drink vending machine , ice cream vending machine , curre...</a:t>
+                        <a:t>" It's very close to the station and accessible</a:t>
                       </a:r>
                       <a:endParaRPr lang="en-US" sz="900" dirty="0">
                         <a:latin typeface="Arial" charset="0"/>
@@ -12976,7 +12976,7 @@
                           <a:ea typeface="Arial" pitchFamily="34" charset="-122"/>
                           <a:cs typeface="Arial" pitchFamily="34" charset="-120"/>
                         </a:rPr>
-                        <a:t>9件</a:t>
+                        <a:t>10件</a:t>
                       </a:r>
                       <a:endParaRPr lang="en-US" sz="900" dirty="0">
                         <a:latin typeface="Arial" charset="0"/>
@@ -13114,7 +13114,7 @@
                           <a:ea typeface="Arial" pitchFamily="34" charset="-122"/>
                           <a:cs typeface="Arial" pitchFamily="34" charset="-120"/>
                         </a:rPr>
-                        <a:t>部屋の狭さ</a:t>
+                        <a:t>臭い・匂い</a:t>
                       </a:r>
                       <a:endParaRPr lang="en-US" sz="900" dirty="0">
                         <a:latin typeface="Arial" charset="0"/>
@@ -13182,7 +13182,7 @@
                           <a:ea typeface="Arial" pitchFamily="34" charset="-122"/>
                           <a:cs typeface="Arial" pitchFamily="34" charset="-120"/>
                         </a:rPr>
-                        <a:t>Affordable hotel stayed 6 nights room was small but worke...</a:t>
+                        <a:t>Drink vending machine , ice cream vending machine , curre...</a:t>
                       </a:r>
                       <a:endParaRPr lang="en-US" sz="900" dirty="0">
                         <a:latin typeface="Arial" charset="0"/>
@@ -13388,7 +13388,7 @@
                           <a:ea typeface="Arial" pitchFamily="34" charset="-122"/>
                           <a:cs typeface="Arial" pitchFamily="34" charset="-120"/>
                         </a:rPr>
-                        <a:t>臭い・匂い</a:t>
+                        <a:t>対応・サービスの不満</a:t>
                       </a:r>
                       <a:endParaRPr lang="en-US" sz="900" dirty="0">
                         <a:latin typeface="Arial" charset="0"/>
@@ -13456,7 +13456,7 @@
                           <a:ea typeface="Arial" pitchFamily="34" charset="-122"/>
                           <a:cs typeface="Arial" pitchFamily="34" charset="-120"/>
                         </a:rPr>
-                        <a:t>Drink vending machine , ice cream vending machine , curre...</a:t>
+                        <a:t>朝ごはんのパンが温められず冷たいままだったのが残念でしたが、全体的に価格に対して満足度が高かったです</a:t>
                       </a:r>
                       <a:endParaRPr lang="en-US" sz="900" dirty="0">
                         <a:latin typeface="Arial" charset="0"/>
@@ -13662,7 +13662,7 @@
                           <a:ea typeface="Arial" pitchFamily="34" charset="-122"/>
                           <a:cs typeface="Arial" pitchFamily="34" charset="-120"/>
                         </a:rPr>
-                        <a:t>対応・サービスの不満</a:t>
+                        <a:t>設備の老朽化</a:t>
                       </a:r>
                       <a:endParaRPr lang="en-US" sz="900" dirty="0">
                         <a:latin typeface="Arial" charset="0"/>
@@ -13730,7 +13730,7 @@
                           <a:ea typeface="Arial" pitchFamily="34" charset="-122"/>
                           <a:cs typeface="Arial" pitchFamily="34" charset="-120"/>
                         </a:rPr>
-                        <a:t>朝ごはんのパンが温められず冷たいままだったのが残念でしたが、全体的に価格に対して満足度が高かったです</a:t>
+                        <a:t>部屋は湿気臭く、かなり老朽化していました</a:t>
                       </a:r>
                       <a:endParaRPr lang="en-US" sz="900" dirty="0">
                         <a:latin typeface="Arial" charset="0"/>
@@ -13798,7 +13798,7 @@
                           <a:ea typeface="Arial" pitchFamily="34" charset="-122"/>
                           <a:cs typeface="Arial" pitchFamily="34" charset="-120"/>
                         </a:rPr>
-                        <a:t>5件</a:t>
+                        <a:t>4件</a:t>
                       </a:r>
                       <a:endParaRPr lang="en-US" sz="900" dirty="0">
                         <a:latin typeface="Arial" charset="0"/>
@@ -13936,7 +13936,7 @@
                           <a:ea typeface="Arial" pitchFamily="34" charset="-122"/>
                           <a:cs typeface="Arial" pitchFamily="34" charset="-120"/>
                         </a:rPr>
-                        <a:t>設備の老朽化</a:t>
+                        <a:t>部屋の狭さ</a:t>
                       </a:r>
                       <a:endParaRPr lang="en-US" sz="900" dirty="0">
                         <a:latin typeface="Arial" charset="0"/>
@@ -14004,7 +14004,7 @@
                           <a:ea typeface="Arial" pitchFamily="34" charset="-122"/>
                           <a:cs typeface="Arial" pitchFamily="34" charset="-120"/>
                         </a:rPr>
-                        <a:t>部屋は湿気臭がして、かなり老朽化していました</a:t>
+                        <a:t>Affordable hotel stayed 6 nights room was small but worke...</a:t>
                       </a:r>
                       <a:endParaRPr lang="en-US" sz="900" dirty="0">
                         <a:latin typeface="Arial" charset="0"/>
@@ -14072,7 +14072,7 @@
                           <a:ea typeface="Arial" pitchFamily="34" charset="-122"/>
                           <a:cs typeface="Arial" pitchFamily="34" charset="-120"/>
                         </a:rPr>
-                        <a:t>4件</a:t>
+                        <a:t>3件</a:t>
                       </a:r>
                       <a:endParaRPr lang="en-US" sz="900" dirty="0">
                         <a:latin typeface="Arial" charset="0"/>

--- a/納品レポート/ホテル別レポート/hearton_口コミ分析レポート.pptx
+++ b/納品レポート/ホテル別レポート/hearton_口コミ分析レポート.pptx
@@ -208,7 +208,7 @@
                 <c:formatCode>General</c:formatCode>
                 <c:ptCount val="6"/>
                 <c:pt idx="0">
-                  <c:v>9.38</c:v>
+                  <c:v>9.35</c:v>
                 </c:pt>
                 <c:pt idx="1">
                   <c:v>8.75</c:v>
@@ -223,7 +223,7 @@
                   <c:v>8.46</c:v>
                 </c:pt>
                 <c:pt idx="5">
-                  <c:v>7.75</c:v>
+                  <c:v>7.78</c:v>
                 </c:pt>
               </c:numCache>
             </c:numRef>
@@ -781,13 +781,13 @@
                 <c:formatCode>General</c:formatCode>
                 <c:ptCount val="6"/>
                 <c:pt idx="0">
-                  <c:v>64</c:v>
+                  <c:v>63</c:v>
                 </c:pt>
                 <c:pt idx="1">
                   <c:v>7</c:v>
                 </c:pt>
                 <c:pt idx="2">
-                  <c:v>44</c:v>
+                  <c:v>45</c:v>
                 </c:pt>
                 <c:pt idx="3">
                   <c:v>7</c:v>
@@ -2767,7 +2767,7 @@
                 <a:ea typeface="Arial" pitchFamily="34" charset="-122"/>
                 <a:cs typeface="Arial" pitchFamily="34" charset="-120"/>
               </a:rPr>
-              <a:t>作成日：2026年3月25日</a:t>
+              <a:t>作成日：2026年3月26日</a:t>
             </a:r>
             <a:endParaRPr lang="en-US" sz="1000" dirty="0"/>
           </a:p>
@@ -3313,7 +3313,7 @@
                           <a:ea typeface="Arial" pitchFamily="34" charset="-122"/>
                           <a:cs typeface="Arial" pitchFamily="34" charset="-120"/>
                         </a:rPr>
-                        <a:t>8.67点</a:t>
+                        <a:t>8.65点</a:t>
                       </a:r>
                       <a:endParaRPr lang="en-US" sz="1000" dirty="0">
                         <a:latin typeface="Arial" charset="0"/>
@@ -5322,7 +5322,7 @@
                 <a:ea typeface="Arial" pitchFamily="34" charset="-122"/>
                 <a:cs typeface="Arial" pitchFamily="34" charset="-120"/>
               </a:rPr>
-              <a:t>8.67</a:t>
+              <a:t>8.65</a:t>
             </a:r>
             <a:endParaRPr lang="en-US" sz="3200" dirty="0"/>
           </a:p>
@@ -5845,7 +5845,7 @@
                 <a:ea typeface="Arial" pitchFamily="34" charset="-122"/>
                 <a:cs typeface="Arial" pitchFamily="34" charset="-120"/>
               </a:rPr>
-              <a:t>  駅からも近くて良かったです</a:t>
+              <a:t>  しかし、品川海浜駅の向かいに位置し、青物横町駅から徒歩約15分という好立地なので、アクセスはかなり楽です</a:t>
             </a:r>
             <a:endParaRPr lang="en-US" sz="1100" dirty="0"/>
           </a:p>
@@ -5885,7 +5885,7 @@
                 <a:ea typeface="Arial" pitchFamily="34" charset="-122"/>
                 <a:cs typeface="Arial" pitchFamily="34" charset="-120"/>
               </a:rPr>
-              <a:t>  「ホテルの建物内は清潔で、朝食付きで料金も非常にリーズナブルだったと思います</a:t>
+              <a:t>  ホテルは清潔そのもので、スタッフの方々もとても親切です</a:t>
             </a:r>
             <a:endParaRPr lang="en-US" sz="1100" dirty="0"/>
           </a:p>
@@ -5925,7 +5925,7 @@
                 <a:ea typeface="Arial" pitchFamily="34" charset="-122"/>
                 <a:cs typeface="Arial" pitchFamily="34" charset="-120"/>
               </a:rPr>
-              <a:t>  The front desk staff were really nice and helpful and eve...</a:t>
+              <a:t>  ホテルは清潔そのもので、スタッフの方々もとても親切です</a:t>
             </a:r>
             <a:endParaRPr lang="en-US" sz="1100" dirty="0"/>
           </a:p>
@@ -6506,7 +6506,7 @@
                 <a:ea typeface="Arial" pitchFamily="34" charset="-122"/>
                 <a:cs typeface="Arial" pitchFamily="34" charset="-120"/>
               </a:rPr>
-              <a:t>8.67</a:t>
+              <a:t>8.65</a:t>
             </a:r>
             <a:endParaRPr lang="en-US" sz="3200" dirty="0"/>
           </a:p>
@@ -7302,7 +7302,7 @@
                 <a:ea typeface="Arial" pitchFamily="34" charset="-122"/>
                 <a:cs typeface="Arial" pitchFamily="34" charset="-120"/>
               </a:rPr>
-              <a:t>Trip.com(9.38)が最高スコア。</a:t>
+              <a:t>Trip.com(9.35)が最高スコア。</a:t>
             </a:r>
             <a:endParaRPr lang="en-US" sz="1100" dirty="0"/>
           </a:p>
@@ -7860,7 +7860,7 @@
                           <a:ea typeface="Arial" pitchFamily="34" charset="-122"/>
                           <a:cs typeface="Arial" pitchFamily="34" charset="-120"/>
                         </a:rPr>
-                        <a:t>24</a:t>
+                        <a:t>23</a:t>
                       </a:r>
                       <a:endParaRPr lang="en-US" sz="900" dirty="0">
                         <a:latin typeface="Arial" charset="0"/>
@@ -7928,7 +7928,7 @@
                           <a:ea typeface="Arial" pitchFamily="34" charset="-122"/>
                           <a:cs typeface="Arial" pitchFamily="34" charset="-120"/>
                         </a:rPr>
-                        <a:t>9.38</a:t>
+                        <a:t>9.35</a:t>
                       </a:r>
                       <a:endParaRPr lang="en-US" sz="900" dirty="0">
                         <a:latin typeface="Arial" charset="0"/>
@@ -8064,7 +8064,7 @@
                           <a:ea typeface="Arial" pitchFamily="34" charset="-122"/>
                           <a:cs typeface="Arial" pitchFamily="34" charset="-120"/>
                         </a:rPr>
-                        <a:t>9.38</a:t>
+                        <a:t>9.35</a:t>
                       </a:r>
                       <a:endParaRPr lang="en-US" sz="900" dirty="0">
                         <a:latin typeface="Arial" charset="0"/>
@@ -9570,7 +9570,7 @@
                           <a:ea typeface="Arial" pitchFamily="34" charset="-122"/>
                           <a:cs typeface="Arial" pitchFamily="34" charset="-120"/>
                         </a:rPr>
-                        <a:t>8</a:t>
+                        <a:t>9</a:t>
                       </a:r>
                       <a:endParaRPr lang="en-US" sz="900" dirty="0">
                         <a:latin typeface="Arial" charset="0"/>
@@ -9638,7 +9638,7 @@
                           <a:ea typeface="Arial" pitchFamily="34" charset="-122"/>
                           <a:cs typeface="Arial" pitchFamily="34" charset="-120"/>
                         </a:rPr>
-                        <a:t>3.88</a:t>
+                        <a:t>3.89</a:t>
                       </a:r>
                       <a:endParaRPr lang="en-US" sz="900" dirty="0">
                         <a:latin typeface="Arial" charset="0"/>
@@ -9774,7 +9774,7 @@
                           <a:ea typeface="Arial" pitchFamily="34" charset="-122"/>
                           <a:cs typeface="Arial" pitchFamily="34" charset="-120"/>
                         </a:rPr>
-                        <a:t>7.75</a:t>
+                        <a:t>7.78</a:t>
                       </a:r>
                       <a:endParaRPr lang="en-US" sz="900" dirty="0">
                         <a:latin typeface="Arial" charset="0"/>
@@ -10790,7 +10790,7 @@
                 <a:ea typeface="Arial" pitchFamily="34" charset="-122"/>
                 <a:cs typeface="Arial" pitchFamily="34" charset="-120"/>
               </a:rPr>
-              <a:t>駅からも近くて良かったです</a:t>
+              <a:t>しかし、品川海浜駅の向かいに位置し、青物横町駅から徒歩約15分という好立地なので、アクセスはかなり楽です</a:t>
             </a:r>
             <a:endParaRPr lang="en-US" sz="900" dirty="0"/>
           </a:p>
@@ -10829,7 +10829,7 @@
                 <a:ea typeface="Arial" pitchFamily="34" charset="-122"/>
                 <a:cs typeface="Arial" pitchFamily="34" charset="-120"/>
               </a:rPr>
-              <a:t>「駅が近い  商業施設が近い 駐車場有だったが、大きく高さの有る車は入らない  朝ごはん、トースターが付いてたらあの...」</a:t>
+              <a:t>「駅からも近くて良かったです」</a:t>
             </a:r>
             <a:endParaRPr lang="en-US" sz="900" dirty="0"/>
           </a:p>
@@ -11013,7 +11013,7 @@
                 <a:ea typeface="Arial" pitchFamily="34" charset="-122"/>
                 <a:cs typeface="Arial" pitchFamily="34" charset="-120"/>
               </a:rPr>
-              <a:t>「ホテルの建物内は清潔で、朝食付きで料金も非常にリーズナブルだったと思います</a:t>
+              <a:t>ホテルは清潔そのもので、スタッフの方々もとても親切です</a:t>
             </a:r>
             <a:endParaRPr lang="en-US" sz="900" dirty="0"/>
           </a:p>
@@ -11052,7 +11052,7 @@
                 <a:ea typeface="Arial" pitchFamily="34" charset="-122"/>
                 <a:cs typeface="Arial" pitchFamily="34" charset="-120"/>
               </a:rPr>
-              <a:t>「洗面所周りが広く全体的に綺麗でお安くお得感があった」</a:t>
+              <a:t>「「ホテルの建物内は清潔で、朝食付きで料金も非常にリーズナブルだったと思います」</a:t>
             </a:r>
             <a:endParaRPr lang="en-US" sz="900" dirty="0"/>
           </a:p>
@@ -11236,7 +11236,7 @@
                 <a:ea typeface="Arial" pitchFamily="34" charset="-122"/>
                 <a:cs typeface="Arial" pitchFamily="34" charset="-120"/>
               </a:rPr>
-              <a:t>The front desk staff were really nice and helpful and eve...</a:t>
+              <a:t>ホテルは清潔そのもので、スタッフの方々もとても親切です</a:t>
             </a:r>
             <a:endParaRPr lang="en-US" sz="900" dirty="0"/>
           </a:p>
@@ -11275,7 +11275,7 @@
                 <a:ea typeface="Arial" pitchFamily="34" charset="-122"/>
                 <a:cs typeface="Arial" pitchFamily="34" charset="-120"/>
               </a:rPr>
-              <a:t>「深夜のチェックインになってしまったにもかかわらず親切に対応していただきました」</a:t>
+              <a:t>「The front desk staff were really nice and helpful and eve...」</a:t>
             </a:r>
             <a:endParaRPr lang="en-US" sz="900" dirty="0"/>
           </a:p>

--- a/納品レポート/ホテル別レポート/hearton_口コミ分析レポート.pptx
+++ b/納品レポート/ホテル別レポート/hearton_口コミ分析レポート.pptx
@@ -208,7 +208,7 @@
                 <c:formatCode>General</c:formatCode>
                 <c:ptCount val="6"/>
                 <c:pt idx="0">
-                  <c:v>9.35</c:v>
+                  <c:v>9.43</c:v>
                 </c:pt>
                 <c:pt idx="1">
                   <c:v>8.75</c:v>
@@ -217,13 +217,13 @@
                   <c:v>8.58</c:v>
                 </c:pt>
                 <c:pt idx="3">
-                  <c:v>8.52</c:v>
+                  <c:v>8.55</c:v>
                 </c:pt>
                 <c:pt idx="4">
-                  <c:v>8.46</c:v>
+                  <c:v>8.45</c:v>
                 </c:pt>
                 <c:pt idx="5">
-                  <c:v>7.78</c:v>
+                  <c:v>6.8</c:v>
                 </c:pt>
               </c:numCache>
             </c:numRef>
@@ -572,7 +572,7 @@
                   <c:v>22</c:v>
                 </c:pt>
                 <c:pt idx="2">
-                  <c:v>1</c:v>
+                  <c:v>2</c:v>
                 </c:pt>
               </c:numCache>
             </c:numRef>
@@ -781,22 +781,22 @@
                 <c:formatCode>General</c:formatCode>
                 <c:ptCount val="6"/>
                 <c:pt idx="0">
-                  <c:v>63</c:v>
+                  <c:v>62</c:v>
                 </c:pt>
                 <c:pt idx="1">
-                  <c:v>7</c:v>
+                  <c:v>8</c:v>
                 </c:pt>
                 <c:pt idx="2">
                   <c:v>45</c:v>
                 </c:pt>
                 <c:pt idx="3">
-                  <c:v>7</c:v>
+                  <c:v>6</c:v>
                 </c:pt>
                 <c:pt idx="4">
-                  <c:v>15</c:v>
+                  <c:v>16</c:v>
                 </c:pt>
                 <c:pt idx="5">
-                  <c:v>1</c:v>
+                  <c:v>2</c:v>
                 </c:pt>
               </c:numCache>
             </c:numRef>
@@ -2747,7 +2747,7 @@
                 <a:ea typeface="Arial" pitchFamily="34" charset="-122"/>
                 <a:cs typeface="Arial" pitchFamily="34" charset="-120"/>
               </a:rPr>
-              <a:t>レビュー総数：138件（6サイト）</a:t>
+              <a:t>レビュー総数：139件（6サイト）</a:t>
             </a:r>
             <a:endParaRPr lang="en-US" sz="1000" dirty="0"/>
           </a:p>
@@ -2767,7 +2767,7 @@
                 <a:ea typeface="Arial" pitchFamily="34" charset="-122"/>
                 <a:cs typeface="Arial" pitchFamily="34" charset="-120"/>
               </a:rPr>
-              <a:t>作成日：2026年3月26日</a:t>
+              <a:t>作成日：2026年3月27日</a:t>
             </a:r>
             <a:endParaRPr lang="en-US" sz="1000" dirty="0"/>
           </a:p>
@@ -3313,7 +3313,7 @@
                           <a:ea typeface="Arial" pitchFamily="34" charset="-122"/>
                           <a:cs typeface="Arial" pitchFamily="34" charset="-120"/>
                         </a:rPr>
-                        <a:t>8.65点</a:t>
+                        <a:t>8.59点</a:t>
                       </a:r>
                       <a:endParaRPr lang="en-US" sz="1000" dirty="0">
                         <a:latin typeface="Arial" charset="0"/>
@@ -3381,7 +3381,7 @@
                           <a:ea typeface="Arial" pitchFamily="34" charset="-122"/>
                           <a:cs typeface="Arial" pitchFamily="34" charset="-120"/>
                         </a:rPr>
-                        <a:t>9.0点以上</a:t>
+                        <a:t>8.9点以上</a:t>
                       </a:r>
                       <a:endParaRPr lang="en-US" sz="1000" dirty="0">
                         <a:latin typeface="Arial" charset="0"/>
@@ -3587,7 +3587,7 @@
                           <a:ea typeface="Arial" pitchFamily="34" charset="-122"/>
                           <a:cs typeface="Arial" pitchFamily="34" charset="-120"/>
                         </a:rPr>
-                        <a:t>83.3%</a:t>
+                        <a:t>82.7%</a:t>
                       </a:r>
                       <a:endParaRPr lang="en-US" sz="1000" dirty="0">
                         <a:latin typeface="Arial" charset="0"/>
@@ -3861,7 +3861,7 @@
                           <a:ea typeface="Arial" pitchFamily="34" charset="-122"/>
                           <a:cs typeface="Arial" pitchFamily="34" charset="-120"/>
                         </a:rPr>
-                        <a:t>0.7%</a:t>
+                        <a:t>1.4%</a:t>
                       </a:r>
                       <a:endParaRPr lang="en-US" sz="1000" dirty="0">
                         <a:latin typeface="Arial" charset="0"/>
@@ -4135,7 +4135,7 @@
                           <a:ea typeface="Arial" pitchFamily="34" charset="-122"/>
                           <a:cs typeface="Arial" pitchFamily="34" charset="-120"/>
                         </a:rPr>
-                        <a:t>7.8点</a:t>
+                        <a:t>6.8点</a:t>
                       </a:r>
                       <a:endParaRPr lang="en-US" sz="1000" dirty="0">
                         <a:latin typeface="Arial" charset="0"/>
@@ -4203,7 +4203,7 @@
                           <a:ea typeface="Arial" pitchFamily="34" charset="-122"/>
                           <a:cs typeface="Arial" pitchFamily="34" charset="-120"/>
                         </a:rPr>
-                        <a:t>8.8点以上</a:t>
+                        <a:t>7.8点以上</a:t>
                       </a:r>
                       <a:endParaRPr lang="en-US" sz="1000" dirty="0">
                         <a:latin typeface="Arial" charset="0"/>
@@ -5322,7 +5322,7 @@
                 <a:ea typeface="Arial" pitchFamily="34" charset="-122"/>
                 <a:cs typeface="Arial" pitchFamily="34" charset="-120"/>
               </a:rPr>
-              <a:t>8.65</a:t>
+              <a:t>8.59</a:t>
             </a:r>
             <a:endParaRPr lang="en-US" sz="3200" dirty="0"/>
           </a:p>
@@ -5447,7 +5447,7 @@
                 <a:ea typeface="Arial" pitchFamily="34" charset="-122"/>
                 <a:cs typeface="Arial" pitchFamily="34" charset="-120"/>
               </a:rPr>
-              <a:t>83.3%</a:t>
+              <a:t>82.7%</a:t>
             </a:r>
             <a:endParaRPr lang="en-US" sz="3200" dirty="0"/>
           </a:p>
@@ -5572,7 +5572,7 @@
                 <a:ea typeface="Arial" pitchFamily="34" charset="-122"/>
                 <a:cs typeface="Arial" pitchFamily="34" charset="-120"/>
               </a:rPr>
-              <a:t>0.7%</a:t>
+              <a:t>1.4%</a:t>
             </a:r>
             <a:endParaRPr lang="en-US" sz="3200" dirty="0"/>
           </a:p>
@@ -5697,7 +5697,7 @@
                 <a:ea typeface="Arial" pitchFamily="34" charset="-122"/>
                 <a:cs typeface="Arial" pitchFamily="34" charset="-120"/>
               </a:rPr>
-              <a:t>138件</a:t>
+              <a:t>139件</a:t>
             </a:r>
             <a:endParaRPr lang="en-US" sz="3200" dirty="0"/>
           </a:p>
@@ -5845,7 +5845,7 @@
                 <a:ea typeface="Arial" pitchFamily="34" charset="-122"/>
                 <a:cs typeface="Arial" pitchFamily="34" charset="-120"/>
               </a:rPr>
-              <a:t>  しかし、品川海浜駅の向かいに位置し、青物横町駅から徒歩約15分という好立地なので、アクセスはかなり楽です</a:t>
+              <a:t>  お風呂も広いし 部屋も綺麗 アクセスもいいし、また利用したいです</a:t>
             </a:r>
             <a:endParaRPr lang="en-US" sz="1100" dirty="0"/>
           </a:p>
@@ -5885,7 +5885,7 @@
                 <a:ea typeface="Arial" pitchFamily="34" charset="-122"/>
                 <a:cs typeface="Arial" pitchFamily="34" charset="-120"/>
               </a:rPr>
-              <a:t>  ホテルは清潔そのもので、スタッフの方々もとても親切です</a:t>
+              <a:t>  お風呂も広いし 部屋も綺麗 アクセスもいいし、また利用したいです</a:t>
             </a:r>
             <a:endParaRPr lang="en-US" sz="1100" dirty="0"/>
           </a:p>
@@ -6133,7 +6133,7 @@
                 <a:ea typeface="Arial" pitchFamily="34" charset="-122"/>
                 <a:cs typeface="Arial" pitchFamily="34" charset="-120"/>
               </a:rPr>
-              <a:t>臭い・匂い </a:t>
+              <a:t>対応・サービスの不満 </a:t>
             </a:r>
             <a:endParaRPr lang="en-US" sz="1100" dirty="0"/>
           </a:p>
@@ -6153,7 +6153,7 @@
                 <a:ea typeface="Arial" pitchFamily="34" charset="-122"/>
                 <a:cs typeface="Arial" pitchFamily="34" charset="-120"/>
               </a:rPr>
-              <a:t>  Drink vending machine , ice cream vending machine , curre...</a:t>
+              <a:t>  ただ1つだけその長所を台無しにするのが9時頃からの他の部屋の清掃、外国人スタッフさんなのか話しながら作業しておりガ...</a:t>
             </a:r>
             <a:endParaRPr lang="en-US" sz="1100" dirty="0"/>
           </a:p>
@@ -6506,7 +6506,7 @@
                 <a:ea typeface="Arial" pitchFamily="34" charset="-122"/>
                 <a:cs typeface="Arial" pitchFamily="34" charset="-120"/>
               </a:rPr>
-              <a:t>8.65</a:t>
+              <a:t>8.59</a:t>
             </a:r>
             <a:endParaRPr lang="en-US" sz="3200" dirty="0"/>
           </a:p>
@@ -6631,7 +6631,7 @@
                 <a:ea typeface="Arial" pitchFamily="34" charset="-122"/>
                 <a:cs typeface="Arial" pitchFamily="34" charset="-120"/>
               </a:rPr>
-              <a:t>83.3%</a:t>
+              <a:t>82.7%</a:t>
             </a:r>
             <a:endParaRPr lang="en-US" sz="3200" dirty="0"/>
           </a:p>
@@ -6756,7 +6756,7 @@
                 <a:ea typeface="Arial" pitchFamily="34" charset="-122"/>
                 <a:cs typeface="Arial" pitchFamily="34" charset="-120"/>
               </a:rPr>
-              <a:t>0.7%</a:t>
+              <a:t>1.4%</a:t>
             </a:r>
             <a:endParaRPr lang="en-US" sz="3200" dirty="0"/>
           </a:p>
@@ -6881,7 +6881,7 @@
                 <a:ea typeface="Arial" pitchFamily="34" charset="-122"/>
                 <a:cs typeface="Arial" pitchFamily="34" charset="-120"/>
               </a:rPr>
-              <a:t>138件</a:t>
+              <a:t>139件</a:t>
             </a:r>
             <a:endParaRPr lang="en-US" sz="3200" dirty="0"/>
           </a:p>
@@ -7302,7 +7302,7 @@
                 <a:ea typeface="Arial" pitchFamily="34" charset="-122"/>
                 <a:cs typeface="Arial" pitchFamily="34" charset="-120"/>
               </a:rPr>
-              <a:t>Trip.com(9.35)が最高スコア。</a:t>
+              <a:t>Trip.com(9.43)が最高スコア。</a:t>
             </a:r>
             <a:endParaRPr lang="en-US" sz="1100" dirty="0"/>
           </a:p>
@@ -7351,7 +7351,7 @@
                 <a:ea typeface="Arial" pitchFamily="34" charset="-122"/>
                 <a:cs typeface="Arial" pitchFamily="34" charset="-120"/>
               </a:rPr>
-              <a:t>Google(7.8)が相対的に低い。口コミ返信の強化が急務</a:t>
+              <a:t>Google(6.8)が相対的に低い。口コミ返信の強化が急務</a:t>
             </a:r>
             <a:endParaRPr lang="en-US" sz="1100" dirty="0"/>
           </a:p>
@@ -7928,7 +7928,7 @@
                           <a:ea typeface="Arial" pitchFamily="34" charset="-122"/>
                           <a:cs typeface="Arial" pitchFamily="34" charset="-120"/>
                         </a:rPr>
-                        <a:t>9.35</a:t>
+                        <a:t>9.43</a:t>
                       </a:r>
                       <a:endParaRPr lang="en-US" sz="900" dirty="0">
                         <a:latin typeface="Arial" charset="0"/>
@@ -8064,7 +8064,7 @@
                           <a:ea typeface="Arial" pitchFamily="34" charset="-122"/>
                           <a:cs typeface="Arial" pitchFamily="34" charset="-120"/>
                         </a:rPr>
-                        <a:t>9.35</a:t>
+                        <a:t>9.43</a:t>
                       </a:r>
                       <a:endParaRPr lang="en-US" sz="900" dirty="0">
                         <a:latin typeface="Arial" charset="0"/>
@@ -8886,7 +8886,7 @@
                           <a:ea typeface="Arial" pitchFamily="34" charset="-122"/>
                           <a:cs typeface="Arial" pitchFamily="34" charset="-120"/>
                         </a:rPr>
-                        <a:t>23</a:t>
+                        <a:t>22</a:t>
                       </a:r>
                       <a:endParaRPr lang="en-US" sz="900" dirty="0">
                         <a:latin typeface="Arial" charset="0"/>
@@ -8954,7 +8954,7 @@
                           <a:ea typeface="Arial" pitchFamily="34" charset="-122"/>
                           <a:cs typeface="Arial" pitchFamily="34" charset="-120"/>
                         </a:rPr>
-                        <a:t>8.52</a:t>
+                        <a:t>8.55</a:t>
                       </a:r>
                       <a:endParaRPr lang="en-US" sz="900" dirty="0">
                         <a:latin typeface="Arial" charset="0"/>
@@ -9090,7 +9090,7 @@
                           <a:ea typeface="Arial" pitchFamily="34" charset="-122"/>
                           <a:cs typeface="Arial" pitchFamily="34" charset="-120"/>
                         </a:rPr>
-                        <a:t>8.52</a:t>
+                        <a:t>8.55</a:t>
                       </a:r>
                       <a:endParaRPr lang="en-US" sz="900" dirty="0">
                         <a:latin typeface="Arial" charset="0"/>
@@ -9228,7 +9228,7 @@
                           <a:ea typeface="Arial" pitchFamily="34" charset="-122"/>
                           <a:cs typeface="Arial" pitchFamily="34" charset="-120"/>
                         </a:rPr>
-                        <a:t>39</a:t>
+                        <a:t>40</a:t>
                       </a:r>
                       <a:endParaRPr lang="en-US" sz="900" dirty="0">
                         <a:latin typeface="Arial" charset="0"/>
@@ -9296,7 +9296,7 @@
                           <a:ea typeface="Arial" pitchFamily="34" charset="-122"/>
                           <a:cs typeface="Arial" pitchFamily="34" charset="-120"/>
                         </a:rPr>
-                        <a:t>4.23</a:t>
+                        <a:t>4.22</a:t>
                       </a:r>
                       <a:endParaRPr lang="en-US" sz="900" dirty="0">
                         <a:latin typeface="Arial" charset="0"/>
@@ -9432,7 +9432,7 @@
                           <a:ea typeface="Arial" pitchFamily="34" charset="-122"/>
                           <a:cs typeface="Arial" pitchFamily="34" charset="-120"/>
                         </a:rPr>
-                        <a:t>8.46</a:t>
+                        <a:t>8.45</a:t>
                       </a:r>
                       <a:endParaRPr lang="en-US" sz="900" dirty="0">
                         <a:latin typeface="Arial" charset="0"/>
@@ -9570,7 +9570,7 @@
                           <a:ea typeface="Arial" pitchFamily="34" charset="-122"/>
                           <a:cs typeface="Arial" pitchFamily="34" charset="-120"/>
                         </a:rPr>
-                        <a:t>9</a:t>
+                        <a:t>10</a:t>
                       </a:r>
                       <a:endParaRPr lang="en-US" sz="900" dirty="0">
                         <a:latin typeface="Arial" charset="0"/>
@@ -9638,7 +9638,7 @@
                           <a:ea typeface="Arial" pitchFamily="34" charset="-122"/>
                           <a:cs typeface="Arial" pitchFamily="34" charset="-120"/>
                         </a:rPr>
-                        <a:t>3.89</a:t>
+                        <a:t>3.4</a:t>
                       </a:r>
                       <a:endParaRPr lang="en-US" sz="900" dirty="0">
                         <a:latin typeface="Arial" charset="0"/>
@@ -9774,7 +9774,7 @@
                           <a:ea typeface="Arial" pitchFamily="34" charset="-122"/>
                           <a:cs typeface="Arial" pitchFamily="34" charset="-120"/>
                         </a:rPr>
-                        <a:t>7.78</a:t>
+                        <a:t>6.8</a:t>
                       </a:r>
                       <a:endParaRPr lang="en-US" sz="900" dirty="0">
                         <a:latin typeface="Arial" charset="0"/>
@@ -10182,7 +10182,7 @@
                 <a:ea typeface="Arial" pitchFamily="34" charset="-122"/>
                 <a:cs typeface="Arial" pitchFamily="34" charset="-120"/>
               </a:rPr>
-              <a:t>115件（83.3%）</a:t>
+              <a:t>115件（82.7%）</a:t>
             </a:r>
             <a:endParaRPr lang="en-US" sz="1100" dirty="0"/>
           </a:p>
@@ -10280,7 +10280,7 @@
                 <a:ea typeface="Arial" pitchFamily="34" charset="-122"/>
                 <a:cs typeface="Arial" pitchFamily="34" charset="-120"/>
               </a:rPr>
-              <a:t>22件（15.9%）</a:t>
+              <a:t>22件（15.8%）</a:t>
             </a:r>
             <a:endParaRPr lang="en-US" sz="1100" dirty="0"/>
           </a:p>
@@ -10378,7 +10378,7 @@
                 <a:ea typeface="Arial" pitchFamily="34" charset="-122"/>
                 <a:cs typeface="Arial" pitchFamily="34" charset="-120"/>
               </a:rPr>
-              <a:t>1件（0.7%）</a:t>
+              <a:t>2件（1.4%）</a:t>
             </a:r>
             <a:endParaRPr lang="en-US" sz="1100" dirty="0"/>
           </a:p>
@@ -10790,7 +10790,7 @@
                 <a:ea typeface="Arial" pitchFamily="34" charset="-122"/>
                 <a:cs typeface="Arial" pitchFamily="34" charset="-120"/>
               </a:rPr>
-              <a:t>しかし、品川海浜駅の向かいに位置し、青物横町駅から徒歩約15分という好立地なので、アクセスはかなり楽です</a:t>
+              <a:t>お風呂も広いし 部屋も綺麗 アクセスもいいし、また利用したいです</a:t>
             </a:r>
             <a:endParaRPr lang="en-US" sz="900" dirty="0"/>
           </a:p>
@@ -10829,7 +10829,7 @@
                 <a:ea typeface="Arial" pitchFamily="34" charset="-122"/>
                 <a:cs typeface="Arial" pitchFamily="34" charset="-120"/>
               </a:rPr>
-              <a:t>「駅からも近くて良かったです」</a:t>
+              <a:t>「交通非常方便，超市就在隔鄰非常安靜，品川駅至酒店的士1600日元非常便宜」</a:t>
             </a:r>
             <a:endParaRPr lang="en-US" sz="900" dirty="0"/>
           </a:p>
@@ -11013,7 +11013,7 @@
                 <a:ea typeface="Arial" pitchFamily="34" charset="-122"/>
                 <a:cs typeface="Arial" pitchFamily="34" charset="-120"/>
               </a:rPr>
-              <a:t>ホテルは清潔そのもので、スタッフの方々もとても親切です</a:t>
+              <a:t>お風呂も広いし 部屋も綺麗 アクセスもいいし、また利用したいです</a:t>
             </a:r>
             <a:endParaRPr lang="en-US" sz="900" dirty="0"/>
           </a:p>
@@ -11052,7 +11052,7 @@
                 <a:ea typeface="Arial" pitchFamily="34" charset="-122"/>
                 <a:cs typeface="Arial" pitchFamily="34" charset="-120"/>
               </a:rPr>
-              <a:t>「「ホテルの建物内は清潔で、朝食付きで料金も非常にリーズナブルだったと思います」</a:t>
+              <a:t>「ホテルは清潔そのもので、スタッフの方々もとても親切です」</a:t>
             </a:r>
             <a:endParaRPr lang="en-US" sz="900" dirty="0"/>
           </a:p>
@@ -11275,7 +11275,7 @@
                 <a:ea typeface="Arial" pitchFamily="34" charset="-122"/>
                 <a:cs typeface="Arial" pitchFamily="34" charset="-120"/>
               </a:rPr>
-              <a:t>「The front desk staff were really nice and helpful and eve...」</a:t>
+              <a:t>「ただ1つだけその長所を台無しにするのが9時頃からの他の部屋の清掃、外国人スタッフさんなのか話しながら作業しておりガ...」</a:t>
             </a:r>
             <a:endParaRPr lang="en-US" sz="900" dirty="0"/>
           </a:p>
@@ -11420,6 +11420,229 @@
                 <a:ea typeface="Arial" pitchFamily="34" charset="-122"/>
                 <a:cs typeface="Arial" pitchFamily="34" charset="-120"/>
               </a:rPr>
+              <a:t>コンビニ・周辺施設</a:t>
+            </a:r>
+            <a:endParaRPr lang="en-US" sz="1300" dirty="0"/>
+          </a:p>
+        </p:txBody>
+      </p:sp>
+      <p:sp>
+        <p:nvSpPr>
+          <p:cNvPr id="31" name="Text 29"/>
+          <p:cNvSpPr/>
+          <p:nvPr/>
+        </p:nvSpPr>
+        <p:spPr>
+          <a:xfrm>
+            <a:off x="594360" y="3246120"/>
+            <a:ext cx="2377440" cy="365760"/>
+          </a:xfrm>
+          <a:prstGeom prst="rect">
+            <a:avLst/>
+          </a:prstGeom>
+          <a:noFill/>
+          <a:ln/>
+        </p:spPr>
+        <p:txBody>
+          <a:bodyPr wrap="square" lIns="0" tIns="0" rIns="0" bIns="0" rtlCol="0" anchor="ctr"/>
+          <a:lstStyle/>
+          <a:p>
+            <a:pPr indent="0" marL="0">
+              <a:buNone/>
+            </a:pPr>
+            <a:r>
+              <a:rPr lang="en-US" sz="900" dirty="0">
+                <a:solidFill>
+                  <a:srgbClr val="64748B"/>
+                </a:solidFill>
+                <a:latin typeface="Arial" pitchFamily="34" charset="0"/>
+                <a:ea typeface="Arial" pitchFamily="34" charset="-122"/>
+                <a:cs typeface="Arial" pitchFamily="34" charset="-120"/>
+              </a:rPr>
+              <a:t>交通の便が非常に良く、スーパーマーケットはすぐ隣にあり、とても静かです</a:t>
+            </a:r>
+            <a:endParaRPr lang="en-US" sz="900" dirty="0"/>
+          </a:p>
+        </p:txBody>
+      </p:sp>
+      <p:sp>
+        <p:nvSpPr>
+          <p:cNvPr id="32" name="Text 30"/>
+          <p:cNvSpPr/>
+          <p:nvPr/>
+        </p:nvSpPr>
+        <p:spPr>
+          <a:xfrm>
+            <a:off x="594360" y="3657600"/>
+            <a:ext cx="2377440" cy="640080"/>
+          </a:xfrm>
+          <a:prstGeom prst="rect">
+            <a:avLst/>
+          </a:prstGeom>
+          <a:noFill/>
+          <a:ln/>
+        </p:spPr>
+        <p:txBody>
+          <a:bodyPr wrap="square" lIns="0" tIns="0" rIns="0" bIns="0" rtlCol="0" anchor="ctr"/>
+          <a:lstStyle/>
+          <a:p>
+            <a:pPr indent="0" marL="0">
+              <a:buNone/>
+            </a:pPr>
+            <a:r>
+              <a:rPr lang="en-US" sz="900" i="1" dirty="0">
+                <a:solidFill>
+                  <a:srgbClr val="3B7DD8"/>
+                </a:solidFill>
+                <a:latin typeface="Arial" pitchFamily="34" charset="0"/>
+                <a:ea typeface="Arial" pitchFamily="34" charset="-122"/>
+                <a:cs typeface="Arial" pitchFamily="34" charset="-120"/>
+              </a:rPr>
+              <a:t>「駅近で徒歩圏内に飲食店やスーパーもあり受付の方の対応も良く、部屋も綺麗、何よりチェックアウト時間も12時と遅めで良い」</a:t>
+            </a:r>
+            <a:endParaRPr lang="en-US" sz="900" dirty="0"/>
+          </a:p>
+        </p:txBody>
+      </p:sp>
+      <p:sp>
+        <p:nvSpPr>
+          <p:cNvPr id="33" name="Shape 31"/>
+          <p:cNvSpPr/>
+          <p:nvPr/>
+        </p:nvSpPr>
+        <p:spPr>
+          <a:xfrm>
+            <a:off x="3291840" y="2880360"/>
+            <a:ext cx="2651760" cy="1600200"/>
+          </a:xfrm>
+          <a:prstGeom prst="rect">
+            <a:avLst/>
+          </a:prstGeom>
+          <a:solidFill>
+            <a:srgbClr val="FFFFFF"/>
+          </a:solidFill>
+          <a:ln/>
+          <a:effectLst>
+            <a:outerShdw sx="100000" sy="100000" kx="0" ky="0" algn="bl" rotWithShape="0" blurRad="50800" dist="25400" dir="8100000">
+              <a:srgbClr val="000000">
+                <a:alpha val="10000"/>
+              </a:srgbClr>
+            </a:outerShdw>
+          </a:effectLst>
+        </p:spPr>
+      </p:sp>
+      <p:sp>
+        <p:nvSpPr>
+          <p:cNvPr id="34" name="Shape 32"/>
+          <p:cNvSpPr/>
+          <p:nvPr/>
+        </p:nvSpPr>
+        <p:spPr>
+          <a:xfrm>
+            <a:off x="3291840" y="2880360"/>
+            <a:ext cx="54864" cy="1600200"/>
+          </a:xfrm>
+          <a:prstGeom prst="rect">
+            <a:avLst/>
+          </a:prstGeom>
+          <a:solidFill>
+            <a:srgbClr val="16A34A"/>
+          </a:solidFill>
+          <a:ln/>
+        </p:spPr>
+      </p:sp>
+      <p:sp>
+        <p:nvSpPr>
+          <p:cNvPr id="35" name="Shape 33"/>
+          <p:cNvSpPr/>
+          <p:nvPr/>
+        </p:nvSpPr>
+        <p:spPr>
+          <a:xfrm>
+            <a:off x="5120640" y="2953512"/>
+            <a:ext cx="658368" cy="228600"/>
+          </a:xfrm>
+          <a:prstGeom prst="rect">
+            <a:avLst/>
+          </a:prstGeom>
+          <a:solidFill>
+            <a:srgbClr val="DCFCE7"/>
+          </a:solidFill>
+          <a:ln/>
+        </p:spPr>
+      </p:sp>
+      <p:sp>
+        <p:nvSpPr>
+          <p:cNvPr id="36" name="Text 34"/>
+          <p:cNvSpPr/>
+          <p:nvPr/>
+        </p:nvSpPr>
+        <p:spPr>
+          <a:xfrm>
+            <a:off x="5120640" y="2953512"/>
+            <a:ext cx="658368" cy="228600"/>
+          </a:xfrm>
+          <a:prstGeom prst="rect">
+            <a:avLst/>
+          </a:prstGeom>
+          <a:noFill/>
+          <a:ln/>
+        </p:spPr>
+        <p:txBody>
+          <a:bodyPr wrap="square" lIns="0" tIns="0" rIns="0" bIns="0" rtlCol="0" anchor="ctr"/>
+          <a:lstStyle/>
+          <a:p>
+            <a:pPr algn="ctr" indent="0" marL="0">
+              <a:buNone/>
+            </a:pPr>
+            <a:r>
+              <a:rPr lang="en-US" sz="900" b="1" dirty="0">
+                <a:solidFill>
+                  <a:srgbClr val="16A34A"/>
+                </a:solidFill>
+                <a:latin typeface="Arial" pitchFamily="34" charset="0"/>
+                <a:ea typeface="Arial" pitchFamily="34" charset="-122"/>
+                <a:cs typeface="Arial" pitchFamily="34" charset="-120"/>
+              </a:rPr>
+              <a:t>20件+</a:t>
+            </a:r>
+            <a:endParaRPr lang="en-US" sz="900" dirty="0"/>
+          </a:p>
+        </p:txBody>
+      </p:sp>
+      <p:sp>
+        <p:nvSpPr>
+          <p:cNvPr id="37" name="Text 35"/>
+          <p:cNvSpPr/>
+          <p:nvPr/>
+        </p:nvSpPr>
+        <p:spPr>
+          <a:xfrm>
+            <a:off x="3429000" y="2953512"/>
+            <a:ext cx="1645920" cy="274320"/>
+          </a:xfrm>
+          <a:prstGeom prst="rect">
+            <a:avLst/>
+          </a:prstGeom>
+          <a:noFill/>
+          <a:ln/>
+        </p:spPr>
+        <p:txBody>
+          <a:bodyPr wrap="square" lIns="0" tIns="0" rIns="0" bIns="0" rtlCol="0" anchor="ctr"/>
+          <a:lstStyle/>
+          <a:p>
+            <a:pPr indent="0" marL="0">
+              <a:buNone/>
+            </a:pPr>
+            <a:r>
+              <a:rPr lang="en-US" sz="1300" b="1" dirty="0">
+                <a:solidFill>
+                  <a:srgbClr val="1A2744"/>
+                </a:solidFill>
+                <a:latin typeface="Arial" pitchFamily="34" charset="0"/>
+                <a:ea typeface="Arial" pitchFamily="34" charset="-122"/>
+                <a:cs typeface="Arial" pitchFamily="34" charset="-120"/>
+              </a:rPr>
               <a:t>快適さ・設備</a:t>
             </a:r>
             <a:endParaRPr lang="en-US" sz="1300" dirty="0"/>
@@ -11428,13 +11651,13 @@
       </p:sp>
       <p:sp>
         <p:nvSpPr>
-          <p:cNvPr id="31" name="Text 29"/>
-          <p:cNvSpPr/>
-          <p:nvPr/>
-        </p:nvSpPr>
-        <p:spPr>
-          <a:xfrm>
-            <a:off x="594360" y="3246120"/>
+          <p:cNvPr id="38" name="Text 36"/>
+          <p:cNvSpPr/>
+          <p:nvPr/>
+        </p:nvSpPr>
+        <p:spPr>
+          <a:xfrm>
+            <a:off x="3429000" y="3246120"/>
             <a:ext cx="2377440" cy="365760"/>
           </a:xfrm>
           <a:prstGeom prst="rect">
@@ -11467,13 +11690,13 @@
       </p:sp>
       <p:sp>
         <p:nvSpPr>
-          <p:cNvPr id="32" name="Text 30"/>
-          <p:cNvSpPr/>
-          <p:nvPr/>
-        </p:nvSpPr>
-        <p:spPr>
-          <a:xfrm>
-            <a:off x="594360" y="3657600"/>
+          <p:cNvPr id="39" name="Text 37"/>
+          <p:cNvSpPr/>
+          <p:nvPr/>
+        </p:nvSpPr>
+        <p:spPr>
+          <a:xfrm>
+            <a:off x="3429000" y="3657600"/>
             <a:ext cx="2377440" cy="640080"/>
           </a:xfrm>
           <a:prstGeom prst="rect">
@@ -11499,229 +11722,6 @@
                 <a:cs typeface="Arial" pitchFamily="34" charset="-120"/>
               </a:rPr>
               <a:t>「The bed was really comfortable」</a:t>
-            </a:r>
-            <a:endParaRPr lang="en-US" sz="900" dirty="0"/>
-          </a:p>
-        </p:txBody>
-      </p:sp>
-      <p:sp>
-        <p:nvSpPr>
-          <p:cNvPr id="33" name="Shape 31"/>
-          <p:cNvSpPr/>
-          <p:nvPr/>
-        </p:nvSpPr>
-        <p:spPr>
-          <a:xfrm>
-            <a:off x="3291840" y="2880360"/>
-            <a:ext cx="2651760" cy="1600200"/>
-          </a:xfrm>
-          <a:prstGeom prst="rect">
-            <a:avLst/>
-          </a:prstGeom>
-          <a:solidFill>
-            <a:srgbClr val="FFFFFF"/>
-          </a:solidFill>
-          <a:ln/>
-          <a:effectLst>
-            <a:outerShdw sx="100000" sy="100000" kx="0" ky="0" algn="bl" rotWithShape="0" blurRad="50800" dist="25400" dir="8100000">
-              <a:srgbClr val="000000">
-                <a:alpha val="10000"/>
-              </a:srgbClr>
-            </a:outerShdw>
-          </a:effectLst>
-        </p:spPr>
-      </p:sp>
-      <p:sp>
-        <p:nvSpPr>
-          <p:cNvPr id="34" name="Shape 32"/>
-          <p:cNvSpPr/>
-          <p:nvPr/>
-        </p:nvSpPr>
-        <p:spPr>
-          <a:xfrm>
-            <a:off x="3291840" y="2880360"/>
-            <a:ext cx="54864" cy="1600200"/>
-          </a:xfrm>
-          <a:prstGeom prst="rect">
-            <a:avLst/>
-          </a:prstGeom>
-          <a:solidFill>
-            <a:srgbClr val="16A34A"/>
-          </a:solidFill>
-          <a:ln/>
-        </p:spPr>
-      </p:sp>
-      <p:sp>
-        <p:nvSpPr>
-          <p:cNvPr id="35" name="Shape 33"/>
-          <p:cNvSpPr/>
-          <p:nvPr/>
-        </p:nvSpPr>
-        <p:spPr>
-          <a:xfrm>
-            <a:off x="5120640" y="2953512"/>
-            <a:ext cx="658368" cy="228600"/>
-          </a:xfrm>
-          <a:prstGeom prst="rect">
-            <a:avLst/>
-          </a:prstGeom>
-          <a:solidFill>
-            <a:srgbClr val="DCFCE7"/>
-          </a:solidFill>
-          <a:ln/>
-        </p:spPr>
-      </p:sp>
-      <p:sp>
-        <p:nvSpPr>
-          <p:cNvPr id="36" name="Text 34"/>
-          <p:cNvSpPr/>
-          <p:nvPr/>
-        </p:nvSpPr>
-        <p:spPr>
-          <a:xfrm>
-            <a:off x="5120640" y="2953512"/>
-            <a:ext cx="658368" cy="228600"/>
-          </a:xfrm>
-          <a:prstGeom prst="rect">
-            <a:avLst/>
-          </a:prstGeom>
-          <a:noFill/>
-          <a:ln/>
-        </p:spPr>
-        <p:txBody>
-          <a:bodyPr wrap="square" lIns="0" tIns="0" rIns="0" bIns="0" rtlCol="0" anchor="ctr"/>
-          <a:lstStyle/>
-          <a:p>
-            <a:pPr algn="ctr" indent="0" marL="0">
-              <a:buNone/>
-            </a:pPr>
-            <a:r>
-              <a:rPr lang="en-US" sz="900" b="1" dirty="0">
-                <a:solidFill>
-                  <a:srgbClr val="16A34A"/>
-                </a:solidFill>
-                <a:latin typeface="Arial" pitchFamily="34" charset="0"/>
-                <a:ea typeface="Arial" pitchFamily="34" charset="-122"/>
-                <a:cs typeface="Arial" pitchFamily="34" charset="-120"/>
-              </a:rPr>
-              <a:t>20件+</a:t>
-            </a:r>
-            <a:endParaRPr lang="en-US" sz="900" dirty="0"/>
-          </a:p>
-        </p:txBody>
-      </p:sp>
-      <p:sp>
-        <p:nvSpPr>
-          <p:cNvPr id="37" name="Text 35"/>
-          <p:cNvSpPr/>
-          <p:nvPr/>
-        </p:nvSpPr>
-        <p:spPr>
-          <a:xfrm>
-            <a:off x="3429000" y="2953512"/>
-            <a:ext cx="1645920" cy="274320"/>
-          </a:xfrm>
-          <a:prstGeom prst="rect">
-            <a:avLst/>
-          </a:prstGeom>
-          <a:noFill/>
-          <a:ln/>
-        </p:spPr>
-        <p:txBody>
-          <a:bodyPr wrap="square" lIns="0" tIns="0" rIns="0" bIns="0" rtlCol="0" anchor="ctr"/>
-          <a:lstStyle/>
-          <a:p>
-            <a:pPr indent="0" marL="0">
-              <a:buNone/>
-            </a:pPr>
-            <a:r>
-              <a:rPr lang="en-US" sz="1300" b="1" dirty="0">
-                <a:solidFill>
-                  <a:srgbClr val="1A2744"/>
-                </a:solidFill>
-                <a:latin typeface="Arial" pitchFamily="34" charset="0"/>
-                <a:ea typeface="Arial" pitchFamily="34" charset="-122"/>
-                <a:cs typeface="Arial" pitchFamily="34" charset="-120"/>
-              </a:rPr>
-              <a:t>コンビニ・周辺施設</a:t>
-            </a:r>
-            <a:endParaRPr lang="en-US" sz="1300" dirty="0"/>
-          </a:p>
-        </p:txBody>
-      </p:sp>
-      <p:sp>
-        <p:nvSpPr>
-          <p:cNvPr id="38" name="Text 36"/>
-          <p:cNvSpPr/>
-          <p:nvPr/>
-        </p:nvSpPr>
-        <p:spPr>
-          <a:xfrm>
-            <a:off x="3429000" y="3246120"/>
-            <a:ext cx="2377440" cy="365760"/>
-          </a:xfrm>
-          <a:prstGeom prst="rect">
-            <a:avLst/>
-          </a:prstGeom>
-          <a:noFill/>
-          <a:ln/>
-        </p:spPr>
-        <p:txBody>
-          <a:bodyPr wrap="square" lIns="0" tIns="0" rIns="0" bIns="0" rtlCol="0" anchor="ctr"/>
-          <a:lstStyle/>
-          <a:p>
-            <a:pPr indent="0" marL="0">
-              <a:buNone/>
-            </a:pPr>
-            <a:r>
-              <a:rPr lang="en-US" sz="900" dirty="0">
-                <a:solidFill>
-                  <a:srgbClr val="64748B"/>
-                </a:solidFill>
-                <a:latin typeface="Arial" pitchFamily="34" charset="0"/>
-                <a:ea typeface="Arial" pitchFamily="34" charset="-122"/>
-                <a:cs typeface="Arial" pitchFamily="34" charset="-120"/>
-              </a:rPr>
-              <a:t>コンビニが近くにあれば最高なのですが</a:t>
-            </a:r>
-            <a:endParaRPr lang="en-US" sz="900" dirty="0"/>
-          </a:p>
-        </p:txBody>
-      </p:sp>
-      <p:sp>
-        <p:nvSpPr>
-          <p:cNvPr id="39" name="Text 37"/>
-          <p:cNvSpPr/>
-          <p:nvPr/>
-        </p:nvSpPr>
-        <p:spPr>
-          <a:xfrm>
-            <a:off x="3429000" y="3657600"/>
-            <a:ext cx="2377440" cy="640080"/>
-          </a:xfrm>
-          <a:prstGeom prst="rect">
-            <a:avLst/>
-          </a:prstGeom>
-          <a:noFill/>
-          <a:ln/>
-        </p:spPr>
-        <p:txBody>
-          <a:bodyPr wrap="square" lIns="0" tIns="0" rIns="0" bIns="0" rtlCol="0" anchor="ctr"/>
-          <a:lstStyle/>
-          <a:p>
-            <a:pPr indent="0" marL="0">
-              <a:buNone/>
-            </a:pPr>
-            <a:r>
-              <a:rPr lang="en-US" sz="900" i="1" dirty="0">
-                <a:solidFill>
-                  <a:srgbClr val="3B7DD8"/>
-                </a:solidFill>
-                <a:latin typeface="Arial" pitchFamily="34" charset="0"/>
-                <a:ea typeface="Arial" pitchFamily="34" charset="-122"/>
-                <a:cs typeface="Arial" pitchFamily="34" charset="-120"/>
-              </a:rPr>
-              <a:t>「イオンが目の前なので時間潰しや買い物には困りません」</a:t>
             </a:r>
             <a:endParaRPr lang="en-US" sz="900" dirty="0"/>
           </a:p>
@@ -13114,7 +13114,7 @@
                           <a:ea typeface="Arial" pitchFamily="34" charset="-122"/>
                           <a:cs typeface="Arial" pitchFamily="34" charset="-120"/>
                         </a:rPr>
-                        <a:t>臭い・匂い</a:t>
+                        <a:t>対応・サービスの不満</a:t>
                       </a:r>
                       <a:endParaRPr lang="en-US" sz="900" dirty="0">
                         <a:latin typeface="Arial" charset="0"/>
@@ -13182,7 +13182,7 @@
                           <a:ea typeface="Arial" pitchFamily="34" charset="-122"/>
                           <a:cs typeface="Arial" pitchFamily="34" charset="-120"/>
                         </a:rPr>
-                        <a:t>Drink vending machine , ice cream vending machine , curre...</a:t>
+                        <a:t>ただ1つだけその長所を台無しにするのが9時頃からの他の部屋の清掃、外国人スタッフさんなのか話しながら作業しておりガ...</a:t>
                       </a:r>
                       <a:endParaRPr lang="en-US" sz="900" dirty="0">
                         <a:latin typeface="Arial" charset="0"/>
@@ -13250,7 +13250,7 @@
                           <a:ea typeface="Arial" pitchFamily="34" charset="-122"/>
                           <a:cs typeface="Arial" pitchFamily="34" charset="-120"/>
                         </a:rPr>
-                        <a:t>5件</a:t>
+                        <a:t>6件</a:t>
                       </a:r>
                       <a:endParaRPr lang="en-US" sz="900" dirty="0">
                         <a:latin typeface="Arial" charset="0"/>
@@ -13388,7 +13388,7 @@
                           <a:ea typeface="Arial" pitchFamily="34" charset="-122"/>
                           <a:cs typeface="Arial" pitchFamily="34" charset="-120"/>
                         </a:rPr>
-                        <a:t>対応・サービスの不満</a:t>
+                        <a:t>臭い・匂い</a:t>
                       </a:r>
                       <a:endParaRPr lang="en-US" sz="900" dirty="0">
                         <a:latin typeface="Arial" charset="0"/>
@@ -13456,7 +13456,7 @@
                           <a:ea typeface="Arial" pitchFamily="34" charset="-122"/>
                           <a:cs typeface="Arial" pitchFamily="34" charset="-120"/>
                         </a:rPr>
-                        <a:t>朝ごはんのパンが温められず冷たいままだったのが残念でしたが、全体的に価格に対して満足度が高かったです</a:t>
+                        <a:t>Drink vending machine , ice cream vending machine , curre...</a:t>
                       </a:r>
                       <a:endParaRPr lang="en-US" sz="900" dirty="0">
                         <a:latin typeface="Arial" charset="0"/>
@@ -13730,7 +13730,7 @@
                           <a:ea typeface="Arial" pitchFamily="34" charset="-122"/>
                           <a:cs typeface="Arial" pitchFamily="34" charset="-120"/>
                         </a:rPr>
-                        <a:t>部屋は湿気臭く、かなり老朽化していました</a:t>
+                        <a:t>部屋は湿気臭がして、かなり老朽化していました</a:t>
                       </a:r>
                       <a:endParaRPr lang="en-US" sz="900" dirty="0">
                         <a:latin typeface="Arial" charset="0"/>
@@ -13936,7 +13936,7 @@
                           <a:ea typeface="Arial" pitchFamily="34" charset="-122"/>
                           <a:cs typeface="Arial" pitchFamily="34" charset="-120"/>
                         </a:rPr>
-                        <a:t>部屋の狭さ</a:t>
+                        <a:t>防音性能</a:t>
                       </a:r>
                       <a:endParaRPr lang="en-US" sz="900" dirty="0">
                         <a:latin typeface="Arial" charset="0"/>
@@ -14004,7 +14004,7 @@
                           <a:ea typeface="Arial" pitchFamily="34" charset="-122"/>
                           <a:cs typeface="Arial" pitchFamily="34" charset="-120"/>
                         </a:rPr>
-                        <a:t>Affordable hotel stayed 6 nights room was small but worke...</a:t>
+                        <a:t>ただ1つだけその長所を台無しにするのが9時頃からの他の部屋の清掃、外国人スタッフさんなのか話しながら作業しておりガ...</a:t>
                       </a:r>
                       <a:endParaRPr lang="en-US" sz="900" dirty="0">
                         <a:latin typeface="Arial" charset="0"/>
@@ -14210,7 +14210,7 @@
                           <a:ea typeface="Arial" pitchFamily="34" charset="-122"/>
                           <a:cs typeface="Arial" pitchFamily="34" charset="-120"/>
                         </a:rPr>
-                        <a:t>防音性能</a:t>
+                        <a:t>部屋の狭さ</a:t>
                       </a:r>
                       <a:endParaRPr lang="en-US" sz="900" dirty="0">
                         <a:latin typeface="Arial" charset="0"/>
@@ -14278,7 +14278,7 @@
                           <a:ea typeface="Arial" pitchFamily="34" charset="-122"/>
                           <a:cs typeface="Arial" pitchFamily="34" charset="-120"/>
                         </a:rPr>
-                        <a:t>・以前、高速道路側の部屋に泊まった時は、自動車の騒音がうるさく感じましたが、今回は高速道路と反対側の部屋でしたので...</a:t>
+                        <a:t>Affordable hotel stayed 6 nights room was small but worke...</a:t>
                       </a:r>
                       <a:endParaRPr lang="en-US" sz="900" dirty="0">
                         <a:latin typeface="Arial" charset="0"/>
@@ -14346,7 +14346,7 @@
                           <a:ea typeface="Arial" pitchFamily="34" charset="-122"/>
                           <a:cs typeface="Arial" pitchFamily="34" charset="-120"/>
                         </a:rPr>
-                        <a:t>2件</a:t>
+                        <a:t>3件</a:t>
                       </a:r>
                       <a:endParaRPr lang="en-US" sz="900" dirty="0">
                         <a:latin typeface="Arial" charset="0"/>
@@ -14484,7 +14484,7 @@
                           <a:ea typeface="Arial" pitchFamily="34" charset="-122"/>
                           <a:cs typeface="Arial" pitchFamily="34" charset="-120"/>
                         </a:rPr>
-                        <a:t>朝食の改善要望</a:t>
+                        <a:t>窓・採光</a:t>
                       </a:r>
                       <a:endParaRPr lang="en-US" sz="900" dirty="0">
                         <a:latin typeface="Arial" charset="0"/>
@@ -14552,7 +14552,7 @@
                           <a:ea typeface="Arial" pitchFamily="34" charset="-122"/>
                           <a:cs typeface="Arial" pitchFamily="34" charset="-120"/>
                         </a:rPr>
-                        <a:t>ただ、朝食バイキングについては、品数がそれほど多くないうえ、パン用のオープントースターがないなど、物足りなく感じました</a:t>
+                        <a:t>そして部屋は１７階で窓からは綺麗な景色が堪能出来ました</a:t>
                       </a:r>
                       <a:endParaRPr lang="en-US" sz="900" dirty="0">
                         <a:latin typeface="Arial" charset="0"/>
@@ -14758,7 +14758,7 @@
                           <a:ea typeface="Arial" pitchFamily="34" charset="-122"/>
                           <a:cs typeface="Arial" pitchFamily="34" charset="-120"/>
                         </a:rPr>
-                        <a:t>窓・採光</a:t>
+                        <a:t>朝食の改善要望</a:t>
                       </a:r>
                       <a:endParaRPr lang="en-US" sz="900" dirty="0">
                         <a:latin typeface="Arial" charset="0"/>
@@ -14826,7 +14826,7 @@
                           <a:ea typeface="Arial" pitchFamily="34" charset="-122"/>
                           <a:cs typeface="Arial" pitchFamily="34" charset="-120"/>
                         </a:rPr>
-                        <a:t>そして部屋は１７階で窓からは綺麗な景色が堪能出来ました</a:t>
+                        <a:t>ただ、朝食バイキングについては、品数がそれほど多くないうえ、パン用のオープントースターがないなど、物足りなく感じました</a:t>
                       </a:r>
                       <a:endParaRPr lang="en-US" sz="900" dirty="0">
                         <a:latin typeface="Arial" charset="0"/>
@@ -14894,7 +14894,7 @@
                           <a:ea typeface="Arial" pitchFamily="34" charset="-122"/>
                           <a:cs typeface="Arial" pitchFamily="34" charset="-120"/>
                         </a:rPr>
-                        <a:t>2件</a:t>
+                        <a:t>1件</a:t>
                       </a:r>
                       <a:endParaRPr lang="en-US" sz="900" dirty="0">
                         <a:latin typeface="Arial" charset="0"/>

--- a/納品レポート/ホテル別レポート/hearton_口コミ分析レポート.pptx
+++ b/納品レポート/ホテル別レポート/hearton_口コミ分析レポート.pptx
@@ -183,16 +183,16 @@
                     <c:v>Trip.com</c:v>
                   </c:pt>
                   <c:pt idx="1">
+                    <c:v>じゃらん</c:v>
+                  </c:pt>
+                  <c:pt idx="2">
                     <c:v>楽天トラベル</c:v>
                   </c:pt>
-                  <c:pt idx="2">
+                  <c:pt idx="3">
                     <c:v>Agoda</c:v>
                   </c:pt>
-                  <c:pt idx="3">
+                  <c:pt idx="4">
                     <c:v>Booking.com</c:v>
-                  </c:pt>
-                  <c:pt idx="4">
-                    <c:v>じゃらん</c:v>
                   </c:pt>
                   <c:pt idx="5">
                     <c:v>Google</c:v>
@@ -211,7 +211,7 @@
                   <c:v>9.43</c:v>
                 </c:pt>
                 <c:pt idx="1">
-                  <c:v>8.75</c:v>
+                  <c:v>8.63</c:v>
                 </c:pt>
                 <c:pt idx="2">
                   <c:v>8.58</c:v>
@@ -220,7 +220,7 @@
                   <c:v>8.55</c:v>
                 </c:pt>
                 <c:pt idx="4">
-                  <c:v>8.45</c:v>
+                  <c:v>8.5</c:v>
                 </c:pt>
                 <c:pt idx="5">
                   <c:v>6.8</c:v>
@@ -566,7 +566,7 @@
               <c:numCache>
                 <c:ptCount val="3"/>
                 <c:pt idx="0">
-                  <c:v>115</c:v>
+                  <c:v>116</c:v>
                 </c:pt>
                 <c:pt idx="1">
                   <c:v>22</c:v>
@@ -781,13 +781,13 @@
                 <c:formatCode>General</c:formatCode>
                 <c:ptCount val="6"/>
                 <c:pt idx="0">
-                  <c:v>62</c:v>
+                  <c:v>63</c:v>
                 </c:pt>
                 <c:pt idx="1">
-                  <c:v>8</c:v>
+                  <c:v>7</c:v>
                 </c:pt>
                 <c:pt idx="2">
-                  <c:v>45</c:v>
+                  <c:v>46</c:v>
                 </c:pt>
                 <c:pt idx="3">
                   <c:v>6</c:v>
@@ -2747,7 +2747,7 @@
                 <a:ea typeface="Arial" pitchFamily="34" charset="-122"/>
                 <a:cs typeface="Arial" pitchFamily="34" charset="-120"/>
               </a:rPr>
-              <a:t>レビュー総数：139件（6サイト）</a:t>
+              <a:t>レビュー総数：140件（6サイト）</a:t>
             </a:r>
             <a:endParaRPr lang="en-US" sz="1000" dirty="0"/>
           </a:p>
@@ -2767,7 +2767,7 @@
                 <a:ea typeface="Arial" pitchFamily="34" charset="-122"/>
                 <a:cs typeface="Arial" pitchFamily="34" charset="-120"/>
               </a:rPr>
-              <a:t>作成日：2026年3月27日</a:t>
+              <a:t>作成日：2026年3月28日</a:t>
             </a:r>
             <a:endParaRPr lang="en-US" sz="1000" dirty="0"/>
           </a:p>
@@ -3587,7 +3587,7 @@
                           <a:ea typeface="Arial" pitchFamily="34" charset="-122"/>
                           <a:cs typeface="Arial" pitchFamily="34" charset="-120"/>
                         </a:rPr>
-                        <a:t>82.7%</a:t>
+                        <a:t>82.9%</a:t>
                       </a:r>
                       <a:endParaRPr lang="en-US" sz="1000" dirty="0">
                         <a:latin typeface="Arial" charset="0"/>
@@ -5447,7 +5447,7 @@
                 <a:ea typeface="Arial" pitchFamily="34" charset="-122"/>
                 <a:cs typeface="Arial" pitchFamily="34" charset="-120"/>
               </a:rPr>
-              <a:t>82.7%</a:t>
+              <a:t>82.9%</a:t>
             </a:r>
             <a:endParaRPr lang="en-US" sz="3200" dirty="0"/>
           </a:p>
@@ -5697,7 +5697,7 @@
                 <a:ea typeface="Arial" pitchFamily="34" charset="-122"/>
                 <a:cs typeface="Arial" pitchFamily="34" charset="-120"/>
               </a:rPr>
-              <a:t>139件</a:t>
+              <a:t>140件</a:t>
             </a:r>
             <a:endParaRPr lang="en-US" sz="3200" dirty="0"/>
           </a:p>
@@ -5925,7 +5925,7 @@
                 <a:ea typeface="Arial" pitchFamily="34" charset="-122"/>
                 <a:cs typeface="Arial" pitchFamily="34" charset="-120"/>
               </a:rPr>
-              <a:t>  ホテルは清潔そのもので、スタッフの方々もとても親切です</a:t>
+              <a:t>  領収書の課題は再訪の際には解決しており、レセプションスタッフにも引き継がれていた</a:t>
             </a:r>
             <a:endParaRPr lang="en-US" sz="1100" dirty="0"/>
           </a:p>
@@ -6631,7 +6631,7 @@
                 <a:ea typeface="Arial" pitchFamily="34" charset="-122"/>
                 <a:cs typeface="Arial" pitchFamily="34" charset="-120"/>
               </a:rPr>
-              <a:t>82.7%</a:t>
+              <a:t>82.9%</a:t>
             </a:r>
             <a:endParaRPr lang="en-US" sz="3200" dirty="0"/>
           </a:p>
@@ -6881,7 +6881,7 @@
                 <a:ea typeface="Arial" pitchFamily="34" charset="-122"/>
                 <a:cs typeface="Arial" pitchFamily="34" charset="-120"/>
               </a:rPr>
-              <a:t>139件</a:t>
+              <a:t>140件</a:t>
             </a:r>
             <a:endParaRPr lang="en-US" sz="3200" dirty="0"/>
           </a:p>
@@ -8134,7 +8134,7 @@
                           <a:ea typeface="Arial" pitchFamily="34" charset="-122"/>
                           <a:cs typeface="Arial" pitchFamily="34" charset="-120"/>
                         </a:rPr>
-                        <a:t>楽天トラベル</a:t>
+                        <a:t>じゃらん</a:t>
                       </a:r>
                       <a:endParaRPr lang="en-US" sz="900" dirty="0">
                         <a:latin typeface="Arial" charset="0"/>
@@ -8202,7 +8202,7 @@
                           <a:ea typeface="Arial" pitchFamily="34" charset="-122"/>
                           <a:cs typeface="Arial" pitchFamily="34" charset="-120"/>
                         </a:rPr>
-                        <a:t>32</a:t>
+                        <a:t>41</a:t>
                       </a:r>
                       <a:endParaRPr lang="en-US" sz="900" dirty="0">
                         <a:latin typeface="Arial" charset="0"/>
@@ -8270,7 +8270,7 @@
                           <a:ea typeface="Arial" pitchFamily="34" charset="-122"/>
                           <a:cs typeface="Arial" pitchFamily="34" charset="-120"/>
                         </a:rPr>
-                        <a:t>4.38</a:t>
+                        <a:t>4.32</a:t>
                       </a:r>
                       <a:endParaRPr lang="en-US" sz="900" dirty="0">
                         <a:latin typeface="Arial" charset="0"/>
@@ -8406,7 +8406,7 @@
                           <a:ea typeface="Arial" pitchFamily="34" charset="-122"/>
                           <a:cs typeface="Arial" pitchFamily="34" charset="-120"/>
                         </a:rPr>
-                        <a:t>8.75</a:t>
+                        <a:t>8.63</a:t>
                       </a:r>
                       <a:endParaRPr lang="en-US" sz="900" dirty="0">
                         <a:latin typeface="Arial" charset="0"/>
@@ -8476,7 +8476,7 @@
                           <a:ea typeface="Arial" pitchFamily="34" charset="-122"/>
                           <a:cs typeface="Arial" pitchFamily="34" charset="-120"/>
                         </a:rPr>
-                        <a:t>Agoda</a:t>
+                        <a:t>楽天トラベル</a:t>
                       </a:r>
                       <a:endParaRPr lang="en-US" sz="900" dirty="0">
                         <a:latin typeface="Arial" charset="0"/>
@@ -8544,7 +8544,143 @@
                           <a:ea typeface="Arial" pitchFamily="34" charset="-122"/>
                           <a:cs typeface="Arial" pitchFamily="34" charset="-120"/>
                         </a:rPr>
-                        <a:t>12</a:t>
+                        <a:t>31</a:t>
+                      </a:r>
+                      <a:endParaRPr lang="en-US" sz="900" dirty="0">
+                        <a:latin typeface="Arial" charset="0"/>
+                        <a:ea typeface="Arial" charset="0"/>
+                        <a:cs typeface="Arial" charset="0"/>
+                      </a:endParaRPr>
+                    </a:p>
+                  </a:txBody>
+                  <a:tcPr marL="91440" marR="91440" marT="45720" marB="45720">
+                    <a:lnL w="6350" cap="flat" cmpd="sng" algn="ctr">
+                      <a:solidFill>
+                        <a:srgbClr val="CBD5E1"/>
+                      </a:solidFill>
+                      <a:prstDash val="solid"/>
+                      <a:round/>
+                      <a:headEnd type="none" w="med" len="med"/>
+                      <a:tailEnd type="none" w="med" len="med"/>
+                    </a:lnL>
+                    <a:lnR w="6350" cap="flat" cmpd="sng" algn="ctr">
+                      <a:solidFill>
+                        <a:srgbClr val="CBD5E1"/>
+                      </a:solidFill>
+                      <a:prstDash val="solid"/>
+                      <a:round/>
+                      <a:headEnd type="none" w="med" len="med"/>
+                      <a:tailEnd type="none" w="med" len="med"/>
+                    </a:lnR>
+                    <a:lnT w="6350" cap="flat" cmpd="sng" algn="ctr">
+                      <a:solidFill>
+                        <a:srgbClr val="CBD5E1"/>
+                      </a:solidFill>
+                      <a:prstDash val="solid"/>
+                      <a:round/>
+                      <a:headEnd type="none" w="med" len="med"/>
+                      <a:tailEnd type="none" w="med" len="med"/>
+                    </a:lnT>
+                    <a:lnB w="6350" cap="flat" cmpd="sng" algn="ctr">
+                      <a:solidFill>
+                        <a:srgbClr val="CBD5E1"/>
+                      </a:solidFill>
+                      <a:prstDash val="solid"/>
+                      <a:round/>
+                      <a:headEnd type="none" w="med" len="med"/>
+                      <a:tailEnd type="none" w="med" len="med"/>
+                    </a:lnB>
+                    <a:solidFill>
+                      <a:srgbClr val="E8EFF8"/>
+                    </a:solidFill>
+                  </a:tcPr>
+                </a:tc>
+                <a:tc>
+                  <a:txBody>
+                    <a:bodyPr/>
+                    <a:lstStyle/>
+                    <a:p>
+                      <a:pPr algn="ctr" indent="0" marL="0">
+                        <a:buNone/>
+                      </a:pPr>
+                      <a:r>
+                        <a:rPr lang="en-US" sz="900" dirty="0">
+                          <a:solidFill>
+                            <a:srgbClr val="000000"/>
+                          </a:solidFill>
+                          <a:latin typeface="Arial" pitchFamily="34" charset="0"/>
+                          <a:ea typeface="Arial" pitchFamily="34" charset="-122"/>
+                          <a:cs typeface="Arial" pitchFamily="34" charset="-120"/>
+                        </a:rPr>
+                        <a:t>4.29</a:t>
+                      </a:r>
+                      <a:endParaRPr lang="en-US" sz="900" dirty="0">
+                        <a:latin typeface="Arial" charset="0"/>
+                        <a:ea typeface="Arial" charset="0"/>
+                        <a:cs typeface="Arial" charset="0"/>
+                      </a:endParaRPr>
+                    </a:p>
+                  </a:txBody>
+                  <a:tcPr marL="91440" marR="91440" marT="45720" marB="45720">
+                    <a:lnL w="6350" cap="flat" cmpd="sng" algn="ctr">
+                      <a:solidFill>
+                        <a:srgbClr val="CBD5E1"/>
+                      </a:solidFill>
+                      <a:prstDash val="solid"/>
+                      <a:round/>
+                      <a:headEnd type="none" w="med" len="med"/>
+                      <a:tailEnd type="none" w="med" len="med"/>
+                    </a:lnL>
+                    <a:lnR w="6350" cap="flat" cmpd="sng" algn="ctr">
+                      <a:solidFill>
+                        <a:srgbClr val="CBD5E1"/>
+                      </a:solidFill>
+                      <a:prstDash val="solid"/>
+                      <a:round/>
+                      <a:headEnd type="none" w="med" len="med"/>
+                      <a:tailEnd type="none" w="med" len="med"/>
+                    </a:lnR>
+                    <a:lnT w="6350" cap="flat" cmpd="sng" algn="ctr">
+                      <a:solidFill>
+                        <a:srgbClr val="CBD5E1"/>
+                      </a:solidFill>
+                      <a:prstDash val="solid"/>
+                      <a:round/>
+                      <a:headEnd type="none" w="med" len="med"/>
+                      <a:tailEnd type="none" w="med" len="med"/>
+                    </a:lnT>
+                    <a:lnB w="6350" cap="flat" cmpd="sng" algn="ctr">
+                      <a:solidFill>
+                        <a:srgbClr val="CBD5E1"/>
+                      </a:solidFill>
+                      <a:prstDash val="solid"/>
+                      <a:round/>
+                      <a:headEnd type="none" w="med" len="med"/>
+                      <a:tailEnd type="none" w="med" len="med"/>
+                    </a:lnB>
+                    <a:solidFill>
+                      <a:srgbClr val="E8EFF8"/>
+                    </a:solidFill>
+                  </a:tcPr>
+                </a:tc>
+                <a:tc>
+                  <a:txBody>
+                    <a:bodyPr/>
+                    <a:lstStyle/>
+                    <a:p>
+                      <a:pPr algn="ctr" indent="0" marL="0">
+                        <a:buNone/>
+                      </a:pPr>
+                      <a:r>
+                        <a:rPr lang="en-US" sz="900" dirty="0">
+                          <a:solidFill>
+                            <a:srgbClr val="000000"/>
+                          </a:solidFill>
+                          <a:latin typeface="Arial" pitchFamily="34" charset="0"/>
+                          <a:ea typeface="Arial" pitchFamily="34" charset="-122"/>
+                          <a:cs typeface="Arial" pitchFamily="34" charset="-120"/>
+                        </a:rPr>
+                        <a:t>/5 (×2)</a:t>
                       </a:r>
                       <a:endParaRPr lang="en-US" sz="900" dirty="0">
                         <a:latin typeface="Arial" charset="0"/>
@@ -8663,142 +8799,6 @@
                     </a:solidFill>
                   </a:tcPr>
                 </a:tc>
-                <a:tc>
-                  <a:txBody>
-                    <a:bodyPr/>
-                    <a:lstStyle/>
-                    <a:p>
-                      <a:pPr algn="ctr" indent="0" marL="0">
-                        <a:buNone/>
-                      </a:pPr>
-                      <a:r>
-                        <a:rPr lang="en-US" sz="900" dirty="0">
-                          <a:solidFill>
-                            <a:srgbClr val="000000"/>
-                          </a:solidFill>
-                          <a:latin typeface="Arial" pitchFamily="34" charset="0"/>
-                          <a:ea typeface="Arial" pitchFamily="34" charset="-122"/>
-                          <a:cs typeface="Arial" pitchFamily="34" charset="-120"/>
-                        </a:rPr>
-                        <a:t>/10</a:t>
-                      </a:r>
-                      <a:endParaRPr lang="en-US" sz="900" dirty="0">
-                        <a:latin typeface="Arial" charset="0"/>
-                        <a:ea typeface="Arial" charset="0"/>
-                        <a:cs typeface="Arial" charset="0"/>
-                      </a:endParaRPr>
-                    </a:p>
-                  </a:txBody>
-                  <a:tcPr marL="91440" marR="91440" marT="45720" marB="45720">
-                    <a:lnL w="6350" cap="flat" cmpd="sng" algn="ctr">
-                      <a:solidFill>
-                        <a:srgbClr val="CBD5E1"/>
-                      </a:solidFill>
-                      <a:prstDash val="solid"/>
-                      <a:round/>
-                      <a:headEnd type="none" w="med" len="med"/>
-                      <a:tailEnd type="none" w="med" len="med"/>
-                    </a:lnL>
-                    <a:lnR w="6350" cap="flat" cmpd="sng" algn="ctr">
-                      <a:solidFill>
-                        <a:srgbClr val="CBD5E1"/>
-                      </a:solidFill>
-                      <a:prstDash val="solid"/>
-                      <a:round/>
-                      <a:headEnd type="none" w="med" len="med"/>
-                      <a:tailEnd type="none" w="med" len="med"/>
-                    </a:lnR>
-                    <a:lnT w="6350" cap="flat" cmpd="sng" algn="ctr">
-                      <a:solidFill>
-                        <a:srgbClr val="CBD5E1"/>
-                      </a:solidFill>
-                      <a:prstDash val="solid"/>
-                      <a:round/>
-                      <a:headEnd type="none" w="med" len="med"/>
-                      <a:tailEnd type="none" w="med" len="med"/>
-                    </a:lnT>
-                    <a:lnB w="6350" cap="flat" cmpd="sng" algn="ctr">
-                      <a:solidFill>
-                        <a:srgbClr val="CBD5E1"/>
-                      </a:solidFill>
-                      <a:prstDash val="solid"/>
-                      <a:round/>
-                      <a:headEnd type="none" w="med" len="med"/>
-                      <a:tailEnd type="none" w="med" len="med"/>
-                    </a:lnB>
-                    <a:solidFill>
-                      <a:srgbClr val="E8EFF8"/>
-                    </a:solidFill>
-                  </a:tcPr>
-                </a:tc>
-                <a:tc>
-                  <a:txBody>
-                    <a:bodyPr/>
-                    <a:lstStyle/>
-                    <a:p>
-                      <a:pPr algn="ctr" indent="0" marL="0">
-                        <a:buNone/>
-                      </a:pPr>
-                      <a:r>
-                        <a:rPr lang="en-US" sz="900" dirty="0">
-                          <a:solidFill>
-                            <a:srgbClr val="000000"/>
-                          </a:solidFill>
-                          <a:latin typeface="Arial" pitchFamily="34" charset="0"/>
-                          <a:ea typeface="Arial" pitchFamily="34" charset="-122"/>
-                          <a:cs typeface="Arial" pitchFamily="34" charset="-120"/>
-                        </a:rPr>
-                        <a:t>8.58</a:t>
-                      </a:r>
-                      <a:endParaRPr lang="en-US" sz="900" dirty="0">
-                        <a:latin typeface="Arial" charset="0"/>
-                        <a:ea typeface="Arial" charset="0"/>
-                        <a:cs typeface="Arial" charset="0"/>
-                      </a:endParaRPr>
-                    </a:p>
-                  </a:txBody>
-                  <a:tcPr marL="91440" marR="91440" marT="45720" marB="45720">
-                    <a:lnL w="6350" cap="flat" cmpd="sng" algn="ctr">
-                      <a:solidFill>
-                        <a:srgbClr val="CBD5E1"/>
-                      </a:solidFill>
-                      <a:prstDash val="solid"/>
-                      <a:round/>
-                      <a:headEnd type="none" w="med" len="med"/>
-                      <a:tailEnd type="none" w="med" len="med"/>
-                    </a:lnL>
-                    <a:lnR w="6350" cap="flat" cmpd="sng" algn="ctr">
-                      <a:solidFill>
-                        <a:srgbClr val="CBD5E1"/>
-                      </a:solidFill>
-                      <a:prstDash val="solid"/>
-                      <a:round/>
-                      <a:headEnd type="none" w="med" len="med"/>
-                      <a:tailEnd type="none" w="med" len="med"/>
-                    </a:lnR>
-                    <a:lnT w="6350" cap="flat" cmpd="sng" algn="ctr">
-                      <a:solidFill>
-                        <a:srgbClr val="CBD5E1"/>
-                      </a:solidFill>
-                      <a:prstDash val="solid"/>
-                      <a:round/>
-                      <a:headEnd type="none" w="med" len="med"/>
-                      <a:tailEnd type="none" w="med" len="med"/>
-                    </a:lnT>
-                    <a:lnB w="6350" cap="flat" cmpd="sng" algn="ctr">
-                      <a:solidFill>
-                        <a:srgbClr val="CBD5E1"/>
-                      </a:solidFill>
-                      <a:prstDash val="solid"/>
-                      <a:round/>
-                      <a:headEnd type="none" w="med" len="med"/>
-                      <a:tailEnd type="none" w="med" len="med"/>
-                    </a:lnB>
-                    <a:solidFill>
-                      <a:srgbClr val="E8EFF8"/>
-                    </a:solidFill>
-                  </a:tcPr>
-                </a:tc>
               </a:tr>
               <a:tr h="201168">
                 <a:tc>
@@ -8818,7 +8818,7 @@
                           <a:ea typeface="Arial" pitchFamily="34" charset="-122"/>
                           <a:cs typeface="Arial" pitchFamily="34" charset="-120"/>
                         </a:rPr>
-                        <a:t>Booking.com</a:t>
+                        <a:t>Agoda</a:t>
                       </a:r>
                       <a:endParaRPr lang="en-US" sz="900" dirty="0">
                         <a:latin typeface="Arial" charset="0"/>
@@ -8886,7 +8886,7 @@
                           <a:ea typeface="Arial" pitchFamily="34" charset="-122"/>
                           <a:cs typeface="Arial" pitchFamily="34" charset="-120"/>
                         </a:rPr>
-                        <a:t>22</a:t>
+                        <a:t>11</a:t>
                       </a:r>
                       <a:endParaRPr lang="en-US" sz="900" dirty="0">
                         <a:latin typeface="Arial" charset="0"/>
@@ -9160,7 +9160,7 @@
                           <a:ea typeface="Arial" pitchFamily="34" charset="-122"/>
                           <a:cs typeface="Arial" pitchFamily="34" charset="-120"/>
                         </a:rPr>
-                        <a:t>じゃらん</a:t>
+                        <a:t>Booking.com</a:t>
                       </a:r>
                       <a:endParaRPr lang="en-US" sz="900" dirty="0">
                         <a:latin typeface="Arial" charset="0"/>
@@ -9228,7 +9228,7 @@
                           <a:ea typeface="Arial" pitchFamily="34" charset="-122"/>
                           <a:cs typeface="Arial" pitchFamily="34" charset="-120"/>
                         </a:rPr>
-                        <a:t>40</a:t>
+                        <a:t>24</a:t>
                       </a:r>
                       <a:endParaRPr lang="en-US" sz="900" dirty="0">
                         <a:latin typeface="Arial" charset="0"/>
@@ -9296,7 +9296,7 @@
                           <a:ea typeface="Arial" pitchFamily="34" charset="-122"/>
                           <a:cs typeface="Arial" pitchFamily="34" charset="-120"/>
                         </a:rPr>
-                        <a:t>4.22</a:t>
+                        <a:t>8.5</a:t>
                       </a:r>
                       <a:endParaRPr lang="en-US" sz="900" dirty="0">
                         <a:latin typeface="Arial" charset="0"/>
@@ -9364,7 +9364,7 @@
                           <a:ea typeface="Arial" pitchFamily="34" charset="-122"/>
                           <a:cs typeface="Arial" pitchFamily="34" charset="-120"/>
                         </a:rPr>
-                        <a:t>/5 (×2)</a:t>
+                        <a:t>/10</a:t>
                       </a:r>
                       <a:endParaRPr lang="en-US" sz="900" dirty="0">
                         <a:latin typeface="Arial" charset="0"/>
@@ -9432,7 +9432,7 @@
                           <a:ea typeface="Arial" pitchFamily="34" charset="-122"/>
                           <a:cs typeface="Arial" pitchFamily="34" charset="-120"/>
                         </a:rPr>
-                        <a:t>8.45</a:t>
+                        <a:t>8.5</a:t>
                       </a:r>
                       <a:endParaRPr lang="en-US" sz="900" dirty="0">
                         <a:latin typeface="Arial" charset="0"/>
@@ -10182,7 +10182,7 @@
                 <a:ea typeface="Arial" pitchFamily="34" charset="-122"/>
                 <a:cs typeface="Arial" pitchFamily="34" charset="-120"/>
               </a:rPr>
-              <a:t>115件（82.7%）</a:t>
+              <a:t>116件（82.9%）</a:t>
             </a:r>
             <a:endParaRPr lang="en-US" sz="1100" dirty="0"/>
           </a:p>
@@ -10280,7 +10280,7 @@
                 <a:ea typeface="Arial" pitchFamily="34" charset="-122"/>
                 <a:cs typeface="Arial" pitchFamily="34" charset="-120"/>
               </a:rPr>
-              <a:t>22件（15.8%）</a:t>
+              <a:t>22件（15.7%）</a:t>
             </a:r>
             <a:endParaRPr lang="en-US" sz="1100" dirty="0"/>
           </a:p>
@@ -11052,7 +11052,7 @@
                 <a:ea typeface="Arial" pitchFamily="34" charset="-122"/>
                 <a:cs typeface="Arial" pitchFamily="34" charset="-120"/>
               </a:rPr>
-              <a:t>「ホテルは清潔そのもので、スタッフの方々もとても親切です」</a:t>
+              <a:t>「部屋も清潔にされていました」</a:t>
             </a:r>
             <a:endParaRPr lang="en-US" sz="900" dirty="0"/>
           </a:p>
@@ -11236,7 +11236,7 @@
                 <a:ea typeface="Arial" pitchFamily="34" charset="-122"/>
                 <a:cs typeface="Arial" pitchFamily="34" charset="-120"/>
               </a:rPr>
-              <a:t>ホテルは清潔そのもので、スタッフの方々もとても親切です</a:t>
+              <a:t>領収書の課題は再訪の際には解決しており、レセプションスタッフにも引き継がれていた</a:t>
             </a:r>
             <a:endParaRPr lang="en-US" sz="900" dirty="0"/>
           </a:p>
@@ -11275,7 +11275,7 @@
                 <a:ea typeface="Arial" pitchFamily="34" charset="-122"/>
                 <a:cs typeface="Arial" pitchFamily="34" charset="-120"/>
               </a:rPr>
-              <a:t>「ただ1つだけその長所を台無しにするのが9時頃からの他の部屋の清掃、外国人スタッフさんなのか話しながら作業しておりガ...」</a:t>
+              <a:t>「スタッフの方達は、対応がとても良かったです」</a:t>
             </a:r>
             <a:endParaRPr lang="en-US" sz="900" dirty="0"/>
           </a:p>
@@ -11682,7 +11682,7 @@
                 <a:ea typeface="Arial" pitchFamily="34" charset="-122"/>
                 <a:cs typeface="Arial" pitchFamily="34" charset="-120"/>
               </a:rPr>
-              <a:t>広いベッド 便利なロケーション</a:t>
+              <a:t>アメニティもいろいろありました</a:t>
             </a:r>
             <a:endParaRPr lang="en-US" sz="900" dirty="0"/>
           </a:p>
@@ -11721,7 +11721,7 @@
                 <a:ea typeface="Arial" pitchFamily="34" charset="-122"/>
                 <a:cs typeface="Arial" pitchFamily="34" charset="-120"/>
               </a:rPr>
-              <a:t>「The bed was really comfortable」</a:t>
+              <a:t>「広いベッド 便利なロケーション」</a:t>
             </a:r>
             <a:endParaRPr lang="en-US" sz="900" dirty="0"/>
           </a:p>
@@ -12976,7 +12976,7 @@
                           <a:ea typeface="Arial" pitchFamily="34" charset="-122"/>
                           <a:cs typeface="Arial" pitchFamily="34" charset="-120"/>
                         </a:rPr>
-                        <a:t>10件</a:t>
+                        <a:t>9件</a:t>
                       </a:r>
                       <a:endParaRPr lang="en-US" sz="900" dirty="0">
                         <a:latin typeface="Arial" charset="0"/>
@@ -13524,7 +13524,7 @@
                           <a:ea typeface="Arial" pitchFamily="34" charset="-122"/>
                           <a:cs typeface="Arial" pitchFamily="34" charset="-120"/>
                         </a:rPr>
-                        <a:t>5件</a:t>
+                        <a:t>4件</a:t>
                       </a:r>
                       <a:endParaRPr lang="en-US" sz="900" dirty="0">
                         <a:latin typeface="Arial" charset="0"/>
@@ -13730,7 +13730,7 @@
                           <a:ea typeface="Arial" pitchFamily="34" charset="-122"/>
                           <a:cs typeface="Arial" pitchFamily="34" charset="-120"/>
                         </a:rPr>
-                        <a:t>部屋は湿気臭がして、かなり老朽化していました</a:t>
+                        <a:t>外観に比べると部屋が古いイメージで少し残念でした</a:t>
                       </a:r>
                       <a:endParaRPr lang="en-US" sz="900" dirty="0">
                         <a:latin typeface="Arial" charset="0"/>
@@ -13798,7 +13798,7 @@
                           <a:ea typeface="Arial" pitchFamily="34" charset="-122"/>
                           <a:cs typeface="Arial" pitchFamily="34" charset="-120"/>
                         </a:rPr>
-                        <a:t>4件</a:t>
+                        <a:t>3件</a:t>
                       </a:r>
                       <a:endParaRPr lang="en-US" sz="900" dirty="0">
                         <a:latin typeface="Arial" charset="0"/>
@@ -14758,7 +14758,7 @@
                           <a:ea typeface="Arial" pitchFamily="34" charset="-122"/>
                           <a:cs typeface="Arial" pitchFamily="34" charset="-120"/>
                         </a:rPr>
-                        <a:t>朝食の改善要望</a:t>
+                        <a:t>清掃不備</a:t>
                       </a:r>
                       <a:endParaRPr lang="en-US" sz="900" dirty="0">
                         <a:latin typeface="Arial" charset="0"/>
@@ -14826,7 +14826,7 @@
                           <a:ea typeface="Arial" pitchFamily="34" charset="-122"/>
                           <a:cs typeface="Arial" pitchFamily="34" charset="-120"/>
                         </a:rPr>
-                        <a:t>ただ、朝食バイキングについては、品数がそれほど多くないうえ、パン用のオープントースターがないなど、物足りなく感じました</a:t>
+                        <a:t>机の下に前の方のゴミが落ちていてその点だけが少し残念…</a:t>
                       </a:r>
                       <a:endParaRPr lang="en-US" sz="900" dirty="0">
                         <a:latin typeface="Arial" charset="0"/>
@@ -15776,177 +15776,6 @@
                 <a:ea typeface="Arial" pitchFamily="34" charset="-122"/>
                 <a:cs typeface="Arial" pitchFamily="34" charset="-120"/>
               </a:rPr>
-              <a:t>朝食サービスの改善</a:t>
-            </a:r>
-            <a:endParaRPr lang="en-US" sz="1200" dirty="0"/>
-          </a:p>
-        </p:txBody>
-      </p:sp>
-      <p:sp>
-        <p:nvSpPr>
-          <p:cNvPr id="17" name="Text 15"/>
-          <p:cNvSpPr/>
-          <p:nvPr/>
-        </p:nvSpPr>
-        <p:spPr>
-          <a:xfrm>
-            <a:off x="594360" y="3383280"/>
-            <a:ext cx="3657600" cy="1188720"/>
-          </a:xfrm>
-          <a:prstGeom prst="rect">
-            <a:avLst/>
-          </a:prstGeom>
-          <a:noFill/>
-          <a:ln/>
-        </p:spPr>
-        <p:txBody>
-          <a:bodyPr wrap="square" lIns="0" tIns="0" rIns="0" bIns="0" rtlCol="0" anchor="ctr"/>
-          <a:lstStyle/>
-          <a:p>
-            <a:pPr marL="342900" indent="-342900">
-              <a:spcAft>
-                <a:spcPts val="300"/>
-              </a:spcAft>
-              <a:buSzPct val="100000"/>
-              <a:buChar char="•"/>
-            </a:pPr>
-            <a:r>
-              <a:rPr lang="en-US" sz="900" dirty="0">
-                <a:solidFill>
-                  <a:srgbClr val="334155"/>
-                </a:solidFill>
-                <a:latin typeface="Arial" pitchFamily="34" charset="0"/>
-                <a:ea typeface="Arial" pitchFamily="34" charset="-122"/>
-                <a:cs typeface="Arial" pitchFamily="34" charset="-120"/>
-              </a:rPr>
-              <a:t>メニューの定期的な見直しとバリエーション追加</a:t>
-            </a:r>
-            <a:endParaRPr lang="en-US" sz="900" dirty="0"/>
-          </a:p>
-          <a:p>
-            <a:pPr marL="342900" indent="-342900">
-              <a:spcAft>
-                <a:spcPts val="300"/>
-              </a:spcAft>
-              <a:buSzPct val="100000"/>
-              <a:buChar char="•"/>
-            </a:pPr>
-            <a:r>
-              <a:rPr lang="en-US" sz="900" dirty="0">
-                <a:solidFill>
-                  <a:srgbClr val="334155"/>
-                </a:solidFill>
-                <a:latin typeface="Arial" pitchFamily="34" charset="0"/>
-                <a:ea typeface="Arial" pitchFamily="34" charset="-122"/>
-                <a:cs typeface="Arial" pitchFamily="34" charset="-120"/>
-              </a:rPr>
-              <a:t>補充頻度の向上と品切れ防止</a:t>
-            </a:r>
-            <a:endParaRPr lang="en-US" sz="900" dirty="0"/>
-          </a:p>
-          <a:p>
-            <a:pPr marL="342900" indent="-342900">
-              <a:spcAft>
-                <a:spcPts val="300"/>
-              </a:spcAft>
-              <a:buSzPct val="100000"/>
-              <a:buChar char="•"/>
-            </a:pPr>
-            <a:r>
-              <a:rPr lang="en-US" sz="900" dirty="0">
-                <a:solidFill>
-                  <a:srgbClr val="334155"/>
-                </a:solidFill>
-                <a:latin typeface="Arial" pitchFamily="34" charset="0"/>
-                <a:ea typeface="Arial" pitchFamily="34" charset="-122"/>
-                <a:cs typeface="Arial" pitchFamily="34" charset="-120"/>
-              </a:rPr>
-              <a:t>宿泊客数に応じた朝食準備量の最適化</a:t>
-            </a:r>
-            <a:endParaRPr lang="en-US" sz="900" dirty="0"/>
-          </a:p>
-        </p:txBody>
-      </p:sp>
-      <p:sp>
-        <p:nvSpPr>
-          <p:cNvPr id="18" name="Shape 16"/>
-          <p:cNvSpPr/>
-          <p:nvPr/>
-        </p:nvSpPr>
-        <p:spPr>
-          <a:xfrm>
-            <a:off x="4663440" y="3017520"/>
-            <a:ext cx="3977640" cy="1600200"/>
-          </a:xfrm>
-          <a:prstGeom prst="rect">
-            <a:avLst/>
-          </a:prstGeom>
-          <a:solidFill>
-            <a:srgbClr val="FFFFFF"/>
-          </a:solidFill>
-          <a:ln/>
-          <a:effectLst>
-            <a:outerShdw sx="100000" sy="100000" kx="0" ky="0" algn="bl" rotWithShape="0" blurRad="50800" dist="25400" dir="8100000">
-              <a:srgbClr val="000000">
-                <a:alpha val="10000"/>
-              </a:srgbClr>
-            </a:outerShdw>
-          </a:effectLst>
-        </p:spPr>
-      </p:sp>
-      <p:sp>
-        <p:nvSpPr>
-          <p:cNvPr id="19" name="Shape 17"/>
-          <p:cNvSpPr/>
-          <p:nvPr/>
-        </p:nvSpPr>
-        <p:spPr>
-          <a:xfrm>
-            <a:off x="4663440" y="3017520"/>
-            <a:ext cx="54864" cy="1600200"/>
-          </a:xfrm>
-          <a:prstGeom prst="rect">
-            <a:avLst/>
-          </a:prstGeom>
-          <a:solidFill>
-            <a:srgbClr val="3B7DD8"/>
-          </a:solidFill>
-          <a:ln/>
-        </p:spPr>
-      </p:sp>
-      <p:sp>
-        <p:nvSpPr>
-          <p:cNvPr id="20" name="Text 18"/>
-          <p:cNvSpPr/>
-          <p:nvPr/>
-        </p:nvSpPr>
-        <p:spPr>
-          <a:xfrm>
-            <a:off x="4800600" y="3063240"/>
-            <a:ext cx="3657600" cy="320040"/>
-          </a:xfrm>
-          <a:prstGeom prst="rect">
-            <a:avLst/>
-          </a:prstGeom>
-          <a:noFill/>
-          <a:ln/>
-        </p:spPr>
-        <p:txBody>
-          <a:bodyPr wrap="square" lIns="0" tIns="0" rIns="0" bIns="0" rtlCol="0" anchor="ctr"/>
-          <a:lstStyle/>
-          <a:p>
-            <a:pPr indent="0" marL="0">
-              <a:buNone/>
-            </a:pPr>
-            <a:r>
-              <a:rPr lang="en-US" sz="1200" b="1" dirty="0">
-                <a:solidFill>
-                  <a:srgbClr val="1A2744"/>
-                </a:solidFill>
-                <a:latin typeface="Arial" pitchFamily="34" charset="0"/>
-                <a:ea typeface="Arial" pitchFamily="34" charset="-122"/>
-                <a:cs typeface="Arial" pitchFamily="34" charset="-120"/>
-              </a:rPr>
               <a:t>エアコン・空調の定期点検強化</a:t>
             </a:r>
             <a:endParaRPr lang="en-US" sz="1200" dirty="0"/>
@@ -15955,13 +15784,13 @@
       </p:sp>
       <p:sp>
         <p:nvSpPr>
-          <p:cNvPr id="21" name="Text 19"/>
-          <p:cNvSpPr/>
-          <p:nvPr/>
-        </p:nvSpPr>
-        <p:spPr>
-          <a:xfrm>
-            <a:off x="4800600" y="3383280"/>
+          <p:cNvPr id="17" name="Text 15"/>
+          <p:cNvSpPr/>
+          <p:nvPr/>
+        </p:nvSpPr>
+        <p:spPr>
+          <a:xfrm>
+            <a:off x="594360" y="3383280"/>
             <a:ext cx="3657600" cy="1188720"/>
           </a:xfrm>
           <a:prstGeom prst="rect">
@@ -16033,6 +15862,177 @@
                 <a:cs typeface="Arial" pitchFamily="34" charset="-120"/>
               </a:rPr>
               <a:t>異常報告があった客室の優先メンテナンス実施</a:t>
+            </a:r>
+            <a:endParaRPr lang="en-US" sz="900" dirty="0"/>
+          </a:p>
+        </p:txBody>
+      </p:sp>
+      <p:sp>
+        <p:nvSpPr>
+          <p:cNvPr id="18" name="Shape 16"/>
+          <p:cNvSpPr/>
+          <p:nvPr/>
+        </p:nvSpPr>
+        <p:spPr>
+          <a:xfrm>
+            <a:off x="4663440" y="3017520"/>
+            <a:ext cx="3977640" cy="1600200"/>
+          </a:xfrm>
+          <a:prstGeom prst="rect">
+            <a:avLst/>
+          </a:prstGeom>
+          <a:solidFill>
+            <a:srgbClr val="FFFFFF"/>
+          </a:solidFill>
+          <a:ln/>
+          <a:effectLst>
+            <a:outerShdw sx="100000" sy="100000" kx="0" ky="0" algn="bl" rotWithShape="0" blurRad="50800" dist="25400" dir="8100000">
+              <a:srgbClr val="000000">
+                <a:alpha val="10000"/>
+              </a:srgbClr>
+            </a:outerShdw>
+          </a:effectLst>
+        </p:spPr>
+      </p:sp>
+      <p:sp>
+        <p:nvSpPr>
+          <p:cNvPr id="19" name="Shape 17"/>
+          <p:cNvSpPr/>
+          <p:nvPr/>
+        </p:nvSpPr>
+        <p:spPr>
+          <a:xfrm>
+            <a:off x="4663440" y="3017520"/>
+            <a:ext cx="54864" cy="1600200"/>
+          </a:xfrm>
+          <a:prstGeom prst="rect">
+            <a:avLst/>
+          </a:prstGeom>
+          <a:solidFill>
+            <a:srgbClr val="3B7DD8"/>
+          </a:solidFill>
+          <a:ln/>
+        </p:spPr>
+      </p:sp>
+      <p:sp>
+        <p:nvSpPr>
+          <p:cNvPr id="20" name="Text 18"/>
+          <p:cNvSpPr/>
+          <p:nvPr/>
+        </p:nvSpPr>
+        <p:spPr>
+          <a:xfrm>
+            <a:off x="4800600" y="3063240"/>
+            <a:ext cx="3657600" cy="320040"/>
+          </a:xfrm>
+          <a:prstGeom prst="rect">
+            <a:avLst/>
+          </a:prstGeom>
+          <a:noFill/>
+          <a:ln/>
+        </p:spPr>
+        <p:txBody>
+          <a:bodyPr wrap="square" lIns="0" tIns="0" rIns="0" bIns="0" rtlCol="0" anchor="ctr"/>
+          <a:lstStyle/>
+          <a:p>
+            <a:pPr indent="0" marL="0">
+              <a:buNone/>
+            </a:pPr>
+            <a:r>
+              <a:rPr lang="en-US" sz="1200" b="1" dirty="0">
+                <a:solidFill>
+                  <a:srgbClr val="1A2744"/>
+                </a:solidFill>
+                <a:latin typeface="Arial" pitchFamily="34" charset="0"/>
+                <a:ea typeface="Arial" pitchFamily="34" charset="-122"/>
+                <a:cs typeface="Arial" pitchFamily="34" charset="-120"/>
+              </a:rPr>
+              <a:t>スタッフ対応品質の統一</a:t>
+            </a:r>
+            <a:endParaRPr lang="en-US" sz="1200" dirty="0"/>
+          </a:p>
+        </p:txBody>
+      </p:sp>
+      <p:sp>
+        <p:nvSpPr>
+          <p:cNvPr id="21" name="Text 19"/>
+          <p:cNvSpPr/>
+          <p:nvPr/>
+        </p:nvSpPr>
+        <p:spPr>
+          <a:xfrm>
+            <a:off x="4800600" y="3383280"/>
+            <a:ext cx="3657600" cy="1188720"/>
+          </a:xfrm>
+          <a:prstGeom prst="rect">
+            <a:avLst/>
+          </a:prstGeom>
+          <a:noFill/>
+          <a:ln/>
+        </p:spPr>
+        <p:txBody>
+          <a:bodyPr wrap="square" lIns="0" tIns="0" rIns="0" bIns="0" rtlCol="0" anchor="ctr"/>
+          <a:lstStyle/>
+          <a:p>
+            <a:pPr marL="342900" indent="-342900">
+              <a:spcAft>
+                <a:spcPts val="300"/>
+              </a:spcAft>
+              <a:buSzPct val="100000"/>
+              <a:buChar char="•"/>
+            </a:pPr>
+            <a:r>
+              <a:rPr lang="en-US" sz="900" dirty="0">
+                <a:solidFill>
+                  <a:srgbClr val="334155"/>
+                </a:solidFill>
+                <a:latin typeface="Arial" pitchFamily="34" charset="0"/>
+                <a:ea typeface="Arial" pitchFamily="34" charset="-122"/>
+                <a:cs typeface="Arial" pitchFamily="34" charset="-120"/>
+              </a:rPr>
+              <a:t>接客マニュアルの見直しと全スタッフへの周知</a:t>
+            </a:r>
+            <a:endParaRPr lang="en-US" sz="900" dirty="0"/>
+          </a:p>
+          <a:p>
+            <a:pPr marL="342900" indent="-342900">
+              <a:spcAft>
+                <a:spcPts val="300"/>
+              </a:spcAft>
+              <a:buSzPct val="100000"/>
+              <a:buChar char="•"/>
+            </a:pPr>
+            <a:r>
+              <a:rPr lang="en-US" sz="900" dirty="0">
+                <a:solidFill>
+                  <a:srgbClr val="334155"/>
+                </a:solidFill>
+                <a:latin typeface="Arial" pitchFamily="34" charset="0"/>
+                <a:ea typeface="Arial" pitchFamily="34" charset="-122"/>
+                <a:cs typeface="Arial" pitchFamily="34" charset="-120"/>
+              </a:rPr>
+              <a:t>ゲストからのクレーム対応フローの明確化</a:t>
+            </a:r>
+            <a:endParaRPr lang="en-US" sz="900" dirty="0"/>
+          </a:p>
+          <a:p>
+            <a:pPr marL="342900" indent="-342900">
+              <a:spcAft>
+                <a:spcPts val="300"/>
+              </a:spcAft>
+              <a:buSzPct val="100000"/>
+              <a:buChar char="•"/>
+            </a:pPr>
+            <a:r>
+              <a:rPr lang="en-US" sz="900" dirty="0">
+                <a:solidFill>
+                  <a:srgbClr val="334155"/>
+                </a:solidFill>
+                <a:latin typeface="Arial" pitchFamily="34" charset="0"/>
+                <a:ea typeface="Arial" pitchFamily="34" charset="-122"/>
+                <a:cs typeface="Arial" pitchFamily="34" charset="-120"/>
+              </a:rPr>
+              <a:t>定期的なCS研修の実施</a:t>
             </a:r>
             <a:endParaRPr lang="en-US" sz="900" dirty="0"/>
           </a:p>

--- a/納品レポート/ホテル別レポート/hearton_口コミ分析レポート.pptx
+++ b/納品レポート/ホテル別レポート/hearton_口コミ分析レポート.pptx
@@ -252,13 +252,13 @@
                     <c:v>じゃらん</c:v>
                   </c:pt>
                   <c:pt idx="2">
+                    <c:v>Booking.com</c:v>
+                  </c:pt>
+                  <c:pt idx="3">
                     <c:v>楽天トラベル</c:v>
                   </c:pt>
-                  <c:pt idx="3">
+                  <c:pt idx="4">
                     <c:v>Agoda</c:v>
-                  </c:pt>
-                  <c:pt idx="4">
-                    <c:v>Booking.com</c:v>
                   </c:pt>
                   <c:pt idx="5">
                     <c:v>Google</c:v>
@@ -274,22 +274,22 @@
                 <c:formatCode>General</c:formatCode>
                 <c:ptCount val="6"/>
                 <c:pt idx="0">
-                  <c:v>9.43</c:v>
+                  <c:v>9.5</c:v>
                 </c:pt>
                 <c:pt idx="1">
                   <c:v>8.63</c:v>
                 </c:pt>
                 <c:pt idx="2">
-                  <c:v>8.58</c:v>
+                  <c:v>8.5</c:v>
                 </c:pt>
                 <c:pt idx="3">
-                  <c:v>8.55</c:v>
+                  <c:v>8.47</c:v>
                 </c:pt>
                 <c:pt idx="4">
-                  <c:v>8.5</c:v>
+                  <c:v>8.4</c:v>
                 </c:pt>
                 <c:pt idx="5">
-                  <c:v>6.8</c:v>
+                  <c:v>6.91</c:v>
                 </c:pt>
               </c:numCache>
             </c:numRef>
@@ -600,16 +600,16 @@
                 <c:formatCode>General</c:formatCode>
                 <c:ptCount val="6"/>
                 <c:pt idx="0">
-                  <c:v>63</c:v>
+                  <c:v>59</c:v>
                 </c:pt>
                 <c:pt idx="1">
-                  <c:v>7</c:v>
+                  <c:v>9</c:v>
                 </c:pt>
                 <c:pt idx="2">
-                  <c:v>46</c:v>
+                  <c:v>44</c:v>
                 </c:pt>
                 <c:pt idx="3">
-                  <c:v>6</c:v>
+                  <c:v>7</c:v>
                 </c:pt>
                 <c:pt idx="4">
                   <c:v>16</c:v>
@@ -2503,7 +2503,7 @@
                 <a:ea typeface="Arial" pitchFamily="34" charset="-122"/>
                 <a:cs typeface="Arial" pitchFamily="34" charset="-120"/>
               </a:rPr>
-              <a:t>レビュー総数：140件</a:t>
+              <a:t>レビュー総数：137件</a:t>
             </a:r>
             <a:endParaRPr lang="en-US" sz="1000" dirty="0"/>
           </a:p>
@@ -2783,7 +2783,7 @@
                 <a:ea typeface="Arial" pitchFamily="34" charset="-122"/>
                 <a:cs typeface="Arial" pitchFamily="34" charset="-120"/>
               </a:rPr>
-              <a:t>ハートンホテル東品川は全体平均8.59点（10pt換算）、高評価率82.9%を達成しています。本レポートで示した改善施策を段階的に実施することで、さらなる顧客満足度向上が期待できます。</a:t>
+              <a:t>ハートンホテル東品川は全体平均8.55点（10pt換算）、高評価率81.8%を達成しています。本レポートで示した改善施策を段階的に実施することで、さらなる顧客満足度向上が期待できます。</a:t>
             </a:r>
             <a:endParaRPr lang="en-US" sz="1200" dirty="0"/>
           </a:p>
@@ -3220,7 +3220,7 @@
                 <a:ea typeface="Arial" pitchFamily="34" charset="-122"/>
                 <a:cs typeface="Arial" pitchFamily="34" charset="-120"/>
               </a:rPr>
-              <a:t>8.59</a:t>
+              <a:t>8.55</a:t>
             </a:r>
             <a:endParaRPr lang="en-US" sz="2800" dirty="0"/>
           </a:p>
@@ -3338,7 +3338,7 @@
                 <a:ea typeface="Arial" pitchFamily="34" charset="-122"/>
                 <a:cs typeface="Arial" pitchFamily="34" charset="-120"/>
               </a:rPr>
-              <a:t>82.9%</a:t>
+              <a:t>81.8%</a:t>
             </a:r>
             <a:endParaRPr lang="en-US" sz="2800" dirty="0"/>
           </a:p>
@@ -3456,7 +3456,7 @@
                 <a:ea typeface="Arial" pitchFamily="34" charset="-122"/>
                 <a:cs typeface="Arial" pitchFamily="34" charset="-120"/>
               </a:rPr>
-              <a:t>1.4%</a:t>
+              <a:t>1.5%</a:t>
             </a:r>
             <a:endParaRPr lang="en-US" sz="2800" dirty="0"/>
           </a:p>
@@ -3574,7 +3574,7 @@
                 <a:ea typeface="Arial" pitchFamily="34" charset="-122"/>
                 <a:cs typeface="Arial" pitchFamily="34" charset="-120"/>
               </a:rPr>
-              <a:t>140件</a:t>
+              <a:t>137件</a:t>
             </a:r>
             <a:endParaRPr lang="en-US" sz="2800" dirty="0"/>
           </a:p>
@@ -4313,7 +4313,7 @@
                           <a:ea typeface="Arial" pitchFamily="34" charset="-122"/>
                           <a:cs typeface="Arial" pitchFamily="34" charset="-120"/>
                         </a:rPr>
-                        <a:t>23</a:t>
+                        <a:t>22</a:t>
                       </a:r>
                       <a:endParaRPr lang="en-US" sz="800" dirty="0">
                         <a:latin typeface="Arial" charset="0"/>
@@ -4381,7 +4381,7 @@
                           <a:ea typeface="Arial" pitchFamily="34" charset="-122"/>
                           <a:cs typeface="Arial" pitchFamily="34" charset="-120"/>
                         </a:rPr>
-                        <a:t>9.43/10</a:t>
+                        <a:t>9.50/10</a:t>
                       </a:r>
                       <a:endParaRPr lang="en-US" sz="800" dirty="0">
                         <a:latin typeface="Arial" charset="0"/>
@@ -4449,7 +4449,7 @@
                           <a:ea typeface="Arial" pitchFamily="34" charset="-122"/>
                           <a:cs typeface="Arial" pitchFamily="34" charset="-120"/>
                         </a:rPr>
-                        <a:t>9.43</a:t>
+                        <a:t>9.50</a:t>
                       </a:r>
                       <a:endParaRPr lang="en-US" sz="800" dirty="0">
                         <a:latin typeface="Arial" charset="0"/>
@@ -4655,7 +4655,7 @@
                           <a:ea typeface="Arial" pitchFamily="34" charset="-122"/>
                           <a:cs typeface="Arial" pitchFamily="34" charset="-120"/>
                         </a:rPr>
-                        <a:t>41</a:t>
+                        <a:t>38</a:t>
                       </a:r>
                       <a:endParaRPr lang="en-US" sz="800" dirty="0">
                         <a:latin typeface="Arial" charset="0"/>
@@ -4792,6 +4792,348 @@
                           <a:cs typeface="Arial" pitchFamily="34" charset="-120"/>
                         </a:rPr>
                         <a:t>8.63</a:t>
+                      </a:r>
+                      <a:endParaRPr lang="en-US" sz="800" dirty="0">
+                        <a:latin typeface="Arial" charset="0"/>
+                        <a:ea typeface="Arial" charset="0"/>
+                        <a:cs typeface="Arial" charset="0"/>
+                      </a:endParaRPr>
+                    </a:p>
+                  </a:txBody>
+                  <a:tcPr marL="91440" marR="91440" marT="45720" marB="45720">
+                    <a:lnL w="6350" cap="flat" cmpd="sng" algn="ctr">
+                      <a:solidFill>
+                        <a:srgbClr val="CCCCCC"/>
+                      </a:solidFill>
+                      <a:prstDash val="solid"/>
+                      <a:round/>
+                      <a:headEnd type="none" w="med" len="med"/>
+                      <a:tailEnd type="none" w="med" len="med"/>
+                    </a:lnL>
+                    <a:lnR w="6350" cap="flat" cmpd="sng" algn="ctr">
+                      <a:solidFill>
+                        <a:srgbClr val="CCCCCC"/>
+                      </a:solidFill>
+                      <a:prstDash val="solid"/>
+                      <a:round/>
+                      <a:headEnd type="none" w="med" len="med"/>
+                      <a:tailEnd type="none" w="med" len="med"/>
+                    </a:lnR>
+                    <a:lnT w="6350" cap="flat" cmpd="sng" algn="ctr">
+                      <a:solidFill>
+                        <a:srgbClr val="CCCCCC"/>
+                      </a:solidFill>
+                      <a:prstDash val="solid"/>
+                      <a:round/>
+                      <a:headEnd type="none" w="med" len="med"/>
+                      <a:tailEnd type="none" w="med" len="med"/>
+                    </a:lnT>
+                    <a:lnB w="6350" cap="flat" cmpd="sng" algn="ctr">
+                      <a:solidFill>
+                        <a:srgbClr val="CCCCCC"/>
+                      </a:solidFill>
+                      <a:prstDash val="solid"/>
+                      <a:round/>
+                      <a:headEnd type="none" w="med" len="med"/>
+                      <a:tailEnd type="none" w="med" len="med"/>
+                    </a:lnB>
+                    <a:solidFill>
+                      <a:srgbClr val="FFFFFF"/>
+                    </a:solidFill>
+                  </a:tcPr>
+                </a:tc>
+                <a:tc>
+                  <a:txBody>
+                    <a:bodyPr/>
+                    <a:lstStyle/>
+                    <a:p>
+                      <a:pPr algn="ctr" indent="0" marL="0">
+                        <a:buNone/>
+                      </a:pPr>
+                      <a:r>
+                        <a:rPr lang="en-US" sz="800" dirty="0">
+                          <a:solidFill>
+                            <a:srgbClr val="000000"/>
+                          </a:solidFill>
+                          <a:latin typeface="Arial" pitchFamily="34" charset="0"/>
+                          <a:ea typeface="Arial" pitchFamily="34" charset="-122"/>
+                          <a:cs typeface="Arial" pitchFamily="34" charset="-120"/>
+                        </a:rPr>
+                        <a:t>良好</a:t>
+                      </a:r>
+                      <a:endParaRPr lang="en-US" sz="800" dirty="0">
+                        <a:latin typeface="Arial" charset="0"/>
+                        <a:ea typeface="Arial" charset="0"/>
+                        <a:cs typeface="Arial" charset="0"/>
+                      </a:endParaRPr>
+                    </a:p>
+                  </a:txBody>
+                  <a:tcPr marL="91440" marR="91440" marT="45720" marB="45720">
+                    <a:lnL w="6350" cap="flat" cmpd="sng" algn="ctr">
+                      <a:solidFill>
+                        <a:srgbClr val="CCCCCC"/>
+                      </a:solidFill>
+                      <a:prstDash val="solid"/>
+                      <a:round/>
+                      <a:headEnd type="none" w="med" len="med"/>
+                      <a:tailEnd type="none" w="med" len="med"/>
+                    </a:lnL>
+                    <a:lnR w="6350" cap="flat" cmpd="sng" algn="ctr">
+                      <a:solidFill>
+                        <a:srgbClr val="CCCCCC"/>
+                      </a:solidFill>
+                      <a:prstDash val="solid"/>
+                      <a:round/>
+                      <a:headEnd type="none" w="med" len="med"/>
+                      <a:tailEnd type="none" w="med" len="med"/>
+                    </a:lnR>
+                    <a:lnT w="6350" cap="flat" cmpd="sng" algn="ctr">
+                      <a:solidFill>
+                        <a:srgbClr val="CCCCCC"/>
+                      </a:solidFill>
+                      <a:prstDash val="solid"/>
+                      <a:round/>
+                      <a:headEnd type="none" w="med" len="med"/>
+                      <a:tailEnd type="none" w="med" len="med"/>
+                    </a:lnT>
+                    <a:lnB w="6350" cap="flat" cmpd="sng" algn="ctr">
+                      <a:solidFill>
+                        <a:srgbClr val="CCCCCC"/>
+                      </a:solidFill>
+                      <a:prstDash val="solid"/>
+                      <a:round/>
+                      <a:headEnd type="none" w="med" len="med"/>
+                      <a:tailEnd type="none" w="med" len="med"/>
+                    </a:lnB>
+                    <a:solidFill>
+                      <a:srgbClr val="FFFFFF"/>
+                    </a:solidFill>
+                  </a:tcPr>
+                </a:tc>
+              </a:tr>
+              <a:tr h="0">
+                <a:tc>
+                  <a:txBody>
+                    <a:bodyPr/>
+                    <a:lstStyle/>
+                    <a:p>
+                      <a:pPr algn="ctr" indent="0" marL="0">
+                        <a:buNone/>
+                      </a:pPr>
+                      <a:r>
+                        <a:rPr lang="en-US" sz="800" dirty="0">
+                          <a:solidFill>
+                            <a:srgbClr val="000000"/>
+                          </a:solidFill>
+                          <a:latin typeface="Arial" pitchFamily="34" charset="0"/>
+                          <a:ea typeface="Arial" pitchFamily="34" charset="-122"/>
+                          <a:cs typeface="Arial" pitchFamily="34" charset="-120"/>
+                        </a:rPr>
+                        <a:t>Booking.com</a:t>
+                      </a:r>
+                      <a:endParaRPr lang="en-US" sz="800" dirty="0">
+                        <a:latin typeface="Arial" charset="0"/>
+                        <a:ea typeface="Arial" charset="0"/>
+                        <a:cs typeface="Arial" charset="0"/>
+                      </a:endParaRPr>
+                    </a:p>
+                  </a:txBody>
+                  <a:tcPr marL="91440" marR="91440" marT="45720" marB="45720">
+                    <a:lnL w="6350" cap="flat" cmpd="sng" algn="ctr">
+                      <a:solidFill>
+                        <a:srgbClr val="CCCCCC"/>
+                      </a:solidFill>
+                      <a:prstDash val="solid"/>
+                      <a:round/>
+                      <a:headEnd type="none" w="med" len="med"/>
+                      <a:tailEnd type="none" w="med" len="med"/>
+                    </a:lnL>
+                    <a:lnR w="6350" cap="flat" cmpd="sng" algn="ctr">
+                      <a:solidFill>
+                        <a:srgbClr val="CCCCCC"/>
+                      </a:solidFill>
+                      <a:prstDash val="solid"/>
+                      <a:round/>
+                      <a:headEnd type="none" w="med" len="med"/>
+                      <a:tailEnd type="none" w="med" len="med"/>
+                    </a:lnR>
+                    <a:lnT w="6350" cap="flat" cmpd="sng" algn="ctr">
+                      <a:solidFill>
+                        <a:srgbClr val="CCCCCC"/>
+                      </a:solidFill>
+                      <a:prstDash val="solid"/>
+                      <a:round/>
+                      <a:headEnd type="none" w="med" len="med"/>
+                      <a:tailEnd type="none" w="med" len="med"/>
+                    </a:lnT>
+                    <a:lnB w="6350" cap="flat" cmpd="sng" algn="ctr">
+                      <a:solidFill>
+                        <a:srgbClr val="CCCCCC"/>
+                      </a:solidFill>
+                      <a:prstDash val="solid"/>
+                      <a:round/>
+                      <a:headEnd type="none" w="med" len="med"/>
+                      <a:tailEnd type="none" w="med" len="med"/>
+                    </a:lnB>
+                    <a:solidFill>
+                      <a:srgbClr val="FFFFFF"/>
+                    </a:solidFill>
+                  </a:tcPr>
+                </a:tc>
+                <a:tc>
+                  <a:txBody>
+                    <a:bodyPr/>
+                    <a:lstStyle/>
+                    <a:p>
+                      <a:pPr algn="ctr" indent="0" marL="0">
+                        <a:buNone/>
+                      </a:pPr>
+                      <a:r>
+                        <a:rPr lang="en-US" sz="800" dirty="0">
+                          <a:solidFill>
+                            <a:srgbClr val="000000"/>
+                          </a:solidFill>
+                          <a:latin typeface="Arial" pitchFamily="34" charset="0"/>
+                          <a:ea typeface="Arial" pitchFamily="34" charset="-122"/>
+                          <a:cs typeface="Arial" pitchFamily="34" charset="-120"/>
+                        </a:rPr>
+                        <a:t>26</a:t>
+                      </a:r>
+                      <a:endParaRPr lang="en-US" sz="800" dirty="0">
+                        <a:latin typeface="Arial" charset="0"/>
+                        <a:ea typeface="Arial" charset="0"/>
+                        <a:cs typeface="Arial" charset="0"/>
+                      </a:endParaRPr>
+                    </a:p>
+                  </a:txBody>
+                  <a:tcPr marL="91440" marR="91440" marT="45720" marB="45720">
+                    <a:lnL w="6350" cap="flat" cmpd="sng" algn="ctr">
+                      <a:solidFill>
+                        <a:srgbClr val="CCCCCC"/>
+                      </a:solidFill>
+                      <a:prstDash val="solid"/>
+                      <a:round/>
+                      <a:headEnd type="none" w="med" len="med"/>
+                      <a:tailEnd type="none" w="med" len="med"/>
+                    </a:lnL>
+                    <a:lnR w="6350" cap="flat" cmpd="sng" algn="ctr">
+                      <a:solidFill>
+                        <a:srgbClr val="CCCCCC"/>
+                      </a:solidFill>
+                      <a:prstDash val="solid"/>
+                      <a:round/>
+                      <a:headEnd type="none" w="med" len="med"/>
+                      <a:tailEnd type="none" w="med" len="med"/>
+                    </a:lnR>
+                    <a:lnT w="6350" cap="flat" cmpd="sng" algn="ctr">
+                      <a:solidFill>
+                        <a:srgbClr val="CCCCCC"/>
+                      </a:solidFill>
+                      <a:prstDash val="solid"/>
+                      <a:round/>
+                      <a:headEnd type="none" w="med" len="med"/>
+                      <a:tailEnd type="none" w="med" len="med"/>
+                    </a:lnT>
+                    <a:lnB w="6350" cap="flat" cmpd="sng" algn="ctr">
+                      <a:solidFill>
+                        <a:srgbClr val="CCCCCC"/>
+                      </a:solidFill>
+                      <a:prstDash val="solid"/>
+                      <a:round/>
+                      <a:headEnd type="none" w="med" len="med"/>
+                      <a:tailEnd type="none" w="med" len="med"/>
+                    </a:lnB>
+                    <a:solidFill>
+                      <a:srgbClr val="FFFFFF"/>
+                    </a:solidFill>
+                  </a:tcPr>
+                </a:tc>
+                <a:tc>
+                  <a:txBody>
+                    <a:bodyPr/>
+                    <a:lstStyle/>
+                    <a:p>
+                      <a:pPr algn="ctr" indent="0" marL="0">
+                        <a:buNone/>
+                      </a:pPr>
+                      <a:r>
+                        <a:rPr lang="en-US" sz="800" dirty="0">
+                          <a:solidFill>
+                            <a:srgbClr val="000000"/>
+                          </a:solidFill>
+                          <a:latin typeface="Arial" pitchFamily="34" charset="0"/>
+                          <a:ea typeface="Arial" pitchFamily="34" charset="-122"/>
+                          <a:cs typeface="Arial" pitchFamily="34" charset="-120"/>
+                        </a:rPr>
+                        <a:t>8.50/10</a:t>
+                      </a:r>
+                      <a:endParaRPr lang="en-US" sz="800" dirty="0">
+                        <a:latin typeface="Arial" charset="0"/>
+                        <a:ea typeface="Arial" charset="0"/>
+                        <a:cs typeface="Arial" charset="0"/>
+                      </a:endParaRPr>
+                    </a:p>
+                  </a:txBody>
+                  <a:tcPr marL="91440" marR="91440" marT="45720" marB="45720">
+                    <a:lnL w="6350" cap="flat" cmpd="sng" algn="ctr">
+                      <a:solidFill>
+                        <a:srgbClr val="CCCCCC"/>
+                      </a:solidFill>
+                      <a:prstDash val="solid"/>
+                      <a:round/>
+                      <a:headEnd type="none" w="med" len="med"/>
+                      <a:tailEnd type="none" w="med" len="med"/>
+                    </a:lnL>
+                    <a:lnR w="6350" cap="flat" cmpd="sng" algn="ctr">
+                      <a:solidFill>
+                        <a:srgbClr val="CCCCCC"/>
+                      </a:solidFill>
+                      <a:prstDash val="solid"/>
+                      <a:round/>
+                      <a:headEnd type="none" w="med" len="med"/>
+                      <a:tailEnd type="none" w="med" len="med"/>
+                    </a:lnR>
+                    <a:lnT w="6350" cap="flat" cmpd="sng" algn="ctr">
+                      <a:solidFill>
+                        <a:srgbClr val="CCCCCC"/>
+                      </a:solidFill>
+                      <a:prstDash val="solid"/>
+                      <a:round/>
+                      <a:headEnd type="none" w="med" len="med"/>
+                      <a:tailEnd type="none" w="med" len="med"/>
+                    </a:lnT>
+                    <a:lnB w="6350" cap="flat" cmpd="sng" algn="ctr">
+                      <a:solidFill>
+                        <a:srgbClr val="CCCCCC"/>
+                      </a:solidFill>
+                      <a:prstDash val="solid"/>
+                      <a:round/>
+                      <a:headEnd type="none" w="med" len="med"/>
+                      <a:tailEnd type="none" w="med" len="med"/>
+                    </a:lnB>
+                    <a:solidFill>
+                      <a:srgbClr val="FFFFFF"/>
+                    </a:solidFill>
+                  </a:tcPr>
+                </a:tc>
+                <a:tc>
+                  <a:txBody>
+                    <a:bodyPr/>
+                    <a:lstStyle/>
+                    <a:p>
+                      <a:pPr algn="ctr" indent="0" marL="0">
+                        <a:buNone/>
+                      </a:pPr>
+                      <a:r>
+                        <a:rPr lang="en-US" sz="800" dirty="0">
+                          <a:solidFill>
+                            <a:srgbClr val="000000"/>
+                          </a:solidFill>
+                          <a:latin typeface="Arial" pitchFamily="34" charset="0"/>
+                          <a:ea typeface="Arial" pitchFamily="34" charset="-122"/>
+                          <a:cs typeface="Arial" pitchFamily="34" charset="-120"/>
+                        </a:rPr>
+                        <a:t>8.50</a:t>
                       </a:r>
                       <a:endParaRPr lang="en-US" sz="800" dirty="0">
                         <a:latin typeface="Arial" charset="0"/>
@@ -4997,7 +5339,7 @@
                           <a:ea typeface="Arial" pitchFamily="34" charset="-122"/>
                           <a:cs typeface="Arial" pitchFamily="34" charset="-120"/>
                         </a:rPr>
-                        <a:t>31</a:t>
+                        <a:t>30</a:t>
                       </a:r>
                       <a:endParaRPr lang="en-US" sz="800" dirty="0">
                         <a:latin typeface="Arial" charset="0"/>
@@ -5065,7 +5407,7 @@
                           <a:ea typeface="Arial" pitchFamily="34" charset="-122"/>
                           <a:cs typeface="Arial" pitchFamily="34" charset="-120"/>
                         </a:rPr>
-                        <a:t>4.29/5</a:t>
+                        <a:t>4.23/5</a:t>
                       </a:r>
                       <a:endParaRPr lang="en-US" sz="800" dirty="0">
                         <a:latin typeface="Arial" charset="0"/>
@@ -5133,7 +5475,7 @@
                           <a:ea typeface="Arial" pitchFamily="34" charset="-122"/>
                           <a:cs typeface="Arial" pitchFamily="34" charset="-120"/>
                         </a:rPr>
-                        <a:t>8.58</a:t>
+                        <a:t>8.47</a:t>
                       </a:r>
                       <a:endParaRPr lang="en-US" sz="800" dirty="0">
                         <a:latin typeface="Arial" charset="0"/>
@@ -5339,7 +5681,7 @@
                           <a:ea typeface="Arial" pitchFamily="34" charset="-122"/>
                           <a:cs typeface="Arial" pitchFamily="34" charset="-120"/>
                         </a:rPr>
-                        <a:t>11</a:t>
+                        <a:t>10</a:t>
                       </a:r>
                       <a:endParaRPr lang="en-US" sz="800" dirty="0">
                         <a:latin typeface="Arial" charset="0"/>
@@ -5407,7 +5749,7 @@
                           <a:ea typeface="Arial" pitchFamily="34" charset="-122"/>
                           <a:cs typeface="Arial" pitchFamily="34" charset="-120"/>
                         </a:rPr>
-                        <a:t>8.55/10</a:t>
+                        <a:t>8.40/10</a:t>
                       </a:r>
                       <a:endParaRPr lang="en-US" sz="800" dirty="0">
                         <a:latin typeface="Arial" charset="0"/>
@@ -5475,349 +5817,7 @@
                           <a:ea typeface="Arial" pitchFamily="34" charset="-122"/>
                           <a:cs typeface="Arial" pitchFamily="34" charset="-120"/>
                         </a:rPr>
-                        <a:t>8.55</a:t>
-                      </a:r>
-                      <a:endParaRPr lang="en-US" sz="800" dirty="0">
-                        <a:latin typeface="Arial" charset="0"/>
-                        <a:ea typeface="Arial" charset="0"/>
-                        <a:cs typeface="Arial" charset="0"/>
-                      </a:endParaRPr>
-                    </a:p>
-                  </a:txBody>
-                  <a:tcPr marL="91440" marR="91440" marT="45720" marB="45720">
-                    <a:lnL w="6350" cap="flat" cmpd="sng" algn="ctr">
-                      <a:solidFill>
-                        <a:srgbClr val="CCCCCC"/>
-                      </a:solidFill>
-                      <a:prstDash val="solid"/>
-                      <a:round/>
-                      <a:headEnd type="none" w="med" len="med"/>
-                      <a:tailEnd type="none" w="med" len="med"/>
-                    </a:lnL>
-                    <a:lnR w="6350" cap="flat" cmpd="sng" algn="ctr">
-                      <a:solidFill>
-                        <a:srgbClr val="CCCCCC"/>
-                      </a:solidFill>
-                      <a:prstDash val="solid"/>
-                      <a:round/>
-                      <a:headEnd type="none" w="med" len="med"/>
-                      <a:tailEnd type="none" w="med" len="med"/>
-                    </a:lnR>
-                    <a:lnT w="6350" cap="flat" cmpd="sng" algn="ctr">
-                      <a:solidFill>
-                        <a:srgbClr val="CCCCCC"/>
-                      </a:solidFill>
-                      <a:prstDash val="solid"/>
-                      <a:round/>
-                      <a:headEnd type="none" w="med" len="med"/>
-                      <a:tailEnd type="none" w="med" len="med"/>
-                    </a:lnT>
-                    <a:lnB w="6350" cap="flat" cmpd="sng" algn="ctr">
-                      <a:solidFill>
-                        <a:srgbClr val="CCCCCC"/>
-                      </a:solidFill>
-                      <a:prstDash val="solid"/>
-                      <a:round/>
-                      <a:headEnd type="none" w="med" len="med"/>
-                      <a:tailEnd type="none" w="med" len="med"/>
-                    </a:lnB>
-                    <a:solidFill>
-                      <a:srgbClr val="FFFFFF"/>
-                    </a:solidFill>
-                  </a:tcPr>
-                </a:tc>
-                <a:tc>
-                  <a:txBody>
-                    <a:bodyPr/>
-                    <a:lstStyle/>
-                    <a:p>
-                      <a:pPr algn="ctr" indent="0" marL="0">
-                        <a:buNone/>
-                      </a:pPr>
-                      <a:r>
-                        <a:rPr lang="en-US" sz="800" dirty="0">
-                          <a:solidFill>
-                            <a:srgbClr val="000000"/>
-                          </a:solidFill>
-                          <a:latin typeface="Arial" pitchFamily="34" charset="0"/>
-                          <a:ea typeface="Arial" pitchFamily="34" charset="-122"/>
-                          <a:cs typeface="Arial" pitchFamily="34" charset="-120"/>
-                        </a:rPr>
-                        <a:t>良好</a:t>
-                      </a:r>
-                      <a:endParaRPr lang="en-US" sz="800" dirty="0">
-                        <a:latin typeface="Arial" charset="0"/>
-                        <a:ea typeface="Arial" charset="0"/>
-                        <a:cs typeface="Arial" charset="0"/>
-                      </a:endParaRPr>
-                    </a:p>
-                  </a:txBody>
-                  <a:tcPr marL="91440" marR="91440" marT="45720" marB="45720">
-                    <a:lnL w="6350" cap="flat" cmpd="sng" algn="ctr">
-                      <a:solidFill>
-                        <a:srgbClr val="CCCCCC"/>
-                      </a:solidFill>
-                      <a:prstDash val="solid"/>
-                      <a:round/>
-                      <a:headEnd type="none" w="med" len="med"/>
-                      <a:tailEnd type="none" w="med" len="med"/>
-                    </a:lnL>
-                    <a:lnR w="6350" cap="flat" cmpd="sng" algn="ctr">
-                      <a:solidFill>
-                        <a:srgbClr val="CCCCCC"/>
-                      </a:solidFill>
-                      <a:prstDash val="solid"/>
-                      <a:round/>
-                      <a:headEnd type="none" w="med" len="med"/>
-                      <a:tailEnd type="none" w="med" len="med"/>
-                    </a:lnR>
-                    <a:lnT w="6350" cap="flat" cmpd="sng" algn="ctr">
-                      <a:solidFill>
-                        <a:srgbClr val="CCCCCC"/>
-                      </a:solidFill>
-                      <a:prstDash val="solid"/>
-                      <a:round/>
-                      <a:headEnd type="none" w="med" len="med"/>
-                      <a:tailEnd type="none" w="med" len="med"/>
-                    </a:lnT>
-                    <a:lnB w="6350" cap="flat" cmpd="sng" algn="ctr">
-                      <a:solidFill>
-                        <a:srgbClr val="CCCCCC"/>
-                      </a:solidFill>
-                      <a:prstDash val="solid"/>
-                      <a:round/>
-                      <a:headEnd type="none" w="med" len="med"/>
-                      <a:tailEnd type="none" w="med" len="med"/>
-                    </a:lnB>
-                    <a:solidFill>
-                      <a:srgbClr val="FFFFFF"/>
-                    </a:solidFill>
-                  </a:tcPr>
-                </a:tc>
-              </a:tr>
-              <a:tr h="0">
-                <a:tc>
-                  <a:txBody>
-                    <a:bodyPr/>
-                    <a:lstStyle/>
-                    <a:p>
-                      <a:pPr algn="ctr" indent="0" marL="0">
-                        <a:buNone/>
-                      </a:pPr>
-                      <a:r>
-                        <a:rPr lang="en-US" sz="800" dirty="0">
-                          <a:solidFill>
-                            <a:srgbClr val="000000"/>
-                          </a:solidFill>
-                          <a:latin typeface="Arial" pitchFamily="34" charset="0"/>
-                          <a:ea typeface="Arial" pitchFamily="34" charset="-122"/>
-                          <a:cs typeface="Arial" pitchFamily="34" charset="-120"/>
-                        </a:rPr>
-                        <a:t>Booking.com</a:t>
-                      </a:r>
-                      <a:endParaRPr lang="en-US" sz="800" dirty="0">
-                        <a:latin typeface="Arial" charset="0"/>
-                        <a:ea typeface="Arial" charset="0"/>
-                        <a:cs typeface="Arial" charset="0"/>
-                      </a:endParaRPr>
-                    </a:p>
-                  </a:txBody>
-                  <a:tcPr marL="91440" marR="91440" marT="45720" marB="45720">
-                    <a:lnL w="6350" cap="flat" cmpd="sng" algn="ctr">
-                      <a:solidFill>
-                        <a:srgbClr val="CCCCCC"/>
-                      </a:solidFill>
-                      <a:prstDash val="solid"/>
-                      <a:round/>
-                      <a:headEnd type="none" w="med" len="med"/>
-                      <a:tailEnd type="none" w="med" len="med"/>
-                    </a:lnL>
-                    <a:lnR w="6350" cap="flat" cmpd="sng" algn="ctr">
-                      <a:solidFill>
-                        <a:srgbClr val="CCCCCC"/>
-                      </a:solidFill>
-                      <a:prstDash val="solid"/>
-                      <a:round/>
-                      <a:headEnd type="none" w="med" len="med"/>
-                      <a:tailEnd type="none" w="med" len="med"/>
-                    </a:lnR>
-                    <a:lnT w="6350" cap="flat" cmpd="sng" algn="ctr">
-                      <a:solidFill>
-                        <a:srgbClr val="CCCCCC"/>
-                      </a:solidFill>
-                      <a:prstDash val="solid"/>
-                      <a:round/>
-                      <a:headEnd type="none" w="med" len="med"/>
-                      <a:tailEnd type="none" w="med" len="med"/>
-                    </a:lnT>
-                    <a:lnB w="6350" cap="flat" cmpd="sng" algn="ctr">
-                      <a:solidFill>
-                        <a:srgbClr val="CCCCCC"/>
-                      </a:solidFill>
-                      <a:prstDash val="solid"/>
-                      <a:round/>
-                      <a:headEnd type="none" w="med" len="med"/>
-                      <a:tailEnd type="none" w="med" len="med"/>
-                    </a:lnB>
-                    <a:solidFill>
-                      <a:srgbClr val="FFFFFF"/>
-                    </a:solidFill>
-                  </a:tcPr>
-                </a:tc>
-                <a:tc>
-                  <a:txBody>
-                    <a:bodyPr/>
-                    <a:lstStyle/>
-                    <a:p>
-                      <a:pPr algn="ctr" indent="0" marL="0">
-                        <a:buNone/>
-                      </a:pPr>
-                      <a:r>
-                        <a:rPr lang="en-US" sz="800" dirty="0">
-                          <a:solidFill>
-                            <a:srgbClr val="000000"/>
-                          </a:solidFill>
-                          <a:latin typeface="Arial" pitchFamily="34" charset="0"/>
-                          <a:ea typeface="Arial" pitchFamily="34" charset="-122"/>
-                          <a:cs typeface="Arial" pitchFamily="34" charset="-120"/>
-                        </a:rPr>
-                        <a:t>24</a:t>
-                      </a:r>
-                      <a:endParaRPr lang="en-US" sz="800" dirty="0">
-                        <a:latin typeface="Arial" charset="0"/>
-                        <a:ea typeface="Arial" charset="0"/>
-                        <a:cs typeface="Arial" charset="0"/>
-                      </a:endParaRPr>
-                    </a:p>
-                  </a:txBody>
-                  <a:tcPr marL="91440" marR="91440" marT="45720" marB="45720">
-                    <a:lnL w="6350" cap="flat" cmpd="sng" algn="ctr">
-                      <a:solidFill>
-                        <a:srgbClr val="CCCCCC"/>
-                      </a:solidFill>
-                      <a:prstDash val="solid"/>
-                      <a:round/>
-                      <a:headEnd type="none" w="med" len="med"/>
-                      <a:tailEnd type="none" w="med" len="med"/>
-                    </a:lnL>
-                    <a:lnR w="6350" cap="flat" cmpd="sng" algn="ctr">
-                      <a:solidFill>
-                        <a:srgbClr val="CCCCCC"/>
-                      </a:solidFill>
-                      <a:prstDash val="solid"/>
-                      <a:round/>
-                      <a:headEnd type="none" w="med" len="med"/>
-                      <a:tailEnd type="none" w="med" len="med"/>
-                    </a:lnR>
-                    <a:lnT w="6350" cap="flat" cmpd="sng" algn="ctr">
-                      <a:solidFill>
-                        <a:srgbClr val="CCCCCC"/>
-                      </a:solidFill>
-                      <a:prstDash val="solid"/>
-                      <a:round/>
-                      <a:headEnd type="none" w="med" len="med"/>
-                      <a:tailEnd type="none" w="med" len="med"/>
-                    </a:lnT>
-                    <a:lnB w="6350" cap="flat" cmpd="sng" algn="ctr">
-                      <a:solidFill>
-                        <a:srgbClr val="CCCCCC"/>
-                      </a:solidFill>
-                      <a:prstDash val="solid"/>
-                      <a:round/>
-                      <a:headEnd type="none" w="med" len="med"/>
-                      <a:tailEnd type="none" w="med" len="med"/>
-                    </a:lnB>
-                    <a:solidFill>
-                      <a:srgbClr val="FFFFFF"/>
-                    </a:solidFill>
-                  </a:tcPr>
-                </a:tc>
-                <a:tc>
-                  <a:txBody>
-                    <a:bodyPr/>
-                    <a:lstStyle/>
-                    <a:p>
-                      <a:pPr algn="ctr" indent="0" marL="0">
-                        <a:buNone/>
-                      </a:pPr>
-                      <a:r>
-                        <a:rPr lang="en-US" sz="800" dirty="0">
-                          <a:solidFill>
-                            <a:srgbClr val="000000"/>
-                          </a:solidFill>
-                          <a:latin typeface="Arial" pitchFamily="34" charset="0"/>
-                          <a:ea typeface="Arial" pitchFamily="34" charset="-122"/>
-                          <a:cs typeface="Arial" pitchFamily="34" charset="-120"/>
-                        </a:rPr>
-                        <a:t>8.50/10</a:t>
-                      </a:r>
-                      <a:endParaRPr lang="en-US" sz="800" dirty="0">
-                        <a:latin typeface="Arial" charset="0"/>
-                        <a:ea typeface="Arial" charset="0"/>
-                        <a:cs typeface="Arial" charset="0"/>
-                      </a:endParaRPr>
-                    </a:p>
-                  </a:txBody>
-                  <a:tcPr marL="91440" marR="91440" marT="45720" marB="45720">
-                    <a:lnL w="6350" cap="flat" cmpd="sng" algn="ctr">
-                      <a:solidFill>
-                        <a:srgbClr val="CCCCCC"/>
-                      </a:solidFill>
-                      <a:prstDash val="solid"/>
-                      <a:round/>
-                      <a:headEnd type="none" w="med" len="med"/>
-                      <a:tailEnd type="none" w="med" len="med"/>
-                    </a:lnL>
-                    <a:lnR w="6350" cap="flat" cmpd="sng" algn="ctr">
-                      <a:solidFill>
-                        <a:srgbClr val="CCCCCC"/>
-                      </a:solidFill>
-                      <a:prstDash val="solid"/>
-                      <a:round/>
-                      <a:headEnd type="none" w="med" len="med"/>
-                      <a:tailEnd type="none" w="med" len="med"/>
-                    </a:lnR>
-                    <a:lnT w="6350" cap="flat" cmpd="sng" algn="ctr">
-                      <a:solidFill>
-                        <a:srgbClr val="CCCCCC"/>
-                      </a:solidFill>
-                      <a:prstDash val="solid"/>
-                      <a:round/>
-                      <a:headEnd type="none" w="med" len="med"/>
-                      <a:tailEnd type="none" w="med" len="med"/>
-                    </a:lnT>
-                    <a:lnB w="6350" cap="flat" cmpd="sng" algn="ctr">
-                      <a:solidFill>
-                        <a:srgbClr val="CCCCCC"/>
-                      </a:solidFill>
-                      <a:prstDash val="solid"/>
-                      <a:round/>
-                      <a:headEnd type="none" w="med" len="med"/>
-                      <a:tailEnd type="none" w="med" len="med"/>
-                    </a:lnB>
-                    <a:solidFill>
-                      <a:srgbClr val="FFFFFF"/>
-                    </a:solidFill>
-                  </a:tcPr>
-                </a:tc>
-                <a:tc>
-                  <a:txBody>
-                    <a:bodyPr/>
-                    <a:lstStyle/>
-                    <a:p>
-                      <a:pPr algn="ctr" indent="0" marL="0">
-                        <a:buNone/>
-                      </a:pPr>
-                      <a:r>
-                        <a:rPr lang="en-US" sz="800" dirty="0">
-                          <a:solidFill>
-                            <a:srgbClr val="000000"/>
-                          </a:solidFill>
-                          <a:latin typeface="Arial" pitchFamily="34" charset="0"/>
-                          <a:ea typeface="Arial" pitchFamily="34" charset="-122"/>
-                          <a:cs typeface="Arial" pitchFamily="34" charset="-120"/>
-                        </a:rPr>
-                        <a:t>8.50</a:t>
+                        <a:t>8.40</a:t>
                       </a:r>
                       <a:endParaRPr lang="en-US" sz="800" dirty="0">
                         <a:latin typeface="Arial" charset="0"/>
@@ -6023,7 +6023,7 @@
                           <a:ea typeface="Arial" pitchFamily="34" charset="-122"/>
                           <a:cs typeface="Arial" pitchFamily="34" charset="-120"/>
                         </a:rPr>
-                        <a:t>10</a:t>
+                        <a:t>11</a:t>
                       </a:r>
                       <a:endParaRPr lang="en-US" sz="800" dirty="0">
                         <a:latin typeface="Arial" charset="0"/>
@@ -6091,7 +6091,7 @@
                           <a:ea typeface="Arial" pitchFamily="34" charset="-122"/>
                           <a:cs typeface="Arial" pitchFamily="34" charset="-120"/>
                         </a:rPr>
-                        <a:t>3.40/5</a:t>
+                        <a:t>3.45/5</a:t>
                       </a:r>
                       <a:endParaRPr lang="en-US" sz="800" dirty="0">
                         <a:latin typeface="Arial" charset="0"/>
@@ -6159,7 +6159,7 @@
                           <a:ea typeface="Arial" pitchFamily="34" charset="-122"/>
                           <a:cs typeface="Arial" pitchFamily="34" charset="-120"/>
                         </a:rPr>
-                        <a:t>6.80</a:t>
+                        <a:t>6.91</a:t>
                       </a:r>
                       <a:endParaRPr lang="en-US" sz="800" dirty="0">
                         <a:latin typeface="Arial" charset="0"/>
@@ -6612,7 +6612,7 @@
                 <a:ea typeface="Arial" pitchFamily="34" charset="-122"/>
                 <a:cs typeface="Arial" pitchFamily="34" charset="-120"/>
               </a:rPr>
-              <a:t>116件（82.9%）</a:t>
+              <a:t>112件（81.8%）</a:t>
             </a:r>
             <a:endParaRPr lang="en-US" sz="1600" dirty="0"/>
           </a:p>
@@ -6710,7 +6710,7 @@
                 <a:ea typeface="Arial" pitchFamily="34" charset="-122"/>
                 <a:cs typeface="Arial" pitchFamily="34" charset="-120"/>
               </a:rPr>
-              <a:t>22件（15.7%）</a:t>
+              <a:t>23件（16.8%）</a:t>
             </a:r>
             <a:endParaRPr lang="en-US" sz="1600" dirty="0"/>
           </a:p>
@@ -6808,7 +6808,7 @@
                 <a:ea typeface="Arial" pitchFamily="34" charset="-122"/>
                 <a:cs typeface="Arial" pitchFamily="34" charset="-120"/>
               </a:rPr>
-              <a:t>2件（1.4%）</a:t>
+              <a:t>2件（1.5%）</a:t>
             </a:r>
             <a:endParaRPr lang="en-US" sz="1600" dirty="0"/>
           </a:p>
@@ -6970,7 +6970,7 @@
                 <a:ea typeface="Arial" pitchFamily="34" charset="-122"/>
                 <a:cs typeface="Arial" pitchFamily="34" charset="-120"/>
               </a:rPr>
-              <a:t>高評価レビュー（8-10点: 116件）の分析から、主要な強みテーマを抽出しています。立地・アクセス、客室清潔感、スタッフ対応が高評価の中心的テーマです。</a:t>
+              <a:t>高評価レビュー（8-10点: 112件）の分析から、主要な強みテーマを抽出しています。立地・アクセス、客室清潔感、スタッフ対応が高評価の中心的テーマです。</a:t>
             </a:r>
             <a:endParaRPr lang="en-US" sz="1200" dirty="0"/>
           </a:p>
@@ -7230,7 +7230,7 @@
                 <a:ea typeface="Arial" pitchFamily="34" charset="-122"/>
                 <a:cs typeface="Arial" pitchFamily="34" charset="-120"/>
               </a:rPr>
-              <a:t>低評価・中評価レビュー（24件）から改善課題を優先度別に整理しています。S/A/B/Cの4段階で優先度を設定し、計画的な改善を推進します。</a:t>
+              <a:t>低評価・中評価レビュー（25件）から改善課題を優先度別に整理しています。S/A/B/Cの4段階で優先度を設定し、計画的な改善を推進します。</a:t>
             </a:r>
             <a:endParaRPr lang="en-US" sz="1200" dirty="0"/>
           </a:p>
@@ -8010,7 +8010,7 @@
                 <a:ea typeface="Arial" pitchFamily="34" charset="-122"/>
                 <a:cs typeface="Arial" pitchFamily="34" charset="-120"/>
               </a:rPr>
-              <a:t>全体平均 8.59点 → 目標 9.09点</a:t>
+              <a:t>全体平均 8.55点 → 目標 9.05点</a:t>
             </a:r>
             <a:endParaRPr lang="en-US" sz="1200" dirty="0"/>
           </a:p>
@@ -8027,7 +8027,7 @@
                 <a:ea typeface="Arial" pitchFamily="34" charset="-122"/>
                 <a:cs typeface="Arial" pitchFamily="34" charset="-120"/>
               </a:rPr>
-              <a:t>高評価率 82.9% → 目標 87.9%</a:t>
+              <a:t>高評価率 81.8% → 目標 86.8%</a:t>
             </a:r>
             <a:endParaRPr lang="en-US" sz="1200" dirty="0"/>
           </a:p>
@@ -8044,7 +8044,7 @@
                 <a:ea typeface="Arial" pitchFamily="34" charset="-122"/>
                 <a:cs typeface="Arial" pitchFamily="34" charset="-120"/>
               </a:rPr>
-              <a:t>低評価率 1.4% → 目標 0.0%</a:t>
+              <a:t>低評価率 1.5% → 目標 0.0%</a:t>
             </a:r>
             <a:endParaRPr lang="en-US" sz="1200" dirty="0"/>
           </a:p>

--- a/納品レポート/ホテル別レポート/hearton_口コミ分析レポート.pptx
+++ b/納品レポート/ホテル別レポート/hearton_口コミ分析レポート.pptx
@@ -252,10 +252,10 @@
                     <c:v>じゃらん</c:v>
                   </c:pt>
                   <c:pt idx="2">
-                    <c:v>Booking.com</c:v>
+                    <c:v>楽天トラベル</c:v>
                   </c:pt>
                   <c:pt idx="3">
-                    <c:v>楽天トラベル</c:v>
+                    <c:v>Booking.com</c:v>
                   </c:pt>
                   <c:pt idx="4">
                     <c:v>Agoda</c:v>
@@ -274,19 +274,19 @@
                 <c:formatCode>General</c:formatCode>
                 <c:ptCount val="6"/>
                 <c:pt idx="0">
-                  <c:v>9.5</c:v>
+                  <c:v>9.46</c:v>
                 </c:pt>
                 <c:pt idx="1">
-                  <c:v>8.63</c:v>
+                  <c:v>8.71</c:v>
                 </c:pt>
                 <c:pt idx="2">
-                  <c:v>8.5</c:v>
+                  <c:v>8.6</c:v>
                 </c:pt>
                 <c:pt idx="3">
-                  <c:v>8.47</c:v>
+                  <c:v>8.48</c:v>
                 </c:pt>
                 <c:pt idx="4">
-                  <c:v>8.4</c:v>
+                  <c:v>8.2</c:v>
                 </c:pt>
                 <c:pt idx="5">
                   <c:v>6.91</c:v>
@@ -606,13 +606,13 @@
                   <c:v>9</c:v>
                 </c:pt>
                 <c:pt idx="2">
-                  <c:v>44</c:v>
+                  <c:v>45</c:v>
                 </c:pt>
                 <c:pt idx="3">
                   <c:v>7</c:v>
                 </c:pt>
                 <c:pt idx="4">
-                  <c:v>16</c:v>
+                  <c:v>14</c:v>
                 </c:pt>
                 <c:pt idx="5">
                   <c:v>2</c:v>
@@ -2503,7 +2503,7 @@
                 <a:ea typeface="Arial" pitchFamily="34" charset="-122"/>
                 <a:cs typeface="Arial" pitchFamily="34" charset="-120"/>
               </a:rPr>
-              <a:t>レビュー総数：137件</a:t>
+              <a:t>レビュー総数：136件</a:t>
             </a:r>
             <a:endParaRPr lang="en-US" sz="1000" dirty="0"/>
           </a:p>
@@ -2783,7 +2783,7 @@
                 <a:ea typeface="Arial" pitchFamily="34" charset="-122"/>
                 <a:cs typeface="Arial" pitchFamily="34" charset="-120"/>
               </a:rPr>
-              <a:t>ハートンホテル東品川は全体平均8.55点（10pt換算）、高評価率81.8%を達成しています。本レポートで示した改善施策を段階的に実施することで、さらなる顧客満足度向上が期待できます。</a:t>
+              <a:t>ハートンホテル東品川は全体平均8.59点（10pt換算）、高評価率83.1%を達成しています。本レポートで示した改善施策を段階的に実施することで、さらなる顧客満足度向上が期待できます。</a:t>
             </a:r>
             <a:endParaRPr lang="en-US" sz="1200" dirty="0"/>
           </a:p>
@@ -3220,7 +3220,7 @@
                 <a:ea typeface="Arial" pitchFamily="34" charset="-122"/>
                 <a:cs typeface="Arial" pitchFamily="34" charset="-120"/>
               </a:rPr>
-              <a:t>8.55</a:t>
+              <a:t>8.59</a:t>
             </a:r>
             <a:endParaRPr lang="en-US" sz="2800" dirty="0"/>
           </a:p>
@@ -3338,7 +3338,7 @@
                 <a:ea typeface="Arial" pitchFamily="34" charset="-122"/>
                 <a:cs typeface="Arial" pitchFamily="34" charset="-120"/>
               </a:rPr>
-              <a:t>81.8%</a:t>
+              <a:t>83.1%</a:t>
             </a:r>
             <a:endParaRPr lang="en-US" sz="2800" dirty="0"/>
           </a:p>
@@ -3574,7 +3574,7 @@
                 <a:ea typeface="Arial" pitchFamily="34" charset="-122"/>
                 <a:cs typeface="Arial" pitchFamily="34" charset="-120"/>
               </a:rPr>
-              <a:t>137件</a:t>
+              <a:t>136件</a:t>
             </a:r>
             <a:endParaRPr lang="en-US" sz="2800" dirty="0"/>
           </a:p>
@@ -4313,7 +4313,7 @@
                           <a:ea typeface="Arial" pitchFamily="34" charset="-122"/>
                           <a:cs typeface="Arial" pitchFamily="34" charset="-120"/>
                         </a:rPr>
-                        <a:t>22</a:t>
+                        <a:t>24</a:t>
                       </a:r>
                       <a:endParaRPr lang="en-US" sz="800" dirty="0">
                         <a:latin typeface="Arial" charset="0"/>
@@ -4381,7 +4381,7 @@
                           <a:ea typeface="Arial" pitchFamily="34" charset="-122"/>
                           <a:cs typeface="Arial" pitchFamily="34" charset="-120"/>
                         </a:rPr>
-                        <a:t>9.50/10</a:t>
+                        <a:t>9.46/10</a:t>
                       </a:r>
                       <a:endParaRPr lang="en-US" sz="800" dirty="0">
                         <a:latin typeface="Arial" charset="0"/>
@@ -4449,7 +4449,7 @@
                           <a:ea typeface="Arial" pitchFamily="34" charset="-122"/>
                           <a:cs typeface="Arial" pitchFamily="34" charset="-120"/>
                         </a:rPr>
-                        <a:t>9.50</a:t>
+                        <a:t>9.46</a:t>
                       </a:r>
                       <a:endParaRPr lang="en-US" sz="800" dirty="0">
                         <a:latin typeface="Arial" charset="0"/>
@@ -4655,7 +4655,7 @@
                           <a:ea typeface="Arial" pitchFamily="34" charset="-122"/>
                           <a:cs typeface="Arial" pitchFamily="34" charset="-120"/>
                         </a:rPr>
-                        <a:t>38</a:t>
+                        <a:t>34</a:t>
                       </a:r>
                       <a:endParaRPr lang="en-US" sz="800" dirty="0">
                         <a:latin typeface="Arial" charset="0"/>
@@ -4723,7 +4723,7 @@
                           <a:ea typeface="Arial" pitchFamily="34" charset="-122"/>
                           <a:cs typeface="Arial" pitchFamily="34" charset="-120"/>
                         </a:rPr>
-                        <a:t>4.32/5</a:t>
+                        <a:t>4.35/5</a:t>
                       </a:r>
                       <a:endParaRPr lang="en-US" sz="800" dirty="0">
                         <a:latin typeface="Arial" charset="0"/>
@@ -4791,7 +4791,349 @@
                           <a:ea typeface="Arial" pitchFamily="34" charset="-122"/>
                           <a:cs typeface="Arial" pitchFamily="34" charset="-120"/>
                         </a:rPr>
-                        <a:t>8.63</a:t>
+                        <a:t>8.71</a:t>
+                      </a:r>
+                      <a:endParaRPr lang="en-US" sz="800" dirty="0">
+                        <a:latin typeface="Arial" charset="0"/>
+                        <a:ea typeface="Arial" charset="0"/>
+                        <a:cs typeface="Arial" charset="0"/>
+                      </a:endParaRPr>
+                    </a:p>
+                  </a:txBody>
+                  <a:tcPr marL="91440" marR="91440" marT="45720" marB="45720">
+                    <a:lnL w="6350" cap="flat" cmpd="sng" algn="ctr">
+                      <a:solidFill>
+                        <a:srgbClr val="CCCCCC"/>
+                      </a:solidFill>
+                      <a:prstDash val="solid"/>
+                      <a:round/>
+                      <a:headEnd type="none" w="med" len="med"/>
+                      <a:tailEnd type="none" w="med" len="med"/>
+                    </a:lnL>
+                    <a:lnR w="6350" cap="flat" cmpd="sng" algn="ctr">
+                      <a:solidFill>
+                        <a:srgbClr val="CCCCCC"/>
+                      </a:solidFill>
+                      <a:prstDash val="solid"/>
+                      <a:round/>
+                      <a:headEnd type="none" w="med" len="med"/>
+                      <a:tailEnd type="none" w="med" len="med"/>
+                    </a:lnR>
+                    <a:lnT w="6350" cap="flat" cmpd="sng" algn="ctr">
+                      <a:solidFill>
+                        <a:srgbClr val="CCCCCC"/>
+                      </a:solidFill>
+                      <a:prstDash val="solid"/>
+                      <a:round/>
+                      <a:headEnd type="none" w="med" len="med"/>
+                      <a:tailEnd type="none" w="med" len="med"/>
+                    </a:lnT>
+                    <a:lnB w="6350" cap="flat" cmpd="sng" algn="ctr">
+                      <a:solidFill>
+                        <a:srgbClr val="CCCCCC"/>
+                      </a:solidFill>
+                      <a:prstDash val="solid"/>
+                      <a:round/>
+                      <a:headEnd type="none" w="med" len="med"/>
+                      <a:tailEnd type="none" w="med" len="med"/>
+                    </a:lnB>
+                    <a:solidFill>
+                      <a:srgbClr val="FFFFFF"/>
+                    </a:solidFill>
+                  </a:tcPr>
+                </a:tc>
+                <a:tc>
+                  <a:txBody>
+                    <a:bodyPr/>
+                    <a:lstStyle/>
+                    <a:p>
+                      <a:pPr algn="ctr" indent="0" marL="0">
+                        <a:buNone/>
+                      </a:pPr>
+                      <a:r>
+                        <a:rPr lang="en-US" sz="800" dirty="0">
+                          <a:solidFill>
+                            <a:srgbClr val="000000"/>
+                          </a:solidFill>
+                          <a:latin typeface="Arial" pitchFamily="34" charset="0"/>
+                          <a:ea typeface="Arial" pitchFamily="34" charset="-122"/>
+                          <a:cs typeface="Arial" pitchFamily="34" charset="-120"/>
+                        </a:rPr>
+                        <a:t>良好</a:t>
+                      </a:r>
+                      <a:endParaRPr lang="en-US" sz="800" dirty="0">
+                        <a:latin typeface="Arial" charset="0"/>
+                        <a:ea typeface="Arial" charset="0"/>
+                        <a:cs typeface="Arial" charset="0"/>
+                      </a:endParaRPr>
+                    </a:p>
+                  </a:txBody>
+                  <a:tcPr marL="91440" marR="91440" marT="45720" marB="45720">
+                    <a:lnL w="6350" cap="flat" cmpd="sng" algn="ctr">
+                      <a:solidFill>
+                        <a:srgbClr val="CCCCCC"/>
+                      </a:solidFill>
+                      <a:prstDash val="solid"/>
+                      <a:round/>
+                      <a:headEnd type="none" w="med" len="med"/>
+                      <a:tailEnd type="none" w="med" len="med"/>
+                    </a:lnL>
+                    <a:lnR w="6350" cap="flat" cmpd="sng" algn="ctr">
+                      <a:solidFill>
+                        <a:srgbClr val="CCCCCC"/>
+                      </a:solidFill>
+                      <a:prstDash val="solid"/>
+                      <a:round/>
+                      <a:headEnd type="none" w="med" len="med"/>
+                      <a:tailEnd type="none" w="med" len="med"/>
+                    </a:lnR>
+                    <a:lnT w="6350" cap="flat" cmpd="sng" algn="ctr">
+                      <a:solidFill>
+                        <a:srgbClr val="CCCCCC"/>
+                      </a:solidFill>
+                      <a:prstDash val="solid"/>
+                      <a:round/>
+                      <a:headEnd type="none" w="med" len="med"/>
+                      <a:tailEnd type="none" w="med" len="med"/>
+                    </a:lnT>
+                    <a:lnB w="6350" cap="flat" cmpd="sng" algn="ctr">
+                      <a:solidFill>
+                        <a:srgbClr val="CCCCCC"/>
+                      </a:solidFill>
+                      <a:prstDash val="solid"/>
+                      <a:round/>
+                      <a:headEnd type="none" w="med" len="med"/>
+                      <a:tailEnd type="none" w="med" len="med"/>
+                    </a:lnB>
+                    <a:solidFill>
+                      <a:srgbClr val="FFFFFF"/>
+                    </a:solidFill>
+                  </a:tcPr>
+                </a:tc>
+              </a:tr>
+              <a:tr h="0">
+                <a:tc>
+                  <a:txBody>
+                    <a:bodyPr/>
+                    <a:lstStyle/>
+                    <a:p>
+                      <a:pPr algn="ctr" indent="0" marL="0">
+                        <a:buNone/>
+                      </a:pPr>
+                      <a:r>
+                        <a:rPr lang="en-US" sz="800" dirty="0">
+                          <a:solidFill>
+                            <a:srgbClr val="000000"/>
+                          </a:solidFill>
+                          <a:latin typeface="Arial" pitchFamily="34" charset="0"/>
+                          <a:ea typeface="Arial" pitchFamily="34" charset="-122"/>
+                          <a:cs typeface="Arial" pitchFamily="34" charset="-120"/>
+                        </a:rPr>
+                        <a:t>楽天トラベル</a:t>
+                      </a:r>
+                      <a:endParaRPr lang="en-US" sz="800" dirty="0">
+                        <a:latin typeface="Arial" charset="0"/>
+                        <a:ea typeface="Arial" charset="0"/>
+                        <a:cs typeface="Arial" charset="0"/>
+                      </a:endParaRPr>
+                    </a:p>
+                  </a:txBody>
+                  <a:tcPr marL="91440" marR="91440" marT="45720" marB="45720">
+                    <a:lnL w="6350" cap="flat" cmpd="sng" algn="ctr">
+                      <a:solidFill>
+                        <a:srgbClr val="CCCCCC"/>
+                      </a:solidFill>
+                      <a:prstDash val="solid"/>
+                      <a:round/>
+                      <a:headEnd type="none" w="med" len="med"/>
+                      <a:tailEnd type="none" w="med" len="med"/>
+                    </a:lnL>
+                    <a:lnR w="6350" cap="flat" cmpd="sng" algn="ctr">
+                      <a:solidFill>
+                        <a:srgbClr val="CCCCCC"/>
+                      </a:solidFill>
+                      <a:prstDash val="solid"/>
+                      <a:round/>
+                      <a:headEnd type="none" w="med" len="med"/>
+                      <a:tailEnd type="none" w="med" len="med"/>
+                    </a:lnR>
+                    <a:lnT w="6350" cap="flat" cmpd="sng" algn="ctr">
+                      <a:solidFill>
+                        <a:srgbClr val="CCCCCC"/>
+                      </a:solidFill>
+                      <a:prstDash val="solid"/>
+                      <a:round/>
+                      <a:headEnd type="none" w="med" len="med"/>
+                      <a:tailEnd type="none" w="med" len="med"/>
+                    </a:lnT>
+                    <a:lnB w="6350" cap="flat" cmpd="sng" algn="ctr">
+                      <a:solidFill>
+                        <a:srgbClr val="CCCCCC"/>
+                      </a:solidFill>
+                      <a:prstDash val="solid"/>
+                      <a:round/>
+                      <a:headEnd type="none" w="med" len="med"/>
+                      <a:tailEnd type="none" w="med" len="med"/>
+                    </a:lnB>
+                    <a:solidFill>
+                      <a:srgbClr val="FFFFFF"/>
+                    </a:solidFill>
+                  </a:tcPr>
+                </a:tc>
+                <a:tc>
+                  <a:txBody>
+                    <a:bodyPr/>
+                    <a:lstStyle/>
+                    <a:p>
+                      <a:pPr algn="ctr" indent="0" marL="0">
+                        <a:buNone/>
+                      </a:pPr>
+                      <a:r>
+                        <a:rPr lang="en-US" sz="800" dirty="0">
+                          <a:solidFill>
+                            <a:srgbClr val="000000"/>
+                          </a:solidFill>
+                          <a:latin typeface="Arial" pitchFamily="34" charset="0"/>
+                          <a:ea typeface="Arial" pitchFamily="34" charset="-122"/>
+                          <a:cs typeface="Arial" pitchFamily="34" charset="-120"/>
+                        </a:rPr>
+                        <a:t>30</a:t>
+                      </a:r>
+                      <a:endParaRPr lang="en-US" sz="800" dirty="0">
+                        <a:latin typeface="Arial" charset="0"/>
+                        <a:ea typeface="Arial" charset="0"/>
+                        <a:cs typeface="Arial" charset="0"/>
+                      </a:endParaRPr>
+                    </a:p>
+                  </a:txBody>
+                  <a:tcPr marL="91440" marR="91440" marT="45720" marB="45720">
+                    <a:lnL w="6350" cap="flat" cmpd="sng" algn="ctr">
+                      <a:solidFill>
+                        <a:srgbClr val="CCCCCC"/>
+                      </a:solidFill>
+                      <a:prstDash val="solid"/>
+                      <a:round/>
+                      <a:headEnd type="none" w="med" len="med"/>
+                      <a:tailEnd type="none" w="med" len="med"/>
+                    </a:lnL>
+                    <a:lnR w="6350" cap="flat" cmpd="sng" algn="ctr">
+                      <a:solidFill>
+                        <a:srgbClr val="CCCCCC"/>
+                      </a:solidFill>
+                      <a:prstDash val="solid"/>
+                      <a:round/>
+                      <a:headEnd type="none" w="med" len="med"/>
+                      <a:tailEnd type="none" w="med" len="med"/>
+                    </a:lnR>
+                    <a:lnT w="6350" cap="flat" cmpd="sng" algn="ctr">
+                      <a:solidFill>
+                        <a:srgbClr val="CCCCCC"/>
+                      </a:solidFill>
+                      <a:prstDash val="solid"/>
+                      <a:round/>
+                      <a:headEnd type="none" w="med" len="med"/>
+                      <a:tailEnd type="none" w="med" len="med"/>
+                    </a:lnT>
+                    <a:lnB w="6350" cap="flat" cmpd="sng" algn="ctr">
+                      <a:solidFill>
+                        <a:srgbClr val="CCCCCC"/>
+                      </a:solidFill>
+                      <a:prstDash val="solid"/>
+                      <a:round/>
+                      <a:headEnd type="none" w="med" len="med"/>
+                      <a:tailEnd type="none" w="med" len="med"/>
+                    </a:lnB>
+                    <a:solidFill>
+                      <a:srgbClr val="FFFFFF"/>
+                    </a:solidFill>
+                  </a:tcPr>
+                </a:tc>
+                <a:tc>
+                  <a:txBody>
+                    <a:bodyPr/>
+                    <a:lstStyle/>
+                    <a:p>
+                      <a:pPr algn="ctr" indent="0" marL="0">
+                        <a:buNone/>
+                      </a:pPr>
+                      <a:r>
+                        <a:rPr lang="en-US" sz="800" dirty="0">
+                          <a:solidFill>
+                            <a:srgbClr val="000000"/>
+                          </a:solidFill>
+                          <a:latin typeface="Arial" pitchFamily="34" charset="0"/>
+                          <a:ea typeface="Arial" pitchFamily="34" charset="-122"/>
+                          <a:cs typeface="Arial" pitchFamily="34" charset="-120"/>
+                        </a:rPr>
+                        <a:t>4.30/5</a:t>
+                      </a:r>
+                      <a:endParaRPr lang="en-US" sz="800" dirty="0">
+                        <a:latin typeface="Arial" charset="0"/>
+                        <a:ea typeface="Arial" charset="0"/>
+                        <a:cs typeface="Arial" charset="0"/>
+                      </a:endParaRPr>
+                    </a:p>
+                  </a:txBody>
+                  <a:tcPr marL="91440" marR="91440" marT="45720" marB="45720">
+                    <a:lnL w="6350" cap="flat" cmpd="sng" algn="ctr">
+                      <a:solidFill>
+                        <a:srgbClr val="CCCCCC"/>
+                      </a:solidFill>
+                      <a:prstDash val="solid"/>
+                      <a:round/>
+                      <a:headEnd type="none" w="med" len="med"/>
+                      <a:tailEnd type="none" w="med" len="med"/>
+                    </a:lnL>
+                    <a:lnR w="6350" cap="flat" cmpd="sng" algn="ctr">
+                      <a:solidFill>
+                        <a:srgbClr val="CCCCCC"/>
+                      </a:solidFill>
+                      <a:prstDash val="solid"/>
+                      <a:round/>
+                      <a:headEnd type="none" w="med" len="med"/>
+                      <a:tailEnd type="none" w="med" len="med"/>
+                    </a:lnR>
+                    <a:lnT w="6350" cap="flat" cmpd="sng" algn="ctr">
+                      <a:solidFill>
+                        <a:srgbClr val="CCCCCC"/>
+                      </a:solidFill>
+                      <a:prstDash val="solid"/>
+                      <a:round/>
+                      <a:headEnd type="none" w="med" len="med"/>
+                      <a:tailEnd type="none" w="med" len="med"/>
+                    </a:lnT>
+                    <a:lnB w="6350" cap="flat" cmpd="sng" algn="ctr">
+                      <a:solidFill>
+                        <a:srgbClr val="CCCCCC"/>
+                      </a:solidFill>
+                      <a:prstDash val="solid"/>
+                      <a:round/>
+                      <a:headEnd type="none" w="med" len="med"/>
+                      <a:tailEnd type="none" w="med" len="med"/>
+                    </a:lnB>
+                    <a:solidFill>
+                      <a:srgbClr val="FFFFFF"/>
+                    </a:solidFill>
+                  </a:tcPr>
+                </a:tc>
+                <a:tc>
+                  <a:txBody>
+                    <a:bodyPr/>
+                    <a:lstStyle/>
+                    <a:p>
+                      <a:pPr algn="ctr" indent="0" marL="0">
+                        <a:buNone/>
+                      </a:pPr>
+                      <a:r>
+                        <a:rPr lang="en-US" sz="800" dirty="0">
+                          <a:solidFill>
+                            <a:srgbClr val="000000"/>
+                          </a:solidFill>
+                          <a:latin typeface="Arial" pitchFamily="34" charset="0"/>
+                          <a:ea typeface="Arial" pitchFamily="34" charset="-122"/>
+                          <a:cs typeface="Arial" pitchFamily="34" charset="-120"/>
+                        </a:rPr>
+                        <a:t>8.60</a:t>
                       </a:r>
                       <a:endParaRPr lang="en-US" sz="800" dirty="0">
                         <a:latin typeface="Arial" charset="0"/>
@@ -4997,7 +5339,7 @@
                           <a:ea typeface="Arial" pitchFamily="34" charset="-122"/>
                           <a:cs typeface="Arial" pitchFamily="34" charset="-120"/>
                         </a:rPr>
-                        <a:t>26</a:t>
+                        <a:t>27</a:t>
                       </a:r>
                       <a:endParaRPr lang="en-US" sz="800" dirty="0">
                         <a:latin typeface="Arial" charset="0"/>
@@ -5065,7 +5407,7 @@
                           <a:ea typeface="Arial" pitchFamily="34" charset="-122"/>
                           <a:cs typeface="Arial" pitchFamily="34" charset="-120"/>
                         </a:rPr>
-                        <a:t>8.50/10</a:t>
+                        <a:t>8.48/10</a:t>
                       </a:r>
                       <a:endParaRPr lang="en-US" sz="800" dirty="0">
                         <a:latin typeface="Arial" charset="0"/>
@@ -5133,349 +5475,7 @@
                           <a:ea typeface="Arial" pitchFamily="34" charset="-122"/>
                           <a:cs typeface="Arial" pitchFamily="34" charset="-120"/>
                         </a:rPr>
-                        <a:t>8.50</a:t>
-                      </a:r>
-                      <a:endParaRPr lang="en-US" sz="800" dirty="0">
-                        <a:latin typeface="Arial" charset="0"/>
-                        <a:ea typeface="Arial" charset="0"/>
-                        <a:cs typeface="Arial" charset="0"/>
-                      </a:endParaRPr>
-                    </a:p>
-                  </a:txBody>
-                  <a:tcPr marL="91440" marR="91440" marT="45720" marB="45720">
-                    <a:lnL w="6350" cap="flat" cmpd="sng" algn="ctr">
-                      <a:solidFill>
-                        <a:srgbClr val="CCCCCC"/>
-                      </a:solidFill>
-                      <a:prstDash val="solid"/>
-                      <a:round/>
-                      <a:headEnd type="none" w="med" len="med"/>
-                      <a:tailEnd type="none" w="med" len="med"/>
-                    </a:lnL>
-                    <a:lnR w="6350" cap="flat" cmpd="sng" algn="ctr">
-                      <a:solidFill>
-                        <a:srgbClr val="CCCCCC"/>
-                      </a:solidFill>
-                      <a:prstDash val="solid"/>
-                      <a:round/>
-                      <a:headEnd type="none" w="med" len="med"/>
-                      <a:tailEnd type="none" w="med" len="med"/>
-                    </a:lnR>
-                    <a:lnT w="6350" cap="flat" cmpd="sng" algn="ctr">
-                      <a:solidFill>
-                        <a:srgbClr val="CCCCCC"/>
-                      </a:solidFill>
-                      <a:prstDash val="solid"/>
-                      <a:round/>
-                      <a:headEnd type="none" w="med" len="med"/>
-                      <a:tailEnd type="none" w="med" len="med"/>
-                    </a:lnT>
-                    <a:lnB w="6350" cap="flat" cmpd="sng" algn="ctr">
-                      <a:solidFill>
-                        <a:srgbClr val="CCCCCC"/>
-                      </a:solidFill>
-                      <a:prstDash val="solid"/>
-                      <a:round/>
-                      <a:headEnd type="none" w="med" len="med"/>
-                      <a:tailEnd type="none" w="med" len="med"/>
-                    </a:lnB>
-                    <a:solidFill>
-                      <a:srgbClr val="FFFFFF"/>
-                    </a:solidFill>
-                  </a:tcPr>
-                </a:tc>
-                <a:tc>
-                  <a:txBody>
-                    <a:bodyPr/>
-                    <a:lstStyle/>
-                    <a:p>
-                      <a:pPr algn="ctr" indent="0" marL="0">
-                        <a:buNone/>
-                      </a:pPr>
-                      <a:r>
-                        <a:rPr lang="en-US" sz="800" dirty="0">
-                          <a:solidFill>
-                            <a:srgbClr val="000000"/>
-                          </a:solidFill>
-                          <a:latin typeface="Arial" pitchFamily="34" charset="0"/>
-                          <a:ea typeface="Arial" pitchFamily="34" charset="-122"/>
-                          <a:cs typeface="Arial" pitchFamily="34" charset="-120"/>
-                        </a:rPr>
-                        <a:t>良好</a:t>
-                      </a:r>
-                      <a:endParaRPr lang="en-US" sz="800" dirty="0">
-                        <a:latin typeface="Arial" charset="0"/>
-                        <a:ea typeface="Arial" charset="0"/>
-                        <a:cs typeface="Arial" charset="0"/>
-                      </a:endParaRPr>
-                    </a:p>
-                  </a:txBody>
-                  <a:tcPr marL="91440" marR="91440" marT="45720" marB="45720">
-                    <a:lnL w="6350" cap="flat" cmpd="sng" algn="ctr">
-                      <a:solidFill>
-                        <a:srgbClr val="CCCCCC"/>
-                      </a:solidFill>
-                      <a:prstDash val="solid"/>
-                      <a:round/>
-                      <a:headEnd type="none" w="med" len="med"/>
-                      <a:tailEnd type="none" w="med" len="med"/>
-                    </a:lnL>
-                    <a:lnR w="6350" cap="flat" cmpd="sng" algn="ctr">
-                      <a:solidFill>
-                        <a:srgbClr val="CCCCCC"/>
-                      </a:solidFill>
-                      <a:prstDash val="solid"/>
-                      <a:round/>
-                      <a:headEnd type="none" w="med" len="med"/>
-                      <a:tailEnd type="none" w="med" len="med"/>
-                    </a:lnR>
-                    <a:lnT w="6350" cap="flat" cmpd="sng" algn="ctr">
-                      <a:solidFill>
-                        <a:srgbClr val="CCCCCC"/>
-                      </a:solidFill>
-                      <a:prstDash val="solid"/>
-                      <a:round/>
-                      <a:headEnd type="none" w="med" len="med"/>
-                      <a:tailEnd type="none" w="med" len="med"/>
-                    </a:lnT>
-                    <a:lnB w="6350" cap="flat" cmpd="sng" algn="ctr">
-                      <a:solidFill>
-                        <a:srgbClr val="CCCCCC"/>
-                      </a:solidFill>
-                      <a:prstDash val="solid"/>
-                      <a:round/>
-                      <a:headEnd type="none" w="med" len="med"/>
-                      <a:tailEnd type="none" w="med" len="med"/>
-                    </a:lnB>
-                    <a:solidFill>
-                      <a:srgbClr val="FFFFFF"/>
-                    </a:solidFill>
-                  </a:tcPr>
-                </a:tc>
-              </a:tr>
-              <a:tr h="0">
-                <a:tc>
-                  <a:txBody>
-                    <a:bodyPr/>
-                    <a:lstStyle/>
-                    <a:p>
-                      <a:pPr algn="ctr" indent="0" marL="0">
-                        <a:buNone/>
-                      </a:pPr>
-                      <a:r>
-                        <a:rPr lang="en-US" sz="800" dirty="0">
-                          <a:solidFill>
-                            <a:srgbClr val="000000"/>
-                          </a:solidFill>
-                          <a:latin typeface="Arial" pitchFamily="34" charset="0"/>
-                          <a:ea typeface="Arial" pitchFamily="34" charset="-122"/>
-                          <a:cs typeface="Arial" pitchFamily="34" charset="-120"/>
-                        </a:rPr>
-                        <a:t>楽天トラベル</a:t>
-                      </a:r>
-                      <a:endParaRPr lang="en-US" sz="800" dirty="0">
-                        <a:latin typeface="Arial" charset="0"/>
-                        <a:ea typeface="Arial" charset="0"/>
-                        <a:cs typeface="Arial" charset="0"/>
-                      </a:endParaRPr>
-                    </a:p>
-                  </a:txBody>
-                  <a:tcPr marL="91440" marR="91440" marT="45720" marB="45720">
-                    <a:lnL w="6350" cap="flat" cmpd="sng" algn="ctr">
-                      <a:solidFill>
-                        <a:srgbClr val="CCCCCC"/>
-                      </a:solidFill>
-                      <a:prstDash val="solid"/>
-                      <a:round/>
-                      <a:headEnd type="none" w="med" len="med"/>
-                      <a:tailEnd type="none" w="med" len="med"/>
-                    </a:lnL>
-                    <a:lnR w="6350" cap="flat" cmpd="sng" algn="ctr">
-                      <a:solidFill>
-                        <a:srgbClr val="CCCCCC"/>
-                      </a:solidFill>
-                      <a:prstDash val="solid"/>
-                      <a:round/>
-                      <a:headEnd type="none" w="med" len="med"/>
-                      <a:tailEnd type="none" w="med" len="med"/>
-                    </a:lnR>
-                    <a:lnT w="6350" cap="flat" cmpd="sng" algn="ctr">
-                      <a:solidFill>
-                        <a:srgbClr val="CCCCCC"/>
-                      </a:solidFill>
-                      <a:prstDash val="solid"/>
-                      <a:round/>
-                      <a:headEnd type="none" w="med" len="med"/>
-                      <a:tailEnd type="none" w="med" len="med"/>
-                    </a:lnT>
-                    <a:lnB w="6350" cap="flat" cmpd="sng" algn="ctr">
-                      <a:solidFill>
-                        <a:srgbClr val="CCCCCC"/>
-                      </a:solidFill>
-                      <a:prstDash val="solid"/>
-                      <a:round/>
-                      <a:headEnd type="none" w="med" len="med"/>
-                      <a:tailEnd type="none" w="med" len="med"/>
-                    </a:lnB>
-                    <a:solidFill>
-                      <a:srgbClr val="FFFFFF"/>
-                    </a:solidFill>
-                  </a:tcPr>
-                </a:tc>
-                <a:tc>
-                  <a:txBody>
-                    <a:bodyPr/>
-                    <a:lstStyle/>
-                    <a:p>
-                      <a:pPr algn="ctr" indent="0" marL="0">
-                        <a:buNone/>
-                      </a:pPr>
-                      <a:r>
-                        <a:rPr lang="en-US" sz="800" dirty="0">
-                          <a:solidFill>
-                            <a:srgbClr val="000000"/>
-                          </a:solidFill>
-                          <a:latin typeface="Arial" pitchFamily="34" charset="0"/>
-                          <a:ea typeface="Arial" pitchFamily="34" charset="-122"/>
-                          <a:cs typeface="Arial" pitchFamily="34" charset="-120"/>
-                        </a:rPr>
-                        <a:t>30</a:t>
-                      </a:r>
-                      <a:endParaRPr lang="en-US" sz="800" dirty="0">
-                        <a:latin typeface="Arial" charset="0"/>
-                        <a:ea typeface="Arial" charset="0"/>
-                        <a:cs typeface="Arial" charset="0"/>
-                      </a:endParaRPr>
-                    </a:p>
-                  </a:txBody>
-                  <a:tcPr marL="91440" marR="91440" marT="45720" marB="45720">
-                    <a:lnL w="6350" cap="flat" cmpd="sng" algn="ctr">
-                      <a:solidFill>
-                        <a:srgbClr val="CCCCCC"/>
-                      </a:solidFill>
-                      <a:prstDash val="solid"/>
-                      <a:round/>
-                      <a:headEnd type="none" w="med" len="med"/>
-                      <a:tailEnd type="none" w="med" len="med"/>
-                    </a:lnL>
-                    <a:lnR w="6350" cap="flat" cmpd="sng" algn="ctr">
-                      <a:solidFill>
-                        <a:srgbClr val="CCCCCC"/>
-                      </a:solidFill>
-                      <a:prstDash val="solid"/>
-                      <a:round/>
-                      <a:headEnd type="none" w="med" len="med"/>
-                      <a:tailEnd type="none" w="med" len="med"/>
-                    </a:lnR>
-                    <a:lnT w="6350" cap="flat" cmpd="sng" algn="ctr">
-                      <a:solidFill>
-                        <a:srgbClr val="CCCCCC"/>
-                      </a:solidFill>
-                      <a:prstDash val="solid"/>
-                      <a:round/>
-                      <a:headEnd type="none" w="med" len="med"/>
-                      <a:tailEnd type="none" w="med" len="med"/>
-                    </a:lnT>
-                    <a:lnB w="6350" cap="flat" cmpd="sng" algn="ctr">
-                      <a:solidFill>
-                        <a:srgbClr val="CCCCCC"/>
-                      </a:solidFill>
-                      <a:prstDash val="solid"/>
-                      <a:round/>
-                      <a:headEnd type="none" w="med" len="med"/>
-                      <a:tailEnd type="none" w="med" len="med"/>
-                    </a:lnB>
-                    <a:solidFill>
-                      <a:srgbClr val="FFFFFF"/>
-                    </a:solidFill>
-                  </a:tcPr>
-                </a:tc>
-                <a:tc>
-                  <a:txBody>
-                    <a:bodyPr/>
-                    <a:lstStyle/>
-                    <a:p>
-                      <a:pPr algn="ctr" indent="0" marL="0">
-                        <a:buNone/>
-                      </a:pPr>
-                      <a:r>
-                        <a:rPr lang="en-US" sz="800" dirty="0">
-                          <a:solidFill>
-                            <a:srgbClr val="000000"/>
-                          </a:solidFill>
-                          <a:latin typeface="Arial" pitchFamily="34" charset="0"/>
-                          <a:ea typeface="Arial" pitchFamily="34" charset="-122"/>
-                          <a:cs typeface="Arial" pitchFamily="34" charset="-120"/>
-                        </a:rPr>
-                        <a:t>4.23/5</a:t>
-                      </a:r>
-                      <a:endParaRPr lang="en-US" sz="800" dirty="0">
-                        <a:latin typeface="Arial" charset="0"/>
-                        <a:ea typeface="Arial" charset="0"/>
-                        <a:cs typeface="Arial" charset="0"/>
-                      </a:endParaRPr>
-                    </a:p>
-                  </a:txBody>
-                  <a:tcPr marL="91440" marR="91440" marT="45720" marB="45720">
-                    <a:lnL w="6350" cap="flat" cmpd="sng" algn="ctr">
-                      <a:solidFill>
-                        <a:srgbClr val="CCCCCC"/>
-                      </a:solidFill>
-                      <a:prstDash val="solid"/>
-                      <a:round/>
-                      <a:headEnd type="none" w="med" len="med"/>
-                      <a:tailEnd type="none" w="med" len="med"/>
-                    </a:lnL>
-                    <a:lnR w="6350" cap="flat" cmpd="sng" algn="ctr">
-                      <a:solidFill>
-                        <a:srgbClr val="CCCCCC"/>
-                      </a:solidFill>
-                      <a:prstDash val="solid"/>
-                      <a:round/>
-                      <a:headEnd type="none" w="med" len="med"/>
-                      <a:tailEnd type="none" w="med" len="med"/>
-                    </a:lnR>
-                    <a:lnT w="6350" cap="flat" cmpd="sng" algn="ctr">
-                      <a:solidFill>
-                        <a:srgbClr val="CCCCCC"/>
-                      </a:solidFill>
-                      <a:prstDash val="solid"/>
-                      <a:round/>
-                      <a:headEnd type="none" w="med" len="med"/>
-                      <a:tailEnd type="none" w="med" len="med"/>
-                    </a:lnT>
-                    <a:lnB w="6350" cap="flat" cmpd="sng" algn="ctr">
-                      <a:solidFill>
-                        <a:srgbClr val="CCCCCC"/>
-                      </a:solidFill>
-                      <a:prstDash val="solid"/>
-                      <a:round/>
-                      <a:headEnd type="none" w="med" len="med"/>
-                      <a:tailEnd type="none" w="med" len="med"/>
-                    </a:lnB>
-                    <a:solidFill>
-                      <a:srgbClr val="FFFFFF"/>
-                    </a:solidFill>
-                  </a:tcPr>
-                </a:tc>
-                <a:tc>
-                  <a:txBody>
-                    <a:bodyPr/>
-                    <a:lstStyle/>
-                    <a:p>
-                      <a:pPr algn="ctr" indent="0" marL="0">
-                        <a:buNone/>
-                      </a:pPr>
-                      <a:r>
-                        <a:rPr lang="en-US" sz="800" dirty="0">
-                          <a:solidFill>
-                            <a:srgbClr val="000000"/>
-                          </a:solidFill>
-                          <a:latin typeface="Arial" pitchFamily="34" charset="0"/>
-                          <a:ea typeface="Arial" pitchFamily="34" charset="-122"/>
-                          <a:cs typeface="Arial" pitchFamily="34" charset="-120"/>
-                        </a:rPr>
-                        <a:t>8.47</a:t>
+                        <a:t>8.48</a:t>
                       </a:r>
                       <a:endParaRPr lang="en-US" sz="800" dirty="0">
                         <a:latin typeface="Arial" charset="0"/>
@@ -5749,7 +5749,7 @@
                           <a:ea typeface="Arial" pitchFamily="34" charset="-122"/>
                           <a:cs typeface="Arial" pitchFamily="34" charset="-120"/>
                         </a:rPr>
-                        <a:t>8.40/10</a:t>
+                        <a:t>8.20/10</a:t>
                       </a:r>
                       <a:endParaRPr lang="en-US" sz="800" dirty="0">
                         <a:latin typeface="Arial" charset="0"/>
@@ -5817,7 +5817,7 @@
                           <a:ea typeface="Arial" pitchFamily="34" charset="-122"/>
                           <a:cs typeface="Arial" pitchFamily="34" charset="-120"/>
                         </a:rPr>
-                        <a:t>8.40</a:t>
+                        <a:t>8.20</a:t>
                       </a:r>
                       <a:endParaRPr lang="en-US" sz="800" dirty="0">
                         <a:latin typeface="Arial" charset="0"/>
@@ -6612,7 +6612,7 @@
                 <a:ea typeface="Arial" pitchFamily="34" charset="-122"/>
                 <a:cs typeface="Arial" pitchFamily="34" charset="-120"/>
               </a:rPr>
-              <a:t>112件（81.8%）</a:t>
+              <a:t>113件（83.1%）</a:t>
             </a:r>
             <a:endParaRPr lang="en-US" sz="1600" dirty="0"/>
           </a:p>
@@ -6710,7 +6710,7 @@
                 <a:ea typeface="Arial" pitchFamily="34" charset="-122"/>
                 <a:cs typeface="Arial" pitchFamily="34" charset="-120"/>
               </a:rPr>
-              <a:t>23件（16.8%）</a:t>
+              <a:t>21件（15.4%）</a:t>
             </a:r>
             <a:endParaRPr lang="en-US" sz="1600" dirty="0"/>
           </a:p>
@@ -6970,7 +6970,7 @@
                 <a:ea typeface="Arial" pitchFamily="34" charset="-122"/>
                 <a:cs typeface="Arial" pitchFamily="34" charset="-120"/>
               </a:rPr>
-              <a:t>高評価レビュー（8-10点: 112件）の分析から、主要な強みテーマを抽出しています。立地・アクセス、客室清潔感、スタッフ対応が高評価の中心的テーマです。</a:t>
+              <a:t>高評価レビュー（8-10点: 113件）の分析から、主要な強みテーマを抽出しています。立地・アクセス、客室清潔感、スタッフ対応が高評価の中心的テーマです。</a:t>
             </a:r>
             <a:endParaRPr lang="en-US" sz="1200" dirty="0"/>
           </a:p>
@@ -7230,7 +7230,7 @@
                 <a:ea typeface="Arial" pitchFamily="34" charset="-122"/>
                 <a:cs typeface="Arial" pitchFamily="34" charset="-120"/>
               </a:rPr>
-              <a:t>低評価・中評価レビュー（25件）から改善課題を優先度別に整理しています。S/A/B/Cの4段階で優先度を設定し、計画的な改善を推進します。</a:t>
+              <a:t>低評価・中評価レビュー（23件）から改善課題を優先度別に整理しています。S/A/B/Cの4段階で優先度を設定し、計画的な改善を推進します。</a:t>
             </a:r>
             <a:endParaRPr lang="en-US" sz="1200" dirty="0"/>
           </a:p>
@@ -8010,7 +8010,7 @@
                 <a:ea typeface="Arial" pitchFamily="34" charset="-122"/>
                 <a:cs typeface="Arial" pitchFamily="34" charset="-120"/>
               </a:rPr>
-              <a:t>全体平均 8.55点 → 目標 9.05点</a:t>
+              <a:t>全体平均 8.59点 → 目標 9.09点</a:t>
             </a:r>
             <a:endParaRPr lang="en-US" sz="1200" dirty="0"/>
           </a:p>
@@ -8027,7 +8027,7 @@
                 <a:ea typeface="Arial" pitchFamily="34" charset="-122"/>
                 <a:cs typeface="Arial" pitchFamily="34" charset="-120"/>
               </a:rPr>
-              <a:t>高評価率 81.8% → 目標 86.8%</a:t>
+              <a:t>高評価率 83.1% → 目標 88.1%</a:t>
             </a:r>
             <a:endParaRPr lang="en-US" sz="1200" dirty="0"/>
           </a:p>

--- a/納品レポート/ホテル別レポート/hearton_口コミ分析レポート.pptx
+++ b/納品レポート/ホテル別レポート/hearton_口コミ分析レポート.pptx
@@ -252,10 +252,10 @@
                     <c:v>じゃらん</c:v>
                   </c:pt>
                   <c:pt idx="2">
-                    <c:v>楽天トラベル</c:v>
+                    <c:v>Booking.com</c:v>
                   </c:pt>
                   <c:pt idx="3">
-                    <c:v>Booking.com</c:v>
+                    <c:v>楽天トラベル</c:v>
                   </c:pt>
                   <c:pt idx="4">
                     <c:v>Agoda</c:v>
@@ -274,16 +274,16 @@
                 <c:formatCode>General</c:formatCode>
                 <c:ptCount val="6"/>
                 <c:pt idx="0">
-                  <c:v>9.46</c:v>
+                  <c:v>9.35</c:v>
                 </c:pt>
                 <c:pt idx="1">
-                  <c:v>8.71</c:v>
+                  <c:v>8.59</c:v>
                 </c:pt>
                 <c:pt idx="2">
-                  <c:v>8.6</c:v>
+                  <c:v>8.5</c:v>
                 </c:pt>
                 <c:pt idx="3">
-                  <c:v>8.48</c:v>
+                  <c:v>8.47</c:v>
                 </c:pt>
                 <c:pt idx="4">
                   <c:v>8.2</c:v>
@@ -600,19 +600,19 @@
                 <c:formatCode>General</c:formatCode>
                 <c:ptCount val="6"/>
                 <c:pt idx="0">
-                  <c:v>59</c:v>
+                  <c:v>55</c:v>
                 </c:pt>
                 <c:pt idx="1">
-                  <c:v>9</c:v>
+                  <c:v>10</c:v>
                 </c:pt>
                 <c:pt idx="2">
-                  <c:v>45</c:v>
+                  <c:v>46</c:v>
                 </c:pt>
                 <c:pt idx="3">
                   <c:v>7</c:v>
                 </c:pt>
                 <c:pt idx="4">
-                  <c:v>14</c:v>
+                  <c:v>16</c:v>
                 </c:pt>
                 <c:pt idx="5">
                   <c:v>2</c:v>
@@ -2783,7 +2783,7 @@
                 <a:ea typeface="Arial" pitchFamily="34" charset="-122"/>
                 <a:cs typeface="Arial" pitchFamily="34" charset="-120"/>
               </a:rPr>
-              <a:t>ハートンホテル東品川は全体平均8.59点（10pt換算）、高評価率83.1%を達成しています。本レポートで示した改善施策を段階的に実施することで、さらなる顧客満足度向上が期待できます。</a:t>
+              <a:t>ハートンホテル東品川は全体平均8.51点（10pt換算）、高評価率81.6%を達成しています。本レポートで示した改善施策を段階的に実施することで、さらなる顧客満足度向上が期待できます。</a:t>
             </a:r>
             <a:endParaRPr lang="en-US" sz="1200" dirty="0"/>
           </a:p>
@@ -3220,7 +3220,7 @@
                 <a:ea typeface="Arial" pitchFamily="34" charset="-122"/>
                 <a:cs typeface="Arial" pitchFamily="34" charset="-120"/>
               </a:rPr>
-              <a:t>8.59</a:t>
+              <a:t>8.51</a:t>
             </a:r>
             <a:endParaRPr lang="en-US" sz="2800" dirty="0"/>
           </a:p>
@@ -3338,7 +3338,7 @@
                 <a:ea typeface="Arial" pitchFamily="34" charset="-122"/>
                 <a:cs typeface="Arial" pitchFamily="34" charset="-120"/>
               </a:rPr>
-              <a:t>83.1%</a:t>
+              <a:t>81.6%</a:t>
             </a:r>
             <a:endParaRPr lang="en-US" sz="2800" dirty="0"/>
           </a:p>
@@ -4313,7 +4313,7 @@
                           <a:ea typeface="Arial" pitchFamily="34" charset="-122"/>
                           <a:cs typeface="Arial" pitchFamily="34" charset="-120"/>
                         </a:rPr>
-                        <a:t>24</a:t>
+                        <a:t>23</a:t>
                       </a:r>
                       <a:endParaRPr lang="en-US" sz="800" dirty="0">
                         <a:latin typeface="Arial" charset="0"/>
@@ -4381,7 +4381,7 @@
                           <a:ea typeface="Arial" pitchFamily="34" charset="-122"/>
                           <a:cs typeface="Arial" pitchFamily="34" charset="-120"/>
                         </a:rPr>
-                        <a:t>9.46/10</a:t>
+                        <a:t>9.35/10</a:t>
                       </a:r>
                       <a:endParaRPr lang="en-US" sz="800" dirty="0">
                         <a:latin typeface="Arial" charset="0"/>
@@ -4449,7 +4449,7 @@
                           <a:ea typeface="Arial" pitchFamily="34" charset="-122"/>
                           <a:cs typeface="Arial" pitchFamily="34" charset="-120"/>
                         </a:rPr>
-                        <a:t>9.46</a:t>
+                        <a:t>9.35</a:t>
                       </a:r>
                       <a:endParaRPr lang="en-US" sz="800" dirty="0">
                         <a:latin typeface="Arial" charset="0"/>
@@ -4723,7 +4723,7 @@
                           <a:ea typeface="Arial" pitchFamily="34" charset="-122"/>
                           <a:cs typeface="Arial" pitchFamily="34" charset="-120"/>
                         </a:rPr>
-                        <a:t>4.35/5</a:t>
+                        <a:t>4.29/5</a:t>
                       </a:r>
                       <a:endParaRPr lang="en-US" sz="800" dirty="0">
                         <a:latin typeface="Arial" charset="0"/>
@@ -4791,7 +4791,349 @@
                           <a:ea typeface="Arial" pitchFamily="34" charset="-122"/>
                           <a:cs typeface="Arial" pitchFamily="34" charset="-120"/>
                         </a:rPr>
-                        <a:t>8.71</a:t>
+                        <a:t>8.59</a:t>
+                      </a:r>
+                      <a:endParaRPr lang="en-US" sz="800" dirty="0">
+                        <a:latin typeface="Arial" charset="0"/>
+                        <a:ea typeface="Arial" charset="0"/>
+                        <a:cs typeface="Arial" charset="0"/>
+                      </a:endParaRPr>
+                    </a:p>
+                  </a:txBody>
+                  <a:tcPr marL="91440" marR="91440" marT="45720" marB="45720">
+                    <a:lnL w="6350" cap="flat" cmpd="sng" algn="ctr">
+                      <a:solidFill>
+                        <a:srgbClr val="CCCCCC"/>
+                      </a:solidFill>
+                      <a:prstDash val="solid"/>
+                      <a:round/>
+                      <a:headEnd type="none" w="med" len="med"/>
+                      <a:tailEnd type="none" w="med" len="med"/>
+                    </a:lnL>
+                    <a:lnR w="6350" cap="flat" cmpd="sng" algn="ctr">
+                      <a:solidFill>
+                        <a:srgbClr val="CCCCCC"/>
+                      </a:solidFill>
+                      <a:prstDash val="solid"/>
+                      <a:round/>
+                      <a:headEnd type="none" w="med" len="med"/>
+                      <a:tailEnd type="none" w="med" len="med"/>
+                    </a:lnR>
+                    <a:lnT w="6350" cap="flat" cmpd="sng" algn="ctr">
+                      <a:solidFill>
+                        <a:srgbClr val="CCCCCC"/>
+                      </a:solidFill>
+                      <a:prstDash val="solid"/>
+                      <a:round/>
+                      <a:headEnd type="none" w="med" len="med"/>
+                      <a:tailEnd type="none" w="med" len="med"/>
+                    </a:lnT>
+                    <a:lnB w="6350" cap="flat" cmpd="sng" algn="ctr">
+                      <a:solidFill>
+                        <a:srgbClr val="CCCCCC"/>
+                      </a:solidFill>
+                      <a:prstDash val="solid"/>
+                      <a:round/>
+                      <a:headEnd type="none" w="med" len="med"/>
+                      <a:tailEnd type="none" w="med" len="med"/>
+                    </a:lnB>
+                    <a:solidFill>
+                      <a:srgbClr val="FFFFFF"/>
+                    </a:solidFill>
+                  </a:tcPr>
+                </a:tc>
+                <a:tc>
+                  <a:txBody>
+                    <a:bodyPr/>
+                    <a:lstStyle/>
+                    <a:p>
+                      <a:pPr algn="ctr" indent="0" marL="0">
+                        <a:buNone/>
+                      </a:pPr>
+                      <a:r>
+                        <a:rPr lang="en-US" sz="800" dirty="0">
+                          <a:solidFill>
+                            <a:srgbClr val="000000"/>
+                          </a:solidFill>
+                          <a:latin typeface="Arial" pitchFamily="34" charset="0"/>
+                          <a:ea typeface="Arial" pitchFamily="34" charset="-122"/>
+                          <a:cs typeface="Arial" pitchFamily="34" charset="-120"/>
+                        </a:rPr>
+                        <a:t>良好</a:t>
+                      </a:r>
+                      <a:endParaRPr lang="en-US" sz="800" dirty="0">
+                        <a:latin typeface="Arial" charset="0"/>
+                        <a:ea typeface="Arial" charset="0"/>
+                        <a:cs typeface="Arial" charset="0"/>
+                      </a:endParaRPr>
+                    </a:p>
+                  </a:txBody>
+                  <a:tcPr marL="91440" marR="91440" marT="45720" marB="45720">
+                    <a:lnL w="6350" cap="flat" cmpd="sng" algn="ctr">
+                      <a:solidFill>
+                        <a:srgbClr val="CCCCCC"/>
+                      </a:solidFill>
+                      <a:prstDash val="solid"/>
+                      <a:round/>
+                      <a:headEnd type="none" w="med" len="med"/>
+                      <a:tailEnd type="none" w="med" len="med"/>
+                    </a:lnL>
+                    <a:lnR w="6350" cap="flat" cmpd="sng" algn="ctr">
+                      <a:solidFill>
+                        <a:srgbClr val="CCCCCC"/>
+                      </a:solidFill>
+                      <a:prstDash val="solid"/>
+                      <a:round/>
+                      <a:headEnd type="none" w="med" len="med"/>
+                      <a:tailEnd type="none" w="med" len="med"/>
+                    </a:lnR>
+                    <a:lnT w="6350" cap="flat" cmpd="sng" algn="ctr">
+                      <a:solidFill>
+                        <a:srgbClr val="CCCCCC"/>
+                      </a:solidFill>
+                      <a:prstDash val="solid"/>
+                      <a:round/>
+                      <a:headEnd type="none" w="med" len="med"/>
+                      <a:tailEnd type="none" w="med" len="med"/>
+                    </a:lnT>
+                    <a:lnB w="6350" cap="flat" cmpd="sng" algn="ctr">
+                      <a:solidFill>
+                        <a:srgbClr val="CCCCCC"/>
+                      </a:solidFill>
+                      <a:prstDash val="solid"/>
+                      <a:round/>
+                      <a:headEnd type="none" w="med" len="med"/>
+                      <a:tailEnd type="none" w="med" len="med"/>
+                    </a:lnB>
+                    <a:solidFill>
+                      <a:srgbClr val="FFFFFF"/>
+                    </a:solidFill>
+                  </a:tcPr>
+                </a:tc>
+              </a:tr>
+              <a:tr h="0">
+                <a:tc>
+                  <a:txBody>
+                    <a:bodyPr/>
+                    <a:lstStyle/>
+                    <a:p>
+                      <a:pPr algn="ctr" indent="0" marL="0">
+                        <a:buNone/>
+                      </a:pPr>
+                      <a:r>
+                        <a:rPr lang="en-US" sz="800" dirty="0">
+                          <a:solidFill>
+                            <a:srgbClr val="000000"/>
+                          </a:solidFill>
+                          <a:latin typeface="Arial" pitchFamily="34" charset="0"/>
+                          <a:ea typeface="Arial" pitchFamily="34" charset="-122"/>
+                          <a:cs typeface="Arial" pitchFamily="34" charset="-120"/>
+                        </a:rPr>
+                        <a:t>Booking.com</a:t>
+                      </a:r>
+                      <a:endParaRPr lang="en-US" sz="800" dirty="0">
+                        <a:latin typeface="Arial" charset="0"/>
+                        <a:ea typeface="Arial" charset="0"/>
+                        <a:cs typeface="Arial" charset="0"/>
+                      </a:endParaRPr>
+                    </a:p>
+                  </a:txBody>
+                  <a:tcPr marL="91440" marR="91440" marT="45720" marB="45720">
+                    <a:lnL w="6350" cap="flat" cmpd="sng" algn="ctr">
+                      <a:solidFill>
+                        <a:srgbClr val="CCCCCC"/>
+                      </a:solidFill>
+                      <a:prstDash val="solid"/>
+                      <a:round/>
+                      <a:headEnd type="none" w="med" len="med"/>
+                      <a:tailEnd type="none" w="med" len="med"/>
+                    </a:lnL>
+                    <a:lnR w="6350" cap="flat" cmpd="sng" algn="ctr">
+                      <a:solidFill>
+                        <a:srgbClr val="CCCCCC"/>
+                      </a:solidFill>
+                      <a:prstDash val="solid"/>
+                      <a:round/>
+                      <a:headEnd type="none" w="med" len="med"/>
+                      <a:tailEnd type="none" w="med" len="med"/>
+                    </a:lnR>
+                    <a:lnT w="6350" cap="flat" cmpd="sng" algn="ctr">
+                      <a:solidFill>
+                        <a:srgbClr val="CCCCCC"/>
+                      </a:solidFill>
+                      <a:prstDash val="solid"/>
+                      <a:round/>
+                      <a:headEnd type="none" w="med" len="med"/>
+                      <a:tailEnd type="none" w="med" len="med"/>
+                    </a:lnT>
+                    <a:lnB w="6350" cap="flat" cmpd="sng" algn="ctr">
+                      <a:solidFill>
+                        <a:srgbClr val="CCCCCC"/>
+                      </a:solidFill>
+                      <a:prstDash val="solid"/>
+                      <a:round/>
+                      <a:headEnd type="none" w="med" len="med"/>
+                      <a:tailEnd type="none" w="med" len="med"/>
+                    </a:lnB>
+                    <a:solidFill>
+                      <a:srgbClr val="FFFFFF"/>
+                    </a:solidFill>
+                  </a:tcPr>
+                </a:tc>
+                <a:tc>
+                  <a:txBody>
+                    <a:bodyPr/>
+                    <a:lstStyle/>
+                    <a:p>
+                      <a:pPr algn="ctr" indent="0" marL="0">
+                        <a:buNone/>
+                      </a:pPr>
+                      <a:r>
+                        <a:rPr lang="en-US" sz="800" dirty="0">
+                          <a:solidFill>
+                            <a:srgbClr val="000000"/>
+                          </a:solidFill>
+                          <a:latin typeface="Arial" pitchFamily="34" charset="0"/>
+                          <a:ea typeface="Arial" pitchFamily="34" charset="-122"/>
+                          <a:cs typeface="Arial" pitchFamily="34" charset="-120"/>
+                        </a:rPr>
+                        <a:t>28</a:t>
+                      </a:r>
+                      <a:endParaRPr lang="en-US" sz="800" dirty="0">
+                        <a:latin typeface="Arial" charset="0"/>
+                        <a:ea typeface="Arial" charset="0"/>
+                        <a:cs typeface="Arial" charset="0"/>
+                      </a:endParaRPr>
+                    </a:p>
+                  </a:txBody>
+                  <a:tcPr marL="91440" marR="91440" marT="45720" marB="45720">
+                    <a:lnL w="6350" cap="flat" cmpd="sng" algn="ctr">
+                      <a:solidFill>
+                        <a:srgbClr val="CCCCCC"/>
+                      </a:solidFill>
+                      <a:prstDash val="solid"/>
+                      <a:round/>
+                      <a:headEnd type="none" w="med" len="med"/>
+                      <a:tailEnd type="none" w="med" len="med"/>
+                    </a:lnL>
+                    <a:lnR w="6350" cap="flat" cmpd="sng" algn="ctr">
+                      <a:solidFill>
+                        <a:srgbClr val="CCCCCC"/>
+                      </a:solidFill>
+                      <a:prstDash val="solid"/>
+                      <a:round/>
+                      <a:headEnd type="none" w="med" len="med"/>
+                      <a:tailEnd type="none" w="med" len="med"/>
+                    </a:lnR>
+                    <a:lnT w="6350" cap="flat" cmpd="sng" algn="ctr">
+                      <a:solidFill>
+                        <a:srgbClr val="CCCCCC"/>
+                      </a:solidFill>
+                      <a:prstDash val="solid"/>
+                      <a:round/>
+                      <a:headEnd type="none" w="med" len="med"/>
+                      <a:tailEnd type="none" w="med" len="med"/>
+                    </a:lnT>
+                    <a:lnB w="6350" cap="flat" cmpd="sng" algn="ctr">
+                      <a:solidFill>
+                        <a:srgbClr val="CCCCCC"/>
+                      </a:solidFill>
+                      <a:prstDash val="solid"/>
+                      <a:round/>
+                      <a:headEnd type="none" w="med" len="med"/>
+                      <a:tailEnd type="none" w="med" len="med"/>
+                    </a:lnB>
+                    <a:solidFill>
+                      <a:srgbClr val="FFFFFF"/>
+                    </a:solidFill>
+                  </a:tcPr>
+                </a:tc>
+                <a:tc>
+                  <a:txBody>
+                    <a:bodyPr/>
+                    <a:lstStyle/>
+                    <a:p>
+                      <a:pPr algn="ctr" indent="0" marL="0">
+                        <a:buNone/>
+                      </a:pPr>
+                      <a:r>
+                        <a:rPr lang="en-US" sz="800" dirty="0">
+                          <a:solidFill>
+                            <a:srgbClr val="000000"/>
+                          </a:solidFill>
+                          <a:latin typeface="Arial" pitchFamily="34" charset="0"/>
+                          <a:ea typeface="Arial" pitchFamily="34" charset="-122"/>
+                          <a:cs typeface="Arial" pitchFamily="34" charset="-120"/>
+                        </a:rPr>
+                        <a:t>8.50/10</a:t>
+                      </a:r>
+                      <a:endParaRPr lang="en-US" sz="800" dirty="0">
+                        <a:latin typeface="Arial" charset="0"/>
+                        <a:ea typeface="Arial" charset="0"/>
+                        <a:cs typeface="Arial" charset="0"/>
+                      </a:endParaRPr>
+                    </a:p>
+                  </a:txBody>
+                  <a:tcPr marL="91440" marR="91440" marT="45720" marB="45720">
+                    <a:lnL w="6350" cap="flat" cmpd="sng" algn="ctr">
+                      <a:solidFill>
+                        <a:srgbClr val="CCCCCC"/>
+                      </a:solidFill>
+                      <a:prstDash val="solid"/>
+                      <a:round/>
+                      <a:headEnd type="none" w="med" len="med"/>
+                      <a:tailEnd type="none" w="med" len="med"/>
+                    </a:lnL>
+                    <a:lnR w="6350" cap="flat" cmpd="sng" algn="ctr">
+                      <a:solidFill>
+                        <a:srgbClr val="CCCCCC"/>
+                      </a:solidFill>
+                      <a:prstDash val="solid"/>
+                      <a:round/>
+                      <a:headEnd type="none" w="med" len="med"/>
+                      <a:tailEnd type="none" w="med" len="med"/>
+                    </a:lnR>
+                    <a:lnT w="6350" cap="flat" cmpd="sng" algn="ctr">
+                      <a:solidFill>
+                        <a:srgbClr val="CCCCCC"/>
+                      </a:solidFill>
+                      <a:prstDash val="solid"/>
+                      <a:round/>
+                      <a:headEnd type="none" w="med" len="med"/>
+                      <a:tailEnd type="none" w="med" len="med"/>
+                    </a:lnT>
+                    <a:lnB w="6350" cap="flat" cmpd="sng" algn="ctr">
+                      <a:solidFill>
+                        <a:srgbClr val="CCCCCC"/>
+                      </a:solidFill>
+                      <a:prstDash val="solid"/>
+                      <a:round/>
+                      <a:headEnd type="none" w="med" len="med"/>
+                      <a:tailEnd type="none" w="med" len="med"/>
+                    </a:lnB>
+                    <a:solidFill>
+                      <a:srgbClr val="FFFFFF"/>
+                    </a:solidFill>
+                  </a:tcPr>
+                </a:tc>
+                <a:tc>
+                  <a:txBody>
+                    <a:bodyPr/>
+                    <a:lstStyle/>
+                    <a:p>
+                      <a:pPr algn="ctr" indent="0" marL="0">
+                        <a:buNone/>
+                      </a:pPr>
+                      <a:r>
+                        <a:rPr lang="en-US" sz="800" dirty="0">
+                          <a:solidFill>
+                            <a:srgbClr val="000000"/>
+                          </a:solidFill>
+                          <a:latin typeface="Arial" pitchFamily="34" charset="0"/>
+                          <a:ea typeface="Arial" pitchFamily="34" charset="-122"/>
+                          <a:cs typeface="Arial" pitchFamily="34" charset="-120"/>
+                        </a:rPr>
+                        <a:t>8.50</a:t>
                       </a:r>
                       <a:endParaRPr lang="en-US" sz="800" dirty="0">
                         <a:latin typeface="Arial" charset="0"/>
@@ -5065,7 +5407,7 @@
                           <a:ea typeface="Arial" pitchFamily="34" charset="-122"/>
                           <a:cs typeface="Arial" pitchFamily="34" charset="-120"/>
                         </a:rPr>
-                        <a:t>4.30/5</a:t>
+                        <a:t>4.23/5</a:t>
                       </a:r>
                       <a:endParaRPr lang="en-US" sz="800" dirty="0">
                         <a:latin typeface="Arial" charset="0"/>
@@ -5133,349 +5475,7 @@
                           <a:ea typeface="Arial" pitchFamily="34" charset="-122"/>
                           <a:cs typeface="Arial" pitchFamily="34" charset="-120"/>
                         </a:rPr>
-                        <a:t>8.60</a:t>
-                      </a:r>
-                      <a:endParaRPr lang="en-US" sz="800" dirty="0">
-                        <a:latin typeface="Arial" charset="0"/>
-                        <a:ea typeface="Arial" charset="0"/>
-                        <a:cs typeface="Arial" charset="0"/>
-                      </a:endParaRPr>
-                    </a:p>
-                  </a:txBody>
-                  <a:tcPr marL="91440" marR="91440" marT="45720" marB="45720">
-                    <a:lnL w="6350" cap="flat" cmpd="sng" algn="ctr">
-                      <a:solidFill>
-                        <a:srgbClr val="CCCCCC"/>
-                      </a:solidFill>
-                      <a:prstDash val="solid"/>
-                      <a:round/>
-                      <a:headEnd type="none" w="med" len="med"/>
-                      <a:tailEnd type="none" w="med" len="med"/>
-                    </a:lnL>
-                    <a:lnR w="6350" cap="flat" cmpd="sng" algn="ctr">
-                      <a:solidFill>
-                        <a:srgbClr val="CCCCCC"/>
-                      </a:solidFill>
-                      <a:prstDash val="solid"/>
-                      <a:round/>
-                      <a:headEnd type="none" w="med" len="med"/>
-                      <a:tailEnd type="none" w="med" len="med"/>
-                    </a:lnR>
-                    <a:lnT w="6350" cap="flat" cmpd="sng" algn="ctr">
-                      <a:solidFill>
-                        <a:srgbClr val="CCCCCC"/>
-                      </a:solidFill>
-                      <a:prstDash val="solid"/>
-                      <a:round/>
-                      <a:headEnd type="none" w="med" len="med"/>
-                      <a:tailEnd type="none" w="med" len="med"/>
-                    </a:lnT>
-                    <a:lnB w="6350" cap="flat" cmpd="sng" algn="ctr">
-                      <a:solidFill>
-                        <a:srgbClr val="CCCCCC"/>
-                      </a:solidFill>
-                      <a:prstDash val="solid"/>
-                      <a:round/>
-                      <a:headEnd type="none" w="med" len="med"/>
-                      <a:tailEnd type="none" w="med" len="med"/>
-                    </a:lnB>
-                    <a:solidFill>
-                      <a:srgbClr val="FFFFFF"/>
-                    </a:solidFill>
-                  </a:tcPr>
-                </a:tc>
-                <a:tc>
-                  <a:txBody>
-                    <a:bodyPr/>
-                    <a:lstStyle/>
-                    <a:p>
-                      <a:pPr algn="ctr" indent="0" marL="0">
-                        <a:buNone/>
-                      </a:pPr>
-                      <a:r>
-                        <a:rPr lang="en-US" sz="800" dirty="0">
-                          <a:solidFill>
-                            <a:srgbClr val="000000"/>
-                          </a:solidFill>
-                          <a:latin typeface="Arial" pitchFamily="34" charset="0"/>
-                          <a:ea typeface="Arial" pitchFamily="34" charset="-122"/>
-                          <a:cs typeface="Arial" pitchFamily="34" charset="-120"/>
-                        </a:rPr>
-                        <a:t>良好</a:t>
-                      </a:r>
-                      <a:endParaRPr lang="en-US" sz="800" dirty="0">
-                        <a:latin typeface="Arial" charset="0"/>
-                        <a:ea typeface="Arial" charset="0"/>
-                        <a:cs typeface="Arial" charset="0"/>
-                      </a:endParaRPr>
-                    </a:p>
-                  </a:txBody>
-                  <a:tcPr marL="91440" marR="91440" marT="45720" marB="45720">
-                    <a:lnL w="6350" cap="flat" cmpd="sng" algn="ctr">
-                      <a:solidFill>
-                        <a:srgbClr val="CCCCCC"/>
-                      </a:solidFill>
-                      <a:prstDash val="solid"/>
-                      <a:round/>
-                      <a:headEnd type="none" w="med" len="med"/>
-                      <a:tailEnd type="none" w="med" len="med"/>
-                    </a:lnL>
-                    <a:lnR w="6350" cap="flat" cmpd="sng" algn="ctr">
-                      <a:solidFill>
-                        <a:srgbClr val="CCCCCC"/>
-                      </a:solidFill>
-                      <a:prstDash val="solid"/>
-                      <a:round/>
-                      <a:headEnd type="none" w="med" len="med"/>
-                      <a:tailEnd type="none" w="med" len="med"/>
-                    </a:lnR>
-                    <a:lnT w="6350" cap="flat" cmpd="sng" algn="ctr">
-                      <a:solidFill>
-                        <a:srgbClr val="CCCCCC"/>
-                      </a:solidFill>
-                      <a:prstDash val="solid"/>
-                      <a:round/>
-                      <a:headEnd type="none" w="med" len="med"/>
-                      <a:tailEnd type="none" w="med" len="med"/>
-                    </a:lnT>
-                    <a:lnB w="6350" cap="flat" cmpd="sng" algn="ctr">
-                      <a:solidFill>
-                        <a:srgbClr val="CCCCCC"/>
-                      </a:solidFill>
-                      <a:prstDash val="solid"/>
-                      <a:round/>
-                      <a:headEnd type="none" w="med" len="med"/>
-                      <a:tailEnd type="none" w="med" len="med"/>
-                    </a:lnB>
-                    <a:solidFill>
-                      <a:srgbClr val="FFFFFF"/>
-                    </a:solidFill>
-                  </a:tcPr>
-                </a:tc>
-              </a:tr>
-              <a:tr h="0">
-                <a:tc>
-                  <a:txBody>
-                    <a:bodyPr/>
-                    <a:lstStyle/>
-                    <a:p>
-                      <a:pPr algn="ctr" indent="0" marL="0">
-                        <a:buNone/>
-                      </a:pPr>
-                      <a:r>
-                        <a:rPr lang="en-US" sz="800" dirty="0">
-                          <a:solidFill>
-                            <a:srgbClr val="000000"/>
-                          </a:solidFill>
-                          <a:latin typeface="Arial" pitchFamily="34" charset="0"/>
-                          <a:ea typeface="Arial" pitchFamily="34" charset="-122"/>
-                          <a:cs typeface="Arial" pitchFamily="34" charset="-120"/>
-                        </a:rPr>
-                        <a:t>Booking.com</a:t>
-                      </a:r>
-                      <a:endParaRPr lang="en-US" sz="800" dirty="0">
-                        <a:latin typeface="Arial" charset="0"/>
-                        <a:ea typeface="Arial" charset="0"/>
-                        <a:cs typeface="Arial" charset="0"/>
-                      </a:endParaRPr>
-                    </a:p>
-                  </a:txBody>
-                  <a:tcPr marL="91440" marR="91440" marT="45720" marB="45720">
-                    <a:lnL w="6350" cap="flat" cmpd="sng" algn="ctr">
-                      <a:solidFill>
-                        <a:srgbClr val="CCCCCC"/>
-                      </a:solidFill>
-                      <a:prstDash val="solid"/>
-                      <a:round/>
-                      <a:headEnd type="none" w="med" len="med"/>
-                      <a:tailEnd type="none" w="med" len="med"/>
-                    </a:lnL>
-                    <a:lnR w="6350" cap="flat" cmpd="sng" algn="ctr">
-                      <a:solidFill>
-                        <a:srgbClr val="CCCCCC"/>
-                      </a:solidFill>
-                      <a:prstDash val="solid"/>
-                      <a:round/>
-                      <a:headEnd type="none" w="med" len="med"/>
-                      <a:tailEnd type="none" w="med" len="med"/>
-                    </a:lnR>
-                    <a:lnT w="6350" cap="flat" cmpd="sng" algn="ctr">
-                      <a:solidFill>
-                        <a:srgbClr val="CCCCCC"/>
-                      </a:solidFill>
-                      <a:prstDash val="solid"/>
-                      <a:round/>
-                      <a:headEnd type="none" w="med" len="med"/>
-                      <a:tailEnd type="none" w="med" len="med"/>
-                    </a:lnT>
-                    <a:lnB w="6350" cap="flat" cmpd="sng" algn="ctr">
-                      <a:solidFill>
-                        <a:srgbClr val="CCCCCC"/>
-                      </a:solidFill>
-                      <a:prstDash val="solid"/>
-                      <a:round/>
-                      <a:headEnd type="none" w="med" len="med"/>
-                      <a:tailEnd type="none" w="med" len="med"/>
-                    </a:lnB>
-                    <a:solidFill>
-                      <a:srgbClr val="FFFFFF"/>
-                    </a:solidFill>
-                  </a:tcPr>
-                </a:tc>
-                <a:tc>
-                  <a:txBody>
-                    <a:bodyPr/>
-                    <a:lstStyle/>
-                    <a:p>
-                      <a:pPr algn="ctr" indent="0" marL="0">
-                        <a:buNone/>
-                      </a:pPr>
-                      <a:r>
-                        <a:rPr lang="en-US" sz="800" dirty="0">
-                          <a:solidFill>
-                            <a:srgbClr val="000000"/>
-                          </a:solidFill>
-                          <a:latin typeface="Arial" pitchFamily="34" charset="0"/>
-                          <a:ea typeface="Arial" pitchFamily="34" charset="-122"/>
-                          <a:cs typeface="Arial" pitchFamily="34" charset="-120"/>
-                        </a:rPr>
-                        <a:t>27</a:t>
-                      </a:r>
-                      <a:endParaRPr lang="en-US" sz="800" dirty="0">
-                        <a:latin typeface="Arial" charset="0"/>
-                        <a:ea typeface="Arial" charset="0"/>
-                        <a:cs typeface="Arial" charset="0"/>
-                      </a:endParaRPr>
-                    </a:p>
-                  </a:txBody>
-                  <a:tcPr marL="91440" marR="91440" marT="45720" marB="45720">
-                    <a:lnL w="6350" cap="flat" cmpd="sng" algn="ctr">
-                      <a:solidFill>
-                        <a:srgbClr val="CCCCCC"/>
-                      </a:solidFill>
-                      <a:prstDash val="solid"/>
-                      <a:round/>
-                      <a:headEnd type="none" w="med" len="med"/>
-                      <a:tailEnd type="none" w="med" len="med"/>
-                    </a:lnL>
-                    <a:lnR w="6350" cap="flat" cmpd="sng" algn="ctr">
-                      <a:solidFill>
-                        <a:srgbClr val="CCCCCC"/>
-                      </a:solidFill>
-                      <a:prstDash val="solid"/>
-                      <a:round/>
-                      <a:headEnd type="none" w="med" len="med"/>
-                      <a:tailEnd type="none" w="med" len="med"/>
-                    </a:lnR>
-                    <a:lnT w="6350" cap="flat" cmpd="sng" algn="ctr">
-                      <a:solidFill>
-                        <a:srgbClr val="CCCCCC"/>
-                      </a:solidFill>
-                      <a:prstDash val="solid"/>
-                      <a:round/>
-                      <a:headEnd type="none" w="med" len="med"/>
-                      <a:tailEnd type="none" w="med" len="med"/>
-                    </a:lnT>
-                    <a:lnB w="6350" cap="flat" cmpd="sng" algn="ctr">
-                      <a:solidFill>
-                        <a:srgbClr val="CCCCCC"/>
-                      </a:solidFill>
-                      <a:prstDash val="solid"/>
-                      <a:round/>
-                      <a:headEnd type="none" w="med" len="med"/>
-                      <a:tailEnd type="none" w="med" len="med"/>
-                    </a:lnB>
-                    <a:solidFill>
-                      <a:srgbClr val="FFFFFF"/>
-                    </a:solidFill>
-                  </a:tcPr>
-                </a:tc>
-                <a:tc>
-                  <a:txBody>
-                    <a:bodyPr/>
-                    <a:lstStyle/>
-                    <a:p>
-                      <a:pPr algn="ctr" indent="0" marL="0">
-                        <a:buNone/>
-                      </a:pPr>
-                      <a:r>
-                        <a:rPr lang="en-US" sz="800" dirty="0">
-                          <a:solidFill>
-                            <a:srgbClr val="000000"/>
-                          </a:solidFill>
-                          <a:latin typeface="Arial" pitchFamily="34" charset="0"/>
-                          <a:ea typeface="Arial" pitchFamily="34" charset="-122"/>
-                          <a:cs typeface="Arial" pitchFamily="34" charset="-120"/>
-                        </a:rPr>
-                        <a:t>8.48/10</a:t>
-                      </a:r>
-                      <a:endParaRPr lang="en-US" sz="800" dirty="0">
-                        <a:latin typeface="Arial" charset="0"/>
-                        <a:ea typeface="Arial" charset="0"/>
-                        <a:cs typeface="Arial" charset="0"/>
-                      </a:endParaRPr>
-                    </a:p>
-                  </a:txBody>
-                  <a:tcPr marL="91440" marR="91440" marT="45720" marB="45720">
-                    <a:lnL w="6350" cap="flat" cmpd="sng" algn="ctr">
-                      <a:solidFill>
-                        <a:srgbClr val="CCCCCC"/>
-                      </a:solidFill>
-                      <a:prstDash val="solid"/>
-                      <a:round/>
-                      <a:headEnd type="none" w="med" len="med"/>
-                      <a:tailEnd type="none" w="med" len="med"/>
-                    </a:lnL>
-                    <a:lnR w="6350" cap="flat" cmpd="sng" algn="ctr">
-                      <a:solidFill>
-                        <a:srgbClr val="CCCCCC"/>
-                      </a:solidFill>
-                      <a:prstDash val="solid"/>
-                      <a:round/>
-                      <a:headEnd type="none" w="med" len="med"/>
-                      <a:tailEnd type="none" w="med" len="med"/>
-                    </a:lnR>
-                    <a:lnT w="6350" cap="flat" cmpd="sng" algn="ctr">
-                      <a:solidFill>
-                        <a:srgbClr val="CCCCCC"/>
-                      </a:solidFill>
-                      <a:prstDash val="solid"/>
-                      <a:round/>
-                      <a:headEnd type="none" w="med" len="med"/>
-                      <a:tailEnd type="none" w="med" len="med"/>
-                    </a:lnT>
-                    <a:lnB w="6350" cap="flat" cmpd="sng" algn="ctr">
-                      <a:solidFill>
-                        <a:srgbClr val="CCCCCC"/>
-                      </a:solidFill>
-                      <a:prstDash val="solid"/>
-                      <a:round/>
-                      <a:headEnd type="none" w="med" len="med"/>
-                      <a:tailEnd type="none" w="med" len="med"/>
-                    </a:lnB>
-                    <a:solidFill>
-                      <a:srgbClr val="FFFFFF"/>
-                    </a:solidFill>
-                  </a:tcPr>
-                </a:tc>
-                <a:tc>
-                  <a:txBody>
-                    <a:bodyPr/>
-                    <a:lstStyle/>
-                    <a:p>
-                      <a:pPr algn="ctr" indent="0" marL="0">
-                        <a:buNone/>
-                      </a:pPr>
-                      <a:r>
-                        <a:rPr lang="en-US" sz="800" dirty="0">
-                          <a:solidFill>
-                            <a:srgbClr val="000000"/>
-                          </a:solidFill>
-                          <a:latin typeface="Arial" pitchFamily="34" charset="0"/>
-                          <a:ea typeface="Arial" pitchFamily="34" charset="-122"/>
-                          <a:cs typeface="Arial" pitchFamily="34" charset="-120"/>
-                        </a:rPr>
-                        <a:t>8.48</a:t>
+                        <a:t>8.47</a:t>
                       </a:r>
                       <a:endParaRPr lang="en-US" sz="800" dirty="0">
                         <a:latin typeface="Arial" charset="0"/>
@@ -6612,7 +6612,7 @@
                 <a:ea typeface="Arial" pitchFamily="34" charset="-122"/>
                 <a:cs typeface="Arial" pitchFamily="34" charset="-120"/>
               </a:rPr>
-              <a:t>113件（83.1%）</a:t>
+              <a:t>111件（81.6%）</a:t>
             </a:r>
             <a:endParaRPr lang="en-US" sz="1600" dirty="0"/>
           </a:p>
@@ -6710,7 +6710,7 @@
                 <a:ea typeface="Arial" pitchFamily="34" charset="-122"/>
                 <a:cs typeface="Arial" pitchFamily="34" charset="-120"/>
               </a:rPr>
-              <a:t>21件（15.4%）</a:t>
+              <a:t>23件（16.9%）</a:t>
             </a:r>
             <a:endParaRPr lang="en-US" sz="1600" dirty="0"/>
           </a:p>
@@ -6970,7 +6970,7 @@
                 <a:ea typeface="Arial" pitchFamily="34" charset="-122"/>
                 <a:cs typeface="Arial" pitchFamily="34" charset="-120"/>
               </a:rPr>
-              <a:t>高評価レビュー（8-10点: 113件）の分析から、主要な強みテーマを抽出しています。立地・アクセス、客室清潔感、スタッフ対応が高評価の中心的テーマです。</a:t>
+              <a:t>高評価レビュー（8-10点: 111件）の分析から、主要な強みテーマを抽出しています。立地・アクセス、客室清潔感、スタッフ対応が高評価の中心的テーマです。</a:t>
             </a:r>
             <a:endParaRPr lang="en-US" sz="1200" dirty="0"/>
           </a:p>
@@ -7230,7 +7230,7 @@
                 <a:ea typeface="Arial" pitchFamily="34" charset="-122"/>
                 <a:cs typeface="Arial" pitchFamily="34" charset="-120"/>
               </a:rPr>
-              <a:t>低評価・中評価レビュー（23件）から改善課題を優先度別に整理しています。S/A/B/Cの4段階で優先度を設定し、計画的な改善を推進します。</a:t>
+              <a:t>低評価・中評価レビュー（25件）から改善課題を優先度別に整理しています。S/A/B/Cの4段階で優先度を設定し、計画的な改善を推進します。</a:t>
             </a:r>
             <a:endParaRPr lang="en-US" sz="1200" dirty="0"/>
           </a:p>
@@ -8010,7 +8010,7 @@
                 <a:ea typeface="Arial" pitchFamily="34" charset="-122"/>
                 <a:cs typeface="Arial" pitchFamily="34" charset="-120"/>
               </a:rPr>
-              <a:t>全体平均 8.59点 → 目標 9.09点</a:t>
+              <a:t>全体平均 8.51点 → 目標 9.01点</a:t>
             </a:r>
             <a:endParaRPr lang="en-US" sz="1200" dirty="0"/>
           </a:p>
@@ -8027,7 +8027,7 @@
                 <a:ea typeface="Arial" pitchFamily="34" charset="-122"/>
                 <a:cs typeface="Arial" pitchFamily="34" charset="-120"/>
               </a:rPr>
-              <a:t>高評価率 83.1% → 目標 88.1%</a:t>
+              <a:t>高評価率 81.6% → 目標 86.6%</a:t>
             </a:r>
             <a:endParaRPr lang="en-US" sz="1200" dirty="0"/>
           </a:p>

--- a/納品レポート/ホテル別レポート/hearton_口コミ分析レポート.pptx
+++ b/納品レポート/ホテル別レポート/hearton_口コミ分析レポート.pptx
@@ -255,10 +255,10 @@
                     <c:v>Booking.com</c:v>
                   </c:pt>
                   <c:pt idx="3">
-                    <c:v>楽天トラベル</c:v>
+                    <c:v>Agoda</c:v>
                   </c:pt>
                   <c:pt idx="4">
-                    <c:v>Agoda</c:v>
+                    <c:v>楽天トラベル</c:v>
                   </c:pt>
                   <c:pt idx="5">
                     <c:v>Google</c:v>
@@ -274,22 +274,22 @@
                 <c:formatCode>General</c:formatCode>
                 <c:ptCount val="6"/>
                 <c:pt idx="0">
-                  <c:v>9.35</c:v>
+                  <c:v>9.3</c:v>
                 </c:pt>
                 <c:pt idx="1">
-                  <c:v>8.57</c:v>
+                  <c:v>8.71</c:v>
                 </c:pt>
                 <c:pt idx="2">
                   <c:v>8.44</c:v>
                 </c:pt>
                 <c:pt idx="3">
-                  <c:v>8.41</c:v>
+                  <c:v>8.4</c:v>
                 </c:pt>
                 <c:pt idx="4">
-                  <c:v>8.25</c:v>
+                  <c:v>8.29</c:v>
                 </c:pt>
                 <c:pt idx="5">
-                  <c:v>6.91</c:v>
+                  <c:v>6.86</c:v>
                 </c:pt>
               </c:numCache>
             </c:numRef>
@@ -600,22 +600,22 @@
                 <c:formatCode>General</c:formatCode>
                 <c:ptCount val="6"/>
                 <c:pt idx="0">
-                  <c:v>53</c:v>
+                  <c:v>23</c:v>
                 </c:pt>
                 <c:pt idx="1">
-                  <c:v>11</c:v>
+                  <c:v>10</c:v>
                 </c:pt>
                 <c:pt idx="2">
-                  <c:v>48</c:v>
+                  <c:v>22</c:v>
                 </c:pt>
                 <c:pt idx="3">
-                  <c:v>7</c:v>
+                  <c:v>3</c:v>
                 </c:pt>
                 <c:pt idx="4">
-                  <c:v>16</c:v>
+                  <c:v>9</c:v>
                 </c:pt>
                 <c:pt idx="5">
-                  <c:v>2</c:v>
+                  <c:v>1</c:v>
                 </c:pt>
               </c:numCache>
             </c:numRef>
@@ -2503,7 +2503,7 @@
                 <a:ea typeface="Arial" pitchFamily="34" charset="-122"/>
                 <a:cs typeface="Arial" pitchFamily="34" charset="-120"/>
               </a:rPr>
-              <a:t>レビュー総数：137件</a:t>
+              <a:t>レビュー総数：68件</a:t>
             </a:r>
             <a:endParaRPr lang="en-US" sz="1000" dirty="0"/>
           </a:p>
@@ -2783,7 +2783,7 @@
                 <a:ea typeface="Arial" pitchFamily="34" charset="-122"/>
                 <a:cs typeface="Arial" pitchFamily="34" charset="-120"/>
               </a:rPr>
-              <a:t>ハートンホテル東品川は全体平均8.48点（10pt換算）、高評価率81.8%を達成しています。本レポートで示した改善施策を段階的に実施することで、さらなる顧客満足度向上が期待できます。</a:t>
+              <a:t>ハートンホテル東品川は全体平均8.43点（10pt換算）、高評価率80.9%を達成しています。本レポートで示した改善施策を段階的に実施することで、さらなる顧客満足度向上が期待できます。</a:t>
             </a:r>
             <a:endParaRPr lang="en-US" sz="1200" dirty="0"/>
           </a:p>
@@ -3220,7 +3220,7 @@
                 <a:ea typeface="Arial" pitchFamily="34" charset="-122"/>
                 <a:cs typeface="Arial" pitchFamily="34" charset="-120"/>
               </a:rPr>
-              <a:t>8.48</a:t>
+              <a:t>8.43</a:t>
             </a:r>
             <a:endParaRPr lang="en-US" sz="2800" dirty="0"/>
           </a:p>
@@ -3338,7 +3338,7 @@
                 <a:ea typeface="Arial" pitchFamily="34" charset="-122"/>
                 <a:cs typeface="Arial" pitchFamily="34" charset="-120"/>
               </a:rPr>
-              <a:t>81.8%</a:t>
+              <a:t>80.9%</a:t>
             </a:r>
             <a:endParaRPr lang="en-US" sz="2800" dirty="0"/>
           </a:p>
@@ -3574,7 +3574,7 @@
                 <a:ea typeface="Arial" pitchFamily="34" charset="-122"/>
                 <a:cs typeface="Arial" pitchFamily="34" charset="-120"/>
               </a:rPr>
-              <a:t>137件</a:t>
+              <a:t>68件</a:t>
             </a:r>
             <a:endParaRPr lang="en-US" sz="2800" dirty="0"/>
           </a:p>
@@ -4313,7 +4313,7 @@
                           <a:ea typeface="Arial" pitchFamily="34" charset="-122"/>
                           <a:cs typeface="Arial" pitchFamily="34" charset="-120"/>
                         </a:rPr>
-                        <a:t>23</a:t>
+                        <a:t>10</a:t>
                       </a:r>
                       <a:endParaRPr lang="en-US" sz="800" dirty="0">
                         <a:latin typeface="Arial" charset="0"/>
@@ -4381,7 +4381,7 @@
                           <a:ea typeface="Arial" pitchFamily="34" charset="-122"/>
                           <a:cs typeface="Arial" pitchFamily="34" charset="-120"/>
                         </a:rPr>
-                        <a:t>9.35/10</a:t>
+                        <a:t>9.30/10</a:t>
                       </a:r>
                       <a:endParaRPr lang="en-US" sz="800" dirty="0">
                         <a:latin typeface="Arial" charset="0"/>
@@ -4449,7 +4449,7 @@
                           <a:ea typeface="Arial" pitchFamily="34" charset="-122"/>
                           <a:cs typeface="Arial" pitchFamily="34" charset="-120"/>
                         </a:rPr>
-                        <a:t>9.35</a:t>
+                        <a:t>9.30</a:t>
                       </a:r>
                       <a:endParaRPr lang="en-US" sz="800" dirty="0">
                         <a:latin typeface="Arial" charset="0"/>
@@ -4655,7 +4655,7 @@
                           <a:ea typeface="Arial" pitchFamily="34" charset="-122"/>
                           <a:cs typeface="Arial" pitchFamily="34" charset="-120"/>
                         </a:rPr>
-                        <a:t>35</a:t>
+                        <a:t>14</a:t>
                       </a:r>
                       <a:endParaRPr lang="en-US" sz="800" dirty="0">
                         <a:latin typeface="Arial" charset="0"/>
@@ -4723,7 +4723,7 @@
                           <a:ea typeface="Arial" pitchFamily="34" charset="-122"/>
                           <a:cs typeface="Arial" pitchFamily="34" charset="-120"/>
                         </a:rPr>
-                        <a:t>4.29/5</a:t>
+                        <a:t>4.36/5</a:t>
                       </a:r>
                       <a:endParaRPr lang="en-US" sz="800" dirty="0">
                         <a:latin typeface="Arial" charset="0"/>
@@ -4791,7 +4791,7 @@
                           <a:ea typeface="Arial" pitchFamily="34" charset="-122"/>
                           <a:cs typeface="Arial" pitchFamily="34" charset="-120"/>
                         </a:rPr>
-                        <a:t>8.57</a:t>
+                        <a:t>8.71</a:t>
                       </a:r>
                       <a:endParaRPr lang="en-US" sz="800" dirty="0">
                         <a:latin typeface="Arial" charset="0"/>
@@ -4997,7 +4997,7 @@
                           <a:ea typeface="Arial" pitchFamily="34" charset="-122"/>
                           <a:cs typeface="Arial" pitchFamily="34" charset="-120"/>
                         </a:rPr>
-                        <a:t>27</a:t>
+                        <a:t>18</a:t>
                       </a:r>
                       <a:endParaRPr lang="en-US" sz="800" dirty="0">
                         <a:latin typeface="Arial" charset="0"/>
@@ -5134,6 +5134,348 @@
                           <a:cs typeface="Arial" pitchFamily="34" charset="-120"/>
                         </a:rPr>
                         <a:t>8.44</a:t>
+                      </a:r>
+                      <a:endParaRPr lang="en-US" sz="800" dirty="0">
+                        <a:latin typeface="Arial" charset="0"/>
+                        <a:ea typeface="Arial" charset="0"/>
+                        <a:cs typeface="Arial" charset="0"/>
+                      </a:endParaRPr>
+                    </a:p>
+                  </a:txBody>
+                  <a:tcPr marL="91440" marR="91440" marT="45720" marB="45720">
+                    <a:lnL w="6350" cap="flat" cmpd="sng" algn="ctr">
+                      <a:solidFill>
+                        <a:srgbClr val="CCCCCC"/>
+                      </a:solidFill>
+                      <a:prstDash val="solid"/>
+                      <a:round/>
+                      <a:headEnd type="none" w="med" len="med"/>
+                      <a:tailEnd type="none" w="med" len="med"/>
+                    </a:lnL>
+                    <a:lnR w="6350" cap="flat" cmpd="sng" algn="ctr">
+                      <a:solidFill>
+                        <a:srgbClr val="CCCCCC"/>
+                      </a:solidFill>
+                      <a:prstDash val="solid"/>
+                      <a:round/>
+                      <a:headEnd type="none" w="med" len="med"/>
+                      <a:tailEnd type="none" w="med" len="med"/>
+                    </a:lnR>
+                    <a:lnT w="6350" cap="flat" cmpd="sng" algn="ctr">
+                      <a:solidFill>
+                        <a:srgbClr val="CCCCCC"/>
+                      </a:solidFill>
+                      <a:prstDash val="solid"/>
+                      <a:round/>
+                      <a:headEnd type="none" w="med" len="med"/>
+                      <a:tailEnd type="none" w="med" len="med"/>
+                    </a:lnT>
+                    <a:lnB w="6350" cap="flat" cmpd="sng" algn="ctr">
+                      <a:solidFill>
+                        <a:srgbClr val="CCCCCC"/>
+                      </a:solidFill>
+                      <a:prstDash val="solid"/>
+                      <a:round/>
+                      <a:headEnd type="none" w="med" len="med"/>
+                      <a:tailEnd type="none" w="med" len="med"/>
+                    </a:lnB>
+                    <a:solidFill>
+                      <a:srgbClr val="FFFFFF"/>
+                    </a:solidFill>
+                  </a:tcPr>
+                </a:tc>
+                <a:tc>
+                  <a:txBody>
+                    <a:bodyPr/>
+                    <a:lstStyle/>
+                    <a:p>
+                      <a:pPr algn="ctr" indent="0" marL="0">
+                        <a:buNone/>
+                      </a:pPr>
+                      <a:r>
+                        <a:rPr lang="en-US" sz="800" dirty="0">
+                          <a:solidFill>
+                            <a:srgbClr val="000000"/>
+                          </a:solidFill>
+                          <a:latin typeface="Arial" pitchFamily="34" charset="0"/>
+                          <a:ea typeface="Arial" pitchFamily="34" charset="-122"/>
+                          <a:cs typeface="Arial" pitchFamily="34" charset="-120"/>
+                        </a:rPr>
+                        <a:t>良好</a:t>
+                      </a:r>
+                      <a:endParaRPr lang="en-US" sz="800" dirty="0">
+                        <a:latin typeface="Arial" charset="0"/>
+                        <a:ea typeface="Arial" charset="0"/>
+                        <a:cs typeface="Arial" charset="0"/>
+                      </a:endParaRPr>
+                    </a:p>
+                  </a:txBody>
+                  <a:tcPr marL="91440" marR="91440" marT="45720" marB="45720">
+                    <a:lnL w="6350" cap="flat" cmpd="sng" algn="ctr">
+                      <a:solidFill>
+                        <a:srgbClr val="CCCCCC"/>
+                      </a:solidFill>
+                      <a:prstDash val="solid"/>
+                      <a:round/>
+                      <a:headEnd type="none" w="med" len="med"/>
+                      <a:tailEnd type="none" w="med" len="med"/>
+                    </a:lnL>
+                    <a:lnR w="6350" cap="flat" cmpd="sng" algn="ctr">
+                      <a:solidFill>
+                        <a:srgbClr val="CCCCCC"/>
+                      </a:solidFill>
+                      <a:prstDash val="solid"/>
+                      <a:round/>
+                      <a:headEnd type="none" w="med" len="med"/>
+                      <a:tailEnd type="none" w="med" len="med"/>
+                    </a:lnR>
+                    <a:lnT w="6350" cap="flat" cmpd="sng" algn="ctr">
+                      <a:solidFill>
+                        <a:srgbClr val="CCCCCC"/>
+                      </a:solidFill>
+                      <a:prstDash val="solid"/>
+                      <a:round/>
+                      <a:headEnd type="none" w="med" len="med"/>
+                      <a:tailEnd type="none" w="med" len="med"/>
+                    </a:lnT>
+                    <a:lnB w="6350" cap="flat" cmpd="sng" algn="ctr">
+                      <a:solidFill>
+                        <a:srgbClr val="CCCCCC"/>
+                      </a:solidFill>
+                      <a:prstDash val="solid"/>
+                      <a:round/>
+                      <a:headEnd type="none" w="med" len="med"/>
+                      <a:tailEnd type="none" w="med" len="med"/>
+                    </a:lnB>
+                    <a:solidFill>
+                      <a:srgbClr val="FFFFFF"/>
+                    </a:solidFill>
+                  </a:tcPr>
+                </a:tc>
+              </a:tr>
+              <a:tr h="0">
+                <a:tc>
+                  <a:txBody>
+                    <a:bodyPr/>
+                    <a:lstStyle/>
+                    <a:p>
+                      <a:pPr algn="ctr" indent="0" marL="0">
+                        <a:buNone/>
+                      </a:pPr>
+                      <a:r>
+                        <a:rPr lang="en-US" sz="800" dirty="0">
+                          <a:solidFill>
+                            <a:srgbClr val="000000"/>
+                          </a:solidFill>
+                          <a:latin typeface="Arial" pitchFamily="34" charset="0"/>
+                          <a:ea typeface="Arial" pitchFamily="34" charset="-122"/>
+                          <a:cs typeface="Arial" pitchFamily="34" charset="-120"/>
+                        </a:rPr>
+                        <a:t>Agoda</a:t>
+                      </a:r>
+                      <a:endParaRPr lang="en-US" sz="800" dirty="0">
+                        <a:latin typeface="Arial" charset="0"/>
+                        <a:ea typeface="Arial" charset="0"/>
+                        <a:cs typeface="Arial" charset="0"/>
+                      </a:endParaRPr>
+                    </a:p>
+                  </a:txBody>
+                  <a:tcPr marL="91440" marR="91440" marT="45720" marB="45720">
+                    <a:lnL w="6350" cap="flat" cmpd="sng" algn="ctr">
+                      <a:solidFill>
+                        <a:srgbClr val="CCCCCC"/>
+                      </a:solidFill>
+                      <a:prstDash val="solid"/>
+                      <a:round/>
+                      <a:headEnd type="none" w="med" len="med"/>
+                      <a:tailEnd type="none" w="med" len="med"/>
+                    </a:lnL>
+                    <a:lnR w="6350" cap="flat" cmpd="sng" algn="ctr">
+                      <a:solidFill>
+                        <a:srgbClr val="CCCCCC"/>
+                      </a:solidFill>
+                      <a:prstDash val="solid"/>
+                      <a:round/>
+                      <a:headEnd type="none" w="med" len="med"/>
+                      <a:tailEnd type="none" w="med" len="med"/>
+                    </a:lnR>
+                    <a:lnT w="6350" cap="flat" cmpd="sng" algn="ctr">
+                      <a:solidFill>
+                        <a:srgbClr val="CCCCCC"/>
+                      </a:solidFill>
+                      <a:prstDash val="solid"/>
+                      <a:round/>
+                      <a:headEnd type="none" w="med" len="med"/>
+                      <a:tailEnd type="none" w="med" len="med"/>
+                    </a:lnT>
+                    <a:lnB w="6350" cap="flat" cmpd="sng" algn="ctr">
+                      <a:solidFill>
+                        <a:srgbClr val="CCCCCC"/>
+                      </a:solidFill>
+                      <a:prstDash val="solid"/>
+                      <a:round/>
+                      <a:headEnd type="none" w="med" len="med"/>
+                      <a:tailEnd type="none" w="med" len="med"/>
+                    </a:lnB>
+                    <a:solidFill>
+                      <a:srgbClr val="FFFFFF"/>
+                    </a:solidFill>
+                  </a:tcPr>
+                </a:tc>
+                <a:tc>
+                  <a:txBody>
+                    <a:bodyPr/>
+                    <a:lstStyle/>
+                    <a:p>
+                      <a:pPr algn="ctr" indent="0" marL="0">
+                        <a:buNone/>
+                      </a:pPr>
+                      <a:r>
+                        <a:rPr lang="en-US" sz="800" dirty="0">
+                          <a:solidFill>
+                            <a:srgbClr val="000000"/>
+                          </a:solidFill>
+                          <a:latin typeface="Arial" pitchFamily="34" charset="0"/>
+                          <a:ea typeface="Arial" pitchFamily="34" charset="-122"/>
+                          <a:cs typeface="Arial" pitchFamily="34" charset="-120"/>
+                        </a:rPr>
+                        <a:t>5</a:t>
+                      </a:r>
+                      <a:endParaRPr lang="en-US" sz="800" dirty="0">
+                        <a:latin typeface="Arial" charset="0"/>
+                        <a:ea typeface="Arial" charset="0"/>
+                        <a:cs typeface="Arial" charset="0"/>
+                      </a:endParaRPr>
+                    </a:p>
+                  </a:txBody>
+                  <a:tcPr marL="91440" marR="91440" marT="45720" marB="45720">
+                    <a:lnL w="6350" cap="flat" cmpd="sng" algn="ctr">
+                      <a:solidFill>
+                        <a:srgbClr val="CCCCCC"/>
+                      </a:solidFill>
+                      <a:prstDash val="solid"/>
+                      <a:round/>
+                      <a:headEnd type="none" w="med" len="med"/>
+                      <a:tailEnd type="none" w="med" len="med"/>
+                    </a:lnL>
+                    <a:lnR w="6350" cap="flat" cmpd="sng" algn="ctr">
+                      <a:solidFill>
+                        <a:srgbClr val="CCCCCC"/>
+                      </a:solidFill>
+                      <a:prstDash val="solid"/>
+                      <a:round/>
+                      <a:headEnd type="none" w="med" len="med"/>
+                      <a:tailEnd type="none" w="med" len="med"/>
+                    </a:lnR>
+                    <a:lnT w="6350" cap="flat" cmpd="sng" algn="ctr">
+                      <a:solidFill>
+                        <a:srgbClr val="CCCCCC"/>
+                      </a:solidFill>
+                      <a:prstDash val="solid"/>
+                      <a:round/>
+                      <a:headEnd type="none" w="med" len="med"/>
+                      <a:tailEnd type="none" w="med" len="med"/>
+                    </a:lnT>
+                    <a:lnB w="6350" cap="flat" cmpd="sng" algn="ctr">
+                      <a:solidFill>
+                        <a:srgbClr val="CCCCCC"/>
+                      </a:solidFill>
+                      <a:prstDash val="solid"/>
+                      <a:round/>
+                      <a:headEnd type="none" w="med" len="med"/>
+                      <a:tailEnd type="none" w="med" len="med"/>
+                    </a:lnB>
+                    <a:solidFill>
+                      <a:srgbClr val="FFFFFF"/>
+                    </a:solidFill>
+                  </a:tcPr>
+                </a:tc>
+                <a:tc>
+                  <a:txBody>
+                    <a:bodyPr/>
+                    <a:lstStyle/>
+                    <a:p>
+                      <a:pPr algn="ctr" indent="0" marL="0">
+                        <a:buNone/>
+                      </a:pPr>
+                      <a:r>
+                        <a:rPr lang="en-US" sz="800" dirty="0">
+                          <a:solidFill>
+                            <a:srgbClr val="000000"/>
+                          </a:solidFill>
+                          <a:latin typeface="Arial" pitchFamily="34" charset="0"/>
+                          <a:ea typeface="Arial" pitchFamily="34" charset="-122"/>
+                          <a:cs typeface="Arial" pitchFamily="34" charset="-120"/>
+                        </a:rPr>
+                        <a:t>8.40/10</a:t>
+                      </a:r>
+                      <a:endParaRPr lang="en-US" sz="800" dirty="0">
+                        <a:latin typeface="Arial" charset="0"/>
+                        <a:ea typeface="Arial" charset="0"/>
+                        <a:cs typeface="Arial" charset="0"/>
+                      </a:endParaRPr>
+                    </a:p>
+                  </a:txBody>
+                  <a:tcPr marL="91440" marR="91440" marT="45720" marB="45720">
+                    <a:lnL w="6350" cap="flat" cmpd="sng" algn="ctr">
+                      <a:solidFill>
+                        <a:srgbClr val="CCCCCC"/>
+                      </a:solidFill>
+                      <a:prstDash val="solid"/>
+                      <a:round/>
+                      <a:headEnd type="none" w="med" len="med"/>
+                      <a:tailEnd type="none" w="med" len="med"/>
+                    </a:lnL>
+                    <a:lnR w="6350" cap="flat" cmpd="sng" algn="ctr">
+                      <a:solidFill>
+                        <a:srgbClr val="CCCCCC"/>
+                      </a:solidFill>
+                      <a:prstDash val="solid"/>
+                      <a:round/>
+                      <a:headEnd type="none" w="med" len="med"/>
+                      <a:tailEnd type="none" w="med" len="med"/>
+                    </a:lnR>
+                    <a:lnT w="6350" cap="flat" cmpd="sng" algn="ctr">
+                      <a:solidFill>
+                        <a:srgbClr val="CCCCCC"/>
+                      </a:solidFill>
+                      <a:prstDash val="solid"/>
+                      <a:round/>
+                      <a:headEnd type="none" w="med" len="med"/>
+                      <a:tailEnd type="none" w="med" len="med"/>
+                    </a:lnT>
+                    <a:lnB w="6350" cap="flat" cmpd="sng" algn="ctr">
+                      <a:solidFill>
+                        <a:srgbClr val="CCCCCC"/>
+                      </a:solidFill>
+                      <a:prstDash val="solid"/>
+                      <a:round/>
+                      <a:headEnd type="none" w="med" len="med"/>
+                      <a:tailEnd type="none" w="med" len="med"/>
+                    </a:lnB>
+                    <a:solidFill>
+                      <a:srgbClr val="FFFFFF"/>
+                    </a:solidFill>
+                  </a:tcPr>
+                </a:tc>
+                <a:tc>
+                  <a:txBody>
+                    <a:bodyPr/>
+                    <a:lstStyle/>
+                    <a:p>
+                      <a:pPr algn="ctr" indent="0" marL="0">
+                        <a:buNone/>
+                      </a:pPr>
+                      <a:r>
+                        <a:rPr lang="en-US" sz="800" dirty="0">
+                          <a:solidFill>
+                            <a:srgbClr val="000000"/>
+                          </a:solidFill>
+                          <a:latin typeface="Arial" pitchFamily="34" charset="0"/>
+                          <a:ea typeface="Arial" pitchFamily="34" charset="-122"/>
+                          <a:cs typeface="Arial" pitchFamily="34" charset="-120"/>
+                        </a:rPr>
+                        <a:t>8.40</a:t>
                       </a:r>
                       <a:endParaRPr lang="en-US" sz="800" dirty="0">
                         <a:latin typeface="Arial" charset="0"/>
@@ -5339,7 +5681,7 @@
                           <a:ea typeface="Arial" pitchFamily="34" charset="-122"/>
                           <a:cs typeface="Arial" pitchFamily="34" charset="-120"/>
                         </a:rPr>
-                        <a:t>29</a:t>
+                        <a:t>14</a:t>
                       </a:r>
                       <a:endParaRPr lang="en-US" sz="800" dirty="0">
                         <a:latin typeface="Arial" charset="0"/>
@@ -5407,7 +5749,7 @@
                           <a:ea typeface="Arial" pitchFamily="34" charset="-122"/>
                           <a:cs typeface="Arial" pitchFamily="34" charset="-120"/>
                         </a:rPr>
-                        <a:t>4.21/5</a:t>
+                        <a:t>4.14/5</a:t>
                       </a:r>
                       <a:endParaRPr lang="en-US" sz="800" dirty="0">
                         <a:latin typeface="Arial" charset="0"/>
@@ -5475,349 +5817,7 @@
                           <a:ea typeface="Arial" pitchFamily="34" charset="-122"/>
                           <a:cs typeface="Arial" pitchFamily="34" charset="-120"/>
                         </a:rPr>
-                        <a:t>8.41</a:t>
-                      </a:r>
-                      <a:endParaRPr lang="en-US" sz="800" dirty="0">
-                        <a:latin typeface="Arial" charset="0"/>
-                        <a:ea typeface="Arial" charset="0"/>
-                        <a:cs typeface="Arial" charset="0"/>
-                      </a:endParaRPr>
-                    </a:p>
-                  </a:txBody>
-                  <a:tcPr marL="91440" marR="91440" marT="45720" marB="45720">
-                    <a:lnL w="6350" cap="flat" cmpd="sng" algn="ctr">
-                      <a:solidFill>
-                        <a:srgbClr val="CCCCCC"/>
-                      </a:solidFill>
-                      <a:prstDash val="solid"/>
-                      <a:round/>
-                      <a:headEnd type="none" w="med" len="med"/>
-                      <a:tailEnd type="none" w="med" len="med"/>
-                    </a:lnL>
-                    <a:lnR w="6350" cap="flat" cmpd="sng" algn="ctr">
-                      <a:solidFill>
-                        <a:srgbClr val="CCCCCC"/>
-                      </a:solidFill>
-                      <a:prstDash val="solid"/>
-                      <a:round/>
-                      <a:headEnd type="none" w="med" len="med"/>
-                      <a:tailEnd type="none" w="med" len="med"/>
-                    </a:lnR>
-                    <a:lnT w="6350" cap="flat" cmpd="sng" algn="ctr">
-                      <a:solidFill>
-                        <a:srgbClr val="CCCCCC"/>
-                      </a:solidFill>
-                      <a:prstDash val="solid"/>
-                      <a:round/>
-                      <a:headEnd type="none" w="med" len="med"/>
-                      <a:tailEnd type="none" w="med" len="med"/>
-                    </a:lnT>
-                    <a:lnB w="6350" cap="flat" cmpd="sng" algn="ctr">
-                      <a:solidFill>
-                        <a:srgbClr val="CCCCCC"/>
-                      </a:solidFill>
-                      <a:prstDash val="solid"/>
-                      <a:round/>
-                      <a:headEnd type="none" w="med" len="med"/>
-                      <a:tailEnd type="none" w="med" len="med"/>
-                    </a:lnB>
-                    <a:solidFill>
-                      <a:srgbClr val="FFFFFF"/>
-                    </a:solidFill>
-                  </a:tcPr>
-                </a:tc>
-                <a:tc>
-                  <a:txBody>
-                    <a:bodyPr/>
-                    <a:lstStyle/>
-                    <a:p>
-                      <a:pPr algn="ctr" indent="0" marL="0">
-                        <a:buNone/>
-                      </a:pPr>
-                      <a:r>
-                        <a:rPr lang="en-US" sz="800" dirty="0">
-                          <a:solidFill>
-                            <a:srgbClr val="000000"/>
-                          </a:solidFill>
-                          <a:latin typeface="Arial" pitchFamily="34" charset="0"/>
-                          <a:ea typeface="Arial" pitchFamily="34" charset="-122"/>
-                          <a:cs typeface="Arial" pitchFamily="34" charset="-120"/>
-                        </a:rPr>
-                        <a:t>良好</a:t>
-                      </a:r>
-                      <a:endParaRPr lang="en-US" sz="800" dirty="0">
-                        <a:latin typeface="Arial" charset="0"/>
-                        <a:ea typeface="Arial" charset="0"/>
-                        <a:cs typeface="Arial" charset="0"/>
-                      </a:endParaRPr>
-                    </a:p>
-                  </a:txBody>
-                  <a:tcPr marL="91440" marR="91440" marT="45720" marB="45720">
-                    <a:lnL w="6350" cap="flat" cmpd="sng" algn="ctr">
-                      <a:solidFill>
-                        <a:srgbClr val="CCCCCC"/>
-                      </a:solidFill>
-                      <a:prstDash val="solid"/>
-                      <a:round/>
-                      <a:headEnd type="none" w="med" len="med"/>
-                      <a:tailEnd type="none" w="med" len="med"/>
-                    </a:lnL>
-                    <a:lnR w="6350" cap="flat" cmpd="sng" algn="ctr">
-                      <a:solidFill>
-                        <a:srgbClr val="CCCCCC"/>
-                      </a:solidFill>
-                      <a:prstDash val="solid"/>
-                      <a:round/>
-                      <a:headEnd type="none" w="med" len="med"/>
-                      <a:tailEnd type="none" w="med" len="med"/>
-                    </a:lnR>
-                    <a:lnT w="6350" cap="flat" cmpd="sng" algn="ctr">
-                      <a:solidFill>
-                        <a:srgbClr val="CCCCCC"/>
-                      </a:solidFill>
-                      <a:prstDash val="solid"/>
-                      <a:round/>
-                      <a:headEnd type="none" w="med" len="med"/>
-                      <a:tailEnd type="none" w="med" len="med"/>
-                    </a:lnT>
-                    <a:lnB w="6350" cap="flat" cmpd="sng" algn="ctr">
-                      <a:solidFill>
-                        <a:srgbClr val="CCCCCC"/>
-                      </a:solidFill>
-                      <a:prstDash val="solid"/>
-                      <a:round/>
-                      <a:headEnd type="none" w="med" len="med"/>
-                      <a:tailEnd type="none" w="med" len="med"/>
-                    </a:lnB>
-                    <a:solidFill>
-                      <a:srgbClr val="FFFFFF"/>
-                    </a:solidFill>
-                  </a:tcPr>
-                </a:tc>
-              </a:tr>
-              <a:tr h="0">
-                <a:tc>
-                  <a:txBody>
-                    <a:bodyPr/>
-                    <a:lstStyle/>
-                    <a:p>
-                      <a:pPr algn="ctr" indent="0" marL="0">
-                        <a:buNone/>
-                      </a:pPr>
-                      <a:r>
-                        <a:rPr lang="en-US" sz="800" dirty="0">
-                          <a:solidFill>
-                            <a:srgbClr val="000000"/>
-                          </a:solidFill>
-                          <a:latin typeface="Arial" pitchFamily="34" charset="0"/>
-                          <a:ea typeface="Arial" pitchFamily="34" charset="-122"/>
-                          <a:cs typeface="Arial" pitchFamily="34" charset="-120"/>
-                        </a:rPr>
-                        <a:t>Agoda</a:t>
-                      </a:r>
-                      <a:endParaRPr lang="en-US" sz="800" dirty="0">
-                        <a:latin typeface="Arial" charset="0"/>
-                        <a:ea typeface="Arial" charset="0"/>
-                        <a:cs typeface="Arial" charset="0"/>
-                      </a:endParaRPr>
-                    </a:p>
-                  </a:txBody>
-                  <a:tcPr marL="91440" marR="91440" marT="45720" marB="45720">
-                    <a:lnL w="6350" cap="flat" cmpd="sng" algn="ctr">
-                      <a:solidFill>
-                        <a:srgbClr val="CCCCCC"/>
-                      </a:solidFill>
-                      <a:prstDash val="solid"/>
-                      <a:round/>
-                      <a:headEnd type="none" w="med" len="med"/>
-                      <a:tailEnd type="none" w="med" len="med"/>
-                    </a:lnL>
-                    <a:lnR w="6350" cap="flat" cmpd="sng" algn="ctr">
-                      <a:solidFill>
-                        <a:srgbClr val="CCCCCC"/>
-                      </a:solidFill>
-                      <a:prstDash val="solid"/>
-                      <a:round/>
-                      <a:headEnd type="none" w="med" len="med"/>
-                      <a:tailEnd type="none" w="med" len="med"/>
-                    </a:lnR>
-                    <a:lnT w="6350" cap="flat" cmpd="sng" algn="ctr">
-                      <a:solidFill>
-                        <a:srgbClr val="CCCCCC"/>
-                      </a:solidFill>
-                      <a:prstDash val="solid"/>
-                      <a:round/>
-                      <a:headEnd type="none" w="med" len="med"/>
-                      <a:tailEnd type="none" w="med" len="med"/>
-                    </a:lnT>
-                    <a:lnB w="6350" cap="flat" cmpd="sng" algn="ctr">
-                      <a:solidFill>
-                        <a:srgbClr val="CCCCCC"/>
-                      </a:solidFill>
-                      <a:prstDash val="solid"/>
-                      <a:round/>
-                      <a:headEnd type="none" w="med" len="med"/>
-                      <a:tailEnd type="none" w="med" len="med"/>
-                    </a:lnB>
-                    <a:solidFill>
-                      <a:srgbClr val="FFFFFF"/>
-                    </a:solidFill>
-                  </a:tcPr>
-                </a:tc>
-                <a:tc>
-                  <a:txBody>
-                    <a:bodyPr/>
-                    <a:lstStyle/>
-                    <a:p>
-                      <a:pPr algn="ctr" indent="0" marL="0">
-                        <a:buNone/>
-                      </a:pPr>
-                      <a:r>
-                        <a:rPr lang="en-US" sz="800" dirty="0">
-                          <a:solidFill>
-                            <a:srgbClr val="000000"/>
-                          </a:solidFill>
-                          <a:latin typeface="Arial" pitchFamily="34" charset="0"/>
-                          <a:ea typeface="Arial" pitchFamily="34" charset="-122"/>
-                          <a:cs typeface="Arial" pitchFamily="34" charset="-120"/>
-                        </a:rPr>
-                        <a:t>12</a:t>
-                      </a:r>
-                      <a:endParaRPr lang="en-US" sz="800" dirty="0">
-                        <a:latin typeface="Arial" charset="0"/>
-                        <a:ea typeface="Arial" charset="0"/>
-                        <a:cs typeface="Arial" charset="0"/>
-                      </a:endParaRPr>
-                    </a:p>
-                  </a:txBody>
-                  <a:tcPr marL="91440" marR="91440" marT="45720" marB="45720">
-                    <a:lnL w="6350" cap="flat" cmpd="sng" algn="ctr">
-                      <a:solidFill>
-                        <a:srgbClr val="CCCCCC"/>
-                      </a:solidFill>
-                      <a:prstDash val="solid"/>
-                      <a:round/>
-                      <a:headEnd type="none" w="med" len="med"/>
-                      <a:tailEnd type="none" w="med" len="med"/>
-                    </a:lnL>
-                    <a:lnR w="6350" cap="flat" cmpd="sng" algn="ctr">
-                      <a:solidFill>
-                        <a:srgbClr val="CCCCCC"/>
-                      </a:solidFill>
-                      <a:prstDash val="solid"/>
-                      <a:round/>
-                      <a:headEnd type="none" w="med" len="med"/>
-                      <a:tailEnd type="none" w="med" len="med"/>
-                    </a:lnR>
-                    <a:lnT w="6350" cap="flat" cmpd="sng" algn="ctr">
-                      <a:solidFill>
-                        <a:srgbClr val="CCCCCC"/>
-                      </a:solidFill>
-                      <a:prstDash val="solid"/>
-                      <a:round/>
-                      <a:headEnd type="none" w="med" len="med"/>
-                      <a:tailEnd type="none" w="med" len="med"/>
-                    </a:lnT>
-                    <a:lnB w="6350" cap="flat" cmpd="sng" algn="ctr">
-                      <a:solidFill>
-                        <a:srgbClr val="CCCCCC"/>
-                      </a:solidFill>
-                      <a:prstDash val="solid"/>
-                      <a:round/>
-                      <a:headEnd type="none" w="med" len="med"/>
-                      <a:tailEnd type="none" w="med" len="med"/>
-                    </a:lnB>
-                    <a:solidFill>
-                      <a:srgbClr val="FFFFFF"/>
-                    </a:solidFill>
-                  </a:tcPr>
-                </a:tc>
-                <a:tc>
-                  <a:txBody>
-                    <a:bodyPr/>
-                    <a:lstStyle/>
-                    <a:p>
-                      <a:pPr algn="ctr" indent="0" marL="0">
-                        <a:buNone/>
-                      </a:pPr>
-                      <a:r>
-                        <a:rPr lang="en-US" sz="800" dirty="0">
-                          <a:solidFill>
-                            <a:srgbClr val="000000"/>
-                          </a:solidFill>
-                          <a:latin typeface="Arial" pitchFamily="34" charset="0"/>
-                          <a:ea typeface="Arial" pitchFamily="34" charset="-122"/>
-                          <a:cs typeface="Arial" pitchFamily="34" charset="-120"/>
-                        </a:rPr>
-                        <a:t>8.25/10</a:t>
-                      </a:r>
-                      <a:endParaRPr lang="en-US" sz="800" dirty="0">
-                        <a:latin typeface="Arial" charset="0"/>
-                        <a:ea typeface="Arial" charset="0"/>
-                        <a:cs typeface="Arial" charset="0"/>
-                      </a:endParaRPr>
-                    </a:p>
-                  </a:txBody>
-                  <a:tcPr marL="91440" marR="91440" marT="45720" marB="45720">
-                    <a:lnL w="6350" cap="flat" cmpd="sng" algn="ctr">
-                      <a:solidFill>
-                        <a:srgbClr val="CCCCCC"/>
-                      </a:solidFill>
-                      <a:prstDash val="solid"/>
-                      <a:round/>
-                      <a:headEnd type="none" w="med" len="med"/>
-                      <a:tailEnd type="none" w="med" len="med"/>
-                    </a:lnL>
-                    <a:lnR w="6350" cap="flat" cmpd="sng" algn="ctr">
-                      <a:solidFill>
-                        <a:srgbClr val="CCCCCC"/>
-                      </a:solidFill>
-                      <a:prstDash val="solid"/>
-                      <a:round/>
-                      <a:headEnd type="none" w="med" len="med"/>
-                      <a:tailEnd type="none" w="med" len="med"/>
-                    </a:lnR>
-                    <a:lnT w="6350" cap="flat" cmpd="sng" algn="ctr">
-                      <a:solidFill>
-                        <a:srgbClr val="CCCCCC"/>
-                      </a:solidFill>
-                      <a:prstDash val="solid"/>
-                      <a:round/>
-                      <a:headEnd type="none" w="med" len="med"/>
-                      <a:tailEnd type="none" w="med" len="med"/>
-                    </a:lnT>
-                    <a:lnB w="6350" cap="flat" cmpd="sng" algn="ctr">
-                      <a:solidFill>
-                        <a:srgbClr val="CCCCCC"/>
-                      </a:solidFill>
-                      <a:prstDash val="solid"/>
-                      <a:round/>
-                      <a:headEnd type="none" w="med" len="med"/>
-                      <a:tailEnd type="none" w="med" len="med"/>
-                    </a:lnB>
-                    <a:solidFill>
-                      <a:srgbClr val="FFFFFF"/>
-                    </a:solidFill>
-                  </a:tcPr>
-                </a:tc>
-                <a:tc>
-                  <a:txBody>
-                    <a:bodyPr/>
-                    <a:lstStyle/>
-                    <a:p>
-                      <a:pPr algn="ctr" indent="0" marL="0">
-                        <a:buNone/>
-                      </a:pPr>
-                      <a:r>
-                        <a:rPr lang="en-US" sz="800" dirty="0">
-                          <a:solidFill>
-                            <a:srgbClr val="000000"/>
-                          </a:solidFill>
-                          <a:latin typeface="Arial" pitchFamily="34" charset="0"/>
-                          <a:ea typeface="Arial" pitchFamily="34" charset="-122"/>
-                          <a:cs typeface="Arial" pitchFamily="34" charset="-120"/>
-                        </a:rPr>
-                        <a:t>8.25</a:t>
+                        <a:t>8.29</a:t>
                       </a:r>
                       <a:endParaRPr lang="en-US" sz="800" dirty="0">
                         <a:latin typeface="Arial" charset="0"/>
@@ -6023,7 +6023,7 @@
                           <a:ea typeface="Arial" pitchFamily="34" charset="-122"/>
                           <a:cs typeface="Arial" pitchFamily="34" charset="-120"/>
                         </a:rPr>
-                        <a:t>11</a:t>
+                        <a:t>7</a:t>
                       </a:r>
                       <a:endParaRPr lang="en-US" sz="800" dirty="0">
                         <a:latin typeface="Arial" charset="0"/>
@@ -6091,7 +6091,7 @@
                           <a:ea typeface="Arial" pitchFamily="34" charset="-122"/>
                           <a:cs typeface="Arial" pitchFamily="34" charset="-120"/>
                         </a:rPr>
-                        <a:t>3.45/5</a:t>
+                        <a:t>3.43/5</a:t>
                       </a:r>
                       <a:endParaRPr lang="en-US" sz="800" dirty="0">
                         <a:latin typeface="Arial" charset="0"/>
@@ -6159,7 +6159,7 @@
                           <a:ea typeface="Arial" pitchFamily="34" charset="-122"/>
                           <a:cs typeface="Arial" pitchFamily="34" charset="-120"/>
                         </a:rPr>
-                        <a:t>6.91</a:t>
+                        <a:t>6.86</a:t>
                       </a:r>
                       <a:endParaRPr lang="en-US" sz="800" dirty="0">
                         <a:latin typeface="Arial" charset="0"/>
@@ -6612,7 +6612,7 @@
                 <a:ea typeface="Arial" pitchFamily="34" charset="-122"/>
                 <a:cs typeface="Arial" pitchFamily="34" charset="-120"/>
               </a:rPr>
-              <a:t>112件（81.8%）</a:t>
+              <a:t>55件（80.9%）</a:t>
             </a:r>
             <a:endParaRPr lang="en-US" sz="1600" dirty="0"/>
           </a:p>
@@ -6710,7 +6710,7 @@
                 <a:ea typeface="Arial" pitchFamily="34" charset="-122"/>
                 <a:cs typeface="Arial" pitchFamily="34" charset="-120"/>
               </a:rPr>
-              <a:t>23件（16.8%）</a:t>
+              <a:t>12件（17.6%）</a:t>
             </a:r>
             <a:endParaRPr lang="en-US" sz="1600" dirty="0"/>
           </a:p>
@@ -6808,7 +6808,7 @@
                 <a:ea typeface="Arial" pitchFamily="34" charset="-122"/>
                 <a:cs typeface="Arial" pitchFamily="34" charset="-120"/>
               </a:rPr>
-              <a:t>2件（1.5%）</a:t>
+              <a:t>1件（1.5%）</a:t>
             </a:r>
             <a:endParaRPr lang="en-US" sz="1600" dirty="0"/>
           </a:p>
@@ -6970,7 +6970,7 @@
                 <a:ea typeface="Arial" pitchFamily="34" charset="-122"/>
                 <a:cs typeface="Arial" pitchFamily="34" charset="-120"/>
               </a:rPr>
-              <a:t>高評価レビュー（8-10点: 112件）の分析から、主要な強みテーマを抽出しています。立地・アクセス、客室清潔感、スタッフ対応が高評価の中心的テーマです。</a:t>
+              <a:t>高評価レビュー（8-10点: 55件）の分析から、主要な強みテーマを抽出しています。立地・アクセス、客室清潔感、スタッフ対応が高評価の中心的テーマです。</a:t>
             </a:r>
             <a:endParaRPr lang="en-US" sz="1200" dirty="0"/>
           </a:p>
@@ -7230,7 +7230,7 @@
                 <a:ea typeface="Arial" pitchFamily="34" charset="-122"/>
                 <a:cs typeface="Arial" pitchFamily="34" charset="-120"/>
               </a:rPr>
-              <a:t>低評価・中評価レビュー（25件）から改善課題を優先度別に整理しています。S/A/B/Cの4段階で優先度を設定し、計画的な改善を推進します。</a:t>
+              <a:t>低評価・中評価レビュー（13件）から改善課題を優先度別に整理しています。S/A/B/Cの4段階で優先度を設定し、計画的な改善を推進します。</a:t>
             </a:r>
             <a:endParaRPr lang="en-US" sz="1200" dirty="0"/>
           </a:p>
@@ -8010,7 +8010,7 @@
                 <a:ea typeface="Arial" pitchFamily="34" charset="-122"/>
                 <a:cs typeface="Arial" pitchFamily="34" charset="-120"/>
               </a:rPr>
-              <a:t>全体平均 8.48点 → 目標 8.98点</a:t>
+              <a:t>全体平均 8.43点 → 目標 8.93点</a:t>
             </a:r>
             <a:endParaRPr lang="en-US" sz="1200" dirty="0"/>
           </a:p>
@@ -8027,7 +8027,7 @@
                 <a:ea typeface="Arial" pitchFamily="34" charset="-122"/>
                 <a:cs typeface="Arial" pitchFamily="34" charset="-120"/>
               </a:rPr>
-              <a:t>高評価率 81.8% → 目標 86.8%</a:t>
+              <a:t>高評価率 80.9% → 目標 85.9%</a:t>
             </a:r>
             <a:endParaRPr lang="en-US" sz="1200" dirty="0"/>
           </a:p>

--- a/納品レポート/ホテル別レポート/hearton_口コミ分析レポート.pptx
+++ b/納品レポート/ホテル別レポート/hearton_口コミ分析レポート.pptx
@@ -189,10 +189,10 @@
                     <c:v>Booking.com</c:v>
                   </c:pt>
                   <c:pt idx="3">
-                    <c:v>楽天トラベル</c:v>
+                    <c:v>Agoda</c:v>
                   </c:pt>
                   <c:pt idx="4">
-                    <c:v>Agoda</c:v>
+                    <c:v>楽天トラベル</c:v>
                   </c:pt>
                   <c:pt idx="5">
                     <c:v>Google</c:v>
@@ -208,22 +208,22 @@
                 <c:formatCode>General</c:formatCode>
                 <c:ptCount val="6"/>
                 <c:pt idx="0">
-                  <c:v>9.35</c:v>
+                  <c:v>9.38</c:v>
                 </c:pt>
                 <c:pt idx="1">
-                  <c:v>8.57</c:v>
+                  <c:v>8.71</c:v>
                 </c:pt>
                 <c:pt idx="2">
-                  <c:v>8.44</c:v>
+                  <c:v>8.43</c:v>
                 </c:pt>
                 <c:pt idx="3">
-                  <c:v>8.41</c:v>
+                  <c:v>8.4</c:v>
                 </c:pt>
                 <c:pt idx="4">
-                  <c:v>8.25</c:v>
+                  <c:v>8.11</c:v>
                 </c:pt>
                 <c:pt idx="5">
-                  <c:v>6.91</c:v>
+                  <c:v>7.25</c:v>
                 </c:pt>
               </c:numCache>
             </c:numRef>
@@ -566,10 +566,10 @@
               <c:numCache>
                 <c:ptCount val="3"/>
                 <c:pt idx="0">
-                  <c:v>112</c:v>
+                  <c:v>69</c:v>
                 </c:pt>
                 <c:pt idx="1">
-                  <c:v>23</c:v>
+                  <c:v>13</c:v>
                 </c:pt>
                 <c:pt idx="2">
                   <c:v>2</c:v>
@@ -741,6 +741,17 @@
             <c:bubble3D val="0"/>
             <c:spPr>
               <a:solidFill>
+                <a:srgbClr val="D4A843"/>
+              </a:solidFill>
+              <a:effectLst/>
+            </c:spPr>
+          </c:dPt>
+          <c:dPt>
+            <c:idx val="6"/>
+            <c:invertIfNegative val="0"/>
+            <c:bubble3D val="0"/>
+            <c:spPr>
+              <a:solidFill>
                 <a:srgbClr val="DC2626"/>
               </a:solidFill>
               <a:effectLst/>
@@ -748,9 +759,9 @@
           </c:dPt>
           <c:cat>
             <c:multiLvlStrRef>
-              <c:f>Sheet1!$A$2:$A$7</c:f>
+              <c:f>Sheet1!$A$2:$A$8</c:f>
               <c:multiLvlStrCache>
-                <c:ptCount val="6"/>
+                <c:ptCount val="7"/>
                 <c:lvl>
                   <c:pt idx="0">
                     <c:v>10点</c:v>
@@ -768,6 +779,9 @@
                     <c:v>6点</c:v>
                   </c:pt>
                   <c:pt idx="5">
+                    <c:v>5点</c:v>
+                  </c:pt>
+                  <c:pt idx="6">
                     <c:v>2点</c:v>
                   </c:pt>
                 </c:lvl>
@@ -776,26 +790,29 @@
           </c:cat>
           <c:val>
             <c:numRef>
-              <c:f>Sheet1!$B$2:$B$7</c:f>
+              <c:f>Sheet1!$B$2:$B$8</c:f>
               <c:numCache>
                 <c:formatCode>General</c:formatCode>
-                <c:ptCount val="6"/>
+                <c:ptCount val="7"/>
                 <c:pt idx="0">
-                  <c:v>53</c:v>
+                  <c:v>31</c:v>
                 </c:pt>
                 <c:pt idx="1">
-                  <c:v>11</c:v>
+                  <c:v>12</c:v>
                 </c:pt>
                 <c:pt idx="2">
-                  <c:v>48</c:v>
+                  <c:v>26</c:v>
                 </c:pt>
                 <c:pt idx="3">
-                  <c:v>7</c:v>
+                  <c:v>3</c:v>
                 </c:pt>
                 <c:pt idx="4">
-                  <c:v>16</c:v>
+                  <c:v>9</c:v>
                 </c:pt>
                 <c:pt idx="5">
+                  <c:v>1</c:v>
+                </c:pt>
+                <c:pt idx="6">
                   <c:v>2</c:v>
                 </c:pt>
               </c:numCache>
@@ -2727,7 +2744,7 @@
                 <a:ea typeface="Arial" pitchFamily="34" charset="-122"/>
                 <a:cs typeface="Arial" pitchFamily="34" charset="-120"/>
               </a:rPr>
-              <a:t>分析対象期間：2026年2月〜3月</a:t>
+              <a:t>分析対象期間：2026年3月〜4月</a:t>
             </a:r>
             <a:endParaRPr lang="en-US" sz="1000" dirty="0"/>
           </a:p>
@@ -2747,7 +2764,7 @@
                 <a:ea typeface="Arial" pitchFamily="34" charset="-122"/>
                 <a:cs typeface="Arial" pitchFamily="34" charset="-120"/>
               </a:rPr>
-              <a:t>レビュー総数：137件（6サイト）</a:t>
+              <a:t>レビュー総数：84件（6サイト）</a:t>
             </a:r>
             <a:endParaRPr lang="en-US" sz="1000" dirty="0"/>
           </a:p>
@@ -2767,7 +2784,7 @@
                 <a:ea typeface="Arial" pitchFamily="34" charset="-122"/>
                 <a:cs typeface="Arial" pitchFamily="34" charset="-120"/>
               </a:rPr>
-              <a:t>作成日：2026年4月2日</a:t>
+              <a:t>作成日：2026年4月5日</a:t>
             </a:r>
             <a:endParaRPr lang="en-US" sz="1000" dirty="0"/>
           </a:p>
@@ -3313,7 +3330,7 @@
                           <a:ea typeface="Arial" pitchFamily="34" charset="-122"/>
                           <a:cs typeface="Arial" pitchFamily="34" charset="-120"/>
                         </a:rPr>
-                        <a:t>8.48点</a:t>
+                        <a:t>8.45点</a:t>
                       </a:r>
                       <a:endParaRPr lang="en-US" sz="1000" dirty="0">
                         <a:latin typeface="Arial" charset="0"/>
@@ -3587,7 +3604,7 @@
                           <a:ea typeface="Arial" pitchFamily="34" charset="-122"/>
                           <a:cs typeface="Arial" pitchFamily="34" charset="-120"/>
                         </a:rPr>
-                        <a:t>81.8%</a:t>
+                        <a:t>82.1%</a:t>
                       </a:r>
                       <a:endParaRPr lang="en-US" sz="1000" dirty="0">
                         <a:latin typeface="Arial" charset="0"/>
@@ -3861,7 +3878,7 @@
                           <a:ea typeface="Arial" pitchFamily="34" charset="-122"/>
                           <a:cs typeface="Arial" pitchFamily="34" charset="-120"/>
                         </a:rPr>
-                        <a:t>1.5%</a:t>
+                        <a:t>2.4%</a:t>
                       </a:r>
                       <a:endParaRPr lang="en-US" sz="1000" dirty="0">
                         <a:latin typeface="Arial" charset="0"/>
@@ -3929,7 +3946,7 @@
                           <a:ea typeface="Arial" pitchFamily="34" charset="-122"/>
                           <a:cs typeface="Arial" pitchFamily="34" charset="-120"/>
                         </a:rPr>
-                        <a:t>0%維持</a:t>
+                        <a:t>0%以下</a:t>
                       </a:r>
                       <a:endParaRPr lang="en-US" sz="1000" dirty="0">
                         <a:latin typeface="Arial" charset="0"/>
@@ -4135,7 +4152,7 @@
                           <a:ea typeface="Arial" pitchFamily="34" charset="-122"/>
                           <a:cs typeface="Arial" pitchFamily="34" charset="-120"/>
                         </a:rPr>
-                        <a:t>6.9点</a:t>
+                        <a:t>7.3点</a:t>
                       </a:r>
                       <a:endParaRPr lang="en-US" sz="1000" dirty="0">
                         <a:latin typeface="Arial" charset="0"/>
@@ -4203,7 +4220,7 @@
                           <a:ea typeface="Arial" pitchFamily="34" charset="-122"/>
                           <a:cs typeface="Arial" pitchFamily="34" charset="-120"/>
                         </a:rPr>
-                        <a:t>7.9点以上</a:t>
+                        <a:t>8.3点以上</a:t>
                       </a:r>
                       <a:endParaRPr lang="en-US" sz="1000" dirty="0">
                         <a:latin typeface="Arial" charset="0"/>
@@ -4683,7 +4700,7 @@
                           <a:ea typeface="Arial" pitchFamily="34" charset="-122"/>
                           <a:cs typeface="Arial" pitchFamily="34" charset="-120"/>
                         </a:rPr>
-                        <a:t>約15件/期間</a:t>
+                        <a:t>約7件/期間</a:t>
                       </a:r>
                       <a:endParaRPr lang="en-US" sz="1000" dirty="0">
                         <a:latin typeface="Arial" charset="0"/>
@@ -4751,7 +4768,7 @@
                           <a:ea typeface="Arial" pitchFamily="34" charset="-122"/>
                           <a:cs typeface="Arial" pitchFamily="34" charset="-120"/>
                         </a:rPr>
-                        <a:t>7件以下</a:t>
+                        <a:t>3件以下</a:t>
                       </a:r>
                       <a:endParaRPr lang="en-US" sz="1000" dirty="0">
                         <a:latin typeface="Arial" charset="0"/>
@@ -5322,7 +5339,7 @@
                 <a:ea typeface="Arial" pitchFamily="34" charset="-122"/>
                 <a:cs typeface="Arial" pitchFamily="34" charset="-120"/>
               </a:rPr>
-              <a:t>8.48</a:t>
+              <a:t>8.45</a:t>
             </a:r>
             <a:endParaRPr lang="en-US" sz="3200" dirty="0"/>
           </a:p>
@@ -5447,7 +5464,7 @@
                 <a:ea typeface="Arial" pitchFamily="34" charset="-122"/>
                 <a:cs typeface="Arial" pitchFamily="34" charset="-120"/>
               </a:rPr>
-              <a:t>81.8%</a:t>
+              <a:t>82.1%</a:t>
             </a:r>
             <a:endParaRPr lang="en-US" sz="3200" dirty="0"/>
           </a:p>
@@ -5572,7 +5589,7 @@
                 <a:ea typeface="Arial" pitchFamily="34" charset="-122"/>
                 <a:cs typeface="Arial" pitchFamily="34" charset="-120"/>
               </a:rPr>
-              <a:t>1.5%</a:t>
+              <a:t>2.4%</a:t>
             </a:r>
             <a:endParaRPr lang="en-US" sz="3200" dirty="0"/>
           </a:p>
@@ -5697,7 +5714,7 @@
                 <a:ea typeface="Arial" pitchFamily="34" charset="-122"/>
                 <a:cs typeface="Arial" pitchFamily="34" charset="-120"/>
               </a:rPr>
-              <a:t>137件</a:t>
+              <a:t>84件</a:t>
             </a:r>
             <a:endParaRPr lang="en-US" sz="3200" dirty="0"/>
           </a:p>
@@ -5845,7 +5862,7 @@
                 <a:ea typeface="Arial" pitchFamily="34" charset="-122"/>
                 <a:cs typeface="Arial" pitchFamily="34" charset="-120"/>
               </a:rPr>
-              <a:t>  朝食が美味しく　駅が近い    対応が　気持ちよく　親切</a:t>
+              <a:t>  駅から激近の立地で満足です</a:t>
             </a:r>
             <a:endParaRPr lang="en-US" sz="1100" dirty="0"/>
           </a:p>
@@ -5885,7 +5902,7 @@
                 <a:ea typeface="Arial" pitchFamily="34" charset="-122"/>
                 <a:cs typeface="Arial" pitchFamily="34" charset="-120"/>
               </a:rPr>
-              <a:t>  とても清潔感がありました 最寄り駅からすぐで、目の前にショッピングモールがあるのでとても便利でした 特にありません...</a:t>
+              <a:t>  駅近のきれいなホテルです</a:t>
             </a:r>
             <a:endParaRPr lang="en-US" sz="1100" dirty="0"/>
           </a:p>
@@ -5905,7 +5922,7 @@
                 <a:ea typeface="Arial" pitchFamily="34" charset="-122"/>
                 <a:cs typeface="Arial" pitchFamily="34" charset="-120"/>
               </a:rPr>
-              <a:t>コンビニ・周辺施設 </a:t>
+              <a:t>スタッフの対応 </a:t>
             </a:r>
             <a:endParaRPr lang="en-US" sz="1100" dirty="0"/>
           </a:p>
@@ -5925,7 +5942,7 @@
                 <a:ea typeface="Arial" pitchFamily="34" charset="-122"/>
                 <a:cs typeface="Arial" pitchFamily="34" charset="-120"/>
               </a:rPr>
-              <a:t>  りんかい線の入口もすぐ、空港行きのバス乗り場もすぐ、空港までもすぐ、飲食店、コンビニ、イオンと助かりました</a:t>
+              <a:t>  環境清潔安靜，服務人員非常親切 環境は清潔で静かで、スタッフの方々もとても親切でした</a:t>
             </a:r>
             <a:endParaRPr lang="en-US" sz="1100" dirty="0"/>
           </a:p>
@@ -6073,7 +6090,7 @@
                 <a:ea typeface="Arial" pitchFamily="34" charset="-122"/>
                 <a:cs typeface="Arial" pitchFamily="34" charset="-120"/>
               </a:rPr>
-              <a:t>  りんかい線の入口もすぐ、空港行きのバス乗り場もすぐ、空港までもすぐ、飲食店、コンビニ、イオンと助かりました</a:t>
+              <a:t>  部屋も洗面浴室もキレイでした</a:t>
             </a:r>
             <a:endParaRPr lang="en-US" sz="1100" dirty="0"/>
           </a:p>
@@ -6506,7 +6523,7 @@
                 <a:ea typeface="Arial" pitchFamily="34" charset="-122"/>
                 <a:cs typeface="Arial" pitchFamily="34" charset="-120"/>
               </a:rPr>
-              <a:t>8.48</a:t>
+              <a:t>8.45</a:t>
             </a:r>
             <a:endParaRPr lang="en-US" sz="3200" dirty="0"/>
           </a:p>
@@ -6631,7 +6648,7 @@
                 <a:ea typeface="Arial" pitchFamily="34" charset="-122"/>
                 <a:cs typeface="Arial" pitchFamily="34" charset="-120"/>
               </a:rPr>
-              <a:t>81.8%</a:t>
+              <a:t>82.1%</a:t>
             </a:r>
             <a:endParaRPr lang="en-US" sz="3200" dirty="0"/>
           </a:p>
@@ -6756,7 +6773,7 @@
                 <a:ea typeface="Arial" pitchFamily="34" charset="-122"/>
                 <a:cs typeface="Arial" pitchFamily="34" charset="-120"/>
               </a:rPr>
-              <a:t>1.5%</a:t>
+              <a:t>2.4%</a:t>
             </a:r>
             <a:endParaRPr lang="en-US" sz="3200" dirty="0"/>
           </a:p>
@@ -6881,7 +6898,7 @@
                 <a:ea typeface="Arial" pitchFamily="34" charset="-122"/>
                 <a:cs typeface="Arial" pitchFamily="34" charset="-120"/>
               </a:rPr>
-              <a:t>137件</a:t>
+              <a:t>84件</a:t>
             </a:r>
             <a:endParaRPr lang="en-US" sz="3200" dirty="0"/>
           </a:p>
@@ -7302,7 +7319,7 @@
                 <a:ea typeface="Arial" pitchFamily="34" charset="-122"/>
                 <a:cs typeface="Arial" pitchFamily="34" charset="-120"/>
               </a:rPr>
-              <a:t>Trip.com(9.35)が最高スコア。</a:t>
+              <a:t>Trip.com(9.38)が最高スコア。</a:t>
             </a:r>
             <a:endParaRPr lang="en-US" sz="1100" dirty="0"/>
           </a:p>
@@ -7351,7 +7368,7 @@
                 <a:ea typeface="Arial" pitchFamily="34" charset="-122"/>
                 <a:cs typeface="Arial" pitchFamily="34" charset="-120"/>
               </a:rPr>
-              <a:t>Google(6.9)が相対的に低い。口コミ返信の強化が急務</a:t>
+              <a:t>Google(7.3)が相対的に低い。口コミ返信の強化が急務</a:t>
             </a:r>
             <a:endParaRPr lang="en-US" sz="1100" dirty="0"/>
           </a:p>
@@ -7860,7 +7877,7 @@
                           <a:ea typeface="Arial" pitchFamily="34" charset="-122"/>
                           <a:cs typeface="Arial" pitchFamily="34" charset="-120"/>
                         </a:rPr>
-                        <a:t>23</a:t>
+                        <a:t>13</a:t>
                       </a:r>
                       <a:endParaRPr lang="en-US" sz="900" dirty="0">
                         <a:latin typeface="Arial" charset="0"/>
@@ -7928,7 +7945,7 @@
                           <a:ea typeface="Arial" pitchFamily="34" charset="-122"/>
                           <a:cs typeface="Arial" pitchFamily="34" charset="-120"/>
                         </a:rPr>
-                        <a:t>9.35</a:t>
+                        <a:t>9.38</a:t>
                       </a:r>
                       <a:endParaRPr lang="en-US" sz="900" dirty="0">
                         <a:latin typeface="Arial" charset="0"/>
@@ -8064,7 +8081,7 @@
                           <a:ea typeface="Arial" pitchFamily="34" charset="-122"/>
                           <a:cs typeface="Arial" pitchFamily="34" charset="-120"/>
                         </a:rPr>
-                        <a:t>9.35</a:t>
+                        <a:t>9.38</a:t>
                       </a:r>
                       <a:endParaRPr lang="en-US" sz="900" dirty="0">
                         <a:latin typeface="Arial" charset="0"/>
@@ -8202,7 +8219,7 @@
                           <a:ea typeface="Arial" pitchFamily="34" charset="-122"/>
                           <a:cs typeface="Arial" pitchFamily="34" charset="-120"/>
                         </a:rPr>
-                        <a:t>35</a:t>
+                        <a:t>17</a:t>
                       </a:r>
                       <a:endParaRPr lang="en-US" sz="900" dirty="0">
                         <a:latin typeface="Arial" charset="0"/>
@@ -8270,7 +8287,7 @@
                           <a:ea typeface="Arial" pitchFamily="34" charset="-122"/>
                           <a:cs typeface="Arial" pitchFamily="34" charset="-120"/>
                         </a:rPr>
-                        <a:t>4.29</a:t>
+                        <a:t>4.35</a:t>
                       </a:r>
                       <a:endParaRPr lang="en-US" sz="900" dirty="0">
                         <a:latin typeface="Arial" charset="0"/>
@@ -8406,7 +8423,7 @@
                           <a:ea typeface="Arial" pitchFamily="34" charset="-122"/>
                           <a:cs typeface="Arial" pitchFamily="34" charset="-120"/>
                         </a:rPr>
-                        <a:t>8.57</a:t>
+                        <a:t>8.71</a:t>
                       </a:r>
                       <a:endParaRPr lang="en-US" sz="900" dirty="0">
                         <a:latin typeface="Arial" charset="0"/>
@@ -8544,7 +8561,7 @@
                           <a:ea typeface="Arial" pitchFamily="34" charset="-122"/>
                           <a:cs typeface="Arial" pitchFamily="34" charset="-120"/>
                         </a:rPr>
-                        <a:t>27</a:t>
+                        <a:t>23</a:t>
                       </a:r>
                       <a:endParaRPr lang="en-US" sz="900" dirty="0">
                         <a:latin typeface="Arial" charset="0"/>
@@ -8612,7 +8629,7 @@
                           <a:ea typeface="Arial" pitchFamily="34" charset="-122"/>
                           <a:cs typeface="Arial" pitchFamily="34" charset="-120"/>
                         </a:rPr>
-                        <a:t>8.44</a:t>
+                        <a:t>8.43</a:t>
                       </a:r>
                       <a:endParaRPr lang="en-US" sz="900" dirty="0">
                         <a:latin typeface="Arial" charset="0"/>
@@ -8748,7 +8765,7 @@
                           <a:ea typeface="Arial" pitchFamily="34" charset="-122"/>
                           <a:cs typeface="Arial" pitchFamily="34" charset="-120"/>
                         </a:rPr>
-                        <a:t>8.44</a:t>
+                        <a:t>8.43</a:t>
                       </a:r>
                       <a:endParaRPr lang="en-US" sz="900" dirty="0">
                         <a:latin typeface="Arial" charset="0"/>
@@ -8796,6 +8813,348 @@
                     </a:lnB>
                     <a:solidFill>
                       <a:srgbClr val="E8EFF8"/>
+                    </a:solidFill>
+                  </a:tcPr>
+                </a:tc>
+              </a:tr>
+              <a:tr h="201168">
+                <a:tc>
+                  <a:txBody>
+                    <a:bodyPr/>
+                    <a:lstStyle/>
+                    <a:p>
+                      <a:pPr algn="ctr" indent="0" marL="0">
+                        <a:buNone/>
+                      </a:pPr>
+                      <a:r>
+                        <a:rPr lang="en-US" sz="900" dirty="0">
+                          <a:solidFill>
+                            <a:srgbClr val="000000"/>
+                          </a:solidFill>
+                          <a:latin typeface="Arial" pitchFamily="34" charset="0"/>
+                          <a:ea typeface="Arial" pitchFamily="34" charset="-122"/>
+                          <a:cs typeface="Arial" pitchFamily="34" charset="-120"/>
+                        </a:rPr>
+                        <a:t>Agoda</a:t>
+                      </a:r>
+                      <a:endParaRPr lang="en-US" sz="900" dirty="0">
+                        <a:latin typeface="Arial" charset="0"/>
+                        <a:ea typeface="Arial" charset="0"/>
+                        <a:cs typeface="Arial" charset="0"/>
+                      </a:endParaRPr>
+                    </a:p>
+                  </a:txBody>
+                  <a:tcPr marL="91440" marR="91440" marT="45720" marB="45720">
+                    <a:lnL w="6350" cap="flat" cmpd="sng" algn="ctr">
+                      <a:solidFill>
+                        <a:srgbClr val="CBD5E1"/>
+                      </a:solidFill>
+                      <a:prstDash val="solid"/>
+                      <a:round/>
+                      <a:headEnd type="none" w="med" len="med"/>
+                      <a:tailEnd type="none" w="med" len="med"/>
+                    </a:lnL>
+                    <a:lnR w="6350" cap="flat" cmpd="sng" algn="ctr">
+                      <a:solidFill>
+                        <a:srgbClr val="CBD5E1"/>
+                      </a:solidFill>
+                      <a:prstDash val="solid"/>
+                      <a:round/>
+                      <a:headEnd type="none" w="med" len="med"/>
+                      <a:tailEnd type="none" w="med" len="med"/>
+                    </a:lnR>
+                    <a:lnT w="6350" cap="flat" cmpd="sng" algn="ctr">
+                      <a:solidFill>
+                        <a:srgbClr val="CBD5E1"/>
+                      </a:solidFill>
+                      <a:prstDash val="solid"/>
+                      <a:round/>
+                      <a:headEnd type="none" w="med" len="med"/>
+                      <a:tailEnd type="none" w="med" len="med"/>
+                    </a:lnT>
+                    <a:lnB w="6350" cap="flat" cmpd="sng" algn="ctr">
+                      <a:solidFill>
+                        <a:srgbClr val="CBD5E1"/>
+                      </a:solidFill>
+                      <a:prstDash val="solid"/>
+                      <a:round/>
+                      <a:headEnd type="none" w="med" len="med"/>
+                      <a:tailEnd type="none" w="med" len="med"/>
+                    </a:lnB>
+                    <a:solidFill>
+                      <a:srgbClr val="FFFFFF"/>
+                    </a:solidFill>
+                  </a:tcPr>
+                </a:tc>
+                <a:tc>
+                  <a:txBody>
+                    <a:bodyPr/>
+                    <a:lstStyle/>
+                    <a:p>
+                      <a:pPr algn="ctr" indent="0" marL="0">
+                        <a:buNone/>
+                      </a:pPr>
+                      <a:r>
+                        <a:rPr lang="en-US" sz="900" dirty="0">
+                          <a:solidFill>
+                            <a:srgbClr val="000000"/>
+                          </a:solidFill>
+                          <a:latin typeface="Arial" pitchFamily="34" charset="0"/>
+                          <a:ea typeface="Arial" pitchFamily="34" charset="-122"/>
+                          <a:cs typeface="Arial" pitchFamily="34" charset="-120"/>
+                        </a:rPr>
+                        <a:t>5</a:t>
+                      </a:r>
+                      <a:endParaRPr lang="en-US" sz="900" dirty="0">
+                        <a:latin typeface="Arial" charset="0"/>
+                        <a:ea typeface="Arial" charset="0"/>
+                        <a:cs typeface="Arial" charset="0"/>
+                      </a:endParaRPr>
+                    </a:p>
+                  </a:txBody>
+                  <a:tcPr marL="91440" marR="91440" marT="45720" marB="45720">
+                    <a:lnL w="6350" cap="flat" cmpd="sng" algn="ctr">
+                      <a:solidFill>
+                        <a:srgbClr val="CBD5E1"/>
+                      </a:solidFill>
+                      <a:prstDash val="solid"/>
+                      <a:round/>
+                      <a:headEnd type="none" w="med" len="med"/>
+                      <a:tailEnd type="none" w="med" len="med"/>
+                    </a:lnL>
+                    <a:lnR w="6350" cap="flat" cmpd="sng" algn="ctr">
+                      <a:solidFill>
+                        <a:srgbClr val="CBD5E1"/>
+                      </a:solidFill>
+                      <a:prstDash val="solid"/>
+                      <a:round/>
+                      <a:headEnd type="none" w="med" len="med"/>
+                      <a:tailEnd type="none" w="med" len="med"/>
+                    </a:lnR>
+                    <a:lnT w="6350" cap="flat" cmpd="sng" algn="ctr">
+                      <a:solidFill>
+                        <a:srgbClr val="CBD5E1"/>
+                      </a:solidFill>
+                      <a:prstDash val="solid"/>
+                      <a:round/>
+                      <a:headEnd type="none" w="med" len="med"/>
+                      <a:tailEnd type="none" w="med" len="med"/>
+                    </a:lnT>
+                    <a:lnB w="6350" cap="flat" cmpd="sng" algn="ctr">
+                      <a:solidFill>
+                        <a:srgbClr val="CBD5E1"/>
+                      </a:solidFill>
+                      <a:prstDash val="solid"/>
+                      <a:round/>
+                      <a:headEnd type="none" w="med" len="med"/>
+                      <a:tailEnd type="none" w="med" len="med"/>
+                    </a:lnB>
+                    <a:solidFill>
+                      <a:srgbClr val="FFFFFF"/>
+                    </a:solidFill>
+                  </a:tcPr>
+                </a:tc>
+                <a:tc>
+                  <a:txBody>
+                    <a:bodyPr/>
+                    <a:lstStyle/>
+                    <a:p>
+                      <a:pPr algn="ctr" indent="0" marL="0">
+                        <a:buNone/>
+                      </a:pPr>
+                      <a:r>
+                        <a:rPr lang="en-US" sz="900" dirty="0">
+                          <a:solidFill>
+                            <a:srgbClr val="000000"/>
+                          </a:solidFill>
+                          <a:latin typeface="Arial" pitchFamily="34" charset="0"/>
+                          <a:ea typeface="Arial" pitchFamily="34" charset="-122"/>
+                          <a:cs typeface="Arial" pitchFamily="34" charset="-120"/>
+                        </a:rPr>
+                        <a:t>8.4</a:t>
+                      </a:r>
+                      <a:endParaRPr lang="en-US" sz="900" dirty="0">
+                        <a:latin typeface="Arial" charset="0"/>
+                        <a:ea typeface="Arial" charset="0"/>
+                        <a:cs typeface="Arial" charset="0"/>
+                      </a:endParaRPr>
+                    </a:p>
+                  </a:txBody>
+                  <a:tcPr marL="91440" marR="91440" marT="45720" marB="45720">
+                    <a:lnL w="6350" cap="flat" cmpd="sng" algn="ctr">
+                      <a:solidFill>
+                        <a:srgbClr val="CBD5E1"/>
+                      </a:solidFill>
+                      <a:prstDash val="solid"/>
+                      <a:round/>
+                      <a:headEnd type="none" w="med" len="med"/>
+                      <a:tailEnd type="none" w="med" len="med"/>
+                    </a:lnL>
+                    <a:lnR w="6350" cap="flat" cmpd="sng" algn="ctr">
+                      <a:solidFill>
+                        <a:srgbClr val="CBD5E1"/>
+                      </a:solidFill>
+                      <a:prstDash val="solid"/>
+                      <a:round/>
+                      <a:headEnd type="none" w="med" len="med"/>
+                      <a:tailEnd type="none" w="med" len="med"/>
+                    </a:lnR>
+                    <a:lnT w="6350" cap="flat" cmpd="sng" algn="ctr">
+                      <a:solidFill>
+                        <a:srgbClr val="CBD5E1"/>
+                      </a:solidFill>
+                      <a:prstDash val="solid"/>
+                      <a:round/>
+                      <a:headEnd type="none" w="med" len="med"/>
+                      <a:tailEnd type="none" w="med" len="med"/>
+                    </a:lnT>
+                    <a:lnB w="6350" cap="flat" cmpd="sng" algn="ctr">
+                      <a:solidFill>
+                        <a:srgbClr val="CBD5E1"/>
+                      </a:solidFill>
+                      <a:prstDash val="solid"/>
+                      <a:round/>
+                      <a:headEnd type="none" w="med" len="med"/>
+                      <a:tailEnd type="none" w="med" len="med"/>
+                    </a:lnB>
+                    <a:solidFill>
+                      <a:srgbClr val="FFFFFF"/>
+                    </a:solidFill>
+                  </a:tcPr>
+                </a:tc>
+                <a:tc>
+                  <a:txBody>
+                    <a:bodyPr/>
+                    <a:lstStyle/>
+                    <a:p>
+                      <a:pPr algn="ctr" indent="0" marL="0">
+                        <a:buNone/>
+                      </a:pPr>
+                      <a:r>
+                        <a:rPr lang="en-US" sz="900" dirty="0">
+                          <a:solidFill>
+                            <a:srgbClr val="000000"/>
+                          </a:solidFill>
+                          <a:latin typeface="Arial" pitchFamily="34" charset="0"/>
+                          <a:ea typeface="Arial" pitchFamily="34" charset="-122"/>
+                          <a:cs typeface="Arial" pitchFamily="34" charset="-120"/>
+                        </a:rPr>
+                        <a:t>/10</a:t>
+                      </a:r>
+                      <a:endParaRPr lang="en-US" sz="900" dirty="0">
+                        <a:latin typeface="Arial" charset="0"/>
+                        <a:ea typeface="Arial" charset="0"/>
+                        <a:cs typeface="Arial" charset="0"/>
+                      </a:endParaRPr>
+                    </a:p>
+                  </a:txBody>
+                  <a:tcPr marL="91440" marR="91440" marT="45720" marB="45720">
+                    <a:lnL w="6350" cap="flat" cmpd="sng" algn="ctr">
+                      <a:solidFill>
+                        <a:srgbClr val="CBD5E1"/>
+                      </a:solidFill>
+                      <a:prstDash val="solid"/>
+                      <a:round/>
+                      <a:headEnd type="none" w="med" len="med"/>
+                      <a:tailEnd type="none" w="med" len="med"/>
+                    </a:lnL>
+                    <a:lnR w="6350" cap="flat" cmpd="sng" algn="ctr">
+                      <a:solidFill>
+                        <a:srgbClr val="CBD5E1"/>
+                      </a:solidFill>
+                      <a:prstDash val="solid"/>
+                      <a:round/>
+                      <a:headEnd type="none" w="med" len="med"/>
+                      <a:tailEnd type="none" w="med" len="med"/>
+                    </a:lnR>
+                    <a:lnT w="6350" cap="flat" cmpd="sng" algn="ctr">
+                      <a:solidFill>
+                        <a:srgbClr val="CBD5E1"/>
+                      </a:solidFill>
+                      <a:prstDash val="solid"/>
+                      <a:round/>
+                      <a:headEnd type="none" w="med" len="med"/>
+                      <a:tailEnd type="none" w="med" len="med"/>
+                    </a:lnT>
+                    <a:lnB w="6350" cap="flat" cmpd="sng" algn="ctr">
+                      <a:solidFill>
+                        <a:srgbClr val="CBD5E1"/>
+                      </a:solidFill>
+                      <a:prstDash val="solid"/>
+                      <a:round/>
+                      <a:headEnd type="none" w="med" len="med"/>
+                      <a:tailEnd type="none" w="med" len="med"/>
+                    </a:lnB>
+                    <a:solidFill>
+                      <a:srgbClr val="FFFFFF"/>
+                    </a:solidFill>
+                  </a:tcPr>
+                </a:tc>
+                <a:tc>
+                  <a:txBody>
+                    <a:bodyPr/>
+                    <a:lstStyle/>
+                    <a:p>
+                      <a:pPr algn="ctr" indent="0" marL="0">
+                        <a:buNone/>
+                      </a:pPr>
+                      <a:r>
+                        <a:rPr lang="en-US" sz="900" dirty="0">
+                          <a:solidFill>
+                            <a:srgbClr val="000000"/>
+                          </a:solidFill>
+                          <a:latin typeface="Arial" pitchFamily="34" charset="0"/>
+                          <a:ea typeface="Arial" pitchFamily="34" charset="-122"/>
+                          <a:cs typeface="Arial" pitchFamily="34" charset="-120"/>
+                        </a:rPr>
+                        <a:t>8.4</a:t>
+                      </a:r>
+                      <a:endParaRPr lang="en-US" sz="900" dirty="0">
+                        <a:latin typeface="Arial" charset="0"/>
+                        <a:ea typeface="Arial" charset="0"/>
+                        <a:cs typeface="Arial" charset="0"/>
+                      </a:endParaRPr>
+                    </a:p>
+                  </a:txBody>
+                  <a:tcPr marL="91440" marR="91440" marT="45720" marB="45720">
+                    <a:lnL w="6350" cap="flat" cmpd="sng" algn="ctr">
+                      <a:solidFill>
+                        <a:srgbClr val="CBD5E1"/>
+                      </a:solidFill>
+                      <a:prstDash val="solid"/>
+                      <a:round/>
+                      <a:headEnd type="none" w="med" len="med"/>
+                      <a:tailEnd type="none" w="med" len="med"/>
+                    </a:lnL>
+                    <a:lnR w="6350" cap="flat" cmpd="sng" algn="ctr">
+                      <a:solidFill>
+                        <a:srgbClr val="CBD5E1"/>
+                      </a:solidFill>
+                      <a:prstDash val="solid"/>
+                      <a:round/>
+                      <a:headEnd type="none" w="med" len="med"/>
+                      <a:tailEnd type="none" w="med" len="med"/>
+                    </a:lnR>
+                    <a:lnT w="6350" cap="flat" cmpd="sng" algn="ctr">
+                      <a:solidFill>
+                        <a:srgbClr val="CBD5E1"/>
+                      </a:solidFill>
+                      <a:prstDash val="solid"/>
+                      <a:round/>
+                      <a:headEnd type="none" w="med" len="med"/>
+                      <a:tailEnd type="none" w="med" len="med"/>
+                    </a:lnT>
+                    <a:lnB w="6350" cap="flat" cmpd="sng" algn="ctr">
+                      <a:solidFill>
+                        <a:srgbClr val="CBD5E1"/>
+                      </a:solidFill>
+                      <a:prstDash val="solid"/>
+                      <a:round/>
+                      <a:headEnd type="none" w="med" len="med"/>
+                      <a:tailEnd type="none" w="med" len="med"/>
+                    </a:lnB>
+                    <a:solidFill>
+                      <a:srgbClr val="FFFFFF"/>
                     </a:solidFill>
                   </a:tcPr>
                 </a:tc>
@@ -8865,7 +9224,7 @@
                       <a:tailEnd type="none" w="med" len="med"/>
                     </a:lnB>
                     <a:solidFill>
-                      <a:srgbClr val="FFFFFF"/>
+                      <a:srgbClr val="E8EFF8"/>
                     </a:solidFill>
                   </a:tcPr>
                 </a:tc>
@@ -8886,7 +9245,7 @@
                           <a:ea typeface="Arial" pitchFamily="34" charset="-122"/>
                           <a:cs typeface="Arial" pitchFamily="34" charset="-120"/>
                         </a:rPr>
-                        <a:t>29</a:t>
+                        <a:t>18</a:t>
                       </a:r>
                       <a:endParaRPr lang="en-US" sz="900" dirty="0">
                         <a:latin typeface="Arial" charset="0"/>
@@ -8933,7 +9292,7 @@
                       <a:tailEnd type="none" w="med" len="med"/>
                     </a:lnB>
                     <a:solidFill>
-                      <a:srgbClr val="FFFFFF"/>
+                      <a:srgbClr val="E8EFF8"/>
                     </a:solidFill>
                   </a:tcPr>
                 </a:tc>
@@ -8954,7 +9313,7 @@
                           <a:ea typeface="Arial" pitchFamily="34" charset="-122"/>
                           <a:cs typeface="Arial" pitchFamily="34" charset="-120"/>
                         </a:rPr>
-                        <a:t>4.21</a:t>
+                        <a:t>4.06</a:t>
                       </a:r>
                       <a:endParaRPr lang="en-US" sz="900" dirty="0">
                         <a:latin typeface="Arial" charset="0"/>
@@ -9001,7 +9360,7 @@
                       <a:tailEnd type="none" w="med" len="med"/>
                     </a:lnB>
                     <a:solidFill>
-                      <a:srgbClr val="FFFFFF"/>
+                      <a:srgbClr val="E8EFF8"/>
                     </a:solidFill>
                   </a:tcPr>
                 </a:tc>
@@ -9069,144 +9428,6 @@
                       <a:tailEnd type="none" w="med" len="med"/>
                     </a:lnB>
                     <a:solidFill>
-                      <a:srgbClr val="FFFFFF"/>
-                    </a:solidFill>
-                  </a:tcPr>
-                </a:tc>
-                <a:tc>
-                  <a:txBody>
-                    <a:bodyPr/>
-                    <a:lstStyle/>
-                    <a:p>
-                      <a:pPr algn="ctr" indent="0" marL="0">
-                        <a:buNone/>
-                      </a:pPr>
-                      <a:r>
-                        <a:rPr lang="en-US" sz="900" dirty="0">
-                          <a:solidFill>
-                            <a:srgbClr val="000000"/>
-                          </a:solidFill>
-                          <a:latin typeface="Arial" pitchFamily="34" charset="0"/>
-                          <a:ea typeface="Arial" pitchFamily="34" charset="-122"/>
-                          <a:cs typeface="Arial" pitchFamily="34" charset="-120"/>
-                        </a:rPr>
-                        <a:t>8.41</a:t>
-                      </a:r>
-                      <a:endParaRPr lang="en-US" sz="900" dirty="0">
-                        <a:latin typeface="Arial" charset="0"/>
-                        <a:ea typeface="Arial" charset="0"/>
-                        <a:cs typeface="Arial" charset="0"/>
-                      </a:endParaRPr>
-                    </a:p>
-                  </a:txBody>
-                  <a:tcPr marL="91440" marR="91440" marT="45720" marB="45720">
-                    <a:lnL w="6350" cap="flat" cmpd="sng" algn="ctr">
-                      <a:solidFill>
-                        <a:srgbClr val="CBD5E1"/>
-                      </a:solidFill>
-                      <a:prstDash val="solid"/>
-                      <a:round/>
-                      <a:headEnd type="none" w="med" len="med"/>
-                      <a:tailEnd type="none" w="med" len="med"/>
-                    </a:lnL>
-                    <a:lnR w="6350" cap="flat" cmpd="sng" algn="ctr">
-                      <a:solidFill>
-                        <a:srgbClr val="CBD5E1"/>
-                      </a:solidFill>
-                      <a:prstDash val="solid"/>
-                      <a:round/>
-                      <a:headEnd type="none" w="med" len="med"/>
-                      <a:tailEnd type="none" w="med" len="med"/>
-                    </a:lnR>
-                    <a:lnT w="6350" cap="flat" cmpd="sng" algn="ctr">
-                      <a:solidFill>
-                        <a:srgbClr val="CBD5E1"/>
-                      </a:solidFill>
-                      <a:prstDash val="solid"/>
-                      <a:round/>
-                      <a:headEnd type="none" w="med" len="med"/>
-                      <a:tailEnd type="none" w="med" len="med"/>
-                    </a:lnT>
-                    <a:lnB w="6350" cap="flat" cmpd="sng" algn="ctr">
-                      <a:solidFill>
-                        <a:srgbClr val="CBD5E1"/>
-                      </a:solidFill>
-                      <a:prstDash val="solid"/>
-                      <a:round/>
-                      <a:headEnd type="none" w="med" len="med"/>
-                      <a:tailEnd type="none" w="med" len="med"/>
-                    </a:lnB>
-                    <a:solidFill>
-                      <a:srgbClr val="FFFFFF"/>
-                    </a:solidFill>
-                  </a:tcPr>
-                </a:tc>
-              </a:tr>
-              <a:tr h="201168">
-                <a:tc>
-                  <a:txBody>
-                    <a:bodyPr/>
-                    <a:lstStyle/>
-                    <a:p>
-                      <a:pPr algn="ctr" indent="0" marL="0">
-                        <a:buNone/>
-                      </a:pPr>
-                      <a:r>
-                        <a:rPr lang="en-US" sz="900" dirty="0">
-                          <a:solidFill>
-                            <a:srgbClr val="000000"/>
-                          </a:solidFill>
-                          <a:latin typeface="Arial" pitchFamily="34" charset="0"/>
-                          <a:ea typeface="Arial" pitchFamily="34" charset="-122"/>
-                          <a:cs typeface="Arial" pitchFamily="34" charset="-120"/>
-                        </a:rPr>
-                        <a:t>Agoda</a:t>
-                      </a:r>
-                      <a:endParaRPr lang="en-US" sz="900" dirty="0">
-                        <a:latin typeface="Arial" charset="0"/>
-                        <a:ea typeface="Arial" charset="0"/>
-                        <a:cs typeface="Arial" charset="0"/>
-                      </a:endParaRPr>
-                    </a:p>
-                  </a:txBody>
-                  <a:tcPr marL="91440" marR="91440" marT="45720" marB="45720">
-                    <a:lnL w="6350" cap="flat" cmpd="sng" algn="ctr">
-                      <a:solidFill>
-                        <a:srgbClr val="CBD5E1"/>
-                      </a:solidFill>
-                      <a:prstDash val="solid"/>
-                      <a:round/>
-                      <a:headEnd type="none" w="med" len="med"/>
-                      <a:tailEnd type="none" w="med" len="med"/>
-                    </a:lnL>
-                    <a:lnR w="6350" cap="flat" cmpd="sng" algn="ctr">
-                      <a:solidFill>
-                        <a:srgbClr val="CBD5E1"/>
-                      </a:solidFill>
-                      <a:prstDash val="solid"/>
-                      <a:round/>
-                      <a:headEnd type="none" w="med" len="med"/>
-                      <a:tailEnd type="none" w="med" len="med"/>
-                    </a:lnR>
-                    <a:lnT w="6350" cap="flat" cmpd="sng" algn="ctr">
-                      <a:solidFill>
-                        <a:srgbClr val="CBD5E1"/>
-                      </a:solidFill>
-                      <a:prstDash val="solid"/>
-                      <a:round/>
-                      <a:headEnd type="none" w="med" len="med"/>
-                      <a:tailEnd type="none" w="med" len="med"/>
-                    </a:lnT>
-                    <a:lnB w="6350" cap="flat" cmpd="sng" algn="ctr">
-                      <a:solidFill>
-                        <a:srgbClr val="CBD5E1"/>
-                      </a:solidFill>
-                      <a:prstDash val="solid"/>
-                      <a:round/>
-                      <a:headEnd type="none" w="med" len="med"/>
-                      <a:tailEnd type="none" w="med" len="med"/>
-                    </a:lnB>
-                    <a:solidFill>
                       <a:srgbClr val="E8EFF8"/>
                     </a:solidFill>
                   </a:tcPr>
@@ -9228,211 +9449,7 @@
                           <a:ea typeface="Arial" pitchFamily="34" charset="-122"/>
                           <a:cs typeface="Arial" pitchFamily="34" charset="-120"/>
                         </a:rPr>
-                        <a:t>12</a:t>
-                      </a:r>
-                      <a:endParaRPr lang="en-US" sz="900" dirty="0">
-                        <a:latin typeface="Arial" charset="0"/>
-                        <a:ea typeface="Arial" charset="0"/>
-                        <a:cs typeface="Arial" charset="0"/>
-                      </a:endParaRPr>
-                    </a:p>
-                  </a:txBody>
-                  <a:tcPr marL="91440" marR="91440" marT="45720" marB="45720">
-                    <a:lnL w="6350" cap="flat" cmpd="sng" algn="ctr">
-                      <a:solidFill>
-                        <a:srgbClr val="CBD5E1"/>
-                      </a:solidFill>
-                      <a:prstDash val="solid"/>
-                      <a:round/>
-                      <a:headEnd type="none" w="med" len="med"/>
-                      <a:tailEnd type="none" w="med" len="med"/>
-                    </a:lnL>
-                    <a:lnR w="6350" cap="flat" cmpd="sng" algn="ctr">
-                      <a:solidFill>
-                        <a:srgbClr val="CBD5E1"/>
-                      </a:solidFill>
-                      <a:prstDash val="solid"/>
-                      <a:round/>
-                      <a:headEnd type="none" w="med" len="med"/>
-                      <a:tailEnd type="none" w="med" len="med"/>
-                    </a:lnR>
-                    <a:lnT w="6350" cap="flat" cmpd="sng" algn="ctr">
-                      <a:solidFill>
-                        <a:srgbClr val="CBD5E1"/>
-                      </a:solidFill>
-                      <a:prstDash val="solid"/>
-                      <a:round/>
-                      <a:headEnd type="none" w="med" len="med"/>
-                      <a:tailEnd type="none" w="med" len="med"/>
-                    </a:lnT>
-                    <a:lnB w="6350" cap="flat" cmpd="sng" algn="ctr">
-                      <a:solidFill>
-                        <a:srgbClr val="CBD5E1"/>
-                      </a:solidFill>
-                      <a:prstDash val="solid"/>
-                      <a:round/>
-                      <a:headEnd type="none" w="med" len="med"/>
-                      <a:tailEnd type="none" w="med" len="med"/>
-                    </a:lnB>
-                    <a:solidFill>
-                      <a:srgbClr val="E8EFF8"/>
-                    </a:solidFill>
-                  </a:tcPr>
-                </a:tc>
-                <a:tc>
-                  <a:txBody>
-                    <a:bodyPr/>
-                    <a:lstStyle/>
-                    <a:p>
-                      <a:pPr algn="ctr" indent="0" marL="0">
-                        <a:buNone/>
-                      </a:pPr>
-                      <a:r>
-                        <a:rPr lang="en-US" sz="900" dirty="0">
-                          <a:solidFill>
-                            <a:srgbClr val="000000"/>
-                          </a:solidFill>
-                          <a:latin typeface="Arial" pitchFamily="34" charset="0"/>
-                          <a:ea typeface="Arial" pitchFamily="34" charset="-122"/>
-                          <a:cs typeface="Arial" pitchFamily="34" charset="-120"/>
-                        </a:rPr>
-                        <a:t>8.25</a:t>
-                      </a:r>
-                      <a:endParaRPr lang="en-US" sz="900" dirty="0">
-                        <a:latin typeface="Arial" charset="0"/>
-                        <a:ea typeface="Arial" charset="0"/>
-                        <a:cs typeface="Arial" charset="0"/>
-                      </a:endParaRPr>
-                    </a:p>
-                  </a:txBody>
-                  <a:tcPr marL="91440" marR="91440" marT="45720" marB="45720">
-                    <a:lnL w="6350" cap="flat" cmpd="sng" algn="ctr">
-                      <a:solidFill>
-                        <a:srgbClr val="CBD5E1"/>
-                      </a:solidFill>
-                      <a:prstDash val="solid"/>
-                      <a:round/>
-                      <a:headEnd type="none" w="med" len="med"/>
-                      <a:tailEnd type="none" w="med" len="med"/>
-                    </a:lnL>
-                    <a:lnR w="6350" cap="flat" cmpd="sng" algn="ctr">
-                      <a:solidFill>
-                        <a:srgbClr val="CBD5E1"/>
-                      </a:solidFill>
-                      <a:prstDash val="solid"/>
-                      <a:round/>
-                      <a:headEnd type="none" w="med" len="med"/>
-                      <a:tailEnd type="none" w="med" len="med"/>
-                    </a:lnR>
-                    <a:lnT w="6350" cap="flat" cmpd="sng" algn="ctr">
-                      <a:solidFill>
-                        <a:srgbClr val="CBD5E1"/>
-                      </a:solidFill>
-                      <a:prstDash val="solid"/>
-                      <a:round/>
-                      <a:headEnd type="none" w="med" len="med"/>
-                      <a:tailEnd type="none" w="med" len="med"/>
-                    </a:lnT>
-                    <a:lnB w="6350" cap="flat" cmpd="sng" algn="ctr">
-                      <a:solidFill>
-                        <a:srgbClr val="CBD5E1"/>
-                      </a:solidFill>
-                      <a:prstDash val="solid"/>
-                      <a:round/>
-                      <a:headEnd type="none" w="med" len="med"/>
-                      <a:tailEnd type="none" w="med" len="med"/>
-                    </a:lnB>
-                    <a:solidFill>
-                      <a:srgbClr val="E8EFF8"/>
-                    </a:solidFill>
-                  </a:tcPr>
-                </a:tc>
-                <a:tc>
-                  <a:txBody>
-                    <a:bodyPr/>
-                    <a:lstStyle/>
-                    <a:p>
-                      <a:pPr algn="ctr" indent="0" marL="0">
-                        <a:buNone/>
-                      </a:pPr>
-                      <a:r>
-                        <a:rPr lang="en-US" sz="900" dirty="0">
-                          <a:solidFill>
-                            <a:srgbClr val="000000"/>
-                          </a:solidFill>
-                          <a:latin typeface="Arial" pitchFamily="34" charset="0"/>
-                          <a:ea typeface="Arial" pitchFamily="34" charset="-122"/>
-                          <a:cs typeface="Arial" pitchFamily="34" charset="-120"/>
-                        </a:rPr>
-                        <a:t>/10</a:t>
-                      </a:r>
-                      <a:endParaRPr lang="en-US" sz="900" dirty="0">
-                        <a:latin typeface="Arial" charset="0"/>
-                        <a:ea typeface="Arial" charset="0"/>
-                        <a:cs typeface="Arial" charset="0"/>
-                      </a:endParaRPr>
-                    </a:p>
-                  </a:txBody>
-                  <a:tcPr marL="91440" marR="91440" marT="45720" marB="45720">
-                    <a:lnL w="6350" cap="flat" cmpd="sng" algn="ctr">
-                      <a:solidFill>
-                        <a:srgbClr val="CBD5E1"/>
-                      </a:solidFill>
-                      <a:prstDash val="solid"/>
-                      <a:round/>
-                      <a:headEnd type="none" w="med" len="med"/>
-                      <a:tailEnd type="none" w="med" len="med"/>
-                    </a:lnL>
-                    <a:lnR w="6350" cap="flat" cmpd="sng" algn="ctr">
-                      <a:solidFill>
-                        <a:srgbClr val="CBD5E1"/>
-                      </a:solidFill>
-                      <a:prstDash val="solid"/>
-                      <a:round/>
-                      <a:headEnd type="none" w="med" len="med"/>
-                      <a:tailEnd type="none" w="med" len="med"/>
-                    </a:lnR>
-                    <a:lnT w="6350" cap="flat" cmpd="sng" algn="ctr">
-                      <a:solidFill>
-                        <a:srgbClr val="CBD5E1"/>
-                      </a:solidFill>
-                      <a:prstDash val="solid"/>
-                      <a:round/>
-                      <a:headEnd type="none" w="med" len="med"/>
-                      <a:tailEnd type="none" w="med" len="med"/>
-                    </a:lnT>
-                    <a:lnB w="6350" cap="flat" cmpd="sng" algn="ctr">
-                      <a:solidFill>
-                        <a:srgbClr val="CBD5E1"/>
-                      </a:solidFill>
-                      <a:prstDash val="solid"/>
-                      <a:round/>
-                      <a:headEnd type="none" w="med" len="med"/>
-                      <a:tailEnd type="none" w="med" len="med"/>
-                    </a:lnB>
-                    <a:solidFill>
-                      <a:srgbClr val="E8EFF8"/>
-                    </a:solidFill>
-                  </a:tcPr>
-                </a:tc>
-                <a:tc>
-                  <a:txBody>
-                    <a:bodyPr/>
-                    <a:lstStyle/>
-                    <a:p>
-                      <a:pPr algn="ctr" indent="0" marL="0">
-                        <a:buNone/>
-                      </a:pPr>
-                      <a:r>
-                        <a:rPr lang="en-US" sz="900" dirty="0">
-                          <a:solidFill>
-                            <a:srgbClr val="000000"/>
-                          </a:solidFill>
-                          <a:latin typeface="Arial" pitchFamily="34" charset="0"/>
-                          <a:ea typeface="Arial" pitchFamily="34" charset="-122"/>
-                          <a:cs typeface="Arial" pitchFamily="34" charset="-120"/>
-                        </a:rPr>
-                        <a:t>8.25</a:t>
+                        <a:t>8.11</a:t>
                       </a:r>
                       <a:endParaRPr lang="en-US" sz="900" dirty="0">
                         <a:latin typeface="Arial" charset="0"/>
@@ -9570,7 +9587,7 @@
                           <a:ea typeface="Arial" pitchFamily="34" charset="-122"/>
                           <a:cs typeface="Arial" pitchFamily="34" charset="-120"/>
                         </a:rPr>
-                        <a:t>11</a:t>
+                        <a:t>8</a:t>
                       </a:r>
                       <a:endParaRPr lang="en-US" sz="900" dirty="0">
                         <a:latin typeface="Arial" charset="0"/>
@@ -9638,7 +9655,7 @@
                           <a:ea typeface="Arial" pitchFamily="34" charset="-122"/>
                           <a:cs typeface="Arial" pitchFamily="34" charset="-120"/>
                         </a:rPr>
-                        <a:t>3.45</a:t>
+                        <a:t>3.62</a:t>
                       </a:r>
                       <a:endParaRPr lang="en-US" sz="900" dirty="0">
                         <a:latin typeface="Arial" charset="0"/>
@@ -9774,7 +9791,7 @@
                           <a:ea typeface="Arial" pitchFamily="34" charset="-122"/>
                           <a:cs typeface="Arial" pitchFamily="34" charset="-120"/>
                         </a:rPr>
-                        <a:t>6.91</a:t>
+                        <a:t>7.25</a:t>
                       </a:r>
                       <a:endParaRPr lang="en-US" sz="900" dirty="0">
                         <a:latin typeface="Arial" charset="0"/>
@@ -10182,7 +10199,7 @@
                 <a:ea typeface="Arial" pitchFamily="34" charset="-122"/>
                 <a:cs typeface="Arial" pitchFamily="34" charset="-120"/>
               </a:rPr>
-              <a:t>112件（81.8%）</a:t>
+              <a:t>69件（82.1%）</a:t>
             </a:r>
             <a:endParaRPr lang="en-US" sz="1100" dirty="0"/>
           </a:p>
@@ -10280,7 +10297,7 @@
                 <a:ea typeface="Arial" pitchFamily="34" charset="-122"/>
                 <a:cs typeface="Arial" pitchFamily="34" charset="-120"/>
               </a:rPr>
-              <a:t>23件（16.8%）</a:t>
+              <a:t>13件（15.5%）</a:t>
             </a:r>
             <a:endParaRPr lang="en-US" sz="1100" dirty="0"/>
           </a:p>
@@ -10378,7 +10395,7 @@
                 <a:ea typeface="Arial" pitchFamily="34" charset="-122"/>
                 <a:cs typeface="Arial" pitchFamily="34" charset="-120"/>
               </a:rPr>
-              <a:t>2件（1.5%）</a:t>
+              <a:t>2件（2.4%）</a:t>
             </a:r>
             <a:endParaRPr lang="en-US" sz="1100" dirty="0"/>
           </a:p>
@@ -10712,7 +10729,7 @@
                 <a:ea typeface="Arial" pitchFamily="34" charset="-122"/>
                 <a:cs typeface="Arial" pitchFamily="34" charset="-120"/>
               </a:rPr>
-              <a:t>50件+</a:t>
+              <a:t>20件+</a:t>
             </a:r>
             <a:endParaRPr lang="en-US" sz="900" dirty="0"/>
           </a:p>
@@ -10790,7 +10807,7 @@
                 <a:ea typeface="Arial" pitchFamily="34" charset="-122"/>
                 <a:cs typeface="Arial" pitchFamily="34" charset="-120"/>
               </a:rPr>
-              <a:t>朝食が美味しく　駅が近い    対応が　気持ちよく　親切</a:t>
+              <a:t>駅から激近の立地で満足です</a:t>
             </a:r>
             <a:endParaRPr lang="en-US" sz="900" dirty="0"/>
           </a:p>
@@ -10829,7 +10846,7 @@
                 <a:ea typeface="Arial" pitchFamily="34" charset="-122"/>
                 <a:cs typeface="Arial" pitchFamily="34" charset="-120"/>
               </a:rPr>
-              <a:t>「こちらの確認不足で仕方ないことなのですが喫煙室を予約してしまっていました 空気清浄機もお借りして過ごしましたが 残...」</a:t>
+              <a:t>「駅近のきれいなホテルです」</a:t>
             </a:r>
             <a:endParaRPr lang="en-US" sz="900" dirty="0"/>
           </a:p>
@@ -11013,7 +11030,7 @@
                 <a:ea typeface="Arial" pitchFamily="34" charset="-122"/>
                 <a:cs typeface="Arial" pitchFamily="34" charset="-120"/>
               </a:rPr>
-              <a:t>とても清潔感がありました 最寄り駅からすぐで、目の前にショッピングモールがあるのでとても便利でした 特にありません...</a:t>
+              <a:t>駅近のきれいなホテルです</a:t>
             </a:r>
             <a:endParaRPr lang="en-US" sz="900" dirty="0"/>
           </a:p>
@@ -11052,7 +11069,7 @@
                 <a:ea typeface="Arial" pitchFamily="34" charset="-122"/>
                 <a:cs typeface="Arial" pitchFamily="34" charset="-120"/>
               </a:rPr>
-              <a:t>「清潔感があり、周辺も静かです」</a:t>
+              <a:t>「部屋も洗面浴室もキレイでした」</a:t>
             </a:r>
             <a:endParaRPr lang="en-US" sz="900" dirty="0"/>
           </a:p>
@@ -11158,7 +11175,7 @@
                 <a:ea typeface="Arial" pitchFamily="34" charset="-122"/>
                 <a:cs typeface="Arial" pitchFamily="34" charset="-120"/>
               </a:rPr>
-              <a:t>20件+</a:t>
+              <a:t>10件+</a:t>
             </a:r>
             <a:endParaRPr lang="en-US" sz="900" dirty="0"/>
           </a:p>
@@ -11173,6 +11190,452 @@
         <p:spPr>
           <a:xfrm>
             <a:off x="6263640" y="1124712"/>
+            <a:ext cx="1645920" cy="274320"/>
+          </a:xfrm>
+          <a:prstGeom prst="rect">
+            <a:avLst/>
+          </a:prstGeom>
+          <a:noFill/>
+          <a:ln/>
+        </p:spPr>
+        <p:txBody>
+          <a:bodyPr wrap="square" lIns="0" tIns="0" rIns="0" bIns="0" rtlCol="0" anchor="ctr"/>
+          <a:lstStyle/>
+          <a:p>
+            <a:pPr indent="0" marL="0">
+              <a:buNone/>
+            </a:pPr>
+            <a:r>
+              <a:rPr lang="en-US" sz="1300" b="1" dirty="0">
+                <a:solidFill>
+                  <a:srgbClr val="1A2744"/>
+                </a:solidFill>
+                <a:latin typeface="Arial" pitchFamily="34" charset="0"/>
+                <a:ea typeface="Arial" pitchFamily="34" charset="-122"/>
+                <a:cs typeface="Arial" pitchFamily="34" charset="-120"/>
+              </a:rPr>
+              <a:t>スタッフの対応</a:t>
+            </a:r>
+            <a:endParaRPr lang="en-US" sz="1300" dirty="0"/>
+          </a:p>
+        </p:txBody>
+      </p:sp>
+      <p:sp>
+        <p:nvSpPr>
+          <p:cNvPr id="24" name="Text 22"/>
+          <p:cNvSpPr/>
+          <p:nvPr/>
+        </p:nvSpPr>
+        <p:spPr>
+          <a:xfrm>
+            <a:off x="6263640" y="1417320"/>
+            <a:ext cx="2377440" cy="365760"/>
+          </a:xfrm>
+          <a:prstGeom prst="rect">
+            <a:avLst/>
+          </a:prstGeom>
+          <a:noFill/>
+          <a:ln/>
+        </p:spPr>
+        <p:txBody>
+          <a:bodyPr wrap="square" lIns="0" tIns="0" rIns="0" bIns="0" rtlCol="0" anchor="ctr"/>
+          <a:lstStyle/>
+          <a:p>
+            <a:pPr indent="0" marL="0">
+              <a:buNone/>
+            </a:pPr>
+            <a:r>
+              <a:rPr lang="en-US" sz="900" dirty="0">
+                <a:solidFill>
+                  <a:srgbClr val="64748B"/>
+                </a:solidFill>
+                <a:latin typeface="Arial" pitchFamily="34" charset="0"/>
+                <a:ea typeface="Arial" pitchFamily="34" charset="-122"/>
+                <a:cs typeface="Arial" pitchFamily="34" charset="-120"/>
+              </a:rPr>
+              <a:t>環境清潔安靜，服務人員非常親切 環境は清潔で静かで、スタッフの方々もとても親切でした</a:t>
+            </a:r>
+            <a:endParaRPr lang="en-US" sz="900" dirty="0"/>
+          </a:p>
+        </p:txBody>
+      </p:sp>
+      <p:sp>
+        <p:nvSpPr>
+          <p:cNvPr id="25" name="Text 23"/>
+          <p:cNvSpPr/>
+          <p:nvPr/>
+        </p:nvSpPr>
+        <p:spPr>
+          <a:xfrm>
+            <a:off x="6263640" y="1828800"/>
+            <a:ext cx="2377440" cy="640080"/>
+          </a:xfrm>
+          <a:prstGeom prst="rect">
+            <a:avLst/>
+          </a:prstGeom>
+          <a:noFill/>
+          <a:ln/>
+        </p:spPr>
+        <p:txBody>
+          <a:bodyPr wrap="square" lIns="0" tIns="0" rIns="0" bIns="0" rtlCol="0" anchor="ctr"/>
+          <a:lstStyle/>
+          <a:p>
+            <a:pPr indent="0" marL="0">
+              <a:buNone/>
+            </a:pPr>
+            <a:r>
+              <a:rPr lang="en-US" sz="900" i="1" dirty="0">
+                <a:solidFill>
+                  <a:srgbClr val="3B7DD8"/>
+                </a:solidFill>
+                <a:latin typeface="Arial" pitchFamily="34" charset="0"/>
+                <a:ea typeface="Arial" pitchFamily="34" charset="-122"/>
+                <a:cs typeface="Arial" pitchFamily="34" charset="-120"/>
+              </a:rPr>
+              <a:t>「朝食が美味しく　駅が近い    対応が　気持ちよく　親切」</a:t>
+            </a:r>
+            <a:endParaRPr lang="en-US" sz="900" dirty="0"/>
+          </a:p>
+        </p:txBody>
+      </p:sp>
+      <p:sp>
+        <p:nvSpPr>
+          <p:cNvPr id="26" name="Shape 24"/>
+          <p:cNvSpPr/>
+          <p:nvPr/>
+        </p:nvSpPr>
+        <p:spPr>
+          <a:xfrm>
+            <a:off x="457200" y="2880360"/>
+            <a:ext cx="2651760" cy="1600200"/>
+          </a:xfrm>
+          <a:prstGeom prst="rect">
+            <a:avLst/>
+          </a:prstGeom>
+          <a:solidFill>
+            <a:srgbClr val="FFFFFF"/>
+          </a:solidFill>
+          <a:ln/>
+          <a:effectLst>
+            <a:outerShdw sx="100000" sy="100000" kx="0" ky="0" algn="bl" rotWithShape="0" blurRad="50800" dist="25400" dir="8100000">
+              <a:srgbClr val="000000">
+                <a:alpha val="10000"/>
+              </a:srgbClr>
+            </a:outerShdw>
+          </a:effectLst>
+        </p:spPr>
+      </p:sp>
+      <p:sp>
+        <p:nvSpPr>
+          <p:cNvPr id="27" name="Shape 25"/>
+          <p:cNvSpPr/>
+          <p:nvPr/>
+        </p:nvSpPr>
+        <p:spPr>
+          <a:xfrm>
+            <a:off x="457200" y="2880360"/>
+            <a:ext cx="54864" cy="1600200"/>
+          </a:xfrm>
+          <a:prstGeom prst="rect">
+            <a:avLst/>
+          </a:prstGeom>
+          <a:solidFill>
+            <a:srgbClr val="16A34A"/>
+          </a:solidFill>
+          <a:ln/>
+        </p:spPr>
+      </p:sp>
+      <p:sp>
+        <p:nvSpPr>
+          <p:cNvPr id="28" name="Shape 26"/>
+          <p:cNvSpPr/>
+          <p:nvPr/>
+        </p:nvSpPr>
+        <p:spPr>
+          <a:xfrm>
+            <a:off x="2286000" y="2953512"/>
+            <a:ext cx="658368" cy="228600"/>
+          </a:xfrm>
+          <a:prstGeom prst="rect">
+            <a:avLst/>
+          </a:prstGeom>
+          <a:solidFill>
+            <a:srgbClr val="DCFCE7"/>
+          </a:solidFill>
+          <a:ln/>
+        </p:spPr>
+      </p:sp>
+      <p:sp>
+        <p:nvSpPr>
+          <p:cNvPr id="29" name="Text 27"/>
+          <p:cNvSpPr/>
+          <p:nvPr/>
+        </p:nvSpPr>
+        <p:spPr>
+          <a:xfrm>
+            <a:off x="2286000" y="2953512"/>
+            <a:ext cx="658368" cy="228600"/>
+          </a:xfrm>
+          <a:prstGeom prst="rect">
+            <a:avLst/>
+          </a:prstGeom>
+          <a:noFill/>
+          <a:ln/>
+        </p:spPr>
+        <p:txBody>
+          <a:bodyPr wrap="square" lIns="0" tIns="0" rIns="0" bIns="0" rtlCol="0" anchor="ctr"/>
+          <a:lstStyle/>
+          <a:p>
+            <a:pPr algn="ctr" indent="0" marL="0">
+              <a:buNone/>
+            </a:pPr>
+            <a:r>
+              <a:rPr lang="en-US" sz="900" b="1" dirty="0">
+                <a:solidFill>
+                  <a:srgbClr val="16A34A"/>
+                </a:solidFill>
+                <a:latin typeface="Arial" pitchFamily="34" charset="0"/>
+                <a:ea typeface="Arial" pitchFamily="34" charset="-122"/>
+                <a:cs typeface="Arial" pitchFamily="34" charset="-120"/>
+              </a:rPr>
+              <a:t>10件+</a:t>
+            </a:r>
+            <a:endParaRPr lang="en-US" sz="900" dirty="0"/>
+          </a:p>
+        </p:txBody>
+      </p:sp>
+      <p:sp>
+        <p:nvSpPr>
+          <p:cNvPr id="30" name="Text 28"/>
+          <p:cNvSpPr/>
+          <p:nvPr/>
+        </p:nvSpPr>
+        <p:spPr>
+          <a:xfrm>
+            <a:off x="594360" y="2953512"/>
+            <a:ext cx="1645920" cy="274320"/>
+          </a:xfrm>
+          <a:prstGeom prst="rect">
+            <a:avLst/>
+          </a:prstGeom>
+          <a:noFill/>
+          <a:ln/>
+        </p:spPr>
+        <p:txBody>
+          <a:bodyPr wrap="square" lIns="0" tIns="0" rIns="0" bIns="0" rtlCol="0" anchor="ctr"/>
+          <a:lstStyle/>
+          <a:p>
+            <a:pPr indent="0" marL="0">
+              <a:buNone/>
+            </a:pPr>
+            <a:r>
+              <a:rPr lang="en-US" sz="1300" b="1" dirty="0">
+                <a:solidFill>
+                  <a:srgbClr val="1A2744"/>
+                </a:solidFill>
+                <a:latin typeface="Arial" pitchFamily="34" charset="0"/>
+                <a:ea typeface="Arial" pitchFamily="34" charset="-122"/>
+                <a:cs typeface="Arial" pitchFamily="34" charset="-120"/>
+              </a:rPr>
+              <a:t>快適さ・設備</a:t>
+            </a:r>
+            <a:endParaRPr lang="en-US" sz="1300" dirty="0"/>
+          </a:p>
+        </p:txBody>
+      </p:sp>
+      <p:sp>
+        <p:nvSpPr>
+          <p:cNvPr id="31" name="Text 29"/>
+          <p:cNvSpPr/>
+          <p:nvPr/>
+        </p:nvSpPr>
+        <p:spPr>
+          <a:xfrm>
+            <a:off x="594360" y="3246120"/>
+            <a:ext cx="2377440" cy="365760"/>
+          </a:xfrm>
+          <a:prstGeom prst="rect">
+            <a:avLst/>
+          </a:prstGeom>
+          <a:noFill/>
+          <a:ln/>
+        </p:spPr>
+        <p:txBody>
+          <a:bodyPr wrap="square" lIns="0" tIns="0" rIns="0" bIns="0" rtlCol="0" anchor="ctr"/>
+          <a:lstStyle/>
+          <a:p>
+            <a:pPr indent="0" marL="0">
+              <a:buNone/>
+            </a:pPr>
+            <a:r>
+              <a:rPr lang="en-US" sz="900" dirty="0">
+                <a:solidFill>
+                  <a:srgbClr val="64748B"/>
+                </a:solidFill>
+                <a:latin typeface="Arial" pitchFamily="34" charset="0"/>
+                <a:ea typeface="Arial" pitchFamily="34" charset="-122"/>
+                <a:cs typeface="Arial" pitchFamily="34" charset="-120"/>
+              </a:rPr>
+              <a:t>部屋の広さはちょうど良かった 設備をちゃんとして欲しい 設備をちゃんとして欲しい</a:t>
+            </a:r>
+            <a:endParaRPr lang="en-US" sz="900" dirty="0"/>
+          </a:p>
+        </p:txBody>
+      </p:sp>
+      <p:sp>
+        <p:nvSpPr>
+          <p:cNvPr id="32" name="Text 30"/>
+          <p:cNvSpPr/>
+          <p:nvPr/>
+        </p:nvSpPr>
+        <p:spPr>
+          <a:xfrm>
+            <a:off x="594360" y="3657600"/>
+            <a:ext cx="2377440" cy="640080"/>
+          </a:xfrm>
+          <a:prstGeom prst="rect">
+            <a:avLst/>
+          </a:prstGeom>
+          <a:noFill/>
+          <a:ln/>
+        </p:spPr>
+        <p:txBody>
+          <a:bodyPr wrap="square" lIns="0" tIns="0" rIns="0" bIns="0" rtlCol="0" anchor="ctr"/>
+          <a:lstStyle/>
+          <a:p>
+            <a:pPr indent="0" marL="0">
+              <a:buNone/>
+            </a:pPr>
+            <a:r>
+              <a:rPr lang="en-US" sz="900" i="1" dirty="0">
+                <a:solidFill>
+                  <a:srgbClr val="3B7DD8"/>
+                </a:solidFill>
+                <a:latin typeface="Arial" pitchFamily="34" charset="0"/>
+                <a:ea typeface="Arial" pitchFamily="34" charset="-122"/>
+                <a:cs typeface="Arial" pitchFamily="34" charset="-120"/>
+              </a:rPr>
+              <a:t>「お風呂のお湯が蛇口で調節なのがちょっと面倒ですが十分快適に泊まれました 朝食も美味しかったです」</a:t>
+            </a:r>
+            <a:endParaRPr lang="en-US" sz="900" dirty="0"/>
+          </a:p>
+        </p:txBody>
+      </p:sp>
+      <p:sp>
+        <p:nvSpPr>
+          <p:cNvPr id="33" name="Shape 31"/>
+          <p:cNvSpPr/>
+          <p:nvPr/>
+        </p:nvSpPr>
+        <p:spPr>
+          <a:xfrm>
+            <a:off x="3291840" y="2880360"/>
+            <a:ext cx="2651760" cy="1600200"/>
+          </a:xfrm>
+          <a:prstGeom prst="rect">
+            <a:avLst/>
+          </a:prstGeom>
+          <a:solidFill>
+            <a:srgbClr val="FFFFFF"/>
+          </a:solidFill>
+          <a:ln/>
+          <a:effectLst>
+            <a:outerShdw sx="100000" sy="100000" kx="0" ky="0" algn="bl" rotWithShape="0" blurRad="50800" dist="25400" dir="8100000">
+              <a:srgbClr val="000000">
+                <a:alpha val="10000"/>
+              </a:srgbClr>
+            </a:outerShdw>
+          </a:effectLst>
+        </p:spPr>
+      </p:sp>
+      <p:sp>
+        <p:nvSpPr>
+          <p:cNvPr id="34" name="Shape 32"/>
+          <p:cNvSpPr/>
+          <p:nvPr/>
+        </p:nvSpPr>
+        <p:spPr>
+          <a:xfrm>
+            <a:off x="3291840" y="2880360"/>
+            <a:ext cx="54864" cy="1600200"/>
+          </a:xfrm>
+          <a:prstGeom prst="rect">
+            <a:avLst/>
+          </a:prstGeom>
+          <a:solidFill>
+            <a:srgbClr val="16A34A"/>
+          </a:solidFill>
+          <a:ln/>
+        </p:spPr>
+      </p:sp>
+      <p:sp>
+        <p:nvSpPr>
+          <p:cNvPr id="35" name="Shape 33"/>
+          <p:cNvSpPr/>
+          <p:nvPr/>
+        </p:nvSpPr>
+        <p:spPr>
+          <a:xfrm>
+            <a:off x="5120640" y="2953512"/>
+            <a:ext cx="658368" cy="228600"/>
+          </a:xfrm>
+          <a:prstGeom prst="rect">
+            <a:avLst/>
+          </a:prstGeom>
+          <a:solidFill>
+            <a:srgbClr val="DCFCE7"/>
+          </a:solidFill>
+          <a:ln/>
+        </p:spPr>
+      </p:sp>
+      <p:sp>
+        <p:nvSpPr>
+          <p:cNvPr id="36" name="Text 34"/>
+          <p:cNvSpPr/>
+          <p:nvPr/>
+        </p:nvSpPr>
+        <p:spPr>
+          <a:xfrm>
+            <a:off x="5120640" y="2953512"/>
+            <a:ext cx="658368" cy="228600"/>
+          </a:xfrm>
+          <a:prstGeom prst="rect">
+            <a:avLst/>
+          </a:prstGeom>
+          <a:noFill/>
+          <a:ln/>
+        </p:spPr>
+        <p:txBody>
+          <a:bodyPr wrap="square" lIns="0" tIns="0" rIns="0" bIns="0" rtlCol="0" anchor="ctr"/>
+          <a:lstStyle/>
+          <a:p>
+            <a:pPr algn="ctr" indent="0" marL="0">
+              <a:buNone/>
+            </a:pPr>
+            <a:r>
+              <a:rPr lang="en-US" sz="900" b="1" dirty="0">
+                <a:solidFill>
+                  <a:srgbClr val="16A34A"/>
+                </a:solidFill>
+                <a:latin typeface="Arial" pitchFamily="34" charset="0"/>
+                <a:ea typeface="Arial" pitchFamily="34" charset="-122"/>
+                <a:cs typeface="Arial" pitchFamily="34" charset="-120"/>
+              </a:rPr>
+              <a:t>10件+</a:t>
+            </a:r>
+            <a:endParaRPr lang="en-US" sz="900" dirty="0"/>
+          </a:p>
+        </p:txBody>
+      </p:sp>
+      <p:sp>
+        <p:nvSpPr>
+          <p:cNvPr id="37" name="Text 35"/>
+          <p:cNvSpPr/>
+          <p:nvPr/>
+        </p:nvSpPr>
+        <p:spPr>
+          <a:xfrm>
+            <a:off x="3429000" y="2953512"/>
             <a:ext cx="1645920" cy="274320"/>
           </a:xfrm>
           <a:prstGeom prst="rect">
@@ -11205,13 +11668,13 @@
       </p:sp>
       <p:sp>
         <p:nvSpPr>
-          <p:cNvPr id="24" name="Text 22"/>
-          <p:cNvSpPr/>
-          <p:nvPr/>
-        </p:nvSpPr>
-        <p:spPr>
-          <a:xfrm>
-            <a:off x="6263640" y="1417320"/>
+          <p:cNvPr id="38" name="Text 36"/>
+          <p:cNvSpPr/>
+          <p:nvPr/>
+        </p:nvSpPr>
+        <p:spPr>
+          <a:xfrm>
+            <a:off x="3429000" y="3246120"/>
             <a:ext cx="2377440" cy="365760"/>
           </a:xfrm>
           <a:prstGeom prst="rect">
@@ -11236,7 +11699,7 @@
                 <a:ea typeface="Arial" pitchFamily="34" charset="-122"/>
                 <a:cs typeface="Arial" pitchFamily="34" charset="-120"/>
               </a:rPr>
-              <a:t>りんかい線の入口もすぐ、空港行きのバス乗り場もすぐ、空港までもすぐ、飲食店、コンビニ、イオンと助かりました</a:t>
+              <a:t>すぐ向かいにイオンモールがあり、なんでも買い物が出来て便利です</a:t>
             </a:r>
             <a:endParaRPr lang="en-US" sz="900" dirty="0"/>
           </a:p>
@@ -11244,13 +11707,13 @@
       </p:sp>
       <p:sp>
         <p:nvSpPr>
-          <p:cNvPr id="25" name="Text 23"/>
-          <p:cNvSpPr/>
-          <p:nvPr/>
-        </p:nvSpPr>
-        <p:spPr>
-          <a:xfrm>
-            <a:off x="6263640" y="1828800"/>
+          <p:cNvPr id="39" name="Text 37"/>
+          <p:cNvSpPr/>
+          <p:nvPr/>
+        </p:nvSpPr>
+        <p:spPr>
+          <a:xfrm>
+            <a:off x="3429000" y="3657600"/>
             <a:ext cx="2377440" cy="640080"/>
           </a:xfrm>
           <a:prstGeom prst="rect">
@@ -11275,7 +11738,7 @@
                 <a:ea typeface="Arial" pitchFamily="34" charset="-122"/>
                 <a:cs typeface="Arial" pitchFamily="34" charset="-120"/>
               </a:rPr>
-              <a:t>「駅から近く、すぐ側にイオンあり買い物便利」</a:t>
+              <a:t>「近くにスーパー、コンビニがあり便利」</a:t>
             </a:r>
             <a:endParaRPr lang="en-US" sz="900" dirty="0"/>
           </a:p>
@@ -11283,13 +11746,13 @@
       </p:sp>
       <p:sp>
         <p:nvSpPr>
-          <p:cNvPr id="26" name="Shape 24"/>
-          <p:cNvSpPr/>
-          <p:nvPr/>
-        </p:nvSpPr>
-        <p:spPr>
-          <a:xfrm>
-            <a:off x="457200" y="2880360"/>
+          <p:cNvPr id="40" name="Shape 38"/>
+          <p:cNvSpPr/>
+          <p:nvPr/>
+        </p:nvSpPr>
+        <p:spPr>
+          <a:xfrm>
+            <a:off x="6126480" y="2880360"/>
             <a:ext cx="2651760" cy="1600200"/>
           </a:xfrm>
           <a:prstGeom prst="rect">
@@ -11310,13 +11773,13 @@
       </p:sp>
       <p:sp>
         <p:nvSpPr>
-          <p:cNvPr id="27" name="Shape 25"/>
-          <p:cNvSpPr/>
-          <p:nvPr/>
-        </p:nvSpPr>
-        <p:spPr>
-          <a:xfrm>
-            <a:off x="457200" y="2880360"/>
+          <p:cNvPr id="41" name="Shape 39"/>
+          <p:cNvSpPr/>
+          <p:nvPr/>
+        </p:nvSpPr>
+        <p:spPr>
+          <a:xfrm>
+            <a:off x="6126480" y="2880360"/>
             <a:ext cx="54864" cy="1600200"/>
           </a:xfrm>
           <a:prstGeom prst="rect">
@@ -11330,13 +11793,13 @@
       </p:sp>
       <p:sp>
         <p:nvSpPr>
-          <p:cNvPr id="28" name="Shape 26"/>
-          <p:cNvSpPr/>
-          <p:nvPr/>
-        </p:nvSpPr>
-        <p:spPr>
-          <a:xfrm>
-            <a:off x="2286000" y="2953512"/>
+          <p:cNvPr id="42" name="Shape 40"/>
+          <p:cNvSpPr/>
+          <p:nvPr/>
+        </p:nvSpPr>
+        <p:spPr>
+          <a:xfrm>
+            <a:off x="7955280" y="2953512"/>
             <a:ext cx="658368" cy="228600"/>
           </a:xfrm>
           <a:prstGeom prst="rect">
@@ -11350,13 +11813,13 @@
       </p:sp>
       <p:sp>
         <p:nvSpPr>
-          <p:cNvPr id="29" name="Text 27"/>
-          <p:cNvSpPr/>
-          <p:nvPr/>
-        </p:nvSpPr>
-        <p:spPr>
-          <a:xfrm>
-            <a:off x="2286000" y="2953512"/>
+          <p:cNvPr id="43" name="Text 41"/>
+          <p:cNvSpPr/>
+          <p:nvPr/>
+        </p:nvSpPr>
+        <p:spPr>
+          <a:xfrm>
+            <a:off x="7955280" y="2953512"/>
             <a:ext cx="658368" cy="228600"/>
           </a:xfrm>
           <a:prstGeom prst="rect">
@@ -11381,453 +11844,7 @@
                 <a:ea typeface="Arial" pitchFamily="34" charset="-122"/>
                 <a:cs typeface="Arial" pitchFamily="34" charset="-120"/>
               </a:rPr>
-              <a:t>20件+</a:t>
-            </a:r>
-            <a:endParaRPr lang="en-US" sz="900" dirty="0"/>
-          </a:p>
-        </p:txBody>
-      </p:sp>
-      <p:sp>
-        <p:nvSpPr>
-          <p:cNvPr id="30" name="Text 28"/>
-          <p:cNvSpPr/>
-          <p:nvPr/>
-        </p:nvSpPr>
-        <p:spPr>
-          <a:xfrm>
-            <a:off x="594360" y="2953512"/>
-            <a:ext cx="1645920" cy="274320"/>
-          </a:xfrm>
-          <a:prstGeom prst="rect">
-            <a:avLst/>
-          </a:prstGeom>
-          <a:noFill/>
-          <a:ln/>
-        </p:spPr>
-        <p:txBody>
-          <a:bodyPr wrap="square" lIns="0" tIns="0" rIns="0" bIns="0" rtlCol="0" anchor="ctr"/>
-          <a:lstStyle/>
-          <a:p>
-            <a:pPr indent="0" marL="0">
-              <a:buNone/>
-            </a:pPr>
-            <a:r>
-              <a:rPr lang="en-US" sz="1300" b="1" dirty="0">
-                <a:solidFill>
-                  <a:srgbClr val="1A2744"/>
-                </a:solidFill>
-                <a:latin typeface="Arial" pitchFamily="34" charset="0"/>
-                <a:ea typeface="Arial" pitchFamily="34" charset="-122"/>
-                <a:cs typeface="Arial" pitchFamily="34" charset="-120"/>
-              </a:rPr>
-              <a:t>スタッフの対応</a:t>
-            </a:r>
-            <a:endParaRPr lang="en-US" sz="1300" dirty="0"/>
-          </a:p>
-        </p:txBody>
-      </p:sp>
-      <p:sp>
-        <p:nvSpPr>
-          <p:cNvPr id="31" name="Text 29"/>
-          <p:cNvSpPr/>
-          <p:nvPr/>
-        </p:nvSpPr>
-        <p:spPr>
-          <a:xfrm>
-            <a:off x="594360" y="3246120"/>
-            <a:ext cx="2377440" cy="365760"/>
-          </a:xfrm>
-          <a:prstGeom prst="rect">
-            <a:avLst/>
-          </a:prstGeom>
-          <a:noFill/>
-          <a:ln/>
-        </p:spPr>
-        <p:txBody>
-          <a:bodyPr wrap="square" lIns="0" tIns="0" rIns="0" bIns="0" rtlCol="0" anchor="ctr"/>
-          <a:lstStyle/>
-          <a:p>
-            <a:pPr indent="0" marL="0">
-              <a:buNone/>
-            </a:pPr>
-            <a:r>
-              <a:rPr lang="en-US" sz="900" dirty="0">
-                <a:solidFill>
-                  <a:srgbClr val="64748B"/>
-                </a:solidFill>
-                <a:latin typeface="Arial" pitchFamily="34" charset="0"/>
-                <a:ea typeface="Arial" pitchFamily="34" charset="-122"/>
-                <a:cs typeface="Arial" pitchFamily="34" charset="-120"/>
-              </a:rPr>
-              <a:t>朝食が美味しく　駅が近い    対応が　気持ちよく　親切</a:t>
-            </a:r>
-            <a:endParaRPr lang="en-US" sz="900" dirty="0"/>
-          </a:p>
-        </p:txBody>
-      </p:sp>
-      <p:sp>
-        <p:nvSpPr>
-          <p:cNvPr id="32" name="Text 30"/>
-          <p:cNvSpPr/>
-          <p:nvPr/>
-        </p:nvSpPr>
-        <p:spPr>
-          <a:xfrm>
-            <a:off x="594360" y="3657600"/>
-            <a:ext cx="2377440" cy="640080"/>
-          </a:xfrm>
-          <a:prstGeom prst="rect">
-            <a:avLst/>
-          </a:prstGeom>
-          <a:noFill/>
-          <a:ln/>
-        </p:spPr>
-        <p:txBody>
-          <a:bodyPr wrap="square" lIns="0" tIns="0" rIns="0" bIns="0" rtlCol="0" anchor="ctr"/>
-          <a:lstStyle/>
-          <a:p>
-            <a:pPr indent="0" marL="0">
-              <a:buNone/>
-            </a:pPr>
-            <a:r>
-              <a:rPr lang="en-US" sz="900" i="1" dirty="0">
-                <a:solidFill>
-                  <a:srgbClr val="3B7DD8"/>
-                </a:solidFill>
-                <a:latin typeface="Arial" pitchFamily="34" charset="0"/>
-                <a:ea typeface="Arial" pitchFamily="34" charset="-122"/>
-                <a:cs typeface="Arial" pitchFamily="34" charset="-120"/>
-              </a:rPr>
-              <a:t>「Staff was very nice」</a:t>
-            </a:r>
-            <a:endParaRPr lang="en-US" sz="900" dirty="0"/>
-          </a:p>
-        </p:txBody>
-      </p:sp>
-      <p:sp>
-        <p:nvSpPr>
-          <p:cNvPr id="33" name="Shape 31"/>
-          <p:cNvSpPr/>
-          <p:nvPr/>
-        </p:nvSpPr>
-        <p:spPr>
-          <a:xfrm>
-            <a:off x="3291840" y="2880360"/>
-            <a:ext cx="2651760" cy="1600200"/>
-          </a:xfrm>
-          <a:prstGeom prst="rect">
-            <a:avLst/>
-          </a:prstGeom>
-          <a:solidFill>
-            <a:srgbClr val="FFFFFF"/>
-          </a:solidFill>
-          <a:ln/>
-          <a:effectLst>
-            <a:outerShdw sx="100000" sy="100000" kx="0" ky="0" algn="bl" rotWithShape="0" blurRad="50800" dist="25400" dir="8100000">
-              <a:srgbClr val="000000">
-                <a:alpha val="10000"/>
-              </a:srgbClr>
-            </a:outerShdw>
-          </a:effectLst>
-        </p:spPr>
-      </p:sp>
-      <p:sp>
-        <p:nvSpPr>
-          <p:cNvPr id="34" name="Shape 32"/>
-          <p:cNvSpPr/>
-          <p:nvPr/>
-        </p:nvSpPr>
-        <p:spPr>
-          <a:xfrm>
-            <a:off x="3291840" y="2880360"/>
-            <a:ext cx="54864" cy="1600200"/>
-          </a:xfrm>
-          <a:prstGeom prst="rect">
-            <a:avLst/>
-          </a:prstGeom>
-          <a:solidFill>
-            <a:srgbClr val="16A34A"/>
-          </a:solidFill>
-          <a:ln/>
-        </p:spPr>
-      </p:sp>
-      <p:sp>
-        <p:nvSpPr>
-          <p:cNvPr id="35" name="Shape 33"/>
-          <p:cNvSpPr/>
-          <p:nvPr/>
-        </p:nvSpPr>
-        <p:spPr>
-          <a:xfrm>
-            <a:off x="5120640" y="2953512"/>
-            <a:ext cx="658368" cy="228600"/>
-          </a:xfrm>
-          <a:prstGeom prst="rect">
-            <a:avLst/>
-          </a:prstGeom>
-          <a:solidFill>
-            <a:srgbClr val="DCFCE7"/>
-          </a:solidFill>
-          <a:ln/>
-        </p:spPr>
-      </p:sp>
-      <p:sp>
-        <p:nvSpPr>
-          <p:cNvPr id="36" name="Text 34"/>
-          <p:cNvSpPr/>
-          <p:nvPr/>
-        </p:nvSpPr>
-        <p:spPr>
-          <a:xfrm>
-            <a:off x="5120640" y="2953512"/>
-            <a:ext cx="658368" cy="228600"/>
-          </a:xfrm>
-          <a:prstGeom prst="rect">
-            <a:avLst/>
-          </a:prstGeom>
-          <a:noFill/>
-          <a:ln/>
-        </p:spPr>
-        <p:txBody>
-          <a:bodyPr wrap="square" lIns="0" tIns="0" rIns="0" bIns="0" rtlCol="0" anchor="ctr"/>
-          <a:lstStyle/>
-          <a:p>
-            <a:pPr algn="ctr" indent="0" marL="0">
-              <a:buNone/>
-            </a:pPr>
-            <a:r>
-              <a:rPr lang="en-US" sz="900" b="1" dirty="0">
-                <a:solidFill>
-                  <a:srgbClr val="16A34A"/>
-                </a:solidFill>
-                <a:latin typeface="Arial" pitchFamily="34" charset="0"/>
-                <a:ea typeface="Arial" pitchFamily="34" charset="-122"/>
-                <a:cs typeface="Arial" pitchFamily="34" charset="-120"/>
-              </a:rPr>
-              <a:t>20件+</a:t>
-            </a:r>
-            <a:endParaRPr lang="en-US" sz="900" dirty="0"/>
-          </a:p>
-        </p:txBody>
-      </p:sp>
-      <p:sp>
-        <p:nvSpPr>
-          <p:cNvPr id="37" name="Text 35"/>
-          <p:cNvSpPr/>
-          <p:nvPr/>
-        </p:nvSpPr>
-        <p:spPr>
-          <a:xfrm>
-            <a:off x="3429000" y="2953512"/>
-            <a:ext cx="1645920" cy="274320"/>
-          </a:xfrm>
-          <a:prstGeom prst="rect">
-            <a:avLst/>
-          </a:prstGeom>
-          <a:noFill/>
-          <a:ln/>
-        </p:spPr>
-        <p:txBody>
-          <a:bodyPr wrap="square" lIns="0" tIns="0" rIns="0" bIns="0" rtlCol="0" anchor="ctr"/>
-          <a:lstStyle/>
-          <a:p>
-            <a:pPr indent="0" marL="0">
-              <a:buNone/>
-            </a:pPr>
-            <a:r>
-              <a:rPr lang="en-US" sz="1300" b="1" dirty="0">
-                <a:solidFill>
-                  <a:srgbClr val="1A2744"/>
-                </a:solidFill>
-                <a:latin typeface="Arial" pitchFamily="34" charset="0"/>
-                <a:ea typeface="Arial" pitchFamily="34" charset="-122"/>
-                <a:cs typeface="Arial" pitchFamily="34" charset="-120"/>
-              </a:rPr>
-              <a:t>快適さ・設備</a:t>
-            </a:r>
-            <a:endParaRPr lang="en-US" sz="1300" dirty="0"/>
-          </a:p>
-        </p:txBody>
-      </p:sp>
-      <p:sp>
-        <p:nvSpPr>
-          <p:cNvPr id="38" name="Text 36"/>
-          <p:cNvSpPr/>
-          <p:nvPr/>
-        </p:nvSpPr>
-        <p:spPr>
-          <a:xfrm>
-            <a:off x="3429000" y="3246120"/>
-            <a:ext cx="2377440" cy="365760"/>
-          </a:xfrm>
-          <a:prstGeom prst="rect">
-            <a:avLst/>
-          </a:prstGeom>
-          <a:noFill/>
-          <a:ln/>
-        </p:spPr>
-        <p:txBody>
-          <a:bodyPr wrap="square" lIns="0" tIns="0" rIns="0" bIns="0" rtlCol="0" anchor="ctr"/>
-          <a:lstStyle/>
-          <a:p>
-            <a:pPr indent="0" marL="0">
-              <a:buNone/>
-            </a:pPr>
-            <a:r>
-              <a:rPr lang="en-US" sz="900" dirty="0">
-                <a:solidFill>
-                  <a:srgbClr val="64748B"/>
-                </a:solidFill>
-                <a:latin typeface="Arial" pitchFamily="34" charset="0"/>
-                <a:ea typeface="Arial" pitchFamily="34" charset="-122"/>
-                <a:cs typeface="Arial" pitchFamily="34" charset="-120"/>
-              </a:rPr>
-              <a:t>部屋は快適で、東京のホテルとしては平均よりも広い</a:t>
-            </a:r>
-            <a:endParaRPr lang="en-US" sz="900" dirty="0"/>
-          </a:p>
-        </p:txBody>
-      </p:sp>
-      <p:sp>
-        <p:nvSpPr>
-          <p:cNvPr id="39" name="Text 37"/>
-          <p:cNvSpPr/>
-          <p:nvPr/>
-        </p:nvSpPr>
-        <p:spPr>
-          <a:xfrm>
-            <a:off x="3429000" y="3657600"/>
-            <a:ext cx="2377440" cy="640080"/>
-          </a:xfrm>
-          <a:prstGeom prst="rect">
-            <a:avLst/>
-          </a:prstGeom>
-          <a:noFill/>
-          <a:ln/>
-        </p:spPr>
-        <p:txBody>
-          <a:bodyPr wrap="square" lIns="0" tIns="0" rIns="0" bIns="0" rtlCol="0" anchor="ctr"/>
-          <a:lstStyle/>
-          <a:p>
-            <a:pPr indent="0" marL="0">
-              <a:buNone/>
-            </a:pPr>
-            <a:r>
-              <a:rPr lang="en-US" sz="900" i="1" dirty="0">
-                <a:solidFill>
-                  <a:srgbClr val="3B7DD8"/>
-                </a:solidFill>
-                <a:latin typeface="Arial" pitchFamily="34" charset="0"/>
-                <a:ea typeface="Arial" pitchFamily="34" charset="-122"/>
-                <a:cs typeface="Arial" pitchFamily="34" charset="-120"/>
-              </a:rPr>
-              <a:t>「また、お部屋は狭かったが清潔感があり、ベッドも寝心地良かった」</a:t>
-            </a:r>
-            <a:endParaRPr lang="en-US" sz="900" dirty="0"/>
-          </a:p>
-        </p:txBody>
-      </p:sp>
-      <p:sp>
-        <p:nvSpPr>
-          <p:cNvPr id="40" name="Shape 38"/>
-          <p:cNvSpPr/>
-          <p:nvPr/>
-        </p:nvSpPr>
-        <p:spPr>
-          <a:xfrm>
-            <a:off x="6126480" y="2880360"/>
-            <a:ext cx="2651760" cy="1600200"/>
-          </a:xfrm>
-          <a:prstGeom prst="rect">
-            <a:avLst/>
-          </a:prstGeom>
-          <a:solidFill>
-            <a:srgbClr val="FFFFFF"/>
-          </a:solidFill>
-          <a:ln/>
-          <a:effectLst>
-            <a:outerShdw sx="100000" sy="100000" kx="0" ky="0" algn="bl" rotWithShape="0" blurRad="50800" dist="25400" dir="8100000">
-              <a:srgbClr val="000000">
-                <a:alpha val="10000"/>
-              </a:srgbClr>
-            </a:outerShdw>
-          </a:effectLst>
-        </p:spPr>
-      </p:sp>
-      <p:sp>
-        <p:nvSpPr>
-          <p:cNvPr id="41" name="Shape 39"/>
-          <p:cNvSpPr/>
-          <p:nvPr/>
-        </p:nvSpPr>
-        <p:spPr>
-          <a:xfrm>
-            <a:off x="6126480" y="2880360"/>
-            <a:ext cx="54864" cy="1600200"/>
-          </a:xfrm>
-          <a:prstGeom prst="rect">
-            <a:avLst/>
-          </a:prstGeom>
-          <a:solidFill>
-            <a:srgbClr val="16A34A"/>
-          </a:solidFill>
-          <a:ln/>
-        </p:spPr>
-      </p:sp>
-      <p:sp>
-        <p:nvSpPr>
-          <p:cNvPr id="42" name="Shape 40"/>
-          <p:cNvSpPr/>
-          <p:nvPr/>
-        </p:nvSpPr>
-        <p:spPr>
-          <a:xfrm>
-            <a:off x="7955280" y="2953512"/>
-            <a:ext cx="658368" cy="228600"/>
-          </a:xfrm>
-          <a:prstGeom prst="rect">
-            <a:avLst/>
-          </a:prstGeom>
-          <a:solidFill>
-            <a:srgbClr val="DCFCE7"/>
-          </a:solidFill>
-          <a:ln/>
-        </p:spPr>
-      </p:sp>
-      <p:sp>
-        <p:nvSpPr>
-          <p:cNvPr id="43" name="Text 41"/>
-          <p:cNvSpPr/>
-          <p:nvPr/>
-        </p:nvSpPr>
-        <p:spPr>
-          <a:xfrm>
-            <a:off x="7955280" y="2953512"/>
-            <a:ext cx="658368" cy="228600"/>
-          </a:xfrm>
-          <a:prstGeom prst="rect">
-            <a:avLst/>
-          </a:prstGeom>
-          <a:noFill/>
-          <a:ln/>
-        </p:spPr>
-        <p:txBody>
-          <a:bodyPr wrap="square" lIns="0" tIns="0" rIns="0" bIns="0" rtlCol="0" anchor="ctr"/>
-          <a:lstStyle/>
-          <a:p>
-            <a:pPr algn="ctr" indent="0" marL="0">
-              <a:buNone/>
-            </a:pPr>
-            <a:r>
-              <a:rPr lang="en-US" sz="900" b="1" dirty="0">
-                <a:solidFill>
-                  <a:srgbClr val="16A34A"/>
-                </a:solidFill>
-                <a:latin typeface="Arial" pitchFamily="34" charset="0"/>
-                <a:ea typeface="Arial" pitchFamily="34" charset="-122"/>
-                <a:cs typeface="Arial" pitchFamily="34" charset="-120"/>
-              </a:rPr>
-              <a:t>10件+</a:t>
+              <a:t>8件</a:t>
             </a:r>
             <a:endParaRPr lang="en-US" sz="900" dirty="0"/>
           </a:p>
@@ -11905,7 +11922,7 @@
                 <a:ea typeface="Arial" pitchFamily="34" charset="-122"/>
                 <a:cs typeface="Arial" pitchFamily="34" charset="-120"/>
               </a:rPr>
-              <a:t>朝食が美味しく　駅が近い    対応が　気持ちよく　親切</a:t>
+              <a:t>お風呂のお湯が蛇口で調節なのがちょっと面倒ですが十分快適に泊まれました 朝食も美味しかったです</a:t>
             </a:r>
             <a:endParaRPr lang="en-US" sz="900" dirty="0"/>
           </a:p>
@@ -11944,7 +11961,7 @@
                 <a:ea typeface="Arial" pitchFamily="34" charset="-122"/>
                 <a:cs typeface="Arial" pitchFamily="34" charset="-120"/>
               </a:rPr>
-              <a:t>「駅が近い  商業施設が近い 駐車場有だったが、大きく高さの有る車は入らない  朝ごはん、トースターが付いてたらあの...」</a:t>
+              <a:t>「朝食が美味しく　駅が近い    対応が　気持ちよく　親切」</a:t>
             </a:r>
             <a:endParaRPr lang="en-US" sz="900" dirty="0"/>
           </a:p>
@@ -12634,7 +12651,7 @@
                           <a:ea typeface="Arial" pitchFamily="34" charset="-122"/>
                           <a:cs typeface="Arial" pitchFamily="34" charset="-120"/>
                         </a:rPr>
-                        <a:t>りんかい線の入口もすぐ、空港行きのバス乗り場もすぐ、空港までもすぐ、飲食店、コンビニ、イオンと助かりました</a:t>
+                        <a:t>部屋も洗面浴室もキレイでした</a:t>
                       </a:r>
                       <a:endParaRPr lang="en-US" sz="900" dirty="0">
                         <a:latin typeface="Arial" charset="0"/>
@@ -12702,7 +12719,7 @@
                           <a:ea typeface="Arial" pitchFamily="34" charset="-122"/>
                           <a:cs typeface="Arial" pitchFamily="34" charset="-120"/>
                         </a:rPr>
-                        <a:t>15件</a:t>
+                        <a:t>7件</a:t>
                       </a:r>
                       <a:endParaRPr lang="en-US" sz="900" dirty="0">
                         <a:latin typeface="Arial" charset="0"/>
@@ -12976,7 +12993,7 @@
                           <a:ea typeface="Arial" pitchFamily="34" charset="-122"/>
                           <a:cs typeface="Arial" pitchFamily="34" charset="-120"/>
                         </a:rPr>
-                        <a:t>9件</a:t>
+                        <a:t>6件</a:t>
                       </a:r>
                       <a:endParaRPr lang="en-US" sz="900" dirty="0">
                         <a:latin typeface="Arial" charset="0"/>
@@ -13250,7 +13267,7 @@
                           <a:ea typeface="Arial" pitchFamily="34" charset="-122"/>
                           <a:cs typeface="Arial" pitchFamily="34" charset="-120"/>
                         </a:rPr>
-                        <a:t>6件</a:t>
+                        <a:t>3件</a:t>
                       </a:r>
                       <a:endParaRPr lang="en-US" sz="900" dirty="0">
                         <a:latin typeface="Arial" charset="0"/>
@@ -13388,7 +13405,7 @@
                           <a:ea typeface="Arial" pitchFamily="34" charset="-122"/>
                           <a:cs typeface="Arial" pitchFamily="34" charset="-120"/>
                         </a:rPr>
-                        <a:t>設備の老朽化</a:t>
+                        <a:t>防音性能</a:t>
                       </a:r>
                       <a:endParaRPr lang="en-US" sz="900" dirty="0">
                         <a:latin typeface="Arial" charset="0"/>
@@ -13456,7 +13473,7 @@
                           <a:ea typeface="Arial" pitchFamily="34" charset="-122"/>
                           <a:cs typeface="Arial" pitchFamily="34" charset="-120"/>
                         </a:rPr>
-                        <a:t>外観に比べると部屋が古いイメージで少し残念でした</a:t>
+                        <a:t>お部屋も綺麗で、隣の音も気にならなかったです</a:t>
                       </a:r>
                       <a:endParaRPr lang="en-US" sz="900" dirty="0">
                         <a:latin typeface="Arial" charset="0"/>
@@ -13524,7 +13541,7 @@
                           <a:ea typeface="Arial" pitchFamily="34" charset="-122"/>
                           <a:cs typeface="Arial" pitchFamily="34" charset="-120"/>
                         </a:rPr>
-                        <a:t>3件</a:t>
+                        <a:t>2件</a:t>
                       </a:r>
                       <a:endParaRPr lang="en-US" sz="900" dirty="0">
                         <a:latin typeface="Arial" charset="0"/>
@@ -13662,7 +13679,7 @@
                           <a:ea typeface="Arial" pitchFamily="34" charset="-122"/>
                           <a:cs typeface="Arial" pitchFamily="34" charset="-120"/>
                         </a:rPr>
-                        <a:t>窓・採光</a:t>
+                        <a:t>臭い・匂い</a:t>
                       </a:r>
                       <a:endParaRPr lang="en-US" sz="900" dirty="0">
                         <a:latin typeface="Arial" charset="0"/>
@@ -13730,7 +13747,7 @@
                           <a:ea typeface="Arial" pitchFamily="34" charset="-122"/>
                           <a:cs typeface="Arial" pitchFamily="34" charset="-120"/>
                         </a:rPr>
-                        <a:t>運河が見えるお部屋を希望したら、18階の運河沿いのお部屋にしてくれ、窓の下は運河が流れていて、夜には夜景が素晴らし...</a:t>
+                        <a:t>部屋が臭い 部屋が臭い</a:t>
                       </a:r>
                       <a:endParaRPr lang="en-US" sz="900" dirty="0">
                         <a:latin typeface="Arial" charset="0"/>
@@ -13798,7 +13815,7 @@
                           <a:ea typeface="Arial" pitchFamily="34" charset="-122"/>
                           <a:cs typeface="Arial" pitchFamily="34" charset="-120"/>
                         </a:rPr>
-                        <a:t>3件</a:t>
+                        <a:t>2件</a:t>
                       </a:r>
                       <a:endParaRPr lang="en-US" sz="900" dirty="0">
                         <a:latin typeface="Arial" charset="0"/>
@@ -13936,7 +13953,7 @@
                           <a:ea typeface="Arial" pitchFamily="34" charset="-122"/>
                           <a:cs typeface="Arial" pitchFamily="34" charset="-120"/>
                         </a:rPr>
-                        <a:t>防音性能</a:t>
+                        <a:t>窓・採光</a:t>
                       </a:r>
                       <a:endParaRPr lang="en-US" sz="900" dirty="0">
                         <a:latin typeface="Arial" charset="0"/>
@@ -14004,7 +14021,7 @@
                           <a:ea typeface="Arial" pitchFamily="34" charset="-122"/>
                           <a:cs typeface="Arial" pitchFamily="34" charset="-120"/>
                         </a:rPr>
-                        <a:t>ただ1つだけその長所を台無しにするのが9時頃からの他の部屋の清掃、外国人スタッフさんなのか話しながら作業しておりガ...</a:t>
+                        <a:t>運河が見えるお部屋を希望したら、18階の運河沿いのお部屋にしてくれ、窓の下は運河が流れていて、夜には夜景が素晴らし...</a:t>
                       </a:r>
                       <a:endParaRPr lang="en-US" sz="900" dirty="0">
                         <a:latin typeface="Arial" charset="0"/>
@@ -14210,7 +14227,7 @@
                           <a:ea typeface="Arial" pitchFamily="34" charset="-122"/>
                           <a:cs typeface="Arial" pitchFamily="34" charset="-120"/>
                         </a:rPr>
-                        <a:t>臭い・匂い</a:t>
+                        <a:t>設備の老朽化</a:t>
                       </a:r>
                       <a:endParaRPr lang="en-US" sz="900" dirty="0">
                         <a:latin typeface="Arial" charset="0"/>
@@ -14278,555 +14295,7 @@
                           <a:ea typeface="Arial" pitchFamily="34" charset="-122"/>
                           <a:cs typeface="Arial" pitchFamily="34" charset="-120"/>
                         </a:rPr>
-                        <a:t>喫煙部屋で当方電子タバコなので入った時のタバコ臭が気になります</a:t>
-                      </a:r>
-                      <a:endParaRPr lang="en-US" sz="900" dirty="0">
-                        <a:latin typeface="Arial" charset="0"/>
-                        <a:ea typeface="Arial" charset="0"/>
-                        <a:cs typeface="Arial" charset="0"/>
-                      </a:endParaRPr>
-                    </a:p>
-                  </a:txBody>
-                  <a:tcPr marL="91440" marR="91440" marT="45720" marB="45720">
-                    <a:lnL w="6350" cap="flat" cmpd="sng" algn="ctr">
-                      <a:solidFill>
-                        <a:srgbClr val="CBD5E1"/>
-                      </a:solidFill>
-                      <a:prstDash val="solid"/>
-                      <a:round/>
-                      <a:headEnd type="none" w="med" len="med"/>
-                      <a:tailEnd type="none" w="med" len="med"/>
-                    </a:lnL>
-                    <a:lnR w="6350" cap="flat" cmpd="sng" algn="ctr">
-                      <a:solidFill>
-                        <a:srgbClr val="CBD5E1"/>
-                      </a:solidFill>
-                      <a:prstDash val="solid"/>
-                      <a:round/>
-                      <a:headEnd type="none" w="med" len="med"/>
-                      <a:tailEnd type="none" w="med" len="med"/>
-                    </a:lnR>
-                    <a:lnT w="6350" cap="flat" cmpd="sng" algn="ctr">
-                      <a:solidFill>
-                        <a:srgbClr val="CBD5E1"/>
-                      </a:solidFill>
-                      <a:prstDash val="solid"/>
-                      <a:round/>
-                      <a:headEnd type="none" w="med" len="med"/>
-                      <a:tailEnd type="none" w="med" len="med"/>
-                    </a:lnT>
-                    <a:lnB w="6350" cap="flat" cmpd="sng" algn="ctr">
-                      <a:solidFill>
-                        <a:srgbClr val="CBD5E1"/>
-                      </a:solidFill>
-                      <a:prstDash val="solid"/>
-                      <a:round/>
-                      <a:headEnd type="none" w="med" len="med"/>
-                      <a:tailEnd type="none" w="med" len="med"/>
-                    </a:lnB>
-                    <a:solidFill>
-                      <a:srgbClr val="E8EFF8"/>
-                    </a:solidFill>
-                  </a:tcPr>
-                </a:tc>
-                <a:tc>
-                  <a:txBody>
-                    <a:bodyPr/>
-                    <a:lstStyle/>
-                    <a:p>
-                      <a:pPr algn="ctr" indent="0" marL="0">
-                        <a:buNone/>
-                      </a:pPr>
-                      <a:r>
-                        <a:rPr lang="en-US" sz="900" dirty="0">
-                          <a:solidFill>
-                            <a:srgbClr val="334155"/>
-                          </a:solidFill>
-                          <a:latin typeface="Arial" pitchFamily="34" charset="0"/>
-                          <a:ea typeface="Arial" pitchFamily="34" charset="-122"/>
-                          <a:cs typeface="Arial" pitchFamily="34" charset="-120"/>
-                        </a:rPr>
-                        <a:t>2件</a:t>
-                      </a:r>
-                      <a:endParaRPr lang="en-US" sz="900" dirty="0">
-                        <a:latin typeface="Arial" charset="0"/>
-                        <a:ea typeface="Arial" charset="0"/>
-                        <a:cs typeface="Arial" charset="0"/>
-                      </a:endParaRPr>
-                    </a:p>
-                  </a:txBody>
-                  <a:tcPr marL="91440" marR="91440" marT="45720" marB="45720">
-                    <a:lnL w="6350" cap="flat" cmpd="sng" algn="ctr">
-                      <a:solidFill>
-                        <a:srgbClr val="CBD5E1"/>
-                      </a:solidFill>
-                      <a:prstDash val="solid"/>
-                      <a:round/>
-                      <a:headEnd type="none" w="med" len="med"/>
-                      <a:tailEnd type="none" w="med" len="med"/>
-                    </a:lnL>
-                    <a:lnR w="6350" cap="flat" cmpd="sng" algn="ctr">
-                      <a:solidFill>
-                        <a:srgbClr val="CBD5E1"/>
-                      </a:solidFill>
-                      <a:prstDash val="solid"/>
-                      <a:round/>
-                      <a:headEnd type="none" w="med" len="med"/>
-                      <a:tailEnd type="none" w="med" len="med"/>
-                    </a:lnR>
-                    <a:lnT w="6350" cap="flat" cmpd="sng" algn="ctr">
-                      <a:solidFill>
-                        <a:srgbClr val="CBD5E1"/>
-                      </a:solidFill>
-                      <a:prstDash val="solid"/>
-                      <a:round/>
-                      <a:headEnd type="none" w="med" len="med"/>
-                      <a:tailEnd type="none" w="med" len="med"/>
-                    </a:lnT>
-                    <a:lnB w="6350" cap="flat" cmpd="sng" algn="ctr">
-                      <a:solidFill>
-                        <a:srgbClr val="CBD5E1"/>
-                      </a:solidFill>
-                      <a:prstDash val="solid"/>
-                      <a:round/>
-                      <a:headEnd type="none" w="med" len="med"/>
-                      <a:tailEnd type="none" w="med" len="med"/>
-                    </a:lnB>
-                    <a:solidFill>
-                      <a:srgbClr val="E8EFF8"/>
-                    </a:solidFill>
-                  </a:tcPr>
-                </a:tc>
-              </a:tr>
-              <a:tr h="320040">
-                <a:tc>
-                  <a:txBody>
-                    <a:bodyPr/>
-                    <a:lstStyle/>
-                    <a:p>
-                      <a:pPr algn="ctr" indent="0" marL="0">
-                        <a:buNone/>
-                      </a:pPr>
-                      <a:r>
-                        <a:rPr lang="en-US" sz="1200" b="1" dirty="0">
-                          <a:solidFill>
-                            <a:srgbClr val="94A3B8"/>
-                          </a:solidFill>
-                          <a:latin typeface="Arial" pitchFamily="34" charset="0"/>
-                          <a:ea typeface="Arial" pitchFamily="34" charset="-122"/>
-                          <a:cs typeface="Arial" pitchFamily="34" charset="-120"/>
-                        </a:rPr>
-                        <a:t>C</a:t>
-                      </a:r>
-                      <a:endParaRPr lang="en-US" sz="1200" dirty="0">
-                        <a:latin typeface="Arial" charset="0"/>
-                        <a:ea typeface="Arial" charset="0"/>
-                        <a:cs typeface="Arial" charset="0"/>
-                      </a:endParaRPr>
-                    </a:p>
-                  </a:txBody>
-                  <a:tcPr marL="91440" marR="91440" marT="45720" marB="45720">
-                    <a:lnL w="6350" cap="flat" cmpd="sng" algn="ctr">
-                      <a:solidFill>
-                        <a:srgbClr val="CBD5E1"/>
-                      </a:solidFill>
-                      <a:prstDash val="solid"/>
-                      <a:round/>
-                      <a:headEnd type="none" w="med" len="med"/>
-                      <a:tailEnd type="none" w="med" len="med"/>
-                    </a:lnL>
-                    <a:lnR w="6350" cap="flat" cmpd="sng" algn="ctr">
-                      <a:solidFill>
-                        <a:srgbClr val="CBD5E1"/>
-                      </a:solidFill>
-                      <a:prstDash val="solid"/>
-                      <a:round/>
-                      <a:headEnd type="none" w="med" len="med"/>
-                      <a:tailEnd type="none" w="med" len="med"/>
-                    </a:lnR>
-                    <a:lnT w="6350" cap="flat" cmpd="sng" algn="ctr">
-                      <a:solidFill>
-                        <a:srgbClr val="CBD5E1"/>
-                      </a:solidFill>
-                      <a:prstDash val="solid"/>
-                      <a:round/>
-                      <a:headEnd type="none" w="med" len="med"/>
-                      <a:tailEnd type="none" w="med" len="med"/>
-                    </a:lnT>
-                    <a:lnB w="6350" cap="flat" cmpd="sng" algn="ctr">
-                      <a:solidFill>
-                        <a:srgbClr val="CBD5E1"/>
-                      </a:solidFill>
-                      <a:prstDash val="solid"/>
-                      <a:round/>
-                      <a:headEnd type="none" w="med" len="med"/>
-                      <a:tailEnd type="none" w="med" len="med"/>
-                    </a:lnB>
-                    <a:solidFill>
-                      <a:srgbClr val="FFFFFF"/>
-                    </a:solidFill>
-                  </a:tcPr>
-                </a:tc>
-                <a:tc>
-                  <a:txBody>
-                    <a:bodyPr/>
-                    <a:lstStyle/>
-                    <a:p>
-                      <a:pPr indent="0" marL="0">
-                        <a:buNone/>
-                      </a:pPr>
-                      <a:r>
-                        <a:rPr lang="en-US" sz="900" b="1" dirty="0">
-                          <a:solidFill>
-                            <a:srgbClr val="334155"/>
-                          </a:solidFill>
-                          <a:latin typeface="Arial" pitchFamily="34" charset="0"/>
-                          <a:ea typeface="Arial" pitchFamily="34" charset="-122"/>
-                          <a:cs typeface="Arial" pitchFamily="34" charset="-120"/>
-                        </a:rPr>
-                        <a:t>部屋の狭さ</a:t>
-                      </a:r>
-                      <a:endParaRPr lang="en-US" sz="900" dirty="0">
-                        <a:latin typeface="Arial" charset="0"/>
-                        <a:ea typeface="Arial" charset="0"/>
-                        <a:cs typeface="Arial" charset="0"/>
-                      </a:endParaRPr>
-                    </a:p>
-                  </a:txBody>
-                  <a:tcPr marL="91440" marR="91440" marT="45720" marB="45720">
-                    <a:lnL w="6350" cap="flat" cmpd="sng" algn="ctr">
-                      <a:solidFill>
-                        <a:srgbClr val="CBD5E1"/>
-                      </a:solidFill>
-                      <a:prstDash val="solid"/>
-                      <a:round/>
-                      <a:headEnd type="none" w="med" len="med"/>
-                      <a:tailEnd type="none" w="med" len="med"/>
-                    </a:lnL>
-                    <a:lnR w="6350" cap="flat" cmpd="sng" algn="ctr">
-                      <a:solidFill>
-                        <a:srgbClr val="CBD5E1"/>
-                      </a:solidFill>
-                      <a:prstDash val="solid"/>
-                      <a:round/>
-                      <a:headEnd type="none" w="med" len="med"/>
-                      <a:tailEnd type="none" w="med" len="med"/>
-                    </a:lnR>
-                    <a:lnT w="6350" cap="flat" cmpd="sng" algn="ctr">
-                      <a:solidFill>
-                        <a:srgbClr val="CBD5E1"/>
-                      </a:solidFill>
-                      <a:prstDash val="solid"/>
-                      <a:round/>
-                      <a:headEnd type="none" w="med" len="med"/>
-                      <a:tailEnd type="none" w="med" len="med"/>
-                    </a:lnT>
-                    <a:lnB w="6350" cap="flat" cmpd="sng" algn="ctr">
-                      <a:solidFill>
-                        <a:srgbClr val="CBD5E1"/>
-                      </a:solidFill>
-                      <a:prstDash val="solid"/>
-                      <a:round/>
-                      <a:headEnd type="none" w="med" len="med"/>
-                      <a:tailEnd type="none" w="med" len="med"/>
-                    </a:lnB>
-                    <a:solidFill>
-                      <a:srgbClr val="FFFFFF"/>
-                    </a:solidFill>
-                  </a:tcPr>
-                </a:tc>
-                <a:tc>
-                  <a:txBody>
-                    <a:bodyPr/>
-                    <a:lstStyle/>
-                    <a:p>
-                      <a:pPr indent="0" marL="0">
-                        <a:buNone/>
-                      </a:pPr>
-                      <a:r>
-                        <a:rPr lang="en-US" sz="900" dirty="0">
-                          <a:solidFill>
-                            <a:srgbClr val="64748B"/>
-                          </a:solidFill>
-                          <a:latin typeface="Arial" pitchFamily="34" charset="0"/>
-                          <a:ea typeface="Arial" pitchFamily="34" charset="-122"/>
-                          <a:cs typeface="Arial" pitchFamily="34" charset="-120"/>
-                        </a:rPr>
-                        <a:t>部屋が、狭い 眺望も良くない ともかく安い</a:t>
-                      </a:r>
-                      <a:endParaRPr lang="en-US" sz="900" dirty="0">
-                        <a:latin typeface="Arial" charset="0"/>
-                        <a:ea typeface="Arial" charset="0"/>
-                        <a:cs typeface="Arial" charset="0"/>
-                      </a:endParaRPr>
-                    </a:p>
-                  </a:txBody>
-                  <a:tcPr marL="91440" marR="91440" marT="45720" marB="45720">
-                    <a:lnL w="6350" cap="flat" cmpd="sng" algn="ctr">
-                      <a:solidFill>
-                        <a:srgbClr val="CBD5E1"/>
-                      </a:solidFill>
-                      <a:prstDash val="solid"/>
-                      <a:round/>
-                      <a:headEnd type="none" w="med" len="med"/>
-                      <a:tailEnd type="none" w="med" len="med"/>
-                    </a:lnL>
-                    <a:lnR w="6350" cap="flat" cmpd="sng" algn="ctr">
-                      <a:solidFill>
-                        <a:srgbClr val="CBD5E1"/>
-                      </a:solidFill>
-                      <a:prstDash val="solid"/>
-                      <a:round/>
-                      <a:headEnd type="none" w="med" len="med"/>
-                      <a:tailEnd type="none" w="med" len="med"/>
-                    </a:lnR>
-                    <a:lnT w="6350" cap="flat" cmpd="sng" algn="ctr">
-                      <a:solidFill>
-                        <a:srgbClr val="CBD5E1"/>
-                      </a:solidFill>
-                      <a:prstDash val="solid"/>
-                      <a:round/>
-                      <a:headEnd type="none" w="med" len="med"/>
-                      <a:tailEnd type="none" w="med" len="med"/>
-                    </a:lnT>
-                    <a:lnB w="6350" cap="flat" cmpd="sng" algn="ctr">
-                      <a:solidFill>
-                        <a:srgbClr val="CBD5E1"/>
-                      </a:solidFill>
-                      <a:prstDash val="solid"/>
-                      <a:round/>
-                      <a:headEnd type="none" w="med" len="med"/>
-                      <a:tailEnd type="none" w="med" len="med"/>
-                    </a:lnB>
-                    <a:solidFill>
-                      <a:srgbClr val="FFFFFF"/>
-                    </a:solidFill>
-                  </a:tcPr>
-                </a:tc>
-                <a:tc>
-                  <a:txBody>
-                    <a:bodyPr/>
-                    <a:lstStyle/>
-                    <a:p>
-                      <a:pPr algn="ctr" indent="0" marL="0">
-                        <a:buNone/>
-                      </a:pPr>
-                      <a:r>
-                        <a:rPr lang="en-US" sz="900" dirty="0">
-                          <a:solidFill>
-                            <a:srgbClr val="334155"/>
-                          </a:solidFill>
-                          <a:latin typeface="Arial" pitchFamily="34" charset="0"/>
-                          <a:ea typeface="Arial" pitchFamily="34" charset="-122"/>
-                          <a:cs typeface="Arial" pitchFamily="34" charset="-120"/>
-                        </a:rPr>
-                        <a:t>1件</a:t>
-                      </a:r>
-                      <a:endParaRPr lang="en-US" sz="900" dirty="0">
-                        <a:latin typeface="Arial" charset="0"/>
-                        <a:ea typeface="Arial" charset="0"/>
-                        <a:cs typeface="Arial" charset="0"/>
-                      </a:endParaRPr>
-                    </a:p>
-                  </a:txBody>
-                  <a:tcPr marL="91440" marR="91440" marT="45720" marB="45720">
-                    <a:lnL w="6350" cap="flat" cmpd="sng" algn="ctr">
-                      <a:solidFill>
-                        <a:srgbClr val="CBD5E1"/>
-                      </a:solidFill>
-                      <a:prstDash val="solid"/>
-                      <a:round/>
-                      <a:headEnd type="none" w="med" len="med"/>
-                      <a:tailEnd type="none" w="med" len="med"/>
-                    </a:lnL>
-                    <a:lnR w="6350" cap="flat" cmpd="sng" algn="ctr">
-                      <a:solidFill>
-                        <a:srgbClr val="CBD5E1"/>
-                      </a:solidFill>
-                      <a:prstDash val="solid"/>
-                      <a:round/>
-                      <a:headEnd type="none" w="med" len="med"/>
-                      <a:tailEnd type="none" w="med" len="med"/>
-                    </a:lnR>
-                    <a:lnT w="6350" cap="flat" cmpd="sng" algn="ctr">
-                      <a:solidFill>
-                        <a:srgbClr val="CBD5E1"/>
-                      </a:solidFill>
-                      <a:prstDash val="solid"/>
-                      <a:round/>
-                      <a:headEnd type="none" w="med" len="med"/>
-                      <a:tailEnd type="none" w="med" len="med"/>
-                    </a:lnT>
-                    <a:lnB w="6350" cap="flat" cmpd="sng" algn="ctr">
-                      <a:solidFill>
-                        <a:srgbClr val="CBD5E1"/>
-                      </a:solidFill>
-                      <a:prstDash val="solid"/>
-                      <a:round/>
-                      <a:headEnd type="none" w="med" len="med"/>
-                      <a:tailEnd type="none" w="med" len="med"/>
-                    </a:lnB>
-                    <a:solidFill>
-                      <a:srgbClr val="FFFFFF"/>
-                    </a:solidFill>
-                  </a:tcPr>
-                </a:tc>
-              </a:tr>
-              <a:tr h="320040">
-                <a:tc>
-                  <a:txBody>
-                    <a:bodyPr/>
-                    <a:lstStyle/>
-                    <a:p>
-                      <a:pPr algn="ctr" indent="0" marL="0">
-                        <a:buNone/>
-                      </a:pPr>
-                      <a:r>
-                        <a:rPr lang="en-US" sz="1200" b="1" dirty="0">
-                          <a:solidFill>
-                            <a:srgbClr val="94A3B8"/>
-                          </a:solidFill>
-                          <a:latin typeface="Arial" pitchFamily="34" charset="0"/>
-                          <a:ea typeface="Arial" pitchFamily="34" charset="-122"/>
-                          <a:cs typeface="Arial" pitchFamily="34" charset="-120"/>
-                        </a:rPr>
-                        <a:t>C</a:t>
-                      </a:r>
-                      <a:endParaRPr lang="en-US" sz="1200" dirty="0">
-                        <a:latin typeface="Arial" charset="0"/>
-                        <a:ea typeface="Arial" charset="0"/>
-                        <a:cs typeface="Arial" charset="0"/>
-                      </a:endParaRPr>
-                    </a:p>
-                  </a:txBody>
-                  <a:tcPr marL="91440" marR="91440" marT="45720" marB="45720">
-                    <a:lnL w="6350" cap="flat" cmpd="sng" algn="ctr">
-                      <a:solidFill>
-                        <a:srgbClr val="CBD5E1"/>
-                      </a:solidFill>
-                      <a:prstDash val="solid"/>
-                      <a:round/>
-                      <a:headEnd type="none" w="med" len="med"/>
-                      <a:tailEnd type="none" w="med" len="med"/>
-                    </a:lnL>
-                    <a:lnR w="6350" cap="flat" cmpd="sng" algn="ctr">
-                      <a:solidFill>
-                        <a:srgbClr val="CBD5E1"/>
-                      </a:solidFill>
-                      <a:prstDash val="solid"/>
-                      <a:round/>
-                      <a:headEnd type="none" w="med" len="med"/>
-                      <a:tailEnd type="none" w="med" len="med"/>
-                    </a:lnR>
-                    <a:lnT w="6350" cap="flat" cmpd="sng" algn="ctr">
-                      <a:solidFill>
-                        <a:srgbClr val="CBD5E1"/>
-                      </a:solidFill>
-                      <a:prstDash val="solid"/>
-                      <a:round/>
-                      <a:headEnd type="none" w="med" len="med"/>
-                      <a:tailEnd type="none" w="med" len="med"/>
-                    </a:lnT>
-                    <a:lnB w="6350" cap="flat" cmpd="sng" algn="ctr">
-                      <a:solidFill>
-                        <a:srgbClr val="CBD5E1"/>
-                      </a:solidFill>
-                      <a:prstDash val="solid"/>
-                      <a:round/>
-                      <a:headEnd type="none" w="med" len="med"/>
-                      <a:tailEnd type="none" w="med" len="med"/>
-                    </a:lnB>
-                    <a:solidFill>
-                      <a:srgbClr val="E8EFF8"/>
-                    </a:solidFill>
-                  </a:tcPr>
-                </a:tc>
-                <a:tc>
-                  <a:txBody>
-                    <a:bodyPr/>
-                    <a:lstStyle/>
-                    <a:p>
-                      <a:pPr indent="0" marL="0">
-                        <a:buNone/>
-                      </a:pPr>
-                      <a:r>
-                        <a:rPr lang="en-US" sz="900" b="1" dirty="0">
-                          <a:solidFill>
-                            <a:srgbClr val="334155"/>
-                          </a:solidFill>
-                          <a:latin typeface="Arial" pitchFamily="34" charset="0"/>
-                          <a:ea typeface="Arial" pitchFamily="34" charset="-122"/>
-                          <a:cs typeface="Arial" pitchFamily="34" charset="-120"/>
-                        </a:rPr>
-                        <a:t>清掃不備</a:t>
-                      </a:r>
-                      <a:endParaRPr lang="en-US" sz="900" dirty="0">
-                        <a:latin typeface="Arial" charset="0"/>
-                        <a:ea typeface="Arial" charset="0"/>
-                        <a:cs typeface="Arial" charset="0"/>
-                      </a:endParaRPr>
-                    </a:p>
-                  </a:txBody>
-                  <a:tcPr marL="91440" marR="91440" marT="45720" marB="45720">
-                    <a:lnL w="6350" cap="flat" cmpd="sng" algn="ctr">
-                      <a:solidFill>
-                        <a:srgbClr val="CBD5E1"/>
-                      </a:solidFill>
-                      <a:prstDash val="solid"/>
-                      <a:round/>
-                      <a:headEnd type="none" w="med" len="med"/>
-                      <a:tailEnd type="none" w="med" len="med"/>
-                    </a:lnL>
-                    <a:lnR w="6350" cap="flat" cmpd="sng" algn="ctr">
-                      <a:solidFill>
-                        <a:srgbClr val="CBD5E1"/>
-                      </a:solidFill>
-                      <a:prstDash val="solid"/>
-                      <a:round/>
-                      <a:headEnd type="none" w="med" len="med"/>
-                      <a:tailEnd type="none" w="med" len="med"/>
-                    </a:lnR>
-                    <a:lnT w="6350" cap="flat" cmpd="sng" algn="ctr">
-                      <a:solidFill>
-                        <a:srgbClr val="CBD5E1"/>
-                      </a:solidFill>
-                      <a:prstDash val="solid"/>
-                      <a:round/>
-                      <a:headEnd type="none" w="med" len="med"/>
-                      <a:tailEnd type="none" w="med" len="med"/>
-                    </a:lnT>
-                    <a:lnB w="6350" cap="flat" cmpd="sng" algn="ctr">
-                      <a:solidFill>
-                        <a:srgbClr val="CBD5E1"/>
-                      </a:solidFill>
-                      <a:prstDash val="solid"/>
-                      <a:round/>
-                      <a:headEnd type="none" w="med" len="med"/>
-                      <a:tailEnd type="none" w="med" len="med"/>
-                    </a:lnB>
-                    <a:solidFill>
-                      <a:srgbClr val="E8EFF8"/>
-                    </a:solidFill>
-                  </a:tcPr>
-                </a:tc>
-                <a:tc>
-                  <a:txBody>
-                    <a:bodyPr/>
-                    <a:lstStyle/>
-                    <a:p>
-                      <a:pPr indent="0" marL="0">
-                        <a:buNone/>
-                      </a:pPr>
-                      <a:r>
-                        <a:rPr lang="en-US" sz="900" dirty="0">
-                          <a:solidFill>
-                            <a:srgbClr val="64748B"/>
-                          </a:solidFill>
-                          <a:latin typeface="Arial" pitchFamily="34" charset="0"/>
-                          <a:ea typeface="Arial" pitchFamily="34" charset="-122"/>
-                          <a:cs typeface="Arial" pitchFamily="34" charset="-120"/>
-                        </a:rPr>
-                        <a:t>机の下に前の方のゴミが落ちていてその点だけが少し残念…</a:t>
+                        <a:t>部屋は少し古いが、一階に自販機や電子レンジがあり助かった</a:t>
                       </a:r>
                       <a:endParaRPr lang="en-US" sz="900" dirty="0">
                         <a:latin typeface="Arial" charset="0"/>
@@ -15605,7 +15074,7 @@
                 <a:ea typeface="Arial" pitchFamily="34" charset="-122"/>
                 <a:cs typeface="Arial" pitchFamily="34" charset="-120"/>
               </a:rPr>
-              <a:t>清掃品質の向上</a:t>
+              <a:t>エアコン・空調の定期点検強化</a:t>
             </a:r>
             <a:endParaRPr lang="en-US" sz="1200" dirty="0"/>
           </a:p>
@@ -15620,177 +15089,6 @@
         <p:spPr>
           <a:xfrm>
             <a:off x="4800600" y="1600200"/>
-            <a:ext cx="3657600" cy="1188720"/>
-          </a:xfrm>
-          <a:prstGeom prst="rect">
-            <a:avLst/>
-          </a:prstGeom>
-          <a:noFill/>
-          <a:ln/>
-        </p:spPr>
-        <p:txBody>
-          <a:bodyPr wrap="square" lIns="0" tIns="0" rIns="0" bIns="0" rtlCol="0" anchor="ctr"/>
-          <a:lstStyle/>
-          <a:p>
-            <a:pPr marL="342900" indent="-342900">
-              <a:spcAft>
-                <a:spcPts val="300"/>
-              </a:spcAft>
-              <a:buSzPct val="100000"/>
-              <a:buChar char="•"/>
-            </a:pPr>
-            <a:r>
-              <a:rPr lang="en-US" sz="900" dirty="0">
-                <a:solidFill>
-                  <a:srgbClr val="334155"/>
-                </a:solidFill>
-                <a:latin typeface="Arial" pitchFamily="34" charset="0"/>
-                <a:ea typeface="Arial" pitchFamily="34" charset="-122"/>
-                <a:cs typeface="Arial" pitchFamily="34" charset="-120"/>
-              </a:rPr>
-              <a:t>清掃チェックリストの見直しと強化（ベッド下・隅の重点確認）</a:t>
-            </a:r>
-            <a:endParaRPr lang="en-US" sz="900" dirty="0"/>
-          </a:p>
-          <a:p>
-            <a:pPr marL="342900" indent="-342900">
-              <a:spcAft>
-                <a:spcPts val="300"/>
-              </a:spcAft>
-              <a:buSzPct val="100000"/>
-              <a:buChar char="•"/>
-            </a:pPr>
-            <a:r>
-              <a:rPr lang="en-US" sz="900" dirty="0">
-                <a:solidFill>
-                  <a:srgbClr val="334155"/>
-                </a:solidFill>
-                <a:latin typeface="Arial" pitchFamily="34" charset="0"/>
-                <a:ea typeface="Arial" pitchFamily="34" charset="-122"/>
-                <a:cs typeface="Arial" pitchFamily="34" charset="-120"/>
-              </a:rPr>
-              <a:t>清掃後のダブルチェック体制の導入</a:t>
-            </a:r>
-            <a:endParaRPr lang="en-US" sz="900" dirty="0"/>
-          </a:p>
-          <a:p>
-            <a:pPr marL="342900" indent="-342900">
-              <a:spcAft>
-                <a:spcPts val="300"/>
-              </a:spcAft>
-              <a:buSzPct val="100000"/>
-              <a:buChar char="•"/>
-            </a:pPr>
-            <a:r>
-              <a:rPr lang="en-US" sz="900" dirty="0">
-                <a:solidFill>
-                  <a:srgbClr val="334155"/>
-                </a:solidFill>
-                <a:latin typeface="Arial" pitchFamily="34" charset="0"/>
-                <a:ea typeface="Arial" pitchFamily="34" charset="-122"/>
-                <a:cs typeface="Arial" pitchFamily="34" charset="-120"/>
-              </a:rPr>
-              <a:t>清掃スタッフへの再研修実施</a:t>
-            </a:r>
-            <a:endParaRPr lang="en-US" sz="900" dirty="0"/>
-          </a:p>
-        </p:txBody>
-      </p:sp>
-      <p:sp>
-        <p:nvSpPr>
-          <p:cNvPr id="14" name="Shape 12"/>
-          <p:cNvSpPr/>
-          <p:nvPr/>
-        </p:nvSpPr>
-        <p:spPr>
-          <a:xfrm>
-            <a:off x="457200" y="3017520"/>
-            <a:ext cx="3977640" cy="1600200"/>
-          </a:xfrm>
-          <a:prstGeom prst="rect">
-            <a:avLst/>
-          </a:prstGeom>
-          <a:solidFill>
-            <a:srgbClr val="FFFFFF"/>
-          </a:solidFill>
-          <a:ln/>
-          <a:effectLst>
-            <a:outerShdw sx="100000" sy="100000" kx="0" ky="0" algn="bl" rotWithShape="0" blurRad="50800" dist="25400" dir="8100000">
-              <a:srgbClr val="000000">
-                <a:alpha val="10000"/>
-              </a:srgbClr>
-            </a:outerShdw>
-          </a:effectLst>
-        </p:spPr>
-      </p:sp>
-      <p:sp>
-        <p:nvSpPr>
-          <p:cNvPr id="15" name="Shape 13"/>
-          <p:cNvSpPr/>
-          <p:nvPr/>
-        </p:nvSpPr>
-        <p:spPr>
-          <a:xfrm>
-            <a:off x="457200" y="3017520"/>
-            <a:ext cx="54864" cy="1600200"/>
-          </a:xfrm>
-          <a:prstGeom prst="rect">
-            <a:avLst/>
-          </a:prstGeom>
-          <a:solidFill>
-            <a:srgbClr val="3B7DD8"/>
-          </a:solidFill>
-          <a:ln/>
-        </p:spPr>
-      </p:sp>
-      <p:sp>
-        <p:nvSpPr>
-          <p:cNvPr id="16" name="Text 14"/>
-          <p:cNvSpPr/>
-          <p:nvPr/>
-        </p:nvSpPr>
-        <p:spPr>
-          <a:xfrm>
-            <a:off x="594360" y="3063240"/>
-            <a:ext cx="3657600" cy="320040"/>
-          </a:xfrm>
-          <a:prstGeom prst="rect">
-            <a:avLst/>
-          </a:prstGeom>
-          <a:noFill/>
-          <a:ln/>
-        </p:spPr>
-        <p:txBody>
-          <a:bodyPr wrap="square" lIns="0" tIns="0" rIns="0" bIns="0" rtlCol="0" anchor="ctr"/>
-          <a:lstStyle/>
-          <a:p>
-            <a:pPr indent="0" marL="0">
-              <a:buNone/>
-            </a:pPr>
-            <a:r>
-              <a:rPr lang="en-US" sz="1200" b="1" dirty="0">
-                <a:solidFill>
-                  <a:srgbClr val="1A2744"/>
-                </a:solidFill>
-                <a:latin typeface="Arial" pitchFamily="34" charset="0"/>
-                <a:ea typeface="Arial" pitchFamily="34" charset="-122"/>
-                <a:cs typeface="Arial" pitchFamily="34" charset="-120"/>
-              </a:rPr>
-              <a:t>エアコン・空調の定期点検強化</a:t>
-            </a:r>
-            <a:endParaRPr lang="en-US" sz="1200" dirty="0"/>
-          </a:p>
-        </p:txBody>
-      </p:sp>
-      <p:sp>
-        <p:nvSpPr>
-          <p:cNvPr id="17" name="Text 15"/>
-          <p:cNvSpPr/>
-          <p:nvPr/>
-        </p:nvSpPr>
-        <p:spPr>
-          <a:xfrm>
-            <a:off x="594360" y="3383280"/>
             <a:ext cx="3657600" cy="1188720"/>
           </a:xfrm>
           <a:prstGeom prst="rect">
@@ -15869,13 +15167,13 @@
       </p:sp>
       <p:sp>
         <p:nvSpPr>
-          <p:cNvPr id="18" name="Shape 16"/>
-          <p:cNvSpPr/>
-          <p:nvPr/>
-        </p:nvSpPr>
-        <p:spPr>
-          <a:xfrm>
-            <a:off x="4663440" y="3017520"/>
+          <p:cNvPr id="14" name="Shape 12"/>
+          <p:cNvSpPr/>
+          <p:nvPr/>
+        </p:nvSpPr>
+        <p:spPr>
+          <a:xfrm>
+            <a:off x="457200" y="3017520"/>
             <a:ext cx="3977640" cy="1600200"/>
           </a:xfrm>
           <a:prstGeom prst="rect">
@@ -15896,13 +15194,13 @@
       </p:sp>
       <p:sp>
         <p:nvSpPr>
-          <p:cNvPr id="19" name="Shape 17"/>
-          <p:cNvSpPr/>
-          <p:nvPr/>
-        </p:nvSpPr>
-        <p:spPr>
-          <a:xfrm>
-            <a:off x="4663440" y="3017520"/>
+          <p:cNvPr id="15" name="Shape 13"/>
+          <p:cNvSpPr/>
+          <p:nvPr/>
+        </p:nvSpPr>
+        <p:spPr>
+          <a:xfrm>
+            <a:off x="457200" y="3017520"/>
             <a:ext cx="54864" cy="1600200"/>
           </a:xfrm>
           <a:prstGeom prst="rect">
@@ -15916,13 +15214,13 @@
       </p:sp>
       <p:sp>
         <p:nvSpPr>
-          <p:cNvPr id="20" name="Text 18"/>
-          <p:cNvSpPr/>
-          <p:nvPr/>
-        </p:nvSpPr>
-        <p:spPr>
-          <a:xfrm>
-            <a:off x="4800600" y="3063240"/>
+          <p:cNvPr id="16" name="Text 14"/>
+          <p:cNvSpPr/>
+          <p:nvPr/>
+        </p:nvSpPr>
+        <p:spPr>
+          <a:xfrm>
+            <a:off x="594360" y="3063240"/>
             <a:ext cx="3657600" cy="320040"/>
           </a:xfrm>
           <a:prstGeom prst="rect">
@@ -15955,13 +15253,13 @@
       </p:sp>
       <p:sp>
         <p:nvSpPr>
-          <p:cNvPr id="21" name="Text 19"/>
-          <p:cNvSpPr/>
-          <p:nvPr/>
-        </p:nvSpPr>
-        <p:spPr>
-          <a:xfrm>
-            <a:off x="4800600" y="3383280"/>
+          <p:cNvPr id="17" name="Text 15"/>
+          <p:cNvSpPr/>
+          <p:nvPr/>
+        </p:nvSpPr>
+        <p:spPr>
+          <a:xfrm>
+            <a:off x="594360" y="3383280"/>
             <a:ext cx="3657600" cy="1188720"/>
           </a:xfrm>
           <a:prstGeom prst="rect">
@@ -16040,7 +15338,7 @@
       </p:sp>
       <p:sp>
         <p:nvSpPr>
-          <p:cNvPr id="22" name="Shape 20"/>
+          <p:cNvPr id="18" name="Shape 16"/>
           <p:cNvSpPr/>
           <p:nvPr/>
         </p:nvSpPr>
@@ -16060,7 +15358,7 @@
       </p:sp>
       <p:sp>
         <p:nvSpPr>
-          <p:cNvPr id="23" name="Text 21"/>
+          <p:cNvPr id="19" name="Text 17"/>
           <p:cNvSpPr/>
           <p:nvPr/>
         </p:nvSpPr>
@@ -16099,7 +15397,7 @@
       </p:sp>
       <p:sp>
         <p:nvSpPr>
-          <p:cNvPr id="24" name="Text 22"/>
+          <p:cNvPr id="20" name="Text 18"/>
           <p:cNvSpPr/>
           <p:nvPr/>
         </p:nvSpPr>

--- a/納品レポート/ホテル別レポート/hearton_口コミ分析レポート.pptx
+++ b/納品レポート/ホテル別レポート/hearton_口コミ分析レポート.pptx
@@ -211,7 +211,7 @@
                   <c:v>9.38</c:v>
                 </c:pt>
                 <c:pt idx="1">
-                  <c:v>8.71</c:v>
+                  <c:v>8.67</c:v>
                 </c:pt>
                 <c:pt idx="2">
                   <c:v>8.43</c:v>
@@ -566,7 +566,7 @@
               <c:numCache>
                 <c:ptCount val="3"/>
                 <c:pt idx="0">
-                  <c:v>69</c:v>
+                  <c:v>70</c:v>
                 </c:pt>
                 <c:pt idx="1">
                   <c:v>13</c:v>
@@ -801,7 +801,7 @@
                   <c:v>12</c:v>
                 </c:pt>
                 <c:pt idx="2">
-                  <c:v>26</c:v>
+                  <c:v>27</c:v>
                 </c:pt>
                 <c:pt idx="3">
                   <c:v>3</c:v>
@@ -2764,7 +2764,7 @@
                 <a:ea typeface="Arial" pitchFamily="34" charset="-122"/>
                 <a:cs typeface="Arial" pitchFamily="34" charset="-120"/>
               </a:rPr>
-              <a:t>レビュー総数：84件（6サイト）</a:t>
+              <a:t>レビュー総数：85件（6サイト）</a:t>
             </a:r>
             <a:endParaRPr lang="en-US" sz="1000" dirty="0"/>
           </a:p>
@@ -3604,7 +3604,7 @@
                           <a:ea typeface="Arial" pitchFamily="34" charset="-122"/>
                           <a:cs typeface="Arial" pitchFamily="34" charset="-120"/>
                         </a:rPr>
-                        <a:t>82.1%</a:t>
+                        <a:t>82.4%</a:t>
                       </a:r>
                       <a:endParaRPr lang="en-US" sz="1000" dirty="0">
                         <a:latin typeface="Arial" charset="0"/>
@@ -5464,7 +5464,7 @@
                 <a:ea typeface="Arial" pitchFamily="34" charset="-122"/>
                 <a:cs typeface="Arial" pitchFamily="34" charset="-120"/>
               </a:rPr>
-              <a:t>82.1%</a:t>
+              <a:t>82.4%</a:t>
             </a:r>
             <a:endParaRPr lang="en-US" sz="3200" dirty="0"/>
           </a:p>
@@ -5714,7 +5714,7 @@
                 <a:ea typeface="Arial" pitchFamily="34" charset="-122"/>
                 <a:cs typeface="Arial" pitchFamily="34" charset="-120"/>
               </a:rPr>
-              <a:t>84件</a:t>
+              <a:t>85件</a:t>
             </a:r>
             <a:endParaRPr lang="en-US" sz="3200" dirty="0"/>
           </a:p>
@@ -6648,7 +6648,7 @@
                 <a:ea typeface="Arial" pitchFamily="34" charset="-122"/>
                 <a:cs typeface="Arial" pitchFamily="34" charset="-120"/>
               </a:rPr>
-              <a:t>82.1%</a:t>
+              <a:t>82.4%</a:t>
             </a:r>
             <a:endParaRPr lang="en-US" sz="3200" dirty="0"/>
           </a:p>
@@ -6898,7 +6898,7 @@
                 <a:ea typeface="Arial" pitchFamily="34" charset="-122"/>
                 <a:cs typeface="Arial" pitchFamily="34" charset="-120"/>
               </a:rPr>
-              <a:t>84件</a:t>
+              <a:t>85件</a:t>
             </a:r>
             <a:endParaRPr lang="en-US" sz="3200" dirty="0"/>
           </a:p>
@@ -8219,7 +8219,7 @@
                           <a:ea typeface="Arial" pitchFamily="34" charset="-122"/>
                           <a:cs typeface="Arial" pitchFamily="34" charset="-120"/>
                         </a:rPr>
-                        <a:t>17</a:t>
+                        <a:t>18</a:t>
                       </a:r>
                       <a:endParaRPr lang="en-US" sz="900" dirty="0">
                         <a:latin typeface="Arial" charset="0"/>
@@ -8287,7 +8287,7 @@
                           <a:ea typeface="Arial" pitchFamily="34" charset="-122"/>
                           <a:cs typeface="Arial" pitchFamily="34" charset="-120"/>
                         </a:rPr>
-                        <a:t>4.35</a:t>
+                        <a:t>4.33</a:t>
                       </a:r>
                       <a:endParaRPr lang="en-US" sz="900" dirty="0">
                         <a:latin typeface="Arial" charset="0"/>
@@ -8423,7 +8423,7 @@
                           <a:ea typeface="Arial" pitchFamily="34" charset="-122"/>
                           <a:cs typeface="Arial" pitchFamily="34" charset="-120"/>
                         </a:rPr>
-                        <a:t>8.71</a:t>
+                        <a:t>8.67</a:t>
                       </a:r>
                       <a:endParaRPr lang="en-US" sz="900" dirty="0">
                         <a:latin typeface="Arial" charset="0"/>
@@ -10199,7 +10199,7 @@
                 <a:ea typeface="Arial" pitchFamily="34" charset="-122"/>
                 <a:cs typeface="Arial" pitchFamily="34" charset="-120"/>
               </a:rPr>
-              <a:t>69件（82.1%）</a:t>
+              <a:t>70件（82.4%）</a:t>
             </a:r>
             <a:endParaRPr lang="en-US" sz="1100" dirty="0"/>
           </a:p>
@@ -10297,7 +10297,7 @@
                 <a:ea typeface="Arial" pitchFamily="34" charset="-122"/>
                 <a:cs typeface="Arial" pitchFamily="34" charset="-120"/>
               </a:rPr>
-              <a:t>13件（15.5%）</a:t>
+              <a:t>13件（15.3%）</a:t>
             </a:r>
             <a:endParaRPr lang="en-US" sz="1100" dirty="0"/>
           </a:p>
@@ -10846,7 +10846,7 @@
                 <a:ea typeface="Arial" pitchFamily="34" charset="-122"/>
                 <a:cs typeface="Arial" pitchFamily="34" charset="-120"/>
               </a:rPr>
-              <a:t>「駅近のきれいなホテルです」</a:t>
+              <a:t>「駅も近く、目の前のはイオン」</a:t>
             </a:r>
             <a:endParaRPr lang="en-US" sz="900" dirty="0"/>
           </a:p>

--- a/納品レポート/ホテル別レポート/hearton_口コミ分析レポート.pptx
+++ b/納品レポート/ホテル別レポート/hearton_口コミ分析レポート.pptx
@@ -214,16 +214,16 @@
                   <c:v>8.67</c:v>
                 </c:pt>
                 <c:pt idx="2">
-                  <c:v>8.43</c:v>
+                  <c:v>8.52</c:v>
                 </c:pt>
                 <c:pt idx="3">
-                  <c:v>8.11</c:v>
+                  <c:v>8.1</c:v>
                 </c:pt>
                 <c:pt idx="4">
                   <c:v>8</c:v>
                 </c:pt>
                 <c:pt idx="5">
-                  <c:v>7.25</c:v>
+                  <c:v>7.11</c:v>
                 </c:pt>
               </c:numCache>
             </c:numRef>
@@ -566,10 +566,10 @@
               <c:numCache>
                 <c:ptCount val="3"/>
                 <c:pt idx="0">
-                  <c:v>71</c:v>
+                  <c:v>75</c:v>
                 </c:pt>
                 <c:pt idx="1">
-                  <c:v>14</c:v>
+                  <c:v>15</c:v>
                 </c:pt>
                 <c:pt idx="2">
                   <c:v>2</c:v>
@@ -795,19 +795,19 @@
                 <c:formatCode>General</c:formatCode>
                 <c:ptCount val="7"/>
                 <c:pt idx="0">
-                  <c:v>31</c:v>
+                  <c:v>32</c:v>
                 </c:pt>
                 <c:pt idx="1">
-                  <c:v>13</c:v>
+                  <c:v>14</c:v>
                 </c:pt>
                 <c:pt idx="2">
-                  <c:v>27</c:v>
+                  <c:v>29</c:v>
                 </c:pt>
                 <c:pt idx="3">
                   <c:v>3</c:v>
                 </c:pt>
                 <c:pt idx="4">
-                  <c:v>9</c:v>
+                  <c:v>10</c:v>
                 </c:pt>
                 <c:pt idx="5">
                   <c:v>2</c:v>
@@ -2764,7 +2764,7 @@
                 <a:ea typeface="Arial" pitchFamily="34" charset="-122"/>
                 <a:cs typeface="Arial" pitchFamily="34" charset="-120"/>
               </a:rPr>
-              <a:t>レビュー総数：87件（6サイト）</a:t>
+              <a:t>レビュー総数：92件（6サイト）</a:t>
             </a:r>
             <a:endParaRPr lang="en-US" sz="1000" dirty="0"/>
           </a:p>
@@ -2784,7 +2784,7 @@
                 <a:ea typeface="Arial" pitchFamily="34" charset="-122"/>
                 <a:cs typeface="Arial" pitchFamily="34" charset="-120"/>
               </a:rPr>
-              <a:t>作成日：2026年4月6日</a:t>
+              <a:t>作成日：2026年4月7日</a:t>
             </a:r>
             <a:endParaRPr lang="en-US" sz="1000" dirty="0"/>
           </a:p>
@@ -3330,7 +3330,7 @@
                           <a:ea typeface="Arial" pitchFamily="34" charset="-122"/>
                           <a:cs typeface="Arial" pitchFamily="34" charset="-120"/>
                         </a:rPr>
-                        <a:t>8.41点</a:t>
+                        <a:t>8.40点</a:t>
                       </a:r>
                       <a:endParaRPr lang="en-US" sz="1000" dirty="0">
                         <a:latin typeface="Arial" charset="0"/>
@@ -3604,7 +3604,7 @@
                           <a:ea typeface="Arial" pitchFamily="34" charset="-122"/>
                           <a:cs typeface="Arial" pitchFamily="34" charset="-120"/>
                         </a:rPr>
-                        <a:t>81.6%</a:t>
+                        <a:t>81.5%</a:t>
                       </a:r>
                       <a:endParaRPr lang="en-US" sz="1000" dirty="0">
                         <a:latin typeface="Arial" charset="0"/>
@@ -3878,7 +3878,7 @@
                           <a:ea typeface="Arial" pitchFamily="34" charset="-122"/>
                           <a:cs typeface="Arial" pitchFamily="34" charset="-120"/>
                         </a:rPr>
-                        <a:t>2.3%</a:t>
+                        <a:t>2.2%</a:t>
                       </a:r>
                       <a:endParaRPr lang="en-US" sz="1000" dirty="0">
                         <a:latin typeface="Arial" charset="0"/>
@@ -4152,7 +4152,7 @@
                           <a:ea typeface="Arial" pitchFamily="34" charset="-122"/>
                           <a:cs typeface="Arial" pitchFamily="34" charset="-120"/>
                         </a:rPr>
-                        <a:t>7.3点</a:t>
+                        <a:t>7.1点</a:t>
                       </a:r>
                       <a:endParaRPr lang="en-US" sz="1000" dirty="0">
                         <a:latin typeface="Arial" charset="0"/>
@@ -4220,7 +4220,7 @@
                           <a:ea typeface="Arial" pitchFamily="34" charset="-122"/>
                           <a:cs typeface="Arial" pitchFamily="34" charset="-120"/>
                         </a:rPr>
-                        <a:t>8.3点以上</a:t>
+                        <a:t>8.1点以上</a:t>
                       </a:r>
                       <a:endParaRPr lang="en-US" sz="1000" dirty="0">
                         <a:latin typeface="Arial" charset="0"/>
@@ -5339,7 +5339,7 @@
                 <a:ea typeface="Arial" pitchFamily="34" charset="-122"/>
                 <a:cs typeface="Arial" pitchFamily="34" charset="-120"/>
               </a:rPr>
-              <a:t>8.41</a:t>
+              <a:t>8.40</a:t>
             </a:r>
             <a:endParaRPr lang="en-US" sz="3200" dirty="0"/>
           </a:p>
@@ -5464,7 +5464,7 @@
                 <a:ea typeface="Arial" pitchFamily="34" charset="-122"/>
                 <a:cs typeface="Arial" pitchFamily="34" charset="-120"/>
               </a:rPr>
-              <a:t>81.6%</a:t>
+              <a:t>81.5%</a:t>
             </a:r>
             <a:endParaRPr lang="en-US" sz="3200" dirty="0"/>
           </a:p>
@@ -5589,7 +5589,7 @@
                 <a:ea typeface="Arial" pitchFamily="34" charset="-122"/>
                 <a:cs typeface="Arial" pitchFamily="34" charset="-120"/>
               </a:rPr>
-              <a:t>2.3%</a:t>
+              <a:t>2.2%</a:t>
             </a:r>
             <a:endParaRPr lang="en-US" sz="3200" dirty="0"/>
           </a:p>
@@ -5714,7 +5714,7 @@
                 <a:ea typeface="Arial" pitchFamily="34" charset="-122"/>
                 <a:cs typeface="Arial" pitchFamily="34" charset="-120"/>
               </a:rPr>
-              <a:t>87件</a:t>
+              <a:t>92件</a:t>
             </a:r>
             <a:endParaRPr lang="en-US" sz="3200" dirty="0"/>
           </a:p>
@@ -5862,7 +5862,7 @@
                 <a:ea typeface="Arial" pitchFamily="34" charset="-122"/>
                 <a:cs typeface="Arial" pitchFamily="34" charset="-120"/>
               </a:rPr>
-              <a:t>  雨降りで風も強い日でしたが、駅前の好立地で、近くにコンビニやイオンがあってすごく良かったです</a:t>
+              <a:t>  Camera più spaziosa della media e colazione molto abbonda...</a:t>
             </a:r>
             <a:endParaRPr lang="en-US" sz="1100" dirty="0"/>
           </a:p>
@@ -5902,7 +5902,7 @@
                 <a:ea typeface="Arial" pitchFamily="34" charset="-122"/>
                 <a:cs typeface="Arial" pitchFamily="34" charset="-120"/>
               </a:rPr>
-              <a:t>  一昨年利用した時は清潔感があり、良い印象だったので、また利用しましたが、今回は残念でした</a:t>
+              <a:t>  連続滞在の場合に清掃しないという特別なポリシーはありません</a:t>
             </a:r>
             <a:endParaRPr lang="en-US" sz="1100" dirty="0"/>
           </a:p>
@@ -5942,7 +5942,7 @@
                 <a:ea typeface="Arial" pitchFamily="34" charset="-122"/>
                 <a:cs typeface="Arial" pitchFamily="34" charset="-120"/>
               </a:rPr>
-              <a:t>  アクセスが良く、フロントの方の対応も悪くなかっただけに残念です</a:t>
+              <a:t>  タオルや歯ブラシの交換が必要な場合は、フロントにお申し付けください</a:t>
             </a:r>
             <a:endParaRPr lang="en-US" sz="1100" dirty="0"/>
           </a:p>
@@ -6130,7 +6130,7 @@
                 <a:ea typeface="Arial" pitchFamily="34" charset="-122"/>
                 <a:cs typeface="Arial" pitchFamily="34" charset="-120"/>
               </a:rPr>
-              <a:t>  Very clean place, good place to stay the night after long...</a:t>
+              <a:t>  comで喫煙室を予約したため、部屋はタバコの臭いがひどく、エアコンをつけると悪臭がしました</a:t>
             </a:r>
             <a:endParaRPr lang="en-US" sz="1100" dirty="0"/>
           </a:p>
@@ -6523,7 +6523,7 @@
                 <a:ea typeface="Arial" pitchFamily="34" charset="-122"/>
                 <a:cs typeface="Arial" pitchFamily="34" charset="-120"/>
               </a:rPr>
-              <a:t>8.41</a:t>
+              <a:t>8.40</a:t>
             </a:r>
             <a:endParaRPr lang="en-US" sz="3200" dirty="0"/>
           </a:p>
@@ -6648,7 +6648,7 @@
                 <a:ea typeface="Arial" pitchFamily="34" charset="-122"/>
                 <a:cs typeface="Arial" pitchFamily="34" charset="-120"/>
               </a:rPr>
-              <a:t>81.6%</a:t>
+              <a:t>81.5%</a:t>
             </a:r>
             <a:endParaRPr lang="en-US" sz="3200" dirty="0"/>
           </a:p>
@@ -6773,7 +6773,7 @@
                 <a:ea typeface="Arial" pitchFamily="34" charset="-122"/>
                 <a:cs typeface="Arial" pitchFamily="34" charset="-120"/>
               </a:rPr>
-              <a:t>2.3%</a:t>
+              <a:t>2.2%</a:t>
             </a:r>
             <a:endParaRPr lang="en-US" sz="3200" dirty="0"/>
           </a:p>
@@ -6898,7 +6898,7 @@
                 <a:ea typeface="Arial" pitchFamily="34" charset="-122"/>
                 <a:cs typeface="Arial" pitchFamily="34" charset="-120"/>
               </a:rPr>
-              <a:t>87件</a:t>
+              <a:t>92件</a:t>
             </a:r>
             <a:endParaRPr lang="en-US" sz="3200" dirty="0"/>
           </a:p>
@@ -7368,7 +7368,7 @@
                 <a:ea typeface="Arial" pitchFamily="34" charset="-122"/>
                 <a:cs typeface="Arial" pitchFamily="34" charset="-120"/>
               </a:rPr>
-              <a:t>Google(7.3)が相対的に低い。口コミ返信の強化が急務</a:t>
+              <a:t>Google(7.1)が相対的に低い。口コミ返信の強化が急務</a:t>
             </a:r>
             <a:endParaRPr lang="en-US" sz="1100" dirty="0"/>
           </a:p>
@@ -8561,7 +8561,7 @@
                           <a:ea typeface="Arial" pitchFamily="34" charset="-122"/>
                           <a:cs typeface="Arial" pitchFamily="34" charset="-120"/>
                         </a:rPr>
-                        <a:t>23</a:t>
+                        <a:t>25</a:t>
                       </a:r>
                       <a:endParaRPr lang="en-US" sz="900" dirty="0">
                         <a:latin typeface="Arial" charset="0"/>
@@ -8629,7 +8629,7 @@
                           <a:ea typeface="Arial" pitchFamily="34" charset="-122"/>
                           <a:cs typeface="Arial" pitchFamily="34" charset="-120"/>
                         </a:rPr>
-                        <a:t>8.43</a:t>
+                        <a:t>8.52</a:t>
                       </a:r>
                       <a:endParaRPr lang="en-US" sz="900" dirty="0">
                         <a:latin typeface="Arial" charset="0"/>
@@ -8765,7 +8765,7 @@
                           <a:ea typeface="Arial" pitchFamily="34" charset="-122"/>
                           <a:cs typeface="Arial" pitchFamily="34" charset="-120"/>
                         </a:rPr>
-                        <a:t>8.43</a:t>
+                        <a:t>8.52</a:t>
                       </a:r>
                       <a:endParaRPr lang="en-US" sz="900" dirty="0">
                         <a:latin typeface="Arial" charset="0"/>
@@ -8903,7 +8903,7 @@
                           <a:ea typeface="Arial" pitchFamily="34" charset="-122"/>
                           <a:cs typeface="Arial" pitchFamily="34" charset="-120"/>
                         </a:rPr>
-                        <a:t>18</a:t>
+                        <a:t>20</a:t>
                       </a:r>
                       <a:endParaRPr lang="en-US" sz="900" dirty="0">
                         <a:latin typeface="Arial" charset="0"/>
@@ -8971,7 +8971,7 @@
                           <a:ea typeface="Arial" pitchFamily="34" charset="-122"/>
                           <a:cs typeface="Arial" pitchFamily="34" charset="-120"/>
                         </a:rPr>
-                        <a:t>4.06</a:t>
+                        <a:t>4.05</a:t>
                       </a:r>
                       <a:endParaRPr lang="en-US" sz="900" dirty="0">
                         <a:latin typeface="Arial" charset="0"/>
@@ -9107,7 +9107,7 @@
                           <a:ea typeface="Arial" pitchFamily="34" charset="-122"/>
                           <a:cs typeface="Arial" pitchFamily="34" charset="-120"/>
                         </a:rPr>
-                        <a:t>8.11</a:t>
+                        <a:t>8.1</a:t>
                       </a:r>
                       <a:endParaRPr lang="en-US" sz="900" dirty="0">
                         <a:latin typeface="Arial" charset="0"/>
@@ -9587,7 +9587,7 @@
                           <a:ea typeface="Arial" pitchFamily="34" charset="-122"/>
                           <a:cs typeface="Arial" pitchFamily="34" charset="-120"/>
                         </a:rPr>
-                        <a:t>8</a:t>
+                        <a:t>9</a:t>
                       </a:r>
                       <a:endParaRPr lang="en-US" sz="900" dirty="0">
                         <a:latin typeface="Arial" charset="0"/>
@@ -9655,7 +9655,7 @@
                           <a:ea typeface="Arial" pitchFamily="34" charset="-122"/>
                           <a:cs typeface="Arial" pitchFamily="34" charset="-120"/>
                         </a:rPr>
-                        <a:t>3.62</a:t>
+                        <a:t>3.56</a:t>
                       </a:r>
                       <a:endParaRPr lang="en-US" sz="900" dirty="0">
                         <a:latin typeface="Arial" charset="0"/>
@@ -9791,7 +9791,7 @@
                           <a:ea typeface="Arial" pitchFamily="34" charset="-122"/>
                           <a:cs typeface="Arial" pitchFamily="34" charset="-120"/>
                         </a:rPr>
-                        <a:t>7.25</a:t>
+                        <a:t>7.11</a:t>
                       </a:r>
                       <a:endParaRPr lang="en-US" sz="900" dirty="0">
                         <a:latin typeface="Arial" charset="0"/>
@@ -10199,7 +10199,7 @@
                 <a:ea typeface="Arial" pitchFamily="34" charset="-122"/>
                 <a:cs typeface="Arial" pitchFamily="34" charset="-120"/>
               </a:rPr>
-              <a:t>71件（81.6%）</a:t>
+              <a:t>75件（81.5%）</a:t>
             </a:r>
             <a:endParaRPr lang="en-US" sz="1100" dirty="0"/>
           </a:p>
@@ -10297,7 +10297,7 @@
                 <a:ea typeface="Arial" pitchFamily="34" charset="-122"/>
                 <a:cs typeface="Arial" pitchFamily="34" charset="-120"/>
               </a:rPr>
-              <a:t>14件（16.1%）</a:t>
+              <a:t>15件（16.3%）</a:t>
             </a:r>
             <a:endParaRPr lang="en-US" sz="1100" dirty="0"/>
           </a:p>
@@ -10395,7 +10395,7 @@
                 <a:ea typeface="Arial" pitchFamily="34" charset="-122"/>
                 <a:cs typeface="Arial" pitchFamily="34" charset="-120"/>
               </a:rPr>
-              <a:t>2件（2.3%）</a:t>
+              <a:t>2件（2.2%）</a:t>
             </a:r>
             <a:endParaRPr lang="en-US" sz="1100" dirty="0"/>
           </a:p>
@@ -10729,7 +10729,7 @@
                 <a:ea typeface="Arial" pitchFamily="34" charset="-122"/>
                 <a:cs typeface="Arial" pitchFamily="34" charset="-120"/>
               </a:rPr>
-              <a:t>20件+</a:t>
+              <a:t>50件+</a:t>
             </a:r>
             <a:endParaRPr lang="en-US" sz="900" dirty="0"/>
           </a:p>
@@ -10807,7 +10807,7 @@
                 <a:ea typeface="Arial" pitchFamily="34" charset="-122"/>
                 <a:cs typeface="Arial" pitchFamily="34" charset="-120"/>
               </a:rPr>
-              <a:t>雨降りで風も強い日でしたが、駅前の好立地で、近くにコンビニやイオンがあってすごく良かったです</a:t>
+              <a:t>Camera più spaziosa della media e colazione molto abbonda...</a:t>
             </a:r>
             <a:endParaRPr lang="en-US" sz="900" dirty="0"/>
           </a:p>
@@ -10822,6 +10822,452 @@
         <p:spPr>
           <a:xfrm>
             <a:off x="594360" y="1828800"/>
+            <a:ext cx="2377440" cy="640080"/>
+          </a:xfrm>
+          <a:prstGeom prst="rect">
+            <a:avLst/>
+          </a:prstGeom>
+          <a:noFill/>
+          <a:ln/>
+        </p:spPr>
+        <p:txBody>
+          <a:bodyPr wrap="square" lIns="0" tIns="0" rIns="0" bIns="0" rtlCol="0" anchor="ctr"/>
+          <a:lstStyle/>
+          <a:p>
+            <a:pPr indent="0" marL="0">
+              <a:buNone/>
+            </a:pPr>
+            <a:r>
+              <a:rPr lang="en-US" sz="900" i="1" dirty="0">
+                <a:solidFill>
+                  <a:srgbClr val="3B7DD8"/>
+                </a:solidFill>
+                <a:latin typeface="Arial" pitchFamily="34" charset="0"/>
+                <a:ea typeface="Arial" pitchFamily="34" charset="-122"/>
+                <a:cs typeface="Arial" pitchFamily="34" charset="-120"/>
+              </a:rPr>
+              <a:t>「立地はとても便利です」</a:t>
+            </a:r>
+            <a:endParaRPr lang="en-US" sz="900" dirty="0"/>
+          </a:p>
+        </p:txBody>
+      </p:sp>
+      <p:sp>
+        <p:nvSpPr>
+          <p:cNvPr id="12" name="Shape 10"/>
+          <p:cNvSpPr/>
+          <p:nvPr/>
+        </p:nvSpPr>
+        <p:spPr>
+          <a:xfrm>
+            <a:off x="3291840" y="1051560"/>
+            <a:ext cx="2651760" cy="1600200"/>
+          </a:xfrm>
+          <a:prstGeom prst="rect">
+            <a:avLst/>
+          </a:prstGeom>
+          <a:solidFill>
+            <a:srgbClr val="FFFFFF"/>
+          </a:solidFill>
+          <a:ln/>
+          <a:effectLst>
+            <a:outerShdw sx="100000" sy="100000" kx="0" ky="0" algn="bl" rotWithShape="0" blurRad="50800" dist="25400" dir="8100000">
+              <a:srgbClr val="000000">
+                <a:alpha val="10000"/>
+              </a:srgbClr>
+            </a:outerShdw>
+          </a:effectLst>
+        </p:spPr>
+      </p:sp>
+      <p:sp>
+        <p:nvSpPr>
+          <p:cNvPr id="13" name="Shape 11"/>
+          <p:cNvSpPr/>
+          <p:nvPr/>
+        </p:nvSpPr>
+        <p:spPr>
+          <a:xfrm>
+            <a:off x="3291840" y="1051560"/>
+            <a:ext cx="54864" cy="1600200"/>
+          </a:xfrm>
+          <a:prstGeom prst="rect">
+            <a:avLst/>
+          </a:prstGeom>
+          <a:solidFill>
+            <a:srgbClr val="16A34A"/>
+          </a:solidFill>
+          <a:ln/>
+        </p:spPr>
+      </p:sp>
+      <p:sp>
+        <p:nvSpPr>
+          <p:cNvPr id="14" name="Shape 12"/>
+          <p:cNvSpPr/>
+          <p:nvPr/>
+        </p:nvSpPr>
+        <p:spPr>
+          <a:xfrm>
+            <a:off x="5120640" y="1124712"/>
+            <a:ext cx="658368" cy="228600"/>
+          </a:xfrm>
+          <a:prstGeom prst="rect">
+            <a:avLst/>
+          </a:prstGeom>
+          <a:solidFill>
+            <a:srgbClr val="DCFCE7"/>
+          </a:solidFill>
+          <a:ln/>
+        </p:spPr>
+      </p:sp>
+      <p:sp>
+        <p:nvSpPr>
+          <p:cNvPr id="15" name="Text 13"/>
+          <p:cNvSpPr/>
+          <p:nvPr/>
+        </p:nvSpPr>
+        <p:spPr>
+          <a:xfrm>
+            <a:off x="5120640" y="1124712"/>
+            <a:ext cx="658368" cy="228600"/>
+          </a:xfrm>
+          <a:prstGeom prst="rect">
+            <a:avLst/>
+          </a:prstGeom>
+          <a:noFill/>
+          <a:ln/>
+        </p:spPr>
+        <p:txBody>
+          <a:bodyPr wrap="square" lIns="0" tIns="0" rIns="0" bIns="0" rtlCol="0" anchor="ctr"/>
+          <a:lstStyle/>
+          <a:p>
+            <a:pPr algn="ctr" indent="0" marL="0">
+              <a:buNone/>
+            </a:pPr>
+            <a:r>
+              <a:rPr lang="en-US" sz="900" b="1" dirty="0">
+                <a:solidFill>
+                  <a:srgbClr val="16A34A"/>
+                </a:solidFill>
+                <a:latin typeface="Arial" pitchFamily="34" charset="0"/>
+                <a:ea typeface="Arial" pitchFamily="34" charset="-122"/>
+                <a:cs typeface="Arial" pitchFamily="34" charset="-120"/>
+              </a:rPr>
+              <a:t>20件+</a:t>
+            </a:r>
+            <a:endParaRPr lang="en-US" sz="900" dirty="0"/>
+          </a:p>
+        </p:txBody>
+      </p:sp>
+      <p:sp>
+        <p:nvSpPr>
+          <p:cNvPr id="16" name="Text 14"/>
+          <p:cNvSpPr/>
+          <p:nvPr/>
+        </p:nvSpPr>
+        <p:spPr>
+          <a:xfrm>
+            <a:off x="3429000" y="1124712"/>
+            <a:ext cx="1645920" cy="274320"/>
+          </a:xfrm>
+          <a:prstGeom prst="rect">
+            <a:avLst/>
+          </a:prstGeom>
+          <a:noFill/>
+          <a:ln/>
+        </p:spPr>
+        <p:txBody>
+          <a:bodyPr wrap="square" lIns="0" tIns="0" rIns="0" bIns="0" rtlCol="0" anchor="ctr"/>
+          <a:lstStyle/>
+          <a:p>
+            <a:pPr indent="0" marL="0">
+              <a:buNone/>
+            </a:pPr>
+            <a:r>
+              <a:rPr lang="en-US" sz="1300" b="1" dirty="0">
+                <a:solidFill>
+                  <a:srgbClr val="1A2744"/>
+                </a:solidFill>
+                <a:latin typeface="Arial" pitchFamily="34" charset="0"/>
+                <a:ea typeface="Arial" pitchFamily="34" charset="-122"/>
+                <a:cs typeface="Arial" pitchFamily="34" charset="-120"/>
+              </a:rPr>
+              <a:t>清潔さ・清掃</a:t>
+            </a:r>
+            <a:endParaRPr lang="en-US" sz="1300" dirty="0"/>
+          </a:p>
+        </p:txBody>
+      </p:sp>
+      <p:sp>
+        <p:nvSpPr>
+          <p:cNvPr id="17" name="Text 15"/>
+          <p:cNvSpPr/>
+          <p:nvPr/>
+        </p:nvSpPr>
+        <p:spPr>
+          <a:xfrm>
+            <a:off x="3429000" y="1417320"/>
+            <a:ext cx="2377440" cy="365760"/>
+          </a:xfrm>
+          <a:prstGeom prst="rect">
+            <a:avLst/>
+          </a:prstGeom>
+          <a:noFill/>
+          <a:ln/>
+        </p:spPr>
+        <p:txBody>
+          <a:bodyPr wrap="square" lIns="0" tIns="0" rIns="0" bIns="0" rtlCol="0" anchor="ctr"/>
+          <a:lstStyle/>
+          <a:p>
+            <a:pPr indent="0" marL="0">
+              <a:buNone/>
+            </a:pPr>
+            <a:r>
+              <a:rPr lang="en-US" sz="900" dirty="0">
+                <a:solidFill>
+                  <a:srgbClr val="64748B"/>
+                </a:solidFill>
+                <a:latin typeface="Arial" pitchFamily="34" charset="0"/>
+                <a:ea typeface="Arial" pitchFamily="34" charset="-122"/>
+                <a:cs typeface="Arial" pitchFamily="34" charset="-120"/>
+              </a:rPr>
+              <a:t>連続滞在の場合に清掃しないという特別なポリシーはありません</a:t>
+            </a:r>
+            <a:endParaRPr lang="en-US" sz="900" dirty="0"/>
+          </a:p>
+        </p:txBody>
+      </p:sp>
+      <p:sp>
+        <p:nvSpPr>
+          <p:cNvPr id="18" name="Text 16"/>
+          <p:cNvSpPr/>
+          <p:nvPr/>
+        </p:nvSpPr>
+        <p:spPr>
+          <a:xfrm>
+            <a:off x="3429000" y="1828800"/>
+            <a:ext cx="2377440" cy="640080"/>
+          </a:xfrm>
+          <a:prstGeom prst="rect">
+            <a:avLst/>
+          </a:prstGeom>
+          <a:noFill/>
+          <a:ln/>
+        </p:spPr>
+        <p:txBody>
+          <a:bodyPr wrap="square" lIns="0" tIns="0" rIns="0" bIns="0" rtlCol="0" anchor="ctr"/>
+          <a:lstStyle/>
+          <a:p>
+            <a:pPr indent="0" marL="0">
+              <a:buNone/>
+            </a:pPr>
+            <a:r>
+              <a:rPr lang="en-US" sz="900" i="1" dirty="0">
+                <a:solidFill>
+                  <a:srgbClr val="3B7DD8"/>
+                </a:solidFill>
+                <a:latin typeface="Arial" pitchFamily="34" charset="0"/>
+                <a:ea typeface="Arial" pitchFamily="34" charset="-122"/>
+                <a:cs typeface="Arial" pitchFamily="34" charset="-120"/>
+              </a:rPr>
+              <a:t>「一昨年利用した時は清潔感があり、良い印象だったので、また利用しましたが、今回は残念でした」</a:t>
+            </a:r>
+            <a:endParaRPr lang="en-US" sz="900" dirty="0"/>
+          </a:p>
+        </p:txBody>
+      </p:sp>
+      <p:sp>
+        <p:nvSpPr>
+          <p:cNvPr id="19" name="Shape 17"/>
+          <p:cNvSpPr/>
+          <p:nvPr/>
+        </p:nvSpPr>
+        <p:spPr>
+          <a:xfrm>
+            <a:off x="6126480" y="1051560"/>
+            <a:ext cx="2651760" cy="1600200"/>
+          </a:xfrm>
+          <a:prstGeom prst="rect">
+            <a:avLst/>
+          </a:prstGeom>
+          <a:solidFill>
+            <a:srgbClr val="FFFFFF"/>
+          </a:solidFill>
+          <a:ln/>
+          <a:effectLst>
+            <a:outerShdw sx="100000" sy="100000" kx="0" ky="0" algn="bl" rotWithShape="0" blurRad="50800" dist="25400" dir="8100000">
+              <a:srgbClr val="000000">
+                <a:alpha val="10000"/>
+              </a:srgbClr>
+            </a:outerShdw>
+          </a:effectLst>
+        </p:spPr>
+      </p:sp>
+      <p:sp>
+        <p:nvSpPr>
+          <p:cNvPr id="20" name="Shape 18"/>
+          <p:cNvSpPr/>
+          <p:nvPr/>
+        </p:nvSpPr>
+        <p:spPr>
+          <a:xfrm>
+            <a:off x="6126480" y="1051560"/>
+            <a:ext cx="54864" cy="1600200"/>
+          </a:xfrm>
+          <a:prstGeom prst="rect">
+            <a:avLst/>
+          </a:prstGeom>
+          <a:solidFill>
+            <a:srgbClr val="16A34A"/>
+          </a:solidFill>
+          <a:ln/>
+        </p:spPr>
+      </p:sp>
+      <p:sp>
+        <p:nvSpPr>
+          <p:cNvPr id="21" name="Shape 19"/>
+          <p:cNvSpPr/>
+          <p:nvPr/>
+        </p:nvSpPr>
+        <p:spPr>
+          <a:xfrm>
+            <a:off x="7955280" y="1124712"/>
+            <a:ext cx="658368" cy="228600"/>
+          </a:xfrm>
+          <a:prstGeom prst="rect">
+            <a:avLst/>
+          </a:prstGeom>
+          <a:solidFill>
+            <a:srgbClr val="DCFCE7"/>
+          </a:solidFill>
+          <a:ln/>
+        </p:spPr>
+      </p:sp>
+      <p:sp>
+        <p:nvSpPr>
+          <p:cNvPr id="22" name="Text 20"/>
+          <p:cNvSpPr/>
+          <p:nvPr/>
+        </p:nvSpPr>
+        <p:spPr>
+          <a:xfrm>
+            <a:off x="7955280" y="1124712"/>
+            <a:ext cx="658368" cy="228600"/>
+          </a:xfrm>
+          <a:prstGeom prst="rect">
+            <a:avLst/>
+          </a:prstGeom>
+          <a:noFill/>
+          <a:ln/>
+        </p:spPr>
+        <p:txBody>
+          <a:bodyPr wrap="square" lIns="0" tIns="0" rIns="0" bIns="0" rtlCol="0" anchor="ctr"/>
+          <a:lstStyle/>
+          <a:p>
+            <a:pPr algn="ctr" indent="0" marL="0">
+              <a:buNone/>
+            </a:pPr>
+            <a:r>
+              <a:rPr lang="en-US" sz="900" b="1" dirty="0">
+                <a:solidFill>
+                  <a:srgbClr val="16A34A"/>
+                </a:solidFill>
+                <a:latin typeface="Arial" pitchFamily="34" charset="0"/>
+                <a:ea typeface="Arial" pitchFamily="34" charset="-122"/>
+                <a:cs typeface="Arial" pitchFamily="34" charset="-120"/>
+              </a:rPr>
+              <a:t>10件+</a:t>
+            </a:r>
+            <a:endParaRPr lang="en-US" sz="900" dirty="0"/>
+          </a:p>
+        </p:txBody>
+      </p:sp>
+      <p:sp>
+        <p:nvSpPr>
+          <p:cNvPr id="23" name="Text 21"/>
+          <p:cNvSpPr/>
+          <p:nvPr/>
+        </p:nvSpPr>
+        <p:spPr>
+          <a:xfrm>
+            <a:off x="6263640" y="1124712"/>
+            <a:ext cx="1645920" cy="274320"/>
+          </a:xfrm>
+          <a:prstGeom prst="rect">
+            <a:avLst/>
+          </a:prstGeom>
+          <a:noFill/>
+          <a:ln/>
+        </p:spPr>
+        <p:txBody>
+          <a:bodyPr wrap="square" lIns="0" tIns="0" rIns="0" bIns="0" rtlCol="0" anchor="ctr"/>
+          <a:lstStyle/>
+          <a:p>
+            <a:pPr indent="0" marL="0">
+              <a:buNone/>
+            </a:pPr>
+            <a:r>
+              <a:rPr lang="en-US" sz="1300" b="1" dirty="0">
+                <a:solidFill>
+                  <a:srgbClr val="1A2744"/>
+                </a:solidFill>
+                <a:latin typeface="Arial" pitchFamily="34" charset="0"/>
+                <a:ea typeface="Arial" pitchFamily="34" charset="-122"/>
+                <a:cs typeface="Arial" pitchFamily="34" charset="-120"/>
+              </a:rPr>
+              <a:t>スタッフの対応</a:t>
+            </a:r>
+            <a:endParaRPr lang="en-US" sz="1300" dirty="0"/>
+          </a:p>
+        </p:txBody>
+      </p:sp>
+      <p:sp>
+        <p:nvSpPr>
+          <p:cNvPr id="24" name="Text 22"/>
+          <p:cNvSpPr/>
+          <p:nvPr/>
+        </p:nvSpPr>
+        <p:spPr>
+          <a:xfrm>
+            <a:off x="6263640" y="1417320"/>
+            <a:ext cx="2377440" cy="365760"/>
+          </a:xfrm>
+          <a:prstGeom prst="rect">
+            <a:avLst/>
+          </a:prstGeom>
+          <a:noFill/>
+          <a:ln/>
+        </p:spPr>
+        <p:txBody>
+          <a:bodyPr wrap="square" lIns="0" tIns="0" rIns="0" bIns="0" rtlCol="0" anchor="ctr"/>
+          <a:lstStyle/>
+          <a:p>
+            <a:pPr indent="0" marL="0">
+              <a:buNone/>
+            </a:pPr>
+            <a:r>
+              <a:rPr lang="en-US" sz="900" dirty="0">
+                <a:solidFill>
+                  <a:srgbClr val="64748B"/>
+                </a:solidFill>
+                <a:latin typeface="Arial" pitchFamily="34" charset="0"/>
+                <a:ea typeface="Arial" pitchFamily="34" charset="-122"/>
+                <a:cs typeface="Arial" pitchFamily="34" charset="-120"/>
+              </a:rPr>
+              <a:t>タオルや歯ブラシの交換が必要な場合は、フロントにお申し付けください</a:t>
+            </a:r>
+            <a:endParaRPr lang="en-US" sz="900" dirty="0"/>
+          </a:p>
+        </p:txBody>
+      </p:sp>
+      <p:sp>
+        <p:nvSpPr>
+          <p:cNvPr id="25" name="Text 23"/>
+          <p:cNvSpPr/>
+          <p:nvPr/>
+        </p:nvSpPr>
+        <p:spPr>
+          <a:xfrm>
+            <a:off x="6263640" y="1828800"/>
             <a:ext cx="2377440" cy="640080"/>
           </a:xfrm>
           <a:prstGeom prst="rect">
@@ -10847,452 +11293,6 @@
                 <a:cs typeface="Arial" pitchFamily="34" charset="-120"/>
               </a:rPr>
               <a:t>「アクセスが良く、フロントの方の対応も悪くなかっただけに残念です」</a:t>
-            </a:r>
-            <a:endParaRPr lang="en-US" sz="900" dirty="0"/>
-          </a:p>
-        </p:txBody>
-      </p:sp>
-      <p:sp>
-        <p:nvSpPr>
-          <p:cNvPr id="12" name="Shape 10"/>
-          <p:cNvSpPr/>
-          <p:nvPr/>
-        </p:nvSpPr>
-        <p:spPr>
-          <a:xfrm>
-            <a:off x="3291840" y="1051560"/>
-            <a:ext cx="2651760" cy="1600200"/>
-          </a:xfrm>
-          <a:prstGeom prst="rect">
-            <a:avLst/>
-          </a:prstGeom>
-          <a:solidFill>
-            <a:srgbClr val="FFFFFF"/>
-          </a:solidFill>
-          <a:ln/>
-          <a:effectLst>
-            <a:outerShdw sx="100000" sy="100000" kx="0" ky="0" algn="bl" rotWithShape="0" blurRad="50800" dist="25400" dir="8100000">
-              <a:srgbClr val="000000">
-                <a:alpha val="10000"/>
-              </a:srgbClr>
-            </a:outerShdw>
-          </a:effectLst>
-        </p:spPr>
-      </p:sp>
-      <p:sp>
-        <p:nvSpPr>
-          <p:cNvPr id="13" name="Shape 11"/>
-          <p:cNvSpPr/>
-          <p:nvPr/>
-        </p:nvSpPr>
-        <p:spPr>
-          <a:xfrm>
-            <a:off x="3291840" y="1051560"/>
-            <a:ext cx="54864" cy="1600200"/>
-          </a:xfrm>
-          <a:prstGeom prst="rect">
-            <a:avLst/>
-          </a:prstGeom>
-          <a:solidFill>
-            <a:srgbClr val="16A34A"/>
-          </a:solidFill>
-          <a:ln/>
-        </p:spPr>
-      </p:sp>
-      <p:sp>
-        <p:nvSpPr>
-          <p:cNvPr id="14" name="Shape 12"/>
-          <p:cNvSpPr/>
-          <p:nvPr/>
-        </p:nvSpPr>
-        <p:spPr>
-          <a:xfrm>
-            <a:off x="5120640" y="1124712"/>
-            <a:ext cx="658368" cy="228600"/>
-          </a:xfrm>
-          <a:prstGeom prst="rect">
-            <a:avLst/>
-          </a:prstGeom>
-          <a:solidFill>
-            <a:srgbClr val="DCFCE7"/>
-          </a:solidFill>
-          <a:ln/>
-        </p:spPr>
-      </p:sp>
-      <p:sp>
-        <p:nvSpPr>
-          <p:cNvPr id="15" name="Text 13"/>
-          <p:cNvSpPr/>
-          <p:nvPr/>
-        </p:nvSpPr>
-        <p:spPr>
-          <a:xfrm>
-            <a:off x="5120640" y="1124712"/>
-            <a:ext cx="658368" cy="228600"/>
-          </a:xfrm>
-          <a:prstGeom prst="rect">
-            <a:avLst/>
-          </a:prstGeom>
-          <a:noFill/>
-          <a:ln/>
-        </p:spPr>
-        <p:txBody>
-          <a:bodyPr wrap="square" lIns="0" tIns="0" rIns="0" bIns="0" rtlCol="0" anchor="ctr"/>
-          <a:lstStyle/>
-          <a:p>
-            <a:pPr algn="ctr" indent="0" marL="0">
-              <a:buNone/>
-            </a:pPr>
-            <a:r>
-              <a:rPr lang="en-US" sz="900" b="1" dirty="0">
-                <a:solidFill>
-                  <a:srgbClr val="16A34A"/>
-                </a:solidFill>
-                <a:latin typeface="Arial" pitchFamily="34" charset="0"/>
-                <a:ea typeface="Arial" pitchFamily="34" charset="-122"/>
-                <a:cs typeface="Arial" pitchFamily="34" charset="-120"/>
-              </a:rPr>
-              <a:t>20件+</a:t>
-            </a:r>
-            <a:endParaRPr lang="en-US" sz="900" dirty="0"/>
-          </a:p>
-        </p:txBody>
-      </p:sp>
-      <p:sp>
-        <p:nvSpPr>
-          <p:cNvPr id="16" name="Text 14"/>
-          <p:cNvSpPr/>
-          <p:nvPr/>
-        </p:nvSpPr>
-        <p:spPr>
-          <a:xfrm>
-            <a:off x="3429000" y="1124712"/>
-            <a:ext cx="1645920" cy="274320"/>
-          </a:xfrm>
-          <a:prstGeom prst="rect">
-            <a:avLst/>
-          </a:prstGeom>
-          <a:noFill/>
-          <a:ln/>
-        </p:spPr>
-        <p:txBody>
-          <a:bodyPr wrap="square" lIns="0" tIns="0" rIns="0" bIns="0" rtlCol="0" anchor="ctr"/>
-          <a:lstStyle/>
-          <a:p>
-            <a:pPr indent="0" marL="0">
-              <a:buNone/>
-            </a:pPr>
-            <a:r>
-              <a:rPr lang="en-US" sz="1300" b="1" dirty="0">
-                <a:solidFill>
-                  <a:srgbClr val="1A2744"/>
-                </a:solidFill>
-                <a:latin typeface="Arial" pitchFamily="34" charset="0"/>
-                <a:ea typeface="Arial" pitchFamily="34" charset="-122"/>
-                <a:cs typeface="Arial" pitchFamily="34" charset="-120"/>
-              </a:rPr>
-              <a:t>清潔さ・清掃</a:t>
-            </a:r>
-            <a:endParaRPr lang="en-US" sz="1300" dirty="0"/>
-          </a:p>
-        </p:txBody>
-      </p:sp>
-      <p:sp>
-        <p:nvSpPr>
-          <p:cNvPr id="17" name="Text 15"/>
-          <p:cNvSpPr/>
-          <p:nvPr/>
-        </p:nvSpPr>
-        <p:spPr>
-          <a:xfrm>
-            <a:off x="3429000" y="1417320"/>
-            <a:ext cx="2377440" cy="365760"/>
-          </a:xfrm>
-          <a:prstGeom prst="rect">
-            <a:avLst/>
-          </a:prstGeom>
-          <a:noFill/>
-          <a:ln/>
-        </p:spPr>
-        <p:txBody>
-          <a:bodyPr wrap="square" lIns="0" tIns="0" rIns="0" bIns="0" rtlCol="0" anchor="ctr"/>
-          <a:lstStyle/>
-          <a:p>
-            <a:pPr indent="0" marL="0">
-              <a:buNone/>
-            </a:pPr>
-            <a:r>
-              <a:rPr lang="en-US" sz="900" dirty="0">
-                <a:solidFill>
-                  <a:srgbClr val="64748B"/>
-                </a:solidFill>
-                <a:latin typeface="Arial" pitchFamily="34" charset="0"/>
-                <a:ea typeface="Arial" pitchFamily="34" charset="-122"/>
-                <a:cs typeface="Arial" pitchFamily="34" charset="-120"/>
-              </a:rPr>
-              <a:t>一昨年利用した時は清潔感があり、良い印象だったので、また利用しましたが、今回は残念でした</a:t>
-            </a:r>
-            <a:endParaRPr lang="en-US" sz="900" dirty="0"/>
-          </a:p>
-        </p:txBody>
-      </p:sp>
-      <p:sp>
-        <p:nvSpPr>
-          <p:cNvPr id="18" name="Text 16"/>
-          <p:cNvSpPr/>
-          <p:nvPr/>
-        </p:nvSpPr>
-        <p:spPr>
-          <a:xfrm>
-            <a:off x="3429000" y="1828800"/>
-            <a:ext cx="2377440" cy="640080"/>
-          </a:xfrm>
-          <a:prstGeom prst="rect">
-            <a:avLst/>
-          </a:prstGeom>
-          <a:noFill/>
-          <a:ln/>
-        </p:spPr>
-        <p:txBody>
-          <a:bodyPr wrap="square" lIns="0" tIns="0" rIns="0" bIns="0" rtlCol="0" anchor="ctr"/>
-          <a:lstStyle/>
-          <a:p>
-            <a:pPr indent="0" marL="0">
-              <a:buNone/>
-            </a:pPr>
-            <a:r>
-              <a:rPr lang="en-US" sz="900" i="1" dirty="0">
-                <a:solidFill>
-                  <a:srgbClr val="3B7DD8"/>
-                </a:solidFill>
-                <a:latin typeface="Arial" pitchFamily="34" charset="0"/>
-                <a:ea typeface="Arial" pitchFamily="34" charset="-122"/>
-                <a:cs typeface="Arial" pitchFamily="34" charset="-120"/>
-              </a:rPr>
-              <a:t>「駅近のきれいなホテルです」</a:t>
-            </a:r>
-            <a:endParaRPr lang="en-US" sz="900" dirty="0"/>
-          </a:p>
-        </p:txBody>
-      </p:sp>
-      <p:sp>
-        <p:nvSpPr>
-          <p:cNvPr id="19" name="Shape 17"/>
-          <p:cNvSpPr/>
-          <p:nvPr/>
-        </p:nvSpPr>
-        <p:spPr>
-          <a:xfrm>
-            <a:off x="6126480" y="1051560"/>
-            <a:ext cx="2651760" cy="1600200"/>
-          </a:xfrm>
-          <a:prstGeom prst="rect">
-            <a:avLst/>
-          </a:prstGeom>
-          <a:solidFill>
-            <a:srgbClr val="FFFFFF"/>
-          </a:solidFill>
-          <a:ln/>
-          <a:effectLst>
-            <a:outerShdw sx="100000" sy="100000" kx="0" ky="0" algn="bl" rotWithShape="0" blurRad="50800" dist="25400" dir="8100000">
-              <a:srgbClr val="000000">
-                <a:alpha val="10000"/>
-              </a:srgbClr>
-            </a:outerShdw>
-          </a:effectLst>
-        </p:spPr>
-      </p:sp>
-      <p:sp>
-        <p:nvSpPr>
-          <p:cNvPr id="20" name="Shape 18"/>
-          <p:cNvSpPr/>
-          <p:nvPr/>
-        </p:nvSpPr>
-        <p:spPr>
-          <a:xfrm>
-            <a:off x="6126480" y="1051560"/>
-            <a:ext cx="54864" cy="1600200"/>
-          </a:xfrm>
-          <a:prstGeom prst="rect">
-            <a:avLst/>
-          </a:prstGeom>
-          <a:solidFill>
-            <a:srgbClr val="16A34A"/>
-          </a:solidFill>
-          <a:ln/>
-        </p:spPr>
-      </p:sp>
-      <p:sp>
-        <p:nvSpPr>
-          <p:cNvPr id="21" name="Shape 19"/>
-          <p:cNvSpPr/>
-          <p:nvPr/>
-        </p:nvSpPr>
-        <p:spPr>
-          <a:xfrm>
-            <a:off x="7955280" y="1124712"/>
-            <a:ext cx="658368" cy="228600"/>
-          </a:xfrm>
-          <a:prstGeom prst="rect">
-            <a:avLst/>
-          </a:prstGeom>
-          <a:solidFill>
-            <a:srgbClr val="DCFCE7"/>
-          </a:solidFill>
-          <a:ln/>
-        </p:spPr>
-      </p:sp>
-      <p:sp>
-        <p:nvSpPr>
-          <p:cNvPr id="22" name="Text 20"/>
-          <p:cNvSpPr/>
-          <p:nvPr/>
-        </p:nvSpPr>
-        <p:spPr>
-          <a:xfrm>
-            <a:off x="7955280" y="1124712"/>
-            <a:ext cx="658368" cy="228600"/>
-          </a:xfrm>
-          <a:prstGeom prst="rect">
-            <a:avLst/>
-          </a:prstGeom>
-          <a:noFill/>
-          <a:ln/>
-        </p:spPr>
-        <p:txBody>
-          <a:bodyPr wrap="square" lIns="0" tIns="0" rIns="0" bIns="0" rtlCol="0" anchor="ctr"/>
-          <a:lstStyle/>
-          <a:p>
-            <a:pPr algn="ctr" indent="0" marL="0">
-              <a:buNone/>
-            </a:pPr>
-            <a:r>
-              <a:rPr lang="en-US" sz="900" b="1" dirty="0">
-                <a:solidFill>
-                  <a:srgbClr val="16A34A"/>
-                </a:solidFill>
-                <a:latin typeface="Arial" pitchFamily="34" charset="0"/>
-                <a:ea typeface="Arial" pitchFamily="34" charset="-122"/>
-                <a:cs typeface="Arial" pitchFamily="34" charset="-120"/>
-              </a:rPr>
-              <a:t>10件+</a:t>
-            </a:r>
-            <a:endParaRPr lang="en-US" sz="900" dirty="0"/>
-          </a:p>
-        </p:txBody>
-      </p:sp>
-      <p:sp>
-        <p:nvSpPr>
-          <p:cNvPr id="23" name="Text 21"/>
-          <p:cNvSpPr/>
-          <p:nvPr/>
-        </p:nvSpPr>
-        <p:spPr>
-          <a:xfrm>
-            <a:off x="6263640" y="1124712"/>
-            <a:ext cx="1645920" cy="274320"/>
-          </a:xfrm>
-          <a:prstGeom prst="rect">
-            <a:avLst/>
-          </a:prstGeom>
-          <a:noFill/>
-          <a:ln/>
-        </p:spPr>
-        <p:txBody>
-          <a:bodyPr wrap="square" lIns="0" tIns="0" rIns="0" bIns="0" rtlCol="0" anchor="ctr"/>
-          <a:lstStyle/>
-          <a:p>
-            <a:pPr indent="0" marL="0">
-              <a:buNone/>
-            </a:pPr>
-            <a:r>
-              <a:rPr lang="en-US" sz="1300" b="1" dirty="0">
-                <a:solidFill>
-                  <a:srgbClr val="1A2744"/>
-                </a:solidFill>
-                <a:latin typeface="Arial" pitchFamily="34" charset="0"/>
-                <a:ea typeface="Arial" pitchFamily="34" charset="-122"/>
-                <a:cs typeface="Arial" pitchFamily="34" charset="-120"/>
-              </a:rPr>
-              <a:t>スタッフの対応</a:t>
-            </a:r>
-            <a:endParaRPr lang="en-US" sz="1300" dirty="0"/>
-          </a:p>
-        </p:txBody>
-      </p:sp>
-      <p:sp>
-        <p:nvSpPr>
-          <p:cNvPr id="24" name="Text 22"/>
-          <p:cNvSpPr/>
-          <p:nvPr/>
-        </p:nvSpPr>
-        <p:spPr>
-          <a:xfrm>
-            <a:off x="6263640" y="1417320"/>
-            <a:ext cx="2377440" cy="365760"/>
-          </a:xfrm>
-          <a:prstGeom prst="rect">
-            <a:avLst/>
-          </a:prstGeom>
-          <a:noFill/>
-          <a:ln/>
-        </p:spPr>
-        <p:txBody>
-          <a:bodyPr wrap="square" lIns="0" tIns="0" rIns="0" bIns="0" rtlCol="0" anchor="ctr"/>
-          <a:lstStyle/>
-          <a:p>
-            <a:pPr indent="0" marL="0">
-              <a:buNone/>
-            </a:pPr>
-            <a:r>
-              <a:rPr lang="en-US" sz="900" dirty="0">
-                <a:solidFill>
-                  <a:srgbClr val="64748B"/>
-                </a:solidFill>
-                <a:latin typeface="Arial" pitchFamily="34" charset="0"/>
-                <a:ea typeface="Arial" pitchFamily="34" charset="-122"/>
-                <a:cs typeface="Arial" pitchFamily="34" charset="-120"/>
-              </a:rPr>
-              <a:t>アクセスが良く、フロントの方の対応も悪くなかっただけに残念です</a:t>
-            </a:r>
-            <a:endParaRPr lang="en-US" sz="900" dirty="0"/>
-          </a:p>
-        </p:txBody>
-      </p:sp>
-      <p:sp>
-        <p:nvSpPr>
-          <p:cNvPr id="25" name="Text 23"/>
-          <p:cNvSpPr/>
-          <p:nvPr/>
-        </p:nvSpPr>
-        <p:spPr>
-          <a:xfrm>
-            <a:off x="6263640" y="1828800"/>
-            <a:ext cx="2377440" cy="640080"/>
-          </a:xfrm>
-          <a:prstGeom prst="rect">
-            <a:avLst/>
-          </a:prstGeom>
-          <a:noFill/>
-          <a:ln/>
-        </p:spPr>
-        <p:txBody>
-          <a:bodyPr wrap="square" lIns="0" tIns="0" rIns="0" bIns="0" rtlCol="0" anchor="ctr"/>
-          <a:lstStyle/>
-          <a:p>
-            <a:pPr indent="0" marL="0">
-              <a:buNone/>
-            </a:pPr>
-            <a:r>
-              <a:rPr lang="en-US" sz="900" i="1" dirty="0">
-                <a:solidFill>
-                  <a:srgbClr val="3B7DD8"/>
-                </a:solidFill>
-                <a:latin typeface="Arial" pitchFamily="34" charset="0"/>
-                <a:ea typeface="Arial" pitchFamily="34" charset="-122"/>
-                <a:cs typeface="Arial" pitchFamily="34" charset="-120"/>
-              </a:rPr>
-              <a:t>「環境清潔安靜，服務人員非常親切 環境は清潔で静かで、スタッフの方々もとても親切でした」</a:t>
             </a:r>
             <a:endParaRPr lang="en-US" sz="900" dirty="0"/>
           </a:p>
@@ -12925,7 +12925,7 @@
                           <a:ea typeface="Arial" pitchFamily="34" charset="-122"/>
                           <a:cs typeface="Arial" pitchFamily="34" charset="-120"/>
                         </a:rPr>
-                        <a:t>Very clean place, good place to stay the night after long...</a:t>
+                        <a:t>comで喫煙室を予約したため、部屋はタバコの臭いがひどく、エアコンをつけると悪臭がしました</a:t>
                       </a:r>
                       <a:endParaRPr lang="en-US" sz="900" dirty="0">
                         <a:latin typeface="Arial" charset="0"/>
@@ -12993,7 +12993,7 @@
                           <a:ea typeface="Arial" pitchFamily="34" charset="-122"/>
                           <a:cs typeface="Arial" pitchFamily="34" charset="-120"/>
                         </a:rPr>
-                        <a:t>6件</a:t>
+                        <a:t>7件</a:t>
                       </a:r>
                       <a:endParaRPr lang="en-US" sz="900" dirty="0">
                         <a:latin typeface="Arial" charset="0"/>
@@ -13405,7 +13405,7 @@
                           <a:ea typeface="Arial" pitchFamily="34" charset="-122"/>
                           <a:cs typeface="Arial" pitchFamily="34" charset="-120"/>
                         </a:rPr>
-                        <a:t>防音性能</a:t>
+                        <a:t>臭い・匂い</a:t>
                       </a:r>
                       <a:endParaRPr lang="en-US" sz="900" dirty="0">
                         <a:latin typeface="Arial" charset="0"/>
@@ -13473,7 +13473,7 @@
                           <a:ea typeface="Arial" pitchFamily="34" charset="-122"/>
                           <a:cs typeface="Arial" pitchFamily="34" charset="-120"/>
                         </a:rPr>
-                        <a:t>お部屋も綺麗で、隣の音も気にならなかったです</a:t>
+                        <a:t>comで喫煙室を予約したため、部屋はタバコの臭いがひどく、エアコンをつけると悪臭がしました</a:t>
                       </a:r>
                       <a:endParaRPr lang="en-US" sz="900" dirty="0">
                         <a:latin typeface="Arial" charset="0"/>
@@ -13541,7 +13541,7 @@
                           <a:ea typeface="Arial" pitchFamily="34" charset="-122"/>
                           <a:cs typeface="Arial" pitchFamily="34" charset="-120"/>
                         </a:rPr>
-                        <a:t>2件</a:t>
+                        <a:t>3件</a:t>
                       </a:r>
                       <a:endParaRPr lang="en-US" sz="900" dirty="0">
                         <a:latin typeface="Arial" charset="0"/>
@@ -13679,7 +13679,7 @@
                           <a:ea typeface="Arial" pitchFamily="34" charset="-122"/>
                           <a:cs typeface="Arial" pitchFamily="34" charset="-120"/>
                         </a:rPr>
-                        <a:t>臭い・匂い</a:t>
+                        <a:t>窓・採光</a:t>
                       </a:r>
                       <a:endParaRPr lang="en-US" sz="900" dirty="0">
                         <a:latin typeface="Arial" charset="0"/>
@@ -13747,7 +13747,7 @@
                           <a:ea typeface="Arial" pitchFamily="34" charset="-122"/>
                           <a:cs typeface="Arial" pitchFamily="34" charset="-120"/>
                         </a:rPr>
-                        <a:t>部屋が臭い 部屋が臭い</a:t>
+                        <a:t>滞在中はエアコンはほとんど使わず、換気のために窓を開けただけでした</a:t>
                       </a:r>
                       <a:endParaRPr lang="en-US" sz="900" dirty="0">
                         <a:latin typeface="Arial" charset="0"/>
@@ -13815,7 +13815,7 @@
                           <a:ea typeface="Arial" pitchFamily="34" charset="-122"/>
                           <a:cs typeface="Arial" pitchFamily="34" charset="-120"/>
                         </a:rPr>
-                        <a:t>2件</a:t>
+                        <a:t>3件</a:t>
                       </a:r>
                       <a:endParaRPr lang="en-US" sz="900" dirty="0">
                         <a:latin typeface="Arial" charset="0"/>
@@ -13953,7 +13953,7 @@
                           <a:ea typeface="Arial" pitchFamily="34" charset="-122"/>
                           <a:cs typeface="Arial" pitchFamily="34" charset="-120"/>
                         </a:rPr>
-                        <a:t>窓・採光</a:t>
+                        <a:t>防音性能</a:t>
                       </a:r>
                       <a:endParaRPr lang="en-US" sz="900" dirty="0">
                         <a:latin typeface="Arial" charset="0"/>
@@ -14021,7 +14021,7 @@
                           <a:ea typeface="Arial" pitchFamily="34" charset="-122"/>
                           <a:cs typeface="Arial" pitchFamily="34" charset="-120"/>
                         </a:rPr>
-                        <a:t>運河が見えるお部屋を希望したら、18階の運河沿いのお部屋にしてくれ、窓の下は運河が流れていて、夜には夜景が素晴らし...</a:t>
+                        <a:t>お部屋も綺麗で、隣の音も気にならなかったです</a:t>
                       </a:r>
                       <a:endParaRPr lang="en-US" sz="900" dirty="0">
                         <a:latin typeface="Arial" charset="0"/>

--- a/納品レポート/ホテル別レポート/hearton_口コミ分析レポート.pptx
+++ b/納品レポート/ホテル別レポート/hearton_口コミ分析レポート.pptx
@@ -211,19 +211,19 @@
                   <c:v>9.38</c:v>
                 </c:pt>
                 <c:pt idx="1">
-                  <c:v>8.67</c:v>
+                  <c:v>8.76</c:v>
                 </c:pt>
                 <c:pt idx="2">
                   <c:v>8.52</c:v>
                 </c:pt>
                 <c:pt idx="3">
-                  <c:v>8.1</c:v>
+                  <c:v>8.19</c:v>
                 </c:pt>
                 <c:pt idx="4">
                   <c:v>8</c:v>
                 </c:pt>
                 <c:pt idx="5">
-                  <c:v>7.11</c:v>
+                  <c:v>6.91</c:v>
                 </c:pt>
               </c:numCache>
             </c:numRef>
@@ -566,10 +566,10 @@
               <c:numCache>
                 <c:ptCount val="3"/>
                 <c:pt idx="0">
-                  <c:v>75</c:v>
+                  <c:v>81</c:v>
                 </c:pt>
                 <c:pt idx="1">
-                  <c:v>15</c:v>
+                  <c:v>17</c:v>
                 </c:pt>
                 <c:pt idx="2">
                   <c:v>2</c:v>
@@ -795,19 +795,19 @@
                 <c:formatCode>General</c:formatCode>
                 <c:ptCount val="7"/>
                 <c:pt idx="0">
-                  <c:v>32</c:v>
+                  <c:v>35</c:v>
                 </c:pt>
                 <c:pt idx="1">
-                  <c:v>14</c:v>
+                  <c:v>15</c:v>
                 </c:pt>
                 <c:pt idx="2">
-                  <c:v>29</c:v>
+                  <c:v>31</c:v>
                 </c:pt>
                 <c:pt idx="3">
                   <c:v>3</c:v>
                 </c:pt>
                 <c:pt idx="4">
-                  <c:v>10</c:v>
+                  <c:v>12</c:v>
                 </c:pt>
                 <c:pt idx="5">
                   <c:v>2</c:v>
@@ -2764,7 +2764,7 @@
                 <a:ea typeface="Arial" pitchFamily="34" charset="-122"/>
                 <a:cs typeface="Arial" pitchFamily="34" charset="-120"/>
               </a:rPr>
-              <a:t>レビュー総数：92件（6サイト）</a:t>
+              <a:t>レビュー総数：100件（6サイト）</a:t>
             </a:r>
             <a:endParaRPr lang="en-US" sz="1000" dirty="0"/>
           </a:p>
@@ -2784,7 +2784,7 @@
                 <a:ea typeface="Arial" pitchFamily="34" charset="-122"/>
                 <a:cs typeface="Arial" pitchFamily="34" charset="-120"/>
               </a:rPr>
-              <a:t>作成日：2026年4月7日</a:t>
+              <a:t>作成日：2026年4月8日</a:t>
             </a:r>
             <a:endParaRPr lang="en-US" sz="1000" dirty="0"/>
           </a:p>
@@ -3604,7 +3604,7 @@
                           <a:ea typeface="Arial" pitchFamily="34" charset="-122"/>
                           <a:cs typeface="Arial" pitchFamily="34" charset="-120"/>
                         </a:rPr>
-                        <a:t>81.5%</a:t>
+                        <a:t>81.0%</a:t>
                       </a:r>
                       <a:endParaRPr lang="en-US" sz="1000" dirty="0">
                         <a:latin typeface="Arial" charset="0"/>
@@ -3672,7 +3672,7 @@
                           <a:ea typeface="Arial" pitchFamily="34" charset="-122"/>
                           <a:cs typeface="Arial" pitchFamily="34" charset="-120"/>
                         </a:rPr>
-                        <a:t>87%以上</a:t>
+                        <a:t>86%以上</a:t>
                       </a:r>
                       <a:endParaRPr lang="en-US" sz="1000" dirty="0">
                         <a:latin typeface="Arial" charset="0"/>
@@ -3878,7 +3878,7 @@
                           <a:ea typeface="Arial" pitchFamily="34" charset="-122"/>
                           <a:cs typeface="Arial" pitchFamily="34" charset="-120"/>
                         </a:rPr>
-                        <a:t>2.2%</a:t>
+                        <a:t>2.0%</a:t>
                       </a:r>
                       <a:endParaRPr lang="en-US" sz="1000" dirty="0">
                         <a:latin typeface="Arial" charset="0"/>
@@ -3946,7 +3946,7 @@
                           <a:ea typeface="Arial" pitchFamily="34" charset="-122"/>
                           <a:cs typeface="Arial" pitchFamily="34" charset="-120"/>
                         </a:rPr>
-                        <a:t>0%以下</a:t>
+                        <a:t>0%維持</a:t>
                       </a:r>
                       <a:endParaRPr lang="en-US" sz="1000" dirty="0">
                         <a:latin typeface="Arial" charset="0"/>
@@ -4152,7 +4152,7 @@
                           <a:ea typeface="Arial" pitchFamily="34" charset="-122"/>
                           <a:cs typeface="Arial" pitchFamily="34" charset="-120"/>
                         </a:rPr>
-                        <a:t>7.1点</a:t>
+                        <a:t>6.9点</a:t>
                       </a:r>
                       <a:endParaRPr lang="en-US" sz="1000" dirty="0">
                         <a:latin typeface="Arial" charset="0"/>
@@ -4220,7 +4220,7 @@
                           <a:ea typeface="Arial" pitchFamily="34" charset="-122"/>
                           <a:cs typeface="Arial" pitchFamily="34" charset="-120"/>
                         </a:rPr>
-                        <a:t>8.1点以上</a:t>
+                        <a:t>7.9点以上</a:t>
                       </a:r>
                       <a:endParaRPr lang="en-US" sz="1000" dirty="0">
                         <a:latin typeface="Arial" charset="0"/>
@@ -4700,7 +4700,7 @@
                           <a:ea typeface="Arial" pitchFamily="34" charset="-122"/>
                           <a:cs typeface="Arial" pitchFamily="34" charset="-120"/>
                         </a:rPr>
-                        <a:t>約7件/期間</a:t>
+                        <a:t>約10件/期間</a:t>
                       </a:r>
                       <a:endParaRPr lang="en-US" sz="1000" dirty="0">
                         <a:latin typeface="Arial" charset="0"/>
@@ -4768,7 +4768,7 @@
                           <a:ea typeface="Arial" pitchFamily="34" charset="-122"/>
                           <a:cs typeface="Arial" pitchFamily="34" charset="-120"/>
                         </a:rPr>
-                        <a:t>3件以下</a:t>
+                        <a:t>5件以下</a:t>
                       </a:r>
                       <a:endParaRPr lang="en-US" sz="1000" dirty="0">
                         <a:latin typeface="Arial" charset="0"/>
@@ -5464,7 +5464,7 @@
                 <a:ea typeface="Arial" pitchFamily="34" charset="-122"/>
                 <a:cs typeface="Arial" pitchFamily="34" charset="-120"/>
               </a:rPr>
-              <a:t>81.5%</a:t>
+              <a:t>81.0%</a:t>
             </a:r>
             <a:endParaRPr lang="en-US" sz="3200" dirty="0"/>
           </a:p>
@@ -5589,7 +5589,7 @@
                 <a:ea typeface="Arial" pitchFamily="34" charset="-122"/>
                 <a:cs typeface="Arial" pitchFamily="34" charset="-120"/>
               </a:rPr>
-              <a:t>2.2%</a:t>
+              <a:t>2.0%</a:t>
             </a:r>
             <a:endParaRPr lang="en-US" sz="3200" dirty="0"/>
           </a:p>
@@ -5714,7 +5714,7 @@
                 <a:ea typeface="Arial" pitchFamily="34" charset="-122"/>
                 <a:cs typeface="Arial" pitchFamily="34" charset="-120"/>
               </a:rPr>
-              <a:t>92件</a:t>
+              <a:t>100件</a:t>
             </a:r>
             <a:endParaRPr lang="en-US" sz="3200" dirty="0"/>
           </a:p>
@@ -5862,7 +5862,7 @@
                 <a:ea typeface="Arial" pitchFamily="34" charset="-122"/>
                 <a:cs typeface="Arial" pitchFamily="34" charset="-120"/>
               </a:rPr>
-              <a:t>  Camera più spaziosa della media e colazione molto abbonda...</a:t>
+              <a:t>  りんかい線での移動であれば抜群の立地ですが、京急青物横丁からは徒歩で7-8分というところ</a:t>
             </a:r>
             <a:endParaRPr lang="en-US" sz="1100" dirty="0"/>
           </a:p>
@@ -5902,7 +5902,7 @@
                 <a:ea typeface="Arial" pitchFamily="34" charset="-122"/>
                 <a:cs typeface="Arial" pitchFamily="34" charset="-120"/>
               </a:rPr>
-              <a:t>  連続滞在の場合に清掃しないという特別なポリシーはありません</a:t>
+              <a:t>  結構大規模なホテルで、そこそこ年季の入った設備ですが、手入れや清掃が意気届いているのか、ホコリや不潔な感じはしませ...</a:t>
             </a:r>
             <a:endParaRPr lang="en-US" sz="1100" dirty="0"/>
           </a:p>
@@ -6090,7 +6090,7 @@
                 <a:ea typeface="Arial" pitchFamily="34" charset="-122"/>
                 <a:cs typeface="Arial" pitchFamily="34" charset="-120"/>
               </a:rPr>
-              <a:t>  部屋も洗面浴室もキレイでした</a:t>
+              <a:t>  お部屋も最近のビジネスホテルに比べればやや広め、バスルームもユニットタイプながらゆったりしています</a:t>
             </a:r>
             <a:endParaRPr lang="en-US" sz="1100" dirty="0"/>
           </a:p>
@@ -6150,7 +6150,7 @@
                 <a:ea typeface="Arial" pitchFamily="34" charset="-122"/>
                 <a:cs typeface="Arial" pitchFamily="34" charset="-120"/>
               </a:rPr>
-              <a:t>対応・サービスの不満 </a:t>
+              <a:t>窓・採光 </a:t>
             </a:r>
             <a:endParaRPr lang="en-US" sz="1100" dirty="0"/>
           </a:p>
@@ -6170,7 +6170,7 @@
                 <a:ea typeface="Arial" pitchFamily="34" charset="-122"/>
                 <a:cs typeface="Arial" pitchFamily="34" charset="-120"/>
               </a:rPr>
-              <a:t>  一昨年利用した時は清潔感があり、良い印象だったので、また利用しましたが、今回は残念でした</a:t>
+              <a:t>  滞在中はエアコンはほとんど使わず、換気のために窓を開けただけでした</a:t>
             </a:r>
             <a:endParaRPr lang="en-US" sz="1100" dirty="0"/>
           </a:p>
@@ -6648,7 +6648,7 @@
                 <a:ea typeface="Arial" pitchFamily="34" charset="-122"/>
                 <a:cs typeface="Arial" pitchFamily="34" charset="-120"/>
               </a:rPr>
-              <a:t>81.5%</a:t>
+              <a:t>81.0%</a:t>
             </a:r>
             <a:endParaRPr lang="en-US" sz="3200" dirty="0"/>
           </a:p>
@@ -6773,7 +6773,7 @@
                 <a:ea typeface="Arial" pitchFamily="34" charset="-122"/>
                 <a:cs typeface="Arial" pitchFamily="34" charset="-120"/>
               </a:rPr>
-              <a:t>2.2%</a:t>
+              <a:t>2.0%</a:t>
             </a:r>
             <a:endParaRPr lang="en-US" sz="3200" dirty="0"/>
           </a:p>
@@ -6898,7 +6898,7 @@
                 <a:ea typeface="Arial" pitchFamily="34" charset="-122"/>
                 <a:cs typeface="Arial" pitchFamily="34" charset="-120"/>
               </a:rPr>
-              <a:t>92件</a:t>
+              <a:t>100件</a:t>
             </a:r>
             <a:endParaRPr lang="en-US" sz="3200" dirty="0"/>
           </a:p>
@@ -7368,7 +7368,7 @@
                 <a:ea typeface="Arial" pitchFamily="34" charset="-122"/>
                 <a:cs typeface="Arial" pitchFamily="34" charset="-120"/>
               </a:rPr>
-              <a:t>Google(7.1)が相対的に低い。口コミ返信の強化が急務</a:t>
+              <a:t>Google(6.9)が相対的に低い。口コミ返信の強化が急務</a:t>
             </a:r>
             <a:endParaRPr lang="en-US" sz="1100" dirty="0"/>
           </a:p>
@@ -8219,7 +8219,7 @@
                           <a:ea typeface="Arial" pitchFamily="34" charset="-122"/>
                           <a:cs typeface="Arial" pitchFamily="34" charset="-120"/>
                         </a:rPr>
-                        <a:t>18</a:t>
+                        <a:t>21</a:t>
                       </a:r>
                       <a:endParaRPr lang="en-US" sz="900" dirty="0">
                         <a:latin typeface="Arial" charset="0"/>
@@ -8287,7 +8287,7 @@
                           <a:ea typeface="Arial" pitchFamily="34" charset="-122"/>
                           <a:cs typeface="Arial" pitchFamily="34" charset="-120"/>
                         </a:rPr>
-                        <a:t>4.33</a:t>
+                        <a:t>4.38</a:t>
                       </a:r>
                       <a:endParaRPr lang="en-US" sz="900" dirty="0">
                         <a:latin typeface="Arial" charset="0"/>
@@ -8423,7 +8423,7 @@
                           <a:ea typeface="Arial" pitchFamily="34" charset="-122"/>
                           <a:cs typeface="Arial" pitchFamily="34" charset="-120"/>
                         </a:rPr>
-                        <a:t>8.67</a:t>
+                        <a:t>8.76</a:t>
                       </a:r>
                       <a:endParaRPr lang="en-US" sz="900" dirty="0">
                         <a:latin typeface="Arial" charset="0"/>
@@ -8561,7 +8561,7 @@
                           <a:ea typeface="Arial" pitchFamily="34" charset="-122"/>
                           <a:cs typeface="Arial" pitchFamily="34" charset="-120"/>
                         </a:rPr>
-                        <a:t>25</a:t>
+                        <a:t>27</a:t>
                       </a:r>
                       <a:endParaRPr lang="en-US" sz="900" dirty="0">
                         <a:latin typeface="Arial" charset="0"/>
@@ -8903,7 +8903,7 @@
                           <a:ea typeface="Arial" pitchFamily="34" charset="-122"/>
                           <a:cs typeface="Arial" pitchFamily="34" charset="-120"/>
                         </a:rPr>
-                        <a:t>20</a:t>
+                        <a:t>21</a:t>
                       </a:r>
                       <a:endParaRPr lang="en-US" sz="900" dirty="0">
                         <a:latin typeface="Arial" charset="0"/>
@@ -8971,7 +8971,7 @@
                           <a:ea typeface="Arial" pitchFamily="34" charset="-122"/>
                           <a:cs typeface="Arial" pitchFamily="34" charset="-120"/>
                         </a:rPr>
-                        <a:t>4.05</a:t>
+                        <a:t>4.1</a:t>
                       </a:r>
                       <a:endParaRPr lang="en-US" sz="900" dirty="0">
                         <a:latin typeface="Arial" charset="0"/>
@@ -9107,7 +9107,7 @@
                           <a:ea typeface="Arial" pitchFamily="34" charset="-122"/>
                           <a:cs typeface="Arial" pitchFamily="34" charset="-120"/>
                         </a:rPr>
-                        <a:t>8.1</a:t>
+                        <a:t>8.19</a:t>
                       </a:r>
                       <a:endParaRPr lang="en-US" sz="900" dirty="0">
                         <a:latin typeface="Arial" charset="0"/>
@@ -9587,7 +9587,7 @@
                           <a:ea typeface="Arial" pitchFamily="34" charset="-122"/>
                           <a:cs typeface="Arial" pitchFamily="34" charset="-120"/>
                         </a:rPr>
-                        <a:t>9</a:t>
+                        <a:t>11</a:t>
                       </a:r>
                       <a:endParaRPr lang="en-US" sz="900" dirty="0">
                         <a:latin typeface="Arial" charset="0"/>
@@ -9655,7 +9655,7 @@
                           <a:ea typeface="Arial" pitchFamily="34" charset="-122"/>
                           <a:cs typeface="Arial" pitchFamily="34" charset="-120"/>
                         </a:rPr>
-                        <a:t>3.56</a:t>
+                        <a:t>3.45</a:t>
                       </a:r>
                       <a:endParaRPr lang="en-US" sz="900" dirty="0">
                         <a:latin typeface="Arial" charset="0"/>
@@ -9791,7 +9791,7 @@
                           <a:ea typeface="Arial" pitchFamily="34" charset="-122"/>
                           <a:cs typeface="Arial" pitchFamily="34" charset="-120"/>
                         </a:rPr>
-                        <a:t>7.11</a:t>
+                        <a:t>6.91</a:t>
                       </a:r>
                       <a:endParaRPr lang="en-US" sz="900" dirty="0">
                         <a:latin typeface="Arial" charset="0"/>
@@ -10199,7 +10199,7 @@
                 <a:ea typeface="Arial" pitchFamily="34" charset="-122"/>
                 <a:cs typeface="Arial" pitchFamily="34" charset="-120"/>
               </a:rPr>
-              <a:t>75件（81.5%）</a:t>
+              <a:t>81件（81.0%）</a:t>
             </a:r>
             <a:endParaRPr lang="en-US" sz="1100" dirty="0"/>
           </a:p>
@@ -10297,7 +10297,7 @@
                 <a:ea typeface="Arial" pitchFamily="34" charset="-122"/>
                 <a:cs typeface="Arial" pitchFamily="34" charset="-120"/>
               </a:rPr>
-              <a:t>15件（16.3%）</a:t>
+              <a:t>17件（17.0%）</a:t>
             </a:r>
             <a:endParaRPr lang="en-US" sz="1100" dirty="0"/>
           </a:p>
@@ -10395,7 +10395,7 @@
                 <a:ea typeface="Arial" pitchFamily="34" charset="-122"/>
                 <a:cs typeface="Arial" pitchFamily="34" charset="-120"/>
               </a:rPr>
-              <a:t>2件（2.2%）</a:t>
+              <a:t>2件（2.0%）</a:t>
             </a:r>
             <a:endParaRPr lang="en-US" sz="1100" dirty="0"/>
           </a:p>
@@ -10807,7 +10807,7 @@
                 <a:ea typeface="Arial" pitchFamily="34" charset="-122"/>
                 <a:cs typeface="Arial" pitchFamily="34" charset="-120"/>
               </a:rPr>
-              <a:t>Camera più spaziosa della media e colazione molto abbonda...</a:t>
+              <a:t>りんかい線での移動であれば抜群の立地ですが、京急青物横丁からは徒歩で7-8分というところ</a:t>
             </a:r>
             <a:endParaRPr lang="en-US" sz="900" dirty="0"/>
           </a:p>
@@ -10846,7 +10846,7 @@
                 <a:ea typeface="Arial" pitchFamily="34" charset="-122"/>
                 <a:cs typeface="Arial" pitchFamily="34" charset="-120"/>
               </a:rPr>
-              <a:t>「立地はとても便利です」</a:t>
+              <a:t>「当日２１時までのイベント終わりに駅に到着、雨も降っていてホテルまで歩くのが嫌だなと思っていました」</a:t>
             </a:r>
             <a:endParaRPr lang="en-US" sz="900" dirty="0"/>
           </a:p>
@@ -11030,7 +11030,7 @@
                 <a:ea typeface="Arial" pitchFamily="34" charset="-122"/>
                 <a:cs typeface="Arial" pitchFamily="34" charset="-120"/>
               </a:rPr>
-              <a:t>連続滞在の場合に清掃しないという特別なポリシーはありません</a:t>
+              <a:t>結構大規模なホテルで、そこそこ年季の入った設備ですが、手入れや清掃が意気届いているのか、ホコリや不潔な感じはしませ...</a:t>
             </a:r>
             <a:endParaRPr lang="en-US" sz="900" dirty="0"/>
           </a:p>
@@ -11069,7 +11069,7 @@
                 <a:ea typeface="Arial" pitchFamily="34" charset="-122"/>
                 <a:cs typeface="Arial" pitchFamily="34" charset="-120"/>
               </a:rPr>
-              <a:t>「一昨年利用した時は清潔感があり、良い印象だったので、また利用しましたが、今回は残念でした」</a:t>
+              <a:t>「連続滞在の場合に清掃しないという特別なポリシーはありません」</a:t>
             </a:r>
             <a:endParaRPr lang="en-US" sz="900" dirty="0"/>
           </a:p>
@@ -11292,7 +11292,7 @@
                 <a:ea typeface="Arial" pitchFamily="34" charset="-122"/>
                 <a:cs typeface="Arial" pitchFamily="34" charset="-120"/>
               </a:rPr>
-              <a:t>「アクセスが良く、フロントの方の対応も悪くなかっただけに残念です」</a:t>
+              <a:t>「3回目の利用です  毎回サービスがよくお部屋も綺麗で満足させてもらってます  今回はたまたま端のお部屋だったので二...」</a:t>
             </a:r>
             <a:endParaRPr lang="en-US" sz="900" dirty="0"/>
           </a:p>
@@ -11476,7 +11476,7 @@
                 <a:ea typeface="Arial" pitchFamily="34" charset="-122"/>
                 <a:cs typeface="Arial" pitchFamily="34" charset="-120"/>
               </a:rPr>
-              <a:t>部屋の広さはちょうど良かった 設備をちゃんとして欲しい 設備をちゃんとして欲しい</a:t>
+              <a:t>結構大規模なホテルで、そこそこ年季の入った設備ですが、手入れや清掃が意気届いているのか、ホコリや不潔な感じはしませ...</a:t>
             </a:r>
             <a:endParaRPr lang="en-US" sz="900" dirty="0"/>
           </a:p>
@@ -11515,7 +11515,7 @@
                 <a:ea typeface="Arial" pitchFamily="34" charset="-122"/>
                 <a:cs typeface="Arial" pitchFamily="34" charset="-120"/>
               </a:rPr>
-              <a:t>「お風呂のお湯が蛇口で調節なのがちょっと面倒ですが十分快適に泊まれました 朝食も美味しかったです」</a:t>
+              <a:t>「セミダブルのお部屋しか取れなかったので、狭くて寝づらいか心配でしたが、ダブルに近い大きめのベッドでしたので十分でした」</a:t>
             </a:r>
             <a:endParaRPr lang="en-US" sz="900" dirty="0"/>
           </a:p>
@@ -11699,7 +11699,7 @@
                 <a:ea typeface="Arial" pitchFamily="34" charset="-122"/>
                 <a:cs typeface="Arial" pitchFamily="34" charset="-120"/>
               </a:rPr>
-              <a:t>雨降りで風も強い日でしたが、駅前の好立地で、近くにコンビニやイオンがあってすごく良かったです</a:t>
+              <a:t>正面がイオンなので、ちょっとした買い物や食事には全く困らないと思います</a:t>
             </a:r>
             <a:endParaRPr lang="en-US" sz="900" dirty="0"/>
           </a:p>
@@ -11738,7 +11738,7 @@
                 <a:ea typeface="Arial" pitchFamily="34" charset="-122"/>
                 <a:cs typeface="Arial" pitchFamily="34" charset="-120"/>
               </a:rPr>
-              <a:t>「すぐ向かいにイオンモールがあり、なんでも買い物が出来て便利です」</a:t>
+              <a:t>「駅近で行動もしやすく、イオンもすぐ目の前、コンビニも近くてとても便利でした」</a:t>
             </a:r>
             <a:endParaRPr lang="en-US" sz="900" dirty="0"/>
           </a:p>
@@ -11844,7 +11844,7 @@
                 <a:ea typeface="Arial" pitchFamily="34" charset="-122"/>
                 <a:cs typeface="Arial" pitchFamily="34" charset="-120"/>
               </a:rPr>
-              <a:t>8件</a:t>
+              <a:t>9件</a:t>
             </a:r>
             <a:endParaRPr lang="en-US" sz="900" dirty="0"/>
           </a:p>
@@ -11922,7 +11922,7 @@
                 <a:ea typeface="Arial" pitchFamily="34" charset="-122"/>
                 <a:cs typeface="Arial" pitchFamily="34" charset="-120"/>
               </a:rPr>
-              <a:t>お風呂のお湯が蛇口で調節なのがちょっと面倒ですが十分快適に泊まれました 朝食も美味しかったです</a:t>
+              <a:t>チェックインの時に翌日朝の朝食をお願いして、朝食ビュッフェを頂きましたが、品数の多さにビックリで大変満足でした</a:t>
             </a:r>
             <a:endParaRPr lang="en-US" sz="900" dirty="0"/>
           </a:p>
@@ -11961,7 +11961,7 @@
                 <a:ea typeface="Arial" pitchFamily="34" charset="-122"/>
                 <a:cs typeface="Arial" pitchFamily="34" charset="-120"/>
               </a:rPr>
-              <a:t>「朝食が美味しく　駅が近い    対応が　気持ちよく　親切」</a:t>
+              <a:t>「お風呂のお湯が蛇口で調節なのがちょっと面倒ですが十分快適に泊まれました 朝食も美味しかったです」</a:t>
             </a:r>
             <a:endParaRPr lang="en-US" sz="900" dirty="0"/>
           </a:p>
@@ -12651,7 +12651,7 @@
                           <a:ea typeface="Arial" pitchFamily="34" charset="-122"/>
                           <a:cs typeface="Arial" pitchFamily="34" charset="-120"/>
                         </a:rPr>
-                        <a:t>部屋も洗面浴室もキレイでした</a:t>
+                        <a:t>お部屋も最近のビジネスホテルに比べればやや広め、バスルームもユニットタイプながらゆったりしています</a:t>
                       </a:r>
                       <a:endParaRPr lang="en-US" sz="900" dirty="0">
                         <a:latin typeface="Arial" charset="0"/>
@@ -12719,7 +12719,7 @@
                           <a:ea typeface="Arial" pitchFamily="34" charset="-122"/>
                           <a:cs typeface="Arial" pitchFamily="34" charset="-120"/>
                         </a:rPr>
-                        <a:t>7件</a:t>
+                        <a:t>10件</a:t>
                       </a:r>
                       <a:endParaRPr lang="en-US" sz="900" dirty="0">
                         <a:latin typeface="Arial" charset="0"/>
@@ -12993,7 +12993,7 @@
                           <a:ea typeface="Arial" pitchFamily="34" charset="-122"/>
                           <a:cs typeface="Arial" pitchFamily="34" charset="-120"/>
                         </a:rPr>
-                        <a:t>7件</a:t>
+                        <a:t>8件</a:t>
                       </a:r>
                       <a:endParaRPr lang="en-US" sz="900" dirty="0">
                         <a:latin typeface="Arial" charset="0"/>
@@ -13131,7 +13131,7 @@
                           <a:ea typeface="Arial" pitchFamily="34" charset="-122"/>
                           <a:cs typeface="Arial" pitchFamily="34" charset="-120"/>
                         </a:rPr>
-                        <a:t>対応・サービスの不満</a:t>
+                        <a:t>窓・採光</a:t>
                       </a:r>
                       <a:endParaRPr lang="en-US" sz="900" dirty="0">
                         <a:latin typeface="Arial" charset="0"/>
@@ -13199,7 +13199,7 @@
                           <a:ea typeface="Arial" pitchFamily="34" charset="-122"/>
                           <a:cs typeface="Arial" pitchFamily="34" charset="-120"/>
                         </a:rPr>
-                        <a:t>一昨年利用した時は清潔感があり、良い印象だったので、また利用しましたが、今回は残念でした</a:t>
+                        <a:t>滞在中はエアコンはほとんど使わず、換気のために窓を開けただけでした</a:t>
                       </a:r>
                       <a:endParaRPr lang="en-US" sz="900" dirty="0">
                         <a:latin typeface="Arial" charset="0"/>
@@ -13267,7 +13267,7 @@
                           <a:ea typeface="Arial" pitchFamily="34" charset="-122"/>
                           <a:cs typeface="Arial" pitchFamily="34" charset="-120"/>
                         </a:rPr>
-                        <a:t>4件</a:t>
+                        <a:t>5件</a:t>
                       </a:r>
                       <a:endParaRPr lang="en-US" sz="900" dirty="0">
                         <a:latin typeface="Arial" charset="0"/>
@@ -13541,7 +13541,7 @@
                           <a:ea typeface="Arial" pitchFamily="34" charset="-122"/>
                           <a:cs typeface="Arial" pitchFamily="34" charset="-120"/>
                         </a:rPr>
-                        <a:t>3件</a:t>
+                        <a:t>4件</a:t>
                       </a:r>
                       <a:endParaRPr lang="en-US" sz="900" dirty="0">
                         <a:latin typeface="Arial" charset="0"/>
@@ -13679,7 +13679,7 @@
                           <a:ea typeface="Arial" pitchFamily="34" charset="-122"/>
                           <a:cs typeface="Arial" pitchFamily="34" charset="-120"/>
                         </a:rPr>
-                        <a:t>窓・採光</a:t>
+                        <a:t>対応・サービスの不満</a:t>
                       </a:r>
                       <a:endParaRPr lang="en-US" sz="900" dirty="0">
                         <a:latin typeface="Arial" charset="0"/>
@@ -13747,7 +13747,7 @@
                           <a:ea typeface="Arial" pitchFamily="34" charset="-122"/>
                           <a:cs typeface="Arial" pitchFamily="34" charset="-120"/>
                         </a:rPr>
-                        <a:t>滞在中はエアコンはほとんど使わず、換気のために窓を開けただけでした</a:t>
+                        <a:t>一昨年利用した時は清潔感があり、良い印象だったので、また利用しましたが、今回は残念でした</a:t>
                       </a:r>
                       <a:endParaRPr lang="en-US" sz="900" dirty="0">
                         <a:latin typeface="Arial" charset="0"/>
@@ -13815,7 +13815,7 @@
                           <a:ea typeface="Arial" pitchFamily="34" charset="-122"/>
                           <a:cs typeface="Arial" pitchFamily="34" charset="-120"/>
                         </a:rPr>
-                        <a:t>3件</a:t>
+                        <a:t>4件</a:t>
                       </a:r>
                       <a:endParaRPr lang="en-US" sz="900" dirty="0">
                         <a:latin typeface="Arial" charset="0"/>
@@ -13953,7 +13953,7 @@
                           <a:ea typeface="Arial" pitchFamily="34" charset="-122"/>
                           <a:cs typeface="Arial" pitchFamily="34" charset="-120"/>
                         </a:rPr>
-                        <a:t>防音性能</a:t>
+                        <a:t>設備の老朽化</a:t>
                       </a:r>
                       <a:endParaRPr lang="en-US" sz="900" dirty="0">
                         <a:latin typeface="Arial" charset="0"/>
@@ -14021,7 +14021,7 @@
                           <a:ea typeface="Arial" pitchFamily="34" charset="-122"/>
                           <a:cs typeface="Arial" pitchFamily="34" charset="-120"/>
                         </a:rPr>
-                        <a:t>お部屋も綺麗で、隣の音も気にならなかったです</a:t>
+                        <a:t>結構大規模なホテルで、そこそこ年季の入った設備ですが、手入れや清掃が意気届いているのか、ホコリや不潔な感じはしませ...</a:t>
                       </a:r>
                       <a:endParaRPr lang="en-US" sz="900" dirty="0">
                         <a:latin typeface="Arial" charset="0"/>
@@ -14089,7 +14089,7 @@
                           <a:ea typeface="Arial" pitchFamily="34" charset="-122"/>
                           <a:cs typeface="Arial" pitchFamily="34" charset="-120"/>
                         </a:rPr>
-                        <a:t>2件</a:t>
+                        <a:t>3件</a:t>
                       </a:r>
                       <a:endParaRPr lang="en-US" sz="900" dirty="0">
                         <a:latin typeface="Arial" charset="0"/>
@@ -14227,7 +14227,7 @@
                           <a:ea typeface="Arial" pitchFamily="34" charset="-122"/>
                           <a:cs typeface="Arial" pitchFamily="34" charset="-120"/>
                         </a:rPr>
-                        <a:t>設備の老朽化</a:t>
+                        <a:t>防音性能</a:t>
                       </a:r>
                       <a:endParaRPr lang="en-US" sz="900" dirty="0">
                         <a:latin typeface="Arial" charset="0"/>
@@ -14295,7 +14295,555 @@
                           <a:ea typeface="Arial" pitchFamily="34" charset="-122"/>
                           <a:cs typeface="Arial" pitchFamily="34" charset="-120"/>
                         </a:rPr>
-                        <a:t>部屋は少し古いが、一階に自販機や電子レンジがあり助かった</a:t>
+                        <a:t>お部屋も綺麗で、隣の音も気にならなかったです</a:t>
+                      </a:r>
+                      <a:endParaRPr lang="en-US" sz="900" dirty="0">
+                        <a:latin typeface="Arial" charset="0"/>
+                        <a:ea typeface="Arial" charset="0"/>
+                        <a:cs typeface="Arial" charset="0"/>
+                      </a:endParaRPr>
+                    </a:p>
+                  </a:txBody>
+                  <a:tcPr marL="91440" marR="91440" marT="45720" marB="45720">
+                    <a:lnL w="6350" cap="flat" cmpd="sng" algn="ctr">
+                      <a:solidFill>
+                        <a:srgbClr val="CBD5E1"/>
+                      </a:solidFill>
+                      <a:prstDash val="solid"/>
+                      <a:round/>
+                      <a:headEnd type="none" w="med" len="med"/>
+                      <a:tailEnd type="none" w="med" len="med"/>
+                    </a:lnL>
+                    <a:lnR w="6350" cap="flat" cmpd="sng" algn="ctr">
+                      <a:solidFill>
+                        <a:srgbClr val="CBD5E1"/>
+                      </a:solidFill>
+                      <a:prstDash val="solid"/>
+                      <a:round/>
+                      <a:headEnd type="none" w="med" len="med"/>
+                      <a:tailEnd type="none" w="med" len="med"/>
+                    </a:lnR>
+                    <a:lnT w="6350" cap="flat" cmpd="sng" algn="ctr">
+                      <a:solidFill>
+                        <a:srgbClr val="CBD5E1"/>
+                      </a:solidFill>
+                      <a:prstDash val="solid"/>
+                      <a:round/>
+                      <a:headEnd type="none" w="med" len="med"/>
+                      <a:tailEnd type="none" w="med" len="med"/>
+                    </a:lnT>
+                    <a:lnB w="6350" cap="flat" cmpd="sng" algn="ctr">
+                      <a:solidFill>
+                        <a:srgbClr val="CBD5E1"/>
+                      </a:solidFill>
+                      <a:prstDash val="solid"/>
+                      <a:round/>
+                      <a:headEnd type="none" w="med" len="med"/>
+                      <a:tailEnd type="none" w="med" len="med"/>
+                    </a:lnB>
+                    <a:solidFill>
+                      <a:srgbClr val="E8EFF8"/>
+                    </a:solidFill>
+                  </a:tcPr>
+                </a:tc>
+                <a:tc>
+                  <a:txBody>
+                    <a:bodyPr/>
+                    <a:lstStyle/>
+                    <a:p>
+                      <a:pPr algn="ctr" indent="0" marL="0">
+                        <a:buNone/>
+                      </a:pPr>
+                      <a:r>
+                        <a:rPr lang="en-US" sz="900" dirty="0">
+                          <a:solidFill>
+                            <a:srgbClr val="334155"/>
+                          </a:solidFill>
+                          <a:latin typeface="Arial" pitchFamily="34" charset="0"/>
+                          <a:ea typeface="Arial" pitchFamily="34" charset="-122"/>
+                          <a:cs typeface="Arial" pitchFamily="34" charset="-120"/>
+                        </a:rPr>
+                        <a:t>2件</a:t>
+                      </a:r>
+                      <a:endParaRPr lang="en-US" sz="900" dirty="0">
+                        <a:latin typeface="Arial" charset="0"/>
+                        <a:ea typeface="Arial" charset="0"/>
+                        <a:cs typeface="Arial" charset="0"/>
+                      </a:endParaRPr>
+                    </a:p>
+                  </a:txBody>
+                  <a:tcPr marL="91440" marR="91440" marT="45720" marB="45720">
+                    <a:lnL w="6350" cap="flat" cmpd="sng" algn="ctr">
+                      <a:solidFill>
+                        <a:srgbClr val="CBD5E1"/>
+                      </a:solidFill>
+                      <a:prstDash val="solid"/>
+                      <a:round/>
+                      <a:headEnd type="none" w="med" len="med"/>
+                      <a:tailEnd type="none" w="med" len="med"/>
+                    </a:lnL>
+                    <a:lnR w="6350" cap="flat" cmpd="sng" algn="ctr">
+                      <a:solidFill>
+                        <a:srgbClr val="CBD5E1"/>
+                      </a:solidFill>
+                      <a:prstDash val="solid"/>
+                      <a:round/>
+                      <a:headEnd type="none" w="med" len="med"/>
+                      <a:tailEnd type="none" w="med" len="med"/>
+                    </a:lnR>
+                    <a:lnT w="6350" cap="flat" cmpd="sng" algn="ctr">
+                      <a:solidFill>
+                        <a:srgbClr val="CBD5E1"/>
+                      </a:solidFill>
+                      <a:prstDash val="solid"/>
+                      <a:round/>
+                      <a:headEnd type="none" w="med" len="med"/>
+                      <a:tailEnd type="none" w="med" len="med"/>
+                    </a:lnT>
+                    <a:lnB w="6350" cap="flat" cmpd="sng" algn="ctr">
+                      <a:solidFill>
+                        <a:srgbClr val="CBD5E1"/>
+                      </a:solidFill>
+                      <a:prstDash val="solid"/>
+                      <a:round/>
+                      <a:headEnd type="none" w="med" len="med"/>
+                      <a:tailEnd type="none" w="med" len="med"/>
+                    </a:lnB>
+                    <a:solidFill>
+                      <a:srgbClr val="E8EFF8"/>
+                    </a:solidFill>
+                  </a:tcPr>
+                </a:tc>
+              </a:tr>
+              <a:tr h="320040">
+                <a:tc>
+                  <a:txBody>
+                    <a:bodyPr/>
+                    <a:lstStyle/>
+                    <a:p>
+                      <a:pPr algn="ctr" indent="0" marL="0">
+                        <a:buNone/>
+                      </a:pPr>
+                      <a:r>
+                        <a:rPr lang="en-US" sz="1200" b="1" dirty="0">
+                          <a:solidFill>
+                            <a:srgbClr val="94A3B8"/>
+                          </a:solidFill>
+                          <a:latin typeface="Arial" pitchFamily="34" charset="0"/>
+                          <a:ea typeface="Arial" pitchFamily="34" charset="-122"/>
+                          <a:cs typeface="Arial" pitchFamily="34" charset="-120"/>
+                        </a:rPr>
+                        <a:t>C</a:t>
+                      </a:r>
+                      <a:endParaRPr lang="en-US" sz="1200" dirty="0">
+                        <a:latin typeface="Arial" charset="0"/>
+                        <a:ea typeface="Arial" charset="0"/>
+                        <a:cs typeface="Arial" charset="0"/>
+                      </a:endParaRPr>
+                    </a:p>
+                  </a:txBody>
+                  <a:tcPr marL="91440" marR="91440" marT="45720" marB="45720">
+                    <a:lnL w="6350" cap="flat" cmpd="sng" algn="ctr">
+                      <a:solidFill>
+                        <a:srgbClr val="CBD5E1"/>
+                      </a:solidFill>
+                      <a:prstDash val="solid"/>
+                      <a:round/>
+                      <a:headEnd type="none" w="med" len="med"/>
+                      <a:tailEnd type="none" w="med" len="med"/>
+                    </a:lnL>
+                    <a:lnR w="6350" cap="flat" cmpd="sng" algn="ctr">
+                      <a:solidFill>
+                        <a:srgbClr val="CBD5E1"/>
+                      </a:solidFill>
+                      <a:prstDash val="solid"/>
+                      <a:round/>
+                      <a:headEnd type="none" w="med" len="med"/>
+                      <a:tailEnd type="none" w="med" len="med"/>
+                    </a:lnR>
+                    <a:lnT w="6350" cap="flat" cmpd="sng" algn="ctr">
+                      <a:solidFill>
+                        <a:srgbClr val="CBD5E1"/>
+                      </a:solidFill>
+                      <a:prstDash val="solid"/>
+                      <a:round/>
+                      <a:headEnd type="none" w="med" len="med"/>
+                      <a:tailEnd type="none" w="med" len="med"/>
+                    </a:lnT>
+                    <a:lnB w="6350" cap="flat" cmpd="sng" algn="ctr">
+                      <a:solidFill>
+                        <a:srgbClr val="CBD5E1"/>
+                      </a:solidFill>
+                      <a:prstDash val="solid"/>
+                      <a:round/>
+                      <a:headEnd type="none" w="med" len="med"/>
+                      <a:tailEnd type="none" w="med" len="med"/>
+                    </a:lnB>
+                    <a:solidFill>
+                      <a:srgbClr val="FFFFFF"/>
+                    </a:solidFill>
+                  </a:tcPr>
+                </a:tc>
+                <a:tc>
+                  <a:txBody>
+                    <a:bodyPr/>
+                    <a:lstStyle/>
+                    <a:p>
+                      <a:pPr indent="0" marL="0">
+                        <a:buNone/>
+                      </a:pPr>
+                      <a:r>
+                        <a:rPr lang="en-US" sz="900" b="1" dirty="0">
+                          <a:solidFill>
+                            <a:srgbClr val="334155"/>
+                          </a:solidFill>
+                          <a:latin typeface="Arial" pitchFamily="34" charset="0"/>
+                          <a:ea typeface="Arial" pitchFamily="34" charset="-122"/>
+                          <a:cs typeface="Arial" pitchFamily="34" charset="-120"/>
+                        </a:rPr>
+                        <a:t>朝食の改善要望</a:t>
+                      </a:r>
+                      <a:endParaRPr lang="en-US" sz="900" dirty="0">
+                        <a:latin typeface="Arial" charset="0"/>
+                        <a:ea typeface="Arial" charset="0"/>
+                        <a:cs typeface="Arial" charset="0"/>
+                      </a:endParaRPr>
+                    </a:p>
+                  </a:txBody>
+                  <a:tcPr marL="91440" marR="91440" marT="45720" marB="45720">
+                    <a:lnL w="6350" cap="flat" cmpd="sng" algn="ctr">
+                      <a:solidFill>
+                        <a:srgbClr val="CBD5E1"/>
+                      </a:solidFill>
+                      <a:prstDash val="solid"/>
+                      <a:round/>
+                      <a:headEnd type="none" w="med" len="med"/>
+                      <a:tailEnd type="none" w="med" len="med"/>
+                    </a:lnL>
+                    <a:lnR w="6350" cap="flat" cmpd="sng" algn="ctr">
+                      <a:solidFill>
+                        <a:srgbClr val="CBD5E1"/>
+                      </a:solidFill>
+                      <a:prstDash val="solid"/>
+                      <a:round/>
+                      <a:headEnd type="none" w="med" len="med"/>
+                      <a:tailEnd type="none" w="med" len="med"/>
+                    </a:lnR>
+                    <a:lnT w="6350" cap="flat" cmpd="sng" algn="ctr">
+                      <a:solidFill>
+                        <a:srgbClr val="CBD5E1"/>
+                      </a:solidFill>
+                      <a:prstDash val="solid"/>
+                      <a:round/>
+                      <a:headEnd type="none" w="med" len="med"/>
+                      <a:tailEnd type="none" w="med" len="med"/>
+                    </a:lnT>
+                    <a:lnB w="6350" cap="flat" cmpd="sng" algn="ctr">
+                      <a:solidFill>
+                        <a:srgbClr val="CBD5E1"/>
+                      </a:solidFill>
+                      <a:prstDash val="solid"/>
+                      <a:round/>
+                      <a:headEnd type="none" w="med" len="med"/>
+                      <a:tailEnd type="none" w="med" len="med"/>
+                    </a:lnB>
+                    <a:solidFill>
+                      <a:srgbClr val="FFFFFF"/>
+                    </a:solidFill>
+                  </a:tcPr>
+                </a:tc>
+                <a:tc>
+                  <a:txBody>
+                    <a:bodyPr/>
+                    <a:lstStyle/>
+                    <a:p>
+                      <a:pPr indent="0" marL="0">
+                        <a:buNone/>
+                      </a:pPr>
+                      <a:r>
+                        <a:rPr lang="en-US" sz="900" dirty="0">
+                          <a:solidFill>
+                            <a:srgbClr val="64748B"/>
+                          </a:solidFill>
+                          <a:latin typeface="Arial" pitchFamily="34" charset="0"/>
+                          <a:ea typeface="Arial" pitchFamily="34" charset="-122"/>
+                          <a:cs typeface="Arial" pitchFamily="34" charset="-120"/>
+                        </a:rPr>
+                        <a:t>チェックインの時に翌日朝の朝食をお願いして、朝食ビュッフェを頂きましたが、品数の多さにビックリで大変満足でした</a:t>
+                      </a:r>
+                      <a:endParaRPr lang="en-US" sz="900" dirty="0">
+                        <a:latin typeface="Arial" charset="0"/>
+                        <a:ea typeface="Arial" charset="0"/>
+                        <a:cs typeface="Arial" charset="0"/>
+                      </a:endParaRPr>
+                    </a:p>
+                  </a:txBody>
+                  <a:tcPr marL="91440" marR="91440" marT="45720" marB="45720">
+                    <a:lnL w="6350" cap="flat" cmpd="sng" algn="ctr">
+                      <a:solidFill>
+                        <a:srgbClr val="CBD5E1"/>
+                      </a:solidFill>
+                      <a:prstDash val="solid"/>
+                      <a:round/>
+                      <a:headEnd type="none" w="med" len="med"/>
+                      <a:tailEnd type="none" w="med" len="med"/>
+                    </a:lnL>
+                    <a:lnR w="6350" cap="flat" cmpd="sng" algn="ctr">
+                      <a:solidFill>
+                        <a:srgbClr val="CBD5E1"/>
+                      </a:solidFill>
+                      <a:prstDash val="solid"/>
+                      <a:round/>
+                      <a:headEnd type="none" w="med" len="med"/>
+                      <a:tailEnd type="none" w="med" len="med"/>
+                    </a:lnR>
+                    <a:lnT w="6350" cap="flat" cmpd="sng" algn="ctr">
+                      <a:solidFill>
+                        <a:srgbClr val="CBD5E1"/>
+                      </a:solidFill>
+                      <a:prstDash val="solid"/>
+                      <a:round/>
+                      <a:headEnd type="none" w="med" len="med"/>
+                      <a:tailEnd type="none" w="med" len="med"/>
+                    </a:lnT>
+                    <a:lnB w="6350" cap="flat" cmpd="sng" algn="ctr">
+                      <a:solidFill>
+                        <a:srgbClr val="CBD5E1"/>
+                      </a:solidFill>
+                      <a:prstDash val="solid"/>
+                      <a:round/>
+                      <a:headEnd type="none" w="med" len="med"/>
+                      <a:tailEnd type="none" w="med" len="med"/>
+                    </a:lnB>
+                    <a:solidFill>
+                      <a:srgbClr val="FFFFFF"/>
+                    </a:solidFill>
+                  </a:tcPr>
+                </a:tc>
+                <a:tc>
+                  <a:txBody>
+                    <a:bodyPr/>
+                    <a:lstStyle/>
+                    <a:p>
+                      <a:pPr algn="ctr" indent="0" marL="0">
+                        <a:buNone/>
+                      </a:pPr>
+                      <a:r>
+                        <a:rPr lang="en-US" sz="900" dirty="0">
+                          <a:solidFill>
+                            <a:srgbClr val="334155"/>
+                          </a:solidFill>
+                          <a:latin typeface="Arial" pitchFamily="34" charset="0"/>
+                          <a:ea typeface="Arial" pitchFamily="34" charset="-122"/>
+                          <a:cs typeface="Arial" pitchFamily="34" charset="-120"/>
+                        </a:rPr>
+                        <a:t>1件</a:t>
+                      </a:r>
+                      <a:endParaRPr lang="en-US" sz="900" dirty="0">
+                        <a:latin typeface="Arial" charset="0"/>
+                        <a:ea typeface="Arial" charset="0"/>
+                        <a:cs typeface="Arial" charset="0"/>
+                      </a:endParaRPr>
+                    </a:p>
+                  </a:txBody>
+                  <a:tcPr marL="91440" marR="91440" marT="45720" marB="45720">
+                    <a:lnL w="6350" cap="flat" cmpd="sng" algn="ctr">
+                      <a:solidFill>
+                        <a:srgbClr val="CBD5E1"/>
+                      </a:solidFill>
+                      <a:prstDash val="solid"/>
+                      <a:round/>
+                      <a:headEnd type="none" w="med" len="med"/>
+                      <a:tailEnd type="none" w="med" len="med"/>
+                    </a:lnL>
+                    <a:lnR w="6350" cap="flat" cmpd="sng" algn="ctr">
+                      <a:solidFill>
+                        <a:srgbClr val="CBD5E1"/>
+                      </a:solidFill>
+                      <a:prstDash val="solid"/>
+                      <a:round/>
+                      <a:headEnd type="none" w="med" len="med"/>
+                      <a:tailEnd type="none" w="med" len="med"/>
+                    </a:lnR>
+                    <a:lnT w="6350" cap="flat" cmpd="sng" algn="ctr">
+                      <a:solidFill>
+                        <a:srgbClr val="CBD5E1"/>
+                      </a:solidFill>
+                      <a:prstDash val="solid"/>
+                      <a:round/>
+                      <a:headEnd type="none" w="med" len="med"/>
+                      <a:tailEnd type="none" w="med" len="med"/>
+                    </a:lnT>
+                    <a:lnB w="6350" cap="flat" cmpd="sng" algn="ctr">
+                      <a:solidFill>
+                        <a:srgbClr val="CBD5E1"/>
+                      </a:solidFill>
+                      <a:prstDash val="solid"/>
+                      <a:round/>
+                      <a:headEnd type="none" w="med" len="med"/>
+                      <a:tailEnd type="none" w="med" len="med"/>
+                    </a:lnB>
+                    <a:solidFill>
+                      <a:srgbClr val="FFFFFF"/>
+                    </a:solidFill>
+                  </a:tcPr>
+                </a:tc>
+              </a:tr>
+              <a:tr h="320040">
+                <a:tc>
+                  <a:txBody>
+                    <a:bodyPr/>
+                    <a:lstStyle/>
+                    <a:p>
+                      <a:pPr algn="ctr" indent="0" marL="0">
+                        <a:buNone/>
+                      </a:pPr>
+                      <a:r>
+                        <a:rPr lang="en-US" sz="1200" b="1" dirty="0">
+                          <a:solidFill>
+                            <a:srgbClr val="94A3B8"/>
+                          </a:solidFill>
+                          <a:latin typeface="Arial" pitchFamily="34" charset="0"/>
+                          <a:ea typeface="Arial" pitchFamily="34" charset="-122"/>
+                          <a:cs typeface="Arial" pitchFamily="34" charset="-120"/>
+                        </a:rPr>
+                        <a:t>C</a:t>
+                      </a:r>
+                      <a:endParaRPr lang="en-US" sz="1200" dirty="0">
+                        <a:latin typeface="Arial" charset="0"/>
+                        <a:ea typeface="Arial" charset="0"/>
+                        <a:cs typeface="Arial" charset="0"/>
+                      </a:endParaRPr>
+                    </a:p>
+                  </a:txBody>
+                  <a:tcPr marL="91440" marR="91440" marT="45720" marB="45720">
+                    <a:lnL w="6350" cap="flat" cmpd="sng" algn="ctr">
+                      <a:solidFill>
+                        <a:srgbClr val="CBD5E1"/>
+                      </a:solidFill>
+                      <a:prstDash val="solid"/>
+                      <a:round/>
+                      <a:headEnd type="none" w="med" len="med"/>
+                      <a:tailEnd type="none" w="med" len="med"/>
+                    </a:lnL>
+                    <a:lnR w="6350" cap="flat" cmpd="sng" algn="ctr">
+                      <a:solidFill>
+                        <a:srgbClr val="CBD5E1"/>
+                      </a:solidFill>
+                      <a:prstDash val="solid"/>
+                      <a:round/>
+                      <a:headEnd type="none" w="med" len="med"/>
+                      <a:tailEnd type="none" w="med" len="med"/>
+                    </a:lnR>
+                    <a:lnT w="6350" cap="flat" cmpd="sng" algn="ctr">
+                      <a:solidFill>
+                        <a:srgbClr val="CBD5E1"/>
+                      </a:solidFill>
+                      <a:prstDash val="solid"/>
+                      <a:round/>
+                      <a:headEnd type="none" w="med" len="med"/>
+                      <a:tailEnd type="none" w="med" len="med"/>
+                    </a:lnT>
+                    <a:lnB w="6350" cap="flat" cmpd="sng" algn="ctr">
+                      <a:solidFill>
+                        <a:srgbClr val="CBD5E1"/>
+                      </a:solidFill>
+                      <a:prstDash val="solid"/>
+                      <a:round/>
+                      <a:headEnd type="none" w="med" len="med"/>
+                      <a:tailEnd type="none" w="med" len="med"/>
+                    </a:lnB>
+                    <a:solidFill>
+                      <a:srgbClr val="E8EFF8"/>
+                    </a:solidFill>
+                  </a:tcPr>
+                </a:tc>
+                <a:tc>
+                  <a:txBody>
+                    <a:bodyPr/>
+                    <a:lstStyle/>
+                    <a:p>
+                      <a:pPr indent="0" marL="0">
+                        <a:buNone/>
+                      </a:pPr>
+                      <a:r>
+                        <a:rPr lang="en-US" sz="900" b="1" dirty="0">
+                          <a:solidFill>
+                            <a:srgbClr val="334155"/>
+                          </a:solidFill>
+                          <a:latin typeface="Arial" pitchFamily="34" charset="0"/>
+                          <a:ea typeface="Arial" pitchFamily="34" charset="-122"/>
+                          <a:cs typeface="Arial" pitchFamily="34" charset="-120"/>
+                        </a:rPr>
+                        <a:t>清掃不備</a:t>
+                      </a:r>
+                      <a:endParaRPr lang="en-US" sz="900" dirty="0">
+                        <a:latin typeface="Arial" charset="0"/>
+                        <a:ea typeface="Arial" charset="0"/>
+                        <a:cs typeface="Arial" charset="0"/>
+                      </a:endParaRPr>
+                    </a:p>
+                  </a:txBody>
+                  <a:tcPr marL="91440" marR="91440" marT="45720" marB="45720">
+                    <a:lnL w="6350" cap="flat" cmpd="sng" algn="ctr">
+                      <a:solidFill>
+                        <a:srgbClr val="CBD5E1"/>
+                      </a:solidFill>
+                      <a:prstDash val="solid"/>
+                      <a:round/>
+                      <a:headEnd type="none" w="med" len="med"/>
+                      <a:tailEnd type="none" w="med" len="med"/>
+                    </a:lnL>
+                    <a:lnR w="6350" cap="flat" cmpd="sng" algn="ctr">
+                      <a:solidFill>
+                        <a:srgbClr val="CBD5E1"/>
+                      </a:solidFill>
+                      <a:prstDash val="solid"/>
+                      <a:round/>
+                      <a:headEnd type="none" w="med" len="med"/>
+                      <a:tailEnd type="none" w="med" len="med"/>
+                    </a:lnR>
+                    <a:lnT w="6350" cap="flat" cmpd="sng" algn="ctr">
+                      <a:solidFill>
+                        <a:srgbClr val="CBD5E1"/>
+                      </a:solidFill>
+                      <a:prstDash val="solid"/>
+                      <a:round/>
+                      <a:headEnd type="none" w="med" len="med"/>
+                      <a:tailEnd type="none" w="med" len="med"/>
+                    </a:lnT>
+                    <a:lnB w="6350" cap="flat" cmpd="sng" algn="ctr">
+                      <a:solidFill>
+                        <a:srgbClr val="CBD5E1"/>
+                      </a:solidFill>
+                      <a:prstDash val="solid"/>
+                      <a:round/>
+                      <a:headEnd type="none" w="med" len="med"/>
+                      <a:tailEnd type="none" w="med" len="med"/>
+                    </a:lnB>
+                    <a:solidFill>
+                      <a:srgbClr val="E8EFF8"/>
+                    </a:solidFill>
+                  </a:tcPr>
+                </a:tc>
+                <a:tc>
+                  <a:txBody>
+                    <a:bodyPr/>
+                    <a:lstStyle/>
+                    <a:p>
+                      <a:pPr indent="0" marL="0">
+                        <a:buNone/>
+                      </a:pPr>
+                      <a:r>
+                        <a:rPr lang="en-US" sz="900" dirty="0">
+                          <a:solidFill>
+                            <a:srgbClr val="64748B"/>
+                          </a:solidFill>
+                          <a:latin typeface="Arial" pitchFamily="34" charset="0"/>
+                          <a:ea typeface="Arial" pitchFamily="34" charset="-122"/>
+                          <a:cs typeface="Arial" pitchFamily="34" charset="-120"/>
+                        </a:rPr>
+                        <a:t>結構大規模なホテルで、そこそこ年季の入った設備ですが、手入れや清掃が意気届いているのか、ホコリや不潔な感じはしませ...</a:t>
                       </a:r>
                       <a:endParaRPr lang="en-US" sz="900" dirty="0">
                         <a:latin typeface="Arial" charset="0"/>
@@ -15074,6 +15622,348 @@
                 <a:ea typeface="Arial" pitchFamily="34" charset="-122"/>
                 <a:cs typeface="Arial" pitchFamily="34" charset="-120"/>
               </a:rPr>
+              <a:t>清掃品質の向上</a:t>
+            </a:r>
+            <a:endParaRPr lang="en-US" sz="1200" dirty="0"/>
+          </a:p>
+        </p:txBody>
+      </p:sp>
+      <p:sp>
+        <p:nvSpPr>
+          <p:cNvPr id="13" name="Text 11"/>
+          <p:cNvSpPr/>
+          <p:nvPr/>
+        </p:nvSpPr>
+        <p:spPr>
+          <a:xfrm>
+            <a:off x="4800600" y="1600200"/>
+            <a:ext cx="3657600" cy="1188720"/>
+          </a:xfrm>
+          <a:prstGeom prst="rect">
+            <a:avLst/>
+          </a:prstGeom>
+          <a:noFill/>
+          <a:ln/>
+        </p:spPr>
+        <p:txBody>
+          <a:bodyPr wrap="square" lIns="0" tIns="0" rIns="0" bIns="0" rtlCol="0" anchor="ctr"/>
+          <a:lstStyle/>
+          <a:p>
+            <a:pPr marL="342900" indent="-342900">
+              <a:spcAft>
+                <a:spcPts val="300"/>
+              </a:spcAft>
+              <a:buSzPct val="100000"/>
+              <a:buChar char="•"/>
+            </a:pPr>
+            <a:r>
+              <a:rPr lang="en-US" sz="900" dirty="0">
+                <a:solidFill>
+                  <a:srgbClr val="334155"/>
+                </a:solidFill>
+                <a:latin typeface="Arial" pitchFamily="34" charset="0"/>
+                <a:ea typeface="Arial" pitchFamily="34" charset="-122"/>
+                <a:cs typeface="Arial" pitchFamily="34" charset="-120"/>
+              </a:rPr>
+              <a:t>清掃チェックリストの見直しと強化（ベッド下・隅の重点確認）</a:t>
+            </a:r>
+            <a:endParaRPr lang="en-US" sz="900" dirty="0"/>
+          </a:p>
+          <a:p>
+            <a:pPr marL="342900" indent="-342900">
+              <a:spcAft>
+                <a:spcPts val="300"/>
+              </a:spcAft>
+              <a:buSzPct val="100000"/>
+              <a:buChar char="•"/>
+            </a:pPr>
+            <a:r>
+              <a:rPr lang="en-US" sz="900" dirty="0">
+                <a:solidFill>
+                  <a:srgbClr val="334155"/>
+                </a:solidFill>
+                <a:latin typeface="Arial" pitchFamily="34" charset="0"/>
+                <a:ea typeface="Arial" pitchFamily="34" charset="-122"/>
+                <a:cs typeface="Arial" pitchFamily="34" charset="-120"/>
+              </a:rPr>
+              <a:t>清掃後のダブルチェック体制の導入</a:t>
+            </a:r>
+            <a:endParaRPr lang="en-US" sz="900" dirty="0"/>
+          </a:p>
+          <a:p>
+            <a:pPr marL="342900" indent="-342900">
+              <a:spcAft>
+                <a:spcPts val="300"/>
+              </a:spcAft>
+              <a:buSzPct val="100000"/>
+              <a:buChar char="•"/>
+            </a:pPr>
+            <a:r>
+              <a:rPr lang="en-US" sz="900" dirty="0">
+                <a:solidFill>
+                  <a:srgbClr val="334155"/>
+                </a:solidFill>
+                <a:latin typeface="Arial" pitchFamily="34" charset="0"/>
+                <a:ea typeface="Arial" pitchFamily="34" charset="-122"/>
+                <a:cs typeface="Arial" pitchFamily="34" charset="-120"/>
+              </a:rPr>
+              <a:t>清掃スタッフへの再研修実施</a:t>
+            </a:r>
+            <a:endParaRPr lang="en-US" sz="900" dirty="0"/>
+          </a:p>
+        </p:txBody>
+      </p:sp>
+      <p:sp>
+        <p:nvSpPr>
+          <p:cNvPr id="14" name="Shape 12"/>
+          <p:cNvSpPr/>
+          <p:nvPr/>
+        </p:nvSpPr>
+        <p:spPr>
+          <a:xfrm>
+            <a:off x="457200" y="3017520"/>
+            <a:ext cx="3977640" cy="1600200"/>
+          </a:xfrm>
+          <a:prstGeom prst="rect">
+            <a:avLst/>
+          </a:prstGeom>
+          <a:solidFill>
+            <a:srgbClr val="FFFFFF"/>
+          </a:solidFill>
+          <a:ln/>
+          <a:effectLst>
+            <a:outerShdw sx="100000" sy="100000" kx="0" ky="0" algn="bl" rotWithShape="0" blurRad="50800" dist="25400" dir="8100000">
+              <a:srgbClr val="000000">
+                <a:alpha val="10000"/>
+              </a:srgbClr>
+            </a:outerShdw>
+          </a:effectLst>
+        </p:spPr>
+      </p:sp>
+      <p:sp>
+        <p:nvSpPr>
+          <p:cNvPr id="15" name="Shape 13"/>
+          <p:cNvSpPr/>
+          <p:nvPr/>
+        </p:nvSpPr>
+        <p:spPr>
+          <a:xfrm>
+            <a:off x="457200" y="3017520"/>
+            <a:ext cx="54864" cy="1600200"/>
+          </a:xfrm>
+          <a:prstGeom prst="rect">
+            <a:avLst/>
+          </a:prstGeom>
+          <a:solidFill>
+            <a:srgbClr val="3B7DD8"/>
+          </a:solidFill>
+          <a:ln/>
+        </p:spPr>
+      </p:sp>
+      <p:sp>
+        <p:nvSpPr>
+          <p:cNvPr id="16" name="Text 14"/>
+          <p:cNvSpPr/>
+          <p:nvPr/>
+        </p:nvSpPr>
+        <p:spPr>
+          <a:xfrm>
+            <a:off x="594360" y="3063240"/>
+            <a:ext cx="3657600" cy="320040"/>
+          </a:xfrm>
+          <a:prstGeom prst="rect">
+            <a:avLst/>
+          </a:prstGeom>
+          <a:noFill/>
+          <a:ln/>
+        </p:spPr>
+        <p:txBody>
+          <a:bodyPr wrap="square" lIns="0" tIns="0" rIns="0" bIns="0" rtlCol="0" anchor="ctr"/>
+          <a:lstStyle/>
+          <a:p>
+            <a:pPr indent="0" marL="0">
+              <a:buNone/>
+            </a:pPr>
+            <a:r>
+              <a:rPr lang="en-US" sz="1200" b="1" dirty="0">
+                <a:solidFill>
+                  <a:srgbClr val="1A2744"/>
+                </a:solidFill>
+                <a:latin typeface="Arial" pitchFamily="34" charset="0"/>
+                <a:ea typeface="Arial" pitchFamily="34" charset="-122"/>
+                <a:cs typeface="Arial" pitchFamily="34" charset="-120"/>
+              </a:rPr>
+              <a:t>朝食サービスの改善</a:t>
+            </a:r>
+            <a:endParaRPr lang="en-US" sz="1200" dirty="0"/>
+          </a:p>
+        </p:txBody>
+      </p:sp>
+      <p:sp>
+        <p:nvSpPr>
+          <p:cNvPr id="17" name="Text 15"/>
+          <p:cNvSpPr/>
+          <p:nvPr/>
+        </p:nvSpPr>
+        <p:spPr>
+          <a:xfrm>
+            <a:off x="594360" y="3383280"/>
+            <a:ext cx="3657600" cy="1188720"/>
+          </a:xfrm>
+          <a:prstGeom prst="rect">
+            <a:avLst/>
+          </a:prstGeom>
+          <a:noFill/>
+          <a:ln/>
+        </p:spPr>
+        <p:txBody>
+          <a:bodyPr wrap="square" lIns="0" tIns="0" rIns="0" bIns="0" rtlCol="0" anchor="ctr"/>
+          <a:lstStyle/>
+          <a:p>
+            <a:pPr marL="342900" indent="-342900">
+              <a:spcAft>
+                <a:spcPts val="300"/>
+              </a:spcAft>
+              <a:buSzPct val="100000"/>
+              <a:buChar char="•"/>
+            </a:pPr>
+            <a:r>
+              <a:rPr lang="en-US" sz="900" dirty="0">
+                <a:solidFill>
+                  <a:srgbClr val="334155"/>
+                </a:solidFill>
+                <a:latin typeface="Arial" pitchFamily="34" charset="0"/>
+                <a:ea typeface="Arial" pitchFamily="34" charset="-122"/>
+                <a:cs typeface="Arial" pitchFamily="34" charset="-120"/>
+              </a:rPr>
+              <a:t>メニューの定期的な見直しとバリエーション追加</a:t>
+            </a:r>
+            <a:endParaRPr lang="en-US" sz="900" dirty="0"/>
+          </a:p>
+          <a:p>
+            <a:pPr marL="342900" indent="-342900">
+              <a:spcAft>
+                <a:spcPts val="300"/>
+              </a:spcAft>
+              <a:buSzPct val="100000"/>
+              <a:buChar char="•"/>
+            </a:pPr>
+            <a:r>
+              <a:rPr lang="en-US" sz="900" dirty="0">
+                <a:solidFill>
+                  <a:srgbClr val="334155"/>
+                </a:solidFill>
+                <a:latin typeface="Arial" pitchFamily="34" charset="0"/>
+                <a:ea typeface="Arial" pitchFamily="34" charset="-122"/>
+                <a:cs typeface="Arial" pitchFamily="34" charset="-120"/>
+              </a:rPr>
+              <a:t>補充頻度の向上と品切れ防止</a:t>
+            </a:r>
+            <a:endParaRPr lang="en-US" sz="900" dirty="0"/>
+          </a:p>
+          <a:p>
+            <a:pPr marL="342900" indent="-342900">
+              <a:spcAft>
+                <a:spcPts val="300"/>
+              </a:spcAft>
+              <a:buSzPct val="100000"/>
+              <a:buChar char="•"/>
+            </a:pPr>
+            <a:r>
+              <a:rPr lang="en-US" sz="900" dirty="0">
+                <a:solidFill>
+                  <a:srgbClr val="334155"/>
+                </a:solidFill>
+                <a:latin typeface="Arial" pitchFamily="34" charset="0"/>
+                <a:ea typeface="Arial" pitchFamily="34" charset="-122"/>
+                <a:cs typeface="Arial" pitchFamily="34" charset="-120"/>
+              </a:rPr>
+              <a:t>宿泊客数に応じた朝食準備量の最適化</a:t>
+            </a:r>
+            <a:endParaRPr lang="en-US" sz="900" dirty="0"/>
+          </a:p>
+        </p:txBody>
+      </p:sp>
+      <p:sp>
+        <p:nvSpPr>
+          <p:cNvPr id="18" name="Shape 16"/>
+          <p:cNvSpPr/>
+          <p:nvPr/>
+        </p:nvSpPr>
+        <p:spPr>
+          <a:xfrm>
+            <a:off x="4663440" y="3017520"/>
+            <a:ext cx="3977640" cy="1600200"/>
+          </a:xfrm>
+          <a:prstGeom prst="rect">
+            <a:avLst/>
+          </a:prstGeom>
+          <a:solidFill>
+            <a:srgbClr val="FFFFFF"/>
+          </a:solidFill>
+          <a:ln/>
+          <a:effectLst>
+            <a:outerShdw sx="100000" sy="100000" kx="0" ky="0" algn="bl" rotWithShape="0" blurRad="50800" dist="25400" dir="8100000">
+              <a:srgbClr val="000000">
+                <a:alpha val="10000"/>
+              </a:srgbClr>
+            </a:outerShdw>
+          </a:effectLst>
+        </p:spPr>
+      </p:sp>
+      <p:sp>
+        <p:nvSpPr>
+          <p:cNvPr id="19" name="Shape 17"/>
+          <p:cNvSpPr/>
+          <p:nvPr/>
+        </p:nvSpPr>
+        <p:spPr>
+          <a:xfrm>
+            <a:off x="4663440" y="3017520"/>
+            <a:ext cx="54864" cy="1600200"/>
+          </a:xfrm>
+          <a:prstGeom prst="rect">
+            <a:avLst/>
+          </a:prstGeom>
+          <a:solidFill>
+            <a:srgbClr val="3B7DD8"/>
+          </a:solidFill>
+          <a:ln/>
+        </p:spPr>
+      </p:sp>
+      <p:sp>
+        <p:nvSpPr>
+          <p:cNvPr id="20" name="Text 18"/>
+          <p:cNvSpPr/>
+          <p:nvPr/>
+        </p:nvSpPr>
+        <p:spPr>
+          <a:xfrm>
+            <a:off x="4800600" y="3063240"/>
+            <a:ext cx="3657600" cy="320040"/>
+          </a:xfrm>
+          <a:prstGeom prst="rect">
+            <a:avLst/>
+          </a:prstGeom>
+          <a:noFill/>
+          <a:ln/>
+        </p:spPr>
+        <p:txBody>
+          <a:bodyPr wrap="square" lIns="0" tIns="0" rIns="0" bIns="0" rtlCol="0" anchor="ctr"/>
+          <a:lstStyle/>
+          <a:p>
+            <a:pPr indent="0" marL="0">
+              <a:buNone/>
+            </a:pPr>
+            <a:r>
+              <a:rPr lang="en-US" sz="1200" b="1" dirty="0">
+                <a:solidFill>
+                  <a:srgbClr val="1A2744"/>
+                </a:solidFill>
+                <a:latin typeface="Arial" pitchFamily="34" charset="0"/>
+                <a:ea typeface="Arial" pitchFamily="34" charset="-122"/>
+                <a:cs typeface="Arial" pitchFamily="34" charset="-120"/>
+              </a:rPr>
               <a:t>エアコン・空調の定期点検強化</a:t>
             </a:r>
             <a:endParaRPr lang="en-US" sz="1200" dirty="0"/>
@@ -15082,13 +15972,13 @@
       </p:sp>
       <p:sp>
         <p:nvSpPr>
-          <p:cNvPr id="13" name="Text 11"/>
-          <p:cNvSpPr/>
-          <p:nvPr/>
-        </p:nvSpPr>
-        <p:spPr>
-          <a:xfrm>
-            <a:off x="4800600" y="1600200"/>
+          <p:cNvPr id="21" name="Text 19"/>
+          <p:cNvSpPr/>
+          <p:nvPr/>
+        </p:nvSpPr>
+        <p:spPr>
+          <a:xfrm>
+            <a:off x="4800600" y="3383280"/>
             <a:ext cx="3657600" cy="1188720"/>
           </a:xfrm>
           <a:prstGeom prst="rect">
@@ -15167,178 +16057,7 @@
       </p:sp>
       <p:sp>
         <p:nvSpPr>
-          <p:cNvPr id="14" name="Shape 12"/>
-          <p:cNvSpPr/>
-          <p:nvPr/>
-        </p:nvSpPr>
-        <p:spPr>
-          <a:xfrm>
-            <a:off x="457200" y="3017520"/>
-            <a:ext cx="3977640" cy="1600200"/>
-          </a:xfrm>
-          <a:prstGeom prst="rect">
-            <a:avLst/>
-          </a:prstGeom>
-          <a:solidFill>
-            <a:srgbClr val="FFFFFF"/>
-          </a:solidFill>
-          <a:ln/>
-          <a:effectLst>
-            <a:outerShdw sx="100000" sy="100000" kx="0" ky="0" algn="bl" rotWithShape="0" blurRad="50800" dist="25400" dir="8100000">
-              <a:srgbClr val="000000">
-                <a:alpha val="10000"/>
-              </a:srgbClr>
-            </a:outerShdw>
-          </a:effectLst>
-        </p:spPr>
-      </p:sp>
-      <p:sp>
-        <p:nvSpPr>
-          <p:cNvPr id="15" name="Shape 13"/>
-          <p:cNvSpPr/>
-          <p:nvPr/>
-        </p:nvSpPr>
-        <p:spPr>
-          <a:xfrm>
-            <a:off x="457200" y="3017520"/>
-            <a:ext cx="54864" cy="1600200"/>
-          </a:xfrm>
-          <a:prstGeom prst="rect">
-            <a:avLst/>
-          </a:prstGeom>
-          <a:solidFill>
-            <a:srgbClr val="3B7DD8"/>
-          </a:solidFill>
-          <a:ln/>
-        </p:spPr>
-      </p:sp>
-      <p:sp>
-        <p:nvSpPr>
-          <p:cNvPr id="16" name="Text 14"/>
-          <p:cNvSpPr/>
-          <p:nvPr/>
-        </p:nvSpPr>
-        <p:spPr>
-          <a:xfrm>
-            <a:off x="594360" y="3063240"/>
-            <a:ext cx="3657600" cy="320040"/>
-          </a:xfrm>
-          <a:prstGeom prst="rect">
-            <a:avLst/>
-          </a:prstGeom>
-          <a:noFill/>
-          <a:ln/>
-        </p:spPr>
-        <p:txBody>
-          <a:bodyPr wrap="square" lIns="0" tIns="0" rIns="0" bIns="0" rtlCol="0" anchor="ctr"/>
-          <a:lstStyle/>
-          <a:p>
-            <a:pPr indent="0" marL="0">
-              <a:buNone/>
-            </a:pPr>
-            <a:r>
-              <a:rPr lang="en-US" sz="1200" b="1" dirty="0">
-                <a:solidFill>
-                  <a:srgbClr val="1A2744"/>
-                </a:solidFill>
-                <a:latin typeface="Arial" pitchFamily="34" charset="0"/>
-                <a:ea typeface="Arial" pitchFamily="34" charset="-122"/>
-                <a:cs typeface="Arial" pitchFamily="34" charset="-120"/>
-              </a:rPr>
-              <a:t>スタッフ対応品質の統一</a:t>
-            </a:r>
-            <a:endParaRPr lang="en-US" sz="1200" dirty="0"/>
-          </a:p>
-        </p:txBody>
-      </p:sp>
-      <p:sp>
-        <p:nvSpPr>
-          <p:cNvPr id="17" name="Text 15"/>
-          <p:cNvSpPr/>
-          <p:nvPr/>
-        </p:nvSpPr>
-        <p:spPr>
-          <a:xfrm>
-            <a:off x="594360" y="3383280"/>
-            <a:ext cx="3657600" cy="1188720"/>
-          </a:xfrm>
-          <a:prstGeom prst="rect">
-            <a:avLst/>
-          </a:prstGeom>
-          <a:noFill/>
-          <a:ln/>
-        </p:spPr>
-        <p:txBody>
-          <a:bodyPr wrap="square" lIns="0" tIns="0" rIns="0" bIns="0" rtlCol="0" anchor="ctr"/>
-          <a:lstStyle/>
-          <a:p>
-            <a:pPr marL="342900" indent="-342900">
-              <a:spcAft>
-                <a:spcPts val="300"/>
-              </a:spcAft>
-              <a:buSzPct val="100000"/>
-              <a:buChar char="•"/>
-            </a:pPr>
-            <a:r>
-              <a:rPr lang="en-US" sz="900" dirty="0">
-                <a:solidFill>
-                  <a:srgbClr val="334155"/>
-                </a:solidFill>
-                <a:latin typeface="Arial" pitchFamily="34" charset="0"/>
-                <a:ea typeface="Arial" pitchFamily="34" charset="-122"/>
-                <a:cs typeface="Arial" pitchFamily="34" charset="-120"/>
-              </a:rPr>
-              <a:t>接客マニュアルの見直しと全スタッフへの周知</a:t>
-            </a:r>
-            <a:endParaRPr lang="en-US" sz="900" dirty="0"/>
-          </a:p>
-          <a:p>
-            <a:pPr marL="342900" indent="-342900">
-              <a:spcAft>
-                <a:spcPts val="300"/>
-              </a:spcAft>
-              <a:buSzPct val="100000"/>
-              <a:buChar char="•"/>
-            </a:pPr>
-            <a:r>
-              <a:rPr lang="en-US" sz="900" dirty="0">
-                <a:solidFill>
-                  <a:srgbClr val="334155"/>
-                </a:solidFill>
-                <a:latin typeface="Arial" pitchFamily="34" charset="0"/>
-                <a:ea typeface="Arial" pitchFamily="34" charset="-122"/>
-                <a:cs typeface="Arial" pitchFamily="34" charset="-120"/>
-              </a:rPr>
-              <a:t>ゲストからのクレーム対応フローの明確化</a:t>
-            </a:r>
-            <a:endParaRPr lang="en-US" sz="900" dirty="0"/>
-          </a:p>
-          <a:p>
-            <a:pPr marL="342900" indent="-342900">
-              <a:spcAft>
-                <a:spcPts val="300"/>
-              </a:spcAft>
-              <a:buSzPct val="100000"/>
-              <a:buChar char="•"/>
-            </a:pPr>
-            <a:r>
-              <a:rPr lang="en-US" sz="900" dirty="0">
-                <a:solidFill>
-                  <a:srgbClr val="334155"/>
-                </a:solidFill>
-                <a:latin typeface="Arial" pitchFamily="34" charset="0"/>
-                <a:ea typeface="Arial" pitchFamily="34" charset="-122"/>
-                <a:cs typeface="Arial" pitchFamily="34" charset="-120"/>
-              </a:rPr>
-              <a:t>定期的なCS研修の実施</a:t>
-            </a:r>
-            <a:endParaRPr lang="en-US" sz="900" dirty="0"/>
-          </a:p>
-        </p:txBody>
-      </p:sp>
-      <p:sp>
-        <p:nvSpPr>
-          <p:cNvPr id="18" name="Shape 16"/>
+          <p:cNvPr id="22" name="Shape 20"/>
           <p:cNvSpPr/>
           <p:nvPr/>
         </p:nvSpPr>
@@ -15358,7 +16077,7 @@
       </p:sp>
       <p:sp>
         <p:nvSpPr>
-          <p:cNvPr id="19" name="Text 17"/>
+          <p:cNvPr id="23" name="Text 21"/>
           <p:cNvSpPr/>
           <p:nvPr/>
         </p:nvSpPr>
@@ -15397,7 +16116,7 @@
       </p:sp>
       <p:sp>
         <p:nvSpPr>
-          <p:cNvPr id="20" name="Text 18"/>
+          <p:cNvPr id="24" name="Text 22"/>
           <p:cNvSpPr/>
           <p:nvPr/>
         </p:nvSpPr>

--- a/納品レポート/ホテル別レポート/hearton_口コミ分析レポート.pptx
+++ b/納品レポート/ホテル別レポート/hearton_口コミ分析レポート.pptx
@@ -2767,7 +2767,7 @@
                 <a:ea typeface="Arial" pitchFamily="34" charset="-122"/>
                 <a:cs typeface="Arial" pitchFamily="34" charset="-120"/>
               </a:rPr>
-              <a:t>作成日：2026年4月10日</a:t>
+              <a:t>作成日：2026年4月11日</a:t>
             </a:r>
             <a:endParaRPr lang="en-US" sz="1000" dirty="0"/>
           </a:p>

--- a/納品レポート/ホテル別レポート/hearton_口コミ分析レポート.pptx
+++ b/納品レポート/ホテル別レポート/hearton_口コミ分析レポート.pptx
@@ -2767,7 +2767,7 @@
                 <a:ea typeface="Arial" pitchFamily="34" charset="-122"/>
                 <a:cs typeface="Arial" pitchFamily="34" charset="-120"/>
               </a:rPr>
-              <a:t>作成日：2026年4月11日</a:t>
+              <a:t>作成日：2026年4月13日</a:t>
             </a:r>
             <a:endParaRPr lang="en-US" sz="1000" dirty="0"/>
           </a:p>

--- a/納品レポート/ホテル別レポート/hearton_口コミ分析レポート.pptx
+++ b/納品レポート/ホテル別レポート/hearton_口コミ分析レポート.pptx
@@ -2767,7 +2767,7 @@
                 <a:ea typeface="Arial" pitchFamily="34" charset="-122"/>
                 <a:cs typeface="Arial" pitchFamily="34" charset="-120"/>
               </a:rPr>
-              <a:t>作成日：2026年4月13日</a:t>
+              <a:t>作成日：2026年4月15日</a:t>
             </a:r>
             <a:endParaRPr lang="en-US" sz="1000" dirty="0"/>
           </a:p>

--- a/納品レポート/ホテル別レポート/hearton_口コミ分析レポート.pptx
+++ b/納品レポート/ホテル別レポート/hearton_口コミ分析レポート.pptx
@@ -2767,7 +2767,7 @@
                 <a:ea typeface="Arial" pitchFamily="34" charset="-122"/>
                 <a:cs typeface="Arial" pitchFamily="34" charset="-120"/>
               </a:rPr>
-              <a:t>作成日：2026年4月16日</a:t>
+              <a:t>作成日：2026年4月20日</a:t>
             </a:r>
             <a:endParaRPr lang="en-US" sz="1000" dirty="0"/>
           </a:p>

--- a/納品レポート/ホテル別レポート/hearton_口コミ分析レポート.pptx
+++ b/納品レポート/ホテル別レポート/hearton_口コミ分析レポート.pptx
@@ -2685,7 +2685,7 @@
                 <a:ea typeface="Arial" pitchFamily="34" charset="-122"/>
                 <a:cs typeface="Arial" pitchFamily="34" charset="-120"/>
               </a:rPr>
-              <a:t>ハートンホテル東品川</a:t>
+              <a:t>ホテルハートン</a:t>
             </a:r>
             <a:endParaRPr lang="en-US" sz="1600" dirty="0"/>
           </a:p>
@@ -2767,7 +2767,7 @@
                 <a:ea typeface="Arial" pitchFamily="34" charset="-122"/>
                 <a:cs typeface="Arial" pitchFamily="34" charset="-120"/>
               </a:rPr>
-              <a:t>作成日：2026年4月20日</a:t>
+              <a:t>作成日：2026年4月21日</a:t>
             </a:r>
             <a:endParaRPr lang="en-US" sz="1000" dirty="0"/>
           </a:p>

--- a/納品レポート/ホテル別レポート/hearton_口コミ分析レポート.pptx
+++ b/納品レポート/ホテル別レポート/hearton_口コミ分析レポート.pptx
@@ -2685,7 +2685,7 @@
                 <a:ea typeface="Arial" pitchFamily="34" charset="-122"/>
                 <a:cs typeface="Arial" pitchFamily="34" charset="-120"/>
               </a:rPr>
-              <a:t>ホテルハートン</a:t>
+              <a:t>ハートンホテル東品川</a:t>
             </a:r>
             <a:endParaRPr lang="en-US" sz="1600" dirty="0"/>
           </a:p>
@@ -2767,7 +2767,7 @@
                 <a:ea typeface="Arial" pitchFamily="34" charset="-122"/>
                 <a:cs typeface="Arial" pitchFamily="34" charset="-120"/>
               </a:rPr>
-              <a:t>作成日：2026年4月21日</a:t>
+              <a:t>作成日：2026年4月22日</a:t>
             </a:r>
             <a:endParaRPr lang="en-US" sz="1000" dirty="0"/>
           </a:p>
